--- a/downloads/presentations/modules/exe-410.pptx
+++ b/downloads/presentations/modules/exe-410.pptx
@@ -614,7 +614,8 @@
               <a:t>Technical and Governance Deep Dive
 A useful portfolio strategy begins with categories. Agencies can classify AI opportunities by function, such as internal productivity, knowledge management, surveillance support, decision support, communication, automation, research, or public-facing service. They can also classify by risk, such as low, moderate, high, or prohibited. These categories help leadership understand where AI activity is concentrated and whether the portfolio reflects agency priorities.
 Prioritization criteria should include mission alignment, expected public health benefit, workflow burden reduction, data readiness, legal authority, privacy sensitivity, equity impact, technical feasibility, implementation complexity, vendor dependency, cost, sustainability, and monitoring feasibility. A use case with high potential benefit but weak data readiness may be deferred until modernization work improves. A use case with moderate benefit and low risk may be an appropriate early pilot.
-Portfolio governance should include regular review. Some use cases should move from idea to pilot, from pilot to operational use, or from operational use to retirement. Others should be stopped because they lack value, create unacceptable risk, duplicate another effort, or depend on unsustainable funding. A living portfolio helps leadership make these decisions transparently.</a:t>
+Portfolio governance should include regular review. Some use cases should move from idea to pilot, from pilot to operational use, or from operational use to retirement. Others should be stopped because they lack value, create unacceptable risk, duplicate another effort, or depend on unsustainable funding. A living portfolio helps leadership make these decisions transparently.
+Application guidance: Translate this concept into clear decision rights, review steps, documentation expectations, and escalation paths before an AI-supported workflow is approved.</a:t>
             </a:r>
             <a:endParaRPr lang="en-US" dirty="0"/>
           </a:p>
@@ -704,7 +705,8 @@
               <a:rPr lang="en-US" dirty="0"/>
               <a:t>Risks, Failure Modes, and Guardrails
 A major risk is pilot proliferation. Agencies may launch many small AI pilots without a pathway to scale, evaluate, sustain, or retire them. A guardrail is to require every pilot to define success criteria, evaluation evidence, funding assumptions, and an end point.
-Another risk is inequitable prioritization. Projects serving better-resourced programs may advance faster than projects addressing underserved communities. A guardrail is to include equity impact and community benefit in the prioritization rubric.</a:t>
+Another risk is inequitable prioritization. Projects serving better-resourced programs may advance faster than projects addressing underserved communities. A guardrail is to include equity impact and community benefit in the prioritization rubric.
+Application guidance: Identify what could go wrong, who could be affected, what safeguards are needed, and what evidence should be reviewed before use expands.</a:t>
             </a:r>
             <a:endParaRPr lang="en-US" dirty="0"/>
           </a:p>
@@ -793,7 +795,8 @@
             <a:r>
               <a:rPr lang="en-US" dirty="0"/>
               <a:t>Application to AI-Supported Workflows
-Generative AI projects may be prioritized for internal knowledge management before public-facing use. Predictive analytics projects may be prioritized only when data and validation plans are mature. Agentic workflows may be deferred until governance has defined decision rights, access controls, and rollback procedures. Portfolio strategy helps leaders sequence AI adoption responsibly.</a:t>
+Generative AI projects may be prioritized for internal knowledge management before public-facing use. Predictive analytics projects may be prioritized only when data and validation plans are mature. Agentic workflows may be deferred until governance has defined decision rights, access controls, and rollback procedures. Portfolio strategy helps leaders sequence AI adoption responsibly.
+Application guidance: Use the concept to clarify workflow changes, dependencies, staffing, procurement requirements, training needs, and implementation checkpoints.</a:t>
             </a:r>
             <a:endParaRPr lang="en-US" dirty="0"/>
           </a:p>
@@ -884,7 +887,8 @@
               <a:t>Reflection Questions
 Which current or proposed AI use case in your agency raises this leadership or governance issue most clearly?
 Who currently has authority to make decisions about this issue, and is that authority documented?
-What evidence would governance or leadership need before approving the use case?</a:t>
+What evidence would governance or leadership need before approving the use case?
+Application guidance: Connect the concept to public health purpose, responsible use, required safeguards, documentation, and the next action a department should take.</a:t>
             </a:r>
             <a:endParaRPr lang="en-US" dirty="0"/>
           </a:p>
@@ -974,7 +978,8 @@
               <a:rPr lang="en-US" dirty="0"/>
               <a:t>Reflection Questions
 Which staff, partners, or communities would be affected if this issue were handled poorly?
-What policy, process, or artifact should be created or updated after this module?</a:t>
+What policy, process, or artifact should be created or updated after this module?
+Application guidance: Connect the concept to public health purpose, responsible use, required safeguards, documentation, and the next action a department should take.</a:t>
             </a:r>
             <a:endParaRPr lang="en-US" dirty="0"/>
           </a:p>
@@ -1063,7 +1068,8 @@
             <a:r>
               <a:rPr lang="en-US" dirty="0"/>
               <a:t>Practical Exercise
-Develop an AI use case prioritization rubric with criteria, scoring levels, required evidence, and decision categories such as pursue, pilot, redesign, defer, or reject.</a:t>
+Develop an AI use case prioritization rubric with criteria, scoring levels, required evidence, and decision categories such as pursue, pilot, redesign, defer, or reject.
+Application guidance: Use the assignment to test whether you can explain the concept, apply it to a realistic public health situation, and identify what would need review before the work moves forward.</a:t>
             </a:r>
             <a:endParaRPr lang="en-US" dirty="0"/>
           </a:p>
@@ -1152,7 +1158,8 @@
             <a:r>
               <a:rPr lang="en-US" dirty="0"/>
               <a:t>Before You Begin
-Choose a real or realistic public health AI use case. Document assumptions, unresolved questions, and which agency roles would need to review the artifact before it is adopted. The exercise should produce a work product that could support governance review, leadership discussion, implementation planning, or policy development.</a:t>
+Choose a real or realistic public health AI use case. Document assumptions, unresolved questions, and which agency roles would need to review the artifact before it is adopted. The exercise should produce a work product that could support governance review, leadership discussion, implementation planning, or policy development.
+Application guidance: Connect the concept to public health purpose, responsible use, required safeguards, documentation, and the next action a department should take.</a:t>
             </a:r>
             <a:endParaRPr lang="en-US" dirty="0"/>
           </a:p>
@@ -1241,7 +1248,8 @@
             <a:r>
               <a:rPr lang="en-US" dirty="0"/>
               <a:t>Expected Artifact or Evidence
-Use case intake form; prioritization rubric; sample portfolio view; decision category definitions.</a:t>
+Use case intake form; prioritization rubric; sample portfolio view; decision category definitions.
+Application guidance: Connect the concept to public health purpose, responsible use, required safeguards, documentation, and the next action a department should take.</a:t>
             </a:r>
             <a:endParaRPr lang="en-US" dirty="0"/>
           </a:p>
@@ -1330,7 +1338,8 @@
             <a:r>
               <a:rPr lang="en-US" dirty="0"/>
               <a:t>Expected Assignment
-Use case intake form; prioritization rubric; sample portfolio view; decision category definitions.</a:t>
+Use case intake form; prioritization rubric; sample portfolio view; decision category definitions.
+Application guidance: Use the assignment to test whether you can explain the concept, apply it to a realistic public health situation, and identify what would need review before the work moves forward.</a:t>
             </a:r>
             <a:endParaRPr lang="en-US" dirty="0"/>
           </a:p>
@@ -1423,7 +1432,8 @@
 2. Which practice best supports accountable public health AI governance?
 3. When should an AI use case be escalated for leadership or governance review?
 4. What is weak evidence of completion for a leadership and governance module?
-5. What should leaders do when an AI use case has meaningful benefits but unresolved risks?</a:t>
+5. What should leaders do when an AI use case has meaningful benefits but unresolved risks?
+Application guidance: Use the assignment to test whether you can explain the concept, apply it to a realistic public health situation, and identify what would need review before the work moves forward.</a:t>
             </a:r>
             <a:endParaRPr lang="en-US" dirty="0"/>
           </a:p>
@@ -1608,7 +1618,8 @@
 NIST Generative AI Profile: https://www.nist.gov/publications/artificial-intelligence-risk-management-framework-generative-artificial-intelligence
 NIST Privacy Framework
 CDC Public Health Data Strategy and Data Modernization resources: https://www.cdc.gov/public-health-data-strategy/php/about/index.html
-WHO Ethics and Governance of Artificial Intelligence for Health: https://www.who.int/publications/i/item/9789240029200</a:t>
+WHO Ethics and Governance of Artificial Intelligence for Health: https://www.who.int/publications/i/item/9789240029200
+Application guidance: Connect the concept to public health purpose, responsible use, required safeguards, documentation, and the next action a department should take.</a:t>
             </a:r>
             <a:endParaRPr lang="en-US" dirty="0"/>
           </a:p>
@@ -1698,7 +1709,8 @@
               <a:rPr lang="en-US" dirty="0"/>
               <a:t>References and Resources
 OMB Memorandum M-24-10 on federal AI governance, risk management, and innovation, where relevant to public-sector governance models
-Agency strategic plans, procurement policies, privacy policies, cybersecurity policies, records policies, and equity plans</a:t>
+Agency strategic plans, procurement policies, privacy policies, cybersecurity policies, records policies, and equity plans
+Application guidance: Connect the concept to public health purpose, responsible use, required safeguards, documentation, and the next action a department should take.</a:t>
             </a:r>
             <a:endParaRPr lang="en-US" dirty="0"/>
           </a:p>
@@ -1977,7 +1989,8 @@
 Develop criteria for prioritizing AI use cases based on public health value, readiness, risk, and sustainability.
 Identify use cases that should be pursued, piloted, deferred, redesigned, or rejected.
 Create a portfolio view that balances innovation, risk, equity, and operational capacity.
-Produce a use case prioritization rubric for governance or leadership review.</a:t>
+Produce a use case prioritization rubric for governance or leadership review.
+Application guidance: Use the assignment to test whether you can explain the concept, apply it to a realistic public health situation, and identify what would need review before the work moves forward.</a:t>
             </a:r>
             <a:endParaRPr lang="en-US" dirty="0"/>
           </a:p>
@@ -2067,7 +2080,8 @@
               <a:rPr lang="en-US" dirty="0"/>
               <a:t>Module Overview
 AI opportunities can quickly exceed an agency's capacity to evaluate, implement, and sustain them. Leaders need a portfolio strategy that helps distinguish high-value public health uses from attractive but low-impact experiments. A portfolio approach organizes AI opportunities across programs, risk levels, readiness, equity impact, technical feasibility, expected benefit, and sustainability needs.
-This module teaches leaders how to create an AI use case intake and prioritization process. The module emphasizes that prioritization should not be based only on novelty or vendor availability. It should be based on mission alignment, public health value, data readiness, workflow fit, risk, equity, staff capacity, cost, and the ability to monitor and sustain the use case over time.</a:t>
+This module teaches leaders how to create an AI use case intake and prioritization process. The module emphasizes that prioritization should not be based only on novelty or vendor availability. It should be based on mission alignment, public health value, data readiness, workflow fit, risk, equity, staff capacity, cost, and the ability to monitor and sustain the use case over time.
+Application guidance: Connect the concept to public health purpose, responsible use, required safeguards, documentation, and the next action a department should take.</a:t>
             </a:r>
             <a:endParaRPr lang="en-US" dirty="0"/>
           </a:p>
@@ -2156,7 +2170,8 @@
             <a:r>
               <a:rPr lang="en-US" dirty="0"/>
               <a:t>Jurisdiction and Agency Policy Note
-This national-level module is intended for training and planning purposes. It does not replace legal, privacy, procurement, civil rights, records, or agency policy review. Learners should confirm applicable requirements in their own jurisdiction and organization before implementing AI-supported workflows.</a:t>
+This national-level module is intended for training and planning purposes. It does not replace legal, privacy, procurement, civil rights, records, or agency policy review. Learners should confirm applicable requirements in their own jurisdiction and organization before implementing AI-supported workflows.
+Application guidance: Translate this concept into clear decision rights, review steps, documentation expectations, and escalation paths before an AI-supported workflow is approved.</a:t>
             </a:r>
             <a:endParaRPr lang="en-US" dirty="0"/>
           </a:p>
@@ -2246,7 +2261,8 @@
               <a:rPr lang="en-US" dirty="0"/>
               <a:t>Why This Topic Matters for Public Health AI
 Public health agencies have many possible AI use cases: summarizing case notes, analyzing call logs, drafting messages, identifying data quality gaps, forecasting demand, prioritizing inspections, supporting grants, and improving knowledge management. Without a portfolio strategy, agencies may choose projects because they are visible, easy to demonstrate, or championed by a strong vendor rather than because they advance the public health mission.
-A portfolio strategy protects scarce capacity. Technical teams, privacy officers, legal counsel, procurement staff, program leaders, and data stewards cannot review every idea at the same intensity. Prioritization helps the agency focus deep review on use cases with meaningful benefit and material risk while creating faster pathways for low-risk internal productivity uses.</a:t>
+A portfolio strategy protects scarce capacity. Technical teams, privacy officers, legal counsel, procurement staff, program leaders, and data stewards cannot review every idea at the same intensity. Prioritization helps the agency focus deep review on use cases with meaningful benefit and material risk while creating faster pathways for low-risk internal productivity uses.
+Application guidance: Connect the concept to public health purpose, responsible use, required safeguards, documentation, and the next action a department should take.</a:t>
             </a:r>
             <a:endParaRPr lang="en-US" dirty="0"/>
           </a:p>
@@ -2336,7 +2352,8 @@
               <a:rPr lang="en-US" dirty="0"/>
               <a:t>Public Health Example
 A health department receives proposals for five AI uses: a public chatbot, a staff policy assistant, an outbreak signal detection model, a vendor tool to summarize eCRs, and an internal tool to draft grant narratives. Each proposal has different benefits and risks. A public chatbot may be visible but high-risk if it gives health advice. A staff policy assistant may be lower risk if it uses approved internal documents. An outbreak model may be valuable but require strong data quality and validation.
-A portfolio review allows the agency to compare these proposals systematically. The agency may approve a low-risk internal pilot, defer the chatbot until public communication safeguards are developed, require validation planning for the outbreak model, and move the eCR summarization tool into deeper technical review. The result is a balanced portfolio rather than a series of disconnected decisions.</a:t>
+A portfolio review allows the agency to compare these proposals systematically. The agency may approve a low-risk internal pilot, defer the chatbot until public communication safeguards are developed, require validation planning for the outbreak model, and move the eCR summarization tool into deeper technical review. The result is a balanced portfolio rather than a series of disconnected decisions.
+Application guidance: Connect the concept to public health purpose, responsible use, required safeguards, documentation, and the next action a department should take.</a:t>
             </a:r>
             <a:endParaRPr lang="en-US" dirty="0"/>
           </a:p>
@@ -3107,8 +3124,8 @@
         </p:nvSpPr>
         <p:spPr>
           <a:xfrm>
-            <a:off x="9966960" y="6537960"/>
-            <a:ext cx="1645920" cy="201168"/>
+            <a:off x="9646920" y="6537960"/>
+            <a:ext cx="1965960" cy="201168"/>
           </a:xfrm>
           <a:prstGeom prst="rect">
             <a:avLst/>
@@ -3132,7 +3149,7 @@
                 <a:ea typeface="Aptos" pitchFamily="34" charset="-122"/>
                 <a:cs typeface="Aptos" pitchFamily="34" charset="-120"/>
               </a:rPr>
-              <a:t>Â© Paula Soper</a:t>
+              <a:t>Copyright Paula Soper</a:t>
             </a:r>
             <a:endParaRPr lang="en-US" sz="800" dirty="0"/>
           </a:p>
@@ -3179,14 +3196,257 @@
       </p:sp>
       <p:sp>
         <p:nvSpPr>
-          <p:cNvPr id="8" name="Shape 6"/>
+          <p:cNvPr id="8" name="Text 6"/>
           <p:cNvSpPr/>
           <p:nvPr/>
         </p:nvSpPr>
         <p:spPr>
           <a:xfrm>
             <a:off x="640080" y="658368"/>
-            <a:ext cx="420624" cy="420624"/>
+            <a:ext cx="10881360" cy="713232"/>
+          </a:xfrm>
+          <a:prstGeom prst="rect">
+            <a:avLst/>
+          </a:prstGeom>
+          <a:noFill/>
+          <a:ln/>
+        </p:spPr>
+        <p:txBody>
+          <a:bodyPr wrap="square" lIns="0" tIns="0" rIns="0" bIns="0" rtlCol="0" anchor="ctr">
+            <a:normAutofit/>
+          </a:bodyPr>
+          <a:lstStyle/>
+          <a:p>
+            <a:pPr indent="0" marL="0">
+              <a:buNone/>
+            </a:pPr>
+            <a:r>
+              <a:rPr lang="en-US" sz="3400" b="1" dirty="0">
+                <a:solidFill>
+                  <a:srgbClr val="003A63"/>
+                </a:solidFill>
+                <a:latin typeface="Aptos Display" pitchFamily="34" charset="0"/>
+                <a:ea typeface="Aptos Display" pitchFamily="34" charset="-122"/>
+                <a:cs typeface="Aptos Display" pitchFamily="34" charset="-120"/>
+              </a:rPr>
+              <a:t>Technical and Governance Deep Dive</a:t>
+            </a:r>
+            <a:endParaRPr lang="en-US" sz="3400" dirty="0"/>
+          </a:p>
+        </p:txBody>
+      </p:sp>
+      <p:sp>
+        <p:nvSpPr>
+          <p:cNvPr id="9" name="Text 7"/>
+          <p:cNvSpPr/>
+          <p:nvPr/>
+        </p:nvSpPr>
+        <p:spPr>
+          <a:xfrm>
+            <a:off x="868680" y="1508760"/>
+            <a:ext cx="6309360" cy="4160520"/>
+          </a:xfrm>
+          <a:prstGeom prst="rect">
+            <a:avLst/>
+          </a:prstGeom>
+          <a:noFill/>
+          <a:ln/>
+        </p:spPr>
+        <p:txBody>
+          <a:bodyPr wrap="square" lIns="635" tIns="635" rIns="635" bIns="635" rtlCol="0" anchor="t">
+            <a:normAutofit/>
+          </a:bodyPr>
+          <a:lstStyle/>
+          <a:p>
+            <a:r>
+              <a:rPr lang="en-US" sz="2100" dirty="0">
+                <a:solidFill>
+                  <a:srgbClr val="17364A"/>
+                </a:solidFill>
+                <a:latin typeface="Aptos" pitchFamily="34" charset="0"/>
+                <a:ea typeface="Aptos" pitchFamily="34" charset="-122"/>
+                <a:cs typeface="Aptos" pitchFamily="34" charset="-120"/>
+              </a:rPr>
+              <a:t>A useful portfolio strategy begins with categories.</a:t>
+            </a:r>
+            <a:endParaRPr lang="en-US" sz="2100" dirty="0"/>
+          </a:p>
+          <a:p>
+            <a:r>
+              <a:rPr lang="en-US" sz="2100" dirty="0">
+                <a:solidFill>
+                  <a:srgbClr val="17364A"/>
+                </a:solidFill>
+                <a:latin typeface="Aptos" pitchFamily="34" charset="0"/>
+                <a:ea typeface="Aptos" pitchFamily="34" charset="-122"/>
+                <a:cs typeface="Aptos" pitchFamily="34" charset="-120"/>
+              </a:rPr>
+              <a:t>Agencies can classify AI opportunities by function, such as internal productivity, knowledge.</a:t>
+            </a:r>
+            <a:endParaRPr lang="en-US" sz="2100" dirty="0"/>
+          </a:p>
+          <a:p>
+            <a:r>
+              <a:rPr lang="en-US" sz="2100" dirty="0">
+                <a:solidFill>
+                  <a:srgbClr val="17364A"/>
+                </a:solidFill>
+                <a:latin typeface="Aptos" pitchFamily="34" charset="0"/>
+                <a:ea typeface="Aptos" pitchFamily="34" charset="-122"/>
+                <a:cs typeface="Aptos" pitchFamily="34" charset="-120"/>
+              </a:rPr>
+              <a:t>They can also classify by risk, such as low, moderate, high, or prohibited.</a:t>
+            </a:r>
+            <a:endParaRPr lang="en-US" sz="2100" dirty="0"/>
+          </a:p>
+        </p:txBody>
+      </p:sp>
+      <p:sp>
+        <p:nvSpPr>
+          <p:cNvPr id="10" name="Shape 8"/>
+          <p:cNvSpPr/>
+          <p:nvPr/>
+        </p:nvSpPr>
+        <p:spPr>
+          <a:xfrm>
+            <a:off x="7635240" y="1325880"/>
+            <a:ext cx="3474720" cy="1325880"/>
+          </a:xfrm>
+          <a:prstGeom prst="roundRect">
+            <a:avLst>
+              <a:gd name="adj" fmla="val 8276"/>
+            </a:avLst>
+          </a:prstGeom>
+          <a:solidFill>
+            <a:srgbClr val="EEF8ED"/>
+          </a:solidFill>
+          <a:ln w="12700">
+            <a:solidFill>
+              <a:srgbClr val="B9D7E6"/>
+            </a:solidFill>
+            <a:prstDash val="solid"/>
+          </a:ln>
+        </p:spPr>
+      </p:sp>
+      <p:sp>
+        <p:nvSpPr>
+          <p:cNvPr id="11" name="Text 9"/>
+          <p:cNvSpPr/>
+          <p:nvPr/>
+        </p:nvSpPr>
+        <p:spPr>
+          <a:xfrm>
+            <a:off x="7799832" y="1472184"/>
+            <a:ext cx="3145536" cy="256032"/>
+          </a:xfrm>
+          <a:prstGeom prst="rect">
+            <a:avLst/>
+          </a:prstGeom>
+          <a:noFill/>
+          <a:ln/>
+        </p:spPr>
+        <p:txBody>
+          <a:bodyPr wrap="square" lIns="0" tIns="0" rIns="0" bIns="0" rtlCol="0" anchor="ctr"/>
+          <a:lstStyle/>
+          <a:p>
+            <a:pPr indent="0" marL="0">
+              <a:buNone/>
+            </a:pPr>
+            <a:r>
+              <a:rPr lang="en-US" sz="1300" b="1" dirty="0">
+                <a:solidFill>
+                  <a:srgbClr val="0068B7"/>
+                </a:solidFill>
+                <a:latin typeface="Aptos" pitchFamily="34" charset="0"/>
+                <a:ea typeface="Aptos" pitchFamily="34" charset="-122"/>
+                <a:cs typeface="Aptos" pitchFamily="34" charset="-120"/>
+              </a:rPr>
+              <a:t>Governance lens</a:t>
+            </a:r>
+            <a:endParaRPr lang="en-US" sz="1300" dirty="0"/>
+          </a:p>
+        </p:txBody>
+      </p:sp>
+      <p:sp>
+        <p:nvSpPr>
+          <p:cNvPr id="12" name="Text 10"/>
+          <p:cNvSpPr/>
+          <p:nvPr/>
+        </p:nvSpPr>
+        <p:spPr>
+          <a:xfrm>
+            <a:off x="7799832" y="1828800"/>
+            <a:ext cx="3145536" cy="685800"/>
+          </a:xfrm>
+          <a:prstGeom prst="rect">
+            <a:avLst/>
+          </a:prstGeom>
+          <a:noFill/>
+          <a:ln/>
+        </p:spPr>
+        <p:txBody>
+          <a:bodyPr wrap="square" lIns="0" tIns="0" rIns="0" bIns="0" rtlCol="0" anchor="t">
+            <a:normAutofit/>
+          </a:bodyPr>
+          <a:lstStyle/>
+          <a:p>
+            <a:pPr indent="0" marL="0">
+              <a:buNone/>
+            </a:pPr>
+            <a:r>
+              <a:rPr lang="en-US" sz="1550" dirty="0">
+                <a:solidFill>
+                  <a:srgbClr val="17364A"/>
+                </a:solidFill>
+                <a:latin typeface="Aptos" pitchFamily="34" charset="0"/>
+                <a:ea typeface="Aptos" pitchFamily="34" charset="-122"/>
+                <a:cs typeface="Aptos" pitchFamily="34" charset="-120"/>
+              </a:rPr>
+              <a:t>A useful portfolio strategy begins with categories.</a:t>
+            </a:r>
+            <a:endParaRPr lang="en-US" sz="1550" dirty="0"/>
+          </a:p>
+        </p:txBody>
+      </p:sp>
+      <p:sp>
+        <p:nvSpPr>
+          <p:cNvPr id="13" name="Shape 11"/>
+          <p:cNvSpPr/>
+          <p:nvPr/>
+        </p:nvSpPr>
+        <p:spPr>
+          <a:xfrm>
+            <a:off x="7635240" y="2788920"/>
+            <a:ext cx="3474720" cy="1536192"/>
+          </a:xfrm>
+          <a:prstGeom prst="roundRect">
+            <a:avLst>
+              <a:gd name="adj" fmla="val 7143"/>
+            </a:avLst>
+          </a:prstGeom>
+          <a:solidFill>
+            <a:srgbClr val="FFFFFF">
+              <a:alpha val="88000"/>
+            </a:srgbClr>
+          </a:solidFill>
+          <a:ln w="12700">
+            <a:solidFill>
+              <a:srgbClr val="D6E8F2"/>
+            </a:solidFill>
+            <a:prstDash val="solid"/>
+          </a:ln>
+        </p:spPr>
+      </p:sp>
+      <p:sp>
+        <p:nvSpPr>
+          <p:cNvPr id="14" name="Shape 12"/>
+          <p:cNvSpPr/>
+          <p:nvPr/>
+        </p:nvSpPr>
+        <p:spPr>
+          <a:xfrm>
+            <a:off x="7891272" y="3108960"/>
+            <a:ext cx="566928" cy="566928"/>
           </a:xfrm>
           <a:prstGeom prst="ellipse">
             <a:avLst/>
@@ -3204,172 +3464,24 @@
       </p:sp>
       <p:sp>
         <p:nvSpPr>
-          <p:cNvPr id="9" name="Text 7"/>
-          <p:cNvSpPr/>
-          <p:nvPr/>
-        </p:nvSpPr>
-        <p:spPr>
-          <a:xfrm>
-            <a:off x="640080" y="731520"/>
-            <a:ext cx="420624" cy="164592"/>
-          </a:xfrm>
-          <a:prstGeom prst="rect">
-            <a:avLst/>
-          </a:prstGeom>
-          <a:noFill/>
-          <a:ln/>
-        </p:spPr>
-        <p:txBody>
-          <a:bodyPr wrap="square" lIns="0" tIns="0" rIns="0" bIns="0" rtlCol="0" anchor="ctr"/>
-          <a:lstStyle/>
-          <a:p>
-            <a:pPr algn="ctr" indent="0" marL="0">
-              <a:buNone/>
-            </a:pPr>
-            <a:r>
-              <a:rPr lang="en-US" sz="1100" b="1" dirty="0">
-                <a:solidFill>
-                  <a:srgbClr val="FFFFFF"/>
-                </a:solidFill>
-                <a:latin typeface="Aptos" pitchFamily="34" charset="0"/>
-                <a:ea typeface="Aptos" pitchFamily="34" charset="-122"/>
-                <a:cs typeface="Aptos" pitchFamily="34" charset="-120"/>
-              </a:rPr>
-              <a:t>6</a:t>
-            </a:r>
-            <a:endParaRPr lang="en-US" sz="1100" dirty="0"/>
-          </a:p>
-        </p:txBody>
-      </p:sp>
-      <p:sp>
-        <p:nvSpPr>
-          <p:cNvPr id="10" name="Text 8"/>
-          <p:cNvSpPr/>
-          <p:nvPr/>
-        </p:nvSpPr>
-        <p:spPr>
-          <a:xfrm>
-            <a:off x="640080" y="621792"/>
-            <a:ext cx="10881360" cy="713232"/>
-          </a:xfrm>
-          <a:prstGeom prst="rect">
-            <a:avLst/>
-          </a:prstGeom>
-          <a:noFill/>
-          <a:ln/>
-        </p:spPr>
-        <p:txBody>
-          <a:bodyPr wrap="square" lIns="0" tIns="0" rIns="0" bIns="0" rtlCol="0" anchor="ctr">
-            <a:normAutofit/>
-          </a:bodyPr>
-          <a:lstStyle/>
-          <a:p>
-            <a:pPr indent="0" marL="0">
-              <a:buNone/>
-            </a:pPr>
-            <a:r>
-              <a:rPr lang="en-US" sz="3400" b="1" dirty="0">
-                <a:solidFill>
-                  <a:srgbClr val="003A63"/>
-                </a:solidFill>
-                <a:latin typeface="Aptos Display" pitchFamily="34" charset="0"/>
-                <a:ea typeface="Aptos Display" pitchFamily="34" charset="-122"/>
-                <a:cs typeface="Aptos Display" pitchFamily="34" charset="-120"/>
-              </a:rPr>
-              <a:t>Technical and Governance Deep Dive</a:t>
-            </a:r>
-            <a:endParaRPr lang="en-US" sz="3400" dirty="0"/>
-          </a:p>
-        </p:txBody>
-      </p:sp>
-      <p:sp>
-        <p:nvSpPr>
-          <p:cNvPr id="11" name="Text 9"/>
-          <p:cNvSpPr/>
-          <p:nvPr/>
-        </p:nvSpPr>
-        <p:spPr>
-          <a:xfrm>
-            <a:off x="868680" y="1508760"/>
-            <a:ext cx="6537960" cy="4160520"/>
-          </a:xfrm>
-          <a:prstGeom prst="rect">
-            <a:avLst/>
-          </a:prstGeom>
-          <a:noFill/>
-          <a:ln/>
-        </p:spPr>
-        <p:txBody>
-          <a:bodyPr wrap="square" lIns="635" tIns="635" rIns="635" bIns="635" rtlCol="0" anchor="t">
-            <a:normAutofit/>
-          </a:bodyPr>
-          <a:lstStyle/>
-          <a:p>
-            <a:r>
-              <a:rPr lang="en-US" sz="2100" dirty="0">
-                <a:solidFill>
-                  <a:srgbClr val="17364A"/>
-                </a:solidFill>
-                <a:latin typeface="Aptos" pitchFamily="34" charset="0"/>
-                <a:ea typeface="Aptos" pitchFamily="34" charset="-122"/>
-                <a:cs typeface="Aptos" pitchFamily="34" charset="-120"/>
-              </a:rPr>
-              <a:t>A useful portfolio strategy begins with categories.</a:t>
-            </a:r>
-            <a:endParaRPr lang="en-US" sz="2100" dirty="0"/>
-          </a:p>
-          <a:p>
-            <a:r>
-              <a:rPr lang="en-US" sz="2100" dirty="0">
-                <a:solidFill>
-                  <a:srgbClr val="17364A"/>
-                </a:solidFill>
-                <a:latin typeface="Aptos" pitchFamily="34" charset="0"/>
-                <a:ea typeface="Aptos" pitchFamily="34" charset="-122"/>
-                <a:cs typeface="Aptos" pitchFamily="34" charset="-120"/>
-              </a:rPr>
-              <a:t>Agencies can classify AI opportunities by function, such as internal productivity, knowledge.</a:t>
-            </a:r>
-            <a:endParaRPr lang="en-US" sz="2100" dirty="0"/>
-          </a:p>
-          <a:p>
-            <a:r>
-              <a:rPr lang="en-US" sz="2100" dirty="0">
-                <a:solidFill>
-                  <a:srgbClr val="17364A"/>
-                </a:solidFill>
-                <a:latin typeface="Aptos" pitchFamily="34" charset="0"/>
-                <a:ea typeface="Aptos" pitchFamily="34" charset="-122"/>
-                <a:cs typeface="Aptos" pitchFamily="34" charset="-120"/>
-              </a:rPr>
-              <a:t>They can also classify by risk, such as low, moderate, high, or prohibited.</a:t>
-            </a:r>
-            <a:endParaRPr lang="en-US" sz="2100" dirty="0"/>
-          </a:p>
-        </p:txBody>
-      </p:sp>
-      <p:sp>
-        <p:nvSpPr>
-          <p:cNvPr id="12" name="Shape 10"/>
-          <p:cNvSpPr/>
-          <p:nvPr/>
-        </p:nvSpPr>
-        <p:spPr>
-          <a:xfrm>
-            <a:off x="7909560" y="1417320"/>
-            <a:ext cx="3154680" cy="1828800"/>
-          </a:xfrm>
-          <a:prstGeom prst="roundRect">
-            <a:avLst>
-              <a:gd name="adj" fmla="val 6000"/>
-            </a:avLst>
+          <p:cNvPr id="15" name="Shape 13"/>
+          <p:cNvSpPr/>
+          <p:nvPr/>
+        </p:nvSpPr>
+        <p:spPr>
+          <a:xfrm>
+            <a:off x="10287000" y="3108960"/>
+            <a:ext cx="566928" cy="566928"/>
+          </a:xfrm>
+          <a:prstGeom prst="ellipse">
+            <a:avLst/>
           </a:prstGeom>
           <a:solidFill>
-            <a:srgbClr val="EEF8ED"/>
+            <a:srgbClr val="2F8A28"/>
           </a:solidFill>
           <a:ln w="12700">
             <a:solidFill>
-              <a:srgbClr val="B9D7E6"/>
+              <a:srgbClr val="2F8A28"/>
             </a:solidFill>
             <a:prstDash val="solid"/>
           </a:ln>
@@ -3377,14 +3489,108 @@
       </p:sp>
       <p:sp>
         <p:nvSpPr>
-          <p:cNvPr id="13" name="Text 11"/>
-          <p:cNvSpPr/>
-          <p:nvPr/>
-        </p:nvSpPr>
-        <p:spPr>
-          <a:xfrm>
-            <a:off x="8074152" y="1563624"/>
-            <a:ext cx="2825496" cy="256032"/>
+          <p:cNvPr id="16" name="Shape 14"/>
+          <p:cNvSpPr/>
+          <p:nvPr/>
+        </p:nvSpPr>
+        <p:spPr>
+          <a:xfrm>
+            <a:off x="9089136" y="3456432"/>
+            <a:ext cx="566928" cy="566928"/>
+          </a:xfrm>
+          <a:prstGeom prst="ellipse">
+            <a:avLst/>
+          </a:prstGeom>
+          <a:solidFill>
+            <a:srgbClr val="6A4CA3"/>
+          </a:solidFill>
+          <a:ln w="12700">
+            <a:solidFill>
+              <a:srgbClr val="6A4CA3"/>
+            </a:solidFill>
+            <a:prstDash val="solid"/>
+          </a:ln>
+        </p:spPr>
+      </p:sp>
+      <p:sp>
+        <p:nvSpPr>
+          <p:cNvPr id="17" name="Shape 15"/>
+          <p:cNvSpPr/>
+          <p:nvPr/>
+        </p:nvSpPr>
+        <p:spPr>
+          <a:xfrm>
+            <a:off x="8385048" y="3419856"/>
+            <a:ext cx="1975104" cy="0"/>
+          </a:xfrm>
+          <a:prstGeom prst="line">
+            <a:avLst/>
+          </a:prstGeom>
+          <a:noFill/>
+          <a:ln w="25400">
+            <a:solidFill>
+              <a:srgbClr val="8ABBD8"/>
+            </a:solidFill>
+            <a:prstDash val="solid"/>
+          </a:ln>
+        </p:spPr>
+      </p:sp>
+      <p:sp>
+        <p:nvSpPr>
+          <p:cNvPr id="18" name="Shape 16"/>
+          <p:cNvSpPr/>
+          <p:nvPr/>
+        </p:nvSpPr>
+        <p:spPr>
+          <a:xfrm>
+            <a:off x="8202168" y="3630168"/>
+            <a:ext cx="1170432" cy="118872"/>
+          </a:xfrm>
+          <a:prstGeom prst="line">
+            <a:avLst/>
+          </a:prstGeom>
+          <a:noFill/>
+          <a:ln w="25400">
+            <a:solidFill>
+              <a:srgbClr val="8ABBD8"/>
+            </a:solidFill>
+            <a:prstDash val="solid"/>
+          </a:ln>
+        </p:spPr>
+      </p:sp>
+      <p:sp>
+        <p:nvSpPr>
+          <p:cNvPr id="19" name="Shape 17"/>
+          <p:cNvSpPr/>
+          <p:nvPr/>
+        </p:nvSpPr>
+        <p:spPr>
+          <a:xfrm>
+            <a:off x="10543032" y="3630168"/>
+            <a:ext cx="-1170432" cy="118872"/>
+          </a:xfrm>
+          <a:prstGeom prst="line">
+            <a:avLst/>
+          </a:prstGeom>
+          <a:noFill/>
+          <a:ln w="25400">
+            <a:solidFill>
+              <a:srgbClr val="8ABBD8"/>
+            </a:solidFill>
+            <a:prstDash val="solid"/>
+          </a:ln>
+        </p:spPr>
+      </p:sp>
+      <p:sp>
+        <p:nvSpPr>
+          <p:cNvPr id="20" name="Text 18"/>
+          <p:cNvSpPr/>
+          <p:nvPr/>
+        </p:nvSpPr>
+        <p:spPr>
+          <a:xfrm>
+            <a:off x="7863840" y="4069080"/>
+            <a:ext cx="3017520" cy="164592"/>
           </a:xfrm>
           <a:prstGeom prst="rect">
             <a:avLst/>
@@ -3396,79 +3602,38 @@
           <a:bodyPr wrap="square" lIns="0" tIns="0" rIns="0" bIns="0" rtlCol="0" anchor="ctr"/>
           <a:lstStyle/>
           <a:p>
-            <a:pPr indent="0" marL="0">
-              <a:buNone/>
-            </a:pPr>
-            <a:r>
-              <a:rPr lang="en-US" sz="1300" b="1" dirty="0">
-                <a:solidFill>
-                  <a:srgbClr val="0068B7"/>
-                </a:solidFill>
-                <a:latin typeface="Aptos" pitchFamily="34" charset="0"/>
-                <a:ea typeface="Aptos" pitchFamily="34" charset="-122"/>
-                <a:cs typeface="Aptos" pitchFamily="34" charset="-120"/>
-              </a:rPr>
-              <a:t>Key idea</a:t>
-            </a:r>
-            <a:endParaRPr lang="en-US" sz="1300" dirty="0"/>
-          </a:p>
-        </p:txBody>
-      </p:sp>
-      <p:sp>
-        <p:nvSpPr>
-          <p:cNvPr id="14" name="Text 12"/>
-          <p:cNvSpPr/>
-          <p:nvPr/>
-        </p:nvSpPr>
-        <p:spPr>
-          <a:xfrm>
-            <a:off x="8074152" y="1920240"/>
-            <a:ext cx="2825496" cy="1188720"/>
-          </a:xfrm>
-          <a:prstGeom prst="rect">
-            <a:avLst/>
-          </a:prstGeom>
-          <a:noFill/>
-          <a:ln/>
-        </p:spPr>
-        <p:txBody>
-          <a:bodyPr wrap="square" lIns="0" tIns="0" rIns="0" bIns="0" rtlCol="0" anchor="t">
-            <a:normAutofit/>
-          </a:bodyPr>
-          <a:lstStyle/>
-          <a:p>
-            <a:pPr indent="0" marL="0">
-              <a:buNone/>
-            </a:pPr>
-            <a:r>
-              <a:rPr lang="en-US" sz="1550" dirty="0">
-                <a:solidFill>
-                  <a:srgbClr val="17364A"/>
-                </a:solidFill>
-                <a:latin typeface="Aptos" pitchFamily="34" charset="0"/>
-                <a:ea typeface="Aptos" pitchFamily="34" charset="-122"/>
-                <a:cs typeface="Aptos" pitchFamily="34" charset="-120"/>
-              </a:rPr>
-              <a:t>A useful portfolio strategy begins with categories.</a:t>
-            </a:r>
-            <a:endParaRPr lang="en-US" sz="1550" dirty="0"/>
-          </a:p>
-        </p:txBody>
-      </p:sp>
-      <p:sp>
-        <p:nvSpPr>
-          <p:cNvPr id="15" name="Shape 13"/>
-          <p:cNvSpPr/>
-          <p:nvPr/>
-        </p:nvSpPr>
-        <p:spPr>
-          <a:xfrm>
-            <a:off x="7909560" y="3520440"/>
-            <a:ext cx="3154680" cy="1737360"/>
+            <a:pPr algn="ctr" indent="0" marL="0">
+              <a:buNone/>
+            </a:pPr>
+            <a:r>
+              <a:rPr lang="en-US" sz="900" b="1" dirty="0">
+                <a:solidFill>
+                  <a:srgbClr val="003A63"/>
+                </a:solidFill>
+                <a:latin typeface="Aptos" pitchFamily="34" charset="0"/>
+                <a:ea typeface="Aptos" pitchFamily="34" charset="-122"/>
+                <a:cs typeface="Aptos" pitchFamily="34" charset="-120"/>
+              </a:rPr>
+              <a:t>Decision rights</a:t>
+            </a:r>
+            <a:endParaRPr lang="en-US" sz="900" dirty="0"/>
+          </a:p>
+        </p:txBody>
+      </p:sp>
+      <p:sp>
+        <p:nvSpPr>
+          <p:cNvPr id="21" name="Shape 19"/>
+          <p:cNvSpPr/>
+          <p:nvPr/>
+        </p:nvSpPr>
+        <p:spPr>
+          <a:xfrm>
+            <a:off x="7635240" y="4498848"/>
+            <a:ext cx="3474720" cy="1143000"/>
           </a:xfrm>
           <a:prstGeom prst="roundRect">
             <a:avLst>
-              <a:gd name="adj" fmla="val 6316"/>
+              <a:gd name="adj" fmla="val 9600"/>
             </a:avLst>
           </a:prstGeom>
           <a:solidFill>
@@ -3484,14 +3649,14 @@
       </p:sp>
       <p:sp>
         <p:nvSpPr>
-          <p:cNvPr id="16" name="Text 14"/>
-          <p:cNvSpPr/>
-          <p:nvPr/>
-        </p:nvSpPr>
-        <p:spPr>
-          <a:xfrm>
-            <a:off x="8074152" y="3666744"/>
-            <a:ext cx="2825496" cy="256032"/>
+          <p:cNvPr id="22" name="Text 20"/>
+          <p:cNvSpPr/>
+          <p:nvPr/>
+        </p:nvSpPr>
+        <p:spPr>
+          <a:xfrm>
+            <a:off x="7799832" y="4645152"/>
+            <a:ext cx="3145536" cy="256032"/>
           </a:xfrm>
           <a:prstGeom prst="rect">
             <a:avLst/>
@@ -3515,7 +3680,7 @@
                 <a:ea typeface="Aptos" pitchFamily="34" charset="-122"/>
                 <a:cs typeface="Aptos" pitchFamily="34" charset="-120"/>
               </a:rPr>
-              <a:t>Use this for</a:t>
+              <a:t>What to document</a:t>
             </a:r>
             <a:endParaRPr lang="en-US" sz="1300" dirty="0"/>
           </a:p>
@@ -3523,14 +3688,14 @@
       </p:sp>
       <p:sp>
         <p:nvSpPr>
-          <p:cNvPr id="17" name="Text 15"/>
-          <p:cNvSpPr/>
-          <p:nvPr/>
-        </p:nvSpPr>
-        <p:spPr>
-          <a:xfrm>
-            <a:off x="8074152" y="4023360"/>
-            <a:ext cx="2825496" cy="1097280"/>
+          <p:cNvPr id="23" name="Text 21"/>
+          <p:cNvSpPr/>
+          <p:nvPr/>
+        </p:nvSpPr>
+        <p:spPr>
+          <a:xfrm>
+            <a:off x="7799832" y="5001768"/>
+            <a:ext cx="3145536" cy="502920"/>
           </a:xfrm>
           <a:prstGeom prst="rect">
             <a:avLst/>
@@ -3556,7 +3721,7 @@
                 <a:ea typeface="Aptos" pitchFamily="34" charset="-122"/>
                 <a:cs typeface="Aptos" pitchFamily="34" charset="-120"/>
               </a:rPr>
-              <a:t>Connect the concept to public health decisions, safeguards, documentation, or implementation work.</a:t>
+              <a:t>Translate this concept into clear decision rights, review steps, documentation expectations, and escalation paths before an AI-supported workflow is approved.</a:t>
             </a:r>
             <a:endParaRPr lang="en-US" sz="1550" dirty="0"/>
           </a:p>
@@ -3730,8 +3895,8 @@
         </p:nvSpPr>
         <p:spPr>
           <a:xfrm>
-            <a:off x="9966960" y="6537960"/>
-            <a:ext cx="1645920" cy="201168"/>
+            <a:off x="9646920" y="6537960"/>
+            <a:ext cx="1965960" cy="201168"/>
           </a:xfrm>
           <a:prstGeom prst="rect">
             <a:avLst/>
@@ -3755,7 +3920,7 @@
                 <a:ea typeface="Aptos" pitchFamily="34" charset="-122"/>
                 <a:cs typeface="Aptos" pitchFamily="34" charset="-120"/>
               </a:rPr>
-              <a:t>Â© Paula Soper</a:t>
+              <a:t>Copyright Paula Soper</a:t>
             </a:r>
             <a:endParaRPr lang="en-US" sz="800" dirty="0"/>
           </a:p>
@@ -3802,77 +3967,13 @@
       </p:sp>
       <p:sp>
         <p:nvSpPr>
-          <p:cNvPr id="8" name="Shape 6"/>
+          <p:cNvPr id="8" name="Text 6"/>
           <p:cNvSpPr/>
           <p:nvPr/>
         </p:nvSpPr>
         <p:spPr>
           <a:xfrm>
             <a:off x="640080" y="658368"/>
-            <a:ext cx="420624" cy="420624"/>
-          </a:xfrm>
-          <a:prstGeom prst="ellipse">
-            <a:avLst/>
-          </a:prstGeom>
-          <a:solidFill>
-            <a:srgbClr val="0068B7"/>
-          </a:solidFill>
-          <a:ln w="12700">
-            <a:solidFill>
-              <a:srgbClr val="0068B7"/>
-            </a:solidFill>
-            <a:prstDash val="solid"/>
-          </a:ln>
-        </p:spPr>
-      </p:sp>
-      <p:sp>
-        <p:nvSpPr>
-          <p:cNvPr id="9" name="Text 7"/>
-          <p:cNvSpPr/>
-          <p:nvPr/>
-        </p:nvSpPr>
-        <p:spPr>
-          <a:xfrm>
-            <a:off x="640080" y="731520"/>
-            <a:ext cx="420624" cy="164592"/>
-          </a:xfrm>
-          <a:prstGeom prst="rect">
-            <a:avLst/>
-          </a:prstGeom>
-          <a:noFill/>
-          <a:ln/>
-        </p:spPr>
-        <p:txBody>
-          <a:bodyPr wrap="square" lIns="0" tIns="0" rIns="0" bIns="0" rtlCol="0" anchor="ctr"/>
-          <a:lstStyle/>
-          <a:p>
-            <a:pPr algn="ctr" indent="0" marL="0">
-              <a:buNone/>
-            </a:pPr>
-            <a:r>
-              <a:rPr lang="en-US" sz="1100" b="1" dirty="0">
-                <a:solidFill>
-                  <a:srgbClr val="FFFFFF"/>
-                </a:solidFill>
-                <a:latin typeface="Aptos" pitchFamily="34" charset="0"/>
-                <a:ea typeface="Aptos" pitchFamily="34" charset="-122"/>
-                <a:cs typeface="Aptos" pitchFamily="34" charset="-120"/>
-              </a:rPr>
-              <a:t>7</a:t>
-            </a:r>
-            <a:endParaRPr lang="en-US" sz="1100" dirty="0"/>
-          </a:p>
-        </p:txBody>
-      </p:sp>
-      <p:sp>
-        <p:nvSpPr>
-          <p:cNvPr id="10" name="Text 8"/>
-          <p:cNvSpPr/>
-          <p:nvPr/>
-        </p:nvSpPr>
-        <p:spPr>
-          <a:xfrm>
-            <a:off x="640080" y="621792"/>
             <a:ext cx="10881360" cy="713232"/>
           </a:xfrm>
           <a:prstGeom prst="rect">
@@ -3907,14 +4008,14 @@
       </p:sp>
       <p:sp>
         <p:nvSpPr>
-          <p:cNvPr id="11" name="Text 9"/>
+          <p:cNvPr id="9" name="Text 7"/>
           <p:cNvSpPr/>
           <p:nvPr/>
         </p:nvSpPr>
         <p:spPr>
           <a:xfrm>
             <a:off x="868680" y="1508760"/>
-            <a:ext cx="6537960" cy="4160520"/>
+            <a:ext cx="6309360" cy="4160520"/>
           </a:xfrm>
           <a:prstGeom prst="rect">
             <a:avLst/>
@@ -3973,18 +4074,18 @@
       </p:sp>
       <p:sp>
         <p:nvSpPr>
-          <p:cNvPr id="12" name="Shape 10"/>
-          <p:cNvSpPr/>
-          <p:nvPr/>
-        </p:nvSpPr>
-        <p:spPr>
-          <a:xfrm>
-            <a:off x="7909560" y="1417320"/>
-            <a:ext cx="3154680" cy="1828800"/>
+          <p:cNvPr id="10" name="Shape 8"/>
+          <p:cNvSpPr/>
+          <p:nvPr/>
+        </p:nvSpPr>
+        <p:spPr>
+          <a:xfrm>
+            <a:off x="7635240" y="1325880"/>
+            <a:ext cx="3474720" cy="1325880"/>
           </a:xfrm>
           <a:prstGeom prst="roundRect">
             <a:avLst>
-              <a:gd name="adj" fmla="val 6000"/>
+              <a:gd name="adj" fmla="val 8276"/>
             </a:avLst>
           </a:prstGeom>
           <a:solidFill>
@@ -4000,14 +4101,14 @@
       </p:sp>
       <p:sp>
         <p:nvSpPr>
-          <p:cNvPr id="13" name="Text 11"/>
-          <p:cNvSpPr/>
-          <p:nvPr/>
-        </p:nvSpPr>
-        <p:spPr>
-          <a:xfrm>
-            <a:off x="8074152" y="1563624"/>
-            <a:ext cx="2825496" cy="256032"/>
+          <p:cNvPr id="11" name="Text 9"/>
+          <p:cNvSpPr/>
+          <p:nvPr/>
+        </p:nvSpPr>
+        <p:spPr>
+          <a:xfrm>
+            <a:off x="7799832" y="1472184"/>
+            <a:ext cx="3145536" cy="256032"/>
           </a:xfrm>
           <a:prstGeom prst="rect">
             <a:avLst/>
@@ -4031,7 +4132,7 @@
                 <a:ea typeface="Aptos" pitchFamily="34" charset="-122"/>
                 <a:cs typeface="Aptos" pitchFamily="34" charset="-120"/>
               </a:rPr>
-              <a:t>Key idea</a:t>
+              <a:t>Risk check</a:t>
             </a:r>
             <a:endParaRPr lang="en-US" sz="1300" dirty="0"/>
           </a:p>
@@ -4039,14 +4140,14 @@
       </p:sp>
       <p:sp>
         <p:nvSpPr>
-          <p:cNvPr id="14" name="Text 12"/>
-          <p:cNvSpPr/>
-          <p:nvPr/>
-        </p:nvSpPr>
-        <p:spPr>
-          <a:xfrm>
-            <a:off x="8074152" y="1920240"/>
-            <a:ext cx="2825496" cy="1188720"/>
+          <p:cNvPr id="12" name="Text 10"/>
+          <p:cNvSpPr/>
+          <p:nvPr/>
+        </p:nvSpPr>
+        <p:spPr>
+          <a:xfrm>
+            <a:off x="7799832" y="1828800"/>
+            <a:ext cx="3145536" cy="685800"/>
           </a:xfrm>
           <a:prstGeom prst="rect">
             <a:avLst/>
@@ -4080,18 +4181,171 @@
       </p:sp>
       <p:sp>
         <p:nvSpPr>
-          <p:cNvPr id="15" name="Shape 13"/>
-          <p:cNvSpPr/>
-          <p:nvPr/>
-        </p:nvSpPr>
-        <p:spPr>
-          <a:xfrm>
-            <a:off x="7909560" y="3520440"/>
-            <a:ext cx="3154680" cy="1737360"/>
+          <p:cNvPr id="13" name="Shape 11"/>
+          <p:cNvSpPr/>
+          <p:nvPr/>
+        </p:nvSpPr>
+        <p:spPr>
+          <a:xfrm>
+            <a:off x="7635240" y="2788920"/>
+            <a:ext cx="3474720" cy="1536192"/>
           </a:xfrm>
           <a:prstGeom prst="roundRect">
             <a:avLst>
-              <a:gd name="adj" fmla="val 6316"/>
+              <a:gd name="adj" fmla="val 7143"/>
+            </a:avLst>
+          </a:prstGeom>
+          <a:solidFill>
+            <a:srgbClr val="FFFFFF">
+              <a:alpha val="88000"/>
+            </a:srgbClr>
+          </a:solidFill>
+          <a:ln w="12700">
+            <a:solidFill>
+              <a:srgbClr val="D6E8F2"/>
+            </a:solidFill>
+            <a:prstDash val="solid"/>
+          </a:ln>
+        </p:spPr>
+      </p:sp>
+      <p:sp>
+        <p:nvSpPr>
+          <p:cNvPr id="14" name="Shape 12"/>
+          <p:cNvSpPr/>
+          <p:nvPr/>
+        </p:nvSpPr>
+        <p:spPr>
+          <a:xfrm>
+            <a:off x="8046720" y="3108960"/>
+            <a:ext cx="2651760" cy="896112"/>
+          </a:xfrm>
+          <a:prstGeom prst="arc">
+            <a:avLst/>
+          </a:prstGeom>
+          <a:noFill/>
+          <a:ln w="25400">
+            <a:solidFill>
+              <a:srgbClr val="0068B7"/>
+            </a:solidFill>
+            <a:prstDash val="solid"/>
+          </a:ln>
+        </p:spPr>
+      </p:sp>
+      <p:sp>
+        <p:nvSpPr>
+          <p:cNvPr id="15" name="Text 13"/>
+          <p:cNvSpPr/>
+          <p:nvPr/>
+        </p:nvSpPr>
+        <p:spPr>
+          <a:xfrm>
+            <a:off x="7909560" y="3099816"/>
+            <a:ext cx="2926080" cy="256032"/>
+          </a:xfrm>
+          <a:prstGeom prst="rect">
+            <a:avLst/>
+          </a:prstGeom>
+          <a:noFill/>
+          <a:ln/>
+        </p:spPr>
+        <p:txBody>
+          <a:bodyPr wrap="square" lIns="0" tIns="0" rIns="0" bIns="0" rtlCol="0" anchor="ctr"/>
+          <a:lstStyle/>
+          <a:p>
+            <a:pPr algn="ctr" indent="0" marL="0">
+              <a:buNone/>
+            </a:pPr>
+            <a:r>
+              <a:rPr lang="en-US" sz="1500" b="1" dirty="0">
+                <a:solidFill>
+                  <a:srgbClr val="003A63"/>
+                </a:solidFill>
+                <a:latin typeface="Aptos" pitchFamily="34" charset="0"/>
+                <a:ea typeface="Aptos" pitchFamily="34" charset="-122"/>
+                <a:cs typeface="Aptos" pitchFamily="34" charset="-120"/>
+              </a:rPr>
+              <a:t>Risk</a:t>
+            </a:r>
+            <a:endParaRPr lang="en-US" sz="1500" dirty="0"/>
+          </a:p>
+        </p:txBody>
+      </p:sp>
+      <p:sp>
+        <p:nvSpPr>
+          <p:cNvPr id="16" name="Shape 14"/>
+          <p:cNvSpPr/>
+          <p:nvPr/>
+        </p:nvSpPr>
+        <p:spPr>
+          <a:xfrm>
+            <a:off x="8366760" y="3639312"/>
+            <a:ext cx="2011680" cy="0"/>
+          </a:xfrm>
+          <a:prstGeom prst="line">
+            <a:avLst/>
+          </a:prstGeom>
+          <a:noFill/>
+          <a:ln w="63500">
+            <a:solidFill>
+              <a:srgbClr val="2F8A28"/>
+            </a:solidFill>
+            <a:prstDash val="solid"/>
+          </a:ln>
+        </p:spPr>
+      </p:sp>
+      <p:sp>
+        <p:nvSpPr>
+          <p:cNvPr id="17" name="Text 15"/>
+          <p:cNvSpPr/>
+          <p:nvPr/>
+        </p:nvSpPr>
+        <p:spPr>
+          <a:xfrm>
+            <a:off x="7909560" y="3849624"/>
+            <a:ext cx="2926080" cy="164592"/>
+          </a:xfrm>
+          <a:prstGeom prst="rect">
+            <a:avLst/>
+          </a:prstGeom>
+          <a:noFill/>
+          <a:ln/>
+        </p:spPr>
+        <p:txBody>
+          <a:bodyPr wrap="square" lIns="0" tIns="0" rIns="0" bIns="0" rtlCol="0" anchor="ctr"/>
+          <a:lstStyle/>
+          <a:p>
+            <a:pPr algn="ctr" indent="0" marL="0">
+              <a:buNone/>
+            </a:pPr>
+            <a:r>
+              <a:rPr lang="en-US" sz="900" dirty="0">
+                <a:solidFill>
+                  <a:srgbClr val="003A63"/>
+                </a:solidFill>
+                <a:latin typeface="Aptos" pitchFamily="34" charset="0"/>
+                <a:ea typeface="Aptos" pitchFamily="34" charset="-122"/>
+                <a:cs typeface="Aptos" pitchFamily="34" charset="-120"/>
+              </a:rPr>
+              <a:t>Human review</a:t>
+            </a:r>
+            <a:endParaRPr lang="en-US" sz="900" dirty="0"/>
+          </a:p>
+        </p:txBody>
+      </p:sp>
+      <p:sp>
+        <p:nvSpPr>
+          <p:cNvPr id="18" name="Shape 16"/>
+          <p:cNvSpPr/>
+          <p:nvPr/>
+        </p:nvSpPr>
+        <p:spPr>
+          <a:xfrm>
+            <a:off x="7635240" y="4498848"/>
+            <a:ext cx="3474720" cy="1143000"/>
+          </a:xfrm>
+          <a:prstGeom prst="roundRect">
+            <a:avLst>
+              <a:gd name="adj" fmla="val 9600"/>
             </a:avLst>
           </a:prstGeom>
           <a:solidFill>
@@ -4107,14 +4361,14 @@
       </p:sp>
       <p:sp>
         <p:nvSpPr>
-          <p:cNvPr id="16" name="Text 14"/>
-          <p:cNvSpPr/>
-          <p:nvPr/>
-        </p:nvSpPr>
-        <p:spPr>
-          <a:xfrm>
-            <a:off x="8074152" y="3666744"/>
-            <a:ext cx="2825496" cy="256032"/>
+          <p:cNvPr id="19" name="Text 17"/>
+          <p:cNvSpPr/>
+          <p:nvPr/>
+        </p:nvSpPr>
+        <p:spPr>
+          <a:xfrm>
+            <a:off x="7799832" y="4645152"/>
+            <a:ext cx="3145536" cy="256032"/>
           </a:xfrm>
           <a:prstGeom prst="rect">
             <a:avLst/>
@@ -4138,7 +4392,7 @@
                 <a:ea typeface="Aptos" pitchFamily="34" charset="-122"/>
                 <a:cs typeface="Aptos" pitchFamily="34" charset="-120"/>
               </a:rPr>
-              <a:t>Use this for</a:t>
+              <a:t>Safeguard to plan</a:t>
             </a:r>
             <a:endParaRPr lang="en-US" sz="1300" dirty="0"/>
           </a:p>
@@ -4146,14 +4400,14 @@
       </p:sp>
       <p:sp>
         <p:nvSpPr>
-          <p:cNvPr id="17" name="Text 15"/>
-          <p:cNvSpPr/>
-          <p:nvPr/>
-        </p:nvSpPr>
-        <p:spPr>
-          <a:xfrm>
-            <a:off x="8074152" y="4023360"/>
-            <a:ext cx="2825496" cy="1097280"/>
+          <p:cNvPr id="20" name="Text 18"/>
+          <p:cNvSpPr/>
+          <p:nvPr/>
+        </p:nvSpPr>
+        <p:spPr>
+          <a:xfrm>
+            <a:off x="7799832" y="5001768"/>
+            <a:ext cx="3145536" cy="502920"/>
           </a:xfrm>
           <a:prstGeom prst="rect">
             <a:avLst/>
@@ -4179,7 +4433,7 @@
                 <a:ea typeface="Aptos" pitchFamily="34" charset="-122"/>
                 <a:cs typeface="Aptos" pitchFamily="34" charset="-120"/>
               </a:rPr>
-              <a:t>Connect the concept to public health decisions, safeguards, documentation, or implementation work.</a:t>
+              <a:t>Identify what could go wrong, who could be affected, what safeguards are needed, and what evidence should be reviewed before use expands.</a:t>
             </a:r>
             <a:endParaRPr lang="en-US" sz="1550" dirty="0"/>
           </a:p>
@@ -4353,8 +4607,8 @@
         </p:nvSpPr>
         <p:spPr>
           <a:xfrm>
-            <a:off x="9966960" y="6537960"/>
-            <a:ext cx="1645920" cy="201168"/>
+            <a:off x="9646920" y="6537960"/>
+            <a:ext cx="1965960" cy="201168"/>
           </a:xfrm>
           <a:prstGeom prst="rect">
             <a:avLst/>
@@ -4378,7 +4632,7 @@
                 <a:ea typeface="Aptos" pitchFamily="34" charset="-122"/>
                 <a:cs typeface="Aptos" pitchFamily="34" charset="-120"/>
               </a:rPr>
-              <a:t>Â© Paula Soper</a:t>
+              <a:t>Copyright Paula Soper</a:t>
             </a:r>
             <a:endParaRPr lang="en-US" sz="800" dirty="0"/>
           </a:p>
@@ -4425,17 +4679,262 @@
       </p:sp>
       <p:sp>
         <p:nvSpPr>
-          <p:cNvPr id="8" name="Shape 6"/>
+          <p:cNvPr id="8" name="Text 6"/>
           <p:cNvSpPr/>
           <p:nvPr/>
         </p:nvSpPr>
         <p:spPr>
           <a:xfrm>
             <a:off x="640080" y="658368"/>
-            <a:ext cx="420624" cy="420624"/>
-          </a:xfrm>
-          <a:prstGeom prst="ellipse">
-            <a:avLst/>
+            <a:ext cx="10881360" cy="713232"/>
+          </a:xfrm>
+          <a:prstGeom prst="rect">
+            <a:avLst/>
+          </a:prstGeom>
+          <a:noFill/>
+          <a:ln/>
+        </p:spPr>
+        <p:txBody>
+          <a:bodyPr wrap="square" lIns="0" tIns="0" rIns="0" bIns="0" rtlCol="0" anchor="ctr">
+            <a:normAutofit/>
+          </a:bodyPr>
+          <a:lstStyle/>
+          <a:p>
+            <a:pPr indent="0" marL="0">
+              <a:buNone/>
+            </a:pPr>
+            <a:r>
+              <a:rPr lang="en-US" sz="3400" b="1" dirty="0">
+                <a:solidFill>
+                  <a:srgbClr val="003A63"/>
+                </a:solidFill>
+                <a:latin typeface="Aptos Display" pitchFamily="34" charset="0"/>
+                <a:ea typeface="Aptos Display" pitchFamily="34" charset="-122"/>
+                <a:cs typeface="Aptos Display" pitchFamily="34" charset="-120"/>
+              </a:rPr>
+              <a:t>Application to AI-Supported Workflows</a:t>
+            </a:r>
+            <a:endParaRPr lang="en-US" sz="3400" dirty="0"/>
+          </a:p>
+        </p:txBody>
+      </p:sp>
+      <p:sp>
+        <p:nvSpPr>
+          <p:cNvPr id="9" name="Text 7"/>
+          <p:cNvSpPr/>
+          <p:nvPr/>
+        </p:nvSpPr>
+        <p:spPr>
+          <a:xfrm>
+            <a:off x="868680" y="1508760"/>
+            <a:ext cx="6309360" cy="4160520"/>
+          </a:xfrm>
+          <a:prstGeom prst="rect">
+            <a:avLst/>
+          </a:prstGeom>
+          <a:noFill/>
+          <a:ln/>
+        </p:spPr>
+        <p:txBody>
+          <a:bodyPr wrap="square" lIns="635" tIns="635" rIns="635" bIns="635" rtlCol="0" anchor="t">
+            <a:normAutofit/>
+          </a:bodyPr>
+          <a:lstStyle/>
+          <a:p>
+            <a:r>
+              <a:rPr lang="en-US" sz="2100" dirty="0">
+                <a:solidFill>
+                  <a:srgbClr val="17364A"/>
+                </a:solidFill>
+                <a:latin typeface="Aptos" pitchFamily="34" charset="0"/>
+                <a:ea typeface="Aptos" pitchFamily="34" charset="-122"/>
+                <a:cs typeface="Aptos" pitchFamily="34" charset="-120"/>
+              </a:rPr>
+              <a:t>Generative AI projects may be prioritized for internal knowledge management before public-facing use.</a:t>
+            </a:r>
+            <a:endParaRPr lang="en-US" sz="2100" dirty="0"/>
+          </a:p>
+          <a:p>
+            <a:r>
+              <a:rPr lang="en-US" sz="2100" dirty="0">
+                <a:solidFill>
+                  <a:srgbClr val="17364A"/>
+                </a:solidFill>
+                <a:latin typeface="Aptos" pitchFamily="34" charset="0"/>
+                <a:ea typeface="Aptos" pitchFamily="34" charset="-122"/>
+                <a:cs typeface="Aptos" pitchFamily="34" charset="-120"/>
+              </a:rPr>
+              <a:t>Predictive analytics projects may be prioritized only when data and validation plans are mature.</a:t>
+            </a:r>
+            <a:endParaRPr lang="en-US" sz="2100" dirty="0"/>
+          </a:p>
+          <a:p>
+            <a:r>
+              <a:rPr lang="en-US" sz="2100" dirty="0">
+                <a:solidFill>
+                  <a:srgbClr val="17364A"/>
+                </a:solidFill>
+                <a:latin typeface="Aptos" pitchFamily="34" charset="0"/>
+                <a:ea typeface="Aptos" pitchFamily="34" charset="-122"/>
+                <a:cs typeface="Aptos" pitchFamily="34" charset="-120"/>
+              </a:rPr>
+              <a:t>Agentic workflows may be deferred until governance has defined decision rights, access controls, and.</a:t>
+            </a:r>
+            <a:endParaRPr lang="en-US" sz="2100" dirty="0"/>
+          </a:p>
+        </p:txBody>
+      </p:sp>
+      <p:sp>
+        <p:nvSpPr>
+          <p:cNvPr id="10" name="Shape 8"/>
+          <p:cNvSpPr/>
+          <p:nvPr/>
+        </p:nvSpPr>
+        <p:spPr>
+          <a:xfrm>
+            <a:off x="7635240" y="1325880"/>
+            <a:ext cx="3474720" cy="1325880"/>
+          </a:xfrm>
+          <a:prstGeom prst="roundRect">
+            <a:avLst>
+              <a:gd name="adj" fmla="val 8276"/>
+            </a:avLst>
+          </a:prstGeom>
+          <a:solidFill>
+            <a:srgbClr val="EEF8ED"/>
+          </a:solidFill>
+          <a:ln w="12700">
+            <a:solidFill>
+              <a:srgbClr val="B9D7E6"/>
+            </a:solidFill>
+            <a:prstDash val="solid"/>
+          </a:ln>
+        </p:spPr>
+      </p:sp>
+      <p:sp>
+        <p:nvSpPr>
+          <p:cNvPr id="11" name="Text 9"/>
+          <p:cNvSpPr/>
+          <p:nvPr/>
+        </p:nvSpPr>
+        <p:spPr>
+          <a:xfrm>
+            <a:off x="7799832" y="1472184"/>
+            <a:ext cx="3145536" cy="256032"/>
+          </a:xfrm>
+          <a:prstGeom prst="rect">
+            <a:avLst/>
+          </a:prstGeom>
+          <a:noFill/>
+          <a:ln/>
+        </p:spPr>
+        <p:txBody>
+          <a:bodyPr wrap="square" lIns="0" tIns="0" rIns="0" bIns="0" rtlCol="0" anchor="ctr"/>
+          <a:lstStyle/>
+          <a:p>
+            <a:pPr indent="0" marL="0">
+              <a:buNone/>
+            </a:pPr>
+            <a:r>
+              <a:rPr lang="en-US" sz="1300" b="1" dirty="0">
+                <a:solidFill>
+                  <a:srgbClr val="0068B7"/>
+                </a:solidFill>
+                <a:latin typeface="Aptos" pitchFamily="34" charset="0"/>
+                <a:ea typeface="Aptos" pitchFamily="34" charset="-122"/>
+                <a:cs typeface="Aptos" pitchFamily="34" charset="-120"/>
+              </a:rPr>
+              <a:t>Implementation cue</a:t>
+            </a:r>
+            <a:endParaRPr lang="en-US" sz="1300" dirty="0"/>
+          </a:p>
+        </p:txBody>
+      </p:sp>
+      <p:sp>
+        <p:nvSpPr>
+          <p:cNvPr id="12" name="Text 10"/>
+          <p:cNvSpPr/>
+          <p:nvPr/>
+        </p:nvSpPr>
+        <p:spPr>
+          <a:xfrm>
+            <a:off x="7799832" y="1828800"/>
+            <a:ext cx="3145536" cy="685800"/>
+          </a:xfrm>
+          <a:prstGeom prst="rect">
+            <a:avLst/>
+          </a:prstGeom>
+          <a:noFill/>
+          <a:ln/>
+        </p:spPr>
+        <p:txBody>
+          <a:bodyPr wrap="square" lIns="0" tIns="0" rIns="0" bIns="0" rtlCol="0" anchor="t">
+            <a:normAutofit/>
+          </a:bodyPr>
+          <a:lstStyle/>
+          <a:p>
+            <a:pPr indent="0" marL="0">
+              <a:buNone/>
+            </a:pPr>
+            <a:r>
+              <a:rPr lang="en-US" sz="1550" dirty="0">
+                <a:solidFill>
+                  <a:srgbClr val="17364A"/>
+                </a:solidFill>
+                <a:latin typeface="Aptos" pitchFamily="34" charset="0"/>
+                <a:ea typeface="Aptos" pitchFamily="34" charset="-122"/>
+                <a:cs typeface="Aptos" pitchFamily="34" charset="-120"/>
+              </a:rPr>
+              <a:t>Generative AI projects may be prioritized for internal knowledge management before public-facing use.</a:t>
+            </a:r>
+            <a:endParaRPr lang="en-US" sz="1550" dirty="0"/>
+          </a:p>
+        </p:txBody>
+      </p:sp>
+      <p:sp>
+        <p:nvSpPr>
+          <p:cNvPr id="13" name="Shape 11"/>
+          <p:cNvSpPr/>
+          <p:nvPr/>
+        </p:nvSpPr>
+        <p:spPr>
+          <a:xfrm>
+            <a:off x="7635240" y="2788920"/>
+            <a:ext cx="3474720" cy="1536192"/>
+          </a:xfrm>
+          <a:prstGeom prst="roundRect">
+            <a:avLst>
+              <a:gd name="adj" fmla="val 7143"/>
+            </a:avLst>
+          </a:prstGeom>
+          <a:solidFill>
+            <a:srgbClr val="FFFFFF">
+              <a:alpha val="88000"/>
+            </a:srgbClr>
+          </a:solidFill>
+          <a:ln w="12700">
+            <a:solidFill>
+              <a:srgbClr val="D6E8F2"/>
+            </a:solidFill>
+            <a:prstDash val="solid"/>
+          </a:ln>
+        </p:spPr>
+      </p:sp>
+      <p:sp>
+        <p:nvSpPr>
+          <p:cNvPr id="14" name="Shape 12"/>
+          <p:cNvSpPr/>
+          <p:nvPr/>
+        </p:nvSpPr>
+        <p:spPr>
+          <a:xfrm>
+            <a:off x="7927848" y="3319272"/>
+            <a:ext cx="792480" cy="749808"/>
+          </a:xfrm>
+          <a:prstGeom prst="roundRect">
+            <a:avLst>
+              <a:gd name="adj" fmla="val 14634"/>
+            </a:avLst>
           </a:prstGeom>
           <a:solidFill>
             <a:srgbClr val="0068B7"/>
@@ -4450,53 +4949,14 @@
       </p:sp>
       <p:sp>
         <p:nvSpPr>
-          <p:cNvPr id="9" name="Text 7"/>
-          <p:cNvSpPr/>
-          <p:nvPr/>
-        </p:nvSpPr>
-        <p:spPr>
-          <a:xfrm>
-            <a:off x="640080" y="731520"/>
-            <a:ext cx="420624" cy="164592"/>
-          </a:xfrm>
-          <a:prstGeom prst="rect">
-            <a:avLst/>
-          </a:prstGeom>
-          <a:noFill/>
-          <a:ln/>
-        </p:spPr>
-        <p:txBody>
-          <a:bodyPr wrap="square" lIns="0" tIns="0" rIns="0" bIns="0" rtlCol="0" anchor="ctr"/>
-          <a:lstStyle/>
-          <a:p>
-            <a:pPr algn="ctr" indent="0" marL="0">
-              <a:buNone/>
-            </a:pPr>
-            <a:r>
-              <a:rPr lang="en-US" sz="1100" b="1" dirty="0">
-                <a:solidFill>
-                  <a:srgbClr val="FFFFFF"/>
-                </a:solidFill>
-                <a:latin typeface="Aptos" pitchFamily="34" charset="0"/>
-                <a:ea typeface="Aptos" pitchFamily="34" charset="-122"/>
-                <a:cs typeface="Aptos" pitchFamily="34" charset="-120"/>
-              </a:rPr>
-              <a:t>8</a:t>
-            </a:r>
-            <a:endParaRPr lang="en-US" sz="1100" dirty="0"/>
-          </a:p>
-        </p:txBody>
-      </p:sp>
-      <p:sp>
-        <p:nvSpPr>
-          <p:cNvPr id="10" name="Text 8"/>
-          <p:cNvSpPr/>
-          <p:nvPr/>
-        </p:nvSpPr>
-        <p:spPr>
-          <a:xfrm>
-            <a:off x="640080" y="621792"/>
-            <a:ext cx="10881360" cy="713232"/>
+          <p:cNvPr id="15" name="Text 13"/>
+          <p:cNvSpPr/>
+          <p:nvPr/>
+        </p:nvSpPr>
+        <p:spPr>
+          <a:xfrm>
+            <a:off x="8001000" y="3511296"/>
+            <a:ext cx="646176" cy="310896"/>
           </a:xfrm>
           <a:prstGeom prst="rect">
             <a:avLst/>
@@ -4510,112 +4970,46 @@
           </a:bodyPr>
           <a:lstStyle/>
           <a:p>
-            <a:pPr indent="0" marL="0">
-              <a:buNone/>
-            </a:pPr>
-            <a:r>
-              <a:rPr lang="en-US" sz="3400" b="1" dirty="0">
-                <a:solidFill>
-                  <a:srgbClr val="003A63"/>
-                </a:solidFill>
-                <a:latin typeface="Aptos Display" pitchFamily="34" charset="0"/>
-                <a:ea typeface="Aptos Display" pitchFamily="34" charset="-122"/>
-                <a:cs typeface="Aptos Display" pitchFamily="34" charset="-120"/>
-              </a:rPr>
-              <a:t>Application to AI-Supported Workflows</a:t>
-            </a:r>
-            <a:endParaRPr lang="en-US" sz="3400" dirty="0"/>
-          </a:p>
-        </p:txBody>
-      </p:sp>
-      <p:sp>
-        <p:nvSpPr>
-          <p:cNvPr id="11" name="Text 9"/>
-          <p:cNvSpPr/>
-          <p:nvPr/>
-        </p:nvSpPr>
-        <p:spPr>
-          <a:xfrm>
-            <a:off x="868680" y="1508760"/>
-            <a:ext cx="6537960" cy="4160520"/>
-          </a:xfrm>
-          <a:prstGeom prst="rect">
-            <a:avLst/>
-          </a:prstGeom>
-          <a:noFill/>
-          <a:ln/>
-        </p:spPr>
-        <p:txBody>
-          <a:bodyPr wrap="square" lIns="635" tIns="635" rIns="635" bIns="635" rtlCol="0" anchor="t">
-            <a:normAutofit/>
-          </a:bodyPr>
-          <a:lstStyle/>
-          <a:p>
-            <a:r>
-              <a:rPr lang="en-US" sz="2100" dirty="0">
-                <a:solidFill>
-                  <a:srgbClr val="17364A"/>
-                </a:solidFill>
-                <a:latin typeface="Aptos" pitchFamily="34" charset="0"/>
-                <a:ea typeface="Aptos" pitchFamily="34" charset="-122"/>
-                <a:cs typeface="Aptos" pitchFamily="34" charset="-120"/>
-              </a:rPr>
-              <a:t>Generative AI projects may be prioritized for internal knowledge management before public-facing use.</a:t>
-            </a:r>
-            <a:endParaRPr lang="en-US" sz="2100" dirty="0"/>
-          </a:p>
-          <a:p>
-            <a:r>
-              <a:rPr lang="en-US" sz="2100" dirty="0">
-                <a:solidFill>
-                  <a:srgbClr val="17364A"/>
-                </a:solidFill>
-                <a:latin typeface="Aptos" pitchFamily="34" charset="0"/>
-                <a:ea typeface="Aptos" pitchFamily="34" charset="-122"/>
-                <a:cs typeface="Aptos" pitchFamily="34" charset="-120"/>
-              </a:rPr>
-              <a:t>Predictive analytics projects may be prioritized only when data and validation plans are mature.</a:t>
-            </a:r>
-            <a:endParaRPr lang="en-US" sz="2100" dirty="0"/>
-          </a:p>
-          <a:p>
-            <a:r>
-              <a:rPr lang="en-US" sz="2100" dirty="0">
-                <a:solidFill>
-                  <a:srgbClr val="17364A"/>
-                </a:solidFill>
-                <a:latin typeface="Aptos" pitchFamily="34" charset="0"/>
-                <a:ea typeface="Aptos" pitchFamily="34" charset="-122"/>
-                <a:cs typeface="Aptos" pitchFamily="34" charset="-120"/>
-              </a:rPr>
-              <a:t>Agentic workflows may be deferred until governance has defined decision rights, access controls, and.</a:t>
-            </a:r>
-            <a:endParaRPr lang="en-US" sz="2100" dirty="0"/>
-          </a:p>
-        </p:txBody>
-      </p:sp>
-      <p:sp>
-        <p:nvSpPr>
-          <p:cNvPr id="12" name="Shape 10"/>
-          <p:cNvSpPr/>
-          <p:nvPr/>
-        </p:nvSpPr>
-        <p:spPr>
-          <a:xfrm>
-            <a:off x="7909560" y="1417320"/>
-            <a:ext cx="3154680" cy="1828800"/>
+            <a:pPr algn="ctr" indent="0" marL="0">
+              <a:buNone/>
+            </a:pPr>
+            <a:r>
+              <a:rPr lang="en-US" sz="1500" b="1" dirty="0">
+                <a:solidFill>
+                  <a:srgbClr val="FFFFFF"/>
+                </a:solidFill>
+                <a:latin typeface="Aptos" pitchFamily="34" charset="0"/>
+                <a:ea typeface="Aptos" pitchFamily="34" charset="-122"/>
+                <a:cs typeface="Aptos" pitchFamily="34" charset="-120"/>
+              </a:rPr>
+              <a:t>Plan</a:t>
+            </a:r>
+            <a:endParaRPr lang="en-US" sz="1500" dirty="0"/>
+          </a:p>
+        </p:txBody>
+      </p:sp>
+      <p:sp>
+        <p:nvSpPr>
+          <p:cNvPr id="16" name="Shape 14"/>
+          <p:cNvSpPr/>
+          <p:nvPr/>
+        </p:nvSpPr>
+        <p:spPr>
+          <a:xfrm>
+            <a:off x="8976360" y="3319272"/>
+            <a:ext cx="792480" cy="749808"/>
           </a:xfrm>
           <a:prstGeom prst="roundRect">
             <a:avLst>
-              <a:gd name="adj" fmla="val 6000"/>
+              <a:gd name="adj" fmla="val 14634"/>
             </a:avLst>
           </a:prstGeom>
           <a:solidFill>
-            <a:srgbClr val="EEF8ED"/>
+            <a:srgbClr val="2F8A28"/>
           </a:solidFill>
           <a:ln w="12700">
             <a:solidFill>
-              <a:srgbClr val="B9D7E6"/>
+              <a:srgbClr val="2F8A28"/>
             </a:solidFill>
             <a:prstDash val="solid"/>
           </a:ln>
@@ -4623,98 +5017,189 @@
       </p:sp>
       <p:sp>
         <p:nvSpPr>
-          <p:cNvPr id="13" name="Text 11"/>
-          <p:cNvSpPr/>
-          <p:nvPr/>
-        </p:nvSpPr>
-        <p:spPr>
-          <a:xfrm>
-            <a:off x="8074152" y="1563624"/>
-            <a:ext cx="2825496" cy="256032"/>
-          </a:xfrm>
-          <a:prstGeom prst="rect">
-            <a:avLst/>
-          </a:prstGeom>
-          <a:noFill/>
-          <a:ln/>
-        </p:spPr>
-        <p:txBody>
-          <a:bodyPr wrap="square" lIns="0" tIns="0" rIns="0" bIns="0" rtlCol="0" anchor="ctr"/>
-          <a:lstStyle/>
-          <a:p>
-            <a:pPr indent="0" marL="0">
-              <a:buNone/>
-            </a:pPr>
-            <a:r>
-              <a:rPr lang="en-US" sz="1300" b="1" dirty="0">
-                <a:solidFill>
-                  <a:srgbClr val="0068B7"/>
-                </a:solidFill>
-                <a:latin typeface="Aptos" pitchFamily="34" charset="0"/>
-                <a:ea typeface="Aptos" pitchFamily="34" charset="-122"/>
-                <a:cs typeface="Aptos" pitchFamily="34" charset="-120"/>
-              </a:rPr>
-              <a:t>Key idea</a:t>
-            </a:r>
-            <a:endParaRPr lang="en-US" sz="1300" dirty="0"/>
-          </a:p>
-        </p:txBody>
-      </p:sp>
-      <p:sp>
-        <p:nvSpPr>
-          <p:cNvPr id="14" name="Text 12"/>
-          <p:cNvSpPr/>
-          <p:nvPr/>
-        </p:nvSpPr>
-        <p:spPr>
-          <a:xfrm>
-            <a:off x="8074152" y="1920240"/>
-            <a:ext cx="2825496" cy="1188720"/>
-          </a:xfrm>
-          <a:prstGeom prst="rect">
-            <a:avLst/>
-          </a:prstGeom>
-          <a:noFill/>
-          <a:ln/>
-        </p:spPr>
-        <p:txBody>
-          <a:bodyPr wrap="square" lIns="0" tIns="0" rIns="0" bIns="0" rtlCol="0" anchor="t">
+          <p:cNvPr id="17" name="Text 15"/>
+          <p:cNvSpPr/>
+          <p:nvPr/>
+        </p:nvSpPr>
+        <p:spPr>
+          <a:xfrm>
+            <a:off x="9049512" y="3511296"/>
+            <a:ext cx="646176" cy="310896"/>
+          </a:xfrm>
+          <a:prstGeom prst="rect">
+            <a:avLst/>
+          </a:prstGeom>
+          <a:noFill/>
+          <a:ln/>
+        </p:spPr>
+        <p:txBody>
+          <a:bodyPr wrap="square" lIns="0" tIns="0" rIns="0" bIns="0" rtlCol="0" anchor="ctr">
             <a:normAutofit/>
           </a:bodyPr>
           <a:lstStyle/>
           <a:p>
-            <a:pPr indent="0" marL="0">
-              <a:buNone/>
-            </a:pPr>
-            <a:r>
-              <a:rPr lang="en-US" sz="1550" dirty="0">
-                <a:solidFill>
-                  <a:srgbClr val="17364A"/>
-                </a:solidFill>
-                <a:latin typeface="Aptos" pitchFamily="34" charset="0"/>
-                <a:ea typeface="Aptos" pitchFamily="34" charset="-122"/>
-                <a:cs typeface="Aptos" pitchFamily="34" charset="-120"/>
-              </a:rPr>
-              <a:t>Generative AI projects may be prioritized for internal knowledge management before public-facing use.</a:t>
-            </a:r>
-            <a:endParaRPr lang="en-US" sz="1550" dirty="0"/>
-          </a:p>
-        </p:txBody>
-      </p:sp>
-      <p:sp>
-        <p:nvSpPr>
-          <p:cNvPr id="15" name="Shape 13"/>
-          <p:cNvSpPr/>
-          <p:nvPr/>
-        </p:nvSpPr>
-        <p:spPr>
-          <a:xfrm>
-            <a:off x="7909560" y="3520440"/>
-            <a:ext cx="3154680" cy="1737360"/>
+            <a:pPr algn="ctr" indent="0" marL="0">
+              <a:buNone/>
+            </a:pPr>
+            <a:r>
+              <a:rPr lang="en-US" sz="1500" b="1" dirty="0">
+                <a:solidFill>
+                  <a:srgbClr val="FFFFFF"/>
+                </a:solidFill>
+                <a:latin typeface="Aptos" pitchFamily="34" charset="0"/>
+                <a:ea typeface="Aptos" pitchFamily="34" charset="-122"/>
+                <a:cs typeface="Aptos" pitchFamily="34" charset="-120"/>
+              </a:rPr>
+              <a:t>Do</a:t>
+            </a:r>
+            <a:endParaRPr lang="en-US" sz="1500" dirty="0"/>
+          </a:p>
+        </p:txBody>
+      </p:sp>
+      <p:sp>
+        <p:nvSpPr>
+          <p:cNvPr id="18" name="Shape 16"/>
+          <p:cNvSpPr/>
+          <p:nvPr/>
+        </p:nvSpPr>
+        <p:spPr>
+          <a:xfrm>
+            <a:off x="10024872" y="3319272"/>
+            <a:ext cx="792480" cy="749808"/>
           </a:xfrm>
           <a:prstGeom prst="roundRect">
             <a:avLst>
-              <a:gd name="adj" fmla="val 6316"/>
+              <a:gd name="adj" fmla="val 14634"/>
+            </a:avLst>
+          </a:prstGeom>
+          <a:solidFill>
+            <a:srgbClr val="D69A2D"/>
+          </a:solidFill>
+          <a:ln w="12700">
+            <a:solidFill>
+              <a:srgbClr val="D69A2D"/>
+            </a:solidFill>
+            <a:prstDash val="solid"/>
+          </a:ln>
+        </p:spPr>
+      </p:sp>
+      <p:sp>
+        <p:nvSpPr>
+          <p:cNvPr id="19" name="Text 17"/>
+          <p:cNvSpPr/>
+          <p:nvPr/>
+        </p:nvSpPr>
+        <p:spPr>
+          <a:xfrm>
+            <a:off x="10098024" y="3511296"/>
+            <a:ext cx="646176" cy="310896"/>
+          </a:xfrm>
+          <a:prstGeom prst="rect">
+            <a:avLst/>
+          </a:prstGeom>
+          <a:noFill/>
+          <a:ln/>
+        </p:spPr>
+        <p:txBody>
+          <a:bodyPr wrap="square" lIns="0" tIns="0" rIns="0" bIns="0" rtlCol="0" anchor="ctr">
+            <a:normAutofit/>
+          </a:bodyPr>
+          <a:lstStyle/>
+          <a:p>
+            <a:pPr algn="ctr" indent="0" marL="0">
+              <a:buNone/>
+            </a:pPr>
+            <a:r>
+              <a:rPr lang="en-US" sz="1500" b="1" dirty="0">
+                <a:solidFill>
+                  <a:srgbClr val="FFFFFF"/>
+                </a:solidFill>
+                <a:latin typeface="Aptos" pitchFamily="34" charset="0"/>
+                <a:ea typeface="Aptos" pitchFamily="34" charset="-122"/>
+                <a:cs typeface="Aptos" pitchFamily="34" charset="-120"/>
+              </a:rPr>
+              <a:t>Review</a:t>
+            </a:r>
+            <a:endParaRPr lang="en-US" sz="1500" dirty="0"/>
+          </a:p>
+        </p:txBody>
+      </p:sp>
+      <p:sp>
+        <p:nvSpPr>
+          <p:cNvPr id="20" name="Shape 18"/>
+          <p:cNvSpPr/>
+          <p:nvPr/>
+        </p:nvSpPr>
+        <p:spPr>
+          <a:xfrm>
+            <a:off x="8293608" y="4389120"/>
+            <a:ext cx="2157984" cy="0"/>
+          </a:xfrm>
+          <a:prstGeom prst="line">
+            <a:avLst/>
+          </a:prstGeom>
+          <a:noFill/>
+          <a:ln w="25400">
+            <a:solidFill>
+              <a:srgbClr val="8ABBD8"/>
+            </a:solidFill>
+            <a:prstDash val="solid"/>
+          </a:ln>
+        </p:spPr>
+      </p:sp>
+      <p:sp>
+        <p:nvSpPr>
+          <p:cNvPr id="21" name="Text 19"/>
+          <p:cNvSpPr/>
+          <p:nvPr/>
+        </p:nvSpPr>
+        <p:spPr>
+          <a:xfrm>
+            <a:off x="7909560" y="3977640"/>
+            <a:ext cx="2926080" cy="182880"/>
+          </a:xfrm>
+          <a:prstGeom prst="rect">
+            <a:avLst/>
+          </a:prstGeom>
+          <a:noFill/>
+          <a:ln/>
+        </p:spPr>
+        <p:txBody>
+          <a:bodyPr wrap="square" lIns="0" tIns="0" rIns="0" bIns="0" rtlCol="0" anchor="ctr"/>
+          <a:lstStyle/>
+          <a:p>
+            <a:pPr algn="ctr" indent="0" marL="0">
+              <a:buNone/>
+            </a:pPr>
+            <a:r>
+              <a:rPr lang="en-US" sz="1000" dirty="0">
+                <a:solidFill>
+                  <a:srgbClr val="003A63"/>
+                </a:solidFill>
+                <a:latin typeface="Aptos" pitchFamily="34" charset="0"/>
+                <a:ea typeface="Aptos" pitchFamily="34" charset="-122"/>
+                <a:cs typeface="Aptos" pitchFamily="34" charset="-120"/>
+              </a:rPr>
+              <a:t>Dependencies visible</a:t>
+            </a:r>
+            <a:endParaRPr lang="en-US" sz="1000" dirty="0"/>
+          </a:p>
+        </p:txBody>
+      </p:sp>
+      <p:sp>
+        <p:nvSpPr>
+          <p:cNvPr id="22" name="Shape 20"/>
+          <p:cNvSpPr/>
+          <p:nvPr/>
+        </p:nvSpPr>
+        <p:spPr>
+          <a:xfrm>
+            <a:off x="7635240" y="4498848"/>
+            <a:ext cx="3474720" cy="1143000"/>
+          </a:xfrm>
+          <a:prstGeom prst="roundRect">
+            <a:avLst>
+              <a:gd name="adj" fmla="val 9600"/>
             </a:avLst>
           </a:prstGeom>
           <a:solidFill>
@@ -4730,14 +5215,14 @@
       </p:sp>
       <p:sp>
         <p:nvSpPr>
-          <p:cNvPr id="16" name="Text 14"/>
-          <p:cNvSpPr/>
-          <p:nvPr/>
-        </p:nvSpPr>
-        <p:spPr>
-          <a:xfrm>
-            <a:off x="8074152" y="3666744"/>
-            <a:ext cx="2825496" cy="256032"/>
+          <p:cNvPr id="23" name="Text 21"/>
+          <p:cNvSpPr/>
+          <p:nvPr/>
+        </p:nvSpPr>
+        <p:spPr>
+          <a:xfrm>
+            <a:off x="7799832" y="4645152"/>
+            <a:ext cx="3145536" cy="256032"/>
           </a:xfrm>
           <a:prstGeom prst="rect">
             <a:avLst/>
@@ -4761,7 +5246,7 @@
                 <a:ea typeface="Aptos" pitchFamily="34" charset="-122"/>
                 <a:cs typeface="Aptos" pitchFamily="34" charset="-120"/>
               </a:rPr>
-              <a:t>Use this for</a:t>
+              <a:t>Next action</a:t>
             </a:r>
             <a:endParaRPr lang="en-US" sz="1300" dirty="0"/>
           </a:p>
@@ -4769,14 +5254,14 @@
       </p:sp>
       <p:sp>
         <p:nvSpPr>
-          <p:cNvPr id="17" name="Text 15"/>
-          <p:cNvSpPr/>
-          <p:nvPr/>
-        </p:nvSpPr>
-        <p:spPr>
-          <a:xfrm>
-            <a:off x="8074152" y="4023360"/>
-            <a:ext cx="2825496" cy="1097280"/>
+          <p:cNvPr id="24" name="Text 22"/>
+          <p:cNvSpPr/>
+          <p:nvPr/>
+        </p:nvSpPr>
+        <p:spPr>
+          <a:xfrm>
+            <a:off x="7799832" y="5001768"/>
+            <a:ext cx="3145536" cy="502920"/>
           </a:xfrm>
           <a:prstGeom prst="rect">
             <a:avLst/>
@@ -4802,7 +5287,7 @@
                 <a:ea typeface="Aptos" pitchFamily="34" charset="-122"/>
                 <a:cs typeface="Aptos" pitchFamily="34" charset="-120"/>
               </a:rPr>
-              <a:t>Connect the concept to public health decisions, safeguards, documentation, or implementation work.</a:t>
+              <a:t>Use the concept to clarify workflow changes, dependencies, staffing, procurement requirements, training needs, and implementation checkpoints.</a:t>
             </a:r>
             <a:endParaRPr lang="en-US" sz="1550" dirty="0"/>
           </a:p>
@@ -4976,8 +5461,8 @@
         </p:nvSpPr>
         <p:spPr>
           <a:xfrm>
-            <a:off x="9966960" y="6537960"/>
-            <a:ext cx="1645920" cy="201168"/>
+            <a:off x="9646920" y="6537960"/>
+            <a:ext cx="1965960" cy="201168"/>
           </a:xfrm>
           <a:prstGeom prst="rect">
             <a:avLst/>
@@ -5001,7 +5486,7 @@
                 <a:ea typeface="Aptos" pitchFamily="34" charset="-122"/>
                 <a:cs typeface="Aptos" pitchFamily="34" charset="-120"/>
               </a:rPr>
-              <a:t>Â© Paula Soper</a:t>
+              <a:t>Copyright Paula Soper</a:t>
             </a:r>
             <a:endParaRPr lang="en-US" sz="800" dirty="0"/>
           </a:p>
@@ -5048,77 +5533,13 @@
       </p:sp>
       <p:sp>
         <p:nvSpPr>
-          <p:cNvPr id="8" name="Shape 6"/>
+          <p:cNvPr id="8" name="Text 6"/>
           <p:cNvSpPr/>
           <p:nvPr/>
         </p:nvSpPr>
         <p:spPr>
           <a:xfrm>
             <a:off x="640080" y="658368"/>
-            <a:ext cx="420624" cy="420624"/>
-          </a:xfrm>
-          <a:prstGeom prst="ellipse">
-            <a:avLst/>
-          </a:prstGeom>
-          <a:solidFill>
-            <a:srgbClr val="0068B7"/>
-          </a:solidFill>
-          <a:ln w="12700">
-            <a:solidFill>
-              <a:srgbClr val="0068B7"/>
-            </a:solidFill>
-            <a:prstDash val="solid"/>
-          </a:ln>
-        </p:spPr>
-      </p:sp>
-      <p:sp>
-        <p:nvSpPr>
-          <p:cNvPr id="9" name="Text 7"/>
-          <p:cNvSpPr/>
-          <p:nvPr/>
-        </p:nvSpPr>
-        <p:spPr>
-          <a:xfrm>
-            <a:off x="640080" y="731520"/>
-            <a:ext cx="420624" cy="164592"/>
-          </a:xfrm>
-          <a:prstGeom prst="rect">
-            <a:avLst/>
-          </a:prstGeom>
-          <a:noFill/>
-          <a:ln/>
-        </p:spPr>
-        <p:txBody>
-          <a:bodyPr wrap="square" lIns="0" tIns="0" rIns="0" bIns="0" rtlCol="0" anchor="ctr"/>
-          <a:lstStyle/>
-          <a:p>
-            <a:pPr algn="ctr" indent="0" marL="0">
-              <a:buNone/>
-            </a:pPr>
-            <a:r>
-              <a:rPr lang="en-US" sz="1100" b="1" dirty="0">
-                <a:solidFill>
-                  <a:srgbClr val="FFFFFF"/>
-                </a:solidFill>
-                <a:latin typeface="Aptos" pitchFamily="34" charset="0"/>
-                <a:ea typeface="Aptos" pitchFamily="34" charset="-122"/>
-                <a:cs typeface="Aptos" pitchFamily="34" charset="-120"/>
-              </a:rPr>
-              <a:t>9</a:t>
-            </a:r>
-            <a:endParaRPr lang="en-US" sz="1100" dirty="0"/>
-          </a:p>
-        </p:txBody>
-      </p:sp>
-      <p:sp>
-        <p:nvSpPr>
-          <p:cNvPr id="10" name="Text 8"/>
-          <p:cNvSpPr/>
-          <p:nvPr/>
-        </p:nvSpPr>
-        <p:spPr>
-          <a:xfrm>
-            <a:off x="640080" y="621792"/>
             <a:ext cx="10881360" cy="713232"/>
           </a:xfrm>
           <a:prstGeom prst="rect">
@@ -5153,14 +5574,14 @@
       </p:sp>
       <p:sp>
         <p:nvSpPr>
-          <p:cNvPr id="11" name="Text 9"/>
+          <p:cNvPr id="9" name="Text 7"/>
           <p:cNvSpPr/>
           <p:nvPr/>
         </p:nvSpPr>
         <p:spPr>
           <a:xfrm>
             <a:off x="868680" y="1508760"/>
-            <a:ext cx="6537960" cy="4160520"/>
+            <a:ext cx="6309360" cy="4160520"/>
           </a:xfrm>
           <a:prstGeom prst="rect">
             <a:avLst/>
@@ -5219,18 +5640,18 @@
       </p:sp>
       <p:sp>
         <p:nvSpPr>
-          <p:cNvPr id="12" name="Shape 10"/>
-          <p:cNvSpPr/>
-          <p:nvPr/>
-        </p:nvSpPr>
-        <p:spPr>
-          <a:xfrm>
-            <a:off x="7909560" y="1417320"/>
-            <a:ext cx="3154680" cy="1828800"/>
+          <p:cNvPr id="10" name="Shape 8"/>
+          <p:cNvSpPr/>
+          <p:nvPr/>
+        </p:nvSpPr>
+        <p:spPr>
+          <a:xfrm>
+            <a:off x="7635240" y="1325880"/>
+            <a:ext cx="3474720" cy="1325880"/>
           </a:xfrm>
           <a:prstGeom prst="roundRect">
             <a:avLst>
-              <a:gd name="adj" fmla="val 6000"/>
+              <a:gd name="adj" fmla="val 8276"/>
             </a:avLst>
           </a:prstGeom>
           <a:solidFill>
@@ -5246,14 +5667,14 @@
       </p:sp>
       <p:sp>
         <p:nvSpPr>
-          <p:cNvPr id="13" name="Text 11"/>
-          <p:cNvSpPr/>
-          <p:nvPr/>
-        </p:nvSpPr>
-        <p:spPr>
-          <a:xfrm>
-            <a:off x="8074152" y="1563624"/>
-            <a:ext cx="2825496" cy="256032"/>
+          <p:cNvPr id="11" name="Text 9"/>
+          <p:cNvSpPr/>
+          <p:nvPr/>
+        </p:nvSpPr>
+        <p:spPr>
+          <a:xfrm>
+            <a:off x="7799832" y="1472184"/>
+            <a:ext cx="3145536" cy="256032"/>
           </a:xfrm>
           <a:prstGeom prst="rect">
             <a:avLst/>
@@ -5277,7 +5698,7 @@
                 <a:ea typeface="Aptos" pitchFamily="34" charset="-122"/>
                 <a:cs typeface="Aptos" pitchFamily="34" charset="-120"/>
               </a:rPr>
-              <a:t>Key idea</a:t>
+              <a:t>Core concept</a:t>
             </a:r>
             <a:endParaRPr lang="en-US" sz="1300" dirty="0"/>
           </a:p>
@@ -5285,14 +5706,14 @@
       </p:sp>
       <p:sp>
         <p:nvSpPr>
-          <p:cNvPr id="14" name="Text 12"/>
-          <p:cNvSpPr/>
-          <p:nvPr/>
-        </p:nvSpPr>
-        <p:spPr>
-          <a:xfrm>
-            <a:off x="8074152" y="1920240"/>
-            <a:ext cx="2825496" cy="1188720"/>
+          <p:cNvPr id="12" name="Text 10"/>
+          <p:cNvSpPr/>
+          <p:nvPr/>
+        </p:nvSpPr>
+        <p:spPr>
+          <a:xfrm>
+            <a:off x="7799832" y="1828800"/>
+            <a:ext cx="3145536" cy="685800"/>
           </a:xfrm>
           <a:prstGeom prst="rect">
             <a:avLst/>
@@ -5326,18 +5747,159 @@
       </p:sp>
       <p:sp>
         <p:nvSpPr>
-          <p:cNvPr id="15" name="Shape 13"/>
-          <p:cNvSpPr/>
-          <p:nvPr/>
-        </p:nvSpPr>
-        <p:spPr>
-          <a:xfrm>
-            <a:off x="7909560" y="3520440"/>
-            <a:ext cx="3154680" cy="1737360"/>
+          <p:cNvPr id="13" name="Shape 11"/>
+          <p:cNvSpPr/>
+          <p:nvPr/>
+        </p:nvSpPr>
+        <p:spPr>
+          <a:xfrm>
+            <a:off x="7635240" y="2788920"/>
+            <a:ext cx="3474720" cy="1536192"/>
           </a:xfrm>
           <a:prstGeom prst="roundRect">
             <a:avLst>
-              <a:gd name="adj" fmla="val 6316"/>
+              <a:gd name="adj" fmla="val 7143"/>
+            </a:avLst>
+          </a:prstGeom>
+          <a:solidFill>
+            <a:srgbClr val="FFFFFF">
+              <a:alpha val="88000"/>
+            </a:srgbClr>
+          </a:solidFill>
+          <a:ln w="12700">
+            <a:solidFill>
+              <a:srgbClr val="D6E8F2"/>
+            </a:solidFill>
+            <a:prstDash val="solid"/>
+          </a:ln>
+        </p:spPr>
+      </p:sp>
+      <p:sp>
+        <p:nvSpPr>
+          <p:cNvPr id="14" name="Shape 12"/>
+          <p:cNvSpPr/>
+          <p:nvPr/>
+        </p:nvSpPr>
+        <p:spPr>
+          <a:xfrm>
+            <a:off x="8074152" y="3291840"/>
+            <a:ext cx="2596896" cy="749808"/>
+          </a:xfrm>
+          <a:prstGeom prst="rect">
+            <a:avLst/>
+          </a:prstGeom>
+          <a:solidFill>
+            <a:srgbClr val="EAF6F8"/>
+          </a:solidFill>
+          <a:ln w="12700">
+            <a:solidFill>
+              <a:srgbClr val="8ABBD8"/>
+            </a:solidFill>
+            <a:prstDash val="solid"/>
+          </a:ln>
+        </p:spPr>
+      </p:sp>
+      <p:sp>
+        <p:nvSpPr>
+          <p:cNvPr id="15" name="Shape 13"/>
+          <p:cNvSpPr/>
+          <p:nvPr/>
+        </p:nvSpPr>
+        <p:spPr>
+          <a:xfrm>
+            <a:off x="8202168" y="3721608"/>
+            <a:ext cx="2340864" cy="0"/>
+          </a:xfrm>
+          <a:prstGeom prst="line">
+            <a:avLst/>
+          </a:prstGeom>
+          <a:noFill/>
+          <a:ln w="19050">
+            <a:solidFill>
+              <a:srgbClr val="0068B7"/>
+            </a:solidFill>
+            <a:prstDash val="solid"/>
+          </a:ln>
+        </p:spPr>
+      </p:sp>
+      <p:sp>
+        <p:nvSpPr>
+          <p:cNvPr id="16" name="Shape 14"/>
+          <p:cNvSpPr/>
+          <p:nvPr/>
+        </p:nvSpPr>
+        <p:spPr>
+          <a:xfrm>
+            <a:off x="9198864" y="4206240"/>
+            <a:ext cx="347472" cy="347472"/>
+          </a:xfrm>
+          <a:prstGeom prst="ellipse">
+            <a:avLst/>
+          </a:prstGeom>
+          <a:solidFill>
+            <a:srgbClr val="2F8A28"/>
+          </a:solidFill>
+          <a:ln w="12700">
+            <a:solidFill>
+              <a:srgbClr val="2F8A28"/>
+            </a:solidFill>
+            <a:prstDash val="solid"/>
+          </a:ln>
+        </p:spPr>
+      </p:sp>
+      <p:sp>
+        <p:nvSpPr>
+          <p:cNvPr id="17" name="Text 15"/>
+          <p:cNvSpPr/>
+          <p:nvPr/>
+        </p:nvSpPr>
+        <p:spPr>
+          <a:xfrm>
+            <a:off x="7909560" y="3977640"/>
+            <a:ext cx="2926080" cy="182880"/>
+          </a:xfrm>
+          <a:prstGeom prst="rect">
+            <a:avLst/>
+          </a:prstGeom>
+          <a:noFill/>
+          <a:ln/>
+        </p:spPr>
+        <p:txBody>
+          <a:bodyPr wrap="square" lIns="0" tIns="0" rIns="0" bIns="0" rtlCol="0" anchor="ctr"/>
+          <a:lstStyle/>
+          <a:p>
+            <a:pPr algn="ctr" indent="0" marL="0">
+              <a:buNone/>
+            </a:pPr>
+            <a:r>
+              <a:rPr lang="en-US" sz="1000" dirty="0">
+                <a:solidFill>
+                  <a:srgbClr val="003A63"/>
+                </a:solidFill>
+                <a:latin typeface="Aptos" pitchFamily="34" charset="0"/>
+                <a:ea typeface="Aptos" pitchFamily="34" charset="-122"/>
+                <a:cs typeface="Aptos" pitchFamily="34" charset="-120"/>
+              </a:rPr>
+              <a:t>Concept to action</a:t>
+            </a:r>
+            <a:endParaRPr lang="en-US" sz="1000" dirty="0"/>
+          </a:p>
+        </p:txBody>
+      </p:sp>
+      <p:sp>
+        <p:nvSpPr>
+          <p:cNvPr id="18" name="Shape 16"/>
+          <p:cNvSpPr/>
+          <p:nvPr/>
+        </p:nvSpPr>
+        <p:spPr>
+          <a:xfrm>
+            <a:off x="7635240" y="4498848"/>
+            <a:ext cx="3474720" cy="1143000"/>
+          </a:xfrm>
+          <a:prstGeom prst="roundRect">
+            <a:avLst>
+              <a:gd name="adj" fmla="val 9600"/>
             </a:avLst>
           </a:prstGeom>
           <a:solidFill>
@@ -5353,14 +5915,14 @@
       </p:sp>
       <p:sp>
         <p:nvSpPr>
-          <p:cNvPr id="16" name="Text 14"/>
-          <p:cNvSpPr/>
-          <p:nvPr/>
-        </p:nvSpPr>
-        <p:spPr>
-          <a:xfrm>
-            <a:off x="8074152" y="3666744"/>
-            <a:ext cx="2825496" cy="256032"/>
+          <p:cNvPr id="19" name="Text 17"/>
+          <p:cNvSpPr/>
+          <p:nvPr/>
+        </p:nvSpPr>
+        <p:spPr>
+          <a:xfrm>
+            <a:off x="7799832" y="4645152"/>
+            <a:ext cx="3145536" cy="256032"/>
           </a:xfrm>
           <a:prstGeom prst="rect">
             <a:avLst/>
@@ -5384,7 +5946,7 @@
                 <a:ea typeface="Aptos" pitchFamily="34" charset="-122"/>
                 <a:cs typeface="Aptos" pitchFamily="34" charset="-120"/>
               </a:rPr>
-              <a:t>Use this for</a:t>
+              <a:t>Apply it</a:t>
             </a:r>
             <a:endParaRPr lang="en-US" sz="1300" dirty="0"/>
           </a:p>
@@ -5392,14 +5954,14 @@
       </p:sp>
       <p:sp>
         <p:nvSpPr>
-          <p:cNvPr id="17" name="Text 15"/>
-          <p:cNvSpPr/>
-          <p:nvPr/>
-        </p:nvSpPr>
-        <p:spPr>
-          <a:xfrm>
-            <a:off x="8074152" y="4023360"/>
-            <a:ext cx="2825496" cy="1097280"/>
+          <p:cNvPr id="20" name="Text 18"/>
+          <p:cNvSpPr/>
+          <p:nvPr/>
+        </p:nvSpPr>
+        <p:spPr>
+          <a:xfrm>
+            <a:off x="7799832" y="5001768"/>
+            <a:ext cx="3145536" cy="502920"/>
           </a:xfrm>
           <a:prstGeom prst="rect">
             <a:avLst/>
@@ -5425,7 +5987,7 @@
                 <a:ea typeface="Aptos" pitchFamily="34" charset="-122"/>
                 <a:cs typeface="Aptos" pitchFamily="34" charset="-120"/>
               </a:rPr>
-              <a:t>Connect the concept to public health decisions, safeguards, documentation, or implementation work.</a:t>
+              <a:t>Connect the concept to public health purpose, responsible use, required safeguards, documentation, and the next action a department should take.</a:t>
             </a:r>
             <a:endParaRPr lang="en-US" sz="1550" dirty="0"/>
           </a:p>
@@ -5599,8 +6161,8 @@
         </p:nvSpPr>
         <p:spPr>
           <a:xfrm>
-            <a:off x="9966960" y="6537960"/>
-            <a:ext cx="1645920" cy="201168"/>
+            <a:off x="9646920" y="6537960"/>
+            <a:ext cx="1965960" cy="201168"/>
           </a:xfrm>
           <a:prstGeom prst="rect">
             <a:avLst/>
@@ -5624,7 +6186,7 @@
                 <a:ea typeface="Aptos" pitchFamily="34" charset="-122"/>
                 <a:cs typeface="Aptos" pitchFamily="34" charset="-120"/>
               </a:rPr>
-              <a:t>Â© Paula Soper</a:t>
+              <a:t>Copyright Paula Soper</a:t>
             </a:r>
             <a:endParaRPr lang="en-US" sz="800" dirty="0"/>
           </a:p>
@@ -5719,7 +6281,7 @@
         <p:spPr>
           <a:xfrm>
             <a:off x="868680" y="1508760"/>
-            <a:ext cx="6537960" cy="4160520"/>
+            <a:ext cx="6309360" cy="4160520"/>
           </a:xfrm>
           <a:prstGeom prst="rect">
             <a:avLst/>
@@ -5770,12 +6332,12 @@
         </p:nvSpPr>
         <p:spPr>
           <a:xfrm>
-            <a:off x="7909560" y="1417320"/>
-            <a:ext cx="3154680" cy="1828800"/>
+            <a:off x="7635240" y="1325880"/>
+            <a:ext cx="3474720" cy="1325880"/>
           </a:xfrm>
           <a:prstGeom prst="roundRect">
             <a:avLst>
-              <a:gd name="adj" fmla="val 6000"/>
+              <a:gd name="adj" fmla="val 8276"/>
             </a:avLst>
           </a:prstGeom>
           <a:solidFill>
@@ -5797,8 +6359,8 @@
         </p:nvSpPr>
         <p:spPr>
           <a:xfrm>
-            <a:off x="8074152" y="1563624"/>
-            <a:ext cx="2825496" cy="256032"/>
+            <a:off x="7799832" y="1472184"/>
+            <a:ext cx="3145536" cy="256032"/>
           </a:xfrm>
           <a:prstGeom prst="rect">
             <a:avLst/>
@@ -5822,7 +6384,7 @@
                 <a:ea typeface="Aptos" pitchFamily="34" charset="-122"/>
                 <a:cs typeface="Aptos" pitchFamily="34" charset="-120"/>
               </a:rPr>
-              <a:t>Key idea</a:t>
+              <a:t>Core concept</a:t>
             </a:r>
             <a:endParaRPr lang="en-US" sz="1300" dirty="0"/>
           </a:p>
@@ -5836,8 +6398,8 @@
         </p:nvSpPr>
         <p:spPr>
           <a:xfrm>
-            <a:off x="8074152" y="1920240"/>
-            <a:ext cx="2825496" cy="1188720"/>
+            <a:off x="7799832" y="1828800"/>
+            <a:ext cx="3145536" cy="685800"/>
           </a:xfrm>
           <a:prstGeom prst="rect">
             <a:avLst/>
@@ -5877,12 +6439,153 @@
         </p:nvSpPr>
         <p:spPr>
           <a:xfrm>
-            <a:off x="7909560" y="3520440"/>
-            <a:ext cx="3154680" cy="1737360"/>
+            <a:off x="7635240" y="2788920"/>
+            <a:ext cx="3474720" cy="1536192"/>
           </a:xfrm>
           <a:prstGeom prst="roundRect">
             <a:avLst>
-              <a:gd name="adj" fmla="val 6316"/>
+              <a:gd name="adj" fmla="val 7143"/>
+            </a:avLst>
+          </a:prstGeom>
+          <a:solidFill>
+            <a:srgbClr val="FFFFFF">
+              <a:alpha val="88000"/>
+            </a:srgbClr>
+          </a:solidFill>
+          <a:ln w="12700">
+            <a:solidFill>
+              <a:srgbClr val="D6E8F2"/>
+            </a:solidFill>
+            <a:prstDash val="solid"/>
+          </a:ln>
+        </p:spPr>
+      </p:sp>
+      <p:sp>
+        <p:nvSpPr>
+          <p:cNvPr id="14" name="Shape 12"/>
+          <p:cNvSpPr/>
+          <p:nvPr/>
+        </p:nvSpPr>
+        <p:spPr>
+          <a:xfrm>
+            <a:off x="8074152" y="3291840"/>
+            <a:ext cx="2596896" cy="749808"/>
+          </a:xfrm>
+          <a:prstGeom prst="rect">
+            <a:avLst/>
+          </a:prstGeom>
+          <a:solidFill>
+            <a:srgbClr val="EAF6F8"/>
+          </a:solidFill>
+          <a:ln w="12700">
+            <a:solidFill>
+              <a:srgbClr val="8ABBD8"/>
+            </a:solidFill>
+            <a:prstDash val="solid"/>
+          </a:ln>
+        </p:spPr>
+      </p:sp>
+      <p:sp>
+        <p:nvSpPr>
+          <p:cNvPr id="15" name="Shape 13"/>
+          <p:cNvSpPr/>
+          <p:nvPr/>
+        </p:nvSpPr>
+        <p:spPr>
+          <a:xfrm>
+            <a:off x="8202168" y="3721608"/>
+            <a:ext cx="2340864" cy="0"/>
+          </a:xfrm>
+          <a:prstGeom prst="line">
+            <a:avLst/>
+          </a:prstGeom>
+          <a:noFill/>
+          <a:ln w="19050">
+            <a:solidFill>
+              <a:srgbClr val="0068B7"/>
+            </a:solidFill>
+            <a:prstDash val="solid"/>
+          </a:ln>
+        </p:spPr>
+      </p:sp>
+      <p:sp>
+        <p:nvSpPr>
+          <p:cNvPr id="16" name="Shape 14"/>
+          <p:cNvSpPr/>
+          <p:nvPr/>
+        </p:nvSpPr>
+        <p:spPr>
+          <a:xfrm>
+            <a:off x="9198864" y="4206240"/>
+            <a:ext cx="347472" cy="347472"/>
+          </a:xfrm>
+          <a:prstGeom prst="ellipse">
+            <a:avLst/>
+          </a:prstGeom>
+          <a:solidFill>
+            <a:srgbClr val="2F8A28"/>
+          </a:solidFill>
+          <a:ln w="12700">
+            <a:solidFill>
+              <a:srgbClr val="2F8A28"/>
+            </a:solidFill>
+            <a:prstDash val="solid"/>
+          </a:ln>
+        </p:spPr>
+      </p:sp>
+      <p:sp>
+        <p:nvSpPr>
+          <p:cNvPr id="17" name="Text 15"/>
+          <p:cNvSpPr/>
+          <p:nvPr/>
+        </p:nvSpPr>
+        <p:spPr>
+          <a:xfrm>
+            <a:off x="7909560" y="3977640"/>
+            <a:ext cx="2926080" cy="182880"/>
+          </a:xfrm>
+          <a:prstGeom prst="rect">
+            <a:avLst/>
+          </a:prstGeom>
+          <a:noFill/>
+          <a:ln/>
+        </p:spPr>
+        <p:txBody>
+          <a:bodyPr wrap="square" lIns="0" tIns="0" rIns="0" bIns="0" rtlCol="0" anchor="ctr"/>
+          <a:lstStyle/>
+          <a:p>
+            <a:pPr algn="ctr" indent="0" marL="0">
+              <a:buNone/>
+            </a:pPr>
+            <a:r>
+              <a:rPr lang="en-US" sz="1000" dirty="0">
+                <a:solidFill>
+                  <a:srgbClr val="003A63"/>
+                </a:solidFill>
+                <a:latin typeface="Aptos" pitchFamily="34" charset="0"/>
+                <a:ea typeface="Aptos" pitchFamily="34" charset="-122"/>
+                <a:cs typeface="Aptos" pitchFamily="34" charset="-120"/>
+              </a:rPr>
+              <a:t>Concept to action</a:t>
+            </a:r>
+            <a:endParaRPr lang="en-US" sz="1000" dirty="0"/>
+          </a:p>
+        </p:txBody>
+      </p:sp>
+      <p:sp>
+        <p:nvSpPr>
+          <p:cNvPr id="18" name="Shape 16"/>
+          <p:cNvSpPr/>
+          <p:nvPr/>
+        </p:nvSpPr>
+        <p:spPr>
+          <a:xfrm>
+            <a:off x="7635240" y="4498848"/>
+            <a:ext cx="3474720" cy="1143000"/>
+          </a:xfrm>
+          <a:prstGeom prst="roundRect">
+            <a:avLst>
+              <a:gd name="adj" fmla="val 9600"/>
             </a:avLst>
           </a:prstGeom>
           <a:solidFill>
@@ -5898,14 +6601,14 @@
       </p:sp>
       <p:sp>
         <p:nvSpPr>
-          <p:cNvPr id="14" name="Text 12"/>
-          <p:cNvSpPr/>
-          <p:nvPr/>
-        </p:nvSpPr>
-        <p:spPr>
-          <a:xfrm>
-            <a:off x="8074152" y="3666744"/>
-            <a:ext cx="2825496" cy="256032"/>
+          <p:cNvPr id="19" name="Text 17"/>
+          <p:cNvSpPr/>
+          <p:nvPr/>
+        </p:nvSpPr>
+        <p:spPr>
+          <a:xfrm>
+            <a:off x="7799832" y="4645152"/>
+            <a:ext cx="3145536" cy="256032"/>
           </a:xfrm>
           <a:prstGeom prst="rect">
             <a:avLst/>
@@ -5929,7 +6632,7 @@
                 <a:ea typeface="Aptos" pitchFamily="34" charset="-122"/>
                 <a:cs typeface="Aptos" pitchFamily="34" charset="-120"/>
               </a:rPr>
-              <a:t>Use this for</a:t>
+              <a:t>Apply it</a:t>
             </a:r>
             <a:endParaRPr lang="en-US" sz="1300" dirty="0"/>
           </a:p>
@@ -5937,14 +6640,14 @@
       </p:sp>
       <p:sp>
         <p:nvSpPr>
-          <p:cNvPr id="15" name="Text 13"/>
-          <p:cNvSpPr/>
-          <p:nvPr/>
-        </p:nvSpPr>
-        <p:spPr>
-          <a:xfrm>
-            <a:off x="8074152" y="4023360"/>
-            <a:ext cx="2825496" cy="1097280"/>
+          <p:cNvPr id="20" name="Text 18"/>
+          <p:cNvSpPr/>
+          <p:nvPr/>
+        </p:nvSpPr>
+        <p:spPr>
+          <a:xfrm>
+            <a:off x="7799832" y="5001768"/>
+            <a:ext cx="3145536" cy="502920"/>
           </a:xfrm>
           <a:prstGeom prst="rect">
             <a:avLst/>
@@ -5970,7 +6673,7 @@
                 <a:ea typeface="Aptos" pitchFamily="34" charset="-122"/>
                 <a:cs typeface="Aptos" pitchFamily="34" charset="-120"/>
               </a:rPr>
-              <a:t>Connect the concept to public health decisions, safeguards, documentation, or implementation work.</a:t>
+              <a:t>Connect the concept to public health purpose, responsible use, required safeguards, documentation, and the next action a department should take.</a:t>
             </a:r>
             <a:endParaRPr lang="en-US" sz="1550" dirty="0"/>
           </a:p>
@@ -6144,8 +6847,8 @@
         </p:nvSpPr>
         <p:spPr>
           <a:xfrm>
-            <a:off x="9966960" y="6537960"/>
-            <a:ext cx="1645920" cy="201168"/>
+            <a:off x="9646920" y="6537960"/>
+            <a:ext cx="1965960" cy="201168"/>
           </a:xfrm>
           <a:prstGeom prst="rect">
             <a:avLst/>
@@ -6169,7 +6872,7 @@
                 <a:ea typeface="Aptos" pitchFamily="34" charset="-122"/>
                 <a:cs typeface="Aptos" pitchFamily="34" charset="-120"/>
               </a:rPr>
-              <a:t>Â© Paula Soper</a:t>
+              <a:t>Copyright Paula Soper</a:t>
             </a:r>
             <a:endParaRPr lang="en-US" sz="800" dirty="0"/>
           </a:p>
@@ -6216,77 +6919,13 @@
       </p:sp>
       <p:sp>
         <p:nvSpPr>
-          <p:cNvPr id="8" name="Shape 6"/>
+          <p:cNvPr id="8" name="Text 6"/>
           <p:cNvSpPr/>
           <p:nvPr/>
         </p:nvSpPr>
         <p:spPr>
           <a:xfrm>
             <a:off x="640080" y="658368"/>
-            <a:ext cx="420624" cy="420624"/>
-          </a:xfrm>
-          <a:prstGeom prst="ellipse">
-            <a:avLst/>
-          </a:prstGeom>
-          <a:solidFill>
-            <a:srgbClr val="0068B7"/>
-          </a:solidFill>
-          <a:ln w="12700">
-            <a:solidFill>
-              <a:srgbClr val="0068B7"/>
-            </a:solidFill>
-            <a:prstDash val="solid"/>
-          </a:ln>
-        </p:spPr>
-      </p:sp>
-      <p:sp>
-        <p:nvSpPr>
-          <p:cNvPr id="9" name="Text 7"/>
-          <p:cNvSpPr/>
-          <p:nvPr/>
-        </p:nvSpPr>
-        <p:spPr>
-          <a:xfrm>
-            <a:off x="640080" y="731520"/>
-            <a:ext cx="420624" cy="164592"/>
-          </a:xfrm>
-          <a:prstGeom prst="rect">
-            <a:avLst/>
-          </a:prstGeom>
-          <a:noFill/>
-          <a:ln/>
-        </p:spPr>
-        <p:txBody>
-          <a:bodyPr wrap="square" lIns="0" tIns="0" rIns="0" bIns="0" rtlCol="0" anchor="ctr"/>
-          <a:lstStyle/>
-          <a:p>
-            <a:pPr algn="ctr" indent="0" marL="0">
-              <a:buNone/>
-            </a:pPr>
-            <a:r>
-              <a:rPr lang="en-US" sz="1100" b="1" dirty="0">
-                <a:solidFill>
-                  <a:srgbClr val="FFFFFF"/>
-                </a:solidFill>
-                <a:latin typeface="Aptos" pitchFamily="34" charset="0"/>
-                <a:ea typeface="Aptos" pitchFamily="34" charset="-122"/>
-                <a:cs typeface="Aptos" pitchFamily="34" charset="-120"/>
-              </a:rPr>
-              <a:t>10</a:t>
-            </a:r>
-            <a:endParaRPr lang="en-US" sz="1100" dirty="0"/>
-          </a:p>
-        </p:txBody>
-      </p:sp>
-      <p:sp>
-        <p:nvSpPr>
-          <p:cNvPr id="10" name="Text 8"/>
-          <p:cNvSpPr/>
-          <p:nvPr/>
-        </p:nvSpPr>
-        <p:spPr>
-          <a:xfrm>
-            <a:off x="640080" y="621792"/>
             <a:ext cx="10881360" cy="713232"/>
           </a:xfrm>
           <a:prstGeom prst="rect">
@@ -6321,14 +6960,14 @@
       </p:sp>
       <p:sp>
         <p:nvSpPr>
-          <p:cNvPr id="11" name="Text 9"/>
+          <p:cNvPr id="9" name="Text 7"/>
           <p:cNvSpPr/>
           <p:nvPr/>
         </p:nvSpPr>
         <p:spPr>
           <a:xfrm>
             <a:off x="868680" y="1508760"/>
-            <a:ext cx="6537960" cy="4160520"/>
+            <a:ext cx="6309360" cy="4160520"/>
           </a:xfrm>
           <a:prstGeom prst="rect">
             <a:avLst/>
@@ -6359,18 +6998,18 @@
       </p:sp>
       <p:sp>
         <p:nvSpPr>
-          <p:cNvPr id="12" name="Shape 10"/>
-          <p:cNvSpPr/>
-          <p:nvPr/>
-        </p:nvSpPr>
-        <p:spPr>
-          <a:xfrm>
-            <a:off x="7909560" y="1417320"/>
-            <a:ext cx="3154680" cy="1828800"/>
+          <p:cNvPr id="10" name="Shape 8"/>
+          <p:cNvSpPr/>
+          <p:nvPr/>
+        </p:nvSpPr>
+        <p:spPr>
+          <a:xfrm>
+            <a:off x="7635240" y="1325880"/>
+            <a:ext cx="3474720" cy="1325880"/>
           </a:xfrm>
           <a:prstGeom prst="roundRect">
             <a:avLst>
-              <a:gd name="adj" fmla="val 6000"/>
+              <a:gd name="adj" fmla="val 8276"/>
             </a:avLst>
           </a:prstGeom>
           <a:solidFill>
@@ -6386,14 +7025,14 @@
       </p:sp>
       <p:sp>
         <p:nvSpPr>
-          <p:cNvPr id="13" name="Text 11"/>
-          <p:cNvSpPr/>
-          <p:nvPr/>
-        </p:nvSpPr>
-        <p:spPr>
-          <a:xfrm>
-            <a:off x="8074152" y="1563624"/>
-            <a:ext cx="2825496" cy="256032"/>
+          <p:cNvPr id="11" name="Text 9"/>
+          <p:cNvSpPr/>
+          <p:nvPr/>
+        </p:nvSpPr>
+        <p:spPr>
+          <a:xfrm>
+            <a:off x="7799832" y="1472184"/>
+            <a:ext cx="3145536" cy="256032"/>
           </a:xfrm>
           <a:prstGeom prst="rect">
             <a:avLst/>
@@ -6417,7 +7056,7 @@
                 <a:ea typeface="Aptos" pitchFamily="34" charset="-122"/>
                 <a:cs typeface="Aptos" pitchFamily="34" charset="-120"/>
               </a:rPr>
-              <a:t>Key idea</a:t>
+              <a:t>Practice focus</a:t>
             </a:r>
             <a:endParaRPr lang="en-US" sz="1300" dirty="0"/>
           </a:p>
@@ -6425,14 +7064,14 @@
       </p:sp>
       <p:sp>
         <p:nvSpPr>
-          <p:cNvPr id="14" name="Text 12"/>
-          <p:cNvSpPr/>
-          <p:nvPr/>
-        </p:nvSpPr>
-        <p:spPr>
-          <a:xfrm>
-            <a:off x="8074152" y="1920240"/>
-            <a:ext cx="2825496" cy="1188720"/>
+          <p:cNvPr id="12" name="Text 10"/>
+          <p:cNvSpPr/>
+          <p:nvPr/>
+        </p:nvSpPr>
+        <p:spPr>
+          <a:xfrm>
+            <a:off x="7799832" y="1828800"/>
+            <a:ext cx="3145536" cy="685800"/>
           </a:xfrm>
           <a:prstGeom prst="rect">
             <a:avLst/>
@@ -6466,18 +7105,159 @@
       </p:sp>
       <p:sp>
         <p:nvSpPr>
-          <p:cNvPr id="15" name="Shape 13"/>
-          <p:cNvSpPr/>
-          <p:nvPr/>
-        </p:nvSpPr>
-        <p:spPr>
-          <a:xfrm>
-            <a:off x="7909560" y="3520440"/>
-            <a:ext cx="3154680" cy="1737360"/>
+          <p:cNvPr id="13" name="Shape 11"/>
+          <p:cNvSpPr/>
+          <p:nvPr/>
+        </p:nvSpPr>
+        <p:spPr>
+          <a:xfrm>
+            <a:off x="7635240" y="2788920"/>
+            <a:ext cx="3474720" cy="1536192"/>
           </a:xfrm>
           <a:prstGeom prst="roundRect">
             <a:avLst>
-              <a:gd name="adj" fmla="val 6316"/>
+              <a:gd name="adj" fmla="val 7143"/>
+            </a:avLst>
+          </a:prstGeom>
+          <a:solidFill>
+            <a:srgbClr val="FFFFFF">
+              <a:alpha val="88000"/>
+            </a:srgbClr>
+          </a:solidFill>
+          <a:ln w="12700">
+            <a:solidFill>
+              <a:srgbClr val="D6E8F2"/>
+            </a:solidFill>
+            <a:prstDash val="solid"/>
+          </a:ln>
+        </p:spPr>
+      </p:sp>
+      <p:sp>
+        <p:nvSpPr>
+          <p:cNvPr id="14" name="Shape 12"/>
+          <p:cNvSpPr/>
+          <p:nvPr/>
+        </p:nvSpPr>
+        <p:spPr>
+          <a:xfrm>
+            <a:off x="8074152" y="3291840"/>
+            <a:ext cx="2596896" cy="749808"/>
+          </a:xfrm>
+          <a:prstGeom prst="rect">
+            <a:avLst/>
+          </a:prstGeom>
+          <a:solidFill>
+            <a:srgbClr val="EAF6F8"/>
+          </a:solidFill>
+          <a:ln w="12700">
+            <a:solidFill>
+              <a:srgbClr val="8ABBD8"/>
+            </a:solidFill>
+            <a:prstDash val="solid"/>
+          </a:ln>
+        </p:spPr>
+      </p:sp>
+      <p:sp>
+        <p:nvSpPr>
+          <p:cNvPr id="15" name="Shape 13"/>
+          <p:cNvSpPr/>
+          <p:nvPr/>
+        </p:nvSpPr>
+        <p:spPr>
+          <a:xfrm>
+            <a:off x="8202168" y="3721608"/>
+            <a:ext cx="2340864" cy="0"/>
+          </a:xfrm>
+          <a:prstGeom prst="line">
+            <a:avLst/>
+          </a:prstGeom>
+          <a:noFill/>
+          <a:ln w="19050">
+            <a:solidFill>
+              <a:srgbClr val="0068B7"/>
+            </a:solidFill>
+            <a:prstDash val="solid"/>
+          </a:ln>
+        </p:spPr>
+      </p:sp>
+      <p:sp>
+        <p:nvSpPr>
+          <p:cNvPr id="16" name="Shape 14"/>
+          <p:cNvSpPr/>
+          <p:nvPr/>
+        </p:nvSpPr>
+        <p:spPr>
+          <a:xfrm>
+            <a:off x="9198864" y="4206240"/>
+            <a:ext cx="347472" cy="347472"/>
+          </a:xfrm>
+          <a:prstGeom prst="ellipse">
+            <a:avLst/>
+          </a:prstGeom>
+          <a:solidFill>
+            <a:srgbClr val="2F8A28"/>
+          </a:solidFill>
+          <a:ln w="12700">
+            <a:solidFill>
+              <a:srgbClr val="2F8A28"/>
+            </a:solidFill>
+            <a:prstDash val="solid"/>
+          </a:ln>
+        </p:spPr>
+      </p:sp>
+      <p:sp>
+        <p:nvSpPr>
+          <p:cNvPr id="17" name="Text 15"/>
+          <p:cNvSpPr/>
+          <p:nvPr/>
+        </p:nvSpPr>
+        <p:spPr>
+          <a:xfrm>
+            <a:off x="7909560" y="3977640"/>
+            <a:ext cx="2926080" cy="182880"/>
+          </a:xfrm>
+          <a:prstGeom prst="rect">
+            <a:avLst/>
+          </a:prstGeom>
+          <a:noFill/>
+          <a:ln/>
+        </p:spPr>
+        <p:txBody>
+          <a:bodyPr wrap="square" lIns="0" tIns="0" rIns="0" bIns="0" rtlCol="0" anchor="ctr"/>
+          <a:lstStyle/>
+          <a:p>
+            <a:pPr algn="ctr" indent="0" marL="0">
+              <a:buNone/>
+            </a:pPr>
+            <a:r>
+              <a:rPr lang="en-US" sz="1000" dirty="0">
+                <a:solidFill>
+                  <a:srgbClr val="003A63"/>
+                </a:solidFill>
+                <a:latin typeface="Aptos" pitchFamily="34" charset="0"/>
+                <a:ea typeface="Aptos" pitchFamily="34" charset="-122"/>
+                <a:cs typeface="Aptos" pitchFamily="34" charset="-120"/>
+              </a:rPr>
+              <a:t>Concept to action</a:t>
+            </a:r>
+            <a:endParaRPr lang="en-US" sz="1000" dirty="0"/>
+          </a:p>
+        </p:txBody>
+      </p:sp>
+      <p:sp>
+        <p:nvSpPr>
+          <p:cNvPr id="18" name="Shape 16"/>
+          <p:cNvSpPr/>
+          <p:nvPr/>
+        </p:nvSpPr>
+        <p:spPr>
+          <a:xfrm>
+            <a:off x="7635240" y="4498848"/>
+            <a:ext cx="3474720" cy="1143000"/>
+          </a:xfrm>
+          <a:prstGeom prst="roundRect">
+            <a:avLst>
+              <a:gd name="adj" fmla="val 9600"/>
             </a:avLst>
           </a:prstGeom>
           <a:solidFill>
@@ -6493,14 +7273,14 @@
       </p:sp>
       <p:sp>
         <p:nvSpPr>
-          <p:cNvPr id="16" name="Text 14"/>
-          <p:cNvSpPr/>
-          <p:nvPr/>
-        </p:nvSpPr>
-        <p:spPr>
-          <a:xfrm>
-            <a:off x="8074152" y="3666744"/>
-            <a:ext cx="2825496" cy="256032"/>
+          <p:cNvPr id="19" name="Text 17"/>
+          <p:cNvSpPr/>
+          <p:nvPr/>
+        </p:nvSpPr>
+        <p:spPr>
+          <a:xfrm>
+            <a:off x="7799832" y="4645152"/>
+            <a:ext cx="3145536" cy="256032"/>
           </a:xfrm>
           <a:prstGeom prst="rect">
             <a:avLst/>
@@ -6524,7 +7304,7 @@
                 <a:ea typeface="Aptos" pitchFamily="34" charset="-122"/>
                 <a:cs typeface="Aptos" pitchFamily="34" charset="-120"/>
               </a:rPr>
-              <a:t>Use this for</a:t>
+              <a:t>What to produce</a:t>
             </a:r>
             <a:endParaRPr lang="en-US" sz="1300" dirty="0"/>
           </a:p>
@@ -6532,14 +7312,14 @@
       </p:sp>
       <p:sp>
         <p:nvSpPr>
-          <p:cNvPr id="17" name="Text 15"/>
-          <p:cNvSpPr/>
-          <p:nvPr/>
-        </p:nvSpPr>
-        <p:spPr>
-          <a:xfrm>
-            <a:off x="8074152" y="4023360"/>
-            <a:ext cx="2825496" cy="1097280"/>
+          <p:cNvPr id="20" name="Text 18"/>
+          <p:cNvSpPr/>
+          <p:nvPr/>
+        </p:nvSpPr>
+        <p:spPr>
+          <a:xfrm>
+            <a:off x="7799832" y="5001768"/>
+            <a:ext cx="3145536" cy="502920"/>
           </a:xfrm>
           <a:prstGeom prst="rect">
             <a:avLst/>
@@ -6565,7 +7345,7 @@
                 <a:ea typeface="Aptos" pitchFamily="34" charset="-122"/>
                 <a:cs typeface="Aptos" pitchFamily="34" charset="-120"/>
               </a:rPr>
-              <a:t>Connect the concept to public health decisions, safeguards, documentation, or implementation work.</a:t>
+              <a:t>Use the assignment to test whether you can explain the concept, apply it to a realistic public health situation, and identify what would need review before the work moves forward.</a:t>
             </a:r>
             <a:endParaRPr lang="en-US" sz="1550" dirty="0"/>
           </a:p>
@@ -6739,8 +7519,8 @@
         </p:nvSpPr>
         <p:spPr>
           <a:xfrm>
-            <a:off x="9966960" y="6537960"/>
-            <a:ext cx="1645920" cy="201168"/>
+            <a:off x="9646920" y="6537960"/>
+            <a:ext cx="1965960" cy="201168"/>
           </a:xfrm>
           <a:prstGeom prst="rect">
             <a:avLst/>
@@ -6764,7 +7544,7 @@
                 <a:ea typeface="Aptos" pitchFamily="34" charset="-122"/>
                 <a:cs typeface="Aptos" pitchFamily="34" charset="-120"/>
               </a:rPr>
-              <a:t>Â© Paula Soper</a:t>
+              <a:t>Copyright Paula Soper</a:t>
             </a:r>
             <a:endParaRPr lang="en-US" sz="800" dirty="0"/>
           </a:p>
@@ -6811,77 +7591,13 @@
       </p:sp>
       <p:sp>
         <p:nvSpPr>
-          <p:cNvPr id="8" name="Shape 6"/>
+          <p:cNvPr id="8" name="Text 6"/>
           <p:cNvSpPr/>
           <p:nvPr/>
         </p:nvSpPr>
         <p:spPr>
           <a:xfrm>
             <a:off x="640080" y="658368"/>
-            <a:ext cx="420624" cy="420624"/>
-          </a:xfrm>
-          <a:prstGeom prst="ellipse">
-            <a:avLst/>
-          </a:prstGeom>
-          <a:solidFill>
-            <a:srgbClr val="0068B7"/>
-          </a:solidFill>
-          <a:ln w="12700">
-            <a:solidFill>
-              <a:srgbClr val="0068B7"/>
-            </a:solidFill>
-            <a:prstDash val="solid"/>
-          </a:ln>
-        </p:spPr>
-      </p:sp>
-      <p:sp>
-        <p:nvSpPr>
-          <p:cNvPr id="9" name="Text 7"/>
-          <p:cNvSpPr/>
-          <p:nvPr/>
-        </p:nvSpPr>
-        <p:spPr>
-          <a:xfrm>
-            <a:off x="640080" y="731520"/>
-            <a:ext cx="420624" cy="164592"/>
-          </a:xfrm>
-          <a:prstGeom prst="rect">
-            <a:avLst/>
-          </a:prstGeom>
-          <a:noFill/>
-          <a:ln/>
-        </p:spPr>
-        <p:txBody>
-          <a:bodyPr wrap="square" lIns="0" tIns="0" rIns="0" bIns="0" rtlCol="0" anchor="ctr"/>
-          <a:lstStyle/>
-          <a:p>
-            <a:pPr algn="ctr" indent="0" marL="0">
-              <a:buNone/>
-            </a:pPr>
-            <a:r>
-              <a:rPr lang="en-US" sz="1100" b="1" dirty="0">
-                <a:solidFill>
-                  <a:srgbClr val="FFFFFF"/>
-                </a:solidFill>
-                <a:latin typeface="Aptos" pitchFamily="34" charset="0"/>
-                <a:ea typeface="Aptos" pitchFamily="34" charset="-122"/>
-                <a:cs typeface="Aptos" pitchFamily="34" charset="-120"/>
-              </a:rPr>
-              <a:t>11</a:t>
-            </a:r>
-            <a:endParaRPr lang="en-US" sz="1100" dirty="0"/>
-          </a:p>
-        </p:txBody>
-      </p:sp>
-      <p:sp>
-        <p:nvSpPr>
-          <p:cNvPr id="10" name="Text 8"/>
-          <p:cNvSpPr/>
-          <p:nvPr/>
-        </p:nvSpPr>
-        <p:spPr>
-          <a:xfrm>
-            <a:off x="640080" y="621792"/>
             <a:ext cx="10881360" cy="713232"/>
           </a:xfrm>
           <a:prstGeom prst="rect">
@@ -6916,14 +7632,14 @@
       </p:sp>
       <p:sp>
         <p:nvSpPr>
-          <p:cNvPr id="11" name="Text 9"/>
+          <p:cNvPr id="9" name="Text 7"/>
           <p:cNvSpPr/>
           <p:nvPr/>
         </p:nvSpPr>
         <p:spPr>
           <a:xfrm>
             <a:off x="868680" y="1508760"/>
-            <a:ext cx="6537960" cy="4160520"/>
+            <a:ext cx="6309360" cy="4160520"/>
           </a:xfrm>
           <a:prstGeom prst="rect">
             <a:avLst/>
@@ -6982,18 +7698,18 @@
       </p:sp>
       <p:sp>
         <p:nvSpPr>
-          <p:cNvPr id="12" name="Shape 10"/>
-          <p:cNvSpPr/>
-          <p:nvPr/>
-        </p:nvSpPr>
-        <p:spPr>
-          <a:xfrm>
-            <a:off x="7909560" y="1417320"/>
-            <a:ext cx="3154680" cy="1828800"/>
+          <p:cNvPr id="10" name="Shape 8"/>
+          <p:cNvSpPr/>
+          <p:nvPr/>
+        </p:nvSpPr>
+        <p:spPr>
+          <a:xfrm>
+            <a:off x="7635240" y="1325880"/>
+            <a:ext cx="3474720" cy="1325880"/>
           </a:xfrm>
           <a:prstGeom prst="roundRect">
             <a:avLst>
-              <a:gd name="adj" fmla="val 6000"/>
+              <a:gd name="adj" fmla="val 8276"/>
             </a:avLst>
           </a:prstGeom>
           <a:solidFill>
@@ -7009,14 +7725,14 @@
       </p:sp>
       <p:sp>
         <p:nvSpPr>
-          <p:cNvPr id="13" name="Text 11"/>
-          <p:cNvSpPr/>
-          <p:nvPr/>
-        </p:nvSpPr>
-        <p:spPr>
-          <a:xfrm>
-            <a:off x="8074152" y="1563624"/>
-            <a:ext cx="2825496" cy="256032"/>
+          <p:cNvPr id="11" name="Text 9"/>
+          <p:cNvSpPr/>
+          <p:nvPr/>
+        </p:nvSpPr>
+        <p:spPr>
+          <a:xfrm>
+            <a:off x="7799832" y="1472184"/>
+            <a:ext cx="3145536" cy="256032"/>
           </a:xfrm>
           <a:prstGeom prst="rect">
             <a:avLst/>
@@ -7040,7 +7756,7 @@
                 <a:ea typeface="Aptos" pitchFamily="34" charset="-122"/>
                 <a:cs typeface="Aptos" pitchFamily="34" charset="-120"/>
               </a:rPr>
-              <a:t>Key idea</a:t>
+              <a:t>Core concept</a:t>
             </a:r>
             <a:endParaRPr lang="en-US" sz="1300" dirty="0"/>
           </a:p>
@@ -7048,14 +7764,14 @@
       </p:sp>
       <p:sp>
         <p:nvSpPr>
-          <p:cNvPr id="14" name="Text 12"/>
-          <p:cNvSpPr/>
-          <p:nvPr/>
-        </p:nvSpPr>
-        <p:spPr>
-          <a:xfrm>
-            <a:off x="8074152" y="1920240"/>
-            <a:ext cx="2825496" cy="1188720"/>
+          <p:cNvPr id="12" name="Text 10"/>
+          <p:cNvSpPr/>
+          <p:nvPr/>
+        </p:nvSpPr>
+        <p:spPr>
+          <a:xfrm>
+            <a:off x="7799832" y="1828800"/>
+            <a:ext cx="3145536" cy="685800"/>
           </a:xfrm>
           <a:prstGeom prst="rect">
             <a:avLst/>
@@ -7089,18 +7805,159 @@
       </p:sp>
       <p:sp>
         <p:nvSpPr>
-          <p:cNvPr id="15" name="Shape 13"/>
-          <p:cNvSpPr/>
-          <p:nvPr/>
-        </p:nvSpPr>
-        <p:spPr>
-          <a:xfrm>
-            <a:off x="7909560" y="3520440"/>
-            <a:ext cx="3154680" cy="1737360"/>
+          <p:cNvPr id="13" name="Shape 11"/>
+          <p:cNvSpPr/>
+          <p:nvPr/>
+        </p:nvSpPr>
+        <p:spPr>
+          <a:xfrm>
+            <a:off x="7635240" y="2788920"/>
+            <a:ext cx="3474720" cy="1536192"/>
           </a:xfrm>
           <a:prstGeom prst="roundRect">
             <a:avLst>
-              <a:gd name="adj" fmla="val 6316"/>
+              <a:gd name="adj" fmla="val 7143"/>
+            </a:avLst>
+          </a:prstGeom>
+          <a:solidFill>
+            <a:srgbClr val="FFFFFF">
+              <a:alpha val="88000"/>
+            </a:srgbClr>
+          </a:solidFill>
+          <a:ln w="12700">
+            <a:solidFill>
+              <a:srgbClr val="D6E8F2"/>
+            </a:solidFill>
+            <a:prstDash val="solid"/>
+          </a:ln>
+        </p:spPr>
+      </p:sp>
+      <p:sp>
+        <p:nvSpPr>
+          <p:cNvPr id="14" name="Shape 12"/>
+          <p:cNvSpPr/>
+          <p:nvPr/>
+        </p:nvSpPr>
+        <p:spPr>
+          <a:xfrm>
+            <a:off x="8074152" y="3291840"/>
+            <a:ext cx="2596896" cy="749808"/>
+          </a:xfrm>
+          <a:prstGeom prst="rect">
+            <a:avLst/>
+          </a:prstGeom>
+          <a:solidFill>
+            <a:srgbClr val="EAF6F8"/>
+          </a:solidFill>
+          <a:ln w="12700">
+            <a:solidFill>
+              <a:srgbClr val="8ABBD8"/>
+            </a:solidFill>
+            <a:prstDash val="solid"/>
+          </a:ln>
+        </p:spPr>
+      </p:sp>
+      <p:sp>
+        <p:nvSpPr>
+          <p:cNvPr id="15" name="Shape 13"/>
+          <p:cNvSpPr/>
+          <p:nvPr/>
+        </p:nvSpPr>
+        <p:spPr>
+          <a:xfrm>
+            <a:off x="8202168" y="3721608"/>
+            <a:ext cx="2340864" cy="0"/>
+          </a:xfrm>
+          <a:prstGeom prst="line">
+            <a:avLst/>
+          </a:prstGeom>
+          <a:noFill/>
+          <a:ln w="19050">
+            <a:solidFill>
+              <a:srgbClr val="0068B7"/>
+            </a:solidFill>
+            <a:prstDash val="solid"/>
+          </a:ln>
+        </p:spPr>
+      </p:sp>
+      <p:sp>
+        <p:nvSpPr>
+          <p:cNvPr id="16" name="Shape 14"/>
+          <p:cNvSpPr/>
+          <p:nvPr/>
+        </p:nvSpPr>
+        <p:spPr>
+          <a:xfrm>
+            <a:off x="9198864" y="4206240"/>
+            <a:ext cx="347472" cy="347472"/>
+          </a:xfrm>
+          <a:prstGeom prst="ellipse">
+            <a:avLst/>
+          </a:prstGeom>
+          <a:solidFill>
+            <a:srgbClr val="2F8A28"/>
+          </a:solidFill>
+          <a:ln w="12700">
+            <a:solidFill>
+              <a:srgbClr val="2F8A28"/>
+            </a:solidFill>
+            <a:prstDash val="solid"/>
+          </a:ln>
+        </p:spPr>
+      </p:sp>
+      <p:sp>
+        <p:nvSpPr>
+          <p:cNvPr id="17" name="Text 15"/>
+          <p:cNvSpPr/>
+          <p:nvPr/>
+        </p:nvSpPr>
+        <p:spPr>
+          <a:xfrm>
+            <a:off x="7909560" y="3977640"/>
+            <a:ext cx="2926080" cy="182880"/>
+          </a:xfrm>
+          <a:prstGeom prst="rect">
+            <a:avLst/>
+          </a:prstGeom>
+          <a:noFill/>
+          <a:ln/>
+        </p:spPr>
+        <p:txBody>
+          <a:bodyPr wrap="square" lIns="0" tIns="0" rIns="0" bIns="0" rtlCol="0" anchor="ctr"/>
+          <a:lstStyle/>
+          <a:p>
+            <a:pPr algn="ctr" indent="0" marL="0">
+              <a:buNone/>
+            </a:pPr>
+            <a:r>
+              <a:rPr lang="en-US" sz="1000" dirty="0">
+                <a:solidFill>
+                  <a:srgbClr val="003A63"/>
+                </a:solidFill>
+                <a:latin typeface="Aptos" pitchFamily="34" charset="0"/>
+                <a:ea typeface="Aptos" pitchFamily="34" charset="-122"/>
+                <a:cs typeface="Aptos" pitchFamily="34" charset="-120"/>
+              </a:rPr>
+              <a:t>Concept to action</a:t>
+            </a:r>
+            <a:endParaRPr lang="en-US" sz="1000" dirty="0"/>
+          </a:p>
+        </p:txBody>
+      </p:sp>
+      <p:sp>
+        <p:nvSpPr>
+          <p:cNvPr id="18" name="Shape 16"/>
+          <p:cNvSpPr/>
+          <p:nvPr/>
+        </p:nvSpPr>
+        <p:spPr>
+          <a:xfrm>
+            <a:off x="7635240" y="4498848"/>
+            <a:ext cx="3474720" cy="1143000"/>
+          </a:xfrm>
+          <a:prstGeom prst="roundRect">
+            <a:avLst>
+              <a:gd name="adj" fmla="val 9600"/>
             </a:avLst>
           </a:prstGeom>
           <a:solidFill>
@@ -7116,14 +7973,14 @@
       </p:sp>
       <p:sp>
         <p:nvSpPr>
-          <p:cNvPr id="16" name="Text 14"/>
-          <p:cNvSpPr/>
-          <p:nvPr/>
-        </p:nvSpPr>
-        <p:spPr>
-          <a:xfrm>
-            <a:off x="8074152" y="3666744"/>
-            <a:ext cx="2825496" cy="256032"/>
+          <p:cNvPr id="19" name="Text 17"/>
+          <p:cNvSpPr/>
+          <p:nvPr/>
+        </p:nvSpPr>
+        <p:spPr>
+          <a:xfrm>
+            <a:off x="7799832" y="4645152"/>
+            <a:ext cx="3145536" cy="256032"/>
           </a:xfrm>
           <a:prstGeom prst="rect">
             <a:avLst/>
@@ -7147,7 +8004,7 @@
                 <a:ea typeface="Aptos" pitchFamily="34" charset="-122"/>
                 <a:cs typeface="Aptos" pitchFamily="34" charset="-120"/>
               </a:rPr>
-              <a:t>Use this for</a:t>
+              <a:t>Apply it</a:t>
             </a:r>
             <a:endParaRPr lang="en-US" sz="1300" dirty="0"/>
           </a:p>
@@ -7155,14 +8012,14 @@
       </p:sp>
       <p:sp>
         <p:nvSpPr>
-          <p:cNvPr id="17" name="Text 15"/>
-          <p:cNvSpPr/>
-          <p:nvPr/>
-        </p:nvSpPr>
-        <p:spPr>
-          <a:xfrm>
-            <a:off x="8074152" y="4023360"/>
-            <a:ext cx="2825496" cy="1097280"/>
+          <p:cNvPr id="20" name="Text 18"/>
+          <p:cNvSpPr/>
+          <p:nvPr/>
+        </p:nvSpPr>
+        <p:spPr>
+          <a:xfrm>
+            <a:off x="7799832" y="5001768"/>
+            <a:ext cx="3145536" cy="502920"/>
           </a:xfrm>
           <a:prstGeom prst="rect">
             <a:avLst/>
@@ -7188,7 +8045,7 @@
                 <a:ea typeface="Aptos" pitchFamily="34" charset="-122"/>
                 <a:cs typeface="Aptos" pitchFamily="34" charset="-120"/>
               </a:rPr>
-              <a:t>Connect the concept to public health decisions, safeguards, documentation, or implementation work.</a:t>
+              <a:t>Connect the concept to public health purpose, responsible use, required safeguards, documentation, and the next action a department should take.</a:t>
             </a:r>
             <a:endParaRPr lang="en-US" sz="1550" dirty="0"/>
           </a:p>
@@ -7362,8 +8219,8 @@
         </p:nvSpPr>
         <p:spPr>
           <a:xfrm>
-            <a:off x="9966960" y="6537960"/>
-            <a:ext cx="1645920" cy="201168"/>
+            <a:off x="9646920" y="6537960"/>
+            <a:ext cx="1965960" cy="201168"/>
           </a:xfrm>
           <a:prstGeom prst="rect">
             <a:avLst/>
@@ -7387,7 +8244,7 @@
                 <a:ea typeface="Aptos" pitchFamily="34" charset="-122"/>
                 <a:cs typeface="Aptos" pitchFamily="34" charset="-120"/>
               </a:rPr>
-              <a:t>Â© Paula Soper</a:t>
+              <a:t>Copyright Paula Soper</a:t>
             </a:r>
             <a:endParaRPr lang="en-US" sz="800" dirty="0"/>
           </a:p>
@@ -7434,77 +8291,13 @@
       </p:sp>
       <p:sp>
         <p:nvSpPr>
-          <p:cNvPr id="8" name="Shape 6"/>
+          <p:cNvPr id="8" name="Text 6"/>
           <p:cNvSpPr/>
           <p:nvPr/>
         </p:nvSpPr>
         <p:spPr>
           <a:xfrm>
             <a:off x="640080" y="658368"/>
-            <a:ext cx="420624" cy="420624"/>
-          </a:xfrm>
-          <a:prstGeom prst="ellipse">
-            <a:avLst/>
-          </a:prstGeom>
-          <a:solidFill>
-            <a:srgbClr val="0068B7"/>
-          </a:solidFill>
-          <a:ln w="12700">
-            <a:solidFill>
-              <a:srgbClr val="0068B7"/>
-            </a:solidFill>
-            <a:prstDash val="solid"/>
-          </a:ln>
-        </p:spPr>
-      </p:sp>
-      <p:sp>
-        <p:nvSpPr>
-          <p:cNvPr id="9" name="Text 7"/>
-          <p:cNvSpPr/>
-          <p:nvPr/>
-        </p:nvSpPr>
-        <p:spPr>
-          <a:xfrm>
-            <a:off x="640080" y="731520"/>
-            <a:ext cx="420624" cy="164592"/>
-          </a:xfrm>
-          <a:prstGeom prst="rect">
-            <a:avLst/>
-          </a:prstGeom>
-          <a:noFill/>
-          <a:ln/>
-        </p:spPr>
-        <p:txBody>
-          <a:bodyPr wrap="square" lIns="0" tIns="0" rIns="0" bIns="0" rtlCol="0" anchor="ctr"/>
-          <a:lstStyle/>
-          <a:p>
-            <a:pPr algn="ctr" indent="0" marL="0">
-              <a:buNone/>
-            </a:pPr>
-            <a:r>
-              <a:rPr lang="en-US" sz="1100" b="1" dirty="0">
-                <a:solidFill>
-                  <a:srgbClr val="FFFFFF"/>
-                </a:solidFill>
-                <a:latin typeface="Aptos" pitchFamily="34" charset="0"/>
-                <a:ea typeface="Aptos" pitchFamily="34" charset="-122"/>
-                <a:cs typeface="Aptos" pitchFamily="34" charset="-120"/>
-              </a:rPr>
-              <a:t>12</a:t>
-            </a:r>
-            <a:endParaRPr lang="en-US" sz="1100" dirty="0"/>
-          </a:p>
-        </p:txBody>
-      </p:sp>
-      <p:sp>
-        <p:nvSpPr>
-          <p:cNvPr id="10" name="Text 8"/>
-          <p:cNvSpPr/>
-          <p:nvPr/>
-        </p:nvSpPr>
-        <p:spPr>
-          <a:xfrm>
-            <a:off x="640080" y="621792"/>
             <a:ext cx="10881360" cy="713232"/>
           </a:xfrm>
           <a:prstGeom prst="rect">
@@ -7539,14 +8332,14 @@
       </p:sp>
       <p:sp>
         <p:nvSpPr>
-          <p:cNvPr id="11" name="Text 9"/>
+          <p:cNvPr id="9" name="Text 7"/>
           <p:cNvSpPr/>
           <p:nvPr/>
         </p:nvSpPr>
         <p:spPr>
           <a:xfrm>
             <a:off x="868680" y="1508760"/>
-            <a:ext cx="6537960" cy="4160520"/>
+            <a:ext cx="6309360" cy="4160520"/>
           </a:xfrm>
           <a:prstGeom prst="rect">
             <a:avLst/>
@@ -7577,18 +8370,18 @@
       </p:sp>
       <p:sp>
         <p:nvSpPr>
-          <p:cNvPr id="12" name="Shape 10"/>
-          <p:cNvSpPr/>
-          <p:nvPr/>
-        </p:nvSpPr>
-        <p:spPr>
-          <a:xfrm>
-            <a:off x="7909560" y="1417320"/>
-            <a:ext cx="3154680" cy="1828800"/>
+          <p:cNvPr id="10" name="Shape 8"/>
+          <p:cNvSpPr/>
+          <p:nvPr/>
+        </p:nvSpPr>
+        <p:spPr>
+          <a:xfrm>
+            <a:off x="7635240" y="1325880"/>
+            <a:ext cx="3474720" cy="1325880"/>
           </a:xfrm>
           <a:prstGeom prst="roundRect">
             <a:avLst>
-              <a:gd name="adj" fmla="val 6000"/>
+              <a:gd name="adj" fmla="val 8276"/>
             </a:avLst>
           </a:prstGeom>
           <a:solidFill>
@@ -7604,14 +8397,14 @@
       </p:sp>
       <p:sp>
         <p:nvSpPr>
-          <p:cNvPr id="13" name="Text 11"/>
-          <p:cNvSpPr/>
-          <p:nvPr/>
-        </p:nvSpPr>
-        <p:spPr>
-          <a:xfrm>
-            <a:off x="8074152" y="1563624"/>
-            <a:ext cx="2825496" cy="256032"/>
+          <p:cNvPr id="11" name="Text 9"/>
+          <p:cNvSpPr/>
+          <p:nvPr/>
+        </p:nvSpPr>
+        <p:spPr>
+          <a:xfrm>
+            <a:off x="7799832" y="1472184"/>
+            <a:ext cx="3145536" cy="256032"/>
           </a:xfrm>
           <a:prstGeom prst="rect">
             <a:avLst/>
@@ -7635,7 +8428,7 @@
                 <a:ea typeface="Aptos" pitchFamily="34" charset="-122"/>
                 <a:cs typeface="Aptos" pitchFamily="34" charset="-120"/>
               </a:rPr>
-              <a:t>Key idea</a:t>
+              <a:t>Core concept</a:t>
             </a:r>
             <a:endParaRPr lang="en-US" sz="1300" dirty="0"/>
           </a:p>
@@ -7643,14 +8436,14 @@
       </p:sp>
       <p:sp>
         <p:nvSpPr>
-          <p:cNvPr id="14" name="Text 12"/>
-          <p:cNvSpPr/>
-          <p:nvPr/>
-        </p:nvSpPr>
-        <p:spPr>
-          <a:xfrm>
-            <a:off x="8074152" y="1920240"/>
-            <a:ext cx="2825496" cy="1188720"/>
+          <p:cNvPr id="12" name="Text 10"/>
+          <p:cNvSpPr/>
+          <p:nvPr/>
+        </p:nvSpPr>
+        <p:spPr>
+          <a:xfrm>
+            <a:off x="7799832" y="1828800"/>
+            <a:ext cx="3145536" cy="685800"/>
           </a:xfrm>
           <a:prstGeom prst="rect">
             <a:avLst/>
@@ -7684,18 +8477,159 @@
       </p:sp>
       <p:sp>
         <p:nvSpPr>
-          <p:cNvPr id="15" name="Shape 13"/>
-          <p:cNvSpPr/>
-          <p:nvPr/>
-        </p:nvSpPr>
-        <p:spPr>
-          <a:xfrm>
-            <a:off x="7909560" y="3520440"/>
-            <a:ext cx="3154680" cy="1737360"/>
+          <p:cNvPr id="13" name="Shape 11"/>
+          <p:cNvSpPr/>
+          <p:nvPr/>
+        </p:nvSpPr>
+        <p:spPr>
+          <a:xfrm>
+            <a:off x="7635240" y="2788920"/>
+            <a:ext cx="3474720" cy="1536192"/>
           </a:xfrm>
           <a:prstGeom prst="roundRect">
             <a:avLst>
-              <a:gd name="adj" fmla="val 6316"/>
+              <a:gd name="adj" fmla="val 7143"/>
+            </a:avLst>
+          </a:prstGeom>
+          <a:solidFill>
+            <a:srgbClr val="FFFFFF">
+              <a:alpha val="88000"/>
+            </a:srgbClr>
+          </a:solidFill>
+          <a:ln w="12700">
+            <a:solidFill>
+              <a:srgbClr val="D6E8F2"/>
+            </a:solidFill>
+            <a:prstDash val="solid"/>
+          </a:ln>
+        </p:spPr>
+      </p:sp>
+      <p:sp>
+        <p:nvSpPr>
+          <p:cNvPr id="14" name="Shape 12"/>
+          <p:cNvSpPr/>
+          <p:nvPr/>
+        </p:nvSpPr>
+        <p:spPr>
+          <a:xfrm>
+            <a:off x="8074152" y="3291840"/>
+            <a:ext cx="2596896" cy="749808"/>
+          </a:xfrm>
+          <a:prstGeom prst="rect">
+            <a:avLst/>
+          </a:prstGeom>
+          <a:solidFill>
+            <a:srgbClr val="EAF6F8"/>
+          </a:solidFill>
+          <a:ln w="12700">
+            <a:solidFill>
+              <a:srgbClr val="8ABBD8"/>
+            </a:solidFill>
+            <a:prstDash val="solid"/>
+          </a:ln>
+        </p:spPr>
+      </p:sp>
+      <p:sp>
+        <p:nvSpPr>
+          <p:cNvPr id="15" name="Shape 13"/>
+          <p:cNvSpPr/>
+          <p:nvPr/>
+        </p:nvSpPr>
+        <p:spPr>
+          <a:xfrm>
+            <a:off x="8202168" y="3721608"/>
+            <a:ext cx="2340864" cy="0"/>
+          </a:xfrm>
+          <a:prstGeom prst="line">
+            <a:avLst/>
+          </a:prstGeom>
+          <a:noFill/>
+          <a:ln w="19050">
+            <a:solidFill>
+              <a:srgbClr val="0068B7"/>
+            </a:solidFill>
+            <a:prstDash val="solid"/>
+          </a:ln>
+        </p:spPr>
+      </p:sp>
+      <p:sp>
+        <p:nvSpPr>
+          <p:cNvPr id="16" name="Shape 14"/>
+          <p:cNvSpPr/>
+          <p:nvPr/>
+        </p:nvSpPr>
+        <p:spPr>
+          <a:xfrm>
+            <a:off x="9198864" y="4206240"/>
+            <a:ext cx="347472" cy="347472"/>
+          </a:xfrm>
+          <a:prstGeom prst="ellipse">
+            <a:avLst/>
+          </a:prstGeom>
+          <a:solidFill>
+            <a:srgbClr val="2F8A28"/>
+          </a:solidFill>
+          <a:ln w="12700">
+            <a:solidFill>
+              <a:srgbClr val="2F8A28"/>
+            </a:solidFill>
+            <a:prstDash val="solid"/>
+          </a:ln>
+        </p:spPr>
+      </p:sp>
+      <p:sp>
+        <p:nvSpPr>
+          <p:cNvPr id="17" name="Text 15"/>
+          <p:cNvSpPr/>
+          <p:nvPr/>
+        </p:nvSpPr>
+        <p:spPr>
+          <a:xfrm>
+            <a:off x="7909560" y="3977640"/>
+            <a:ext cx="2926080" cy="182880"/>
+          </a:xfrm>
+          <a:prstGeom prst="rect">
+            <a:avLst/>
+          </a:prstGeom>
+          <a:noFill/>
+          <a:ln/>
+        </p:spPr>
+        <p:txBody>
+          <a:bodyPr wrap="square" lIns="0" tIns="0" rIns="0" bIns="0" rtlCol="0" anchor="ctr"/>
+          <a:lstStyle/>
+          <a:p>
+            <a:pPr algn="ctr" indent="0" marL="0">
+              <a:buNone/>
+            </a:pPr>
+            <a:r>
+              <a:rPr lang="en-US" sz="1000" dirty="0">
+                <a:solidFill>
+                  <a:srgbClr val="003A63"/>
+                </a:solidFill>
+                <a:latin typeface="Aptos" pitchFamily="34" charset="0"/>
+                <a:ea typeface="Aptos" pitchFamily="34" charset="-122"/>
+                <a:cs typeface="Aptos" pitchFamily="34" charset="-120"/>
+              </a:rPr>
+              <a:t>Concept to action</a:t>
+            </a:r>
+            <a:endParaRPr lang="en-US" sz="1000" dirty="0"/>
+          </a:p>
+        </p:txBody>
+      </p:sp>
+      <p:sp>
+        <p:nvSpPr>
+          <p:cNvPr id="18" name="Shape 16"/>
+          <p:cNvSpPr/>
+          <p:nvPr/>
+        </p:nvSpPr>
+        <p:spPr>
+          <a:xfrm>
+            <a:off x="7635240" y="4498848"/>
+            <a:ext cx="3474720" cy="1143000"/>
+          </a:xfrm>
+          <a:prstGeom prst="roundRect">
+            <a:avLst>
+              <a:gd name="adj" fmla="val 9600"/>
             </a:avLst>
           </a:prstGeom>
           <a:solidFill>
@@ -7711,14 +8645,14 @@
       </p:sp>
       <p:sp>
         <p:nvSpPr>
-          <p:cNvPr id="16" name="Text 14"/>
-          <p:cNvSpPr/>
-          <p:nvPr/>
-        </p:nvSpPr>
-        <p:spPr>
-          <a:xfrm>
-            <a:off x="8074152" y="3666744"/>
-            <a:ext cx="2825496" cy="256032"/>
+          <p:cNvPr id="19" name="Text 17"/>
+          <p:cNvSpPr/>
+          <p:nvPr/>
+        </p:nvSpPr>
+        <p:spPr>
+          <a:xfrm>
+            <a:off x="7799832" y="4645152"/>
+            <a:ext cx="3145536" cy="256032"/>
           </a:xfrm>
           <a:prstGeom prst="rect">
             <a:avLst/>
@@ -7742,7 +8676,7 @@
                 <a:ea typeface="Aptos" pitchFamily="34" charset="-122"/>
                 <a:cs typeface="Aptos" pitchFamily="34" charset="-120"/>
               </a:rPr>
-              <a:t>Use this for</a:t>
+              <a:t>Apply it</a:t>
             </a:r>
             <a:endParaRPr lang="en-US" sz="1300" dirty="0"/>
           </a:p>
@@ -7750,14 +8684,14 @@
       </p:sp>
       <p:sp>
         <p:nvSpPr>
-          <p:cNvPr id="17" name="Text 15"/>
-          <p:cNvSpPr/>
-          <p:nvPr/>
-        </p:nvSpPr>
-        <p:spPr>
-          <a:xfrm>
-            <a:off x="8074152" y="4023360"/>
-            <a:ext cx="2825496" cy="1097280"/>
+          <p:cNvPr id="20" name="Text 18"/>
+          <p:cNvSpPr/>
+          <p:nvPr/>
+        </p:nvSpPr>
+        <p:spPr>
+          <a:xfrm>
+            <a:off x="7799832" y="5001768"/>
+            <a:ext cx="3145536" cy="502920"/>
           </a:xfrm>
           <a:prstGeom prst="rect">
             <a:avLst/>
@@ -7783,7 +8717,7 @@
                 <a:ea typeface="Aptos" pitchFamily="34" charset="-122"/>
                 <a:cs typeface="Aptos" pitchFamily="34" charset="-120"/>
               </a:rPr>
-              <a:t>Connect the concept to public health decisions, safeguards, documentation, or implementation work.</a:t>
+              <a:t>Connect the concept to public health purpose, responsible use, required safeguards, documentation, and the next action a department should take.</a:t>
             </a:r>
             <a:endParaRPr lang="en-US" sz="1550" dirty="0"/>
           </a:p>
@@ -7957,8 +8891,8 @@
         </p:nvSpPr>
         <p:spPr>
           <a:xfrm>
-            <a:off x="9966960" y="6537960"/>
-            <a:ext cx="1645920" cy="201168"/>
+            <a:off x="9646920" y="6537960"/>
+            <a:ext cx="1965960" cy="201168"/>
           </a:xfrm>
           <a:prstGeom prst="rect">
             <a:avLst/>
@@ -7982,7 +8916,7 @@
                 <a:ea typeface="Aptos" pitchFamily="34" charset="-122"/>
                 <a:cs typeface="Aptos" pitchFamily="34" charset="-120"/>
               </a:rPr>
-              <a:t>Â© Paula Soper</a:t>
+              <a:t>Copyright Paula Soper</a:t>
             </a:r>
             <a:endParaRPr lang="en-US" sz="800" dirty="0"/>
           </a:p>
@@ -8029,77 +8963,13 @@
       </p:sp>
       <p:sp>
         <p:nvSpPr>
-          <p:cNvPr id="8" name="Shape 6"/>
+          <p:cNvPr id="8" name="Text 6"/>
           <p:cNvSpPr/>
           <p:nvPr/>
         </p:nvSpPr>
         <p:spPr>
           <a:xfrm>
             <a:off x="640080" y="658368"/>
-            <a:ext cx="420624" cy="420624"/>
-          </a:xfrm>
-          <a:prstGeom prst="ellipse">
-            <a:avLst/>
-          </a:prstGeom>
-          <a:solidFill>
-            <a:srgbClr val="0068B7"/>
-          </a:solidFill>
-          <a:ln w="12700">
-            <a:solidFill>
-              <a:srgbClr val="0068B7"/>
-            </a:solidFill>
-            <a:prstDash val="solid"/>
-          </a:ln>
-        </p:spPr>
-      </p:sp>
-      <p:sp>
-        <p:nvSpPr>
-          <p:cNvPr id="9" name="Text 7"/>
-          <p:cNvSpPr/>
-          <p:nvPr/>
-        </p:nvSpPr>
-        <p:spPr>
-          <a:xfrm>
-            <a:off x="640080" y="731520"/>
-            <a:ext cx="420624" cy="164592"/>
-          </a:xfrm>
-          <a:prstGeom prst="rect">
-            <a:avLst/>
-          </a:prstGeom>
-          <a:noFill/>
-          <a:ln/>
-        </p:spPr>
-        <p:txBody>
-          <a:bodyPr wrap="square" lIns="0" tIns="0" rIns="0" bIns="0" rtlCol="0" anchor="ctr"/>
-          <a:lstStyle/>
-          <a:p>
-            <a:pPr algn="ctr" indent="0" marL="0">
-              <a:buNone/>
-            </a:pPr>
-            <a:r>
-              <a:rPr lang="en-US" sz="1100" b="1" dirty="0">
-                <a:solidFill>
-                  <a:srgbClr val="FFFFFF"/>
-                </a:solidFill>
-                <a:latin typeface="Aptos" pitchFamily="34" charset="0"/>
-                <a:ea typeface="Aptos" pitchFamily="34" charset="-122"/>
-                <a:cs typeface="Aptos" pitchFamily="34" charset="-120"/>
-              </a:rPr>
-              <a:t>13</a:t>
-            </a:r>
-            <a:endParaRPr lang="en-US" sz="1100" dirty="0"/>
-          </a:p>
-        </p:txBody>
-      </p:sp>
-      <p:sp>
-        <p:nvSpPr>
-          <p:cNvPr id="10" name="Text 8"/>
-          <p:cNvSpPr/>
-          <p:nvPr/>
-        </p:nvSpPr>
-        <p:spPr>
-          <a:xfrm>
-            <a:off x="640080" y="621792"/>
             <a:ext cx="10881360" cy="713232"/>
           </a:xfrm>
           <a:prstGeom prst="rect">
@@ -8134,14 +9004,14 @@
       </p:sp>
       <p:sp>
         <p:nvSpPr>
-          <p:cNvPr id="11" name="Text 9"/>
+          <p:cNvPr id="9" name="Text 7"/>
           <p:cNvSpPr/>
           <p:nvPr/>
         </p:nvSpPr>
         <p:spPr>
           <a:xfrm>
             <a:off x="868680" y="1508760"/>
-            <a:ext cx="6537960" cy="4160520"/>
+            <a:ext cx="6309360" cy="4160520"/>
           </a:xfrm>
           <a:prstGeom prst="rect">
             <a:avLst/>
@@ -8172,18 +9042,18 @@
       </p:sp>
       <p:sp>
         <p:nvSpPr>
-          <p:cNvPr id="12" name="Shape 10"/>
-          <p:cNvSpPr/>
-          <p:nvPr/>
-        </p:nvSpPr>
-        <p:spPr>
-          <a:xfrm>
-            <a:off x="7909560" y="1417320"/>
-            <a:ext cx="3154680" cy="1828800"/>
+          <p:cNvPr id="10" name="Shape 8"/>
+          <p:cNvSpPr/>
+          <p:nvPr/>
+        </p:nvSpPr>
+        <p:spPr>
+          <a:xfrm>
+            <a:off x="7635240" y="1325880"/>
+            <a:ext cx="3474720" cy="1325880"/>
           </a:xfrm>
           <a:prstGeom prst="roundRect">
             <a:avLst>
-              <a:gd name="adj" fmla="val 6000"/>
+              <a:gd name="adj" fmla="val 8276"/>
             </a:avLst>
           </a:prstGeom>
           <a:solidFill>
@@ -8199,14 +9069,14 @@
       </p:sp>
       <p:sp>
         <p:nvSpPr>
-          <p:cNvPr id="13" name="Text 11"/>
-          <p:cNvSpPr/>
-          <p:nvPr/>
-        </p:nvSpPr>
-        <p:spPr>
-          <a:xfrm>
-            <a:off x="8074152" y="1563624"/>
-            <a:ext cx="2825496" cy="256032"/>
+          <p:cNvPr id="11" name="Text 9"/>
+          <p:cNvSpPr/>
+          <p:nvPr/>
+        </p:nvSpPr>
+        <p:spPr>
+          <a:xfrm>
+            <a:off x="7799832" y="1472184"/>
+            <a:ext cx="3145536" cy="256032"/>
           </a:xfrm>
           <a:prstGeom prst="rect">
             <a:avLst/>
@@ -8230,7 +9100,7 @@
                 <a:ea typeface="Aptos" pitchFamily="34" charset="-122"/>
                 <a:cs typeface="Aptos" pitchFamily="34" charset="-120"/>
               </a:rPr>
-              <a:t>Key idea</a:t>
+              <a:t>Practice focus</a:t>
             </a:r>
             <a:endParaRPr lang="en-US" sz="1300" dirty="0"/>
           </a:p>
@@ -8238,14 +9108,14 @@
       </p:sp>
       <p:sp>
         <p:nvSpPr>
-          <p:cNvPr id="14" name="Text 12"/>
-          <p:cNvSpPr/>
-          <p:nvPr/>
-        </p:nvSpPr>
-        <p:spPr>
-          <a:xfrm>
-            <a:off x="8074152" y="1920240"/>
-            <a:ext cx="2825496" cy="1188720"/>
+          <p:cNvPr id="12" name="Text 10"/>
+          <p:cNvSpPr/>
+          <p:nvPr/>
+        </p:nvSpPr>
+        <p:spPr>
+          <a:xfrm>
+            <a:off x="7799832" y="1828800"/>
+            <a:ext cx="3145536" cy="685800"/>
           </a:xfrm>
           <a:prstGeom prst="rect">
             <a:avLst/>
@@ -8279,18 +9149,159 @@
       </p:sp>
       <p:sp>
         <p:nvSpPr>
-          <p:cNvPr id="15" name="Shape 13"/>
-          <p:cNvSpPr/>
-          <p:nvPr/>
-        </p:nvSpPr>
-        <p:spPr>
-          <a:xfrm>
-            <a:off x="7909560" y="3520440"/>
-            <a:ext cx="3154680" cy="1737360"/>
+          <p:cNvPr id="13" name="Shape 11"/>
+          <p:cNvSpPr/>
+          <p:nvPr/>
+        </p:nvSpPr>
+        <p:spPr>
+          <a:xfrm>
+            <a:off x="7635240" y="2788920"/>
+            <a:ext cx="3474720" cy="1536192"/>
           </a:xfrm>
           <a:prstGeom prst="roundRect">
             <a:avLst>
-              <a:gd name="adj" fmla="val 6316"/>
+              <a:gd name="adj" fmla="val 7143"/>
+            </a:avLst>
+          </a:prstGeom>
+          <a:solidFill>
+            <a:srgbClr val="FFFFFF">
+              <a:alpha val="88000"/>
+            </a:srgbClr>
+          </a:solidFill>
+          <a:ln w="12700">
+            <a:solidFill>
+              <a:srgbClr val="D6E8F2"/>
+            </a:solidFill>
+            <a:prstDash val="solid"/>
+          </a:ln>
+        </p:spPr>
+      </p:sp>
+      <p:sp>
+        <p:nvSpPr>
+          <p:cNvPr id="14" name="Shape 12"/>
+          <p:cNvSpPr/>
+          <p:nvPr/>
+        </p:nvSpPr>
+        <p:spPr>
+          <a:xfrm>
+            <a:off x="8074152" y="3291840"/>
+            <a:ext cx="2596896" cy="749808"/>
+          </a:xfrm>
+          <a:prstGeom prst="rect">
+            <a:avLst/>
+          </a:prstGeom>
+          <a:solidFill>
+            <a:srgbClr val="EAF6F8"/>
+          </a:solidFill>
+          <a:ln w="12700">
+            <a:solidFill>
+              <a:srgbClr val="8ABBD8"/>
+            </a:solidFill>
+            <a:prstDash val="solid"/>
+          </a:ln>
+        </p:spPr>
+      </p:sp>
+      <p:sp>
+        <p:nvSpPr>
+          <p:cNvPr id="15" name="Shape 13"/>
+          <p:cNvSpPr/>
+          <p:nvPr/>
+        </p:nvSpPr>
+        <p:spPr>
+          <a:xfrm>
+            <a:off x="8202168" y="3721608"/>
+            <a:ext cx="2340864" cy="0"/>
+          </a:xfrm>
+          <a:prstGeom prst="line">
+            <a:avLst/>
+          </a:prstGeom>
+          <a:noFill/>
+          <a:ln w="19050">
+            <a:solidFill>
+              <a:srgbClr val="0068B7"/>
+            </a:solidFill>
+            <a:prstDash val="solid"/>
+          </a:ln>
+        </p:spPr>
+      </p:sp>
+      <p:sp>
+        <p:nvSpPr>
+          <p:cNvPr id="16" name="Shape 14"/>
+          <p:cNvSpPr/>
+          <p:nvPr/>
+        </p:nvSpPr>
+        <p:spPr>
+          <a:xfrm>
+            <a:off x="9198864" y="4206240"/>
+            <a:ext cx="347472" cy="347472"/>
+          </a:xfrm>
+          <a:prstGeom prst="ellipse">
+            <a:avLst/>
+          </a:prstGeom>
+          <a:solidFill>
+            <a:srgbClr val="2F8A28"/>
+          </a:solidFill>
+          <a:ln w="12700">
+            <a:solidFill>
+              <a:srgbClr val="2F8A28"/>
+            </a:solidFill>
+            <a:prstDash val="solid"/>
+          </a:ln>
+        </p:spPr>
+      </p:sp>
+      <p:sp>
+        <p:nvSpPr>
+          <p:cNvPr id="17" name="Text 15"/>
+          <p:cNvSpPr/>
+          <p:nvPr/>
+        </p:nvSpPr>
+        <p:spPr>
+          <a:xfrm>
+            <a:off x="7909560" y="3977640"/>
+            <a:ext cx="2926080" cy="182880"/>
+          </a:xfrm>
+          <a:prstGeom prst="rect">
+            <a:avLst/>
+          </a:prstGeom>
+          <a:noFill/>
+          <a:ln/>
+        </p:spPr>
+        <p:txBody>
+          <a:bodyPr wrap="square" lIns="0" tIns="0" rIns="0" bIns="0" rtlCol="0" anchor="ctr"/>
+          <a:lstStyle/>
+          <a:p>
+            <a:pPr algn="ctr" indent="0" marL="0">
+              <a:buNone/>
+            </a:pPr>
+            <a:r>
+              <a:rPr lang="en-US" sz="1000" dirty="0">
+                <a:solidFill>
+                  <a:srgbClr val="003A63"/>
+                </a:solidFill>
+                <a:latin typeface="Aptos" pitchFamily="34" charset="0"/>
+                <a:ea typeface="Aptos" pitchFamily="34" charset="-122"/>
+                <a:cs typeface="Aptos" pitchFamily="34" charset="-120"/>
+              </a:rPr>
+              <a:t>Concept to action</a:t>
+            </a:r>
+            <a:endParaRPr lang="en-US" sz="1000" dirty="0"/>
+          </a:p>
+        </p:txBody>
+      </p:sp>
+      <p:sp>
+        <p:nvSpPr>
+          <p:cNvPr id="18" name="Shape 16"/>
+          <p:cNvSpPr/>
+          <p:nvPr/>
+        </p:nvSpPr>
+        <p:spPr>
+          <a:xfrm>
+            <a:off x="7635240" y="4498848"/>
+            <a:ext cx="3474720" cy="1143000"/>
+          </a:xfrm>
+          <a:prstGeom prst="roundRect">
+            <a:avLst>
+              <a:gd name="adj" fmla="val 9600"/>
             </a:avLst>
           </a:prstGeom>
           <a:solidFill>
@@ -8306,14 +9317,14 @@
       </p:sp>
       <p:sp>
         <p:nvSpPr>
-          <p:cNvPr id="16" name="Text 14"/>
-          <p:cNvSpPr/>
-          <p:nvPr/>
-        </p:nvSpPr>
-        <p:spPr>
-          <a:xfrm>
-            <a:off x="8074152" y="3666744"/>
-            <a:ext cx="2825496" cy="256032"/>
+          <p:cNvPr id="19" name="Text 17"/>
+          <p:cNvSpPr/>
+          <p:nvPr/>
+        </p:nvSpPr>
+        <p:spPr>
+          <a:xfrm>
+            <a:off x="7799832" y="4645152"/>
+            <a:ext cx="3145536" cy="256032"/>
           </a:xfrm>
           <a:prstGeom prst="rect">
             <a:avLst/>
@@ -8337,7 +9348,7 @@
                 <a:ea typeface="Aptos" pitchFamily="34" charset="-122"/>
                 <a:cs typeface="Aptos" pitchFamily="34" charset="-120"/>
               </a:rPr>
-              <a:t>Use this for</a:t>
+              <a:t>What to produce</a:t>
             </a:r>
             <a:endParaRPr lang="en-US" sz="1300" dirty="0"/>
           </a:p>
@@ -8345,14 +9356,14 @@
       </p:sp>
       <p:sp>
         <p:nvSpPr>
-          <p:cNvPr id="17" name="Text 15"/>
-          <p:cNvSpPr/>
-          <p:nvPr/>
-        </p:nvSpPr>
-        <p:spPr>
-          <a:xfrm>
-            <a:off x="8074152" y="4023360"/>
-            <a:ext cx="2825496" cy="1097280"/>
+          <p:cNvPr id="20" name="Text 18"/>
+          <p:cNvSpPr/>
+          <p:nvPr/>
+        </p:nvSpPr>
+        <p:spPr>
+          <a:xfrm>
+            <a:off x="7799832" y="5001768"/>
+            <a:ext cx="3145536" cy="502920"/>
           </a:xfrm>
           <a:prstGeom prst="rect">
             <a:avLst/>
@@ -8378,7 +9389,7 @@
                 <a:ea typeface="Aptos" pitchFamily="34" charset="-122"/>
                 <a:cs typeface="Aptos" pitchFamily="34" charset="-120"/>
               </a:rPr>
-              <a:t>Connect the concept to public health decisions, safeguards, documentation, or implementation work.</a:t>
+              <a:t>Use the assignment to test whether you can explain the concept, apply it to a realistic public health situation, and identify what would need review before the work moves forward.</a:t>
             </a:r>
             <a:endParaRPr lang="en-US" sz="1550" dirty="0"/>
           </a:p>
@@ -8552,8 +9563,8 @@
         </p:nvSpPr>
         <p:spPr>
           <a:xfrm>
-            <a:off x="9966960" y="6537960"/>
-            <a:ext cx="1645920" cy="201168"/>
+            <a:off x="9646920" y="6537960"/>
+            <a:ext cx="1965960" cy="201168"/>
           </a:xfrm>
           <a:prstGeom prst="rect">
             <a:avLst/>
@@ -8577,7 +9588,7 @@
                 <a:ea typeface="Aptos" pitchFamily="34" charset="-122"/>
                 <a:cs typeface="Aptos" pitchFamily="34" charset="-120"/>
               </a:rPr>
-              <a:t>Â© Paula Soper</a:t>
+              <a:t>Copyright Paula Soper</a:t>
             </a:r>
             <a:endParaRPr lang="en-US" sz="800" dirty="0"/>
           </a:p>
@@ -8624,77 +9635,13 @@
       </p:sp>
       <p:sp>
         <p:nvSpPr>
-          <p:cNvPr id="8" name="Shape 6"/>
+          <p:cNvPr id="8" name="Text 6"/>
           <p:cNvSpPr/>
           <p:nvPr/>
         </p:nvSpPr>
         <p:spPr>
           <a:xfrm>
             <a:off x="640080" y="658368"/>
-            <a:ext cx="420624" cy="420624"/>
-          </a:xfrm>
-          <a:prstGeom prst="ellipse">
-            <a:avLst/>
-          </a:prstGeom>
-          <a:solidFill>
-            <a:srgbClr val="0068B7"/>
-          </a:solidFill>
-          <a:ln w="12700">
-            <a:solidFill>
-              <a:srgbClr val="0068B7"/>
-            </a:solidFill>
-            <a:prstDash val="solid"/>
-          </a:ln>
-        </p:spPr>
-      </p:sp>
-      <p:sp>
-        <p:nvSpPr>
-          <p:cNvPr id="9" name="Text 7"/>
-          <p:cNvSpPr/>
-          <p:nvPr/>
-        </p:nvSpPr>
-        <p:spPr>
-          <a:xfrm>
-            <a:off x="640080" y="731520"/>
-            <a:ext cx="420624" cy="164592"/>
-          </a:xfrm>
-          <a:prstGeom prst="rect">
-            <a:avLst/>
-          </a:prstGeom>
-          <a:noFill/>
-          <a:ln/>
-        </p:spPr>
-        <p:txBody>
-          <a:bodyPr wrap="square" lIns="0" tIns="0" rIns="0" bIns="0" rtlCol="0" anchor="ctr"/>
-          <a:lstStyle/>
-          <a:p>
-            <a:pPr algn="ctr" indent="0" marL="0">
-              <a:buNone/>
-            </a:pPr>
-            <a:r>
-              <a:rPr lang="en-US" sz="1100" b="1" dirty="0">
-                <a:solidFill>
-                  <a:srgbClr val="FFFFFF"/>
-                </a:solidFill>
-                <a:latin typeface="Aptos" pitchFamily="34" charset="0"/>
-                <a:ea typeface="Aptos" pitchFamily="34" charset="-122"/>
-                <a:cs typeface="Aptos" pitchFamily="34" charset="-120"/>
-              </a:rPr>
-              <a:t>14</a:t>
-            </a:r>
-            <a:endParaRPr lang="en-US" sz="1100" dirty="0"/>
-          </a:p>
-        </p:txBody>
-      </p:sp>
-      <p:sp>
-        <p:nvSpPr>
-          <p:cNvPr id="10" name="Text 8"/>
-          <p:cNvSpPr/>
-          <p:nvPr/>
-        </p:nvSpPr>
-        <p:spPr>
-          <a:xfrm>
-            <a:off x="640080" y="621792"/>
             <a:ext cx="10881360" cy="713232"/>
           </a:xfrm>
           <a:prstGeom prst="rect">
@@ -8729,14 +9676,14 @@
       </p:sp>
       <p:sp>
         <p:nvSpPr>
-          <p:cNvPr id="11" name="Text 9"/>
+          <p:cNvPr id="9" name="Text 7"/>
           <p:cNvSpPr/>
           <p:nvPr/>
         </p:nvSpPr>
         <p:spPr>
           <a:xfrm>
             <a:off x="868680" y="1508760"/>
-            <a:ext cx="6537960" cy="4160520"/>
+            <a:ext cx="6309360" cy="4160520"/>
           </a:xfrm>
           <a:prstGeom prst="rect">
             <a:avLst/>
@@ -8795,18 +9742,18 @@
       </p:sp>
       <p:sp>
         <p:nvSpPr>
-          <p:cNvPr id="12" name="Shape 10"/>
-          <p:cNvSpPr/>
-          <p:nvPr/>
-        </p:nvSpPr>
-        <p:spPr>
-          <a:xfrm>
-            <a:off x="7909560" y="1417320"/>
-            <a:ext cx="3154680" cy="1828800"/>
+          <p:cNvPr id="10" name="Shape 8"/>
+          <p:cNvSpPr/>
+          <p:nvPr/>
+        </p:nvSpPr>
+        <p:spPr>
+          <a:xfrm>
+            <a:off x="7635240" y="1325880"/>
+            <a:ext cx="3474720" cy="1325880"/>
           </a:xfrm>
           <a:prstGeom prst="roundRect">
             <a:avLst>
-              <a:gd name="adj" fmla="val 6000"/>
+              <a:gd name="adj" fmla="val 8276"/>
             </a:avLst>
           </a:prstGeom>
           <a:solidFill>
@@ -8822,14 +9769,14 @@
       </p:sp>
       <p:sp>
         <p:nvSpPr>
-          <p:cNvPr id="13" name="Text 11"/>
-          <p:cNvSpPr/>
-          <p:nvPr/>
-        </p:nvSpPr>
-        <p:spPr>
-          <a:xfrm>
-            <a:off x="8074152" y="1563624"/>
-            <a:ext cx="2825496" cy="256032"/>
+          <p:cNvPr id="11" name="Text 9"/>
+          <p:cNvSpPr/>
+          <p:nvPr/>
+        </p:nvSpPr>
+        <p:spPr>
+          <a:xfrm>
+            <a:off x="7799832" y="1472184"/>
+            <a:ext cx="3145536" cy="256032"/>
           </a:xfrm>
           <a:prstGeom prst="rect">
             <a:avLst/>
@@ -8853,7 +9800,7 @@
                 <a:ea typeface="Aptos" pitchFamily="34" charset="-122"/>
                 <a:cs typeface="Aptos" pitchFamily="34" charset="-120"/>
               </a:rPr>
-              <a:t>Key idea</a:t>
+              <a:t>Practice focus</a:t>
             </a:r>
             <a:endParaRPr lang="en-US" sz="1300" dirty="0"/>
           </a:p>
@@ -8861,14 +9808,14 @@
       </p:sp>
       <p:sp>
         <p:nvSpPr>
-          <p:cNvPr id="14" name="Text 12"/>
-          <p:cNvSpPr/>
-          <p:nvPr/>
-        </p:nvSpPr>
-        <p:spPr>
-          <a:xfrm>
-            <a:off x="8074152" y="1920240"/>
-            <a:ext cx="2825496" cy="1188720"/>
+          <p:cNvPr id="12" name="Text 10"/>
+          <p:cNvSpPr/>
+          <p:nvPr/>
+        </p:nvSpPr>
+        <p:spPr>
+          <a:xfrm>
+            <a:off x="7799832" y="1828800"/>
+            <a:ext cx="3145536" cy="685800"/>
           </a:xfrm>
           <a:prstGeom prst="rect">
             <a:avLst/>
@@ -8902,18 +9849,159 @@
       </p:sp>
       <p:sp>
         <p:nvSpPr>
-          <p:cNvPr id="15" name="Shape 13"/>
-          <p:cNvSpPr/>
-          <p:nvPr/>
-        </p:nvSpPr>
-        <p:spPr>
-          <a:xfrm>
-            <a:off x="7909560" y="3520440"/>
-            <a:ext cx="3154680" cy="1737360"/>
+          <p:cNvPr id="13" name="Shape 11"/>
+          <p:cNvSpPr/>
+          <p:nvPr/>
+        </p:nvSpPr>
+        <p:spPr>
+          <a:xfrm>
+            <a:off x="7635240" y="2788920"/>
+            <a:ext cx="3474720" cy="1536192"/>
           </a:xfrm>
           <a:prstGeom prst="roundRect">
             <a:avLst>
-              <a:gd name="adj" fmla="val 6316"/>
+              <a:gd name="adj" fmla="val 7143"/>
+            </a:avLst>
+          </a:prstGeom>
+          <a:solidFill>
+            <a:srgbClr val="FFFFFF">
+              <a:alpha val="88000"/>
+            </a:srgbClr>
+          </a:solidFill>
+          <a:ln w="12700">
+            <a:solidFill>
+              <a:srgbClr val="D6E8F2"/>
+            </a:solidFill>
+            <a:prstDash val="solid"/>
+          </a:ln>
+        </p:spPr>
+      </p:sp>
+      <p:sp>
+        <p:nvSpPr>
+          <p:cNvPr id="14" name="Shape 12"/>
+          <p:cNvSpPr/>
+          <p:nvPr/>
+        </p:nvSpPr>
+        <p:spPr>
+          <a:xfrm>
+            <a:off x="8074152" y="3291840"/>
+            <a:ext cx="2596896" cy="749808"/>
+          </a:xfrm>
+          <a:prstGeom prst="rect">
+            <a:avLst/>
+          </a:prstGeom>
+          <a:solidFill>
+            <a:srgbClr val="EAF6F8"/>
+          </a:solidFill>
+          <a:ln w="12700">
+            <a:solidFill>
+              <a:srgbClr val="8ABBD8"/>
+            </a:solidFill>
+            <a:prstDash val="solid"/>
+          </a:ln>
+        </p:spPr>
+      </p:sp>
+      <p:sp>
+        <p:nvSpPr>
+          <p:cNvPr id="15" name="Shape 13"/>
+          <p:cNvSpPr/>
+          <p:nvPr/>
+        </p:nvSpPr>
+        <p:spPr>
+          <a:xfrm>
+            <a:off x="8202168" y="3721608"/>
+            <a:ext cx="2340864" cy="0"/>
+          </a:xfrm>
+          <a:prstGeom prst="line">
+            <a:avLst/>
+          </a:prstGeom>
+          <a:noFill/>
+          <a:ln w="19050">
+            <a:solidFill>
+              <a:srgbClr val="0068B7"/>
+            </a:solidFill>
+            <a:prstDash val="solid"/>
+          </a:ln>
+        </p:spPr>
+      </p:sp>
+      <p:sp>
+        <p:nvSpPr>
+          <p:cNvPr id="16" name="Shape 14"/>
+          <p:cNvSpPr/>
+          <p:nvPr/>
+        </p:nvSpPr>
+        <p:spPr>
+          <a:xfrm>
+            <a:off x="9198864" y="4206240"/>
+            <a:ext cx="347472" cy="347472"/>
+          </a:xfrm>
+          <a:prstGeom prst="ellipse">
+            <a:avLst/>
+          </a:prstGeom>
+          <a:solidFill>
+            <a:srgbClr val="2F8A28"/>
+          </a:solidFill>
+          <a:ln w="12700">
+            <a:solidFill>
+              <a:srgbClr val="2F8A28"/>
+            </a:solidFill>
+            <a:prstDash val="solid"/>
+          </a:ln>
+        </p:spPr>
+      </p:sp>
+      <p:sp>
+        <p:nvSpPr>
+          <p:cNvPr id="17" name="Text 15"/>
+          <p:cNvSpPr/>
+          <p:nvPr/>
+        </p:nvSpPr>
+        <p:spPr>
+          <a:xfrm>
+            <a:off x="7909560" y="3977640"/>
+            <a:ext cx="2926080" cy="182880"/>
+          </a:xfrm>
+          <a:prstGeom prst="rect">
+            <a:avLst/>
+          </a:prstGeom>
+          <a:noFill/>
+          <a:ln/>
+        </p:spPr>
+        <p:txBody>
+          <a:bodyPr wrap="square" lIns="0" tIns="0" rIns="0" bIns="0" rtlCol="0" anchor="ctr"/>
+          <a:lstStyle/>
+          <a:p>
+            <a:pPr algn="ctr" indent="0" marL="0">
+              <a:buNone/>
+            </a:pPr>
+            <a:r>
+              <a:rPr lang="en-US" sz="1000" dirty="0">
+                <a:solidFill>
+                  <a:srgbClr val="003A63"/>
+                </a:solidFill>
+                <a:latin typeface="Aptos" pitchFamily="34" charset="0"/>
+                <a:ea typeface="Aptos" pitchFamily="34" charset="-122"/>
+                <a:cs typeface="Aptos" pitchFamily="34" charset="-120"/>
+              </a:rPr>
+              <a:t>Concept to action</a:t>
+            </a:r>
+            <a:endParaRPr lang="en-US" sz="1000" dirty="0"/>
+          </a:p>
+        </p:txBody>
+      </p:sp>
+      <p:sp>
+        <p:nvSpPr>
+          <p:cNvPr id="18" name="Shape 16"/>
+          <p:cNvSpPr/>
+          <p:nvPr/>
+        </p:nvSpPr>
+        <p:spPr>
+          <a:xfrm>
+            <a:off x="7635240" y="4498848"/>
+            <a:ext cx="3474720" cy="1143000"/>
+          </a:xfrm>
+          <a:prstGeom prst="roundRect">
+            <a:avLst>
+              <a:gd name="adj" fmla="val 9600"/>
             </a:avLst>
           </a:prstGeom>
           <a:solidFill>
@@ -8929,14 +10017,14 @@
       </p:sp>
       <p:sp>
         <p:nvSpPr>
-          <p:cNvPr id="16" name="Text 14"/>
-          <p:cNvSpPr/>
-          <p:nvPr/>
-        </p:nvSpPr>
-        <p:spPr>
-          <a:xfrm>
-            <a:off x="8074152" y="3666744"/>
-            <a:ext cx="2825496" cy="256032"/>
+          <p:cNvPr id="19" name="Text 17"/>
+          <p:cNvSpPr/>
+          <p:nvPr/>
+        </p:nvSpPr>
+        <p:spPr>
+          <a:xfrm>
+            <a:off x="7799832" y="4645152"/>
+            <a:ext cx="3145536" cy="256032"/>
           </a:xfrm>
           <a:prstGeom prst="rect">
             <a:avLst/>
@@ -8960,7 +10048,7 @@
                 <a:ea typeface="Aptos" pitchFamily="34" charset="-122"/>
                 <a:cs typeface="Aptos" pitchFamily="34" charset="-120"/>
               </a:rPr>
-              <a:t>Use this for</a:t>
+              <a:t>What to produce</a:t>
             </a:r>
             <a:endParaRPr lang="en-US" sz="1300" dirty="0"/>
           </a:p>
@@ -8968,14 +10056,14 @@
       </p:sp>
       <p:sp>
         <p:nvSpPr>
-          <p:cNvPr id="17" name="Text 15"/>
-          <p:cNvSpPr/>
-          <p:nvPr/>
-        </p:nvSpPr>
-        <p:spPr>
-          <a:xfrm>
-            <a:off x="8074152" y="4023360"/>
-            <a:ext cx="2825496" cy="1097280"/>
+          <p:cNvPr id="20" name="Text 18"/>
+          <p:cNvSpPr/>
+          <p:nvPr/>
+        </p:nvSpPr>
+        <p:spPr>
+          <a:xfrm>
+            <a:off x="7799832" y="5001768"/>
+            <a:ext cx="3145536" cy="502920"/>
           </a:xfrm>
           <a:prstGeom prst="rect">
             <a:avLst/>
@@ -9001,7 +10089,7 @@
                 <a:ea typeface="Aptos" pitchFamily="34" charset="-122"/>
                 <a:cs typeface="Aptos" pitchFamily="34" charset="-120"/>
               </a:rPr>
-              <a:t>Connect the concept to public health decisions, safeguards, documentation, or implementation work.</a:t>
+              <a:t>Use the assignment to test whether you can explain the concept, apply it to a realistic public health situation, and identify what would need review before the work moves forward.</a:t>
             </a:r>
             <a:endParaRPr lang="en-US" sz="1550" dirty="0"/>
           </a:p>
@@ -9175,8 +10263,8 @@
         </p:nvSpPr>
         <p:spPr>
           <a:xfrm>
-            <a:off x="9966960" y="6537960"/>
-            <a:ext cx="1645920" cy="201168"/>
+            <a:off x="9646920" y="6537960"/>
+            <a:ext cx="1965960" cy="201168"/>
           </a:xfrm>
           <a:prstGeom prst="rect">
             <a:avLst/>
@@ -9200,7 +10288,7 @@
                 <a:ea typeface="Aptos" pitchFamily="34" charset="-122"/>
                 <a:cs typeface="Aptos" pitchFamily="34" charset="-120"/>
               </a:rPr>
-              <a:t>Â© Paula Soper</a:t>
+              <a:t>Copyright Paula Soper</a:t>
             </a:r>
             <a:endParaRPr lang="en-US" sz="800" dirty="0"/>
           </a:p>
@@ -9563,46 +10651,7 @@
       </p:sp>
       <p:sp>
         <p:nvSpPr>
-          <p:cNvPr id="15" name="Text 13"/>
-          <p:cNvSpPr/>
-          <p:nvPr/>
-        </p:nvSpPr>
-        <p:spPr>
-          <a:xfrm>
-            <a:off x="8695944" y="3941064"/>
-            <a:ext cx="201168" cy="256032"/>
-          </a:xfrm>
-          <a:prstGeom prst="rect">
-            <a:avLst/>
-          </a:prstGeom>
-          <a:noFill/>
-          <a:ln/>
-        </p:spPr>
-        <p:txBody>
-          <a:bodyPr wrap="square" lIns="0" tIns="0" rIns="0" bIns="0" rtlCol="0" anchor="ctr"/>
-          <a:lstStyle/>
-          <a:p>
-            <a:pPr algn="ctr" indent="0" marL="0">
-              <a:buNone/>
-            </a:pPr>
-            <a:r>
-              <a:rPr lang="en-US" sz="1800" b="1" dirty="0">
-                <a:solidFill>
-                  <a:srgbClr val="0068B7"/>
-                </a:solidFill>
-                <a:latin typeface="Aptos" pitchFamily="34" charset="0"/>
-                <a:ea typeface="Aptos" pitchFamily="34" charset="-122"/>
-                <a:cs typeface="Aptos" pitchFamily="34" charset="-120"/>
-              </a:rPr>
-              <a:t>â†’</a:t>
-            </a:r>
-            <a:endParaRPr lang="en-US" sz="1800" dirty="0"/>
-          </a:p>
-        </p:txBody>
-      </p:sp>
-      <p:sp>
-        <p:nvSpPr>
-          <p:cNvPr id="16" name="Shape 14"/>
+          <p:cNvPr id="15" name="Shape 13"/>
           <p:cNvSpPr/>
           <p:nvPr/>
         </p:nvSpPr>
@@ -9629,7 +10678,7 @@
       </p:sp>
       <p:sp>
         <p:nvSpPr>
-          <p:cNvPr id="17" name="Text 15"/>
+          <p:cNvPr id="16" name="Text 14"/>
           <p:cNvSpPr/>
           <p:nvPr/>
         </p:nvSpPr>
@@ -9670,46 +10719,7 @@
       </p:sp>
       <p:sp>
         <p:nvSpPr>
-          <p:cNvPr id="18" name="Text 16"/>
-          <p:cNvSpPr/>
-          <p:nvPr/>
-        </p:nvSpPr>
-        <p:spPr>
-          <a:xfrm>
-            <a:off x="9985248" y="3941064"/>
-            <a:ext cx="201168" cy="256032"/>
-          </a:xfrm>
-          <a:prstGeom prst="rect">
-            <a:avLst/>
-          </a:prstGeom>
-          <a:noFill/>
-          <a:ln/>
-        </p:spPr>
-        <p:txBody>
-          <a:bodyPr wrap="square" lIns="0" tIns="0" rIns="0" bIns="0" rtlCol="0" anchor="ctr"/>
-          <a:lstStyle/>
-          <a:p>
-            <a:pPr algn="ctr" indent="0" marL="0">
-              <a:buNone/>
-            </a:pPr>
-            <a:r>
-              <a:rPr lang="en-US" sz="1800" b="1" dirty="0">
-                <a:solidFill>
-                  <a:srgbClr val="0068B7"/>
-                </a:solidFill>
-                <a:latin typeface="Aptos" pitchFamily="34" charset="0"/>
-                <a:ea typeface="Aptos" pitchFamily="34" charset="-122"/>
-                <a:cs typeface="Aptos" pitchFamily="34" charset="-120"/>
-              </a:rPr>
-              <a:t>â†’</a:t>
-            </a:r>
-            <a:endParaRPr lang="en-US" sz="1800" dirty="0"/>
-          </a:p>
-        </p:txBody>
-      </p:sp>
-      <p:sp>
-        <p:nvSpPr>
-          <p:cNvPr id="19" name="Shape 17"/>
+          <p:cNvPr id="17" name="Shape 15"/>
           <p:cNvSpPr/>
           <p:nvPr/>
         </p:nvSpPr>
@@ -9736,7 +10746,7 @@
       </p:sp>
       <p:sp>
         <p:nvSpPr>
-          <p:cNvPr id="20" name="Text 18"/>
+          <p:cNvPr id="18" name="Text 16"/>
           <p:cNvSpPr/>
           <p:nvPr/>
         </p:nvSpPr>
@@ -9943,8 +10953,8 @@
         </p:nvSpPr>
         <p:spPr>
           <a:xfrm>
-            <a:off x="9966960" y="6537960"/>
-            <a:ext cx="1645920" cy="201168"/>
+            <a:off x="9646920" y="6537960"/>
+            <a:ext cx="1965960" cy="201168"/>
           </a:xfrm>
           <a:prstGeom prst="rect">
             <a:avLst/>
@@ -9968,7 +10978,7 @@
                 <a:ea typeface="Aptos" pitchFamily="34" charset="-122"/>
                 <a:cs typeface="Aptos" pitchFamily="34" charset="-120"/>
               </a:rPr>
-              <a:t>Â© Paula Soper</a:t>
+              <a:t>Copyright Paula Soper</a:t>
             </a:r>
             <a:endParaRPr lang="en-US" sz="800" dirty="0"/>
           </a:p>
@@ -10015,77 +11025,13 @@
       </p:sp>
       <p:sp>
         <p:nvSpPr>
-          <p:cNvPr id="8" name="Shape 6"/>
+          <p:cNvPr id="8" name="Text 6"/>
           <p:cNvSpPr/>
           <p:nvPr/>
         </p:nvSpPr>
         <p:spPr>
           <a:xfrm>
             <a:off x="640080" y="658368"/>
-            <a:ext cx="420624" cy="420624"/>
-          </a:xfrm>
-          <a:prstGeom prst="ellipse">
-            <a:avLst/>
-          </a:prstGeom>
-          <a:solidFill>
-            <a:srgbClr val="0068B7"/>
-          </a:solidFill>
-          <a:ln w="12700">
-            <a:solidFill>
-              <a:srgbClr val="0068B7"/>
-            </a:solidFill>
-            <a:prstDash val="solid"/>
-          </a:ln>
-        </p:spPr>
-      </p:sp>
-      <p:sp>
-        <p:nvSpPr>
-          <p:cNvPr id="9" name="Text 7"/>
-          <p:cNvSpPr/>
-          <p:nvPr/>
-        </p:nvSpPr>
-        <p:spPr>
-          <a:xfrm>
-            <a:off x="640080" y="731520"/>
-            <a:ext cx="420624" cy="164592"/>
-          </a:xfrm>
-          <a:prstGeom prst="rect">
-            <a:avLst/>
-          </a:prstGeom>
-          <a:noFill/>
-          <a:ln/>
-        </p:spPr>
-        <p:txBody>
-          <a:bodyPr wrap="square" lIns="0" tIns="0" rIns="0" bIns="0" rtlCol="0" anchor="ctr"/>
-          <a:lstStyle/>
-          <a:p>
-            <a:pPr algn="ctr" indent="0" marL="0">
-              <a:buNone/>
-            </a:pPr>
-            <a:r>
-              <a:rPr lang="en-US" sz="1100" b="1" dirty="0">
-                <a:solidFill>
-                  <a:srgbClr val="FFFFFF"/>
-                </a:solidFill>
-                <a:latin typeface="Aptos" pitchFamily="34" charset="0"/>
-                <a:ea typeface="Aptos" pitchFamily="34" charset="-122"/>
-                <a:cs typeface="Aptos" pitchFamily="34" charset="-120"/>
-              </a:rPr>
-              <a:t>15</a:t>
-            </a:r>
-            <a:endParaRPr lang="en-US" sz="1100" dirty="0"/>
-          </a:p>
-        </p:txBody>
-      </p:sp>
-      <p:sp>
-        <p:nvSpPr>
-          <p:cNvPr id="10" name="Text 8"/>
-          <p:cNvSpPr/>
-          <p:nvPr/>
-        </p:nvSpPr>
-        <p:spPr>
-          <a:xfrm>
-            <a:off x="640080" y="621792"/>
             <a:ext cx="10881360" cy="713232"/>
           </a:xfrm>
           <a:prstGeom prst="rect">
@@ -10120,14 +11066,14 @@
       </p:sp>
       <p:sp>
         <p:nvSpPr>
-          <p:cNvPr id="11" name="Text 9"/>
+          <p:cNvPr id="9" name="Text 7"/>
           <p:cNvSpPr/>
           <p:nvPr/>
         </p:nvSpPr>
         <p:spPr>
           <a:xfrm>
             <a:off x="868680" y="1508760"/>
-            <a:ext cx="6537960" cy="4160520"/>
+            <a:ext cx="6309360" cy="4160520"/>
           </a:xfrm>
           <a:prstGeom prst="rect">
             <a:avLst/>
@@ -10186,18 +11132,18 @@
       </p:sp>
       <p:sp>
         <p:nvSpPr>
-          <p:cNvPr id="12" name="Shape 10"/>
-          <p:cNvSpPr/>
-          <p:nvPr/>
-        </p:nvSpPr>
-        <p:spPr>
-          <a:xfrm>
-            <a:off x="7909560" y="1417320"/>
-            <a:ext cx="3154680" cy="1828800"/>
+          <p:cNvPr id="10" name="Shape 8"/>
+          <p:cNvSpPr/>
+          <p:nvPr/>
+        </p:nvSpPr>
+        <p:spPr>
+          <a:xfrm>
+            <a:off x="7635240" y="1325880"/>
+            <a:ext cx="3474720" cy="1325880"/>
           </a:xfrm>
           <a:prstGeom prst="roundRect">
             <a:avLst>
-              <a:gd name="adj" fmla="val 6000"/>
+              <a:gd name="adj" fmla="val 8276"/>
             </a:avLst>
           </a:prstGeom>
           <a:solidFill>
@@ -10213,14 +11159,14 @@
       </p:sp>
       <p:sp>
         <p:nvSpPr>
-          <p:cNvPr id="13" name="Text 11"/>
-          <p:cNvSpPr/>
-          <p:nvPr/>
-        </p:nvSpPr>
-        <p:spPr>
-          <a:xfrm>
-            <a:off x="8074152" y="1563624"/>
-            <a:ext cx="2825496" cy="256032"/>
+          <p:cNvPr id="11" name="Text 9"/>
+          <p:cNvSpPr/>
+          <p:nvPr/>
+        </p:nvSpPr>
+        <p:spPr>
+          <a:xfrm>
+            <a:off x="7799832" y="1472184"/>
+            <a:ext cx="3145536" cy="256032"/>
           </a:xfrm>
           <a:prstGeom prst="rect">
             <a:avLst/>
@@ -10244,7 +11190,7 @@
                 <a:ea typeface="Aptos" pitchFamily="34" charset="-122"/>
                 <a:cs typeface="Aptos" pitchFamily="34" charset="-120"/>
               </a:rPr>
-              <a:t>Key idea</a:t>
+              <a:t>Core concept</a:t>
             </a:r>
             <a:endParaRPr lang="en-US" sz="1300" dirty="0"/>
           </a:p>
@@ -10252,14 +11198,14 @@
       </p:sp>
       <p:sp>
         <p:nvSpPr>
-          <p:cNvPr id="14" name="Text 12"/>
-          <p:cNvSpPr/>
-          <p:nvPr/>
-        </p:nvSpPr>
-        <p:spPr>
-          <a:xfrm>
-            <a:off x="8074152" y="1920240"/>
-            <a:ext cx="2825496" cy="1188720"/>
+          <p:cNvPr id="12" name="Text 10"/>
+          <p:cNvSpPr/>
+          <p:nvPr/>
+        </p:nvSpPr>
+        <p:spPr>
+          <a:xfrm>
+            <a:off x="7799832" y="1828800"/>
+            <a:ext cx="3145536" cy="685800"/>
           </a:xfrm>
           <a:prstGeom prst="rect">
             <a:avLst/>
@@ -10293,18 +11239,159 @@
       </p:sp>
       <p:sp>
         <p:nvSpPr>
-          <p:cNvPr id="15" name="Shape 13"/>
-          <p:cNvSpPr/>
-          <p:nvPr/>
-        </p:nvSpPr>
-        <p:spPr>
-          <a:xfrm>
-            <a:off x="7909560" y="3520440"/>
-            <a:ext cx="3154680" cy="1737360"/>
+          <p:cNvPr id="13" name="Shape 11"/>
+          <p:cNvSpPr/>
+          <p:nvPr/>
+        </p:nvSpPr>
+        <p:spPr>
+          <a:xfrm>
+            <a:off x="7635240" y="2788920"/>
+            <a:ext cx="3474720" cy="1536192"/>
           </a:xfrm>
           <a:prstGeom prst="roundRect">
             <a:avLst>
-              <a:gd name="adj" fmla="val 6316"/>
+              <a:gd name="adj" fmla="val 7143"/>
+            </a:avLst>
+          </a:prstGeom>
+          <a:solidFill>
+            <a:srgbClr val="FFFFFF">
+              <a:alpha val="88000"/>
+            </a:srgbClr>
+          </a:solidFill>
+          <a:ln w="12700">
+            <a:solidFill>
+              <a:srgbClr val="D6E8F2"/>
+            </a:solidFill>
+            <a:prstDash val="solid"/>
+          </a:ln>
+        </p:spPr>
+      </p:sp>
+      <p:sp>
+        <p:nvSpPr>
+          <p:cNvPr id="14" name="Shape 12"/>
+          <p:cNvSpPr/>
+          <p:nvPr/>
+        </p:nvSpPr>
+        <p:spPr>
+          <a:xfrm>
+            <a:off x="8074152" y="3291840"/>
+            <a:ext cx="2596896" cy="749808"/>
+          </a:xfrm>
+          <a:prstGeom prst="rect">
+            <a:avLst/>
+          </a:prstGeom>
+          <a:solidFill>
+            <a:srgbClr val="EAF6F8"/>
+          </a:solidFill>
+          <a:ln w="12700">
+            <a:solidFill>
+              <a:srgbClr val="8ABBD8"/>
+            </a:solidFill>
+            <a:prstDash val="solid"/>
+          </a:ln>
+        </p:spPr>
+      </p:sp>
+      <p:sp>
+        <p:nvSpPr>
+          <p:cNvPr id="15" name="Shape 13"/>
+          <p:cNvSpPr/>
+          <p:nvPr/>
+        </p:nvSpPr>
+        <p:spPr>
+          <a:xfrm>
+            <a:off x="8202168" y="3721608"/>
+            <a:ext cx="2340864" cy="0"/>
+          </a:xfrm>
+          <a:prstGeom prst="line">
+            <a:avLst/>
+          </a:prstGeom>
+          <a:noFill/>
+          <a:ln w="19050">
+            <a:solidFill>
+              <a:srgbClr val="0068B7"/>
+            </a:solidFill>
+            <a:prstDash val="solid"/>
+          </a:ln>
+        </p:spPr>
+      </p:sp>
+      <p:sp>
+        <p:nvSpPr>
+          <p:cNvPr id="16" name="Shape 14"/>
+          <p:cNvSpPr/>
+          <p:nvPr/>
+        </p:nvSpPr>
+        <p:spPr>
+          <a:xfrm>
+            <a:off x="9198864" y="4206240"/>
+            <a:ext cx="347472" cy="347472"/>
+          </a:xfrm>
+          <a:prstGeom prst="ellipse">
+            <a:avLst/>
+          </a:prstGeom>
+          <a:solidFill>
+            <a:srgbClr val="2F8A28"/>
+          </a:solidFill>
+          <a:ln w="12700">
+            <a:solidFill>
+              <a:srgbClr val="2F8A28"/>
+            </a:solidFill>
+            <a:prstDash val="solid"/>
+          </a:ln>
+        </p:spPr>
+      </p:sp>
+      <p:sp>
+        <p:nvSpPr>
+          <p:cNvPr id="17" name="Text 15"/>
+          <p:cNvSpPr/>
+          <p:nvPr/>
+        </p:nvSpPr>
+        <p:spPr>
+          <a:xfrm>
+            <a:off x="7909560" y="3977640"/>
+            <a:ext cx="2926080" cy="182880"/>
+          </a:xfrm>
+          <a:prstGeom prst="rect">
+            <a:avLst/>
+          </a:prstGeom>
+          <a:noFill/>
+          <a:ln/>
+        </p:spPr>
+        <p:txBody>
+          <a:bodyPr wrap="square" lIns="0" tIns="0" rIns="0" bIns="0" rtlCol="0" anchor="ctr"/>
+          <a:lstStyle/>
+          <a:p>
+            <a:pPr algn="ctr" indent="0" marL="0">
+              <a:buNone/>
+            </a:pPr>
+            <a:r>
+              <a:rPr lang="en-US" sz="1000" dirty="0">
+                <a:solidFill>
+                  <a:srgbClr val="003A63"/>
+                </a:solidFill>
+                <a:latin typeface="Aptos" pitchFamily="34" charset="0"/>
+                <a:ea typeface="Aptos" pitchFamily="34" charset="-122"/>
+                <a:cs typeface="Aptos" pitchFamily="34" charset="-120"/>
+              </a:rPr>
+              <a:t>Concept to action</a:t>
+            </a:r>
+            <a:endParaRPr lang="en-US" sz="1000" dirty="0"/>
+          </a:p>
+        </p:txBody>
+      </p:sp>
+      <p:sp>
+        <p:nvSpPr>
+          <p:cNvPr id="18" name="Shape 16"/>
+          <p:cNvSpPr/>
+          <p:nvPr/>
+        </p:nvSpPr>
+        <p:spPr>
+          <a:xfrm>
+            <a:off x="7635240" y="4498848"/>
+            <a:ext cx="3474720" cy="1143000"/>
+          </a:xfrm>
+          <a:prstGeom prst="roundRect">
+            <a:avLst>
+              <a:gd name="adj" fmla="val 9600"/>
             </a:avLst>
           </a:prstGeom>
           <a:solidFill>
@@ -10320,14 +11407,14 @@
       </p:sp>
       <p:sp>
         <p:nvSpPr>
-          <p:cNvPr id="16" name="Text 14"/>
-          <p:cNvSpPr/>
-          <p:nvPr/>
-        </p:nvSpPr>
-        <p:spPr>
-          <a:xfrm>
-            <a:off x="8074152" y="3666744"/>
-            <a:ext cx="2825496" cy="256032"/>
+          <p:cNvPr id="19" name="Text 17"/>
+          <p:cNvSpPr/>
+          <p:nvPr/>
+        </p:nvSpPr>
+        <p:spPr>
+          <a:xfrm>
+            <a:off x="7799832" y="4645152"/>
+            <a:ext cx="3145536" cy="256032"/>
           </a:xfrm>
           <a:prstGeom prst="rect">
             <a:avLst/>
@@ -10351,7 +11438,7 @@
                 <a:ea typeface="Aptos" pitchFamily="34" charset="-122"/>
                 <a:cs typeface="Aptos" pitchFamily="34" charset="-120"/>
               </a:rPr>
-              <a:t>Use this for</a:t>
+              <a:t>Apply it</a:t>
             </a:r>
             <a:endParaRPr lang="en-US" sz="1300" dirty="0"/>
           </a:p>
@@ -10359,14 +11446,14 @@
       </p:sp>
       <p:sp>
         <p:nvSpPr>
-          <p:cNvPr id="17" name="Text 15"/>
-          <p:cNvSpPr/>
-          <p:nvPr/>
-        </p:nvSpPr>
-        <p:spPr>
-          <a:xfrm>
-            <a:off x="8074152" y="4023360"/>
-            <a:ext cx="2825496" cy="1097280"/>
+          <p:cNvPr id="20" name="Text 18"/>
+          <p:cNvSpPr/>
+          <p:nvPr/>
+        </p:nvSpPr>
+        <p:spPr>
+          <a:xfrm>
+            <a:off x="7799832" y="5001768"/>
+            <a:ext cx="3145536" cy="502920"/>
           </a:xfrm>
           <a:prstGeom prst="rect">
             <a:avLst/>
@@ -10392,7 +11479,7 @@
                 <a:ea typeface="Aptos" pitchFamily="34" charset="-122"/>
                 <a:cs typeface="Aptos" pitchFamily="34" charset="-120"/>
               </a:rPr>
-              <a:t>Connect the concept to public health decisions, safeguards, documentation, or implementation work.</a:t>
+              <a:t>Connect the concept to public health purpose, responsible use, required safeguards, documentation, and the next action a department should take.</a:t>
             </a:r>
             <a:endParaRPr lang="en-US" sz="1550" dirty="0"/>
           </a:p>
@@ -10566,8 +11653,8 @@
         </p:nvSpPr>
         <p:spPr>
           <a:xfrm>
-            <a:off x="9966960" y="6537960"/>
-            <a:ext cx="1645920" cy="201168"/>
+            <a:off x="9646920" y="6537960"/>
+            <a:ext cx="1965960" cy="201168"/>
           </a:xfrm>
           <a:prstGeom prst="rect">
             <a:avLst/>
@@ -10591,7 +11678,7 @@
                 <a:ea typeface="Aptos" pitchFamily="34" charset="-122"/>
                 <a:cs typeface="Aptos" pitchFamily="34" charset="-120"/>
               </a:rPr>
-              <a:t>Â© Paula Soper</a:t>
+              <a:t>Copyright Paula Soper</a:t>
             </a:r>
             <a:endParaRPr lang="en-US" sz="800" dirty="0"/>
           </a:p>
@@ -10686,7 +11773,7 @@
         <p:spPr>
           <a:xfrm>
             <a:off x="868680" y="1508760"/>
-            <a:ext cx="6537960" cy="4160520"/>
+            <a:ext cx="6309360" cy="4160520"/>
           </a:xfrm>
           <a:prstGeom prst="rect">
             <a:avLst/>
@@ -10737,12 +11824,12 @@
         </p:nvSpPr>
         <p:spPr>
           <a:xfrm>
-            <a:off x="7909560" y="1417320"/>
-            <a:ext cx="3154680" cy="1828800"/>
+            <a:off x="7635240" y="1325880"/>
+            <a:ext cx="3474720" cy="1325880"/>
           </a:xfrm>
           <a:prstGeom prst="roundRect">
             <a:avLst>
-              <a:gd name="adj" fmla="val 6000"/>
+              <a:gd name="adj" fmla="val 8276"/>
             </a:avLst>
           </a:prstGeom>
           <a:solidFill>
@@ -10764,8 +11851,8 @@
         </p:nvSpPr>
         <p:spPr>
           <a:xfrm>
-            <a:off x="8074152" y="1563624"/>
-            <a:ext cx="2825496" cy="256032"/>
+            <a:off x="7799832" y="1472184"/>
+            <a:ext cx="3145536" cy="256032"/>
           </a:xfrm>
           <a:prstGeom prst="rect">
             <a:avLst/>
@@ -10789,7 +11876,7 @@
                 <a:ea typeface="Aptos" pitchFamily="34" charset="-122"/>
                 <a:cs typeface="Aptos" pitchFamily="34" charset="-120"/>
               </a:rPr>
-              <a:t>Key idea</a:t>
+              <a:t>Core concept</a:t>
             </a:r>
             <a:endParaRPr lang="en-US" sz="1300" dirty="0"/>
           </a:p>
@@ -10803,8 +11890,8 @@
         </p:nvSpPr>
         <p:spPr>
           <a:xfrm>
-            <a:off x="8074152" y="1920240"/>
-            <a:ext cx="2825496" cy="1188720"/>
+            <a:off x="7799832" y="1828800"/>
+            <a:ext cx="3145536" cy="685800"/>
           </a:xfrm>
           <a:prstGeom prst="rect">
             <a:avLst/>
@@ -10844,12 +11931,153 @@
         </p:nvSpPr>
         <p:spPr>
           <a:xfrm>
-            <a:off x="7909560" y="3520440"/>
-            <a:ext cx="3154680" cy="1737360"/>
+            <a:off x="7635240" y="2788920"/>
+            <a:ext cx="3474720" cy="1536192"/>
           </a:xfrm>
           <a:prstGeom prst="roundRect">
             <a:avLst>
-              <a:gd name="adj" fmla="val 6316"/>
+              <a:gd name="adj" fmla="val 7143"/>
+            </a:avLst>
+          </a:prstGeom>
+          <a:solidFill>
+            <a:srgbClr val="FFFFFF">
+              <a:alpha val="88000"/>
+            </a:srgbClr>
+          </a:solidFill>
+          <a:ln w="12700">
+            <a:solidFill>
+              <a:srgbClr val="D6E8F2"/>
+            </a:solidFill>
+            <a:prstDash val="solid"/>
+          </a:ln>
+        </p:spPr>
+      </p:sp>
+      <p:sp>
+        <p:nvSpPr>
+          <p:cNvPr id="14" name="Shape 12"/>
+          <p:cNvSpPr/>
+          <p:nvPr/>
+        </p:nvSpPr>
+        <p:spPr>
+          <a:xfrm>
+            <a:off x="8074152" y="3291840"/>
+            <a:ext cx="2596896" cy="749808"/>
+          </a:xfrm>
+          <a:prstGeom prst="rect">
+            <a:avLst/>
+          </a:prstGeom>
+          <a:solidFill>
+            <a:srgbClr val="EAF6F8"/>
+          </a:solidFill>
+          <a:ln w="12700">
+            <a:solidFill>
+              <a:srgbClr val="8ABBD8"/>
+            </a:solidFill>
+            <a:prstDash val="solid"/>
+          </a:ln>
+        </p:spPr>
+      </p:sp>
+      <p:sp>
+        <p:nvSpPr>
+          <p:cNvPr id="15" name="Shape 13"/>
+          <p:cNvSpPr/>
+          <p:nvPr/>
+        </p:nvSpPr>
+        <p:spPr>
+          <a:xfrm>
+            <a:off x="8202168" y="3721608"/>
+            <a:ext cx="2340864" cy="0"/>
+          </a:xfrm>
+          <a:prstGeom prst="line">
+            <a:avLst/>
+          </a:prstGeom>
+          <a:noFill/>
+          <a:ln w="19050">
+            <a:solidFill>
+              <a:srgbClr val="0068B7"/>
+            </a:solidFill>
+            <a:prstDash val="solid"/>
+          </a:ln>
+        </p:spPr>
+      </p:sp>
+      <p:sp>
+        <p:nvSpPr>
+          <p:cNvPr id="16" name="Shape 14"/>
+          <p:cNvSpPr/>
+          <p:nvPr/>
+        </p:nvSpPr>
+        <p:spPr>
+          <a:xfrm>
+            <a:off x="9198864" y="4206240"/>
+            <a:ext cx="347472" cy="347472"/>
+          </a:xfrm>
+          <a:prstGeom prst="ellipse">
+            <a:avLst/>
+          </a:prstGeom>
+          <a:solidFill>
+            <a:srgbClr val="2F8A28"/>
+          </a:solidFill>
+          <a:ln w="12700">
+            <a:solidFill>
+              <a:srgbClr val="2F8A28"/>
+            </a:solidFill>
+            <a:prstDash val="solid"/>
+          </a:ln>
+        </p:spPr>
+      </p:sp>
+      <p:sp>
+        <p:nvSpPr>
+          <p:cNvPr id="17" name="Text 15"/>
+          <p:cNvSpPr/>
+          <p:nvPr/>
+        </p:nvSpPr>
+        <p:spPr>
+          <a:xfrm>
+            <a:off x="7909560" y="3977640"/>
+            <a:ext cx="2926080" cy="182880"/>
+          </a:xfrm>
+          <a:prstGeom prst="rect">
+            <a:avLst/>
+          </a:prstGeom>
+          <a:noFill/>
+          <a:ln/>
+        </p:spPr>
+        <p:txBody>
+          <a:bodyPr wrap="square" lIns="0" tIns="0" rIns="0" bIns="0" rtlCol="0" anchor="ctr"/>
+          <a:lstStyle/>
+          <a:p>
+            <a:pPr algn="ctr" indent="0" marL="0">
+              <a:buNone/>
+            </a:pPr>
+            <a:r>
+              <a:rPr lang="en-US" sz="1000" dirty="0">
+                <a:solidFill>
+                  <a:srgbClr val="003A63"/>
+                </a:solidFill>
+                <a:latin typeface="Aptos" pitchFamily="34" charset="0"/>
+                <a:ea typeface="Aptos" pitchFamily="34" charset="-122"/>
+                <a:cs typeface="Aptos" pitchFamily="34" charset="-120"/>
+              </a:rPr>
+              <a:t>Concept to action</a:t>
+            </a:r>
+            <a:endParaRPr lang="en-US" sz="1000" dirty="0"/>
+          </a:p>
+        </p:txBody>
+      </p:sp>
+      <p:sp>
+        <p:nvSpPr>
+          <p:cNvPr id="18" name="Shape 16"/>
+          <p:cNvSpPr/>
+          <p:nvPr/>
+        </p:nvSpPr>
+        <p:spPr>
+          <a:xfrm>
+            <a:off x="7635240" y="4498848"/>
+            <a:ext cx="3474720" cy="1143000"/>
+          </a:xfrm>
+          <a:prstGeom prst="roundRect">
+            <a:avLst>
+              <a:gd name="adj" fmla="val 9600"/>
             </a:avLst>
           </a:prstGeom>
           <a:solidFill>
@@ -10865,14 +12093,14 @@
       </p:sp>
       <p:sp>
         <p:nvSpPr>
-          <p:cNvPr id="14" name="Text 12"/>
-          <p:cNvSpPr/>
-          <p:nvPr/>
-        </p:nvSpPr>
-        <p:spPr>
-          <a:xfrm>
-            <a:off x="8074152" y="3666744"/>
-            <a:ext cx="2825496" cy="256032"/>
+          <p:cNvPr id="19" name="Text 17"/>
+          <p:cNvSpPr/>
+          <p:nvPr/>
+        </p:nvSpPr>
+        <p:spPr>
+          <a:xfrm>
+            <a:off x="7799832" y="4645152"/>
+            <a:ext cx="3145536" cy="256032"/>
           </a:xfrm>
           <a:prstGeom prst="rect">
             <a:avLst/>
@@ -10896,7 +12124,7 @@
                 <a:ea typeface="Aptos" pitchFamily="34" charset="-122"/>
                 <a:cs typeface="Aptos" pitchFamily="34" charset="-120"/>
               </a:rPr>
-              <a:t>Use this for</a:t>
+              <a:t>Apply it</a:t>
             </a:r>
             <a:endParaRPr lang="en-US" sz="1300" dirty="0"/>
           </a:p>
@@ -10904,14 +12132,14 @@
       </p:sp>
       <p:sp>
         <p:nvSpPr>
-          <p:cNvPr id="15" name="Text 13"/>
-          <p:cNvSpPr/>
-          <p:nvPr/>
-        </p:nvSpPr>
-        <p:spPr>
-          <a:xfrm>
-            <a:off x="8074152" y="4023360"/>
-            <a:ext cx="2825496" cy="1097280"/>
+          <p:cNvPr id="20" name="Text 18"/>
+          <p:cNvSpPr/>
+          <p:nvPr/>
+        </p:nvSpPr>
+        <p:spPr>
+          <a:xfrm>
+            <a:off x="7799832" y="5001768"/>
+            <a:ext cx="3145536" cy="502920"/>
           </a:xfrm>
           <a:prstGeom prst="rect">
             <a:avLst/>
@@ -10937,7 +12165,7 @@
                 <a:ea typeface="Aptos" pitchFamily="34" charset="-122"/>
                 <a:cs typeface="Aptos" pitchFamily="34" charset="-120"/>
               </a:rPr>
-              <a:t>Connect the concept to public health decisions, safeguards, documentation, or implementation work.</a:t>
+              <a:t>Connect the concept to public health purpose, responsible use, required safeguards, documentation, and the next action a department should take.</a:t>
             </a:r>
             <a:endParaRPr lang="en-US" sz="1550" dirty="0"/>
           </a:p>
@@ -11111,8 +12339,8 @@
         </p:nvSpPr>
         <p:spPr>
           <a:xfrm>
-            <a:off x="9966960" y="6537960"/>
-            <a:ext cx="1645920" cy="201168"/>
+            <a:off x="9646920" y="6537960"/>
+            <a:ext cx="1965960" cy="201168"/>
           </a:xfrm>
           <a:prstGeom prst="rect">
             <a:avLst/>
@@ -11136,7 +12364,7 @@
                 <a:ea typeface="Aptos" pitchFamily="34" charset="-122"/>
                 <a:cs typeface="Aptos" pitchFamily="34" charset="-120"/>
               </a:rPr>
-              <a:t>Â© Paula Soper</a:t>
+              <a:t>Copyright Paula Soper</a:t>
             </a:r>
             <a:endParaRPr lang="en-US" sz="800" dirty="0"/>
           </a:p>
@@ -11479,46 +12707,7 @@
       </p:sp>
       <p:sp>
         <p:nvSpPr>
-          <p:cNvPr id="15" name="Text 13"/>
-          <p:cNvSpPr/>
-          <p:nvPr/>
-        </p:nvSpPr>
-        <p:spPr>
-          <a:xfrm>
-            <a:off x="8817864" y="4187952"/>
-            <a:ext cx="201168" cy="256032"/>
-          </a:xfrm>
-          <a:prstGeom prst="rect">
-            <a:avLst/>
-          </a:prstGeom>
-          <a:noFill/>
-          <a:ln/>
-        </p:spPr>
-        <p:txBody>
-          <a:bodyPr wrap="square" lIns="0" tIns="0" rIns="0" bIns="0" rtlCol="0" anchor="ctr"/>
-          <a:lstStyle/>
-          <a:p>
-            <a:pPr algn="ctr" indent="0" marL="0">
-              <a:buNone/>
-            </a:pPr>
-            <a:r>
-              <a:rPr lang="en-US" sz="1800" b="1" dirty="0">
-                <a:solidFill>
-                  <a:srgbClr val="0068B7"/>
-                </a:solidFill>
-                <a:latin typeface="Aptos" pitchFamily="34" charset="0"/>
-                <a:ea typeface="Aptos" pitchFamily="34" charset="-122"/>
-                <a:cs typeface="Aptos" pitchFamily="34" charset="-120"/>
-              </a:rPr>
-              <a:t>â†’</a:t>
-            </a:r>
-            <a:endParaRPr lang="en-US" sz="1800" dirty="0"/>
-          </a:p>
-        </p:txBody>
-      </p:sp>
-      <p:sp>
-        <p:nvSpPr>
-          <p:cNvPr id="16" name="Shape 14"/>
+          <p:cNvPr id="15" name="Shape 13"/>
           <p:cNvSpPr/>
           <p:nvPr/>
         </p:nvSpPr>
@@ -11545,7 +12734,7 @@
       </p:sp>
       <p:sp>
         <p:nvSpPr>
-          <p:cNvPr id="17" name="Text 15"/>
+          <p:cNvPr id="16" name="Text 14"/>
           <p:cNvSpPr/>
           <p:nvPr/>
         </p:nvSpPr>
@@ -11586,46 +12775,7 @@
       </p:sp>
       <p:sp>
         <p:nvSpPr>
-          <p:cNvPr id="18" name="Text 16"/>
-          <p:cNvSpPr/>
-          <p:nvPr/>
-        </p:nvSpPr>
-        <p:spPr>
-          <a:xfrm>
-            <a:off x="10046208" y="4187952"/>
-            <a:ext cx="201168" cy="256032"/>
-          </a:xfrm>
-          <a:prstGeom prst="rect">
-            <a:avLst/>
-          </a:prstGeom>
-          <a:noFill/>
-          <a:ln/>
-        </p:spPr>
-        <p:txBody>
-          <a:bodyPr wrap="square" lIns="0" tIns="0" rIns="0" bIns="0" rtlCol="0" anchor="ctr"/>
-          <a:lstStyle/>
-          <a:p>
-            <a:pPr algn="ctr" indent="0" marL="0">
-              <a:buNone/>
-            </a:pPr>
-            <a:r>
-              <a:rPr lang="en-US" sz="1800" b="1" dirty="0">
-                <a:solidFill>
-                  <a:srgbClr val="0068B7"/>
-                </a:solidFill>
-                <a:latin typeface="Aptos" pitchFamily="34" charset="0"/>
-                <a:ea typeface="Aptos" pitchFamily="34" charset="-122"/>
-                <a:cs typeface="Aptos" pitchFamily="34" charset="-120"/>
-              </a:rPr>
-              <a:t>â†’</a:t>
-            </a:r>
-            <a:endParaRPr lang="en-US" sz="1800" dirty="0"/>
-          </a:p>
-        </p:txBody>
-      </p:sp>
-      <p:sp>
-        <p:nvSpPr>
-          <p:cNvPr id="19" name="Shape 17"/>
+          <p:cNvPr id="17" name="Shape 15"/>
           <p:cNvSpPr/>
           <p:nvPr/>
         </p:nvSpPr>
@@ -11652,7 +12802,7 @@
       </p:sp>
       <p:sp>
         <p:nvSpPr>
-          <p:cNvPr id="20" name="Text 18"/>
+          <p:cNvPr id="18" name="Text 16"/>
           <p:cNvSpPr/>
           <p:nvPr/>
         </p:nvSpPr>
@@ -11859,8 +13009,8 @@
         </p:nvSpPr>
         <p:spPr>
           <a:xfrm>
-            <a:off x="9966960" y="6537960"/>
-            <a:ext cx="1645920" cy="201168"/>
+            <a:off x="9646920" y="6537960"/>
+            <a:ext cx="1965960" cy="201168"/>
           </a:xfrm>
           <a:prstGeom prst="rect">
             <a:avLst/>
@@ -11884,7 +13034,7 @@
                 <a:ea typeface="Aptos" pitchFamily="34" charset="-122"/>
                 <a:cs typeface="Aptos" pitchFamily="34" charset="-120"/>
               </a:rPr>
-              <a:t>Â© Paula Soper</a:t>
+              <a:t>Copyright Paula Soper</a:t>
             </a:r>
             <a:endParaRPr lang="en-US" sz="800" dirty="0"/>
           </a:p>
@@ -12227,46 +13377,7 @@
       </p:sp>
       <p:sp>
         <p:nvSpPr>
-          <p:cNvPr id="15" name="Text 13"/>
-          <p:cNvSpPr/>
-          <p:nvPr/>
-        </p:nvSpPr>
-        <p:spPr>
-          <a:xfrm>
-            <a:off x="8817864" y="4187952"/>
-            <a:ext cx="201168" cy="256032"/>
-          </a:xfrm>
-          <a:prstGeom prst="rect">
-            <a:avLst/>
-          </a:prstGeom>
-          <a:noFill/>
-          <a:ln/>
-        </p:spPr>
-        <p:txBody>
-          <a:bodyPr wrap="square" lIns="0" tIns="0" rIns="0" bIns="0" rtlCol="0" anchor="ctr"/>
-          <a:lstStyle/>
-          <a:p>
-            <a:pPr algn="ctr" indent="0" marL="0">
-              <a:buNone/>
-            </a:pPr>
-            <a:r>
-              <a:rPr lang="en-US" sz="1800" b="1" dirty="0">
-                <a:solidFill>
-                  <a:srgbClr val="0068B7"/>
-                </a:solidFill>
-                <a:latin typeface="Aptos" pitchFamily="34" charset="0"/>
-                <a:ea typeface="Aptos" pitchFamily="34" charset="-122"/>
-                <a:cs typeface="Aptos" pitchFamily="34" charset="-120"/>
-              </a:rPr>
-              <a:t>â†’</a:t>
-            </a:r>
-            <a:endParaRPr lang="en-US" sz="1800" dirty="0"/>
-          </a:p>
-        </p:txBody>
-      </p:sp>
-      <p:sp>
-        <p:nvSpPr>
-          <p:cNvPr id="16" name="Shape 14"/>
+          <p:cNvPr id="15" name="Shape 13"/>
           <p:cNvSpPr/>
           <p:nvPr/>
         </p:nvSpPr>
@@ -12293,7 +13404,7 @@
       </p:sp>
       <p:sp>
         <p:nvSpPr>
-          <p:cNvPr id="17" name="Text 15"/>
+          <p:cNvPr id="16" name="Text 14"/>
           <p:cNvSpPr/>
           <p:nvPr/>
         </p:nvSpPr>
@@ -12334,46 +13445,7 @@
       </p:sp>
       <p:sp>
         <p:nvSpPr>
-          <p:cNvPr id="18" name="Text 16"/>
-          <p:cNvSpPr/>
-          <p:nvPr/>
-        </p:nvSpPr>
-        <p:spPr>
-          <a:xfrm>
-            <a:off x="10046208" y="4187952"/>
-            <a:ext cx="201168" cy="256032"/>
-          </a:xfrm>
-          <a:prstGeom prst="rect">
-            <a:avLst/>
-          </a:prstGeom>
-          <a:noFill/>
-          <a:ln/>
-        </p:spPr>
-        <p:txBody>
-          <a:bodyPr wrap="square" lIns="0" tIns="0" rIns="0" bIns="0" rtlCol="0" anchor="ctr"/>
-          <a:lstStyle/>
-          <a:p>
-            <a:pPr algn="ctr" indent="0" marL="0">
-              <a:buNone/>
-            </a:pPr>
-            <a:r>
-              <a:rPr lang="en-US" sz="1800" b="1" dirty="0">
-                <a:solidFill>
-                  <a:srgbClr val="0068B7"/>
-                </a:solidFill>
-                <a:latin typeface="Aptos" pitchFamily="34" charset="0"/>
-                <a:ea typeface="Aptos" pitchFamily="34" charset="-122"/>
-                <a:cs typeface="Aptos" pitchFamily="34" charset="-120"/>
-              </a:rPr>
-              <a:t>â†’</a:t>
-            </a:r>
-            <a:endParaRPr lang="en-US" sz="1800" dirty="0"/>
-          </a:p>
-        </p:txBody>
-      </p:sp>
-      <p:sp>
-        <p:nvSpPr>
-          <p:cNvPr id="19" name="Shape 17"/>
+          <p:cNvPr id="17" name="Shape 15"/>
           <p:cNvSpPr/>
           <p:nvPr/>
         </p:nvSpPr>
@@ -12400,7 +13472,7 @@
       </p:sp>
       <p:sp>
         <p:nvSpPr>
-          <p:cNvPr id="20" name="Text 18"/>
+          <p:cNvPr id="18" name="Text 16"/>
           <p:cNvSpPr/>
           <p:nvPr/>
         </p:nvSpPr>
@@ -12607,8 +13679,8 @@
         </p:nvSpPr>
         <p:spPr>
           <a:xfrm>
-            <a:off x="9966960" y="6537960"/>
-            <a:ext cx="1645920" cy="201168"/>
+            <a:off x="9646920" y="6537960"/>
+            <a:ext cx="1965960" cy="201168"/>
           </a:xfrm>
           <a:prstGeom prst="rect">
             <a:avLst/>
@@ -12632,7 +13704,7 @@
                 <a:ea typeface="Aptos" pitchFamily="34" charset="-122"/>
                 <a:cs typeface="Aptos" pitchFamily="34" charset="-120"/>
               </a:rPr>
-              <a:t>Â© Paula Soper</a:t>
+              <a:t>Copyright Paula Soper</a:t>
             </a:r>
             <a:endParaRPr lang="en-US" sz="800" dirty="0"/>
           </a:p>
@@ -12679,77 +13751,13 @@
       </p:sp>
       <p:sp>
         <p:nvSpPr>
-          <p:cNvPr id="8" name="Shape 6"/>
+          <p:cNvPr id="8" name="Text 6"/>
           <p:cNvSpPr/>
           <p:nvPr/>
         </p:nvSpPr>
         <p:spPr>
           <a:xfrm>
             <a:off x="640080" y="658368"/>
-            <a:ext cx="420624" cy="420624"/>
-          </a:xfrm>
-          <a:prstGeom prst="ellipse">
-            <a:avLst/>
-          </a:prstGeom>
-          <a:solidFill>
-            <a:srgbClr val="0068B7"/>
-          </a:solidFill>
-          <a:ln w="12700">
-            <a:solidFill>
-              <a:srgbClr val="0068B7"/>
-            </a:solidFill>
-            <a:prstDash val="solid"/>
-          </a:ln>
-        </p:spPr>
-      </p:sp>
-      <p:sp>
-        <p:nvSpPr>
-          <p:cNvPr id="9" name="Text 7"/>
-          <p:cNvSpPr/>
-          <p:nvPr/>
-        </p:nvSpPr>
-        <p:spPr>
-          <a:xfrm>
-            <a:off x="640080" y="731520"/>
-            <a:ext cx="420624" cy="164592"/>
-          </a:xfrm>
-          <a:prstGeom prst="rect">
-            <a:avLst/>
-          </a:prstGeom>
-          <a:noFill/>
-          <a:ln/>
-        </p:spPr>
-        <p:txBody>
-          <a:bodyPr wrap="square" lIns="0" tIns="0" rIns="0" bIns="0" rtlCol="0" anchor="ctr"/>
-          <a:lstStyle/>
-          <a:p>
-            <a:pPr algn="ctr" indent="0" marL="0">
-              <a:buNone/>
-            </a:pPr>
-            <a:r>
-              <a:rPr lang="en-US" sz="1100" b="1" dirty="0">
-                <a:solidFill>
-                  <a:srgbClr val="FFFFFF"/>
-                </a:solidFill>
-                <a:latin typeface="Aptos" pitchFamily="34" charset="0"/>
-                <a:ea typeface="Aptos" pitchFamily="34" charset="-122"/>
-                <a:cs typeface="Aptos" pitchFamily="34" charset="-120"/>
-              </a:rPr>
-              <a:t>1</a:t>
-            </a:r>
-            <a:endParaRPr lang="en-US" sz="1100" dirty="0"/>
-          </a:p>
-        </p:txBody>
-      </p:sp>
-      <p:sp>
-        <p:nvSpPr>
-          <p:cNvPr id="10" name="Text 8"/>
-          <p:cNvSpPr/>
-          <p:nvPr/>
-        </p:nvSpPr>
-        <p:spPr>
-          <a:xfrm>
-            <a:off x="640080" y="621792"/>
             <a:ext cx="10881360" cy="713232"/>
           </a:xfrm>
           <a:prstGeom prst="rect">
@@ -12784,14 +13792,14 @@
       </p:sp>
       <p:sp>
         <p:nvSpPr>
-          <p:cNvPr id="11" name="Text 9"/>
+          <p:cNvPr id="9" name="Text 7"/>
           <p:cNvSpPr/>
           <p:nvPr/>
         </p:nvSpPr>
         <p:spPr>
           <a:xfrm>
             <a:off x="868680" y="1508760"/>
-            <a:ext cx="6537960" cy="4160520"/>
+            <a:ext cx="6309360" cy="4160520"/>
           </a:xfrm>
           <a:prstGeom prst="rect">
             <a:avLst/>
@@ -12850,18 +13858,18 @@
       </p:sp>
       <p:sp>
         <p:nvSpPr>
-          <p:cNvPr id="12" name="Shape 10"/>
-          <p:cNvSpPr/>
-          <p:nvPr/>
-        </p:nvSpPr>
-        <p:spPr>
-          <a:xfrm>
-            <a:off x="7909560" y="1417320"/>
-            <a:ext cx="3154680" cy="1828800"/>
+          <p:cNvPr id="10" name="Shape 8"/>
+          <p:cNvSpPr/>
+          <p:nvPr/>
+        </p:nvSpPr>
+        <p:spPr>
+          <a:xfrm>
+            <a:off x="7635240" y="1325880"/>
+            <a:ext cx="3474720" cy="1325880"/>
           </a:xfrm>
           <a:prstGeom prst="roundRect">
             <a:avLst>
-              <a:gd name="adj" fmla="val 6000"/>
+              <a:gd name="adj" fmla="val 8276"/>
             </a:avLst>
           </a:prstGeom>
           <a:solidFill>
@@ -12877,14 +13885,14 @@
       </p:sp>
       <p:sp>
         <p:nvSpPr>
-          <p:cNvPr id="13" name="Text 11"/>
-          <p:cNvSpPr/>
-          <p:nvPr/>
-        </p:nvSpPr>
-        <p:spPr>
-          <a:xfrm>
-            <a:off x="8074152" y="1563624"/>
-            <a:ext cx="2825496" cy="256032"/>
+          <p:cNvPr id="11" name="Text 9"/>
+          <p:cNvSpPr/>
+          <p:nvPr/>
+        </p:nvSpPr>
+        <p:spPr>
+          <a:xfrm>
+            <a:off x="7799832" y="1472184"/>
+            <a:ext cx="3145536" cy="256032"/>
           </a:xfrm>
           <a:prstGeom prst="rect">
             <a:avLst/>
@@ -12908,7 +13916,7 @@
                 <a:ea typeface="Aptos" pitchFamily="34" charset="-122"/>
                 <a:cs typeface="Aptos" pitchFamily="34" charset="-120"/>
               </a:rPr>
-              <a:t>Key idea</a:t>
+              <a:t>Practice focus</a:t>
             </a:r>
             <a:endParaRPr lang="en-US" sz="1300" dirty="0"/>
           </a:p>
@@ -12916,14 +13924,14 @@
       </p:sp>
       <p:sp>
         <p:nvSpPr>
-          <p:cNvPr id="14" name="Text 12"/>
-          <p:cNvSpPr/>
-          <p:nvPr/>
-        </p:nvSpPr>
-        <p:spPr>
-          <a:xfrm>
-            <a:off x="8074152" y="1920240"/>
-            <a:ext cx="2825496" cy="1188720"/>
+          <p:cNvPr id="12" name="Text 10"/>
+          <p:cNvSpPr/>
+          <p:nvPr/>
+        </p:nvSpPr>
+        <p:spPr>
+          <a:xfrm>
+            <a:off x="7799832" y="1828800"/>
+            <a:ext cx="3145536" cy="685800"/>
           </a:xfrm>
           <a:prstGeom prst="rect">
             <a:avLst/>
@@ -12957,18 +13965,159 @@
       </p:sp>
       <p:sp>
         <p:nvSpPr>
-          <p:cNvPr id="15" name="Shape 13"/>
-          <p:cNvSpPr/>
-          <p:nvPr/>
-        </p:nvSpPr>
-        <p:spPr>
-          <a:xfrm>
-            <a:off x="7909560" y="3520440"/>
-            <a:ext cx="3154680" cy="1737360"/>
+          <p:cNvPr id="13" name="Shape 11"/>
+          <p:cNvSpPr/>
+          <p:nvPr/>
+        </p:nvSpPr>
+        <p:spPr>
+          <a:xfrm>
+            <a:off x="7635240" y="2788920"/>
+            <a:ext cx="3474720" cy="1536192"/>
           </a:xfrm>
           <a:prstGeom prst="roundRect">
             <a:avLst>
-              <a:gd name="adj" fmla="val 6316"/>
+              <a:gd name="adj" fmla="val 7143"/>
+            </a:avLst>
+          </a:prstGeom>
+          <a:solidFill>
+            <a:srgbClr val="FFFFFF">
+              <a:alpha val="88000"/>
+            </a:srgbClr>
+          </a:solidFill>
+          <a:ln w="12700">
+            <a:solidFill>
+              <a:srgbClr val="D6E8F2"/>
+            </a:solidFill>
+            <a:prstDash val="solid"/>
+          </a:ln>
+        </p:spPr>
+      </p:sp>
+      <p:sp>
+        <p:nvSpPr>
+          <p:cNvPr id="14" name="Shape 12"/>
+          <p:cNvSpPr/>
+          <p:nvPr/>
+        </p:nvSpPr>
+        <p:spPr>
+          <a:xfrm>
+            <a:off x="8074152" y="3291840"/>
+            <a:ext cx="2596896" cy="749808"/>
+          </a:xfrm>
+          <a:prstGeom prst="rect">
+            <a:avLst/>
+          </a:prstGeom>
+          <a:solidFill>
+            <a:srgbClr val="EAF6F8"/>
+          </a:solidFill>
+          <a:ln w="12700">
+            <a:solidFill>
+              <a:srgbClr val="8ABBD8"/>
+            </a:solidFill>
+            <a:prstDash val="solid"/>
+          </a:ln>
+        </p:spPr>
+      </p:sp>
+      <p:sp>
+        <p:nvSpPr>
+          <p:cNvPr id="15" name="Shape 13"/>
+          <p:cNvSpPr/>
+          <p:nvPr/>
+        </p:nvSpPr>
+        <p:spPr>
+          <a:xfrm>
+            <a:off x="8202168" y="3721608"/>
+            <a:ext cx="2340864" cy="0"/>
+          </a:xfrm>
+          <a:prstGeom prst="line">
+            <a:avLst/>
+          </a:prstGeom>
+          <a:noFill/>
+          <a:ln w="19050">
+            <a:solidFill>
+              <a:srgbClr val="0068B7"/>
+            </a:solidFill>
+            <a:prstDash val="solid"/>
+          </a:ln>
+        </p:spPr>
+      </p:sp>
+      <p:sp>
+        <p:nvSpPr>
+          <p:cNvPr id="16" name="Shape 14"/>
+          <p:cNvSpPr/>
+          <p:nvPr/>
+        </p:nvSpPr>
+        <p:spPr>
+          <a:xfrm>
+            <a:off x="9198864" y="4206240"/>
+            <a:ext cx="347472" cy="347472"/>
+          </a:xfrm>
+          <a:prstGeom prst="ellipse">
+            <a:avLst/>
+          </a:prstGeom>
+          <a:solidFill>
+            <a:srgbClr val="2F8A28"/>
+          </a:solidFill>
+          <a:ln w="12700">
+            <a:solidFill>
+              <a:srgbClr val="2F8A28"/>
+            </a:solidFill>
+            <a:prstDash val="solid"/>
+          </a:ln>
+        </p:spPr>
+      </p:sp>
+      <p:sp>
+        <p:nvSpPr>
+          <p:cNvPr id="17" name="Text 15"/>
+          <p:cNvSpPr/>
+          <p:nvPr/>
+        </p:nvSpPr>
+        <p:spPr>
+          <a:xfrm>
+            <a:off x="7909560" y="3977640"/>
+            <a:ext cx="2926080" cy="182880"/>
+          </a:xfrm>
+          <a:prstGeom prst="rect">
+            <a:avLst/>
+          </a:prstGeom>
+          <a:noFill/>
+          <a:ln/>
+        </p:spPr>
+        <p:txBody>
+          <a:bodyPr wrap="square" lIns="0" tIns="0" rIns="0" bIns="0" rtlCol="0" anchor="ctr"/>
+          <a:lstStyle/>
+          <a:p>
+            <a:pPr algn="ctr" indent="0" marL="0">
+              <a:buNone/>
+            </a:pPr>
+            <a:r>
+              <a:rPr lang="en-US" sz="1000" dirty="0">
+                <a:solidFill>
+                  <a:srgbClr val="003A63"/>
+                </a:solidFill>
+                <a:latin typeface="Aptos" pitchFamily="34" charset="0"/>
+                <a:ea typeface="Aptos" pitchFamily="34" charset="-122"/>
+                <a:cs typeface="Aptos" pitchFamily="34" charset="-120"/>
+              </a:rPr>
+              <a:t>Concept to action</a:t>
+            </a:r>
+            <a:endParaRPr lang="en-US" sz="1000" dirty="0"/>
+          </a:p>
+        </p:txBody>
+      </p:sp>
+      <p:sp>
+        <p:nvSpPr>
+          <p:cNvPr id="18" name="Shape 16"/>
+          <p:cNvSpPr/>
+          <p:nvPr/>
+        </p:nvSpPr>
+        <p:spPr>
+          <a:xfrm>
+            <a:off x="7635240" y="4498848"/>
+            <a:ext cx="3474720" cy="1143000"/>
+          </a:xfrm>
+          <a:prstGeom prst="roundRect">
+            <a:avLst>
+              <a:gd name="adj" fmla="val 9600"/>
             </a:avLst>
           </a:prstGeom>
           <a:solidFill>
@@ -12984,14 +14133,14 @@
       </p:sp>
       <p:sp>
         <p:nvSpPr>
-          <p:cNvPr id="16" name="Text 14"/>
-          <p:cNvSpPr/>
-          <p:nvPr/>
-        </p:nvSpPr>
-        <p:spPr>
-          <a:xfrm>
-            <a:off x="8074152" y="3666744"/>
-            <a:ext cx="2825496" cy="256032"/>
+          <p:cNvPr id="19" name="Text 17"/>
+          <p:cNvSpPr/>
+          <p:nvPr/>
+        </p:nvSpPr>
+        <p:spPr>
+          <a:xfrm>
+            <a:off x="7799832" y="4645152"/>
+            <a:ext cx="3145536" cy="256032"/>
           </a:xfrm>
           <a:prstGeom prst="rect">
             <a:avLst/>
@@ -13015,7 +14164,7 @@
                 <a:ea typeface="Aptos" pitchFamily="34" charset="-122"/>
                 <a:cs typeface="Aptos" pitchFamily="34" charset="-120"/>
               </a:rPr>
-              <a:t>Use this for</a:t>
+              <a:t>What to produce</a:t>
             </a:r>
             <a:endParaRPr lang="en-US" sz="1300" dirty="0"/>
           </a:p>
@@ -13023,14 +14172,14 @@
       </p:sp>
       <p:sp>
         <p:nvSpPr>
-          <p:cNvPr id="17" name="Text 15"/>
-          <p:cNvSpPr/>
-          <p:nvPr/>
-        </p:nvSpPr>
-        <p:spPr>
-          <a:xfrm>
-            <a:off x="8074152" y="4023360"/>
-            <a:ext cx="2825496" cy="1097280"/>
+          <p:cNvPr id="20" name="Text 18"/>
+          <p:cNvSpPr/>
+          <p:nvPr/>
+        </p:nvSpPr>
+        <p:spPr>
+          <a:xfrm>
+            <a:off x="7799832" y="5001768"/>
+            <a:ext cx="3145536" cy="502920"/>
           </a:xfrm>
           <a:prstGeom prst="rect">
             <a:avLst/>
@@ -13056,7 +14205,7 @@
                 <a:ea typeface="Aptos" pitchFamily="34" charset="-122"/>
                 <a:cs typeface="Aptos" pitchFamily="34" charset="-120"/>
               </a:rPr>
-              <a:t>Connect the concept to public health decisions, safeguards, documentation, or implementation work.</a:t>
+              <a:t>Use the assignment to test whether you can explain the concept, apply it to a realistic public health situation, and identify what would need review before the work moves forward.</a:t>
             </a:r>
             <a:endParaRPr lang="en-US" sz="1550" dirty="0"/>
           </a:p>
@@ -13230,8 +14379,8 @@
         </p:nvSpPr>
         <p:spPr>
           <a:xfrm>
-            <a:off x="9966960" y="6537960"/>
-            <a:ext cx="1645920" cy="201168"/>
+            <a:off x="9646920" y="6537960"/>
+            <a:ext cx="1965960" cy="201168"/>
           </a:xfrm>
           <a:prstGeom prst="rect">
             <a:avLst/>
@@ -13255,7 +14404,7 @@
                 <a:ea typeface="Aptos" pitchFamily="34" charset="-122"/>
                 <a:cs typeface="Aptos" pitchFamily="34" charset="-120"/>
               </a:rPr>
-              <a:t>Â© Paula Soper</a:t>
+              <a:t>Copyright Paula Soper</a:t>
             </a:r>
             <a:endParaRPr lang="en-US" sz="800" dirty="0"/>
           </a:p>
@@ -13302,77 +14451,13 @@
       </p:sp>
       <p:sp>
         <p:nvSpPr>
-          <p:cNvPr id="8" name="Shape 6"/>
+          <p:cNvPr id="8" name="Text 6"/>
           <p:cNvSpPr/>
           <p:nvPr/>
         </p:nvSpPr>
         <p:spPr>
           <a:xfrm>
             <a:off x="640080" y="658368"/>
-            <a:ext cx="420624" cy="420624"/>
-          </a:xfrm>
-          <a:prstGeom prst="ellipse">
-            <a:avLst/>
-          </a:prstGeom>
-          <a:solidFill>
-            <a:srgbClr val="0068B7"/>
-          </a:solidFill>
-          <a:ln w="12700">
-            <a:solidFill>
-              <a:srgbClr val="0068B7"/>
-            </a:solidFill>
-            <a:prstDash val="solid"/>
-          </a:ln>
-        </p:spPr>
-      </p:sp>
-      <p:sp>
-        <p:nvSpPr>
-          <p:cNvPr id="9" name="Text 7"/>
-          <p:cNvSpPr/>
-          <p:nvPr/>
-        </p:nvSpPr>
-        <p:spPr>
-          <a:xfrm>
-            <a:off x="640080" y="731520"/>
-            <a:ext cx="420624" cy="164592"/>
-          </a:xfrm>
-          <a:prstGeom prst="rect">
-            <a:avLst/>
-          </a:prstGeom>
-          <a:noFill/>
-          <a:ln/>
-        </p:spPr>
-        <p:txBody>
-          <a:bodyPr wrap="square" lIns="0" tIns="0" rIns="0" bIns="0" rtlCol="0" anchor="ctr"/>
-          <a:lstStyle/>
-          <a:p>
-            <a:pPr algn="ctr" indent="0" marL="0">
-              <a:buNone/>
-            </a:pPr>
-            <a:r>
-              <a:rPr lang="en-US" sz="1100" b="1" dirty="0">
-                <a:solidFill>
-                  <a:srgbClr val="FFFFFF"/>
-                </a:solidFill>
-                <a:latin typeface="Aptos" pitchFamily="34" charset="0"/>
-                <a:ea typeface="Aptos" pitchFamily="34" charset="-122"/>
-                <a:cs typeface="Aptos" pitchFamily="34" charset="-120"/>
-              </a:rPr>
-              <a:t>2</a:t>
-            </a:r>
-            <a:endParaRPr lang="en-US" sz="1100" dirty="0"/>
-          </a:p>
-        </p:txBody>
-      </p:sp>
-      <p:sp>
-        <p:nvSpPr>
-          <p:cNvPr id="10" name="Text 8"/>
-          <p:cNvSpPr/>
-          <p:nvPr/>
-        </p:nvSpPr>
-        <p:spPr>
-          <a:xfrm>
-            <a:off x="640080" y="621792"/>
             <a:ext cx="10881360" cy="713232"/>
           </a:xfrm>
           <a:prstGeom prst="rect">
@@ -13407,14 +14492,14 @@
       </p:sp>
       <p:sp>
         <p:nvSpPr>
-          <p:cNvPr id="11" name="Text 9"/>
+          <p:cNvPr id="9" name="Text 7"/>
           <p:cNvSpPr/>
           <p:nvPr/>
         </p:nvSpPr>
         <p:spPr>
           <a:xfrm>
             <a:off x="868680" y="1508760"/>
-            <a:ext cx="6537960" cy="4160520"/>
+            <a:ext cx="6309360" cy="4160520"/>
           </a:xfrm>
           <a:prstGeom prst="rect">
             <a:avLst/>
@@ -13473,18 +14558,18 @@
       </p:sp>
       <p:sp>
         <p:nvSpPr>
-          <p:cNvPr id="12" name="Shape 10"/>
-          <p:cNvSpPr/>
-          <p:nvPr/>
-        </p:nvSpPr>
-        <p:spPr>
-          <a:xfrm>
-            <a:off x="7909560" y="1417320"/>
-            <a:ext cx="3154680" cy="1828800"/>
+          <p:cNvPr id="10" name="Shape 8"/>
+          <p:cNvSpPr/>
+          <p:nvPr/>
+        </p:nvSpPr>
+        <p:spPr>
+          <a:xfrm>
+            <a:off x="7635240" y="1325880"/>
+            <a:ext cx="3474720" cy="1325880"/>
           </a:xfrm>
           <a:prstGeom prst="roundRect">
             <a:avLst>
-              <a:gd name="adj" fmla="val 6000"/>
+              <a:gd name="adj" fmla="val 8276"/>
             </a:avLst>
           </a:prstGeom>
           <a:solidFill>
@@ -13500,14 +14585,14 @@
       </p:sp>
       <p:sp>
         <p:nvSpPr>
-          <p:cNvPr id="13" name="Text 11"/>
-          <p:cNvSpPr/>
-          <p:nvPr/>
-        </p:nvSpPr>
-        <p:spPr>
-          <a:xfrm>
-            <a:off x="8074152" y="1563624"/>
-            <a:ext cx="2825496" cy="256032"/>
+          <p:cNvPr id="11" name="Text 9"/>
+          <p:cNvSpPr/>
+          <p:nvPr/>
+        </p:nvSpPr>
+        <p:spPr>
+          <a:xfrm>
+            <a:off x="7799832" y="1472184"/>
+            <a:ext cx="3145536" cy="256032"/>
           </a:xfrm>
           <a:prstGeom prst="rect">
             <a:avLst/>
@@ -13531,7 +14616,7 @@
                 <a:ea typeface="Aptos" pitchFamily="34" charset="-122"/>
                 <a:cs typeface="Aptos" pitchFamily="34" charset="-120"/>
               </a:rPr>
-              <a:t>Key idea</a:t>
+              <a:t>Core concept</a:t>
             </a:r>
             <a:endParaRPr lang="en-US" sz="1300" dirty="0"/>
           </a:p>
@@ -13539,14 +14624,14 @@
       </p:sp>
       <p:sp>
         <p:nvSpPr>
-          <p:cNvPr id="14" name="Text 12"/>
-          <p:cNvSpPr/>
-          <p:nvPr/>
-        </p:nvSpPr>
-        <p:spPr>
-          <a:xfrm>
-            <a:off x="8074152" y="1920240"/>
-            <a:ext cx="2825496" cy="1188720"/>
+          <p:cNvPr id="12" name="Text 10"/>
+          <p:cNvSpPr/>
+          <p:nvPr/>
+        </p:nvSpPr>
+        <p:spPr>
+          <a:xfrm>
+            <a:off x="7799832" y="1828800"/>
+            <a:ext cx="3145536" cy="685800"/>
           </a:xfrm>
           <a:prstGeom prst="rect">
             <a:avLst/>
@@ -13580,18 +14665,159 @@
       </p:sp>
       <p:sp>
         <p:nvSpPr>
-          <p:cNvPr id="15" name="Shape 13"/>
-          <p:cNvSpPr/>
-          <p:nvPr/>
-        </p:nvSpPr>
-        <p:spPr>
-          <a:xfrm>
-            <a:off x="7909560" y="3520440"/>
-            <a:ext cx="3154680" cy="1737360"/>
+          <p:cNvPr id="13" name="Shape 11"/>
+          <p:cNvSpPr/>
+          <p:nvPr/>
+        </p:nvSpPr>
+        <p:spPr>
+          <a:xfrm>
+            <a:off x="7635240" y="2788920"/>
+            <a:ext cx="3474720" cy="1536192"/>
           </a:xfrm>
           <a:prstGeom prst="roundRect">
             <a:avLst>
-              <a:gd name="adj" fmla="val 6316"/>
+              <a:gd name="adj" fmla="val 7143"/>
+            </a:avLst>
+          </a:prstGeom>
+          <a:solidFill>
+            <a:srgbClr val="FFFFFF">
+              <a:alpha val="88000"/>
+            </a:srgbClr>
+          </a:solidFill>
+          <a:ln w="12700">
+            <a:solidFill>
+              <a:srgbClr val="D6E8F2"/>
+            </a:solidFill>
+            <a:prstDash val="solid"/>
+          </a:ln>
+        </p:spPr>
+      </p:sp>
+      <p:sp>
+        <p:nvSpPr>
+          <p:cNvPr id="14" name="Shape 12"/>
+          <p:cNvSpPr/>
+          <p:nvPr/>
+        </p:nvSpPr>
+        <p:spPr>
+          <a:xfrm>
+            <a:off x="8074152" y="3291840"/>
+            <a:ext cx="2596896" cy="749808"/>
+          </a:xfrm>
+          <a:prstGeom prst="rect">
+            <a:avLst/>
+          </a:prstGeom>
+          <a:solidFill>
+            <a:srgbClr val="EAF6F8"/>
+          </a:solidFill>
+          <a:ln w="12700">
+            <a:solidFill>
+              <a:srgbClr val="8ABBD8"/>
+            </a:solidFill>
+            <a:prstDash val="solid"/>
+          </a:ln>
+        </p:spPr>
+      </p:sp>
+      <p:sp>
+        <p:nvSpPr>
+          <p:cNvPr id="15" name="Shape 13"/>
+          <p:cNvSpPr/>
+          <p:nvPr/>
+        </p:nvSpPr>
+        <p:spPr>
+          <a:xfrm>
+            <a:off x="8202168" y="3721608"/>
+            <a:ext cx="2340864" cy="0"/>
+          </a:xfrm>
+          <a:prstGeom prst="line">
+            <a:avLst/>
+          </a:prstGeom>
+          <a:noFill/>
+          <a:ln w="19050">
+            <a:solidFill>
+              <a:srgbClr val="0068B7"/>
+            </a:solidFill>
+            <a:prstDash val="solid"/>
+          </a:ln>
+        </p:spPr>
+      </p:sp>
+      <p:sp>
+        <p:nvSpPr>
+          <p:cNvPr id="16" name="Shape 14"/>
+          <p:cNvSpPr/>
+          <p:nvPr/>
+        </p:nvSpPr>
+        <p:spPr>
+          <a:xfrm>
+            <a:off x="9198864" y="4206240"/>
+            <a:ext cx="347472" cy="347472"/>
+          </a:xfrm>
+          <a:prstGeom prst="ellipse">
+            <a:avLst/>
+          </a:prstGeom>
+          <a:solidFill>
+            <a:srgbClr val="2F8A28"/>
+          </a:solidFill>
+          <a:ln w="12700">
+            <a:solidFill>
+              <a:srgbClr val="2F8A28"/>
+            </a:solidFill>
+            <a:prstDash val="solid"/>
+          </a:ln>
+        </p:spPr>
+      </p:sp>
+      <p:sp>
+        <p:nvSpPr>
+          <p:cNvPr id="17" name="Text 15"/>
+          <p:cNvSpPr/>
+          <p:nvPr/>
+        </p:nvSpPr>
+        <p:spPr>
+          <a:xfrm>
+            <a:off x="7909560" y="3977640"/>
+            <a:ext cx="2926080" cy="182880"/>
+          </a:xfrm>
+          <a:prstGeom prst="rect">
+            <a:avLst/>
+          </a:prstGeom>
+          <a:noFill/>
+          <a:ln/>
+        </p:spPr>
+        <p:txBody>
+          <a:bodyPr wrap="square" lIns="0" tIns="0" rIns="0" bIns="0" rtlCol="0" anchor="ctr"/>
+          <a:lstStyle/>
+          <a:p>
+            <a:pPr algn="ctr" indent="0" marL="0">
+              <a:buNone/>
+            </a:pPr>
+            <a:r>
+              <a:rPr lang="en-US" sz="1000" dirty="0">
+                <a:solidFill>
+                  <a:srgbClr val="003A63"/>
+                </a:solidFill>
+                <a:latin typeface="Aptos" pitchFamily="34" charset="0"/>
+                <a:ea typeface="Aptos" pitchFamily="34" charset="-122"/>
+                <a:cs typeface="Aptos" pitchFamily="34" charset="-120"/>
+              </a:rPr>
+              <a:t>Concept to action</a:t>
+            </a:r>
+            <a:endParaRPr lang="en-US" sz="1000" dirty="0"/>
+          </a:p>
+        </p:txBody>
+      </p:sp>
+      <p:sp>
+        <p:nvSpPr>
+          <p:cNvPr id="18" name="Shape 16"/>
+          <p:cNvSpPr/>
+          <p:nvPr/>
+        </p:nvSpPr>
+        <p:spPr>
+          <a:xfrm>
+            <a:off x="7635240" y="4498848"/>
+            <a:ext cx="3474720" cy="1143000"/>
+          </a:xfrm>
+          <a:prstGeom prst="roundRect">
+            <a:avLst>
+              <a:gd name="adj" fmla="val 9600"/>
             </a:avLst>
           </a:prstGeom>
           <a:solidFill>
@@ -13607,14 +14833,14 @@
       </p:sp>
       <p:sp>
         <p:nvSpPr>
-          <p:cNvPr id="16" name="Text 14"/>
-          <p:cNvSpPr/>
-          <p:nvPr/>
-        </p:nvSpPr>
-        <p:spPr>
-          <a:xfrm>
-            <a:off x="8074152" y="3666744"/>
-            <a:ext cx="2825496" cy="256032"/>
+          <p:cNvPr id="19" name="Text 17"/>
+          <p:cNvSpPr/>
+          <p:nvPr/>
+        </p:nvSpPr>
+        <p:spPr>
+          <a:xfrm>
+            <a:off x="7799832" y="4645152"/>
+            <a:ext cx="3145536" cy="256032"/>
           </a:xfrm>
           <a:prstGeom prst="rect">
             <a:avLst/>
@@ -13638,7 +14864,7 @@
                 <a:ea typeface="Aptos" pitchFamily="34" charset="-122"/>
                 <a:cs typeface="Aptos" pitchFamily="34" charset="-120"/>
               </a:rPr>
-              <a:t>Use this for</a:t>
+              <a:t>Apply it</a:t>
             </a:r>
             <a:endParaRPr lang="en-US" sz="1300" dirty="0"/>
           </a:p>
@@ -13646,14 +14872,14 @@
       </p:sp>
       <p:sp>
         <p:nvSpPr>
-          <p:cNvPr id="17" name="Text 15"/>
-          <p:cNvSpPr/>
-          <p:nvPr/>
-        </p:nvSpPr>
-        <p:spPr>
-          <a:xfrm>
-            <a:off x="8074152" y="4023360"/>
-            <a:ext cx="2825496" cy="1097280"/>
+          <p:cNvPr id="20" name="Text 18"/>
+          <p:cNvSpPr/>
+          <p:nvPr/>
+        </p:nvSpPr>
+        <p:spPr>
+          <a:xfrm>
+            <a:off x="7799832" y="5001768"/>
+            <a:ext cx="3145536" cy="502920"/>
           </a:xfrm>
           <a:prstGeom prst="rect">
             <a:avLst/>
@@ -13679,7 +14905,7 @@
                 <a:ea typeface="Aptos" pitchFamily="34" charset="-122"/>
                 <a:cs typeface="Aptos" pitchFamily="34" charset="-120"/>
               </a:rPr>
-              <a:t>Connect the concept to public health decisions, safeguards, documentation, or implementation work.</a:t>
+              <a:t>Connect the concept to public health purpose, responsible use, required safeguards, documentation, and the next action a department should take.</a:t>
             </a:r>
             <a:endParaRPr lang="en-US" sz="1550" dirty="0"/>
           </a:p>
@@ -13853,8 +15079,8 @@
         </p:nvSpPr>
         <p:spPr>
           <a:xfrm>
-            <a:off x="9966960" y="6537960"/>
-            <a:ext cx="1645920" cy="201168"/>
+            <a:off x="9646920" y="6537960"/>
+            <a:ext cx="1965960" cy="201168"/>
           </a:xfrm>
           <a:prstGeom prst="rect">
             <a:avLst/>
@@ -13878,7 +15104,7 @@
                 <a:ea typeface="Aptos" pitchFamily="34" charset="-122"/>
                 <a:cs typeface="Aptos" pitchFamily="34" charset="-120"/>
               </a:rPr>
-              <a:t>Â© Paula Soper</a:t>
+              <a:t>Copyright Paula Soper</a:t>
             </a:r>
             <a:endParaRPr lang="en-US" sz="800" dirty="0"/>
           </a:p>
@@ -13925,14 +15151,257 @@
       </p:sp>
       <p:sp>
         <p:nvSpPr>
-          <p:cNvPr id="8" name="Shape 6"/>
+          <p:cNvPr id="8" name="Text 6"/>
           <p:cNvSpPr/>
           <p:nvPr/>
         </p:nvSpPr>
         <p:spPr>
           <a:xfrm>
             <a:off x="640080" y="658368"/>
-            <a:ext cx="420624" cy="420624"/>
+            <a:ext cx="10881360" cy="713232"/>
+          </a:xfrm>
+          <a:prstGeom prst="rect">
+            <a:avLst/>
+          </a:prstGeom>
+          <a:noFill/>
+          <a:ln/>
+        </p:spPr>
+        <p:txBody>
+          <a:bodyPr wrap="square" lIns="0" tIns="0" rIns="0" bIns="0" rtlCol="0" anchor="ctr">
+            <a:normAutofit/>
+          </a:bodyPr>
+          <a:lstStyle/>
+          <a:p>
+            <a:pPr indent="0" marL="0">
+              <a:buNone/>
+            </a:pPr>
+            <a:r>
+              <a:rPr lang="en-US" sz="3400" b="1" dirty="0">
+                <a:solidFill>
+                  <a:srgbClr val="003A63"/>
+                </a:solidFill>
+                <a:latin typeface="Aptos Display" pitchFamily="34" charset="0"/>
+                <a:ea typeface="Aptos Display" pitchFamily="34" charset="-122"/>
+                <a:cs typeface="Aptos Display" pitchFamily="34" charset="-120"/>
+              </a:rPr>
+              <a:t>Jurisdiction and Agency Policy Note</a:t>
+            </a:r>
+            <a:endParaRPr lang="en-US" sz="3400" dirty="0"/>
+          </a:p>
+        </p:txBody>
+      </p:sp>
+      <p:sp>
+        <p:nvSpPr>
+          <p:cNvPr id="9" name="Text 7"/>
+          <p:cNvSpPr/>
+          <p:nvPr/>
+        </p:nvSpPr>
+        <p:spPr>
+          <a:xfrm>
+            <a:off x="868680" y="1508760"/>
+            <a:ext cx="6309360" cy="4160520"/>
+          </a:xfrm>
+          <a:prstGeom prst="rect">
+            <a:avLst/>
+          </a:prstGeom>
+          <a:noFill/>
+          <a:ln/>
+        </p:spPr>
+        <p:txBody>
+          <a:bodyPr wrap="square" lIns="635" tIns="635" rIns="635" bIns="635" rtlCol="0" anchor="t">
+            <a:normAutofit/>
+          </a:bodyPr>
+          <a:lstStyle/>
+          <a:p>
+            <a:r>
+              <a:rPr lang="en-US" sz="2100" dirty="0">
+                <a:solidFill>
+                  <a:srgbClr val="17364A"/>
+                </a:solidFill>
+                <a:latin typeface="Aptos" pitchFamily="34" charset="0"/>
+                <a:ea typeface="Aptos" pitchFamily="34" charset="-122"/>
+                <a:cs typeface="Aptos" pitchFamily="34" charset="-120"/>
+              </a:rPr>
+              <a:t>This national-level module is intended for training and planning purposes.</a:t>
+            </a:r>
+            <a:endParaRPr lang="en-US" sz="2100" dirty="0"/>
+          </a:p>
+          <a:p>
+            <a:r>
+              <a:rPr lang="en-US" sz="2100" dirty="0">
+                <a:solidFill>
+                  <a:srgbClr val="17364A"/>
+                </a:solidFill>
+                <a:latin typeface="Aptos" pitchFamily="34" charset="0"/>
+                <a:ea typeface="Aptos" pitchFamily="34" charset="-122"/>
+                <a:cs typeface="Aptos" pitchFamily="34" charset="-120"/>
+              </a:rPr>
+              <a:t>It does not replace legal, privacy, procurement, civil rights, records, or agency policy review.</a:t>
+            </a:r>
+            <a:endParaRPr lang="en-US" sz="2100" dirty="0"/>
+          </a:p>
+          <a:p>
+            <a:r>
+              <a:rPr lang="en-US" sz="2100" dirty="0">
+                <a:solidFill>
+                  <a:srgbClr val="17364A"/>
+                </a:solidFill>
+                <a:latin typeface="Aptos" pitchFamily="34" charset="0"/>
+                <a:ea typeface="Aptos" pitchFamily="34" charset="-122"/>
+                <a:cs typeface="Aptos" pitchFamily="34" charset="-120"/>
+              </a:rPr>
+              <a:t>Learners should confirm applicable requirements in their own jurisdiction and organization before.</a:t>
+            </a:r>
+            <a:endParaRPr lang="en-US" sz="2100" dirty="0"/>
+          </a:p>
+        </p:txBody>
+      </p:sp>
+      <p:sp>
+        <p:nvSpPr>
+          <p:cNvPr id="10" name="Shape 8"/>
+          <p:cNvSpPr/>
+          <p:nvPr/>
+        </p:nvSpPr>
+        <p:spPr>
+          <a:xfrm>
+            <a:off x="7635240" y="1325880"/>
+            <a:ext cx="3474720" cy="1325880"/>
+          </a:xfrm>
+          <a:prstGeom prst="roundRect">
+            <a:avLst>
+              <a:gd name="adj" fmla="val 8276"/>
+            </a:avLst>
+          </a:prstGeom>
+          <a:solidFill>
+            <a:srgbClr val="EEF8ED"/>
+          </a:solidFill>
+          <a:ln w="12700">
+            <a:solidFill>
+              <a:srgbClr val="B9D7E6"/>
+            </a:solidFill>
+            <a:prstDash val="solid"/>
+          </a:ln>
+        </p:spPr>
+      </p:sp>
+      <p:sp>
+        <p:nvSpPr>
+          <p:cNvPr id="11" name="Text 9"/>
+          <p:cNvSpPr/>
+          <p:nvPr/>
+        </p:nvSpPr>
+        <p:spPr>
+          <a:xfrm>
+            <a:off x="7799832" y="1472184"/>
+            <a:ext cx="3145536" cy="256032"/>
+          </a:xfrm>
+          <a:prstGeom prst="rect">
+            <a:avLst/>
+          </a:prstGeom>
+          <a:noFill/>
+          <a:ln/>
+        </p:spPr>
+        <p:txBody>
+          <a:bodyPr wrap="square" lIns="0" tIns="0" rIns="0" bIns="0" rtlCol="0" anchor="ctr"/>
+          <a:lstStyle/>
+          <a:p>
+            <a:pPr indent="0" marL="0">
+              <a:buNone/>
+            </a:pPr>
+            <a:r>
+              <a:rPr lang="en-US" sz="1300" b="1" dirty="0">
+                <a:solidFill>
+                  <a:srgbClr val="0068B7"/>
+                </a:solidFill>
+                <a:latin typeface="Aptos" pitchFamily="34" charset="0"/>
+                <a:ea typeface="Aptos" pitchFamily="34" charset="-122"/>
+                <a:cs typeface="Aptos" pitchFamily="34" charset="-120"/>
+              </a:rPr>
+              <a:t>Governance lens</a:t>
+            </a:r>
+            <a:endParaRPr lang="en-US" sz="1300" dirty="0"/>
+          </a:p>
+        </p:txBody>
+      </p:sp>
+      <p:sp>
+        <p:nvSpPr>
+          <p:cNvPr id="12" name="Text 10"/>
+          <p:cNvSpPr/>
+          <p:nvPr/>
+        </p:nvSpPr>
+        <p:spPr>
+          <a:xfrm>
+            <a:off x="7799832" y="1828800"/>
+            <a:ext cx="3145536" cy="685800"/>
+          </a:xfrm>
+          <a:prstGeom prst="rect">
+            <a:avLst/>
+          </a:prstGeom>
+          <a:noFill/>
+          <a:ln/>
+        </p:spPr>
+        <p:txBody>
+          <a:bodyPr wrap="square" lIns="0" tIns="0" rIns="0" bIns="0" rtlCol="0" anchor="t">
+            <a:normAutofit/>
+          </a:bodyPr>
+          <a:lstStyle/>
+          <a:p>
+            <a:pPr indent="0" marL="0">
+              <a:buNone/>
+            </a:pPr>
+            <a:r>
+              <a:rPr lang="en-US" sz="1550" dirty="0">
+                <a:solidFill>
+                  <a:srgbClr val="17364A"/>
+                </a:solidFill>
+                <a:latin typeface="Aptos" pitchFamily="34" charset="0"/>
+                <a:ea typeface="Aptos" pitchFamily="34" charset="-122"/>
+                <a:cs typeface="Aptos" pitchFamily="34" charset="-120"/>
+              </a:rPr>
+              <a:t>This national-level module is intended for training and planning purposes.</a:t>
+            </a:r>
+            <a:endParaRPr lang="en-US" sz="1550" dirty="0"/>
+          </a:p>
+        </p:txBody>
+      </p:sp>
+      <p:sp>
+        <p:nvSpPr>
+          <p:cNvPr id="13" name="Shape 11"/>
+          <p:cNvSpPr/>
+          <p:nvPr/>
+        </p:nvSpPr>
+        <p:spPr>
+          <a:xfrm>
+            <a:off x="7635240" y="2788920"/>
+            <a:ext cx="3474720" cy="1536192"/>
+          </a:xfrm>
+          <a:prstGeom prst="roundRect">
+            <a:avLst>
+              <a:gd name="adj" fmla="val 7143"/>
+            </a:avLst>
+          </a:prstGeom>
+          <a:solidFill>
+            <a:srgbClr val="FFFFFF">
+              <a:alpha val="88000"/>
+            </a:srgbClr>
+          </a:solidFill>
+          <a:ln w="12700">
+            <a:solidFill>
+              <a:srgbClr val="D6E8F2"/>
+            </a:solidFill>
+            <a:prstDash val="solid"/>
+          </a:ln>
+        </p:spPr>
+      </p:sp>
+      <p:sp>
+        <p:nvSpPr>
+          <p:cNvPr id="14" name="Shape 12"/>
+          <p:cNvSpPr/>
+          <p:nvPr/>
+        </p:nvSpPr>
+        <p:spPr>
+          <a:xfrm>
+            <a:off x="7891272" y="3108960"/>
+            <a:ext cx="566928" cy="566928"/>
           </a:xfrm>
           <a:prstGeom prst="ellipse">
             <a:avLst/>
@@ -13950,172 +15419,24 @@
       </p:sp>
       <p:sp>
         <p:nvSpPr>
-          <p:cNvPr id="9" name="Text 7"/>
-          <p:cNvSpPr/>
-          <p:nvPr/>
-        </p:nvSpPr>
-        <p:spPr>
-          <a:xfrm>
-            <a:off x="640080" y="731520"/>
-            <a:ext cx="420624" cy="164592"/>
-          </a:xfrm>
-          <a:prstGeom prst="rect">
-            <a:avLst/>
-          </a:prstGeom>
-          <a:noFill/>
-          <a:ln/>
-        </p:spPr>
-        <p:txBody>
-          <a:bodyPr wrap="square" lIns="0" tIns="0" rIns="0" bIns="0" rtlCol="0" anchor="ctr"/>
-          <a:lstStyle/>
-          <a:p>
-            <a:pPr algn="ctr" indent="0" marL="0">
-              <a:buNone/>
-            </a:pPr>
-            <a:r>
-              <a:rPr lang="en-US" sz="1100" b="1" dirty="0">
-                <a:solidFill>
-                  <a:srgbClr val="FFFFFF"/>
-                </a:solidFill>
-                <a:latin typeface="Aptos" pitchFamily="34" charset="0"/>
-                <a:ea typeface="Aptos" pitchFamily="34" charset="-122"/>
-                <a:cs typeface="Aptos" pitchFamily="34" charset="-120"/>
-              </a:rPr>
-              <a:t>3</a:t>
-            </a:r>
-            <a:endParaRPr lang="en-US" sz="1100" dirty="0"/>
-          </a:p>
-        </p:txBody>
-      </p:sp>
-      <p:sp>
-        <p:nvSpPr>
-          <p:cNvPr id="10" name="Text 8"/>
-          <p:cNvSpPr/>
-          <p:nvPr/>
-        </p:nvSpPr>
-        <p:spPr>
-          <a:xfrm>
-            <a:off x="640080" y="621792"/>
-            <a:ext cx="10881360" cy="713232"/>
-          </a:xfrm>
-          <a:prstGeom prst="rect">
-            <a:avLst/>
-          </a:prstGeom>
-          <a:noFill/>
-          <a:ln/>
-        </p:spPr>
-        <p:txBody>
-          <a:bodyPr wrap="square" lIns="0" tIns="0" rIns="0" bIns="0" rtlCol="0" anchor="ctr">
-            <a:normAutofit/>
-          </a:bodyPr>
-          <a:lstStyle/>
-          <a:p>
-            <a:pPr indent="0" marL="0">
-              <a:buNone/>
-            </a:pPr>
-            <a:r>
-              <a:rPr lang="en-US" sz="3400" b="1" dirty="0">
-                <a:solidFill>
-                  <a:srgbClr val="003A63"/>
-                </a:solidFill>
-                <a:latin typeface="Aptos Display" pitchFamily="34" charset="0"/>
-                <a:ea typeface="Aptos Display" pitchFamily="34" charset="-122"/>
-                <a:cs typeface="Aptos Display" pitchFamily="34" charset="-120"/>
-              </a:rPr>
-              <a:t>Jurisdiction and Agency Policy Note</a:t>
-            </a:r>
-            <a:endParaRPr lang="en-US" sz="3400" dirty="0"/>
-          </a:p>
-        </p:txBody>
-      </p:sp>
-      <p:sp>
-        <p:nvSpPr>
-          <p:cNvPr id="11" name="Text 9"/>
-          <p:cNvSpPr/>
-          <p:nvPr/>
-        </p:nvSpPr>
-        <p:spPr>
-          <a:xfrm>
-            <a:off x="868680" y="1508760"/>
-            <a:ext cx="6537960" cy="4160520"/>
-          </a:xfrm>
-          <a:prstGeom prst="rect">
-            <a:avLst/>
-          </a:prstGeom>
-          <a:noFill/>
-          <a:ln/>
-        </p:spPr>
-        <p:txBody>
-          <a:bodyPr wrap="square" lIns="635" tIns="635" rIns="635" bIns="635" rtlCol="0" anchor="t">
-            <a:normAutofit/>
-          </a:bodyPr>
-          <a:lstStyle/>
-          <a:p>
-            <a:r>
-              <a:rPr lang="en-US" sz="2100" dirty="0">
-                <a:solidFill>
-                  <a:srgbClr val="17364A"/>
-                </a:solidFill>
-                <a:latin typeface="Aptos" pitchFamily="34" charset="0"/>
-                <a:ea typeface="Aptos" pitchFamily="34" charset="-122"/>
-                <a:cs typeface="Aptos" pitchFamily="34" charset="-120"/>
-              </a:rPr>
-              <a:t>This national-level module is intended for training and planning purposes.</a:t>
-            </a:r>
-            <a:endParaRPr lang="en-US" sz="2100" dirty="0"/>
-          </a:p>
-          <a:p>
-            <a:r>
-              <a:rPr lang="en-US" sz="2100" dirty="0">
-                <a:solidFill>
-                  <a:srgbClr val="17364A"/>
-                </a:solidFill>
-                <a:latin typeface="Aptos" pitchFamily="34" charset="0"/>
-                <a:ea typeface="Aptos" pitchFamily="34" charset="-122"/>
-                <a:cs typeface="Aptos" pitchFamily="34" charset="-120"/>
-              </a:rPr>
-              <a:t>It does not replace legal, privacy, procurement, civil rights, records, or agency policy review.</a:t>
-            </a:r>
-            <a:endParaRPr lang="en-US" sz="2100" dirty="0"/>
-          </a:p>
-          <a:p>
-            <a:r>
-              <a:rPr lang="en-US" sz="2100" dirty="0">
-                <a:solidFill>
-                  <a:srgbClr val="17364A"/>
-                </a:solidFill>
-                <a:latin typeface="Aptos" pitchFamily="34" charset="0"/>
-                <a:ea typeface="Aptos" pitchFamily="34" charset="-122"/>
-                <a:cs typeface="Aptos" pitchFamily="34" charset="-120"/>
-              </a:rPr>
-              <a:t>Learners should confirm applicable requirements in their own jurisdiction and organization before.</a:t>
-            </a:r>
-            <a:endParaRPr lang="en-US" sz="2100" dirty="0"/>
-          </a:p>
-        </p:txBody>
-      </p:sp>
-      <p:sp>
-        <p:nvSpPr>
-          <p:cNvPr id="12" name="Shape 10"/>
-          <p:cNvSpPr/>
-          <p:nvPr/>
-        </p:nvSpPr>
-        <p:spPr>
-          <a:xfrm>
-            <a:off x="7909560" y="1417320"/>
-            <a:ext cx="3154680" cy="1828800"/>
-          </a:xfrm>
-          <a:prstGeom prst="roundRect">
-            <a:avLst>
-              <a:gd name="adj" fmla="val 6000"/>
-            </a:avLst>
+          <p:cNvPr id="15" name="Shape 13"/>
+          <p:cNvSpPr/>
+          <p:nvPr/>
+        </p:nvSpPr>
+        <p:spPr>
+          <a:xfrm>
+            <a:off x="10287000" y="3108960"/>
+            <a:ext cx="566928" cy="566928"/>
+          </a:xfrm>
+          <a:prstGeom prst="ellipse">
+            <a:avLst/>
           </a:prstGeom>
           <a:solidFill>
-            <a:srgbClr val="EEF8ED"/>
+            <a:srgbClr val="2F8A28"/>
           </a:solidFill>
           <a:ln w="12700">
             <a:solidFill>
-              <a:srgbClr val="B9D7E6"/>
+              <a:srgbClr val="2F8A28"/>
             </a:solidFill>
             <a:prstDash val="solid"/>
           </a:ln>
@@ -14123,14 +15444,108 @@
       </p:sp>
       <p:sp>
         <p:nvSpPr>
-          <p:cNvPr id="13" name="Text 11"/>
-          <p:cNvSpPr/>
-          <p:nvPr/>
-        </p:nvSpPr>
-        <p:spPr>
-          <a:xfrm>
-            <a:off x="8074152" y="1563624"/>
-            <a:ext cx="2825496" cy="256032"/>
+          <p:cNvPr id="16" name="Shape 14"/>
+          <p:cNvSpPr/>
+          <p:nvPr/>
+        </p:nvSpPr>
+        <p:spPr>
+          <a:xfrm>
+            <a:off x="9089136" y="3456432"/>
+            <a:ext cx="566928" cy="566928"/>
+          </a:xfrm>
+          <a:prstGeom prst="ellipse">
+            <a:avLst/>
+          </a:prstGeom>
+          <a:solidFill>
+            <a:srgbClr val="6A4CA3"/>
+          </a:solidFill>
+          <a:ln w="12700">
+            <a:solidFill>
+              <a:srgbClr val="6A4CA3"/>
+            </a:solidFill>
+            <a:prstDash val="solid"/>
+          </a:ln>
+        </p:spPr>
+      </p:sp>
+      <p:sp>
+        <p:nvSpPr>
+          <p:cNvPr id="17" name="Shape 15"/>
+          <p:cNvSpPr/>
+          <p:nvPr/>
+        </p:nvSpPr>
+        <p:spPr>
+          <a:xfrm>
+            <a:off x="8385048" y="3419856"/>
+            <a:ext cx="1975104" cy="0"/>
+          </a:xfrm>
+          <a:prstGeom prst="line">
+            <a:avLst/>
+          </a:prstGeom>
+          <a:noFill/>
+          <a:ln w="25400">
+            <a:solidFill>
+              <a:srgbClr val="8ABBD8"/>
+            </a:solidFill>
+            <a:prstDash val="solid"/>
+          </a:ln>
+        </p:spPr>
+      </p:sp>
+      <p:sp>
+        <p:nvSpPr>
+          <p:cNvPr id="18" name="Shape 16"/>
+          <p:cNvSpPr/>
+          <p:nvPr/>
+        </p:nvSpPr>
+        <p:spPr>
+          <a:xfrm>
+            <a:off x="8202168" y="3630168"/>
+            <a:ext cx="1170432" cy="118872"/>
+          </a:xfrm>
+          <a:prstGeom prst="line">
+            <a:avLst/>
+          </a:prstGeom>
+          <a:noFill/>
+          <a:ln w="25400">
+            <a:solidFill>
+              <a:srgbClr val="8ABBD8"/>
+            </a:solidFill>
+            <a:prstDash val="solid"/>
+          </a:ln>
+        </p:spPr>
+      </p:sp>
+      <p:sp>
+        <p:nvSpPr>
+          <p:cNvPr id="19" name="Shape 17"/>
+          <p:cNvSpPr/>
+          <p:nvPr/>
+        </p:nvSpPr>
+        <p:spPr>
+          <a:xfrm>
+            <a:off x="10543032" y="3630168"/>
+            <a:ext cx="-1170432" cy="118872"/>
+          </a:xfrm>
+          <a:prstGeom prst="line">
+            <a:avLst/>
+          </a:prstGeom>
+          <a:noFill/>
+          <a:ln w="25400">
+            <a:solidFill>
+              <a:srgbClr val="8ABBD8"/>
+            </a:solidFill>
+            <a:prstDash val="solid"/>
+          </a:ln>
+        </p:spPr>
+      </p:sp>
+      <p:sp>
+        <p:nvSpPr>
+          <p:cNvPr id="20" name="Text 18"/>
+          <p:cNvSpPr/>
+          <p:nvPr/>
+        </p:nvSpPr>
+        <p:spPr>
+          <a:xfrm>
+            <a:off x="7863840" y="4069080"/>
+            <a:ext cx="3017520" cy="164592"/>
           </a:xfrm>
           <a:prstGeom prst="rect">
             <a:avLst/>
@@ -14142,79 +15557,38 @@
           <a:bodyPr wrap="square" lIns="0" tIns="0" rIns="0" bIns="0" rtlCol="0" anchor="ctr"/>
           <a:lstStyle/>
           <a:p>
-            <a:pPr indent="0" marL="0">
-              <a:buNone/>
-            </a:pPr>
-            <a:r>
-              <a:rPr lang="en-US" sz="1300" b="1" dirty="0">
-                <a:solidFill>
-                  <a:srgbClr val="0068B7"/>
-                </a:solidFill>
-                <a:latin typeface="Aptos" pitchFamily="34" charset="0"/>
-                <a:ea typeface="Aptos" pitchFamily="34" charset="-122"/>
-                <a:cs typeface="Aptos" pitchFamily="34" charset="-120"/>
-              </a:rPr>
-              <a:t>Key idea</a:t>
-            </a:r>
-            <a:endParaRPr lang="en-US" sz="1300" dirty="0"/>
-          </a:p>
-        </p:txBody>
-      </p:sp>
-      <p:sp>
-        <p:nvSpPr>
-          <p:cNvPr id="14" name="Text 12"/>
-          <p:cNvSpPr/>
-          <p:nvPr/>
-        </p:nvSpPr>
-        <p:spPr>
-          <a:xfrm>
-            <a:off x="8074152" y="1920240"/>
-            <a:ext cx="2825496" cy="1188720"/>
-          </a:xfrm>
-          <a:prstGeom prst="rect">
-            <a:avLst/>
-          </a:prstGeom>
-          <a:noFill/>
-          <a:ln/>
-        </p:spPr>
-        <p:txBody>
-          <a:bodyPr wrap="square" lIns="0" tIns="0" rIns="0" bIns="0" rtlCol="0" anchor="t">
-            <a:normAutofit/>
-          </a:bodyPr>
-          <a:lstStyle/>
-          <a:p>
-            <a:pPr indent="0" marL="0">
-              <a:buNone/>
-            </a:pPr>
-            <a:r>
-              <a:rPr lang="en-US" sz="1550" dirty="0">
-                <a:solidFill>
-                  <a:srgbClr val="17364A"/>
-                </a:solidFill>
-                <a:latin typeface="Aptos" pitchFamily="34" charset="0"/>
-                <a:ea typeface="Aptos" pitchFamily="34" charset="-122"/>
-                <a:cs typeface="Aptos" pitchFamily="34" charset="-120"/>
-              </a:rPr>
-              <a:t>This national-level module is intended for training and planning purposes.</a:t>
-            </a:r>
-            <a:endParaRPr lang="en-US" sz="1550" dirty="0"/>
-          </a:p>
-        </p:txBody>
-      </p:sp>
-      <p:sp>
-        <p:nvSpPr>
-          <p:cNvPr id="15" name="Shape 13"/>
-          <p:cNvSpPr/>
-          <p:nvPr/>
-        </p:nvSpPr>
-        <p:spPr>
-          <a:xfrm>
-            <a:off x="7909560" y="3520440"/>
-            <a:ext cx="3154680" cy="1737360"/>
+            <a:pPr algn="ctr" indent="0" marL="0">
+              <a:buNone/>
+            </a:pPr>
+            <a:r>
+              <a:rPr lang="en-US" sz="900" b="1" dirty="0">
+                <a:solidFill>
+                  <a:srgbClr val="003A63"/>
+                </a:solidFill>
+                <a:latin typeface="Aptos" pitchFamily="34" charset="0"/>
+                <a:ea typeface="Aptos" pitchFamily="34" charset="-122"/>
+                <a:cs typeface="Aptos" pitchFamily="34" charset="-120"/>
+              </a:rPr>
+              <a:t>Decision rights</a:t>
+            </a:r>
+            <a:endParaRPr lang="en-US" sz="900" dirty="0"/>
+          </a:p>
+        </p:txBody>
+      </p:sp>
+      <p:sp>
+        <p:nvSpPr>
+          <p:cNvPr id="21" name="Shape 19"/>
+          <p:cNvSpPr/>
+          <p:nvPr/>
+        </p:nvSpPr>
+        <p:spPr>
+          <a:xfrm>
+            <a:off x="7635240" y="4498848"/>
+            <a:ext cx="3474720" cy="1143000"/>
           </a:xfrm>
           <a:prstGeom prst="roundRect">
             <a:avLst>
-              <a:gd name="adj" fmla="val 6316"/>
+              <a:gd name="adj" fmla="val 9600"/>
             </a:avLst>
           </a:prstGeom>
           <a:solidFill>
@@ -14230,14 +15604,14 @@
       </p:sp>
       <p:sp>
         <p:nvSpPr>
-          <p:cNvPr id="16" name="Text 14"/>
-          <p:cNvSpPr/>
-          <p:nvPr/>
-        </p:nvSpPr>
-        <p:spPr>
-          <a:xfrm>
-            <a:off x="8074152" y="3666744"/>
-            <a:ext cx="2825496" cy="256032"/>
+          <p:cNvPr id="22" name="Text 20"/>
+          <p:cNvSpPr/>
+          <p:nvPr/>
+        </p:nvSpPr>
+        <p:spPr>
+          <a:xfrm>
+            <a:off x="7799832" y="4645152"/>
+            <a:ext cx="3145536" cy="256032"/>
           </a:xfrm>
           <a:prstGeom prst="rect">
             <a:avLst/>
@@ -14261,7 +15635,7 @@
                 <a:ea typeface="Aptos" pitchFamily="34" charset="-122"/>
                 <a:cs typeface="Aptos" pitchFamily="34" charset="-120"/>
               </a:rPr>
-              <a:t>Use this for</a:t>
+              <a:t>What to document</a:t>
             </a:r>
             <a:endParaRPr lang="en-US" sz="1300" dirty="0"/>
           </a:p>
@@ -14269,14 +15643,14 @@
       </p:sp>
       <p:sp>
         <p:nvSpPr>
-          <p:cNvPr id="17" name="Text 15"/>
-          <p:cNvSpPr/>
-          <p:nvPr/>
-        </p:nvSpPr>
-        <p:spPr>
-          <a:xfrm>
-            <a:off x="8074152" y="4023360"/>
-            <a:ext cx="2825496" cy="1097280"/>
+          <p:cNvPr id="23" name="Text 21"/>
+          <p:cNvSpPr/>
+          <p:nvPr/>
+        </p:nvSpPr>
+        <p:spPr>
+          <a:xfrm>
+            <a:off x="7799832" y="5001768"/>
+            <a:ext cx="3145536" cy="502920"/>
           </a:xfrm>
           <a:prstGeom prst="rect">
             <a:avLst/>
@@ -14302,7 +15676,7 @@
                 <a:ea typeface="Aptos" pitchFamily="34" charset="-122"/>
                 <a:cs typeface="Aptos" pitchFamily="34" charset="-120"/>
               </a:rPr>
-              <a:t>Connect the concept to public health decisions, safeguards, documentation, or implementation work.</a:t>
+              <a:t>Translate this concept into clear decision rights, review steps, documentation expectations, and escalation paths before an AI-supported workflow is approved.</a:t>
             </a:r>
             <a:endParaRPr lang="en-US" sz="1550" dirty="0"/>
           </a:p>
@@ -14476,8 +15850,8 @@
         </p:nvSpPr>
         <p:spPr>
           <a:xfrm>
-            <a:off x="9966960" y="6537960"/>
-            <a:ext cx="1645920" cy="201168"/>
+            <a:off x="9646920" y="6537960"/>
+            <a:ext cx="1965960" cy="201168"/>
           </a:xfrm>
           <a:prstGeom prst="rect">
             <a:avLst/>
@@ -14501,7 +15875,7 @@
                 <a:ea typeface="Aptos" pitchFamily="34" charset="-122"/>
                 <a:cs typeface="Aptos" pitchFamily="34" charset="-120"/>
               </a:rPr>
-              <a:t>Â© Paula Soper</a:t>
+              <a:t>Copyright Paula Soper</a:t>
             </a:r>
             <a:endParaRPr lang="en-US" sz="800" dirty="0"/>
           </a:p>
@@ -14548,77 +15922,13 @@
       </p:sp>
       <p:sp>
         <p:nvSpPr>
-          <p:cNvPr id="8" name="Shape 6"/>
+          <p:cNvPr id="8" name="Text 6"/>
           <p:cNvSpPr/>
           <p:nvPr/>
         </p:nvSpPr>
         <p:spPr>
           <a:xfrm>
             <a:off x="640080" y="658368"/>
-            <a:ext cx="420624" cy="420624"/>
-          </a:xfrm>
-          <a:prstGeom prst="ellipse">
-            <a:avLst/>
-          </a:prstGeom>
-          <a:solidFill>
-            <a:srgbClr val="0068B7"/>
-          </a:solidFill>
-          <a:ln w="12700">
-            <a:solidFill>
-              <a:srgbClr val="0068B7"/>
-            </a:solidFill>
-            <a:prstDash val="solid"/>
-          </a:ln>
-        </p:spPr>
-      </p:sp>
-      <p:sp>
-        <p:nvSpPr>
-          <p:cNvPr id="9" name="Text 7"/>
-          <p:cNvSpPr/>
-          <p:nvPr/>
-        </p:nvSpPr>
-        <p:spPr>
-          <a:xfrm>
-            <a:off x="640080" y="731520"/>
-            <a:ext cx="420624" cy="164592"/>
-          </a:xfrm>
-          <a:prstGeom prst="rect">
-            <a:avLst/>
-          </a:prstGeom>
-          <a:noFill/>
-          <a:ln/>
-        </p:spPr>
-        <p:txBody>
-          <a:bodyPr wrap="square" lIns="0" tIns="0" rIns="0" bIns="0" rtlCol="0" anchor="ctr"/>
-          <a:lstStyle/>
-          <a:p>
-            <a:pPr algn="ctr" indent="0" marL="0">
-              <a:buNone/>
-            </a:pPr>
-            <a:r>
-              <a:rPr lang="en-US" sz="1100" b="1" dirty="0">
-                <a:solidFill>
-                  <a:srgbClr val="FFFFFF"/>
-                </a:solidFill>
-                <a:latin typeface="Aptos" pitchFamily="34" charset="0"/>
-                <a:ea typeface="Aptos" pitchFamily="34" charset="-122"/>
-                <a:cs typeface="Aptos" pitchFamily="34" charset="-120"/>
-              </a:rPr>
-              <a:t>4</a:t>
-            </a:r>
-            <a:endParaRPr lang="en-US" sz="1100" dirty="0"/>
-          </a:p>
-        </p:txBody>
-      </p:sp>
-      <p:sp>
-        <p:nvSpPr>
-          <p:cNvPr id="10" name="Text 8"/>
-          <p:cNvSpPr/>
-          <p:nvPr/>
-        </p:nvSpPr>
-        <p:spPr>
-          <a:xfrm>
-            <a:off x="640080" y="621792"/>
             <a:ext cx="10881360" cy="713232"/>
           </a:xfrm>
           <a:prstGeom prst="rect">
@@ -14653,14 +15963,14 @@
       </p:sp>
       <p:sp>
         <p:nvSpPr>
-          <p:cNvPr id="11" name="Text 9"/>
+          <p:cNvPr id="9" name="Text 7"/>
           <p:cNvSpPr/>
           <p:nvPr/>
         </p:nvSpPr>
         <p:spPr>
           <a:xfrm>
             <a:off x="868680" y="1508760"/>
-            <a:ext cx="6537960" cy="4160520"/>
+            <a:ext cx="6309360" cy="4160520"/>
           </a:xfrm>
           <a:prstGeom prst="rect">
             <a:avLst/>
@@ -14719,18 +16029,18 @@
       </p:sp>
       <p:sp>
         <p:nvSpPr>
-          <p:cNvPr id="12" name="Shape 10"/>
-          <p:cNvSpPr/>
-          <p:nvPr/>
-        </p:nvSpPr>
-        <p:spPr>
-          <a:xfrm>
-            <a:off x="7909560" y="1417320"/>
-            <a:ext cx="3154680" cy="1828800"/>
+          <p:cNvPr id="10" name="Shape 8"/>
+          <p:cNvSpPr/>
+          <p:nvPr/>
+        </p:nvSpPr>
+        <p:spPr>
+          <a:xfrm>
+            <a:off x="7635240" y="1325880"/>
+            <a:ext cx="3474720" cy="1325880"/>
           </a:xfrm>
           <a:prstGeom prst="roundRect">
             <a:avLst>
-              <a:gd name="adj" fmla="val 6000"/>
+              <a:gd name="adj" fmla="val 8276"/>
             </a:avLst>
           </a:prstGeom>
           <a:solidFill>
@@ -14746,14 +16056,14 @@
       </p:sp>
       <p:sp>
         <p:nvSpPr>
-          <p:cNvPr id="13" name="Text 11"/>
-          <p:cNvSpPr/>
-          <p:nvPr/>
-        </p:nvSpPr>
-        <p:spPr>
-          <a:xfrm>
-            <a:off x="8074152" y="1563624"/>
-            <a:ext cx="2825496" cy="256032"/>
+          <p:cNvPr id="11" name="Text 9"/>
+          <p:cNvSpPr/>
+          <p:nvPr/>
+        </p:nvSpPr>
+        <p:spPr>
+          <a:xfrm>
+            <a:off x="7799832" y="1472184"/>
+            <a:ext cx="3145536" cy="256032"/>
           </a:xfrm>
           <a:prstGeom prst="rect">
             <a:avLst/>
@@ -14777,7 +16087,7 @@
                 <a:ea typeface="Aptos" pitchFamily="34" charset="-122"/>
                 <a:cs typeface="Aptos" pitchFamily="34" charset="-120"/>
               </a:rPr>
-              <a:t>Key idea</a:t>
+              <a:t>Core concept</a:t>
             </a:r>
             <a:endParaRPr lang="en-US" sz="1300" dirty="0"/>
           </a:p>
@@ -14785,14 +16095,14 @@
       </p:sp>
       <p:sp>
         <p:nvSpPr>
-          <p:cNvPr id="14" name="Text 12"/>
-          <p:cNvSpPr/>
-          <p:nvPr/>
-        </p:nvSpPr>
-        <p:spPr>
-          <a:xfrm>
-            <a:off x="8074152" y="1920240"/>
-            <a:ext cx="2825496" cy="1188720"/>
+          <p:cNvPr id="12" name="Text 10"/>
+          <p:cNvSpPr/>
+          <p:nvPr/>
+        </p:nvSpPr>
+        <p:spPr>
+          <a:xfrm>
+            <a:off x="7799832" y="1828800"/>
+            <a:ext cx="3145536" cy="685800"/>
           </a:xfrm>
           <a:prstGeom prst="rect">
             <a:avLst/>
@@ -14826,18 +16136,159 @@
       </p:sp>
       <p:sp>
         <p:nvSpPr>
-          <p:cNvPr id="15" name="Shape 13"/>
-          <p:cNvSpPr/>
-          <p:nvPr/>
-        </p:nvSpPr>
-        <p:spPr>
-          <a:xfrm>
-            <a:off x="7909560" y="3520440"/>
-            <a:ext cx="3154680" cy="1737360"/>
+          <p:cNvPr id="13" name="Shape 11"/>
+          <p:cNvSpPr/>
+          <p:nvPr/>
+        </p:nvSpPr>
+        <p:spPr>
+          <a:xfrm>
+            <a:off x="7635240" y="2788920"/>
+            <a:ext cx="3474720" cy="1536192"/>
           </a:xfrm>
           <a:prstGeom prst="roundRect">
             <a:avLst>
-              <a:gd name="adj" fmla="val 6316"/>
+              <a:gd name="adj" fmla="val 7143"/>
+            </a:avLst>
+          </a:prstGeom>
+          <a:solidFill>
+            <a:srgbClr val="FFFFFF">
+              <a:alpha val="88000"/>
+            </a:srgbClr>
+          </a:solidFill>
+          <a:ln w="12700">
+            <a:solidFill>
+              <a:srgbClr val="D6E8F2"/>
+            </a:solidFill>
+            <a:prstDash val="solid"/>
+          </a:ln>
+        </p:spPr>
+      </p:sp>
+      <p:sp>
+        <p:nvSpPr>
+          <p:cNvPr id="14" name="Shape 12"/>
+          <p:cNvSpPr/>
+          <p:nvPr/>
+        </p:nvSpPr>
+        <p:spPr>
+          <a:xfrm>
+            <a:off x="8074152" y="3291840"/>
+            <a:ext cx="2596896" cy="749808"/>
+          </a:xfrm>
+          <a:prstGeom prst="rect">
+            <a:avLst/>
+          </a:prstGeom>
+          <a:solidFill>
+            <a:srgbClr val="EAF6F8"/>
+          </a:solidFill>
+          <a:ln w="12700">
+            <a:solidFill>
+              <a:srgbClr val="8ABBD8"/>
+            </a:solidFill>
+            <a:prstDash val="solid"/>
+          </a:ln>
+        </p:spPr>
+      </p:sp>
+      <p:sp>
+        <p:nvSpPr>
+          <p:cNvPr id="15" name="Shape 13"/>
+          <p:cNvSpPr/>
+          <p:nvPr/>
+        </p:nvSpPr>
+        <p:spPr>
+          <a:xfrm>
+            <a:off x="8202168" y="3721608"/>
+            <a:ext cx="2340864" cy="0"/>
+          </a:xfrm>
+          <a:prstGeom prst="line">
+            <a:avLst/>
+          </a:prstGeom>
+          <a:noFill/>
+          <a:ln w="19050">
+            <a:solidFill>
+              <a:srgbClr val="0068B7"/>
+            </a:solidFill>
+            <a:prstDash val="solid"/>
+          </a:ln>
+        </p:spPr>
+      </p:sp>
+      <p:sp>
+        <p:nvSpPr>
+          <p:cNvPr id="16" name="Shape 14"/>
+          <p:cNvSpPr/>
+          <p:nvPr/>
+        </p:nvSpPr>
+        <p:spPr>
+          <a:xfrm>
+            <a:off x="9198864" y="4206240"/>
+            <a:ext cx="347472" cy="347472"/>
+          </a:xfrm>
+          <a:prstGeom prst="ellipse">
+            <a:avLst/>
+          </a:prstGeom>
+          <a:solidFill>
+            <a:srgbClr val="2F8A28"/>
+          </a:solidFill>
+          <a:ln w="12700">
+            <a:solidFill>
+              <a:srgbClr val="2F8A28"/>
+            </a:solidFill>
+            <a:prstDash val="solid"/>
+          </a:ln>
+        </p:spPr>
+      </p:sp>
+      <p:sp>
+        <p:nvSpPr>
+          <p:cNvPr id="17" name="Text 15"/>
+          <p:cNvSpPr/>
+          <p:nvPr/>
+        </p:nvSpPr>
+        <p:spPr>
+          <a:xfrm>
+            <a:off x="7909560" y="3977640"/>
+            <a:ext cx="2926080" cy="182880"/>
+          </a:xfrm>
+          <a:prstGeom prst="rect">
+            <a:avLst/>
+          </a:prstGeom>
+          <a:noFill/>
+          <a:ln/>
+        </p:spPr>
+        <p:txBody>
+          <a:bodyPr wrap="square" lIns="0" tIns="0" rIns="0" bIns="0" rtlCol="0" anchor="ctr"/>
+          <a:lstStyle/>
+          <a:p>
+            <a:pPr algn="ctr" indent="0" marL="0">
+              <a:buNone/>
+            </a:pPr>
+            <a:r>
+              <a:rPr lang="en-US" sz="1000" dirty="0">
+                <a:solidFill>
+                  <a:srgbClr val="003A63"/>
+                </a:solidFill>
+                <a:latin typeface="Aptos" pitchFamily="34" charset="0"/>
+                <a:ea typeface="Aptos" pitchFamily="34" charset="-122"/>
+                <a:cs typeface="Aptos" pitchFamily="34" charset="-120"/>
+              </a:rPr>
+              <a:t>Concept to action</a:t>
+            </a:r>
+            <a:endParaRPr lang="en-US" sz="1000" dirty="0"/>
+          </a:p>
+        </p:txBody>
+      </p:sp>
+      <p:sp>
+        <p:nvSpPr>
+          <p:cNvPr id="18" name="Shape 16"/>
+          <p:cNvSpPr/>
+          <p:nvPr/>
+        </p:nvSpPr>
+        <p:spPr>
+          <a:xfrm>
+            <a:off x="7635240" y="4498848"/>
+            <a:ext cx="3474720" cy="1143000"/>
+          </a:xfrm>
+          <a:prstGeom prst="roundRect">
+            <a:avLst>
+              <a:gd name="adj" fmla="val 9600"/>
             </a:avLst>
           </a:prstGeom>
           <a:solidFill>
@@ -14853,14 +16304,14 @@
       </p:sp>
       <p:sp>
         <p:nvSpPr>
-          <p:cNvPr id="16" name="Text 14"/>
-          <p:cNvSpPr/>
-          <p:nvPr/>
-        </p:nvSpPr>
-        <p:spPr>
-          <a:xfrm>
-            <a:off x="8074152" y="3666744"/>
-            <a:ext cx="2825496" cy="256032"/>
+          <p:cNvPr id="19" name="Text 17"/>
+          <p:cNvSpPr/>
+          <p:nvPr/>
+        </p:nvSpPr>
+        <p:spPr>
+          <a:xfrm>
+            <a:off x="7799832" y="4645152"/>
+            <a:ext cx="3145536" cy="256032"/>
           </a:xfrm>
           <a:prstGeom prst="rect">
             <a:avLst/>
@@ -14884,7 +16335,7 @@
                 <a:ea typeface="Aptos" pitchFamily="34" charset="-122"/>
                 <a:cs typeface="Aptos" pitchFamily="34" charset="-120"/>
               </a:rPr>
-              <a:t>Use this for</a:t>
+              <a:t>Apply it</a:t>
             </a:r>
             <a:endParaRPr lang="en-US" sz="1300" dirty="0"/>
           </a:p>
@@ -14892,14 +16343,14 @@
       </p:sp>
       <p:sp>
         <p:nvSpPr>
-          <p:cNvPr id="17" name="Text 15"/>
-          <p:cNvSpPr/>
-          <p:nvPr/>
-        </p:nvSpPr>
-        <p:spPr>
-          <a:xfrm>
-            <a:off x="8074152" y="4023360"/>
-            <a:ext cx="2825496" cy="1097280"/>
+          <p:cNvPr id="20" name="Text 18"/>
+          <p:cNvSpPr/>
+          <p:nvPr/>
+        </p:nvSpPr>
+        <p:spPr>
+          <a:xfrm>
+            <a:off x="7799832" y="5001768"/>
+            <a:ext cx="3145536" cy="502920"/>
           </a:xfrm>
           <a:prstGeom prst="rect">
             <a:avLst/>
@@ -14925,7 +16376,7 @@
                 <a:ea typeface="Aptos" pitchFamily="34" charset="-122"/>
                 <a:cs typeface="Aptos" pitchFamily="34" charset="-120"/>
               </a:rPr>
-              <a:t>Connect the concept to public health decisions, safeguards, documentation, or implementation work.</a:t>
+              <a:t>Connect the concept to public health purpose, responsible use, required safeguards, documentation, and the next action a department should take.</a:t>
             </a:r>
             <a:endParaRPr lang="en-US" sz="1550" dirty="0"/>
           </a:p>
@@ -15099,8 +16550,8 @@
         </p:nvSpPr>
         <p:spPr>
           <a:xfrm>
-            <a:off x="9966960" y="6537960"/>
-            <a:ext cx="1645920" cy="201168"/>
+            <a:off x="9646920" y="6537960"/>
+            <a:ext cx="1965960" cy="201168"/>
           </a:xfrm>
           <a:prstGeom prst="rect">
             <a:avLst/>
@@ -15124,7 +16575,7 @@
                 <a:ea typeface="Aptos" pitchFamily="34" charset="-122"/>
                 <a:cs typeface="Aptos" pitchFamily="34" charset="-120"/>
               </a:rPr>
-              <a:t>Â© Paula Soper</a:t>
+              <a:t>Copyright Paula Soper</a:t>
             </a:r>
             <a:endParaRPr lang="en-US" sz="800" dirty="0"/>
           </a:p>
@@ -15171,77 +16622,13 @@
       </p:sp>
       <p:sp>
         <p:nvSpPr>
-          <p:cNvPr id="8" name="Shape 6"/>
+          <p:cNvPr id="8" name="Text 6"/>
           <p:cNvSpPr/>
           <p:nvPr/>
         </p:nvSpPr>
         <p:spPr>
           <a:xfrm>
             <a:off x="640080" y="658368"/>
-            <a:ext cx="420624" cy="420624"/>
-          </a:xfrm>
-          <a:prstGeom prst="ellipse">
-            <a:avLst/>
-          </a:prstGeom>
-          <a:solidFill>
-            <a:srgbClr val="0068B7"/>
-          </a:solidFill>
-          <a:ln w="12700">
-            <a:solidFill>
-              <a:srgbClr val="0068B7"/>
-            </a:solidFill>
-            <a:prstDash val="solid"/>
-          </a:ln>
-        </p:spPr>
-      </p:sp>
-      <p:sp>
-        <p:nvSpPr>
-          <p:cNvPr id="9" name="Text 7"/>
-          <p:cNvSpPr/>
-          <p:nvPr/>
-        </p:nvSpPr>
-        <p:spPr>
-          <a:xfrm>
-            <a:off x="640080" y="731520"/>
-            <a:ext cx="420624" cy="164592"/>
-          </a:xfrm>
-          <a:prstGeom prst="rect">
-            <a:avLst/>
-          </a:prstGeom>
-          <a:noFill/>
-          <a:ln/>
-        </p:spPr>
-        <p:txBody>
-          <a:bodyPr wrap="square" lIns="0" tIns="0" rIns="0" bIns="0" rtlCol="0" anchor="ctr"/>
-          <a:lstStyle/>
-          <a:p>
-            <a:pPr algn="ctr" indent="0" marL="0">
-              <a:buNone/>
-            </a:pPr>
-            <a:r>
-              <a:rPr lang="en-US" sz="1100" b="1" dirty="0">
-                <a:solidFill>
-                  <a:srgbClr val="FFFFFF"/>
-                </a:solidFill>
-                <a:latin typeface="Aptos" pitchFamily="34" charset="0"/>
-                <a:ea typeface="Aptos" pitchFamily="34" charset="-122"/>
-                <a:cs typeface="Aptos" pitchFamily="34" charset="-120"/>
-              </a:rPr>
-              <a:t>5</a:t>
-            </a:r>
-            <a:endParaRPr lang="en-US" sz="1100" dirty="0"/>
-          </a:p>
-        </p:txBody>
-      </p:sp>
-      <p:sp>
-        <p:nvSpPr>
-          <p:cNvPr id="10" name="Text 8"/>
-          <p:cNvSpPr/>
-          <p:nvPr/>
-        </p:nvSpPr>
-        <p:spPr>
-          <a:xfrm>
-            <a:off x="640080" y="621792"/>
             <a:ext cx="10881360" cy="713232"/>
           </a:xfrm>
           <a:prstGeom prst="rect">
@@ -15276,14 +16663,14 @@
       </p:sp>
       <p:sp>
         <p:nvSpPr>
-          <p:cNvPr id="11" name="Text 9"/>
+          <p:cNvPr id="9" name="Text 7"/>
           <p:cNvSpPr/>
           <p:nvPr/>
         </p:nvSpPr>
         <p:spPr>
           <a:xfrm>
             <a:off x="868680" y="1508760"/>
-            <a:ext cx="6537960" cy="4160520"/>
+            <a:ext cx="6309360" cy="4160520"/>
           </a:xfrm>
           <a:prstGeom prst="rect">
             <a:avLst/>
@@ -15342,18 +16729,18 @@
       </p:sp>
       <p:sp>
         <p:nvSpPr>
-          <p:cNvPr id="12" name="Shape 10"/>
-          <p:cNvSpPr/>
-          <p:nvPr/>
-        </p:nvSpPr>
-        <p:spPr>
-          <a:xfrm>
-            <a:off x="7909560" y="1417320"/>
-            <a:ext cx="3154680" cy="1828800"/>
+          <p:cNvPr id="10" name="Shape 8"/>
+          <p:cNvSpPr/>
+          <p:nvPr/>
+        </p:nvSpPr>
+        <p:spPr>
+          <a:xfrm>
+            <a:off x="7635240" y="1325880"/>
+            <a:ext cx="3474720" cy="1325880"/>
           </a:xfrm>
           <a:prstGeom prst="roundRect">
             <a:avLst>
-              <a:gd name="adj" fmla="val 6000"/>
+              <a:gd name="adj" fmla="val 8276"/>
             </a:avLst>
           </a:prstGeom>
           <a:solidFill>
@@ -15369,14 +16756,14 @@
       </p:sp>
       <p:sp>
         <p:nvSpPr>
-          <p:cNvPr id="13" name="Text 11"/>
-          <p:cNvSpPr/>
-          <p:nvPr/>
-        </p:nvSpPr>
-        <p:spPr>
-          <a:xfrm>
-            <a:off x="8074152" y="1563624"/>
-            <a:ext cx="2825496" cy="256032"/>
+          <p:cNvPr id="11" name="Text 9"/>
+          <p:cNvSpPr/>
+          <p:nvPr/>
+        </p:nvSpPr>
+        <p:spPr>
+          <a:xfrm>
+            <a:off x="7799832" y="1472184"/>
+            <a:ext cx="3145536" cy="256032"/>
           </a:xfrm>
           <a:prstGeom prst="rect">
             <a:avLst/>
@@ -15400,7 +16787,7 @@
                 <a:ea typeface="Aptos" pitchFamily="34" charset="-122"/>
                 <a:cs typeface="Aptos" pitchFamily="34" charset="-120"/>
               </a:rPr>
-              <a:t>Key idea</a:t>
+              <a:t>Core concept</a:t>
             </a:r>
             <a:endParaRPr lang="en-US" sz="1300" dirty="0"/>
           </a:p>
@@ -15408,14 +16795,14 @@
       </p:sp>
       <p:sp>
         <p:nvSpPr>
-          <p:cNvPr id="14" name="Text 12"/>
-          <p:cNvSpPr/>
-          <p:nvPr/>
-        </p:nvSpPr>
-        <p:spPr>
-          <a:xfrm>
-            <a:off x="8074152" y="1920240"/>
-            <a:ext cx="2825496" cy="1188720"/>
+          <p:cNvPr id="12" name="Text 10"/>
+          <p:cNvSpPr/>
+          <p:nvPr/>
+        </p:nvSpPr>
+        <p:spPr>
+          <a:xfrm>
+            <a:off x="7799832" y="1828800"/>
+            <a:ext cx="3145536" cy="685800"/>
           </a:xfrm>
           <a:prstGeom prst="rect">
             <a:avLst/>
@@ -15449,18 +16836,159 @@
       </p:sp>
       <p:sp>
         <p:nvSpPr>
-          <p:cNvPr id="15" name="Shape 13"/>
-          <p:cNvSpPr/>
-          <p:nvPr/>
-        </p:nvSpPr>
-        <p:spPr>
-          <a:xfrm>
-            <a:off x="7909560" y="3520440"/>
-            <a:ext cx="3154680" cy="1737360"/>
+          <p:cNvPr id="13" name="Shape 11"/>
+          <p:cNvSpPr/>
+          <p:nvPr/>
+        </p:nvSpPr>
+        <p:spPr>
+          <a:xfrm>
+            <a:off x="7635240" y="2788920"/>
+            <a:ext cx="3474720" cy="1536192"/>
           </a:xfrm>
           <a:prstGeom prst="roundRect">
             <a:avLst>
-              <a:gd name="adj" fmla="val 6316"/>
+              <a:gd name="adj" fmla="val 7143"/>
+            </a:avLst>
+          </a:prstGeom>
+          <a:solidFill>
+            <a:srgbClr val="FFFFFF">
+              <a:alpha val="88000"/>
+            </a:srgbClr>
+          </a:solidFill>
+          <a:ln w="12700">
+            <a:solidFill>
+              <a:srgbClr val="D6E8F2"/>
+            </a:solidFill>
+            <a:prstDash val="solid"/>
+          </a:ln>
+        </p:spPr>
+      </p:sp>
+      <p:sp>
+        <p:nvSpPr>
+          <p:cNvPr id="14" name="Shape 12"/>
+          <p:cNvSpPr/>
+          <p:nvPr/>
+        </p:nvSpPr>
+        <p:spPr>
+          <a:xfrm>
+            <a:off x="8074152" y="3291840"/>
+            <a:ext cx="2596896" cy="749808"/>
+          </a:xfrm>
+          <a:prstGeom prst="rect">
+            <a:avLst/>
+          </a:prstGeom>
+          <a:solidFill>
+            <a:srgbClr val="EAF6F8"/>
+          </a:solidFill>
+          <a:ln w="12700">
+            <a:solidFill>
+              <a:srgbClr val="8ABBD8"/>
+            </a:solidFill>
+            <a:prstDash val="solid"/>
+          </a:ln>
+        </p:spPr>
+      </p:sp>
+      <p:sp>
+        <p:nvSpPr>
+          <p:cNvPr id="15" name="Shape 13"/>
+          <p:cNvSpPr/>
+          <p:nvPr/>
+        </p:nvSpPr>
+        <p:spPr>
+          <a:xfrm>
+            <a:off x="8202168" y="3721608"/>
+            <a:ext cx="2340864" cy="0"/>
+          </a:xfrm>
+          <a:prstGeom prst="line">
+            <a:avLst/>
+          </a:prstGeom>
+          <a:noFill/>
+          <a:ln w="19050">
+            <a:solidFill>
+              <a:srgbClr val="0068B7"/>
+            </a:solidFill>
+            <a:prstDash val="solid"/>
+          </a:ln>
+        </p:spPr>
+      </p:sp>
+      <p:sp>
+        <p:nvSpPr>
+          <p:cNvPr id="16" name="Shape 14"/>
+          <p:cNvSpPr/>
+          <p:nvPr/>
+        </p:nvSpPr>
+        <p:spPr>
+          <a:xfrm>
+            <a:off x="9198864" y="4206240"/>
+            <a:ext cx="347472" cy="347472"/>
+          </a:xfrm>
+          <a:prstGeom prst="ellipse">
+            <a:avLst/>
+          </a:prstGeom>
+          <a:solidFill>
+            <a:srgbClr val="2F8A28"/>
+          </a:solidFill>
+          <a:ln w="12700">
+            <a:solidFill>
+              <a:srgbClr val="2F8A28"/>
+            </a:solidFill>
+            <a:prstDash val="solid"/>
+          </a:ln>
+        </p:spPr>
+      </p:sp>
+      <p:sp>
+        <p:nvSpPr>
+          <p:cNvPr id="17" name="Text 15"/>
+          <p:cNvSpPr/>
+          <p:nvPr/>
+        </p:nvSpPr>
+        <p:spPr>
+          <a:xfrm>
+            <a:off x="7909560" y="3977640"/>
+            <a:ext cx="2926080" cy="182880"/>
+          </a:xfrm>
+          <a:prstGeom prst="rect">
+            <a:avLst/>
+          </a:prstGeom>
+          <a:noFill/>
+          <a:ln/>
+        </p:spPr>
+        <p:txBody>
+          <a:bodyPr wrap="square" lIns="0" tIns="0" rIns="0" bIns="0" rtlCol="0" anchor="ctr"/>
+          <a:lstStyle/>
+          <a:p>
+            <a:pPr algn="ctr" indent="0" marL="0">
+              <a:buNone/>
+            </a:pPr>
+            <a:r>
+              <a:rPr lang="en-US" sz="1000" dirty="0">
+                <a:solidFill>
+                  <a:srgbClr val="003A63"/>
+                </a:solidFill>
+                <a:latin typeface="Aptos" pitchFamily="34" charset="0"/>
+                <a:ea typeface="Aptos" pitchFamily="34" charset="-122"/>
+                <a:cs typeface="Aptos" pitchFamily="34" charset="-120"/>
+              </a:rPr>
+              <a:t>Concept to action</a:t>
+            </a:r>
+            <a:endParaRPr lang="en-US" sz="1000" dirty="0"/>
+          </a:p>
+        </p:txBody>
+      </p:sp>
+      <p:sp>
+        <p:nvSpPr>
+          <p:cNvPr id="18" name="Shape 16"/>
+          <p:cNvSpPr/>
+          <p:nvPr/>
+        </p:nvSpPr>
+        <p:spPr>
+          <a:xfrm>
+            <a:off x="7635240" y="4498848"/>
+            <a:ext cx="3474720" cy="1143000"/>
+          </a:xfrm>
+          <a:prstGeom prst="roundRect">
+            <a:avLst>
+              <a:gd name="adj" fmla="val 9600"/>
             </a:avLst>
           </a:prstGeom>
           <a:solidFill>
@@ -15476,14 +17004,14 @@
       </p:sp>
       <p:sp>
         <p:nvSpPr>
-          <p:cNvPr id="16" name="Text 14"/>
-          <p:cNvSpPr/>
-          <p:nvPr/>
-        </p:nvSpPr>
-        <p:spPr>
-          <a:xfrm>
-            <a:off x="8074152" y="3666744"/>
-            <a:ext cx="2825496" cy="256032"/>
+          <p:cNvPr id="19" name="Text 17"/>
+          <p:cNvSpPr/>
+          <p:nvPr/>
+        </p:nvSpPr>
+        <p:spPr>
+          <a:xfrm>
+            <a:off x="7799832" y="4645152"/>
+            <a:ext cx="3145536" cy="256032"/>
           </a:xfrm>
           <a:prstGeom prst="rect">
             <a:avLst/>
@@ -15507,7 +17035,7 @@
                 <a:ea typeface="Aptos" pitchFamily="34" charset="-122"/>
                 <a:cs typeface="Aptos" pitchFamily="34" charset="-120"/>
               </a:rPr>
-              <a:t>Use this for</a:t>
+              <a:t>Apply it</a:t>
             </a:r>
             <a:endParaRPr lang="en-US" sz="1300" dirty="0"/>
           </a:p>
@@ -15515,14 +17043,14 @@
       </p:sp>
       <p:sp>
         <p:nvSpPr>
-          <p:cNvPr id="17" name="Text 15"/>
-          <p:cNvSpPr/>
-          <p:nvPr/>
-        </p:nvSpPr>
-        <p:spPr>
-          <a:xfrm>
-            <a:off x="8074152" y="4023360"/>
-            <a:ext cx="2825496" cy="1097280"/>
+          <p:cNvPr id="20" name="Text 18"/>
+          <p:cNvSpPr/>
+          <p:nvPr/>
+        </p:nvSpPr>
+        <p:spPr>
+          <a:xfrm>
+            <a:off x="7799832" y="5001768"/>
+            <a:ext cx="3145536" cy="502920"/>
           </a:xfrm>
           <a:prstGeom prst="rect">
             <a:avLst/>
@@ -15548,7 +17076,7 @@
                 <a:ea typeface="Aptos" pitchFamily="34" charset="-122"/>
                 <a:cs typeface="Aptos" pitchFamily="34" charset="-120"/>
               </a:rPr>
-              <a:t>Connect the concept to public health decisions, safeguards, documentation, or implementation work.</a:t>
+              <a:t>Connect the concept to public health purpose, responsible use, required safeguards, documentation, and the next action a department should take.</a:t>
             </a:r>
             <a:endParaRPr lang="en-US" sz="1550" dirty="0"/>
           </a:p>

--- a/downloads/presentations/modules/exe-410.pptx
+++ b/downloads/presentations/modules/exe-410.pptx
@@ -3425,13 +3425,11 @@
             </a:avLst>
           </a:prstGeom>
           <a:solidFill>
-            <a:srgbClr val="FFFFFF">
-              <a:alpha val="88000"/>
-            </a:srgbClr>
+            <a:srgbClr val="FFFFFF"/>
           </a:solidFill>
           <a:ln w="12700">
             <a:solidFill>
-              <a:srgbClr val="D6E8F2"/>
+              <a:srgbClr val="B9D7E6"/>
             </a:solidFill>
             <a:prstDash val="solid"/>
           </a:ln>
@@ -3439,190 +3437,112 @@
       </p:sp>
       <p:sp>
         <p:nvSpPr>
-          <p:cNvPr id="14" name="Shape 12"/>
-          <p:cNvSpPr/>
-          <p:nvPr/>
-        </p:nvSpPr>
-        <p:spPr>
-          <a:xfrm>
-            <a:off x="7891272" y="3108960"/>
-            <a:ext cx="566928" cy="566928"/>
-          </a:xfrm>
-          <a:prstGeom prst="ellipse">
-            <a:avLst/>
-          </a:prstGeom>
-          <a:solidFill>
-            <a:srgbClr val="0068B7"/>
-          </a:solidFill>
-          <a:ln w="12700">
-            <a:solidFill>
-              <a:srgbClr val="0068B7"/>
-            </a:solidFill>
-            <a:prstDash val="solid"/>
-          </a:ln>
-        </p:spPr>
-      </p:sp>
-      <p:sp>
-        <p:nvSpPr>
-          <p:cNvPr id="15" name="Shape 13"/>
-          <p:cNvSpPr/>
-          <p:nvPr/>
-        </p:nvSpPr>
-        <p:spPr>
-          <a:xfrm>
-            <a:off x="10287000" y="3108960"/>
-            <a:ext cx="566928" cy="566928"/>
-          </a:xfrm>
-          <a:prstGeom prst="ellipse">
-            <a:avLst/>
-          </a:prstGeom>
-          <a:solidFill>
-            <a:srgbClr val="2F8A28"/>
-          </a:solidFill>
-          <a:ln w="12700">
-            <a:solidFill>
-              <a:srgbClr val="2F8A28"/>
-            </a:solidFill>
-            <a:prstDash val="solid"/>
-          </a:ln>
-        </p:spPr>
+          <p:cNvPr id="14" name="Text 12"/>
+          <p:cNvSpPr/>
+          <p:nvPr/>
+        </p:nvSpPr>
+        <p:spPr>
+          <a:xfrm>
+            <a:off x="7799832" y="2935224"/>
+            <a:ext cx="3145536" cy="256032"/>
+          </a:xfrm>
+          <a:prstGeom prst="rect">
+            <a:avLst/>
+          </a:prstGeom>
+          <a:noFill/>
+          <a:ln/>
+        </p:spPr>
+        <p:txBody>
+          <a:bodyPr wrap="square" lIns="0" tIns="0" rIns="0" bIns="0" rtlCol="0" anchor="ctr"/>
+          <a:lstStyle/>
+          <a:p>
+            <a:pPr indent="0" marL="0">
+              <a:buNone/>
+            </a:pPr>
+            <a:r>
+              <a:rPr lang="en-US" sz="1300" b="1" dirty="0">
+                <a:solidFill>
+                  <a:srgbClr val="0068B7"/>
+                </a:solidFill>
+                <a:latin typeface="Aptos" pitchFamily="34" charset="0"/>
+                <a:ea typeface="Aptos" pitchFamily="34" charset="-122"/>
+                <a:cs typeface="Aptos" pitchFamily="34" charset="-120"/>
+              </a:rPr>
+              <a:t>Concept checkpoints</a:t>
+            </a:r>
+            <a:endParaRPr lang="en-US" sz="1300" dirty="0"/>
+          </a:p>
+        </p:txBody>
+      </p:sp>
+      <p:sp>
+        <p:nvSpPr>
+          <p:cNvPr id="15" name="Text 13"/>
+          <p:cNvSpPr/>
+          <p:nvPr/>
+        </p:nvSpPr>
+        <p:spPr>
+          <a:xfrm>
+            <a:off x="7818120" y="3300984"/>
+            <a:ext cx="3090672" cy="877824"/>
+          </a:xfrm>
+          <a:prstGeom prst="rect">
+            <a:avLst/>
+          </a:prstGeom>
+          <a:noFill/>
+          <a:ln/>
+        </p:spPr>
+        <p:txBody>
+          <a:bodyPr wrap="square" lIns="254" tIns="254" rIns="254" bIns="254" rtlCol="0" anchor="t">
+            <a:normAutofit/>
+          </a:bodyPr>
+          <a:lstStyle/>
+          <a:p>
+            <a:r>
+              <a:rPr lang="en-US" sz="1380" dirty="0">
+                <a:solidFill>
+                  <a:srgbClr val="17364A"/>
+                </a:solidFill>
+                <a:latin typeface="Aptos" pitchFamily="34" charset="0"/>
+                <a:ea typeface="Aptos" pitchFamily="34" charset="-122"/>
+                <a:cs typeface="Aptos" pitchFamily="34" charset="-120"/>
+              </a:rPr>
+              <a:t>Agencies can classify AI opportunities by function, such as internal productivity,.</a:t>
+            </a:r>
+            <a:endParaRPr lang="en-US" sz="1380" dirty="0"/>
+          </a:p>
+          <a:p>
+            <a:r>
+              <a:rPr lang="en-US" sz="1380" dirty="0">
+                <a:solidFill>
+                  <a:srgbClr val="17364A"/>
+                </a:solidFill>
+                <a:latin typeface="Aptos" pitchFamily="34" charset="0"/>
+                <a:ea typeface="Aptos" pitchFamily="34" charset="-122"/>
+                <a:cs typeface="Aptos" pitchFamily="34" charset="-120"/>
+              </a:rPr>
+              <a:t>These categories help leadership understand where AI activity is concentrated and whether.</a:t>
+            </a:r>
+            <a:endParaRPr lang="en-US" sz="1380" dirty="0"/>
+          </a:p>
+          <a:p>
+            <a:r>
+              <a:rPr lang="en-US" sz="1380" dirty="0">
+                <a:solidFill>
+                  <a:srgbClr val="17364A"/>
+                </a:solidFill>
+                <a:latin typeface="Aptos" pitchFamily="34" charset="0"/>
+                <a:ea typeface="Aptos" pitchFamily="34" charset="-122"/>
+                <a:cs typeface="Aptos" pitchFamily="34" charset="-120"/>
+              </a:rPr>
+              <a:t>Prioritization criteria should include mission alignment, expected public health benefit,.</a:t>
+            </a:r>
+            <a:endParaRPr lang="en-US" sz="1380" dirty="0"/>
+          </a:p>
+        </p:txBody>
       </p:sp>
       <p:sp>
         <p:nvSpPr>
           <p:cNvPr id="16" name="Shape 14"/>
-          <p:cNvSpPr/>
-          <p:nvPr/>
-        </p:nvSpPr>
-        <p:spPr>
-          <a:xfrm>
-            <a:off x="9089136" y="3456432"/>
-            <a:ext cx="566928" cy="566928"/>
-          </a:xfrm>
-          <a:prstGeom prst="ellipse">
-            <a:avLst/>
-          </a:prstGeom>
-          <a:solidFill>
-            <a:srgbClr val="6A4CA3"/>
-          </a:solidFill>
-          <a:ln w="12700">
-            <a:solidFill>
-              <a:srgbClr val="6A4CA3"/>
-            </a:solidFill>
-            <a:prstDash val="solid"/>
-          </a:ln>
-        </p:spPr>
-      </p:sp>
-      <p:sp>
-        <p:nvSpPr>
-          <p:cNvPr id="17" name="Shape 15"/>
-          <p:cNvSpPr/>
-          <p:nvPr/>
-        </p:nvSpPr>
-        <p:spPr>
-          <a:xfrm>
-            <a:off x="8385048" y="3419856"/>
-            <a:ext cx="1975104" cy="0"/>
-          </a:xfrm>
-          <a:prstGeom prst="line">
-            <a:avLst/>
-          </a:prstGeom>
-          <a:noFill/>
-          <a:ln w="25400">
-            <a:solidFill>
-              <a:srgbClr val="8ABBD8"/>
-            </a:solidFill>
-            <a:prstDash val="solid"/>
-          </a:ln>
-        </p:spPr>
-      </p:sp>
-      <p:sp>
-        <p:nvSpPr>
-          <p:cNvPr id="18" name="Shape 16"/>
-          <p:cNvSpPr/>
-          <p:nvPr/>
-        </p:nvSpPr>
-        <p:spPr>
-          <a:xfrm>
-            <a:off x="8202168" y="3630168"/>
-            <a:ext cx="1170432" cy="118872"/>
-          </a:xfrm>
-          <a:prstGeom prst="line">
-            <a:avLst/>
-          </a:prstGeom>
-          <a:noFill/>
-          <a:ln w="25400">
-            <a:solidFill>
-              <a:srgbClr val="8ABBD8"/>
-            </a:solidFill>
-            <a:prstDash val="solid"/>
-          </a:ln>
-        </p:spPr>
-      </p:sp>
-      <p:sp>
-        <p:nvSpPr>
-          <p:cNvPr id="19" name="Shape 17"/>
-          <p:cNvSpPr/>
-          <p:nvPr/>
-        </p:nvSpPr>
-        <p:spPr>
-          <a:xfrm>
-            <a:off x="10543032" y="3630168"/>
-            <a:ext cx="-1170432" cy="118872"/>
-          </a:xfrm>
-          <a:prstGeom prst="line">
-            <a:avLst/>
-          </a:prstGeom>
-          <a:noFill/>
-          <a:ln w="25400">
-            <a:solidFill>
-              <a:srgbClr val="8ABBD8"/>
-            </a:solidFill>
-            <a:prstDash val="solid"/>
-          </a:ln>
-        </p:spPr>
-      </p:sp>
-      <p:sp>
-        <p:nvSpPr>
-          <p:cNvPr id="20" name="Text 18"/>
-          <p:cNvSpPr/>
-          <p:nvPr/>
-        </p:nvSpPr>
-        <p:spPr>
-          <a:xfrm>
-            <a:off x="7863840" y="4069080"/>
-            <a:ext cx="3017520" cy="164592"/>
-          </a:xfrm>
-          <a:prstGeom prst="rect">
-            <a:avLst/>
-          </a:prstGeom>
-          <a:noFill/>
-          <a:ln/>
-        </p:spPr>
-        <p:txBody>
-          <a:bodyPr wrap="square" lIns="0" tIns="0" rIns="0" bIns="0" rtlCol="0" anchor="ctr"/>
-          <a:lstStyle/>
-          <a:p>
-            <a:pPr algn="ctr" indent="0" marL="0">
-              <a:buNone/>
-            </a:pPr>
-            <a:r>
-              <a:rPr lang="en-US" sz="900" b="1" dirty="0">
-                <a:solidFill>
-                  <a:srgbClr val="003A63"/>
-                </a:solidFill>
-                <a:latin typeface="Aptos" pitchFamily="34" charset="0"/>
-                <a:ea typeface="Aptos" pitchFamily="34" charset="-122"/>
-                <a:cs typeface="Aptos" pitchFamily="34" charset="-120"/>
-              </a:rPr>
-              <a:t>Decision rights</a:t>
-            </a:r>
-            <a:endParaRPr lang="en-US" sz="900" dirty="0"/>
-          </a:p>
-        </p:txBody>
-      </p:sp>
-      <p:sp>
-        <p:nvSpPr>
-          <p:cNvPr id="21" name="Shape 19"/>
           <p:cNvSpPr/>
           <p:nvPr/>
         </p:nvSpPr>
@@ -3649,7 +3569,7 @@
       </p:sp>
       <p:sp>
         <p:nvSpPr>
-          <p:cNvPr id="22" name="Text 20"/>
+          <p:cNvPr id="17" name="Text 15"/>
           <p:cNvSpPr/>
           <p:nvPr/>
         </p:nvSpPr>
@@ -3688,7 +3608,7 @@
       </p:sp>
       <p:sp>
         <p:nvSpPr>
-          <p:cNvPr id="23" name="Text 21"/>
+          <p:cNvPr id="18" name="Text 16"/>
           <p:cNvSpPr/>
           <p:nvPr/>
         </p:nvSpPr>
@@ -4196,13 +4116,11 @@
             </a:avLst>
           </a:prstGeom>
           <a:solidFill>
-            <a:srgbClr val="FFFFFF">
-              <a:alpha val="88000"/>
-            </a:srgbClr>
+            <a:srgbClr val="FFFFFF"/>
           </a:solidFill>
           <a:ln w="12700">
             <a:solidFill>
-              <a:srgbClr val="D6E8F2"/>
+              <a:srgbClr val="B9D7E6"/>
             </a:solidFill>
             <a:prstDash val="solid"/>
           </a:ln>
@@ -4210,26 +4128,42 @@
       </p:sp>
       <p:sp>
         <p:nvSpPr>
-          <p:cNvPr id="14" name="Shape 12"/>
-          <p:cNvSpPr/>
-          <p:nvPr/>
-        </p:nvSpPr>
-        <p:spPr>
-          <a:xfrm>
-            <a:off x="8046720" y="3108960"/>
-            <a:ext cx="2651760" cy="896112"/>
-          </a:xfrm>
-          <a:prstGeom prst="arc">
-            <a:avLst/>
-          </a:prstGeom>
-          <a:noFill/>
-          <a:ln w="25400">
-            <a:solidFill>
-              <a:srgbClr val="0068B7"/>
-            </a:solidFill>
-            <a:prstDash val="solid"/>
-          </a:ln>
-        </p:spPr>
+          <p:cNvPr id="14" name="Text 12"/>
+          <p:cNvSpPr/>
+          <p:nvPr/>
+        </p:nvSpPr>
+        <p:spPr>
+          <a:xfrm>
+            <a:off x="7799832" y="2935224"/>
+            <a:ext cx="3145536" cy="256032"/>
+          </a:xfrm>
+          <a:prstGeom prst="rect">
+            <a:avLst/>
+          </a:prstGeom>
+          <a:noFill/>
+          <a:ln/>
+        </p:spPr>
+        <p:txBody>
+          <a:bodyPr wrap="square" lIns="0" tIns="0" rIns="0" bIns="0" rtlCol="0" anchor="ctr"/>
+          <a:lstStyle/>
+          <a:p>
+            <a:pPr indent="0" marL="0">
+              <a:buNone/>
+            </a:pPr>
+            <a:r>
+              <a:rPr lang="en-US" sz="1300" b="1" dirty="0">
+                <a:solidFill>
+                  <a:srgbClr val="0068B7"/>
+                </a:solidFill>
+                <a:latin typeface="Aptos" pitchFamily="34" charset="0"/>
+                <a:ea typeface="Aptos" pitchFamily="34" charset="-122"/>
+                <a:cs typeface="Aptos" pitchFamily="34" charset="-120"/>
+              </a:rPr>
+              <a:t>Concept checkpoints</a:t>
+            </a:r>
+            <a:endParaRPr lang="en-US" sz="1300" dirty="0"/>
+          </a:p>
+        </p:txBody>
       </p:sp>
       <p:sp>
         <p:nvSpPr>
@@ -4239,102 +4173,67 @@
         </p:nvSpPr>
         <p:spPr>
           <a:xfrm>
-            <a:off x="7909560" y="3099816"/>
-            <a:ext cx="2926080" cy="256032"/>
-          </a:xfrm>
-          <a:prstGeom prst="rect">
-            <a:avLst/>
-          </a:prstGeom>
-          <a:noFill/>
-          <a:ln/>
-        </p:spPr>
-        <p:txBody>
-          <a:bodyPr wrap="square" lIns="0" tIns="0" rIns="0" bIns="0" rtlCol="0" anchor="ctr"/>
-          <a:lstStyle/>
-          <a:p>
-            <a:pPr algn="ctr" indent="0" marL="0">
-              <a:buNone/>
-            </a:pPr>
-            <a:r>
-              <a:rPr lang="en-US" sz="1500" b="1" dirty="0">
-                <a:solidFill>
-                  <a:srgbClr val="003A63"/>
-                </a:solidFill>
-                <a:latin typeface="Aptos" pitchFamily="34" charset="0"/>
-                <a:ea typeface="Aptos" pitchFamily="34" charset="-122"/>
-                <a:cs typeface="Aptos" pitchFamily="34" charset="-120"/>
-              </a:rPr>
-              <a:t>Risk</a:t>
-            </a:r>
-            <a:endParaRPr lang="en-US" sz="1500" dirty="0"/>
+            <a:off x="7818120" y="3300984"/>
+            <a:ext cx="3090672" cy="877824"/>
+          </a:xfrm>
+          <a:prstGeom prst="rect">
+            <a:avLst/>
+          </a:prstGeom>
+          <a:noFill/>
+          <a:ln/>
+        </p:spPr>
+        <p:txBody>
+          <a:bodyPr wrap="square" lIns="254" tIns="254" rIns="254" bIns="254" rtlCol="0" anchor="t">
+            <a:normAutofit/>
+          </a:bodyPr>
+          <a:lstStyle/>
+          <a:p>
+            <a:r>
+              <a:rPr lang="en-US" sz="1380" dirty="0">
+                <a:solidFill>
+                  <a:srgbClr val="17364A"/>
+                </a:solidFill>
+                <a:latin typeface="Aptos" pitchFamily="34" charset="0"/>
+                <a:ea typeface="Aptos" pitchFamily="34" charset="-122"/>
+                <a:cs typeface="Aptos" pitchFamily="34" charset="-120"/>
+              </a:rPr>
+              <a:t>A guardrail is to require every pilot to define success criteria, evaluation evidence,.</a:t>
+            </a:r>
+            <a:endParaRPr lang="en-US" sz="1380" dirty="0"/>
+          </a:p>
+          <a:p>
+            <a:r>
+              <a:rPr lang="en-US" sz="1380" dirty="0">
+                <a:solidFill>
+                  <a:srgbClr val="17364A"/>
+                </a:solidFill>
+                <a:latin typeface="Aptos" pitchFamily="34" charset="0"/>
+                <a:ea typeface="Aptos" pitchFamily="34" charset="-122"/>
+                <a:cs typeface="Aptos" pitchFamily="34" charset="-120"/>
+              </a:rPr>
+              <a:t>Another risk is inequitable prioritization.</a:t>
+            </a:r>
+            <a:endParaRPr lang="en-US" sz="1380" dirty="0"/>
+          </a:p>
+          <a:p>
+            <a:r>
+              <a:rPr lang="en-US" sz="1380" dirty="0">
+                <a:solidFill>
+                  <a:srgbClr val="17364A"/>
+                </a:solidFill>
+                <a:latin typeface="Aptos" pitchFamily="34" charset="0"/>
+                <a:ea typeface="Aptos" pitchFamily="34" charset="-122"/>
+                <a:cs typeface="Aptos" pitchFamily="34" charset="-120"/>
+              </a:rPr>
+              <a:t>Projects serving better-resourced programs may advance faster than projects addressing.</a:t>
+            </a:r>
+            <a:endParaRPr lang="en-US" sz="1380" dirty="0"/>
           </a:p>
         </p:txBody>
       </p:sp>
       <p:sp>
         <p:nvSpPr>
           <p:cNvPr id="16" name="Shape 14"/>
-          <p:cNvSpPr/>
-          <p:nvPr/>
-        </p:nvSpPr>
-        <p:spPr>
-          <a:xfrm>
-            <a:off x="8366760" y="3639312"/>
-            <a:ext cx="2011680" cy="0"/>
-          </a:xfrm>
-          <a:prstGeom prst="line">
-            <a:avLst/>
-          </a:prstGeom>
-          <a:noFill/>
-          <a:ln w="63500">
-            <a:solidFill>
-              <a:srgbClr val="2F8A28"/>
-            </a:solidFill>
-            <a:prstDash val="solid"/>
-          </a:ln>
-        </p:spPr>
-      </p:sp>
-      <p:sp>
-        <p:nvSpPr>
-          <p:cNvPr id="17" name="Text 15"/>
-          <p:cNvSpPr/>
-          <p:nvPr/>
-        </p:nvSpPr>
-        <p:spPr>
-          <a:xfrm>
-            <a:off x="7909560" y="3849624"/>
-            <a:ext cx="2926080" cy="164592"/>
-          </a:xfrm>
-          <a:prstGeom prst="rect">
-            <a:avLst/>
-          </a:prstGeom>
-          <a:noFill/>
-          <a:ln/>
-        </p:spPr>
-        <p:txBody>
-          <a:bodyPr wrap="square" lIns="0" tIns="0" rIns="0" bIns="0" rtlCol="0" anchor="ctr"/>
-          <a:lstStyle/>
-          <a:p>
-            <a:pPr algn="ctr" indent="0" marL="0">
-              <a:buNone/>
-            </a:pPr>
-            <a:r>
-              <a:rPr lang="en-US" sz="900" dirty="0">
-                <a:solidFill>
-                  <a:srgbClr val="003A63"/>
-                </a:solidFill>
-                <a:latin typeface="Aptos" pitchFamily="34" charset="0"/>
-                <a:ea typeface="Aptos" pitchFamily="34" charset="-122"/>
-                <a:cs typeface="Aptos" pitchFamily="34" charset="-120"/>
-              </a:rPr>
-              <a:t>Human review</a:t>
-            </a:r>
-            <a:endParaRPr lang="en-US" sz="900" dirty="0"/>
-          </a:p>
-        </p:txBody>
-      </p:sp>
-      <p:sp>
-        <p:nvSpPr>
-          <p:cNvPr id="18" name="Shape 16"/>
           <p:cNvSpPr/>
           <p:nvPr/>
         </p:nvSpPr>
@@ -4361,7 +4260,7 @@
       </p:sp>
       <p:sp>
         <p:nvSpPr>
-          <p:cNvPr id="19" name="Text 17"/>
+          <p:cNvPr id="17" name="Text 15"/>
           <p:cNvSpPr/>
           <p:nvPr/>
         </p:nvSpPr>
@@ -4400,7 +4299,7 @@
       </p:sp>
       <p:sp>
         <p:nvSpPr>
-          <p:cNvPr id="20" name="Text 18"/>
+          <p:cNvPr id="18" name="Text 16"/>
           <p:cNvSpPr/>
           <p:nvPr/>
         </p:nvSpPr>
@@ -4908,13 +4807,11 @@
             </a:avLst>
           </a:prstGeom>
           <a:solidFill>
-            <a:srgbClr val="FFFFFF">
-              <a:alpha val="88000"/>
-            </a:srgbClr>
+            <a:srgbClr val="FFFFFF"/>
           </a:solidFill>
           <a:ln w="12700">
             <a:solidFill>
-              <a:srgbClr val="D6E8F2"/>
+              <a:srgbClr val="B9D7E6"/>
             </a:solidFill>
             <a:prstDash val="solid"/>
           </a:ln>
@@ -4922,30 +4819,42 @@
       </p:sp>
       <p:sp>
         <p:nvSpPr>
-          <p:cNvPr id="14" name="Shape 12"/>
-          <p:cNvSpPr/>
-          <p:nvPr/>
-        </p:nvSpPr>
-        <p:spPr>
-          <a:xfrm>
-            <a:off x="7927848" y="3319272"/>
-            <a:ext cx="792480" cy="749808"/>
-          </a:xfrm>
-          <a:prstGeom prst="roundRect">
-            <a:avLst>
-              <a:gd name="adj" fmla="val 14634"/>
-            </a:avLst>
-          </a:prstGeom>
-          <a:solidFill>
-            <a:srgbClr val="0068B7"/>
-          </a:solidFill>
-          <a:ln w="12700">
-            <a:solidFill>
-              <a:srgbClr val="0068B7"/>
-            </a:solidFill>
-            <a:prstDash val="solid"/>
-          </a:ln>
-        </p:spPr>
+          <p:cNvPr id="14" name="Text 12"/>
+          <p:cNvSpPr/>
+          <p:nvPr/>
+        </p:nvSpPr>
+        <p:spPr>
+          <a:xfrm>
+            <a:off x="7799832" y="2935224"/>
+            <a:ext cx="3145536" cy="256032"/>
+          </a:xfrm>
+          <a:prstGeom prst="rect">
+            <a:avLst/>
+          </a:prstGeom>
+          <a:noFill/>
+          <a:ln/>
+        </p:spPr>
+        <p:txBody>
+          <a:bodyPr wrap="square" lIns="0" tIns="0" rIns="0" bIns="0" rtlCol="0" anchor="ctr"/>
+          <a:lstStyle/>
+          <a:p>
+            <a:pPr indent="0" marL="0">
+              <a:buNone/>
+            </a:pPr>
+            <a:r>
+              <a:rPr lang="en-US" sz="1300" b="1" dirty="0">
+                <a:solidFill>
+                  <a:srgbClr val="0068B7"/>
+                </a:solidFill>
+                <a:latin typeface="Aptos" pitchFamily="34" charset="0"/>
+                <a:ea typeface="Aptos" pitchFamily="34" charset="-122"/>
+                <a:cs typeface="Aptos" pitchFamily="34" charset="-120"/>
+              </a:rPr>
+              <a:t>Concept checkpoints</a:t>
+            </a:r>
+            <a:endParaRPr lang="en-US" sz="1300" dirty="0"/>
+          </a:p>
+        </p:txBody>
       </p:sp>
       <p:sp>
         <p:nvSpPr>
@@ -4955,240 +4864,53 @@
         </p:nvSpPr>
         <p:spPr>
           <a:xfrm>
-            <a:off x="8001000" y="3511296"/>
-            <a:ext cx="646176" cy="310896"/>
-          </a:xfrm>
-          <a:prstGeom prst="rect">
-            <a:avLst/>
-          </a:prstGeom>
-          <a:noFill/>
-          <a:ln/>
-        </p:spPr>
-        <p:txBody>
-          <a:bodyPr wrap="square" lIns="0" tIns="0" rIns="0" bIns="0" rtlCol="0" anchor="ctr">
+            <a:off x="7818120" y="3300984"/>
+            <a:ext cx="3090672" cy="877824"/>
+          </a:xfrm>
+          <a:prstGeom prst="rect">
+            <a:avLst/>
+          </a:prstGeom>
+          <a:noFill/>
+          <a:ln/>
+        </p:spPr>
+        <p:txBody>
+          <a:bodyPr wrap="square" lIns="254" tIns="254" rIns="254" bIns="254" rtlCol="0" anchor="t">
             <a:normAutofit/>
           </a:bodyPr>
           <a:lstStyle/>
           <a:p>
-            <a:pPr algn="ctr" indent="0" marL="0">
-              <a:buNone/>
-            </a:pPr>
-            <a:r>
-              <a:rPr lang="en-US" sz="1500" b="1" dirty="0">
-                <a:solidFill>
-                  <a:srgbClr val="FFFFFF"/>
-                </a:solidFill>
-                <a:latin typeface="Aptos" pitchFamily="34" charset="0"/>
-                <a:ea typeface="Aptos" pitchFamily="34" charset="-122"/>
-                <a:cs typeface="Aptos" pitchFamily="34" charset="-120"/>
-              </a:rPr>
-              <a:t>Plan</a:t>
-            </a:r>
-            <a:endParaRPr lang="en-US" sz="1500" dirty="0"/>
+            <a:r>
+              <a:rPr lang="en-US" sz="1380" dirty="0">
+                <a:solidFill>
+                  <a:srgbClr val="17364A"/>
+                </a:solidFill>
+                <a:latin typeface="Aptos" pitchFamily="34" charset="0"/>
+                <a:ea typeface="Aptos" pitchFamily="34" charset="-122"/>
+                <a:cs typeface="Aptos" pitchFamily="34" charset="-120"/>
+              </a:rPr>
+              <a:t>Agentic workflows may be deferred until governance has defined decision rights, access.</a:t>
+            </a:r>
+            <a:endParaRPr lang="en-US" sz="1380" dirty="0"/>
+          </a:p>
+          <a:p>
+            <a:r>
+              <a:rPr lang="en-US" sz="1380" dirty="0">
+                <a:solidFill>
+                  <a:srgbClr val="17364A"/>
+                </a:solidFill>
+                <a:latin typeface="Aptos" pitchFamily="34" charset="0"/>
+                <a:ea typeface="Aptos" pitchFamily="34" charset="-122"/>
+                <a:cs typeface="Aptos" pitchFamily="34" charset="-120"/>
+              </a:rPr>
+              <a:t>Portfolio strategy helps leaders sequence AI adoption responsibly.</a:t>
+            </a:r>
+            <a:endParaRPr lang="en-US" sz="1380" dirty="0"/>
           </a:p>
         </p:txBody>
       </p:sp>
       <p:sp>
         <p:nvSpPr>
           <p:cNvPr id="16" name="Shape 14"/>
-          <p:cNvSpPr/>
-          <p:nvPr/>
-        </p:nvSpPr>
-        <p:spPr>
-          <a:xfrm>
-            <a:off x="8976360" y="3319272"/>
-            <a:ext cx="792480" cy="749808"/>
-          </a:xfrm>
-          <a:prstGeom prst="roundRect">
-            <a:avLst>
-              <a:gd name="adj" fmla="val 14634"/>
-            </a:avLst>
-          </a:prstGeom>
-          <a:solidFill>
-            <a:srgbClr val="2F8A28"/>
-          </a:solidFill>
-          <a:ln w="12700">
-            <a:solidFill>
-              <a:srgbClr val="2F8A28"/>
-            </a:solidFill>
-            <a:prstDash val="solid"/>
-          </a:ln>
-        </p:spPr>
-      </p:sp>
-      <p:sp>
-        <p:nvSpPr>
-          <p:cNvPr id="17" name="Text 15"/>
-          <p:cNvSpPr/>
-          <p:nvPr/>
-        </p:nvSpPr>
-        <p:spPr>
-          <a:xfrm>
-            <a:off x="9049512" y="3511296"/>
-            <a:ext cx="646176" cy="310896"/>
-          </a:xfrm>
-          <a:prstGeom prst="rect">
-            <a:avLst/>
-          </a:prstGeom>
-          <a:noFill/>
-          <a:ln/>
-        </p:spPr>
-        <p:txBody>
-          <a:bodyPr wrap="square" lIns="0" tIns="0" rIns="0" bIns="0" rtlCol="0" anchor="ctr">
-            <a:normAutofit/>
-          </a:bodyPr>
-          <a:lstStyle/>
-          <a:p>
-            <a:pPr algn="ctr" indent="0" marL="0">
-              <a:buNone/>
-            </a:pPr>
-            <a:r>
-              <a:rPr lang="en-US" sz="1500" b="1" dirty="0">
-                <a:solidFill>
-                  <a:srgbClr val="FFFFFF"/>
-                </a:solidFill>
-                <a:latin typeface="Aptos" pitchFamily="34" charset="0"/>
-                <a:ea typeface="Aptos" pitchFamily="34" charset="-122"/>
-                <a:cs typeface="Aptos" pitchFamily="34" charset="-120"/>
-              </a:rPr>
-              <a:t>Do</a:t>
-            </a:r>
-            <a:endParaRPr lang="en-US" sz="1500" dirty="0"/>
-          </a:p>
-        </p:txBody>
-      </p:sp>
-      <p:sp>
-        <p:nvSpPr>
-          <p:cNvPr id="18" name="Shape 16"/>
-          <p:cNvSpPr/>
-          <p:nvPr/>
-        </p:nvSpPr>
-        <p:spPr>
-          <a:xfrm>
-            <a:off x="10024872" y="3319272"/>
-            <a:ext cx="792480" cy="749808"/>
-          </a:xfrm>
-          <a:prstGeom prst="roundRect">
-            <a:avLst>
-              <a:gd name="adj" fmla="val 14634"/>
-            </a:avLst>
-          </a:prstGeom>
-          <a:solidFill>
-            <a:srgbClr val="D69A2D"/>
-          </a:solidFill>
-          <a:ln w="12700">
-            <a:solidFill>
-              <a:srgbClr val="D69A2D"/>
-            </a:solidFill>
-            <a:prstDash val="solid"/>
-          </a:ln>
-        </p:spPr>
-      </p:sp>
-      <p:sp>
-        <p:nvSpPr>
-          <p:cNvPr id="19" name="Text 17"/>
-          <p:cNvSpPr/>
-          <p:nvPr/>
-        </p:nvSpPr>
-        <p:spPr>
-          <a:xfrm>
-            <a:off x="10098024" y="3511296"/>
-            <a:ext cx="646176" cy="310896"/>
-          </a:xfrm>
-          <a:prstGeom prst="rect">
-            <a:avLst/>
-          </a:prstGeom>
-          <a:noFill/>
-          <a:ln/>
-        </p:spPr>
-        <p:txBody>
-          <a:bodyPr wrap="square" lIns="0" tIns="0" rIns="0" bIns="0" rtlCol="0" anchor="ctr">
-            <a:normAutofit/>
-          </a:bodyPr>
-          <a:lstStyle/>
-          <a:p>
-            <a:pPr algn="ctr" indent="0" marL="0">
-              <a:buNone/>
-            </a:pPr>
-            <a:r>
-              <a:rPr lang="en-US" sz="1500" b="1" dirty="0">
-                <a:solidFill>
-                  <a:srgbClr val="FFFFFF"/>
-                </a:solidFill>
-                <a:latin typeface="Aptos" pitchFamily="34" charset="0"/>
-                <a:ea typeface="Aptos" pitchFamily="34" charset="-122"/>
-                <a:cs typeface="Aptos" pitchFamily="34" charset="-120"/>
-              </a:rPr>
-              <a:t>Review</a:t>
-            </a:r>
-            <a:endParaRPr lang="en-US" sz="1500" dirty="0"/>
-          </a:p>
-        </p:txBody>
-      </p:sp>
-      <p:sp>
-        <p:nvSpPr>
-          <p:cNvPr id="20" name="Shape 18"/>
-          <p:cNvSpPr/>
-          <p:nvPr/>
-        </p:nvSpPr>
-        <p:spPr>
-          <a:xfrm>
-            <a:off x="8293608" y="4389120"/>
-            <a:ext cx="2157984" cy="0"/>
-          </a:xfrm>
-          <a:prstGeom prst="line">
-            <a:avLst/>
-          </a:prstGeom>
-          <a:noFill/>
-          <a:ln w="25400">
-            <a:solidFill>
-              <a:srgbClr val="8ABBD8"/>
-            </a:solidFill>
-            <a:prstDash val="solid"/>
-          </a:ln>
-        </p:spPr>
-      </p:sp>
-      <p:sp>
-        <p:nvSpPr>
-          <p:cNvPr id="21" name="Text 19"/>
-          <p:cNvSpPr/>
-          <p:nvPr/>
-        </p:nvSpPr>
-        <p:spPr>
-          <a:xfrm>
-            <a:off x="7909560" y="3977640"/>
-            <a:ext cx="2926080" cy="182880"/>
-          </a:xfrm>
-          <a:prstGeom prst="rect">
-            <a:avLst/>
-          </a:prstGeom>
-          <a:noFill/>
-          <a:ln/>
-        </p:spPr>
-        <p:txBody>
-          <a:bodyPr wrap="square" lIns="0" tIns="0" rIns="0" bIns="0" rtlCol="0" anchor="ctr"/>
-          <a:lstStyle/>
-          <a:p>
-            <a:pPr algn="ctr" indent="0" marL="0">
-              <a:buNone/>
-            </a:pPr>
-            <a:r>
-              <a:rPr lang="en-US" sz="1000" dirty="0">
-                <a:solidFill>
-                  <a:srgbClr val="003A63"/>
-                </a:solidFill>
-                <a:latin typeface="Aptos" pitchFamily="34" charset="0"/>
-                <a:ea typeface="Aptos" pitchFamily="34" charset="-122"/>
-                <a:cs typeface="Aptos" pitchFamily="34" charset="-120"/>
-              </a:rPr>
-              <a:t>Dependencies visible</a:t>
-            </a:r>
-            <a:endParaRPr lang="en-US" sz="1000" dirty="0"/>
-          </a:p>
-        </p:txBody>
-      </p:sp>
-      <p:sp>
-        <p:nvSpPr>
-          <p:cNvPr id="22" name="Shape 20"/>
           <p:cNvSpPr/>
           <p:nvPr/>
         </p:nvSpPr>
@@ -5215,7 +4937,7 @@
       </p:sp>
       <p:sp>
         <p:nvSpPr>
-          <p:cNvPr id="23" name="Text 21"/>
+          <p:cNvPr id="17" name="Text 15"/>
           <p:cNvSpPr/>
           <p:nvPr/>
         </p:nvSpPr>
@@ -5254,7 +4976,7 @@
       </p:sp>
       <p:sp>
         <p:nvSpPr>
-          <p:cNvPr id="24" name="Text 22"/>
+          <p:cNvPr id="18" name="Text 16"/>
           <p:cNvSpPr/>
           <p:nvPr/>
         </p:nvSpPr>
@@ -5762,13 +5484,11 @@
             </a:avLst>
           </a:prstGeom>
           <a:solidFill>
-            <a:srgbClr val="FFFFFF">
-              <a:alpha val="88000"/>
-            </a:srgbClr>
+            <a:srgbClr val="FFFFFF"/>
           </a:solidFill>
           <a:ln w="12700">
             <a:solidFill>
-              <a:srgbClr val="D6E8F2"/>
+              <a:srgbClr val="B9D7E6"/>
             </a:solidFill>
             <a:prstDash val="solid"/>
           </a:ln>
@@ -5776,119 +5496,112 @@
       </p:sp>
       <p:sp>
         <p:nvSpPr>
-          <p:cNvPr id="14" name="Shape 12"/>
-          <p:cNvSpPr/>
-          <p:nvPr/>
-        </p:nvSpPr>
-        <p:spPr>
-          <a:xfrm>
-            <a:off x="8074152" y="3291840"/>
-            <a:ext cx="2596896" cy="749808"/>
-          </a:xfrm>
-          <a:prstGeom prst="rect">
-            <a:avLst/>
-          </a:prstGeom>
-          <a:solidFill>
-            <a:srgbClr val="EAF6F8"/>
-          </a:solidFill>
-          <a:ln w="12700">
-            <a:solidFill>
-              <a:srgbClr val="8ABBD8"/>
-            </a:solidFill>
-            <a:prstDash val="solid"/>
-          </a:ln>
-        </p:spPr>
-      </p:sp>
-      <p:sp>
-        <p:nvSpPr>
-          <p:cNvPr id="15" name="Shape 13"/>
-          <p:cNvSpPr/>
-          <p:nvPr/>
-        </p:nvSpPr>
-        <p:spPr>
-          <a:xfrm>
-            <a:off x="8202168" y="3721608"/>
-            <a:ext cx="2340864" cy="0"/>
-          </a:xfrm>
-          <a:prstGeom prst="line">
-            <a:avLst/>
-          </a:prstGeom>
-          <a:noFill/>
-          <a:ln w="19050">
-            <a:solidFill>
-              <a:srgbClr val="0068B7"/>
-            </a:solidFill>
-            <a:prstDash val="solid"/>
-          </a:ln>
-        </p:spPr>
+          <p:cNvPr id="14" name="Text 12"/>
+          <p:cNvSpPr/>
+          <p:nvPr/>
+        </p:nvSpPr>
+        <p:spPr>
+          <a:xfrm>
+            <a:off x="7799832" y="2935224"/>
+            <a:ext cx="3145536" cy="256032"/>
+          </a:xfrm>
+          <a:prstGeom prst="rect">
+            <a:avLst/>
+          </a:prstGeom>
+          <a:noFill/>
+          <a:ln/>
+        </p:spPr>
+        <p:txBody>
+          <a:bodyPr wrap="square" lIns="0" tIns="0" rIns="0" bIns="0" rtlCol="0" anchor="ctr"/>
+          <a:lstStyle/>
+          <a:p>
+            <a:pPr indent="0" marL="0">
+              <a:buNone/>
+            </a:pPr>
+            <a:r>
+              <a:rPr lang="en-US" sz="1300" b="1" dirty="0">
+                <a:solidFill>
+                  <a:srgbClr val="0068B7"/>
+                </a:solidFill>
+                <a:latin typeface="Aptos" pitchFamily="34" charset="0"/>
+                <a:ea typeface="Aptos" pitchFamily="34" charset="-122"/>
+                <a:cs typeface="Aptos" pitchFamily="34" charset="-120"/>
+              </a:rPr>
+              <a:t>Concept checkpoints</a:t>
+            </a:r>
+            <a:endParaRPr lang="en-US" sz="1300" dirty="0"/>
+          </a:p>
+        </p:txBody>
+      </p:sp>
+      <p:sp>
+        <p:nvSpPr>
+          <p:cNvPr id="15" name="Text 13"/>
+          <p:cNvSpPr/>
+          <p:nvPr/>
+        </p:nvSpPr>
+        <p:spPr>
+          <a:xfrm>
+            <a:off x="7818120" y="3300984"/>
+            <a:ext cx="3090672" cy="877824"/>
+          </a:xfrm>
+          <a:prstGeom prst="rect">
+            <a:avLst/>
+          </a:prstGeom>
+          <a:noFill/>
+          <a:ln/>
+        </p:spPr>
+        <p:txBody>
+          <a:bodyPr wrap="square" lIns="254" tIns="254" rIns="254" bIns="254" rtlCol="0" anchor="t">
+            <a:normAutofit/>
+          </a:bodyPr>
+          <a:lstStyle/>
+          <a:p>
+            <a:r>
+              <a:rPr lang="en-US" sz="1380" dirty="0">
+                <a:solidFill>
+                  <a:srgbClr val="17364A"/>
+                </a:solidFill>
+                <a:latin typeface="Aptos" pitchFamily="34" charset="0"/>
+                <a:ea typeface="Aptos" pitchFamily="34" charset="-122"/>
+                <a:cs typeface="Aptos" pitchFamily="34" charset="-120"/>
+              </a:rPr>
+              <a:t>Which current or proposed AI use case in your agency raises this leadership or governance.</a:t>
+            </a:r>
+            <a:endParaRPr lang="en-US" sz="1380" dirty="0"/>
+          </a:p>
+          <a:p>
+            <a:r>
+              <a:rPr lang="en-US" sz="1380" dirty="0">
+                <a:solidFill>
+                  <a:srgbClr val="17364A"/>
+                </a:solidFill>
+                <a:latin typeface="Aptos" pitchFamily="34" charset="0"/>
+                <a:ea typeface="Aptos" pitchFamily="34" charset="-122"/>
+                <a:cs typeface="Aptos" pitchFamily="34" charset="-120"/>
+              </a:rPr>
+              <a:t>Who currently has authority to make decisions about this issue, and is that authority.</a:t>
+            </a:r>
+            <a:endParaRPr lang="en-US" sz="1380" dirty="0"/>
+          </a:p>
+          <a:p>
+            <a:r>
+              <a:rPr lang="en-US" sz="1380" dirty="0">
+                <a:solidFill>
+                  <a:srgbClr val="17364A"/>
+                </a:solidFill>
+                <a:latin typeface="Aptos" pitchFamily="34" charset="0"/>
+                <a:ea typeface="Aptos" pitchFamily="34" charset="-122"/>
+                <a:cs typeface="Aptos" pitchFamily="34" charset="-120"/>
+              </a:rPr>
+              <a:t>What evidence would governance or leadership need before approving the use case?</a:t>
+            </a:r>
+            <a:endParaRPr lang="en-US" sz="1380" dirty="0"/>
+          </a:p>
+        </p:txBody>
       </p:sp>
       <p:sp>
         <p:nvSpPr>
           <p:cNvPr id="16" name="Shape 14"/>
-          <p:cNvSpPr/>
-          <p:nvPr/>
-        </p:nvSpPr>
-        <p:spPr>
-          <a:xfrm>
-            <a:off x="9198864" y="4206240"/>
-            <a:ext cx="347472" cy="347472"/>
-          </a:xfrm>
-          <a:prstGeom prst="ellipse">
-            <a:avLst/>
-          </a:prstGeom>
-          <a:solidFill>
-            <a:srgbClr val="2F8A28"/>
-          </a:solidFill>
-          <a:ln w="12700">
-            <a:solidFill>
-              <a:srgbClr val="2F8A28"/>
-            </a:solidFill>
-            <a:prstDash val="solid"/>
-          </a:ln>
-        </p:spPr>
-      </p:sp>
-      <p:sp>
-        <p:nvSpPr>
-          <p:cNvPr id="17" name="Text 15"/>
-          <p:cNvSpPr/>
-          <p:nvPr/>
-        </p:nvSpPr>
-        <p:spPr>
-          <a:xfrm>
-            <a:off x="7909560" y="3977640"/>
-            <a:ext cx="2926080" cy="182880"/>
-          </a:xfrm>
-          <a:prstGeom prst="rect">
-            <a:avLst/>
-          </a:prstGeom>
-          <a:noFill/>
-          <a:ln/>
-        </p:spPr>
-        <p:txBody>
-          <a:bodyPr wrap="square" lIns="0" tIns="0" rIns="0" bIns="0" rtlCol="0" anchor="ctr"/>
-          <a:lstStyle/>
-          <a:p>
-            <a:pPr algn="ctr" indent="0" marL="0">
-              <a:buNone/>
-            </a:pPr>
-            <a:r>
-              <a:rPr lang="en-US" sz="1000" dirty="0">
-                <a:solidFill>
-                  <a:srgbClr val="003A63"/>
-                </a:solidFill>
-                <a:latin typeface="Aptos" pitchFamily="34" charset="0"/>
-                <a:ea typeface="Aptos" pitchFamily="34" charset="-122"/>
-                <a:cs typeface="Aptos" pitchFamily="34" charset="-120"/>
-              </a:rPr>
-              <a:t>Concept to action</a:t>
-            </a:r>
-            <a:endParaRPr lang="en-US" sz="1000" dirty="0"/>
-          </a:p>
-        </p:txBody>
-      </p:sp>
-      <p:sp>
-        <p:nvSpPr>
-          <p:cNvPr id="18" name="Shape 16"/>
           <p:cNvSpPr/>
           <p:nvPr/>
         </p:nvSpPr>
@@ -5915,7 +5628,7 @@
       </p:sp>
       <p:sp>
         <p:nvSpPr>
-          <p:cNvPr id="19" name="Text 17"/>
+          <p:cNvPr id="17" name="Text 15"/>
           <p:cNvSpPr/>
           <p:nvPr/>
         </p:nvSpPr>
@@ -5954,7 +5667,7 @@
       </p:sp>
       <p:sp>
         <p:nvSpPr>
-          <p:cNvPr id="20" name="Text 18"/>
+          <p:cNvPr id="18" name="Text 16"/>
           <p:cNvSpPr/>
           <p:nvPr/>
         </p:nvSpPr>
@@ -6448,13 +6161,11 @@
             </a:avLst>
           </a:prstGeom>
           <a:solidFill>
-            <a:srgbClr val="FFFFFF">
-              <a:alpha val="88000"/>
-            </a:srgbClr>
+            <a:srgbClr val="FFFFFF"/>
           </a:solidFill>
           <a:ln w="12700">
             <a:solidFill>
-              <a:srgbClr val="D6E8F2"/>
+              <a:srgbClr val="B9D7E6"/>
             </a:solidFill>
             <a:prstDash val="solid"/>
           </a:ln>
@@ -6462,119 +6173,98 @@
       </p:sp>
       <p:sp>
         <p:nvSpPr>
-          <p:cNvPr id="14" name="Shape 12"/>
-          <p:cNvSpPr/>
-          <p:nvPr/>
-        </p:nvSpPr>
-        <p:spPr>
-          <a:xfrm>
-            <a:off x="8074152" y="3291840"/>
-            <a:ext cx="2596896" cy="749808"/>
-          </a:xfrm>
-          <a:prstGeom prst="rect">
-            <a:avLst/>
-          </a:prstGeom>
-          <a:solidFill>
-            <a:srgbClr val="EAF6F8"/>
-          </a:solidFill>
-          <a:ln w="12700">
-            <a:solidFill>
-              <a:srgbClr val="8ABBD8"/>
-            </a:solidFill>
-            <a:prstDash val="solid"/>
-          </a:ln>
-        </p:spPr>
-      </p:sp>
-      <p:sp>
-        <p:nvSpPr>
-          <p:cNvPr id="15" name="Shape 13"/>
-          <p:cNvSpPr/>
-          <p:nvPr/>
-        </p:nvSpPr>
-        <p:spPr>
-          <a:xfrm>
-            <a:off x="8202168" y="3721608"/>
-            <a:ext cx="2340864" cy="0"/>
-          </a:xfrm>
-          <a:prstGeom prst="line">
-            <a:avLst/>
-          </a:prstGeom>
-          <a:noFill/>
-          <a:ln w="19050">
-            <a:solidFill>
-              <a:srgbClr val="0068B7"/>
-            </a:solidFill>
-            <a:prstDash val="solid"/>
-          </a:ln>
-        </p:spPr>
+          <p:cNvPr id="14" name="Text 12"/>
+          <p:cNvSpPr/>
+          <p:nvPr/>
+        </p:nvSpPr>
+        <p:spPr>
+          <a:xfrm>
+            <a:off x="7799832" y="2935224"/>
+            <a:ext cx="3145536" cy="256032"/>
+          </a:xfrm>
+          <a:prstGeom prst="rect">
+            <a:avLst/>
+          </a:prstGeom>
+          <a:noFill/>
+          <a:ln/>
+        </p:spPr>
+        <p:txBody>
+          <a:bodyPr wrap="square" lIns="0" tIns="0" rIns="0" bIns="0" rtlCol="0" anchor="ctr"/>
+          <a:lstStyle/>
+          <a:p>
+            <a:pPr indent="0" marL="0">
+              <a:buNone/>
+            </a:pPr>
+            <a:r>
+              <a:rPr lang="en-US" sz="1300" b="1" dirty="0">
+                <a:solidFill>
+                  <a:srgbClr val="0068B7"/>
+                </a:solidFill>
+                <a:latin typeface="Aptos" pitchFamily="34" charset="0"/>
+                <a:ea typeface="Aptos" pitchFamily="34" charset="-122"/>
+                <a:cs typeface="Aptos" pitchFamily="34" charset="-120"/>
+              </a:rPr>
+              <a:t>Concept checkpoints</a:t>
+            </a:r>
+            <a:endParaRPr lang="en-US" sz="1300" dirty="0"/>
+          </a:p>
+        </p:txBody>
+      </p:sp>
+      <p:sp>
+        <p:nvSpPr>
+          <p:cNvPr id="15" name="Text 13"/>
+          <p:cNvSpPr/>
+          <p:nvPr/>
+        </p:nvSpPr>
+        <p:spPr>
+          <a:xfrm>
+            <a:off x="7818120" y="3300984"/>
+            <a:ext cx="3090672" cy="877824"/>
+          </a:xfrm>
+          <a:prstGeom prst="rect">
+            <a:avLst/>
+          </a:prstGeom>
+          <a:noFill/>
+          <a:ln/>
+        </p:spPr>
+        <p:txBody>
+          <a:bodyPr wrap="square" lIns="254" tIns="254" rIns="254" bIns="254" rtlCol="0" anchor="t">
+            <a:normAutofit/>
+          </a:bodyPr>
+          <a:lstStyle/>
+          <a:p>
+            <a:r>
+              <a:rPr lang="en-US" sz="1380" dirty="0">
+                <a:solidFill>
+                  <a:srgbClr val="17364A"/>
+                </a:solidFill>
+                <a:latin typeface="Aptos" pitchFamily="34" charset="0"/>
+                <a:ea typeface="Aptos" pitchFamily="34" charset="-122"/>
+                <a:cs typeface="Aptos" pitchFamily="34" charset="-120"/>
+              </a:rPr>
+              <a:t>Which staff, partners, or communities would be affected if this issue were handled poorly?</a:t>
+            </a:r>
+            <a:endParaRPr lang="en-US" sz="1380" dirty="0"/>
+          </a:p>
+          <a:p>
+            <a:r>
+              <a:rPr lang="en-US" sz="1380" dirty="0">
+                <a:solidFill>
+                  <a:srgbClr val="17364A"/>
+                </a:solidFill>
+                <a:latin typeface="Aptos" pitchFamily="34" charset="0"/>
+                <a:ea typeface="Aptos" pitchFamily="34" charset="-122"/>
+                <a:cs typeface="Aptos" pitchFamily="34" charset="-120"/>
+              </a:rPr>
+              <a:t>What policy, process, or artifact should be created or updated after this module?</a:t>
+            </a:r>
+            <a:endParaRPr lang="en-US" sz="1380" dirty="0"/>
+          </a:p>
+        </p:txBody>
       </p:sp>
       <p:sp>
         <p:nvSpPr>
           <p:cNvPr id="16" name="Shape 14"/>
-          <p:cNvSpPr/>
-          <p:nvPr/>
-        </p:nvSpPr>
-        <p:spPr>
-          <a:xfrm>
-            <a:off x="9198864" y="4206240"/>
-            <a:ext cx="347472" cy="347472"/>
-          </a:xfrm>
-          <a:prstGeom prst="ellipse">
-            <a:avLst/>
-          </a:prstGeom>
-          <a:solidFill>
-            <a:srgbClr val="2F8A28"/>
-          </a:solidFill>
-          <a:ln w="12700">
-            <a:solidFill>
-              <a:srgbClr val="2F8A28"/>
-            </a:solidFill>
-            <a:prstDash val="solid"/>
-          </a:ln>
-        </p:spPr>
-      </p:sp>
-      <p:sp>
-        <p:nvSpPr>
-          <p:cNvPr id="17" name="Text 15"/>
-          <p:cNvSpPr/>
-          <p:nvPr/>
-        </p:nvSpPr>
-        <p:spPr>
-          <a:xfrm>
-            <a:off x="7909560" y="3977640"/>
-            <a:ext cx="2926080" cy="182880"/>
-          </a:xfrm>
-          <a:prstGeom prst="rect">
-            <a:avLst/>
-          </a:prstGeom>
-          <a:noFill/>
-          <a:ln/>
-        </p:spPr>
-        <p:txBody>
-          <a:bodyPr wrap="square" lIns="0" tIns="0" rIns="0" bIns="0" rtlCol="0" anchor="ctr"/>
-          <a:lstStyle/>
-          <a:p>
-            <a:pPr algn="ctr" indent="0" marL="0">
-              <a:buNone/>
-            </a:pPr>
-            <a:r>
-              <a:rPr lang="en-US" sz="1000" dirty="0">
-                <a:solidFill>
-                  <a:srgbClr val="003A63"/>
-                </a:solidFill>
-                <a:latin typeface="Aptos" pitchFamily="34" charset="0"/>
-                <a:ea typeface="Aptos" pitchFamily="34" charset="-122"/>
-                <a:cs typeface="Aptos" pitchFamily="34" charset="-120"/>
-              </a:rPr>
-              <a:t>Concept to action</a:t>
-            </a:r>
-            <a:endParaRPr lang="en-US" sz="1000" dirty="0"/>
-          </a:p>
-        </p:txBody>
-      </p:sp>
-      <p:sp>
-        <p:nvSpPr>
-          <p:cNvPr id="18" name="Shape 16"/>
           <p:cNvSpPr/>
           <p:nvPr/>
         </p:nvSpPr>
@@ -6601,7 +6291,7 @@
       </p:sp>
       <p:sp>
         <p:nvSpPr>
-          <p:cNvPr id="19" name="Text 17"/>
+          <p:cNvPr id="17" name="Text 15"/>
           <p:cNvSpPr/>
           <p:nvPr/>
         </p:nvSpPr>
@@ -6640,7 +6330,7 @@
       </p:sp>
       <p:sp>
         <p:nvSpPr>
-          <p:cNvPr id="20" name="Text 18"/>
+          <p:cNvPr id="18" name="Text 16"/>
           <p:cNvSpPr/>
           <p:nvPr/>
         </p:nvSpPr>
@@ -7120,13 +6810,11 @@
             </a:avLst>
           </a:prstGeom>
           <a:solidFill>
-            <a:srgbClr val="FFFFFF">
-              <a:alpha val="88000"/>
-            </a:srgbClr>
+            <a:srgbClr val="FFFFFF"/>
           </a:solidFill>
           <a:ln w="12700">
             <a:solidFill>
-              <a:srgbClr val="D6E8F2"/>
+              <a:srgbClr val="B9D7E6"/>
             </a:solidFill>
             <a:prstDash val="solid"/>
           </a:ln>
@@ -7134,119 +6822,84 @@
       </p:sp>
       <p:sp>
         <p:nvSpPr>
-          <p:cNvPr id="14" name="Shape 12"/>
-          <p:cNvSpPr/>
-          <p:nvPr/>
-        </p:nvSpPr>
-        <p:spPr>
-          <a:xfrm>
-            <a:off x="8074152" y="3291840"/>
-            <a:ext cx="2596896" cy="749808"/>
-          </a:xfrm>
-          <a:prstGeom prst="rect">
-            <a:avLst/>
-          </a:prstGeom>
-          <a:solidFill>
-            <a:srgbClr val="EAF6F8"/>
-          </a:solidFill>
-          <a:ln w="12700">
-            <a:solidFill>
-              <a:srgbClr val="8ABBD8"/>
-            </a:solidFill>
-            <a:prstDash val="solid"/>
-          </a:ln>
-        </p:spPr>
-      </p:sp>
-      <p:sp>
-        <p:nvSpPr>
-          <p:cNvPr id="15" name="Shape 13"/>
-          <p:cNvSpPr/>
-          <p:nvPr/>
-        </p:nvSpPr>
-        <p:spPr>
-          <a:xfrm>
-            <a:off x="8202168" y="3721608"/>
-            <a:ext cx="2340864" cy="0"/>
-          </a:xfrm>
-          <a:prstGeom prst="line">
-            <a:avLst/>
-          </a:prstGeom>
-          <a:noFill/>
-          <a:ln w="19050">
-            <a:solidFill>
-              <a:srgbClr val="0068B7"/>
-            </a:solidFill>
-            <a:prstDash val="solid"/>
-          </a:ln>
-        </p:spPr>
+          <p:cNvPr id="14" name="Text 12"/>
+          <p:cNvSpPr/>
+          <p:nvPr/>
+        </p:nvSpPr>
+        <p:spPr>
+          <a:xfrm>
+            <a:off x="7799832" y="2935224"/>
+            <a:ext cx="3145536" cy="256032"/>
+          </a:xfrm>
+          <a:prstGeom prst="rect">
+            <a:avLst/>
+          </a:prstGeom>
+          <a:noFill/>
+          <a:ln/>
+        </p:spPr>
+        <p:txBody>
+          <a:bodyPr wrap="square" lIns="0" tIns="0" rIns="0" bIns="0" rtlCol="0" anchor="ctr"/>
+          <a:lstStyle/>
+          <a:p>
+            <a:pPr indent="0" marL="0">
+              <a:buNone/>
+            </a:pPr>
+            <a:r>
+              <a:rPr lang="en-US" sz="1300" b="1" dirty="0">
+                <a:solidFill>
+                  <a:srgbClr val="0068B7"/>
+                </a:solidFill>
+                <a:latin typeface="Aptos" pitchFamily="34" charset="0"/>
+                <a:ea typeface="Aptos" pitchFamily="34" charset="-122"/>
+                <a:cs typeface="Aptos" pitchFamily="34" charset="-120"/>
+              </a:rPr>
+              <a:t>Concept checkpoints</a:t>
+            </a:r>
+            <a:endParaRPr lang="en-US" sz="1300" dirty="0"/>
+          </a:p>
+        </p:txBody>
+      </p:sp>
+      <p:sp>
+        <p:nvSpPr>
+          <p:cNvPr id="15" name="Text 13"/>
+          <p:cNvSpPr/>
+          <p:nvPr/>
+        </p:nvSpPr>
+        <p:spPr>
+          <a:xfrm>
+            <a:off x="7818120" y="3300984"/>
+            <a:ext cx="3090672" cy="877824"/>
+          </a:xfrm>
+          <a:prstGeom prst="rect">
+            <a:avLst/>
+          </a:prstGeom>
+          <a:noFill/>
+          <a:ln/>
+        </p:spPr>
+        <p:txBody>
+          <a:bodyPr wrap="square" lIns="254" tIns="254" rIns="254" bIns="254" rtlCol="0" anchor="t">
+            <a:normAutofit/>
+          </a:bodyPr>
+          <a:lstStyle/>
+          <a:p>
+            <a:r>
+              <a:rPr lang="en-US" sz="1380" dirty="0">
+                <a:solidFill>
+                  <a:srgbClr val="17364A"/>
+                </a:solidFill>
+                <a:latin typeface="Aptos" pitchFamily="34" charset="0"/>
+                <a:ea typeface="Aptos" pitchFamily="34" charset="-122"/>
+                <a:cs typeface="Aptos" pitchFamily="34" charset="-120"/>
+              </a:rPr>
+              <a:t>Develop an AI use case prioritization rubric with criteria, scoring levels, required.</a:t>
+            </a:r>
+            <a:endParaRPr lang="en-US" sz="1380" dirty="0"/>
+          </a:p>
+        </p:txBody>
       </p:sp>
       <p:sp>
         <p:nvSpPr>
           <p:cNvPr id="16" name="Shape 14"/>
-          <p:cNvSpPr/>
-          <p:nvPr/>
-        </p:nvSpPr>
-        <p:spPr>
-          <a:xfrm>
-            <a:off x="9198864" y="4206240"/>
-            <a:ext cx="347472" cy="347472"/>
-          </a:xfrm>
-          <a:prstGeom prst="ellipse">
-            <a:avLst/>
-          </a:prstGeom>
-          <a:solidFill>
-            <a:srgbClr val="2F8A28"/>
-          </a:solidFill>
-          <a:ln w="12700">
-            <a:solidFill>
-              <a:srgbClr val="2F8A28"/>
-            </a:solidFill>
-            <a:prstDash val="solid"/>
-          </a:ln>
-        </p:spPr>
-      </p:sp>
-      <p:sp>
-        <p:nvSpPr>
-          <p:cNvPr id="17" name="Text 15"/>
-          <p:cNvSpPr/>
-          <p:nvPr/>
-        </p:nvSpPr>
-        <p:spPr>
-          <a:xfrm>
-            <a:off x="7909560" y="3977640"/>
-            <a:ext cx="2926080" cy="182880"/>
-          </a:xfrm>
-          <a:prstGeom prst="rect">
-            <a:avLst/>
-          </a:prstGeom>
-          <a:noFill/>
-          <a:ln/>
-        </p:spPr>
-        <p:txBody>
-          <a:bodyPr wrap="square" lIns="0" tIns="0" rIns="0" bIns="0" rtlCol="0" anchor="ctr"/>
-          <a:lstStyle/>
-          <a:p>
-            <a:pPr algn="ctr" indent="0" marL="0">
-              <a:buNone/>
-            </a:pPr>
-            <a:r>
-              <a:rPr lang="en-US" sz="1000" dirty="0">
-                <a:solidFill>
-                  <a:srgbClr val="003A63"/>
-                </a:solidFill>
-                <a:latin typeface="Aptos" pitchFamily="34" charset="0"/>
-                <a:ea typeface="Aptos" pitchFamily="34" charset="-122"/>
-                <a:cs typeface="Aptos" pitchFamily="34" charset="-120"/>
-              </a:rPr>
-              <a:t>Concept to action</a:t>
-            </a:r>
-            <a:endParaRPr lang="en-US" sz="1000" dirty="0"/>
-          </a:p>
-        </p:txBody>
-      </p:sp>
-      <p:sp>
-        <p:nvSpPr>
-          <p:cNvPr id="18" name="Shape 16"/>
           <p:cNvSpPr/>
           <p:nvPr/>
         </p:nvSpPr>
@@ -7273,7 +6926,7 @@
       </p:sp>
       <p:sp>
         <p:nvSpPr>
-          <p:cNvPr id="19" name="Text 17"/>
+          <p:cNvPr id="17" name="Text 15"/>
           <p:cNvSpPr/>
           <p:nvPr/>
         </p:nvSpPr>
@@ -7312,7 +6965,7 @@
       </p:sp>
       <p:sp>
         <p:nvSpPr>
-          <p:cNvPr id="20" name="Text 18"/>
+          <p:cNvPr id="18" name="Text 16"/>
           <p:cNvSpPr/>
           <p:nvPr/>
         </p:nvSpPr>
@@ -7820,13 +7473,11 @@
             </a:avLst>
           </a:prstGeom>
           <a:solidFill>
-            <a:srgbClr val="FFFFFF">
-              <a:alpha val="88000"/>
-            </a:srgbClr>
+            <a:srgbClr val="FFFFFF"/>
           </a:solidFill>
           <a:ln w="12700">
             <a:solidFill>
-              <a:srgbClr val="D6E8F2"/>
+              <a:srgbClr val="B9D7E6"/>
             </a:solidFill>
             <a:prstDash val="solid"/>
           </a:ln>
@@ -7834,119 +7485,98 @@
       </p:sp>
       <p:sp>
         <p:nvSpPr>
-          <p:cNvPr id="14" name="Shape 12"/>
-          <p:cNvSpPr/>
-          <p:nvPr/>
-        </p:nvSpPr>
-        <p:spPr>
-          <a:xfrm>
-            <a:off x="8074152" y="3291840"/>
-            <a:ext cx="2596896" cy="749808"/>
-          </a:xfrm>
-          <a:prstGeom prst="rect">
-            <a:avLst/>
-          </a:prstGeom>
-          <a:solidFill>
-            <a:srgbClr val="EAF6F8"/>
-          </a:solidFill>
-          <a:ln w="12700">
-            <a:solidFill>
-              <a:srgbClr val="8ABBD8"/>
-            </a:solidFill>
-            <a:prstDash val="solid"/>
-          </a:ln>
-        </p:spPr>
-      </p:sp>
-      <p:sp>
-        <p:nvSpPr>
-          <p:cNvPr id="15" name="Shape 13"/>
-          <p:cNvSpPr/>
-          <p:nvPr/>
-        </p:nvSpPr>
-        <p:spPr>
-          <a:xfrm>
-            <a:off x="8202168" y="3721608"/>
-            <a:ext cx="2340864" cy="0"/>
-          </a:xfrm>
-          <a:prstGeom prst="line">
-            <a:avLst/>
-          </a:prstGeom>
-          <a:noFill/>
-          <a:ln w="19050">
-            <a:solidFill>
-              <a:srgbClr val="0068B7"/>
-            </a:solidFill>
-            <a:prstDash val="solid"/>
-          </a:ln>
-        </p:spPr>
+          <p:cNvPr id="14" name="Text 12"/>
+          <p:cNvSpPr/>
+          <p:nvPr/>
+        </p:nvSpPr>
+        <p:spPr>
+          <a:xfrm>
+            <a:off x="7799832" y="2935224"/>
+            <a:ext cx="3145536" cy="256032"/>
+          </a:xfrm>
+          <a:prstGeom prst="rect">
+            <a:avLst/>
+          </a:prstGeom>
+          <a:noFill/>
+          <a:ln/>
+        </p:spPr>
+        <p:txBody>
+          <a:bodyPr wrap="square" lIns="0" tIns="0" rIns="0" bIns="0" rtlCol="0" anchor="ctr"/>
+          <a:lstStyle/>
+          <a:p>
+            <a:pPr indent="0" marL="0">
+              <a:buNone/>
+            </a:pPr>
+            <a:r>
+              <a:rPr lang="en-US" sz="1300" b="1" dirty="0">
+                <a:solidFill>
+                  <a:srgbClr val="0068B7"/>
+                </a:solidFill>
+                <a:latin typeface="Aptos" pitchFamily="34" charset="0"/>
+                <a:ea typeface="Aptos" pitchFamily="34" charset="-122"/>
+                <a:cs typeface="Aptos" pitchFamily="34" charset="-120"/>
+              </a:rPr>
+              <a:t>Concept checkpoints</a:t>
+            </a:r>
+            <a:endParaRPr lang="en-US" sz="1300" dirty="0"/>
+          </a:p>
+        </p:txBody>
+      </p:sp>
+      <p:sp>
+        <p:nvSpPr>
+          <p:cNvPr id="15" name="Text 13"/>
+          <p:cNvSpPr/>
+          <p:nvPr/>
+        </p:nvSpPr>
+        <p:spPr>
+          <a:xfrm>
+            <a:off x="7818120" y="3300984"/>
+            <a:ext cx="3090672" cy="877824"/>
+          </a:xfrm>
+          <a:prstGeom prst="rect">
+            <a:avLst/>
+          </a:prstGeom>
+          <a:noFill/>
+          <a:ln/>
+        </p:spPr>
+        <p:txBody>
+          <a:bodyPr wrap="square" lIns="254" tIns="254" rIns="254" bIns="254" rtlCol="0" anchor="t">
+            <a:normAutofit/>
+          </a:bodyPr>
+          <a:lstStyle/>
+          <a:p>
+            <a:r>
+              <a:rPr lang="en-US" sz="1380" dirty="0">
+                <a:solidFill>
+                  <a:srgbClr val="17364A"/>
+                </a:solidFill>
+                <a:latin typeface="Aptos" pitchFamily="34" charset="0"/>
+                <a:ea typeface="Aptos" pitchFamily="34" charset="-122"/>
+                <a:cs typeface="Aptos" pitchFamily="34" charset="-120"/>
+              </a:rPr>
+              <a:t>Document assumptions, unresolved questions, and which agency roles would need to review.</a:t>
+            </a:r>
+            <a:endParaRPr lang="en-US" sz="1380" dirty="0"/>
+          </a:p>
+          <a:p>
+            <a:r>
+              <a:rPr lang="en-US" sz="1380" dirty="0">
+                <a:solidFill>
+                  <a:srgbClr val="17364A"/>
+                </a:solidFill>
+                <a:latin typeface="Aptos" pitchFamily="34" charset="0"/>
+                <a:ea typeface="Aptos" pitchFamily="34" charset="-122"/>
+                <a:cs typeface="Aptos" pitchFamily="34" charset="-120"/>
+              </a:rPr>
+              <a:t>The exercise should produce a work product that could support governance review,.</a:t>
+            </a:r>
+            <a:endParaRPr lang="en-US" sz="1380" dirty="0"/>
+          </a:p>
+        </p:txBody>
       </p:sp>
       <p:sp>
         <p:nvSpPr>
           <p:cNvPr id="16" name="Shape 14"/>
-          <p:cNvSpPr/>
-          <p:nvPr/>
-        </p:nvSpPr>
-        <p:spPr>
-          <a:xfrm>
-            <a:off x="9198864" y="4206240"/>
-            <a:ext cx="347472" cy="347472"/>
-          </a:xfrm>
-          <a:prstGeom prst="ellipse">
-            <a:avLst/>
-          </a:prstGeom>
-          <a:solidFill>
-            <a:srgbClr val="2F8A28"/>
-          </a:solidFill>
-          <a:ln w="12700">
-            <a:solidFill>
-              <a:srgbClr val="2F8A28"/>
-            </a:solidFill>
-            <a:prstDash val="solid"/>
-          </a:ln>
-        </p:spPr>
-      </p:sp>
-      <p:sp>
-        <p:nvSpPr>
-          <p:cNvPr id="17" name="Text 15"/>
-          <p:cNvSpPr/>
-          <p:nvPr/>
-        </p:nvSpPr>
-        <p:spPr>
-          <a:xfrm>
-            <a:off x="7909560" y="3977640"/>
-            <a:ext cx="2926080" cy="182880"/>
-          </a:xfrm>
-          <a:prstGeom prst="rect">
-            <a:avLst/>
-          </a:prstGeom>
-          <a:noFill/>
-          <a:ln/>
-        </p:spPr>
-        <p:txBody>
-          <a:bodyPr wrap="square" lIns="0" tIns="0" rIns="0" bIns="0" rtlCol="0" anchor="ctr"/>
-          <a:lstStyle/>
-          <a:p>
-            <a:pPr algn="ctr" indent="0" marL="0">
-              <a:buNone/>
-            </a:pPr>
-            <a:r>
-              <a:rPr lang="en-US" sz="1000" dirty="0">
-                <a:solidFill>
-                  <a:srgbClr val="003A63"/>
-                </a:solidFill>
-                <a:latin typeface="Aptos" pitchFamily="34" charset="0"/>
-                <a:ea typeface="Aptos" pitchFamily="34" charset="-122"/>
-                <a:cs typeface="Aptos" pitchFamily="34" charset="-120"/>
-              </a:rPr>
-              <a:t>Concept to action</a:t>
-            </a:r>
-            <a:endParaRPr lang="en-US" sz="1000" dirty="0"/>
-          </a:p>
-        </p:txBody>
-      </p:sp>
-      <p:sp>
-        <p:nvSpPr>
-          <p:cNvPr id="18" name="Shape 16"/>
           <p:cNvSpPr/>
           <p:nvPr/>
         </p:nvSpPr>
@@ -7973,7 +7603,7 @@
       </p:sp>
       <p:sp>
         <p:nvSpPr>
-          <p:cNvPr id="19" name="Text 17"/>
+          <p:cNvPr id="17" name="Text 15"/>
           <p:cNvSpPr/>
           <p:nvPr/>
         </p:nvSpPr>
@@ -8012,7 +7642,7 @@
       </p:sp>
       <p:sp>
         <p:nvSpPr>
-          <p:cNvPr id="20" name="Text 18"/>
+          <p:cNvPr id="18" name="Text 16"/>
           <p:cNvSpPr/>
           <p:nvPr/>
         </p:nvSpPr>
@@ -8492,13 +8122,11 @@
             </a:avLst>
           </a:prstGeom>
           <a:solidFill>
-            <a:srgbClr val="FFFFFF">
-              <a:alpha val="88000"/>
-            </a:srgbClr>
+            <a:srgbClr val="FFFFFF"/>
           </a:solidFill>
           <a:ln w="12700">
             <a:solidFill>
-              <a:srgbClr val="D6E8F2"/>
+              <a:srgbClr val="B9D7E6"/>
             </a:solidFill>
             <a:prstDash val="solid"/>
           </a:ln>
@@ -8506,119 +8134,84 @@
       </p:sp>
       <p:sp>
         <p:nvSpPr>
-          <p:cNvPr id="14" name="Shape 12"/>
-          <p:cNvSpPr/>
-          <p:nvPr/>
-        </p:nvSpPr>
-        <p:spPr>
-          <a:xfrm>
-            <a:off x="8074152" y="3291840"/>
-            <a:ext cx="2596896" cy="749808"/>
-          </a:xfrm>
-          <a:prstGeom prst="rect">
-            <a:avLst/>
-          </a:prstGeom>
-          <a:solidFill>
-            <a:srgbClr val="EAF6F8"/>
-          </a:solidFill>
-          <a:ln w="12700">
-            <a:solidFill>
-              <a:srgbClr val="8ABBD8"/>
-            </a:solidFill>
-            <a:prstDash val="solid"/>
-          </a:ln>
-        </p:spPr>
-      </p:sp>
-      <p:sp>
-        <p:nvSpPr>
-          <p:cNvPr id="15" name="Shape 13"/>
-          <p:cNvSpPr/>
-          <p:nvPr/>
-        </p:nvSpPr>
-        <p:spPr>
-          <a:xfrm>
-            <a:off x="8202168" y="3721608"/>
-            <a:ext cx="2340864" cy="0"/>
-          </a:xfrm>
-          <a:prstGeom prst="line">
-            <a:avLst/>
-          </a:prstGeom>
-          <a:noFill/>
-          <a:ln w="19050">
-            <a:solidFill>
-              <a:srgbClr val="0068B7"/>
-            </a:solidFill>
-            <a:prstDash val="solid"/>
-          </a:ln>
-        </p:spPr>
+          <p:cNvPr id="14" name="Text 12"/>
+          <p:cNvSpPr/>
+          <p:nvPr/>
+        </p:nvSpPr>
+        <p:spPr>
+          <a:xfrm>
+            <a:off x="7799832" y="2935224"/>
+            <a:ext cx="3145536" cy="256032"/>
+          </a:xfrm>
+          <a:prstGeom prst="rect">
+            <a:avLst/>
+          </a:prstGeom>
+          <a:noFill/>
+          <a:ln/>
+        </p:spPr>
+        <p:txBody>
+          <a:bodyPr wrap="square" lIns="0" tIns="0" rIns="0" bIns="0" rtlCol="0" anchor="ctr"/>
+          <a:lstStyle/>
+          <a:p>
+            <a:pPr indent="0" marL="0">
+              <a:buNone/>
+            </a:pPr>
+            <a:r>
+              <a:rPr lang="en-US" sz="1300" b="1" dirty="0">
+                <a:solidFill>
+                  <a:srgbClr val="0068B7"/>
+                </a:solidFill>
+                <a:latin typeface="Aptos" pitchFamily="34" charset="0"/>
+                <a:ea typeface="Aptos" pitchFamily="34" charset="-122"/>
+                <a:cs typeface="Aptos" pitchFamily="34" charset="-120"/>
+              </a:rPr>
+              <a:t>Concept checkpoints</a:t>
+            </a:r>
+            <a:endParaRPr lang="en-US" sz="1300" dirty="0"/>
+          </a:p>
+        </p:txBody>
+      </p:sp>
+      <p:sp>
+        <p:nvSpPr>
+          <p:cNvPr id="15" name="Text 13"/>
+          <p:cNvSpPr/>
+          <p:nvPr/>
+        </p:nvSpPr>
+        <p:spPr>
+          <a:xfrm>
+            <a:off x="7818120" y="3300984"/>
+            <a:ext cx="3090672" cy="877824"/>
+          </a:xfrm>
+          <a:prstGeom prst="rect">
+            <a:avLst/>
+          </a:prstGeom>
+          <a:noFill/>
+          <a:ln/>
+        </p:spPr>
+        <p:txBody>
+          <a:bodyPr wrap="square" lIns="254" tIns="254" rIns="254" bIns="254" rtlCol="0" anchor="t">
+            <a:normAutofit/>
+          </a:bodyPr>
+          <a:lstStyle/>
+          <a:p>
+            <a:r>
+              <a:rPr lang="en-US" sz="1380" dirty="0">
+                <a:solidFill>
+                  <a:srgbClr val="17364A"/>
+                </a:solidFill>
+                <a:latin typeface="Aptos" pitchFamily="34" charset="0"/>
+                <a:ea typeface="Aptos" pitchFamily="34" charset="-122"/>
+                <a:cs typeface="Aptos" pitchFamily="34" charset="-120"/>
+              </a:rPr>
+              <a:t>Use case intake form; prioritization rubric; sample portfolio view; decision category.</a:t>
+            </a:r>
+            <a:endParaRPr lang="en-US" sz="1380" dirty="0"/>
+          </a:p>
+        </p:txBody>
       </p:sp>
       <p:sp>
         <p:nvSpPr>
           <p:cNvPr id="16" name="Shape 14"/>
-          <p:cNvSpPr/>
-          <p:nvPr/>
-        </p:nvSpPr>
-        <p:spPr>
-          <a:xfrm>
-            <a:off x="9198864" y="4206240"/>
-            <a:ext cx="347472" cy="347472"/>
-          </a:xfrm>
-          <a:prstGeom prst="ellipse">
-            <a:avLst/>
-          </a:prstGeom>
-          <a:solidFill>
-            <a:srgbClr val="2F8A28"/>
-          </a:solidFill>
-          <a:ln w="12700">
-            <a:solidFill>
-              <a:srgbClr val="2F8A28"/>
-            </a:solidFill>
-            <a:prstDash val="solid"/>
-          </a:ln>
-        </p:spPr>
-      </p:sp>
-      <p:sp>
-        <p:nvSpPr>
-          <p:cNvPr id="17" name="Text 15"/>
-          <p:cNvSpPr/>
-          <p:nvPr/>
-        </p:nvSpPr>
-        <p:spPr>
-          <a:xfrm>
-            <a:off x="7909560" y="3977640"/>
-            <a:ext cx="2926080" cy="182880"/>
-          </a:xfrm>
-          <a:prstGeom prst="rect">
-            <a:avLst/>
-          </a:prstGeom>
-          <a:noFill/>
-          <a:ln/>
-        </p:spPr>
-        <p:txBody>
-          <a:bodyPr wrap="square" lIns="0" tIns="0" rIns="0" bIns="0" rtlCol="0" anchor="ctr"/>
-          <a:lstStyle/>
-          <a:p>
-            <a:pPr algn="ctr" indent="0" marL="0">
-              <a:buNone/>
-            </a:pPr>
-            <a:r>
-              <a:rPr lang="en-US" sz="1000" dirty="0">
-                <a:solidFill>
-                  <a:srgbClr val="003A63"/>
-                </a:solidFill>
-                <a:latin typeface="Aptos" pitchFamily="34" charset="0"/>
-                <a:ea typeface="Aptos" pitchFamily="34" charset="-122"/>
-                <a:cs typeface="Aptos" pitchFamily="34" charset="-120"/>
-              </a:rPr>
-              <a:t>Concept to action</a:t>
-            </a:r>
-            <a:endParaRPr lang="en-US" sz="1000" dirty="0"/>
-          </a:p>
-        </p:txBody>
-      </p:sp>
-      <p:sp>
-        <p:nvSpPr>
-          <p:cNvPr id="18" name="Shape 16"/>
           <p:cNvSpPr/>
           <p:nvPr/>
         </p:nvSpPr>
@@ -8645,7 +8238,7 @@
       </p:sp>
       <p:sp>
         <p:nvSpPr>
-          <p:cNvPr id="19" name="Text 17"/>
+          <p:cNvPr id="17" name="Text 15"/>
           <p:cNvSpPr/>
           <p:nvPr/>
         </p:nvSpPr>
@@ -8684,7 +8277,7 @@
       </p:sp>
       <p:sp>
         <p:nvSpPr>
-          <p:cNvPr id="20" name="Text 18"/>
+          <p:cNvPr id="18" name="Text 16"/>
           <p:cNvSpPr/>
           <p:nvPr/>
         </p:nvSpPr>
@@ -9164,13 +8757,11 @@
             </a:avLst>
           </a:prstGeom>
           <a:solidFill>
-            <a:srgbClr val="FFFFFF">
-              <a:alpha val="88000"/>
-            </a:srgbClr>
+            <a:srgbClr val="FFFFFF"/>
           </a:solidFill>
           <a:ln w="12700">
             <a:solidFill>
-              <a:srgbClr val="D6E8F2"/>
+              <a:srgbClr val="B9D7E6"/>
             </a:solidFill>
             <a:prstDash val="solid"/>
           </a:ln>
@@ -9178,119 +8769,84 @@
       </p:sp>
       <p:sp>
         <p:nvSpPr>
-          <p:cNvPr id="14" name="Shape 12"/>
-          <p:cNvSpPr/>
-          <p:nvPr/>
-        </p:nvSpPr>
-        <p:spPr>
-          <a:xfrm>
-            <a:off x="8074152" y="3291840"/>
-            <a:ext cx="2596896" cy="749808"/>
-          </a:xfrm>
-          <a:prstGeom prst="rect">
-            <a:avLst/>
-          </a:prstGeom>
-          <a:solidFill>
-            <a:srgbClr val="EAF6F8"/>
-          </a:solidFill>
-          <a:ln w="12700">
-            <a:solidFill>
-              <a:srgbClr val="8ABBD8"/>
-            </a:solidFill>
-            <a:prstDash val="solid"/>
-          </a:ln>
-        </p:spPr>
-      </p:sp>
-      <p:sp>
-        <p:nvSpPr>
-          <p:cNvPr id="15" name="Shape 13"/>
-          <p:cNvSpPr/>
-          <p:nvPr/>
-        </p:nvSpPr>
-        <p:spPr>
-          <a:xfrm>
-            <a:off x="8202168" y="3721608"/>
-            <a:ext cx="2340864" cy="0"/>
-          </a:xfrm>
-          <a:prstGeom prst="line">
-            <a:avLst/>
-          </a:prstGeom>
-          <a:noFill/>
-          <a:ln w="19050">
-            <a:solidFill>
-              <a:srgbClr val="0068B7"/>
-            </a:solidFill>
-            <a:prstDash val="solid"/>
-          </a:ln>
-        </p:spPr>
+          <p:cNvPr id="14" name="Text 12"/>
+          <p:cNvSpPr/>
+          <p:nvPr/>
+        </p:nvSpPr>
+        <p:spPr>
+          <a:xfrm>
+            <a:off x="7799832" y="2935224"/>
+            <a:ext cx="3145536" cy="256032"/>
+          </a:xfrm>
+          <a:prstGeom prst="rect">
+            <a:avLst/>
+          </a:prstGeom>
+          <a:noFill/>
+          <a:ln/>
+        </p:spPr>
+        <p:txBody>
+          <a:bodyPr wrap="square" lIns="0" tIns="0" rIns="0" bIns="0" rtlCol="0" anchor="ctr"/>
+          <a:lstStyle/>
+          <a:p>
+            <a:pPr indent="0" marL="0">
+              <a:buNone/>
+            </a:pPr>
+            <a:r>
+              <a:rPr lang="en-US" sz="1300" b="1" dirty="0">
+                <a:solidFill>
+                  <a:srgbClr val="0068B7"/>
+                </a:solidFill>
+                <a:latin typeface="Aptos" pitchFamily="34" charset="0"/>
+                <a:ea typeface="Aptos" pitchFamily="34" charset="-122"/>
+                <a:cs typeface="Aptos" pitchFamily="34" charset="-120"/>
+              </a:rPr>
+              <a:t>Concept checkpoints</a:t>
+            </a:r>
+            <a:endParaRPr lang="en-US" sz="1300" dirty="0"/>
+          </a:p>
+        </p:txBody>
+      </p:sp>
+      <p:sp>
+        <p:nvSpPr>
+          <p:cNvPr id="15" name="Text 13"/>
+          <p:cNvSpPr/>
+          <p:nvPr/>
+        </p:nvSpPr>
+        <p:spPr>
+          <a:xfrm>
+            <a:off x="7818120" y="3300984"/>
+            <a:ext cx="3090672" cy="877824"/>
+          </a:xfrm>
+          <a:prstGeom prst="rect">
+            <a:avLst/>
+          </a:prstGeom>
+          <a:noFill/>
+          <a:ln/>
+        </p:spPr>
+        <p:txBody>
+          <a:bodyPr wrap="square" lIns="254" tIns="254" rIns="254" bIns="254" rtlCol="0" anchor="t">
+            <a:normAutofit/>
+          </a:bodyPr>
+          <a:lstStyle/>
+          <a:p>
+            <a:r>
+              <a:rPr lang="en-US" sz="1380" dirty="0">
+                <a:solidFill>
+                  <a:srgbClr val="17364A"/>
+                </a:solidFill>
+                <a:latin typeface="Aptos" pitchFamily="34" charset="0"/>
+                <a:ea typeface="Aptos" pitchFamily="34" charset="-122"/>
+                <a:cs typeface="Aptos" pitchFamily="34" charset="-120"/>
+              </a:rPr>
+              <a:t>Use case intake form; prioritization rubric; sample portfolio view; decision category.</a:t>
+            </a:r>
+            <a:endParaRPr lang="en-US" sz="1380" dirty="0"/>
+          </a:p>
+        </p:txBody>
       </p:sp>
       <p:sp>
         <p:nvSpPr>
           <p:cNvPr id="16" name="Shape 14"/>
-          <p:cNvSpPr/>
-          <p:nvPr/>
-        </p:nvSpPr>
-        <p:spPr>
-          <a:xfrm>
-            <a:off x="9198864" y="4206240"/>
-            <a:ext cx="347472" cy="347472"/>
-          </a:xfrm>
-          <a:prstGeom prst="ellipse">
-            <a:avLst/>
-          </a:prstGeom>
-          <a:solidFill>
-            <a:srgbClr val="2F8A28"/>
-          </a:solidFill>
-          <a:ln w="12700">
-            <a:solidFill>
-              <a:srgbClr val="2F8A28"/>
-            </a:solidFill>
-            <a:prstDash val="solid"/>
-          </a:ln>
-        </p:spPr>
-      </p:sp>
-      <p:sp>
-        <p:nvSpPr>
-          <p:cNvPr id="17" name="Text 15"/>
-          <p:cNvSpPr/>
-          <p:nvPr/>
-        </p:nvSpPr>
-        <p:spPr>
-          <a:xfrm>
-            <a:off x="7909560" y="3977640"/>
-            <a:ext cx="2926080" cy="182880"/>
-          </a:xfrm>
-          <a:prstGeom prst="rect">
-            <a:avLst/>
-          </a:prstGeom>
-          <a:noFill/>
-          <a:ln/>
-        </p:spPr>
-        <p:txBody>
-          <a:bodyPr wrap="square" lIns="0" tIns="0" rIns="0" bIns="0" rtlCol="0" anchor="ctr"/>
-          <a:lstStyle/>
-          <a:p>
-            <a:pPr algn="ctr" indent="0" marL="0">
-              <a:buNone/>
-            </a:pPr>
-            <a:r>
-              <a:rPr lang="en-US" sz="1000" dirty="0">
-                <a:solidFill>
-                  <a:srgbClr val="003A63"/>
-                </a:solidFill>
-                <a:latin typeface="Aptos" pitchFamily="34" charset="0"/>
-                <a:ea typeface="Aptos" pitchFamily="34" charset="-122"/>
-                <a:cs typeface="Aptos" pitchFamily="34" charset="-120"/>
-              </a:rPr>
-              <a:t>Concept to action</a:t>
-            </a:r>
-            <a:endParaRPr lang="en-US" sz="1000" dirty="0"/>
-          </a:p>
-        </p:txBody>
-      </p:sp>
-      <p:sp>
-        <p:nvSpPr>
-          <p:cNvPr id="18" name="Shape 16"/>
           <p:cNvSpPr/>
           <p:nvPr/>
         </p:nvSpPr>
@@ -9317,7 +8873,7 @@
       </p:sp>
       <p:sp>
         <p:nvSpPr>
-          <p:cNvPr id="19" name="Text 17"/>
+          <p:cNvPr id="17" name="Text 15"/>
           <p:cNvSpPr/>
           <p:nvPr/>
         </p:nvSpPr>
@@ -9356,7 +8912,7 @@
       </p:sp>
       <p:sp>
         <p:nvSpPr>
-          <p:cNvPr id="20" name="Text 18"/>
+          <p:cNvPr id="18" name="Text 16"/>
           <p:cNvSpPr/>
           <p:nvPr/>
         </p:nvSpPr>
@@ -9864,13 +9420,11 @@
             </a:avLst>
           </a:prstGeom>
           <a:solidFill>
-            <a:srgbClr val="FFFFFF">
-              <a:alpha val="88000"/>
-            </a:srgbClr>
+            <a:srgbClr val="FFFFFF"/>
           </a:solidFill>
           <a:ln w="12700">
             <a:solidFill>
-              <a:srgbClr val="D6E8F2"/>
+              <a:srgbClr val="B9D7E6"/>
             </a:solidFill>
             <a:prstDash val="solid"/>
           </a:ln>
@@ -9878,119 +9432,112 @@
       </p:sp>
       <p:sp>
         <p:nvSpPr>
-          <p:cNvPr id="14" name="Shape 12"/>
-          <p:cNvSpPr/>
-          <p:nvPr/>
-        </p:nvSpPr>
-        <p:spPr>
-          <a:xfrm>
-            <a:off x="8074152" y="3291840"/>
-            <a:ext cx="2596896" cy="749808"/>
-          </a:xfrm>
-          <a:prstGeom prst="rect">
-            <a:avLst/>
-          </a:prstGeom>
-          <a:solidFill>
-            <a:srgbClr val="EAF6F8"/>
-          </a:solidFill>
-          <a:ln w="12700">
-            <a:solidFill>
-              <a:srgbClr val="8ABBD8"/>
-            </a:solidFill>
-            <a:prstDash val="solid"/>
-          </a:ln>
-        </p:spPr>
-      </p:sp>
-      <p:sp>
-        <p:nvSpPr>
-          <p:cNvPr id="15" name="Shape 13"/>
-          <p:cNvSpPr/>
-          <p:nvPr/>
-        </p:nvSpPr>
-        <p:spPr>
-          <a:xfrm>
-            <a:off x="8202168" y="3721608"/>
-            <a:ext cx="2340864" cy="0"/>
-          </a:xfrm>
-          <a:prstGeom prst="line">
-            <a:avLst/>
-          </a:prstGeom>
-          <a:noFill/>
-          <a:ln w="19050">
-            <a:solidFill>
-              <a:srgbClr val="0068B7"/>
-            </a:solidFill>
-            <a:prstDash val="solid"/>
-          </a:ln>
-        </p:spPr>
+          <p:cNvPr id="14" name="Text 12"/>
+          <p:cNvSpPr/>
+          <p:nvPr/>
+        </p:nvSpPr>
+        <p:spPr>
+          <a:xfrm>
+            <a:off x="7799832" y="2935224"/>
+            <a:ext cx="3145536" cy="256032"/>
+          </a:xfrm>
+          <a:prstGeom prst="rect">
+            <a:avLst/>
+          </a:prstGeom>
+          <a:noFill/>
+          <a:ln/>
+        </p:spPr>
+        <p:txBody>
+          <a:bodyPr wrap="square" lIns="0" tIns="0" rIns="0" bIns="0" rtlCol="0" anchor="ctr"/>
+          <a:lstStyle/>
+          <a:p>
+            <a:pPr indent="0" marL="0">
+              <a:buNone/>
+            </a:pPr>
+            <a:r>
+              <a:rPr lang="en-US" sz="1300" b="1" dirty="0">
+                <a:solidFill>
+                  <a:srgbClr val="0068B7"/>
+                </a:solidFill>
+                <a:latin typeface="Aptos" pitchFamily="34" charset="0"/>
+                <a:ea typeface="Aptos" pitchFamily="34" charset="-122"/>
+                <a:cs typeface="Aptos" pitchFamily="34" charset="-120"/>
+              </a:rPr>
+              <a:t>Concept checkpoints</a:t>
+            </a:r>
+            <a:endParaRPr lang="en-US" sz="1300" dirty="0"/>
+          </a:p>
+        </p:txBody>
+      </p:sp>
+      <p:sp>
+        <p:nvSpPr>
+          <p:cNvPr id="15" name="Text 13"/>
+          <p:cNvSpPr/>
+          <p:nvPr/>
+        </p:nvSpPr>
+        <p:spPr>
+          <a:xfrm>
+            <a:off x="7818120" y="3300984"/>
+            <a:ext cx="3090672" cy="877824"/>
+          </a:xfrm>
+          <a:prstGeom prst="rect">
+            <a:avLst/>
+          </a:prstGeom>
+          <a:noFill/>
+          <a:ln/>
+        </p:spPr>
+        <p:txBody>
+          <a:bodyPr wrap="square" lIns="254" tIns="254" rIns="254" bIns="254" rtlCol="0" anchor="t">
+            <a:normAutofit/>
+          </a:bodyPr>
+          <a:lstStyle/>
+          <a:p>
+            <a:r>
+              <a:rPr lang="en-US" sz="1380" dirty="0">
+                <a:solidFill>
+                  <a:srgbClr val="17364A"/>
+                </a:solidFill>
+                <a:latin typeface="Aptos" pitchFamily="34" charset="0"/>
+                <a:ea typeface="Aptos" pitchFamily="34" charset="-122"/>
+                <a:cs typeface="Aptos" pitchFamily="34" charset="-120"/>
+              </a:rPr>
+              <a:t>1.</a:t>
+            </a:r>
+            <a:endParaRPr lang="en-US" sz="1380" dirty="0"/>
+          </a:p>
+          <a:p>
+            <a:r>
+              <a:rPr lang="en-US" sz="1380" dirty="0">
+                <a:solidFill>
+                  <a:srgbClr val="17364A"/>
+                </a:solidFill>
+                <a:latin typeface="Aptos" pitchFamily="34" charset="0"/>
+                <a:ea typeface="Aptos" pitchFamily="34" charset="-122"/>
+                <a:cs typeface="Aptos" pitchFamily="34" charset="-120"/>
+              </a:rPr>
+              <a:t>What is the strongest reason this module topic belongs in AI leadership and governance.</a:t>
+            </a:r>
+            <a:endParaRPr lang="en-US" sz="1380" dirty="0"/>
+          </a:p>
+          <a:p>
+            <a:r>
+              <a:rPr lang="en-US" sz="1380" dirty="0">
+                <a:solidFill>
+                  <a:srgbClr val="17364A"/>
+                </a:solidFill>
+                <a:latin typeface="Aptos" pitchFamily="34" charset="0"/>
+                <a:ea typeface="Aptos" pitchFamily="34" charset="-122"/>
+                <a:cs typeface="Aptos" pitchFamily="34" charset="-120"/>
+              </a:rPr>
+              <a:t>2.</a:t>
+            </a:r>
+            <a:endParaRPr lang="en-US" sz="1380" dirty="0"/>
+          </a:p>
+        </p:txBody>
       </p:sp>
       <p:sp>
         <p:nvSpPr>
           <p:cNvPr id="16" name="Shape 14"/>
-          <p:cNvSpPr/>
-          <p:nvPr/>
-        </p:nvSpPr>
-        <p:spPr>
-          <a:xfrm>
-            <a:off x="9198864" y="4206240"/>
-            <a:ext cx="347472" cy="347472"/>
-          </a:xfrm>
-          <a:prstGeom prst="ellipse">
-            <a:avLst/>
-          </a:prstGeom>
-          <a:solidFill>
-            <a:srgbClr val="2F8A28"/>
-          </a:solidFill>
-          <a:ln w="12700">
-            <a:solidFill>
-              <a:srgbClr val="2F8A28"/>
-            </a:solidFill>
-            <a:prstDash val="solid"/>
-          </a:ln>
-        </p:spPr>
-      </p:sp>
-      <p:sp>
-        <p:nvSpPr>
-          <p:cNvPr id="17" name="Text 15"/>
-          <p:cNvSpPr/>
-          <p:nvPr/>
-        </p:nvSpPr>
-        <p:spPr>
-          <a:xfrm>
-            <a:off x="7909560" y="3977640"/>
-            <a:ext cx="2926080" cy="182880"/>
-          </a:xfrm>
-          <a:prstGeom prst="rect">
-            <a:avLst/>
-          </a:prstGeom>
-          <a:noFill/>
-          <a:ln/>
-        </p:spPr>
-        <p:txBody>
-          <a:bodyPr wrap="square" lIns="0" tIns="0" rIns="0" bIns="0" rtlCol="0" anchor="ctr"/>
-          <a:lstStyle/>
-          <a:p>
-            <a:pPr algn="ctr" indent="0" marL="0">
-              <a:buNone/>
-            </a:pPr>
-            <a:r>
-              <a:rPr lang="en-US" sz="1000" dirty="0">
-                <a:solidFill>
-                  <a:srgbClr val="003A63"/>
-                </a:solidFill>
-                <a:latin typeface="Aptos" pitchFamily="34" charset="0"/>
-                <a:ea typeface="Aptos" pitchFamily="34" charset="-122"/>
-                <a:cs typeface="Aptos" pitchFamily="34" charset="-120"/>
-              </a:rPr>
-              <a:t>Concept to action</a:t>
-            </a:r>
-            <a:endParaRPr lang="en-US" sz="1000" dirty="0"/>
-          </a:p>
-        </p:txBody>
-      </p:sp>
-      <p:sp>
-        <p:nvSpPr>
-          <p:cNvPr id="18" name="Shape 16"/>
           <p:cNvSpPr/>
           <p:nvPr/>
         </p:nvSpPr>
@@ -10017,7 +9564,7 @@
       </p:sp>
       <p:sp>
         <p:nvSpPr>
-          <p:cNvPr id="19" name="Text 17"/>
+          <p:cNvPr id="17" name="Text 15"/>
           <p:cNvSpPr/>
           <p:nvPr/>
         </p:nvSpPr>
@@ -10056,7 +9603,7 @@
       </p:sp>
       <p:sp>
         <p:nvSpPr>
-          <p:cNvPr id="20" name="Text 18"/>
+          <p:cNvPr id="18" name="Text 16"/>
           <p:cNvSpPr/>
           <p:nvPr/>
         </p:nvSpPr>
@@ -10589,20 +10136,20 @@
         </p:nvSpPr>
         <p:spPr>
           <a:xfrm>
-            <a:off x="7635240" y="3730752"/>
-            <a:ext cx="1033272" cy="749808"/>
+            <a:off x="7909560" y="3675888"/>
+            <a:ext cx="3154680" cy="1691640"/>
           </a:xfrm>
           <a:prstGeom prst="roundRect">
             <a:avLst>
-              <a:gd name="adj" fmla="val 14634"/>
+              <a:gd name="adj" fmla="val 6486"/>
             </a:avLst>
           </a:prstGeom>
           <a:solidFill>
-            <a:srgbClr val="0068B7"/>
+            <a:srgbClr val="FFFFFF"/>
           </a:solidFill>
           <a:ln w="12700">
             <a:solidFill>
-              <a:srgbClr val="0068B7"/>
+              <a:srgbClr val="B9D7E6"/>
             </a:solidFill>
             <a:prstDash val="solid"/>
           </a:ln>
@@ -10616,172 +10163,100 @@
         </p:nvSpPr>
         <p:spPr>
           <a:xfrm>
-            <a:off x="7708392" y="3922776"/>
-            <a:ext cx="886968" cy="310896"/>
-          </a:xfrm>
-          <a:prstGeom prst="rect">
-            <a:avLst/>
-          </a:prstGeom>
-          <a:noFill/>
-          <a:ln/>
-        </p:spPr>
-        <p:txBody>
-          <a:bodyPr wrap="square" lIns="0" tIns="0" rIns="0" bIns="0" rtlCol="0" anchor="ctr">
+            <a:off x="8074152" y="3822192"/>
+            <a:ext cx="2825496" cy="256032"/>
+          </a:xfrm>
+          <a:prstGeom prst="rect">
+            <a:avLst/>
+          </a:prstGeom>
+          <a:noFill/>
+          <a:ln/>
+        </p:spPr>
+        <p:txBody>
+          <a:bodyPr wrap="square" lIns="0" tIns="0" rIns="0" bIns="0" rtlCol="0" anchor="ctr"/>
+          <a:lstStyle/>
+          <a:p>
+            <a:pPr indent="0" marL="0">
+              <a:buNone/>
+            </a:pPr>
+            <a:r>
+              <a:rPr lang="en-US" sz="1300" b="1" dirty="0">
+                <a:solidFill>
+                  <a:srgbClr val="0068B7"/>
+                </a:solidFill>
+                <a:latin typeface="Aptos" pitchFamily="34" charset="0"/>
+                <a:ea typeface="Aptos" pitchFamily="34" charset="-122"/>
+                <a:cs typeface="Aptos" pitchFamily="34" charset="-120"/>
+              </a:rPr>
+              <a:t>Learning sequence</a:t>
+            </a:r>
+            <a:endParaRPr lang="en-US" sz="1300" dirty="0"/>
+          </a:p>
+        </p:txBody>
+      </p:sp>
+      <p:sp>
+        <p:nvSpPr>
+          <p:cNvPr id="15" name="Text 13"/>
+          <p:cNvSpPr/>
+          <p:nvPr/>
+        </p:nvSpPr>
+        <p:spPr>
+          <a:xfrm>
+            <a:off x="8092440" y="4187952"/>
+            <a:ext cx="2770632" cy="1033272"/>
+          </a:xfrm>
+          <a:prstGeom prst="rect">
+            <a:avLst/>
+          </a:prstGeom>
+          <a:noFill/>
+          <a:ln/>
+        </p:spPr>
+        <p:txBody>
+          <a:bodyPr wrap="square" lIns="254" tIns="254" rIns="254" bIns="254" rtlCol="0" anchor="t">
             <a:normAutofit/>
           </a:bodyPr>
           <a:lstStyle/>
           <a:p>
-            <a:pPr algn="ctr" indent="0" marL="0">
-              <a:buNone/>
-            </a:pPr>
-            <a:r>
-              <a:rPr lang="en-US" sz="1500" b="1" dirty="0">
-                <a:solidFill>
-                  <a:srgbClr val="FFFFFF"/>
-                </a:solidFill>
-                <a:latin typeface="Aptos" pitchFamily="34" charset="0"/>
-                <a:ea typeface="Aptos" pitchFamily="34" charset="-122"/>
-                <a:cs typeface="Aptos" pitchFamily="34" charset="-120"/>
-              </a:rPr>
-              <a:t>Learn</a:t>
-            </a:r>
-            <a:endParaRPr lang="en-US" sz="1500" dirty="0"/>
-          </a:p>
-        </p:txBody>
-      </p:sp>
-      <p:sp>
-        <p:nvSpPr>
-          <p:cNvPr id="15" name="Shape 13"/>
-          <p:cNvSpPr/>
-          <p:nvPr/>
-        </p:nvSpPr>
-        <p:spPr>
-          <a:xfrm>
-            <a:off x="8924544" y="3730752"/>
-            <a:ext cx="1033272" cy="749808"/>
-          </a:xfrm>
-          <a:prstGeom prst="roundRect">
-            <a:avLst>
-              <a:gd name="adj" fmla="val 14634"/>
-            </a:avLst>
-          </a:prstGeom>
-          <a:solidFill>
-            <a:srgbClr val="2F8A28"/>
-          </a:solidFill>
-          <a:ln w="12700">
-            <a:solidFill>
-              <a:srgbClr val="2F8A28"/>
-            </a:solidFill>
-            <a:prstDash val="solid"/>
-          </a:ln>
-        </p:spPr>
-      </p:sp>
-      <p:sp>
-        <p:nvSpPr>
-          <p:cNvPr id="16" name="Text 14"/>
-          <p:cNvSpPr/>
-          <p:nvPr/>
-        </p:nvSpPr>
-        <p:spPr>
-          <a:xfrm>
-            <a:off x="8997696" y="3922776"/>
-            <a:ext cx="886968" cy="310896"/>
-          </a:xfrm>
-          <a:prstGeom prst="rect">
-            <a:avLst/>
-          </a:prstGeom>
-          <a:noFill/>
-          <a:ln/>
-        </p:spPr>
-        <p:txBody>
-          <a:bodyPr wrap="square" lIns="0" tIns="0" rIns="0" bIns="0" rtlCol="0" anchor="ctr">
-            <a:normAutofit/>
-          </a:bodyPr>
-          <a:lstStyle/>
-          <a:p>
-            <a:pPr algn="ctr" indent="0" marL="0">
-              <a:buNone/>
-            </a:pPr>
-            <a:r>
-              <a:rPr lang="en-US" sz="1500" b="1" dirty="0">
-                <a:solidFill>
-                  <a:srgbClr val="FFFFFF"/>
-                </a:solidFill>
-                <a:latin typeface="Aptos" pitchFamily="34" charset="0"/>
-                <a:ea typeface="Aptos" pitchFamily="34" charset="-122"/>
-                <a:cs typeface="Aptos" pitchFamily="34" charset="-120"/>
-              </a:rPr>
-              <a:t>Apply</a:t>
-            </a:r>
-            <a:endParaRPr lang="en-US" sz="1500" dirty="0"/>
-          </a:p>
-        </p:txBody>
-      </p:sp>
-      <p:sp>
-        <p:nvSpPr>
-          <p:cNvPr id="17" name="Shape 15"/>
-          <p:cNvSpPr/>
-          <p:nvPr/>
-        </p:nvSpPr>
-        <p:spPr>
-          <a:xfrm>
-            <a:off x="10213848" y="3730752"/>
-            <a:ext cx="1033272" cy="749808"/>
-          </a:xfrm>
-          <a:prstGeom prst="roundRect">
-            <a:avLst>
-              <a:gd name="adj" fmla="val 14634"/>
-            </a:avLst>
-          </a:prstGeom>
-          <a:solidFill>
-            <a:srgbClr val="6A4CA3"/>
-          </a:solidFill>
-          <a:ln w="12700">
-            <a:solidFill>
-              <a:srgbClr val="6A4CA3"/>
-            </a:solidFill>
-            <a:prstDash val="solid"/>
-          </a:ln>
-        </p:spPr>
-      </p:sp>
-      <p:sp>
-        <p:nvSpPr>
-          <p:cNvPr id="18" name="Text 16"/>
-          <p:cNvSpPr/>
-          <p:nvPr/>
-        </p:nvSpPr>
-        <p:spPr>
-          <a:xfrm>
-            <a:off x="10287000" y="3922776"/>
-            <a:ext cx="886968" cy="310896"/>
-          </a:xfrm>
-          <a:prstGeom prst="rect">
-            <a:avLst/>
-          </a:prstGeom>
-          <a:noFill/>
-          <a:ln/>
-        </p:spPr>
-        <p:txBody>
-          <a:bodyPr wrap="square" lIns="0" tIns="0" rIns="0" bIns="0" rtlCol="0" anchor="ctr">
-            <a:normAutofit/>
-          </a:bodyPr>
-          <a:lstStyle/>
-          <a:p>
-            <a:pPr algn="ctr" indent="0" marL="0">
-              <a:buNone/>
-            </a:pPr>
-            <a:r>
-              <a:rPr lang="en-US" sz="1500" b="1" dirty="0">
-                <a:solidFill>
-                  <a:srgbClr val="FFFFFF"/>
-                </a:solidFill>
-                <a:latin typeface="Aptos" pitchFamily="34" charset="0"/>
-                <a:ea typeface="Aptos" pitchFamily="34" charset="-122"/>
-                <a:cs typeface="Aptos" pitchFamily="34" charset="-120"/>
-              </a:rPr>
-              <a:t>Document</a:t>
-            </a:r>
-            <a:endParaRPr lang="en-US" sz="1500" dirty="0"/>
+            <a:r>
+              <a:rPr lang="en-US" sz="1380" dirty="0">
+                <a:solidFill>
+                  <a:srgbClr val="17364A"/>
+                </a:solidFill>
+                <a:latin typeface="Aptos" pitchFamily="34" charset="0"/>
+                <a:ea typeface="Aptos" pitchFamily="34" charset="-122"/>
+                <a:cs typeface="Aptos" pitchFamily="34" charset="-120"/>
+              </a:rPr>
+              <a:t>Read the module for shared vocabulary and context.</a:t>
+            </a:r>
+            <a:endParaRPr lang="en-US" sz="1380" dirty="0"/>
+          </a:p>
+          <a:p>
+            <a:r>
+              <a:rPr lang="en-US" sz="1380" dirty="0">
+                <a:solidFill>
+                  <a:srgbClr val="17364A"/>
+                </a:solidFill>
+                <a:latin typeface="Aptos" pitchFamily="34" charset="0"/>
+                <a:ea typeface="Aptos" pitchFamily="34" charset="-122"/>
+                <a:cs typeface="Aptos" pitchFamily="34" charset="-120"/>
+              </a:rPr>
+              <a:t>Complete the practical exercise to apply the concept.</a:t>
+            </a:r>
+            <a:endParaRPr lang="en-US" sz="1380" dirty="0"/>
+          </a:p>
+          <a:p>
+            <a:r>
+              <a:rPr lang="en-US" sz="1380" dirty="0">
+                <a:solidFill>
+                  <a:srgbClr val="17364A"/>
+                </a:solidFill>
+                <a:latin typeface="Aptos" pitchFamily="34" charset="0"/>
+                <a:ea typeface="Aptos" pitchFamily="34" charset="-122"/>
+                <a:cs typeface="Aptos" pitchFamily="34" charset="-120"/>
+              </a:rPr>
+              <a:t>Use the notes and references for deeper review.</a:t>
+            </a:r>
+            <a:endParaRPr lang="en-US" sz="1380" dirty="0"/>
           </a:p>
         </p:txBody>
       </p:sp>
@@ -11254,13 +10729,11 @@
             </a:avLst>
           </a:prstGeom>
           <a:solidFill>
-            <a:srgbClr val="FFFFFF">
-              <a:alpha val="88000"/>
-            </a:srgbClr>
+            <a:srgbClr val="FFFFFF"/>
           </a:solidFill>
           <a:ln w="12700">
             <a:solidFill>
-              <a:srgbClr val="D6E8F2"/>
+              <a:srgbClr val="B9D7E6"/>
             </a:solidFill>
             <a:prstDash val="solid"/>
           </a:ln>
@@ -11268,119 +10741,112 @@
       </p:sp>
       <p:sp>
         <p:nvSpPr>
-          <p:cNvPr id="14" name="Shape 12"/>
-          <p:cNvSpPr/>
-          <p:nvPr/>
-        </p:nvSpPr>
-        <p:spPr>
-          <a:xfrm>
-            <a:off x="8074152" y="3291840"/>
-            <a:ext cx="2596896" cy="749808"/>
-          </a:xfrm>
-          <a:prstGeom prst="rect">
-            <a:avLst/>
-          </a:prstGeom>
-          <a:solidFill>
-            <a:srgbClr val="EAF6F8"/>
-          </a:solidFill>
-          <a:ln w="12700">
-            <a:solidFill>
-              <a:srgbClr val="8ABBD8"/>
-            </a:solidFill>
-            <a:prstDash val="solid"/>
-          </a:ln>
-        </p:spPr>
-      </p:sp>
-      <p:sp>
-        <p:nvSpPr>
-          <p:cNvPr id="15" name="Shape 13"/>
-          <p:cNvSpPr/>
-          <p:nvPr/>
-        </p:nvSpPr>
-        <p:spPr>
-          <a:xfrm>
-            <a:off x="8202168" y="3721608"/>
-            <a:ext cx="2340864" cy="0"/>
-          </a:xfrm>
-          <a:prstGeom prst="line">
-            <a:avLst/>
-          </a:prstGeom>
-          <a:noFill/>
-          <a:ln w="19050">
-            <a:solidFill>
-              <a:srgbClr val="0068B7"/>
-            </a:solidFill>
-            <a:prstDash val="solid"/>
-          </a:ln>
-        </p:spPr>
+          <p:cNvPr id="14" name="Text 12"/>
+          <p:cNvSpPr/>
+          <p:nvPr/>
+        </p:nvSpPr>
+        <p:spPr>
+          <a:xfrm>
+            <a:off x="7799832" y="2935224"/>
+            <a:ext cx="3145536" cy="256032"/>
+          </a:xfrm>
+          <a:prstGeom prst="rect">
+            <a:avLst/>
+          </a:prstGeom>
+          <a:noFill/>
+          <a:ln/>
+        </p:spPr>
+        <p:txBody>
+          <a:bodyPr wrap="square" lIns="0" tIns="0" rIns="0" bIns="0" rtlCol="0" anchor="ctr"/>
+          <a:lstStyle/>
+          <a:p>
+            <a:pPr indent="0" marL="0">
+              <a:buNone/>
+            </a:pPr>
+            <a:r>
+              <a:rPr lang="en-US" sz="1300" b="1" dirty="0">
+                <a:solidFill>
+                  <a:srgbClr val="0068B7"/>
+                </a:solidFill>
+                <a:latin typeface="Aptos" pitchFamily="34" charset="0"/>
+                <a:ea typeface="Aptos" pitchFamily="34" charset="-122"/>
+                <a:cs typeface="Aptos" pitchFamily="34" charset="-120"/>
+              </a:rPr>
+              <a:t>Concept checkpoints</a:t>
+            </a:r>
+            <a:endParaRPr lang="en-US" sz="1300" dirty="0"/>
+          </a:p>
+        </p:txBody>
+      </p:sp>
+      <p:sp>
+        <p:nvSpPr>
+          <p:cNvPr id="15" name="Text 13"/>
+          <p:cNvSpPr/>
+          <p:nvPr/>
+        </p:nvSpPr>
+        <p:spPr>
+          <a:xfrm>
+            <a:off x="7818120" y="3300984"/>
+            <a:ext cx="3090672" cy="877824"/>
+          </a:xfrm>
+          <a:prstGeom prst="rect">
+            <a:avLst/>
+          </a:prstGeom>
+          <a:noFill/>
+          <a:ln/>
+        </p:spPr>
+        <p:txBody>
+          <a:bodyPr wrap="square" lIns="254" tIns="254" rIns="254" bIns="254" rtlCol="0" anchor="t">
+            <a:normAutofit/>
+          </a:bodyPr>
+          <a:lstStyle/>
+          <a:p>
+            <a:r>
+              <a:rPr lang="en-US" sz="1380" dirty="0">
+                <a:solidFill>
+                  <a:srgbClr val="17364A"/>
+                </a:solidFill>
+                <a:latin typeface="Aptos" pitchFamily="34" charset="0"/>
+                <a:ea typeface="Aptos" pitchFamily="34" charset="-122"/>
+                <a:cs typeface="Aptos" pitchFamily="34" charset="-120"/>
+              </a:rPr>
+              <a:t>NIST Artificial Intelligence Risk Management Framework (AI RMF 1.0):.</a:t>
+            </a:r>
+            <a:endParaRPr lang="en-US" sz="1380" dirty="0"/>
+          </a:p>
+          <a:p>
+            <a:r>
+              <a:rPr lang="en-US" sz="1380" dirty="0">
+                <a:solidFill>
+                  <a:srgbClr val="17364A"/>
+                </a:solidFill>
+                <a:latin typeface="Aptos" pitchFamily="34" charset="0"/>
+                <a:ea typeface="Aptos" pitchFamily="34" charset="-122"/>
+                <a:cs typeface="Aptos" pitchFamily="34" charset="-120"/>
+              </a:rPr>
+              <a:t>CDC Public Health Data Strategy and Data Modernization resources:.</a:t>
+            </a:r>
+            <a:endParaRPr lang="en-US" sz="1380" dirty="0"/>
+          </a:p>
+          <a:p>
+            <a:r>
+              <a:rPr lang="en-US" sz="1380" dirty="0">
+                <a:solidFill>
+                  <a:srgbClr val="17364A"/>
+                </a:solidFill>
+                <a:latin typeface="Aptos" pitchFamily="34" charset="0"/>
+                <a:ea typeface="Aptos" pitchFamily="34" charset="-122"/>
+                <a:cs typeface="Aptos" pitchFamily="34" charset="-120"/>
+              </a:rPr>
+              <a:t>WHO Ethics and Governance of Artificial Intelligence for Health:.</a:t>
+            </a:r>
+            <a:endParaRPr lang="en-US" sz="1380" dirty="0"/>
+          </a:p>
+        </p:txBody>
       </p:sp>
       <p:sp>
         <p:nvSpPr>
           <p:cNvPr id="16" name="Shape 14"/>
-          <p:cNvSpPr/>
-          <p:nvPr/>
-        </p:nvSpPr>
-        <p:spPr>
-          <a:xfrm>
-            <a:off x="9198864" y="4206240"/>
-            <a:ext cx="347472" cy="347472"/>
-          </a:xfrm>
-          <a:prstGeom prst="ellipse">
-            <a:avLst/>
-          </a:prstGeom>
-          <a:solidFill>
-            <a:srgbClr val="2F8A28"/>
-          </a:solidFill>
-          <a:ln w="12700">
-            <a:solidFill>
-              <a:srgbClr val="2F8A28"/>
-            </a:solidFill>
-            <a:prstDash val="solid"/>
-          </a:ln>
-        </p:spPr>
-      </p:sp>
-      <p:sp>
-        <p:nvSpPr>
-          <p:cNvPr id="17" name="Text 15"/>
-          <p:cNvSpPr/>
-          <p:nvPr/>
-        </p:nvSpPr>
-        <p:spPr>
-          <a:xfrm>
-            <a:off x="7909560" y="3977640"/>
-            <a:ext cx="2926080" cy="182880"/>
-          </a:xfrm>
-          <a:prstGeom prst="rect">
-            <a:avLst/>
-          </a:prstGeom>
-          <a:noFill/>
-          <a:ln/>
-        </p:spPr>
-        <p:txBody>
-          <a:bodyPr wrap="square" lIns="0" tIns="0" rIns="0" bIns="0" rtlCol="0" anchor="ctr"/>
-          <a:lstStyle/>
-          <a:p>
-            <a:pPr algn="ctr" indent="0" marL="0">
-              <a:buNone/>
-            </a:pPr>
-            <a:r>
-              <a:rPr lang="en-US" sz="1000" dirty="0">
-                <a:solidFill>
-                  <a:srgbClr val="003A63"/>
-                </a:solidFill>
-                <a:latin typeface="Aptos" pitchFamily="34" charset="0"/>
-                <a:ea typeface="Aptos" pitchFamily="34" charset="-122"/>
-                <a:cs typeface="Aptos" pitchFamily="34" charset="-120"/>
-              </a:rPr>
-              <a:t>Concept to action</a:t>
-            </a:r>
-            <a:endParaRPr lang="en-US" sz="1000" dirty="0"/>
-          </a:p>
-        </p:txBody>
-      </p:sp>
-      <p:sp>
-        <p:nvSpPr>
-          <p:cNvPr id="18" name="Shape 16"/>
           <p:cNvSpPr/>
           <p:nvPr/>
         </p:nvSpPr>
@@ -11407,7 +10873,7 @@
       </p:sp>
       <p:sp>
         <p:nvSpPr>
-          <p:cNvPr id="19" name="Text 17"/>
+          <p:cNvPr id="17" name="Text 15"/>
           <p:cNvSpPr/>
           <p:nvPr/>
         </p:nvSpPr>
@@ -11446,7 +10912,7 @@
       </p:sp>
       <p:sp>
         <p:nvSpPr>
-          <p:cNvPr id="20" name="Text 18"/>
+          <p:cNvPr id="18" name="Text 16"/>
           <p:cNvSpPr/>
           <p:nvPr/>
         </p:nvSpPr>
@@ -11940,13 +11406,11 @@
             </a:avLst>
           </a:prstGeom>
           <a:solidFill>
-            <a:srgbClr val="FFFFFF">
-              <a:alpha val="88000"/>
-            </a:srgbClr>
+            <a:srgbClr val="FFFFFF"/>
           </a:solidFill>
           <a:ln w="12700">
             <a:solidFill>
-              <a:srgbClr val="D6E8F2"/>
+              <a:srgbClr val="B9D7E6"/>
             </a:solidFill>
             <a:prstDash val="solid"/>
           </a:ln>
@@ -11954,119 +11418,98 @@
       </p:sp>
       <p:sp>
         <p:nvSpPr>
-          <p:cNvPr id="14" name="Shape 12"/>
-          <p:cNvSpPr/>
-          <p:nvPr/>
-        </p:nvSpPr>
-        <p:spPr>
-          <a:xfrm>
-            <a:off x="8074152" y="3291840"/>
-            <a:ext cx="2596896" cy="749808"/>
-          </a:xfrm>
-          <a:prstGeom prst="rect">
-            <a:avLst/>
-          </a:prstGeom>
-          <a:solidFill>
-            <a:srgbClr val="EAF6F8"/>
-          </a:solidFill>
-          <a:ln w="12700">
-            <a:solidFill>
-              <a:srgbClr val="8ABBD8"/>
-            </a:solidFill>
-            <a:prstDash val="solid"/>
-          </a:ln>
-        </p:spPr>
-      </p:sp>
-      <p:sp>
-        <p:nvSpPr>
-          <p:cNvPr id="15" name="Shape 13"/>
-          <p:cNvSpPr/>
-          <p:nvPr/>
-        </p:nvSpPr>
-        <p:spPr>
-          <a:xfrm>
-            <a:off x="8202168" y="3721608"/>
-            <a:ext cx="2340864" cy="0"/>
-          </a:xfrm>
-          <a:prstGeom prst="line">
-            <a:avLst/>
-          </a:prstGeom>
-          <a:noFill/>
-          <a:ln w="19050">
-            <a:solidFill>
-              <a:srgbClr val="0068B7"/>
-            </a:solidFill>
-            <a:prstDash val="solid"/>
-          </a:ln>
-        </p:spPr>
+          <p:cNvPr id="14" name="Text 12"/>
+          <p:cNvSpPr/>
+          <p:nvPr/>
+        </p:nvSpPr>
+        <p:spPr>
+          <a:xfrm>
+            <a:off x="7799832" y="2935224"/>
+            <a:ext cx="3145536" cy="256032"/>
+          </a:xfrm>
+          <a:prstGeom prst="rect">
+            <a:avLst/>
+          </a:prstGeom>
+          <a:noFill/>
+          <a:ln/>
+        </p:spPr>
+        <p:txBody>
+          <a:bodyPr wrap="square" lIns="0" tIns="0" rIns="0" bIns="0" rtlCol="0" anchor="ctr"/>
+          <a:lstStyle/>
+          <a:p>
+            <a:pPr indent="0" marL="0">
+              <a:buNone/>
+            </a:pPr>
+            <a:r>
+              <a:rPr lang="en-US" sz="1300" b="1" dirty="0">
+                <a:solidFill>
+                  <a:srgbClr val="0068B7"/>
+                </a:solidFill>
+                <a:latin typeface="Aptos" pitchFamily="34" charset="0"/>
+                <a:ea typeface="Aptos" pitchFamily="34" charset="-122"/>
+                <a:cs typeface="Aptos" pitchFamily="34" charset="-120"/>
+              </a:rPr>
+              <a:t>Concept checkpoints</a:t>
+            </a:r>
+            <a:endParaRPr lang="en-US" sz="1300" dirty="0"/>
+          </a:p>
+        </p:txBody>
+      </p:sp>
+      <p:sp>
+        <p:nvSpPr>
+          <p:cNvPr id="15" name="Text 13"/>
+          <p:cNvSpPr/>
+          <p:nvPr/>
+        </p:nvSpPr>
+        <p:spPr>
+          <a:xfrm>
+            <a:off x="7818120" y="3300984"/>
+            <a:ext cx="3090672" cy="877824"/>
+          </a:xfrm>
+          <a:prstGeom prst="rect">
+            <a:avLst/>
+          </a:prstGeom>
+          <a:noFill/>
+          <a:ln/>
+        </p:spPr>
+        <p:txBody>
+          <a:bodyPr wrap="square" lIns="254" tIns="254" rIns="254" bIns="254" rtlCol="0" anchor="t">
+            <a:normAutofit/>
+          </a:bodyPr>
+          <a:lstStyle/>
+          <a:p>
+            <a:r>
+              <a:rPr lang="en-US" sz="1380" dirty="0">
+                <a:solidFill>
+                  <a:srgbClr val="17364A"/>
+                </a:solidFill>
+                <a:latin typeface="Aptos" pitchFamily="34" charset="0"/>
+                <a:ea typeface="Aptos" pitchFamily="34" charset="-122"/>
+                <a:cs typeface="Aptos" pitchFamily="34" charset="-120"/>
+              </a:rPr>
+              <a:t>OMB Memorandum M-24-10 on federal AI governance, risk management, and innovation, where.</a:t>
+            </a:r>
+            <a:endParaRPr lang="en-US" sz="1380" dirty="0"/>
+          </a:p>
+          <a:p>
+            <a:r>
+              <a:rPr lang="en-US" sz="1380" dirty="0">
+                <a:solidFill>
+                  <a:srgbClr val="17364A"/>
+                </a:solidFill>
+                <a:latin typeface="Aptos" pitchFamily="34" charset="0"/>
+                <a:ea typeface="Aptos" pitchFamily="34" charset="-122"/>
+                <a:cs typeface="Aptos" pitchFamily="34" charset="-120"/>
+              </a:rPr>
+              <a:t>Agency strategic plans, procurement policies, privacy policies, cybersecurity policies,.</a:t>
+            </a:r>
+            <a:endParaRPr lang="en-US" sz="1380" dirty="0"/>
+          </a:p>
+        </p:txBody>
       </p:sp>
       <p:sp>
         <p:nvSpPr>
           <p:cNvPr id="16" name="Shape 14"/>
-          <p:cNvSpPr/>
-          <p:nvPr/>
-        </p:nvSpPr>
-        <p:spPr>
-          <a:xfrm>
-            <a:off x="9198864" y="4206240"/>
-            <a:ext cx="347472" cy="347472"/>
-          </a:xfrm>
-          <a:prstGeom prst="ellipse">
-            <a:avLst/>
-          </a:prstGeom>
-          <a:solidFill>
-            <a:srgbClr val="2F8A28"/>
-          </a:solidFill>
-          <a:ln w="12700">
-            <a:solidFill>
-              <a:srgbClr val="2F8A28"/>
-            </a:solidFill>
-            <a:prstDash val="solid"/>
-          </a:ln>
-        </p:spPr>
-      </p:sp>
-      <p:sp>
-        <p:nvSpPr>
-          <p:cNvPr id="17" name="Text 15"/>
-          <p:cNvSpPr/>
-          <p:nvPr/>
-        </p:nvSpPr>
-        <p:spPr>
-          <a:xfrm>
-            <a:off x="7909560" y="3977640"/>
-            <a:ext cx="2926080" cy="182880"/>
-          </a:xfrm>
-          <a:prstGeom prst="rect">
-            <a:avLst/>
-          </a:prstGeom>
-          <a:noFill/>
-          <a:ln/>
-        </p:spPr>
-        <p:txBody>
-          <a:bodyPr wrap="square" lIns="0" tIns="0" rIns="0" bIns="0" rtlCol="0" anchor="ctr"/>
-          <a:lstStyle/>
-          <a:p>
-            <a:pPr algn="ctr" indent="0" marL="0">
-              <a:buNone/>
-            </a:pPr>
-            <a:r>
-              <a:rPr lang="en-US" sz="1000" dirty="0">
-                <a:solidFill>
-                  <a:srgbClr val="003A63"/>
-                </a:solidFill>
-                <a:latin typeface="Aptos" pitchFamily="34" charset="0"/>
-                <a:ea typeface="Aptos" pitchFamily="34" charset="-122"/>
-                <a:cs typeface="Aptos" pitchFamily="34" charset="-120"/>
-              </a:rPr>
-              <a:t>Concept to action</a:t>
-            </a:r>
-            <a:endParaRPr lang="en-US" sz="1000" dirty="0"/>
-          </a:p>
-        </p:txBody>
-      </p:sp>
-      <p:sp>
-        <p:nvSpPr>
-          <p:cNvPr id="18" name="Shape 16"/>
           <p:cNvSpPr/>
           <p:nvPr/>
         </p:nvSpPr>
@@ -12093,7 +11536,7 @@
       </p:sp>
       <p:sp>
         <p:nvSpPr>
-          <p:cNvPr id="19" name="Text 17"/>
+          <p:cNvPr id="17" name="Text 15"/>
           <p:cNvSpPr/>
           <p:nvPr/>
         </p:nvSpPr>
@@ -12132,7 +11575,7 @@
       </p:sp>
       <p:sp>
         <p:nvSpPr>
-          <p:cNvPr id="20" name="Text 18"/>
+          <p:cNvPr id="18" name="Text 16"/>
           <p:cNvSpPr/>
           <p:nvPr/>
         </p:nvSpPr>
@@ -12645,20 +12088,20 @@
         </p:nvSpPr>
         <p:spPr>
           <a:xfrm>
-            <a:off x="7818120" y="3977640"/>
-            <a:ext cx="972312" cy="749808"/>
+            <a:off x="8046720" y="3794760"/>
+            <a:ext cx="3063240" cy="1600200"/>
           </a:xfrm>
           <a:prstGeom prst="roundRect">
             <a:avLst>
-              <a:gd name="adj" fmla="val 14634"/>
+              <a:gd name="adj" fmla="val 6857"/>
             </a:avLst>
           </a:prstGeom>
           <a:solidFill>
-            <a:srgbClr val="0068B7"/>
+            <a:srgbClr val="FFFFFF"/>
           </a:solidFill>
           <a:ln w="12700">
             <a:solidFill>
-              <a:srgbClr val="0068B7"/>
+              <a:srgbClr val="B9D7E6"/>
             </a:solidFill>
             <a:prstDash val="solid"/>
           </a:ln>
@@ -12672,172 +12115,100 @@
         </p:nvSpPr>
         <p:spPr>
           <a:xfrm>
-            <a:off x="7891272" y="4169664"/>
-            <a:ext cx="826008" cy="310896"/>
-          </a:xfrm>
-          <a:prstGeom prst="rect">
-            <a:avLst/>
-          </a:prstGeom>
-          <a:noFill/>
-          <a:ln/>
-        </p:spPr>
-        <p:txBody>
-          <a:bodyPr wrap="square" lIns="0" tIns="0" rIns="0" bIns="0" rtlCol="0" anchor="ctr">
+            <a:off x="8211312" y="3941064"/>
+            <a:ext cx="2734056" cy="256032"/>
+          </a:xfrm>
+          <a:prstGeom prst="rect">
+            <a:avLst/>
+          </a:prstGeom>
+          <a:noFill/>
+          <a:ln/>
+        </p:spPr>
+        <p:txBody>
+          <a:bodyPr wrap="square" lIns="0" tIns="0" rIns="0" bIns="0" rtlCol="0" anchor="ctr"/>
+          <a:lstStyle/>
+          <a:p>
+            <a:pPr indent="0" marL="0">
+              <a:buNone/>
+            </a:pPr>
+            <a:r>
+              <a:rPr lang="en-US" sz="1300" b="1" dirty="0">
+                <a:solidFill>
+                  <a:srgbClr val="0068B7"/>
+                </a:solidFill>
+                <a:latin typeface="Aptos" pitchFamily="34" charset="0"/>
+                <a:ea typeface="Aptos" pitchFamily="34" charset="-122"/>
+                <a:cs typeface="Aptos" pitchFamily="34" charset="-120"/>
+              </a:rPr>
+              <a:t>Use the play links to</a:t>
+            </a:r>
+            <a:endParaRPr lang="en-US" sz="1300" dirty="0"/>
+          </a:p>
+        </p:txBody>
+      </p:sp>
+      <p:sp>
+        <p:nvSpPr>
+          <p:cNvPr id="15" name="Text 13"/>
+          <p:cNvSpPr/>
+          <p:nvPr/>
+        </p:nvSpPr>
+        <p:spPr>
+          <a:xfrm>
+            <a:off x="8229600" y="4306824"/>
+            <a:ext cx="2679192" cy="941832"/>
+          </a:xfrm>
+          <a:prstGeom prst="rect">
+            <a:avLst/>
+          </a:prstGeom>
+          <a:noFill/>
+          <a:ln/>
+        </p:spPr>
+        <p:txBody>
+          <a:bodyPr wrap="square" lIns="254" tIns="254" rIns="254" bIns="254" rtlCol="0" anchor="t">
             <a:normAutofit/>
           </a:bodyPr>
           <a:lstStyle/>
           <a:p>
-            <a:pPr algn="ctr" indent="0" marL="0">
-              <a:buNone/>
-            </a:pPr>
-            <a:r>
-              <a:rPr lang="en-US" sz="1500" b="1" dirty="0">
-                <a:solidFill>
-                  <a:srgbClr val="FFFFFF"/>
-                </a:solidFill>
-                <a:latin typeface="Aptos" pitchFamily="34" charset="0"/>
-                <a:ea typeface="Aptos" pitchFamily="34" charset="-122"/>
-                <a:cs typeface="Aptos" pitchFamily="34" charset="-120"/>
-              </a:rPr>
-              <a:t>Lesson</a:t>
-            </a:r>
-            <a:endParaRPr lang="en-US" sz="1500" dirty="0"/>
-          </a:p>
-        </p:txBody>
-      </p:sp>
-      <p:sp>
-        <p:nvSpPr>
-          <p:cNvPr id="15" name="Shape 13"/>
-          <p:cNvSpPr/>
-          <p:nvPr/>
-        </p:nvSpPr>
-        <p:spPr>
-          <a:xfrm>
-            <a:off x="9046464" y="3977640"/>
-            <a:ext cx="972312" cy="749808"/>
-          </a:xfrm>
-          <a:prstGeom prst="roundRect">
-            <a:avLst>
-              <a:gd name="adj" fmla="val 14634"/>
-            </a:avLst>
-          </a:prstGeom>
-          <a:solidFill>
-            <a:srgbClr val="2F8A28"/>
-          </a:solidFill>
-          <a:ln w="12700">
-            <a:solidFill>
-              <a:srgbClr val="2F8A28"/>
-            </a:solidFill>
-            <a:prstDash val="solid"/>
-          </a:ln>
-        </p:spPr>
-      </p:sp>
-      <p:sp>
-        <p:nvSpPr>
-          <p:cNvPr id="16" name="Text 14"/>
-          <p:cNvSpPr/>
-          <p:nvPr/>
-        </p:nvSpPr>
-        <p:spPr>
-          <a:xfrm>
-            <a:off x="9119616" y="4169664"/>
-            <a:ext cx="826008" cy="310896"/>
-          </a:xfrm>
-          <a:prstGeom prst="rect">
-            <a:avLst/>
-          </a:prstGeom>
-          <a:noFill/>
-          <a:ln/>
-        </p:spPr>
-        <p:txBody>
-          <a:bodyPr wrap="square" lIns="0" tIns="0" rIns="0" bIns="0" rtlCol="0" anchor="ctr">
-            <a:normAutofit/>
-          </a:bodyPr>
-          <a:lstStyle/>
-          <a:p>
-            <a:pPr algn="ctr" indent="0" marL="0">
-              <a:buNone/>
-            </a:pPr>
-            <a:r>
-              <a:rPr lang="en-US" sz="1500" b="1" dirty="0">
-                <a:solidFill>
-                  <a:srgbClr val="FFFFFF"/>
-                </a:solidFill>
-                <a:latin typeface="Aptos" pitchFamily="34" charset="0"/>
-                <a:ea typeface="Aptos" pitchFamily="34" charset="-122"/>
-                <a:cs typeface="Aptos" pitchFamily="34" charset="-120"/>
-              </a:rPr>
-              <a:t>Plays</a:t>
-            </a:r>
-            <a:endParaRPr lang="en-US" sz="1500" dirty="0"/>
-          </a:p>
-        </p:txBody>
-      </p:sp>
-      <p:sp>
-        <p:nvSpPr>
-          <p:cNvPr id="17" name="Shape 15"/>
-          <p:cNvSpPr/>
-          <p:nvPr/>
-        </p:nvSpPr>
-        <p:spPr>
-          <a:xfrm>
-            <a:off x="10274808" y="3977640"/>
-            <a:ext cx="972312" cy="749808"/>
-          </a:xfrm>
-          <a:prstGeom prst="roundRect">
-            <a:avLst>
-              <a:gd name="adj" fmla="val 14634"/>
-            </a:avLst>
-          </a:prstGeom>
-          <a:solidFill>
-            <a:srgbClr val="6A4CA3"/>
-          </a:solidFill>
-          <a:ln w="12700">
-            <a:solidFill>
-              <a:srgbClr val="6A4CA3"/>
-            </a:solidFill>
-            <a:prstDash val="solid"/>
-          </a:ln>
-        </p:spPr>
-      </p:sp>
-      <p:sp>
-        <p:nvSpPr>
-          <p:cNvPr id="18" name="Text 16"/>
-          <p:cNvSpPr/>
-          <p:nvPr/>
-        </p:nvSpPr>
-        <p:spPr>
-          <a:xfrm>
-            <a:off x="10347960" y="4169664"/>
-            <a:ext cx="826008" cy="310896"/>
-          </a:xfrm>
-          <a:prstGeom prst="rect">
-            <a:avLst/>
-          </a:prstGeom>
-          <a:noFill/>
-          <a:ln/>
-        </p:spPr>
-        <p:txBody>
-          <a:bodyPr wrap="square" lIns="0" tIns="0" rIns="0" bIns="0" rtlCol="0" anchor="ctr">
-            <a:normAutofit/>
-          </a:bodyPr>
-          <a:lstStyle/>
-          <a:p>
-            <a:pPr algn="ctr" indent="0" marL="0">
-              <a:buNone/>
-            </a:pPr>
-            <a:r>
-              <a:rPr lang="en-US" sz="1500" b="1" dirty="0">
-                <a:solidFill>
-                  <a:srgbClr val="FFFFFF"/>
-                </a:solidFill>
-                <a:latin typeface="Aptos" pitchFamily="34" charset="0"/>
-                <a:ea typeface="Aptos" pitchFamily="34" charset="-122"/>
-                <a:cs typeface="Aptos" pitchFamily="34" charset="-120"/>
-              </a:rPr>
-              <a:t>Action</a:t>
-            </a:r>
-            <a:endParaRPr lang="en-US" sz="1500" dirty="0"/>
+            <a:r>
+              <a:rPr lang="en-US" sz="1380" dirty="0">
+                <a:solidFill>
+                  <a:srgbClr val="17364A"/>
+                </a:solidFill>
+                <a:latin typeface="Aptos" pitchFamily="34" charset="0"/>
+                <a:ea typeface="Aptos" pitchFamily="34" charset="-122"/>
+                <a:cs typeface="Aptos" pitchFamily="34" charset="-120"/>
+              </a:rPr>
+              <a:t>Locate the decision point in the playbook sequence.</a:t>
+            </a:r>
+            <a:endParaRPr lang="en-US" sz="1380" dirty="0"/>
+          </a:p>
+          <a:p>
+            <a:r>
+              <a:rPr lang="en-US" sz="1380" dirty="0">
+                <a:solidFill>
+                  <a:srgbClr val="17364A"/>
+                </a:solidFill>
+                <a:latin typeface="Aptos" pitchFamily="34" charset="0"/>
+                <a:ea typeface="Aptos" pitchFamily="34" charset="-122"/>
+                <a:cs typeface="Aptos" pitchFamily="34" charset="-120"/>
+              </a:rPr>
+              <a:t>Identify who should participate in the work.</a:t>
+            </a:r>
+            <a:endParaRPr lang="en-US" sz="1380" dirty="0"/>
+          </a:p>
+          <a:p>
+            <a:r>
+              <a:rPr lang="en-US" sz="1380" dirty="0">
+                <a:solidFill>
+                  <a:srgbClr val="17364A"/>
+                </a:solidFill>
+                <a:latin typeface="Aptos" pitchFamily="34" charset="0"/>
+                <a:ea typeface="Aptos" pitchFamily="34" charset="-122"/>
+                <a:cs typeface="Aptos" pitchFamily="34" charset="-120"/>
+              </a:rPr>
+              <a:t>Document the review, approval, or implementation step.</a:t>
+            </a:r>
+            <a:endParaRPr lang="en-US" sz="1380" dirty="0"/>
           </a:p>
         </p:txBody>
       </p:sp>
@@ -13315,20 +12686,20 @@
         </p:nvSpPr>
         <p:spPr>
           <a:xfrm>
-            <a:off x="7818120" y="3977640"/>
-            <a:ext cx="972312" cy="749808"/>
+            <a:off x="8046720" y="3794760"/>
+            <a:ext cx="3063240" cy="1600200"/>
           </a:xfrm>
           <a:prstGeom prst="roundRect">
             <a:avLst>
-              <a:gd name="adj" fmla="val 14634"/>
+              <a:gd name="adj" fmla="val 6857"/>
             </a:avLst>
           </a:prstGeom>
           <a:solidFill>
-            <a:srgbClr val="0068B7"/>
+            <a:srgbClr val="FFFFFF"/>
           </a:solidFill>
           <a:ln w="12700">
             <a:solidFill>
-              <a:srgbClr val="0068B7"/>
+              <a:srgbClr val="B9D7E6"/>
             </a:solidFill>
             <a:prstDash val="solid"/>
           </a:ln>
@@ -13342,172 +12713,100 @@
         </p:nvSpPr>
         <p:spPr>
           <a:xfrm>
-            <a:off x="7891272" y="4169664"/>
-            <a:ext cx="826008" cy="310896"/>
-          </a:xfrm>
-          <a:prstGeom prst="rect">
-            <a:avLst/>
-          </a:prstGeom>
-          <a:noFill/>
-          <a:ln/>
-        </p:spPr>
-        <p:txBody>
-          <a:bodyPr wrap="square" lIns="0" tIns="0" rIns="0" bIns="0" rtlCol="0" anchor="ctr">
+            <a:off x="8211312" y="3941064"/>
+            <a:ext cx="2734056" cy="256032"/>
+          </a:xfrm>
+          <a:prstGeom prst="rect">
+            <a:avLst/>
+          </a:prstGeom>
+          <a:noFill/>
+          <a:ln/>
+        </p:spPr>
+        <p:txBody>
+          <a:bodyPr wrap="square" lIns="0" tIns="0" rIns="0" bIns="0" rtlCol="0" anchor="ctr"/>
+          <a:lstStyle/>
+          <a:p>
+            <a:pPr indent="0" marL="0">
+              <a:buNone/>
+            </a:pPr>
+            <a:r>
+              <a:rPr lang="en-US" sz="1300" b="1" dirty="0">
+                <a:solidFill>
+                  <a:srgbClr val="0068B7"/>
+                </a:solidFill>
+                <a:latin typeface="Aptos" pitchFamily="34" charset="0"/>
+                <a:ea typeface="Aptos" pitchFamily="34" charset="-122"/>
+                <a:cs typeface="Aptos" pitchFamily="34" charset="-120"/>
+              </a:rPr>
+              <a:t>Tool selection cues</a:t>
+            </a:r>
+            <a:endParaRPr lang="en-US" sz="1300" dirty="0"/>
+          </a:p>
+        </p:txBody>
+      </p:sp>
+      <p:sp>
+        <p:nvSpPr>
+          <p:cNvPr id="15" name="Text 13"/>
+          <p:cNvSpPr/>
+          <p:nvPr/>
+        </p:nvSpPr>
+        <p:spPr>
+          <a:xfrm>
+            <a:off x="8229600" y="4306824"/>
+            <a:ext cx="2679192" cy="941832"/>
+          </a:xfrm>
+          <a:prstGeom prst="rect">
+            <a:avLst/>
+          </a:prstGeom>
+          <a:noFill/>
+          <a:ln/>
+        </p:spPr>
+        <p:txBody>
+          <a:bodyPr wrap="square" lIns="254" tIns="254" rIns="254" bIns="254" rtlCol="0" anchor="t">
             <a:normAutofit/>
           </a:bodyPr>
           <a:lstStyle/>
           <a:p>
-            <a:pPr algn="ctr" indent="0" marL="0">
-              <a:buNone/>
-            </a:pPr>
-            <a:r>
-              <a:rPr lang="en-US" sz="1500" b="1" dirty="0">
-                <a:solidFill>
-                  <a:srgbClr val="FFFFFF"/>
-                </a:solidFill>
-                <a:latin typeface="Aptos" pitchFamily="34" charset="0"/>
-                <a:ea typeface="Aptos" pitchFamily="34" charset="-122"/>
-                <a:cs typeface="Aptos" pitchFamily="34" charset="-120"/>
-              </a:rPr>
-              <a:t>Concept</a:t>
-            </a:r>
-            <a:endParaRPr lang="en-US" sz="1500" dirty="0"/>
-          </a:p>
-        </p:txBody>
-      </p:sp>
-      <p:sp>
-        <p:nvSpPr>
-          <p:cNvPr id="15" name="Shape 13"/>
-          <p:cNvSpPr/>
-          <p:nvPr/>
-        </p:nvSpPr>
-        <p:spPr>
-          <a:xfrm>
-            <a:off x="9046464" y="3977640"/>
-            <a:ext cx="972312" cy="749808"/>
-          </a:xfrm>
-          <a:prstGeom prst="roundRect">
-            <a:avLst>
-              <a:gd name="adj" fmla="val 14634"/>
-            </a:avLst>
-          </a:prstGeom>
-          <a:solidFill>
-            <a:srgbClr val="2F8A28"/>
-          </a:solidFill>
-          <a:ln w="12700">
-            <a:solidFill>
-              <a:srgbClr val="2F8A28"/>
-            </a:solidFill>
-            <a:prstDash val="solid"/>
-          </a:ln>
-        </p:spPr>
-      </p:sp>
-      <p:sp>
-        <p:nvSpPr>
-          <p:cNvPr id="16" name="Text 14"/>
-          <p:cNvSpPr/>
-          <p:nvPr/>
-        </p:nvSpPr>
-        <p:spPr>
-          <a:xfrm>
-            <a:off x="9119616" y="4169664"/>
-            <a:ext cx="826008" cy="310896"/>
-          </a:xfrm>
-          <a:prstGeom prst="rect">
-            <a:avLst/>
-          </a:prstGeom>
-          <a:noFill/>
-          <a:ln/>
-        </p:spPr>
-        <p:txBody>
-          <a:bodyPr wrap="square" lIns="0" tIns="0" rIns="0" bIns="0" rtlCol="0" anchor="ctr">
-            <a:normAutofit/>
-          </a:bodyPr>
-          <a:lstStyle/>
-          <a:p>
-            <a:pPr algn="ctr" indent="0" marL="0">
-              <a:buNone/>
-            </a:pPr>
-            <a:r>
-              <a:rPr lang="en-US" sz="1500" b="1" dirty="0">
-                <a:solidFill>
-                  <a:srgbClr val="FFFFFF"/>
-                </a:solidFill>
-                <a:latin typeface="Aptos" pitchFamily="34" charset="0"/>
-                <a:ea typeface="Aptos" pitchFamily="34" charset="-122"/>
-                <a:cs typeface="Aptos" pitchFamily="34" charset="-120"/>
-              </a:rPr>
-              <a:t>Tool</a:t>
-            </a:r>
-            <a:endParaRPr lang="en-US" sz="1500" dirty="0"/>
-          </a:p>
-        </p:txBody>
-      </p:sp>
-      <p:sp>
-        <p:nvSpPr>
-          <p:cNvPr id="17" name="Shape 15"/>
-          <p:cNvSpPr/>
-          <p:nvPr/>
-        </p:nvSpPr>
-        <p:spPr>
-          <a:xfrm>
-            <a:off x="10274808" y="3977640"/>
-            <a:ext cx="972312" cy="749808"/>
-          </a:xfrm>
-          <a:prstGeom prst="roundRect">
-            <a:avLst>
-              <a:gd name="adj" fmla="val 14634"/>
-            </a:avLst>
-          </a:prstGeom>
-          <a:solidFill>
-            <a:srgbClr val="D69A2D"/>
-          </a:solidFill>
-          <a:ln w="12700">
-            <a:solidFill>
-              <a:srgbClr val="D69A2D"/>
-            </a:solidFill>
-            <a:prstDash val="solid"/>
-          </a:ln>
-        </p:spPr>
-      </p:sp>
-      <p:sp>
-        <p:nvSpPr>
-          <p:cNvPr id="18" name="Text 16"/>
-          <p:cNvSpPr/>
-          <p:nvPr/>
-        </p:nvSpPr>
-        <p:spPr>
-          <a:xfrm>
-            <a:off x="10347960" y="4169664"/>
-            <a:ext cx="826008" cy="310896"/>
-          </a:xfrm>
-          <a:prstGeom prst="rect">
-            <a:avLst/>
-          </a:prstGeom>
-          <a:noFill/>
-          <a:ln/>
-        </p:spPr>
-        <p:txBody>
-          <a:bodyPr wrap="square" lIns="0" tIns="0" rIns="0" bIns="0" rtlCol="0" anchor="ctr">
-            <a:normAutofit/>
-          </a:bodyPr>
-          <a:lstStyle/>
-          <a:p>
-            <a:pPr algn="ctr" indent="0" marL="0">
-              <a:buNone/>
-            </a:pPr>
-            <a:r>
-              <a:rPr lang="en-US" sz="1500" b="1" dirty="0">
-                <a:solidFill>
-                  <a:srgbClr val="FFFFFF"/>
-                </a:solidFill>
-                <a:latin typeface="Aptos" pitchFamily="34" charset="0"/>
-                <a:ea typeface="Aptos" pitchFamily="34" charset="-122"/>
-                <a:cs typeface="Aptos" pitchFamily="34" charset="-120"/>
-              </a:rPr>
-              <a:t>Artifact</a:t>
-            </a:r>
-            <a:endParaRPr lang="en-US" sz="1500" dirty="0"/>
+            <a:r>
+              <a:rPr lang="en-US" sz="1380" dirty="0">
+                <a:solidFill>
+                  <a:srgbClr val="17364A"/>
+                </a:solidFill>
+                <a:latin typeface="Aptos" pitchFamily="34" charset="0"/>
+                <a:ea typeface="Aptos" pitchFamily="34" charset="-122"/>
+                <a:cs typeface="Aptos" pitchFamily="34" charset="-120"/>
+              </a:rPr>
+              <a:t>Use a tool when no comparable local process exists.</a:t>
+            </a:r>
+            <a:endParaRPr lang="en-US" sz="1380" dirty="0"/>
+          </a:p>
+          <a:p>
+            <a:r>
+              <a:rPr lang="en-US" sz="1380" dirty="0">
+                <a:solidFill>
+                  <a:srgbClr val="17364A"/>
+                </a:solidFill>
+                <a:latin typeface="Aptos" pitchFamily="34" charset="0"/>
+                <a:ea typeface="Aptos" pitchFamily="34" charset="-122"/>
+                <a:cs typeface="Aptos" pitchFamily="34" charset="-120"/>
+              </a:rPr>
+              <a:t>Adapt existing department templates when they already fit the purpose.</a:t>
+            </a:r>
+            <a:endParaRPr lang="en-US" sz="1380" dirty="0"/>
+          </a:p>
+          <a:p>
+            <a:r>
+              <a:rPr lang="en-US" sz="1380" dirty="0">
+                <a:solidFill>
+                  <a:srgbClr val="17364A"/>
+                </a:solidFill>
+                <a:latin typeface="Aptos" pitchFamily="34" charset="0"/>
+                <a:ea typeface="Aptos" pitchFamily="34" charset="-122"/>
+                <a:cs typeface="Aptos" pitchFamily="34" charset="-120"/>
+              </a:rPr>
+              <a:t>Save the completed artifact as evidence of the decision.</a:t>
+            </a:r>
+            <a:endParaRPr lang="en-US" sz="1380" dirty="0"/>
           </a:p>
         </p:txBody>
       </p:sp>
@@ -13980,13 +13279,11 @@
             </a:avLst>
           </a:prstGeom>
           <a:solidFill>
-            <a:srgbClr val="FFFFFF">
-              <a:alpha val="88000"/>
-            </a:srgbClr>
+            <a:srgbClr val="FFFFFF"/>
           </a:solidFill>
           <a:ln w="12700">
             <a:solidFill>
-              <a:srgbClr val="D6E8F2"/>
+              <a:srgbClr val="B9D7E6"/>
             </a:solidFill>
             <a:prstDash val="solid"/>
           </a:ln>
@@ -13994,119 +13291,112 @@
       </p:sp>
       <p:sp>
         <p:nvSpPr>
-          <p:cNvPr id="14" name="Shape 12"/>
-          <p:cNvSpPr/>
-          <p:nvPr/>
-        </p:nvSpPr>
-        <p:spPr>
-          <a:xfrm>
-            <a:off x="8074152" y="3291840"/>
-            <a:ext cx="2596896" cy="749808"/>
-          </a:xfrm>
-          <a:prstGeom prst="rect">
-            <a:avLst/>
-          </a:prstGeom>
-          <a:solidFill>
-            <a:srgbClr val="EAF6F8"/>
-          </a:solidFill>
-          <a:ln w="12700">
-            <a:solidFill>
-              <a:srgbClr val="8ABBD8"/>
-            </a:solidFill>
-            <a:prstDash val="solid"/>
-          </a:ln>
-        </p:spPr>
-      </p:sp>
-      <p:sp>
-        <p:nvSpPr>
-          <p:cNvPr id="15" name="Shape 13"/>
-          <p:cNvSpPr/>
-          <p:nvPr/>
-        </p:nvSpPr>
-        <p:spPr>
-          <a:xfrm>
-            <a:off x="8202168" y="3721608"/>
-            <a:ext cx="2340864" cy="0"/>
-          </a:xfrm>
-          <a:prstGeom prst="line">
-            <a:avLst/>
-          </a:prstGeom>
-          <a:noFill/>
-          <a:ln w="19050">
-            <a:solidFill>
-              <a:srgbClr val="0068B7"/>
-            </a:solidFill>
-            <a:prstDash val="solid"/>
-          </a:ln>
-        </p:spPr>
+          <p:cNvPr id="14" name="Text 12"/>
+          <p:cNvSpPr/>
+          <p:nvPr/>
+        </p:nvSpPr>
+        <p:spPr>
+          <a:xfrm>
+            <a:off x="7799832" y="2935224"/>
+            <a:ext cx="3145536" cy="256032"/>
+          </a:xfrm>
+          <a:prstGeom prst="rect">
+            <a:avLst/>
+          </a:prstGeom>
+          <a:noFill/>
+          <a:ln/>
+        </p:spPr>
+        <p:txBody>
+          <a:bodyPr wrap="square" lIns="0" tIns="0" rIns="0" bIns="0" rtlCol="0" anchor="ctr"/>
+          <a:lstStyle/>
+          <a:p>
+            <a:pPr indent="0" marL="0">
+              <a:buNone/>
+            </a:pPr>
+            <a:r>
+              <a:rPr lang="en-US" sz="1300" b="1" dirty="0">
+                <a:solidFill>
+                  <a:srgbClr val="0068B7"/>
+                </a:solidFill>
+                <a:latin typeface="Aptos" pitchFamily="34" charset="0"/>
+                <a:ea typeface="Aptos" pitchFamily="34" charset="-122"/>
+                <a:cs typeface="Aptos" pitchFamily="34" charset="-120"/>
+              </a:rPr>
+              <a:t>Concept checkpoints</a:t>
+            </a:r>
+            <a:endParaRPr lang="en-US" sz="1300" dirty="0"/>
+          </a:p>
+        </p:txBody>
+      </p:sp>
+      <p:sp>
+        <p:nvSpPr>
+          <p:cNvPr id="15" name="Text 13"/>
+          <p:cNvSpPr/>
+          <p:nvPr/>
+        </p:nvSpPr>
+        <p:spPr>
+          <a:xfrm>
+            <a:off x="7818120" y="3300984"/>
+            <a:ext cx="3090672" cy="877824"/>
+          </a:xfrm>
+          <a:prstGeom prst="rect">
+            <a:avLst/>
+          </a:prstGeom>
+          <a:noFill/>
+          <a:ln/>
+        </p:spPr>
+        <p:txBody>
+          <a:bodyPr wrap="square" lIns="254" tIns="254" rIns="254" bIns="254" rtlCol="0" anchor="t">
+            <a:normAutofit/>
+          </a:bodyPr>
+          <a:lstStyle/>
+          <a:p>
+            <a:r>
+              <a:rPr lang="en-US" sz="1380" dirty="0">
+                <a:solidFill>
+                  <a:srgbClr val="17364A"/>
+                </a:solidFill>
+                <a:latin typeface="Aptos" pitchFamily="34" charset="0"/>
+                <a:ea typeface="Aptos" pitchFamily="34" charset="-122"/>
+                <a:cs typeface="Aptos" pitchFamily="34" charset="-120"/>
+              </a:rPr>
+              <a:t>Develop criteria for prioritizing AI use cases based on public health value, readiness,.</a:t>
+            </a:r>
+            <a:endParaRPr lang="en-US" sz="1380" dirty="0"/>
+          </a:p>
+          <a:p>
+            <a:r>
+              <a:rPr lang="en-US" sz="1380" dirty="0">
+                <a:solidFill>
+                  <a:srgbClr val="17364A"/>
+                </a:solidFill>
+                <a:latin typeface="Aptos" pitchFamily="34" charset="0"/>
+                <a:ea typeface="Aptos" pitchFamily="34" charset="-122"/>
+                <a:cs typeface="Aptos" pitchFamily="34" charset="-120"/>
+              </a:rPr>
+              <a:t>Create a portfolio view that balances innovation, risk, equity, and operational capacity.</a:t>
+            </a:r>
+            <a:endParaRPr lang="en-US" sz="1380" dirty="0"/>
+          </a:p>
+          <a:p>
+            <a:r>
+              <a:rPr lang="en-US" sz="1380" dirty="0">
+                <a:solidFill>
+                  <a:srgbClr val="17364A"/>
+                </a:solidFill>
+                <a:latin typeface="Aptos" pitchFamily="34" charset="0"/>
+                <a:ea typeface="Aptos" pitchFamily="34" charset="-122"/>
+                <a:cs typeface="Aptos" pitchFamily="34" charset="-120"/>
+              </a:rPr>
+              <a:t>Produce a use case prioritization rubric for governance or leadership review.</a:t>
+            </a:r>
+            <a:endParaRPr lang="en-US" sz="1380" dirty="0"/>
+          </a:p>
+        </p:txBody>
       </p:sp>
       <p:sp>
         <p:nvSpPr>
           <p:cNvPr id="16" name="Shape 14"/>
-          <p:cNvSpPr/>
-          <p:nvPr/>
-        </p:nvSpPr>
-        <p:spPr>
-          <a:xfrm>
-            <a:off x="9198864" y="4206240"/>
-            <a:ext cx="347472" cy="347472"/>
-          </a:xfrm>
-          <a:prstGeom prst="ellipse">
-            <a:avLst/>
-          </a:prstGeom>
-          <a:solidFill>
-            <a:srgbClr val="2F8A28"/>
-          </a:solidFill>
-          <a:ln w="12700">
-            <a:solidFill>
-              <a:srgbClr val="2F8A28"/>
-            </a:solidFill>
-            <a:prstDash val="solid"/>
-          </a:ln>
-        </p:spPr>
-      </p:sp>
-      <p:sp>
-        <p:nvSpPr>
-          <p:cNvPr id="17" name="Text 15"/>
-          <p:cNvSpPr/>
-          <p:nvPr/>
-        </p:nvSpPr>
-        <p:spPr>
-          <a:xfrm>
-            <a:off x="7909560" y="3977640"/>
-            <a:ext cx="2926080" cy="182880"/>
-          </a:xfrm>
-          <a:prstGeom prst="rect">
-            <a:avLst/>
-          </a:prstGeom>
-          <a:noFill/>
-          <a:ln/>
-        </p:spPr>
-        <p:txBody>
-          <a:bodyPr wrap="square" lIns="0" tIns="0" rIns="0" bIns="0" rtlCol="0" anchor="ctr"/>
-          <a:lstStyle/>
-          <a:p>
-            <a:pPr algn="ctr" indent="0" marL="0">
-              <a:buNone/>
-            </a:pPr>
-            <a:r>
-              <a:rPr lang="en-US" sz="1000" dirty="0">
-                <a:solidFill>
-                  <a:srgbClr val="003A63"/>
-                </a:solidFill>
-                <a:latin typeface="Aptos" pitchFamily="34" charset="0"/>
-                <a:ea typeface="Aptos" pitchFamily="34" charset="-122"/>
-                <a:cs typeface="Aptos" pitchFamily="34" charset="-120"/>
-              </a:rPr>
-              <a:t>Concept to action</a:t>
-            </a:r>
-            <a:endParaRPr lang="en-US" sz="1000" dirty="0"/>
-          </a:p>
-        </p:txBody>
-      </p:sp>
-      <p:sp>
-        <p:nvSpPr>
-          <p:cNvPr id="18" name="Shape 16"/>
           <p:cNvSpPr/>
           <p:nvPr/>
         </p:nvSpPr>
@@ -14133,7 +13423,7 @@
       </p:sp>
       <p:sp>
         <p:nvSpPr>
-          <p:cNvPr id="19" name="Text 17"/>
+          <p:cNvPr id="17" name="Text 15"/>
           <p:cNvSpPr/>
           <p:nvPr/>
         </p:nvSpPr>
@@ -14172,7 +13462,7 @@
       </p:sp>
       <p:sp>
         <p:nvSpPr>
-          <p:cNvPr id="20" name="Text 18"/>
+          <p:cNvPr id="18" name="Text 16"/>
           <p:cNvSpPr/>
           <p:nvPr/>
         </p:nvSpPr>
@@ -14680,13 +13970,11 @@
             </a:avLst>
           </a:prstGeom>
           <a:solidFill>
-            <a:srgbClr val="FFFFFF">
-              <a:alpha val="88000"/>
-            </a:srgbClr>
+            <a:srgbClr val="FFFFFF"/>
           </a:solidFill>
           <a:ln w="12700">
             <a:solidFill>
-              <a:srgbClr val="D6E8F2"/>
+              <a:srgbClr val="B9D7E6"/>
             </a:solidFill>
             <a:prstDash val="solid"/>
           </a:ln>
@@ -14694,119 +13982,112 @@
       </p:sp>
       <p:sp>
         <p:nvSpPr>
-          <p:cNvPr id="14" name="Shape 12"/>
-          <p:cNvSpPr/>
-          <p:nvPr/>
-        </p:nvSpPr>
-        <p:spPr>
-          <a:xfrm>
-            <a:off x="8074152" y="3291840"/>
-            <a:ext cx="2596896" cy="749808"/>
-          </a:xfrm>
-          <a:prstGeom prst="rect">
-            <a:avLst/>
-          </a:prstGeom>
-          <a:solidFill>
-            <a:srgbClr val="EAF6F8"/>
-          </a:solidFill>
-          <a:ln w="12700">
-            <a:solidFill>
-              <a:srgbClr val="8ABBD8"/>
-            </a:solidFill>
-            <a:prstDash val="solid"/>
-          </a:ln>
-        </p:spPr>
-      </p:sp>
-      <p:sp>
-        <p:nvSpPr>
-          <p:cNvPr id="15" name="Shape 13"/>
-          <p:cNvSpPr/>
-          <p:nvPr/>
-        </p:nvSpPr>
-        <p:spPr>
-          <a:xfrm>
-            <a:off x="8202168" y="3721608"/>
-            <a:ext cx="2340864" cy="0"/>
-          </a:xfrm>
-          <a:prstGeom prst="line">
-            <a:avLst/>
-          </a:prstGeom>
-          <a:noFill/>
-          <a:ln w="19050">
-            <a:solidFill>
-              <a:srgbClr val="0068B7"/>
-            </a:solidFill>
-            <a:prstDash val="solid"/>
-          </a:ln>
-        </p:spPr>
+          <p:cNvPr id="14" name="Text 12"/>
+          <p:cNvSpPr/>
+          <p:nvPr/>
+        </p:nvSpPr>
+        <p:spPr>
+          <a:xfrm>
+            <a:off x="7799832" y="2935224"/>
+            <a:ext cx="3145536" cy="256032"/>
+          </a:xfrm>
+          <a:prstGeom prst="rect">
+            <a:avLst/>
+          </a:prstGeom>
+          <a:noFill/>
+          <a:ln/>
+        </p:spPr>
+        <p:txBody>
+          <a:bodyPr wrap="square" lIns="0" tIns="0" rIns="0" bIns="0" rtlCol="0" anchor="ctr"/>
+          <a:lstStyle/>
+          <a:p>
+            <a:pPr indent="0" marL="0">
+              <a:buNone/>
+            </a:pPr>
+            <a:r>
+              <a:rPr lang="en-US" sz="1300" b="1" dirty="0">
+                <a:solidFill>
+                  <a:srgbClr val="0068B7"/>
+                </a:solidFill>
+                <a:latin typeface="Aptos" pitchFamily="34" charset="0"/>
+                <a:ea typeface="Aptos" pitchFamily="34" charset="-122"/>
+                <a:cs typeface="Aptos" pitchFamily="34" charset="-120"/>
+              </a:rPr>
+              <a:t>Concept checkpoints</a:t>
+            </a:r>
+            <a:endParaRPr lang="en-US" sz="1300" dirty="0"/>
+          </a:p>
+        </p:txBody>
+      </p:sp>
+      <p:sp>
+        <p:nvSpPr>
+          <p:cNvPr id="15" name="Text 13"/>
+          <p:cNvSpPr/>
+          <p:nvPr/>
+        </p:nvSpPr>
+        <p:spPr>
+          <a:xfrm>
+            <a:off x="7818120" y="3300984"/>
+            <a:ext cx="3090672" cy="877824"/>
+          </a:xfrm>
+          <a:prstGeom prst="rect">
+            <a:avLst/>
+          </a:prstGeom>
+          <a:noFill/>
+          <a:ln/>
+        </p:spPr>
+        <p:txBody>
+          <a:bodyPr wrap="square" lIns="254" tIns="254" rIns="254" bIns="254" rtlCol="0" anchor="t">
+            <a:normAutofit/>
+          </a:bodyPr>
+          <a:lstStyle/>
+          <a:p>
+            <a:r>
+              <a:rPr lang="en-US" sz="1380" dirty="0">
+                <a:solidFill>
+                  <a:srgbClr val="17364A"/>
+                </a:solidFill>
+                <a:latin typeface="Aptos" pitchFamily="34" charset="0"/>
+                <a:ea typeface="Aptos" pitchFamily="34" charset="-122"/>
+                <a:cs typeface="Aptos" pitchFamily="34" charset="-120"/>
+              </a:rPr>
+              <a:t>Leaders need a portfolio strategy that helps distinguish high-value public health uses.</a:t>
+            </a:r>
+            <a:endParaRPr lang="en-US" sz="1380" dirty="0"/>
+          </a:p>
+          <a:p>
+            <a:r>
+              <a:rPr lang="en-US" sz="1380" dirty="0">
+                <a:solidFill>
+                  <a:srgbClr val="17364A"/>
+                </a:solidFill>
+                <a:latin typeface="Aptos" pitchFamily="34" charset="0"/>
+                <a:ea typeface="Aptos" pitchFamily="34" charset="-122"/>
+                <a:cs typeface="Aptos" pitchFamily="34" charset="-120"/>
+              </a:rPr>
+              <a:t>A portfolio approach organizes AI opportunities across programs, risk levels, readiness,.</a:t>
+            </a:r>
+            <a:endParaRPr lang="en-US" sz="1380" dirty="0"/>
+          </a:p>
+          <a:p>
+            <a:r>
+              <a:rPr lang="en-US" sz="1380" dirty="0">
+                <a:solidFill>
+                  <a:srgbClr val="17364A"/>
+                </a:solidFill>
+                <a:latin typeface="Aptos" pitchFamily="34" charset="0"/>
+                <a:ea typeface="Aptos" pitchFamily="34" charset="-122"/>
+                <a:cs typeface="Aptos" pitchFamily="34" charset="-120"/>
+              </a:rPr>
+              <a:t>This module teaches leaders how to create an AI use case intake and prioritization process.</a:t>
+            </a:r>
+            <a:endParaRPr lang="en-US" sz="1380" dirty="0"/>
+          </a:p>
+        </p:txBody>
       </p:sp>
       <p:sp>
         <p:nvSpPr>
           <p:cNvPr id="16" name="Shape 14"/>
-          <p:cNvSpPr/>
-          <p:nvPr/>
-        </p:nvSpPr>
-        <p:spPr>
-          <a:xfrm>
-            <a:off x="9198864" y="4206240"/>
-            <a:ext cx="347472" cy="347472"/>
-          </a:xfrm>
-          <a:prstGeom prst="ellipse">
-            <a:avLst/>
-          </a:prstGeom>
-          <a:solidFill>
-            <a:srgbClr val="2F8A28"/>
-          </a:solidFill>
-          <a:ln w="12700">
-            <a:solidFill>
-              <a:srgbClr val="2F8A28"/>
-            </a:solidFill>
-            <a:prstDash val="solid"/>
-          </a:ln>
-        </p:spPr>
-      </p:sp>
-      <p:sp>
-        <p:nvSpPr>
-          <p:cNvPr id="17" name="Text 15"/>
-          <p:cNvSpPr/>
-          <p:nvPr/>
-        </p:nvSpPr>
-        <p:spPr>
-          <a:xfrm>
-            <a:off x="7909560" y="3977640"/>
-            <a:ext cx="2926080" cy="182880"/>
-          </a:xfrm>
-          <a:prstGeom prst="rect">
-            <a:avLst/>
-          </a:prstGeom>
-          <a:noFill/>
-          <a:ln/>
-        </p:spPr>
-        <p:txBody>
-          <a:bodyPr wrap="square" lIns="0" tIns="0" rIns="0" bIns="0" rtlCol="0" anchor="ctr"/>
-          <a:lstStyle/>
-          <a:p>
-            <a:pPr algn="ctr" indent="0" marL="0">
-              <a:buNone/>
-            </a:pPr>
-            <a:r>
-              <a:rPr lang="en-US" sz="1000" dirty="0">
-                <a:solidFill>
-                  <a:srgbClr val="003A63"/>
-                </a:solidFill>
-                <a:latin typeface="Aptos" pitchFamily="34" charset="0"/>
-                <a:ea typeface="Aptos" pitchFamily="34" charset="-122"/>
-                <a:cs typeface="Aptos" pitchFamily="34" charset="-120"/>
-              </a:rPr>
-              <a:t>Concept to action</a:t>
-            </a:r>
-            <a:endParaRPr lang="en-US" sz="1000" dirty="0"/>
-          </a:p>
-        </p:txBody>
-      </p:sp>
-      <p:sp>
-        <p:nvSpPr>
-          <p:cNvPr id="18" name="Shape 16"/>
           <p:cNvSpPr/>
           <p:nvPr/>
         </p:nvSpPr>
@@ -14833,7 +14114,7 @@
       </p:sp>
       <p:sp>
         <p:nvSpPr>
-          <p:cNvPr id="19" name="Text 17"/>
+          <p:cNvPr id="17" name="Text 15"/>
           <p:cNvSpPr/>
           <p:nvPr/>
         </p:nvSpPr>
@@ -14872,7 +14153,7 @@
       </p:sp>
       <p:sp>
         <p:nvSpPr>
-          <p:cNvPr id="20" name="Text 18"/>
+          <p:cNvPr id="18" name="Text 16"/>
           <p:cNvSpPr/>
           <p:nvPr/>
         </p:nvSpPr>
@@ -15380,13 +14661,11 @@
             </a:avLst>
           </a:prstGeom>
           <a:solidFill>
-            <a:srgbClr val="FFFFFF">
-              <a:alpha val="88000"/>
-            </a:srgbClr>
+            <a:srgbClr val="FFFFFF"/>
           </a:solidFill>
           <a:ln w="12700">
             <a:solidFill>
-              <a:srgbClr val="D6E8F2"/>
+              <a:srgbClr val="B9D7E6"/>
             </a:solidFill>
             <a:prstDash val="solid"/>
           </a:ln>
@@ -15394,190 +14673,112 @@
       </p:sp>
       <p:sp>
         <p:nvSpPr>
-          <p:cNvPr id="14" name="Shape 12"/>
-          <p:cNvSpPr/>
-          <p:nvPr/>
-        </p:nvSpPr>
-        <p:spPr>
-          <a:xfrm>
-            <a:off x="7891272" y="3108960"/>
-            <a:ext cx="566928" cy="566928"/>
-          </a:xfrm>
-          <a:prstGeom prst="ellipse">
-            <a:avLst/>
-          </a:prstGeom>
-          <a:solidFill>
-            <a:srgbClr val="0068B7"/>
-          </a:solidFill>
-          <a:ln w="12700">
-            <a:solidFill>
-              <a:srgbClr val="0068B7"/>
-            </a:solidFill>
-            <a:prstDash val="solid"/>
-          </a:ln>
-        </p:spPr>
-      </p:sp>
-      <p:sp>
-        <p:nvSpPr>
-          <p:cNvPr id="15" name="Shape 13"/>
-          <p:cNvSpPr/>
-          <p:nvPr/>
-        </p:nvSpPr>
-        <p:spPr>
-          <a:xfrm>
-            <a:off x="10287000" y="3108960"/>
-            <a:ext cx="566928" cy="566928"/>
-          </a:xfrm>
-          <a:prstGeom prst="ellipse">
-            <a:avLst/>
-          </a:prstGeom>
-          <a:solidFill>
-            <a:srgbClr val="2F8A28"/>
-          </a:solidFill>
-          <a:ln w="12700">
-            <a:solidFill>
-              <a:srgbClr val="2F8A28"/>
-            </a:solidFill>
-            <a:prstDash val="solid"/>
-          </a:ln>
-        </p:spPr>
+          <p:cNvPr id="14" name="Text 12"/>
+          <p:cNvSpPr/>
+          <p:nvPr/>
+        </p:nvSpPr>
+        <p:spPr>
+          <a:xfrm>
+            <a:off x="7799832" y="2935224"/>
+            <a:ext cx="3145536" cy="256032"/>
+          </a:xfrm>
+          <a:prstGeom prst="rect">
+            <a:avLst/>
+          </a:prstGeom>
+          <a:noFill/>
+          <a:ln/>
+        </p:spPr>
+        <p:txBody>
+          <a:bodyPr wrap="square" lIns="0" tIns="0" rIns="0" bIns="0" rtlCol="0" anchor="ctr"/>
+          <a:lstStyle/>
+          <a:p>
+            <a:pPr indent="0" marL="0">
+              <a:buNone/>
+            </a:pPr>
+            <a:r>
+              <a:rPr lang="en-US" sz="1300" b="1" dirty="0">
+                <a:solidFill>
+                  <a:srgbClr val="0068B7"/>
+                </a:solidFill>
+                <a:latin typeface="Aptos" pitchFamily="34" charset="0"/>
+                <a:ea typeface="Aptos" pitchFamily="34" charset="-122"/>
+                <a:cs typeface="Aptos" pitchFamily="34" charset="-120"/>
+              </a:rPr>
+              <a:t>Concept checkpoints</a:t>
+            </a:r>
+            <a:endParaRPr lang="en-US" sz="1300" dirty="0"/>
+          </a:p>
+        </p:txBody>
+      </p:sp>
+      <p:sp>
+        <p:nvSpPr>
+          <p:cNvPr id="15" name="Text 13"/>
+          <p:cNvSpPr/>
+          <p:nvPr/>
+        </p:nvSpPr>
+        <p:spPr>
+          <a:xfrm>
+            <a:off x="7818120" y="3300984"/>
+            <a:ext cx="3090672" cy="877824"/>
+          </a:xfrm>
+          <a:prstGeom prst="rect">
+            <a:avLst/>
+          </a:prstGeom>
+          <a:noFill/>
+          <a:ln/>
+        </p:spPr>
+        <p:txBody>
+          <a:bodyPr wrap="square" lIns="254" tIns="254" rIns="254" bIns="254" rtlCol="0" anchor="t">
+            <a:normAutofit/>
+          </a:bodyPr>
+          <a:lstStyle/>
+          <a:p>
+            <a:r>
+              <a:rPr lang="en-US" sz="1380" dirty="0">
+                <a:solidFill>
+                  <a:srgbClr val="17364A"/>
+                </a:solidFill>
+                <a:latin typeface="Aptos" pitchFamily="34" charset="0"/>
+                <a:ea typeface="Aptos" pitchFamily="34" charset="-122"/>
+                <a:cs typeface="Aptos" pitchFamily="34" charset="-120"/>
+              </a:rPr>
+              <a:t>This national-level module is intended for training and planning purposes.</a:t>
+            </a:r>
+            <a:endParaRPr lang="en-US" sz="1380" dirty="0"/>
+          </a:p>
+          <a:p>
+            <a:r>
+              <a:rPr lang="en-US" sz="1380" dirty="0">
+                <a:solidFill>
+                  <a:srgbClr val="17364A"/>
+                </a:solidFill>
+                <a:latin typeface="Aptos" pitchFamily="34" charset="0"/>
+                <a:ea typeface="Aptos" pitchFamily="34" charset="-122"/>
+                <a:cs typeface="Aptos" pitchFamily="34" charset="-120"/>
+              </a:rPr>
+              <a:t>It does not replace legal, privacy, procurement, civil rights, records, or agency policy.</a:t>
+            </a:r>
+            <a:endParaRPr lang="en-US" sz="1380" dirty="0"/>
+          </a:p>
+          <a:p>
+            <a:r>
+              <a:rPr lang="en-US" sz="1380" dirty="0">
+                <a:solidFill>
+                  <a:srgbClr val="17364A"/>
+                </a:solidFill>
+                <a:latin typeface="Aptos" pitchFamily="34" charset="0"/>
+                <a:ea typeface="Aptos" pitchFamily="34" charset="-122"/>
+                <a:cs typeface="Aptos" pitchFamily="34" charset="-120"/>
+              </a:rPr>
+              <a:t>Learners should confirm applicable requirements in their own jurisdiction and organization.</a:t>
+            </a:r>
+            <a:endParaRPr lang="en-US" sz="1380" dirty="0"/>
+          </a:p>
+        </p:txBody>
       </p:sp>
       <p:sp>
         <p:nvSpPr>
           <p:cNvPr id="16" name="Shape 14"/>
-          <p:cNvSpPr/>
-          <p:nvPr/>
-        </p:nvSpPr>
-        <p:spPr>
-          <a:xfrm>
-            <a:off x="9089136" y="3456432"/>
-            <a:ext cx="566928" cy="566928"/>
-          </a:xfrm>
-          <a:prstGeom prst="ellipse">
-            <a:avLst/>
-          </a:prstGeom>
-          <a:solidFill>
-            <a:srgbClr val="6A4CA3"/>
-          </a:solidFill>
-          <a:ln w="12700">
-            <a:solidFill>
-              <a:srgbClr val="6A4CA3"/>
-            </a:solidFill>
-            <a:prstDash val="solid"/>
-          </a:ln>
-        </p:spPr>
-      </p:sp>
-      <p:sp>
-        <p:nvSpPr>
-          <p:cNvPr id="17" name="Shape 15"/>
-          <p:cNvSpPr/>
-          <p:nvPr/>
-        </p:nvSpPr>
-        <p:spPr>
-          <a:xfrm>
-            <a:off x="8385048" y="3419856"/>
-            <a:ext cx="1975104" cy="0"/>
-          </a:xfrm>
-          <a:prstGeom prst="line">
-            <a:avLst/>
-          </a:prstGeom>
-          <a:noFill/>
-          <a:ln w="25400">
-            <a:solidFill>
-              <a:srgbClr val="8ABBD8"/>
-            </a:solidFill>
-            <a:prstDash val="solid"/>
-          </a:ln>
-        </p:spPr>
-      </p:sp>
-      <p:sp>
-        <p:nvSpPr>
-          <p:cNvPr id="18" name="Shape 16"/>
-          <p:cNvSpPr/>
-          <p:nvPr/>
-        </p:nvSpPr>
-        <p:spPr>
-          <a:xfrm>
-            <a:off x="8202168" y="3630168"/>
-            <a:ext cx="1170432" cy="118872"/>
-          </a:xfrm>
-          <a:prstGeom prst="line">
-            <a:avLst/>
-          </a:prstGeom>
-          <a:noFill/>
-          <a:ln w="25400">
-            <a:solidFill>
-              <a:srgbClr val="8ABBD8"/>
-            </a:solidFill>
-            <a:prstDash val="solid"/>
-          </a:ln>
-        </p:spPr>
-      </p:sp>
-      <p:sp>
-        <p:nvSpPr>
-          <p:cNvPr id="19" name="Shape 17"/>
-          <p:cNvSpPr/>
-          <p:nvPr/>
-        </p:nvSpPr>
-        <p:spPr>
-          <a:xfrm>
-            <a:off x="10543032" y="3630168"/>
-            <a:ext cx="-1170432" cy="118872"/>
-          </a:xfrm>
-          <a:prstGeom prst="line">
-            <a:avLst/>
-          </a:prstGeom>
-          <a:noFill/>
-          <a:ln w="25400">
-            <a:solidFill>
-              <a:srgbClr val="8ABBD8"/>
-            </a:solidFill>
-            <a:prstDash val="solid"/>
-          </a:ln>
-        </p:spPr>
-      </p:sp>
-      <p:sp>
-        <p:nvSpPr>
-          <p:cNvPr id="20" name="Text 18"/>
-          <p:cNvSpPr/>
-          <p:nvPr/>
-        </p:nvSpPr>
-        <p:spPr>
-          <a:xfrm>
-            <a:off x="7863840" y="4069080"/>
-            <a:ext cx="3017520" cy="164592"/>
-          </a:xfrm>
-          <a:prstGeom prst="rect">
-            <a:avLst/>
-          </a:prstGeom>
-          <a:noFill/>
-          <a:ln/>
-        </p:spPr>
-        <p:txBody>
-          <a:bodyPr wrap="square" lIns="0" tIns="0" rIns="0" bIns="0" rtlCol="0" anchor="ctr"/>
-          <a:lstStyle/>
-          <a:p>
-            <a:pPr algn="ctr" indent="0" marL="0">
-              <a:buNone/>
-            </a:pPr>
-            <a:r>
-              <a:rPr lang="en-US" sz="900" b="1" dirty="0">
-                <a:solidFill>
-                  <a:srgbClr val="003A63"/>
-                </a:solidFill>
-                <a:latin typeface="Aptos" pitchFamily="34" charset="0"/>
-                <a:ea typeface="Aptos" pitchFamily="34" charset="-122"/>
-                <a:cs typeface="Aptos" pitchFamily="34" charset="-120"/>
-              </a:rPr>
-              <a:t>Decision rights</a:t>
-            </a:r>
-            <a:endParaRPr lang="en-US" sz="900" dirty="0"/>
-          </a:p>
-        </p:txBody>
-      </p:sp>
-      <p:sp>
-        <p:nvSpPr>
-          <p:cNvPr id="21" name="Shape 19"/>
           <p:cNvSpPr/>
           <p:nvPr/>
         </p:nvSpPr>
@@ -15604,7 +14805,7 @@
       </p:sp>
       <p:sp>
         <p:nvSpPr>
-          <p:cNvPr id="22" name="Text 20"/>
+          <p:cNvPr id="17" name="Text 15"/>
           <p:cNvSpPr/>
           <p:nvPr/>
         </p:nvSpPr>
@@ -15643,7 +14844,7 @@
       </p:sp>
       <p:sp>
         <p:nvSpPr>
-          <p:cNvPr id="23" name="Text 21"/>
+          <p:cNvPr id="18" name="Text 16"/>
           <p:cNvSpPr/>
           <p:nvPr/>
         </p:nvSpPr>
@@ -16151,13 +15352,11 @@
             </a:avLst>
           </a:prstGeom>
           <a:solidFill>
-            <a:srgbClr val="FFFFFF">
-              <a:alpha val="88000"/>
-            </a:srgbClr>
+            <a:srgbClr val="FFFFFF"/>
           </a:solidFill>
           <a:ln w="12700">
             <a:solidFill>
-              <a:srgbClr val="D6E8F2"/>
+              <a:srgbClr val="B9D7E6"/>
             </a:solidFill>
             <a:prstDash val="solid"/>
           </a:ln>
@@ -16165,119 +15364,112 @@
       </p:sp>
       <p:sp>
         <p:nvSpPr>
-          <p:cNvPr id="14" name="Shape 12"/>
-          <p:cNvSpPr/>
-          <p:nvPr/>
-        </p:nvSpPr>
-        <p:spPr>
-          <a:xfrm>
-            <a:off x="8074152" y="3291840"/>
-            <a:ext cx="2596896" cy="749808"/>
-          </a:xfrm>
-          <a:prstGeom prst="rect">
-            <a:avLst/>
-          </a:prstGeom>
-          <a:solidFill>
-            <a:srgbClr val="EAF6F8"/>
-          </a:solidFill>
-          <a:ln w="12700">
-            <a:solidFill>
-              <a:srgbClr val="8ABBD8"/>
-            </a:solidFill>
-            <a:prstDash val="solid"/>
-          </a:ln>
-        </p:spPr>
-      </p:sp>
-      <p:sp>
-        <p:nvSpPr>
-          <p:cNvPr id="15" name="Shape 13"/>
-          <p:cNvSpPr/>
-          <p:nvPr/>
-        </p:nvSpPr>
-        <p:spPr>
-          <a:xfrm>
-            <a:off x="8202168" y="3721608"/>
-            <a:ext cx="2340864" cy="0"/>
-          </a:xfrm>
-          <a:prstGeom prst="line">
-            <a:avLst/>
-          </a:prstGeom>
-          <a:noFill/>
-          <a:ln w="19050">
-            <a:solidFill>
-              <a:srgbClr val="0068B7"/>
-            </a:solidFill>
-            <a:prstDash val="solid"/>
-          </a:ln>
-        </p:spPr>
+          <p:cNvPr id="14" name="Text 12"/>
+          <p:cNvSpPr/>
+          <p:nvPr/>
+        </p:nvSpPr>
+        <p:spPr>
+          <a:xfrm>
+            <a:off x="7799832" y="2935224"/>
+            <a:ext cx="3145536" cy="256032"/>
+          </a:xfrm>
+          <a:prstGeom prst="rect">
+            <a:avLst/>
+          </a:prstGeom>
+          <a:noFill/>
+          <a:ln/>
+        </p:spPr>
+        <p:txBody>
+          <a:bodyPr wrap="square" lIns="0" tIns="0" rIns="0" bIns="0" rtlCol="0" anchor="ctr"/>
+          <a:lstStyle/>
+          <a:p>
+            <a:pPr indent="0" marL="0">
+              <a:buNone/>
+            </a:pPr>
+            <a:r>
+              <a:rPr lang="en-US" sz="1300" b="1" dirty="0">
+                <a:solidFill>
+                  <a:srgbClr val="0068B7"/>
+                </a:solidFill>
+                <a:latin typeface="Aptos" pitchFamily="34" charset="0"/>
+                <a:ea typeface="Aptos" pitchFamily="34" charset="-122"/>
+                <a:cs typeface="Aptos" pitchFamily="34" charset="-120"/>
+              </a:rPr>
+              <a:t>Concept checkpoints</a:t>
+            </a:r>
+            <a:endParaRPr lang="en-US" sz="1300" dirty="0"/>
+          </a:p>
+        </p:txBody>
+      </p:sp>
+      <p:sp>
+        <p:nvSpPr>
+          <p:cNvPr id="15" name="Text 13"/>
+          <p:cNvSpPr/>
+          <p:nvPr/>
+        </p:nvSpPr>
+        <p:spPr>
+          <a:xfrm>
+            <a:off x="7818120" y="3300984"/>
+            <a:ext cx="3090672" cy="877824"/>
+          </a:xfrm>
+          <a:prstGeom prst="rect">
+            <a:avLst/>
+          </a:prstGeom>
+          <a:noFill/>
+          <a:ln/>
+        </p:spPr>
+        <p:txBody>
+          <a:bodyPr wrap="square" lIns="254" tIns="254" rIns="254" bIns="254" rtlCol="0" anchor="t">
+            <a:normAutofit/>
+          </a:bodyPr>
+          <a:lstStyle/>
+          <a:p>
+            <a:r>
+              <a:rPr lang="en-US" sz="1380" dirty="0">
+                <a:solidFill>
+                  <a:srgbClr val="17364A"/>
+                </a:solidFill>
+                <a:latin typeface="Aptos" pitchFamily="34" charset="0"/>
+                <a:ea typeface="Aptos" pitchFamily="34" charset="-122"/>
+                <a:cs typeface="Aptos" pitchFamily="34" charset="-120"/>
+              </a:rPr>
+              <a:t>Public health agencies have many possible AI use cases: summarizing case notes, analyzing.</a:t>
+            </a:r>
+            <a:endParaRPr lang="en-US" sz="1380" dirty="0"/>
+          </a:p>
+          <a:p>
+            <a:r>
+              <a:rPr lang="en-US" sz="1380" dirty="0">
+                <a:solidFill>
+                  <a:srgbClr val="17364A"/>
+                </a:solidFill>
+                <a:latin typeface="Aptos" pitchFamily="34" charset="0"/>
+                <a:ea typeface="Aptos" pitchFamily="34" charset="-122"/>
+                <a:cs typeface="Aptos" pitchFamily="34" charset="-120"/>
+              </a:rPr>
+              <a:t>Without a portfolio strategy, agencies may choose projects because they are visible, easy.</a:t>
+            </a:r>
+            <a:endParaRPr lang="en-US" sz="1380" dirty="0"/>
+          </a:p>
+          <a:p>
+            <a:r>
+              <a:rPr lang="en-US" sz="1380" dirty="0">
+                <a:solidFill>
+                  <a:srgbClr val="17364A"/>
+                </a:solidFill>
+                <a:latin typeface="Aptos" pitchFamily="34" charset="0"/>
+                <a:ea typeface="Aptos" pitchFamily="34" charset="-122"/>
+                <a:cs typeface="Aptos" pitchFamily="34" charset="-120"/>
+              </a:rPr>
+              <a:t>Technical teams, privacy officers, legal counsel, procurement staff, program leaders, and.</a:t>
+            </a:r>
+            <a:endParaRPr lang="en-US" sz="1380" dirty="0"/>
+          </a:p>
+        </p:txBody>
       </p:sp>
       <p:sp>
         <p:nvSpPr>
           <p:cNvPr id="16" name="Shape 14"/>
-          <p:cNvSpPr/>
-          <p:nvPr/>
-        </p:nvSpPr>
-        <p:spPr>
-          <a:xfrm>
-            <a:off x="9198864" y="4206240"/>
-            <a:ext cx="347472" cy="347472"/>
-          </a:xfrm>
-          <a:prstGeom prst="ellipse">
-            <a:avLst/>
-          </a:prstGeom>
-          <a:solidFill>
-            <a:srgbClr val="2F8A28"/>
-          </a:solidFill>
-          <a:ln w="12700">
-            <a:solidFill>
-              <a:srgbClr val="2F8A28"/>
-            </a:solidFill>
-            <a:prstDash val="solid"/>
-          </a:ln>
-        </p:spPr>
-      </p:sp>
-      <p:sp>
-        <p:nvSpPr>
-          <p:cNvPr id="17" name="Text 15"/>
-          <p:cNvSpPr/>
-          <p:nvPr/>
-        </p:nvSpPr>
-        <p:spPr>
-          <a:xfrm>
-            <a:off x="7909560" y="3977640"/>
-            <a:ext cx="2926080" cy="182880"/>
-          </a:xfrm>
-          <a:prstGeom prst="rect">
-            <a:avLst/>
-          </a:prstGeom>
-          <a:noFill/>
-          <a:ln/>
-        </p:spPr>
-        <p:txBody>
-          <a:bodyPr wrap="square" lIns="0" tIns="0" rIns="0" bIns="0" rtlCol="0" anchor="ctr"/>
-          <a:lstStyle/>
-          <a:p>
-            <a:pPr algn="ctr" indent="0" marL="0">
-              <a:buNone/>
-            </a:pPr>
-            <a:r>
-              <a:rPr lang="en-US" sz="1000" dirty="0">
-                <a:solidFill>
-                  <a:srgbClr val="003A63"/>
-                </a:solidFill>
-                <a:latin typeface="Aptos" pitchFamily="34" charset="0"/>
-                <a:ea typeface="Aptos" pitchFamily="34" charset="-122"/>
-                <a:cs typeface="Aptos" pitchFamily="34" charset="-120"/>
-              </a:rPr>
-              <a:t>Concept to action</a:t>
-            </a:r>
-            <a:endParaRPr lang="en-US" sz="1000" dirty="0"/>
-          </a:p>
-        </p:txBody>
-      </p:sp>
-      <p:sp>
-        <p:nvSpPr>
-          <p:cNvPr id="18" name="Shape 16"/>
           <p:cNvSpPr/>
           <p:nvPr/>
         </p:nvSpPr>
@@ -16304,7 +15496,7 @@
       </p:sp>
       <p:sp>
         <p:nvSpPr>
-          <p:cNvPr id="19" name="Text 17"/>
+          <p:cNvPr id="17" name="Text 15"/>
           <p:cNvSpPr/>
           <p:nvPr/>
         </p:nvSpPr>
@@ -16343,7 +15535,7 @@
       </p:sp>
       <p:sp>
         <p:nvSpPr>
-          <p:cNvPr id="20" name="Text 18"/>
+          <p:cNvPr id="18" name="Text 16"/>
           <p:cNvSpPr/>
           <p:nvPr/>
         </p:nvSpPr>
@@ -16851,13 +16043,11 @@
             </a:avLst>
           </a:prstGeom>
           <a:solidFill>
-            <a:srgbClr val="FFFFFF">
-              <a:alpha val="88000"/>
-            </a:srgbClr>
+            <a:srgbClr val="FFFFFF"/>
           </a:solidFill>
           <a:ln w="12700">
             <a:solidFill>
-              <a:srgbClr val="D6E8F2"/>
+              <a:srgbClr val="B9D7E6"/>
             </a:solidFill>
             <a:prstDash val="solid"/>
           </a:ln>
@@ -16865,119 +16055,112 @@
       </p:sp>
       <p:sp>
         <p:nvSpPr>
-          <p:cNvPr id="14" name="Shape 12"/>
-          <p:cNvSpPr/>
-          <p:nvPr/>
-        </p:nvSpPr>
-        <p:spPr>
-          <a:xfrm>
-            <a:off x="8074152" y="3291840"/>
-            <a:ext cx="2596896" cy="749808"/>
-          </a:xfrm>
-          <a:prstGeom prst="rect">
-            <a:avLst/>
-          </a:prstGeom>
-          <a:solidFill>
-            <a:srgbClr val="EAF6F8"/>
-          </a:solidFill>
-          <a:ln w="12700">
-            <a:solidFill>
-              <a:srgbClr val="8ABBD8"/>
-            </a:solidFill>
-            <a:prstDash val="solid"/>
-          </a:ln>
-        </p:spPr>
-      </p:sp>
-      <p:sp>
-        <p:nvSpPr>
-          <p:cNvPr id="15" name="Shape 13"/>
-          <p:cNvSpPr/>
-          <p:nvPr/>
-        </p:nvSpPr>
-        <p:spPr>
-          <a:xfrm>
-            <a:off x="8202168" y="3721608"/>
-            <a:ext cx="2340864" cy="0"/>
-          </a:xfrm>
-          <a:prstGeom prst="line">
-            <a:avLst/>
-          </a:prstGeom>
-          <a:noFill/>
-          <a:ln w="19050">
-            <a:solidFill>
-              <a:srgbClr val="0068B7"/>
-            </a:solidFill>
-            <a:prstDash val="solid"/>
-          </a:ln>
-        </p:spPr>
+          <p:cNvPr id="14" name="Text 12"/>
+          <p:cNvSpPr/>
+          <p:nvPr/>
+        </p:nvSpPr>
+        <p:spPr>
+          <a:xfrm>
+            <a:off x="7799832" y="2935224"/>
+            <a:ext cx="3145536" cy="256032"/>
+          </a:xfrm>
+          <a:prstGeom prst="rect">
+            <a:avLst/>
+          </a:prstGeom>
+          <a:noFill/>
+          <a:ln/>
+        </p:spPr>
+        <p:txBody>
+          <a:bodyPr wrap="square" lIns="0" tIns="0" rIns="0" bIns="0" rtlCol="0" anchor="ctr"/>
+          <a:lstStyle/>
+          <a:p>
+            <a:pPr indent="0" marL="0">
+              <a:buNone/>
+            </a:pPr>
+            <a:r>
+              <a:rPr lang="en-US" sz="1300" b="1" dirty="0">
+                <a:solidFill>
+                  <a:srgbClr val="0068B7"/>
+                </a:solidFill>
+                <a:latin typeface="Aptos" pitchFamily="34" charset="0"/>
+                <a:ea typeface="Aptos" pitchFamily="34" charset="-122"/>
+                <a:cs typeface="Aptos" pitchFamily="34" charset="-120"/>
+              </a:rPr>
+              <a:t>Concept checkpoints</a:t>
+            </a:r>
+            <a:endParaRPr lang="en-US" sz="1300" dirty="0"/>
+          </a:p>
+        </p:txBody>
+      </p:sp>
+      <p:sp>
+        <p:nvSpPr>
+          <p:cNvPr id="15" name="Text 13"/>
+          <p:cNvSpPr/>
+          <p:nvPr/>
+        </p:nvSpPr>
+        <p:spPr>
+          <a:xfrm>
+            <a:off x="7818120" y="3300984"/>
+            <a:ext cx="3090672" cy="877824"/>
+          </a:xfrm>
+          <a:prstGeom prst="rect">
+            <a:avLst/>
+          </a:prstGeom>
+          <a:noFill/>
+          <a:ln/>
+        </p:spPr>
+        <p:txBody>
+          <a:bodyPr wrap="square" lIns="254" tIns="254" rIns="254" bIns="254" rtlCol="0" anchor="t">
+            <a:normAutofit/>
+          </a:bodyPr>
+          <a:lstStyle/>
+          <a:p>
+            <a:r>
+              <a:rPr lang="en-US" sz="1380" dirty="0">
+                <a:solidFill>
+                  <a:srgbClr val="17364A"/>
+                </a:solidFill>
+                <a:latin typeface="Aptos" pitchFamily="34" charset="0"/>
+                <a:ea typeface="Aptos" pitchFamily="34" charset="-122"/>
+                <a:cs typeface="Aptos" pitchFamily="34" charset="-120"/>
+              </a:rPr>
+              <a:t>A health department receives proposals for five AI uses: a public chatbot, a staff policy.</a:t>
+            </a:r>
+            <a:endParaRPr lang="en-US" sz="1380" dirty="0"/>
+          </a:p>
+          <a:p>
+            <a:r>
+              <a:rPr lang="en-US" sz="1380" dirty="0">
+                <a:solidFill>
+                  <a:srgbClr val="17364A"/>
+                </a:solidFill>
+                <a:latin typeface="Aptos" pitchFamily="34" charset="0"/>
+                <a:ea typeface="Aptos" pitchFamily="34" charset="-122"/>
+                <a:cs typeface="Aptos" pitchFamily="34" charset="-120"/>
+              </a:rPr>
+              <a:t>A staff policy assistant may be lower risk if it uses approved internal documents.</a:t>
+            </a:r>
+            <a:endParaRPr lang="en-US" sz="1380" dirty="0"/>
+          </a:p>
+          <a:p>
+            <a:r>
+              <a:rPr lang="en-US" sz="1380" dirty="0">
+                <a:solidFill>
+                  <a:srgbClr val="17364A"/>
+                </a:solidFill>
+                <a:latin typeface="Aptos" pitchFamily="34" charset="0"/>
+                <a:ea typeface="Aptos" pitchFamily="34" charset="-122"/>
+                <a:cs typeface="Aptos" pitchFamily="34" charset="-120"/>
+              </a:rPr>
+              <a:t>An outbreak model may be valuable but require strong data quality and validation.</a:t>
+            </a:r>
+            <a:endParaRPr lang="en-US" sz="1380" dirty="0"/>
+          </a:p>
+        </p:txBody>
       </p:sp>
       <p:sp>
         <p:nvSpPr>
           <p:cNvPr id="16" name="Shape 14"/>
-          <p:cNvSpPr/>
-          <p:nvPr/>
-        </p:nvSpPr>
-        <p:spPr>
-          <a:xfrm>
-            <a:off x="9198864" y="4206240"/>
-            <a:ext cx="347472" cy="347472"/>
-          </a:xfrm>
-          <a:prstGeom prst="ellipse">
-            <a:avLst/>
-          </a:prstGeom>
-          <a:solidFill>
-            <a:srgbClr val="2F8A28"/>
-          </a:solidFill>
-          <a:ln w="12700">
-            <a:solidFill>
-              <a:srgbClr val="2F8A28"/>
-            </a:solidFill>
-            <a:prstDash val="solid"/>
-          </a:ln>
-        </p:spPr>
-      </p:sp>
-      <p:sp>
-        <p:nvSpPr>
-          <p:cNvPr id="17" name="Text 15"/>
-          <p:cNvSpPr/>
-          <p:nvPr/>
-        </p:nvSpPr>
-        <p:spPr>
-          <a:xfrm>
-            <a:off x="7909560" y="3977640"/>
-            <a:ext cx="2926080" cy="182880"/>
-          </a:xfrm>
-          <a:prstGeom prst="rect">
-            <a:avLst/>
-          </a:prstGeom>
-          <a:noFill/>
-          <a:ln/>
-        </p:spPr>
-        <p:txBody>
-          <a:bodyPr wrap="square" lIns="0" tIns="0" rIns="0" bIns="0" rtlCol="0" anchor="ctr"/>
-          <a:lstStyle/>
-          <a:p>
-            <a:pPr algn="ctr" indent="0" marL="0">
-              <a:buNone/>
-            </a:pPr>
-            <a:r>
-              <a:rPr lang="en-US" sz="1000" dirty="0">
-                <a:solidFill>
-                  <a:srgbClr val="003A63"/>
-                </a:solidFill>
-                <a:latin typeface="Aptos" pitchFamily="34" charset="0"/>
-                <a:ea typeface="Aptos" pitchFamily="34" charset="-122"/>
-                <a:cs typeface="Aptos" pitchFamily="34" charset="-120"/>
-              </a:rPr>
-              <a:t>Concept to action</a:t>
-            </a:r>
-            <a:endParaRPr lang="en-US" sz="1000" dirty="0"/>
-          </a:p>
-        </p:txBody>
-      </p:sp>
-      <p:sp>
-        <p:nvSpPr>
-          <p:cNvPr id="18" name="Shape 16"/>
           <p:cNvSpPr/>
           <p:nvPr/>
         </p:nvSpPr>
@@ -17004,7 +16187,7 @@
       </p:sp>
       <p:sp>
         <p:nvSpPr>
-          <p:cNvPr id="19" name="Text 17"/>
+          <p:cNvPr id="17" name="Text 15"/>
           <p:cNvSpPr/>
           <p:nvPr/>
         </p:nvSpPr>
@@ -17043,7 +16226,7 @@
       </p:sp>
       <p:sp>
         <p:nvSpPr>
-          <p:cNvPr id="20" name="Text 18"/>
+          <p:cNvPr id="18" name="Text 16"/>
           <p:cNvSpPr/>
           <p:nvPr/>
         </p:nvSpPr>

--- a/downloads/presentations/modules/exe-410.pptx
+++ b/downloads/presentations/modules/exe-410.pptx
@@ -3253,49 +3253,58 @@
           <a:ln/>
         </p:spPr>
         <p:txBody>
-          <a:bodyPr wrap="square" lIns="635" tIns="635" rIns="635" bIns="635" rtlCol="0" anchor="t">
+          <a:bodyPr wrap="square" lIns="1016" tIns="1016" rIns="1016" bIns="1016" rtlCol="0" anchor="t">
             <a:normAutofit/>
           </a:bodyPr>
           <a:lstStyle/>
           <a:p>
+            <a:pPr indent="0" marL="0">
+              <a:buNone/>
+            </a:pPr>
             <a:r>
               <a:rPr lang="en-US" sz="2100" dirty="0">
                 <a:solidFill>
-                  <a:srgbClr val="17364A"/>
-                </a:solidFill>
-                <a:latin typeface="Aptos" pitchFamily="34" charset="0"/>
-                <a:ea typeface="Aptos" pitchFamily="34" charset="-122"/>
-                <a:cs typeface="Aptos" pitchFamily="34" charset="-120"/>
-              </a:rPr>
-              <a:t>A useful portfolio strategy begins with categories.</a:t>
+                  <a:srgbClr val="003A63"/>
+                </a:solidFill>
+                <a:latin typeface="Aptos" pitchFamily="34" charset="0"/>
+                <a:ea typeface="Aptos" pitchFamily="34" charset="-122"/>
+                <a:cs typeface="Aptos" pitchFamily="34" charset="-120"/>
+              </a:rPr>
+              <a:t>• A useful portfolio strategy begins with categories.</a:t>
             </a:r>
             <a:endParaRPr lang="en-US" sz="2100" dirty="0"/>
           </a:p>
           <a:p>
+            <a:pPr indent="0" marL="0">
+              <a:buNone/>
+            </a:pPr>
             <a:r>
               <a:rPr lang="en-US" sz="2100" dirty="0">
                 <a:solidFill>
-                  <a:srgbClr val="17364A"/>
-                </a:solidFill>
-                <a:latin typeface="Aptos" pitchFamily="34" charset="0"/>
-                <a:ea typeface="Aptos" pitchFamily="34" charset="-122"/>
-                <a:cs typeface="Aptos" pitchFamily="34" charset="-120"/>
-              </a:rPr>
-              <a:t>Agencies can classify AI opportunities by function, such as internal productivity, knowledge.</a:t>
+                  <a:srgbClr val="003A63"/>
+                </a:solidFill>
+                <a:latin typeface="Aptos" pitchFamily="34" charset="0"/>
+                <a:ea typeface="Aptos" pitchFamily="34" charset="-122"/>
+                <a:cs typeface="Aptos" pitchFamily="34" charset="-120"/>
+              </a:rPr>
+              <a:t>• Agencies can classify AI opportunities by function, such as internal productivity, knowledge.</a:t>
             </a:r>
             <a:endParaRPr lang="en-US" sz="2100" dirty="0"/>
           </a:p>
           <a:p>
+            <a:pPr indent="0" marL="0">
+              <a:buNone/>
+            </a:pPr>
             <a:r>
               <a:rPr lang="en-US" sz="2100" dirty="0">
                 <a:solidFill>
-                  <a:srgbClr val="17364A"/>
-                </a:solidFill>
-                <a:latin typeface="Aptos" pitchFamily="34" charset="0"/>
-                <a:ea typeface="Aptos" pitchFamily="34" charset="-122"/>
-                <a:cs typeface="Aptos" pitchFamily="34" charset="-120"/>
-              </a:rPr>
-              <a:t>They can also classify by risk, such as low, moderate, high, or prohibited.</a:t>
+                  <a:srgbClr val="003A63"/>
+                </a:solidFill>
+                <a:latin typeface="Aptos" pitchFamily="34" charset="0"/>
+                <a:ea typeface="Aptos" pitchFamily="34" charset="-122"/>
+                <a:cs typeface="Aptos" pitchFamily="34" charset="-120"/>
+              </a:rPr>
+              <a:t>• They can also classify by risk, such as low, moderate, high, or prohibited.</a:t>
             </a:r>
             <a:endParaRPr lang="en-US" sz="2100" dirty="0"/>
           </a:p>
@@ -3375,17 +3384,17 @@
         </p:nvSpPr>
         <p:spPr>
           <a:xfrm>
-            <a:off x="7799832" y="1828800"/>
-            <a:ext cx="3145536" cy="685800"/>
-          </a:xfrm>
-          <a:prstGeom prst="rect">
-            <a:avLst/>
-          </a:prstGeom>
-          <a:noFill/>
-          <a:ln/>
-        </p:spPr>
-        <p:txBody>
-          <a:bodyPr wrap="square" lIns="0" tIns="0" rIns="0" bIns="0" rtlCol="0" anchor="t">
+            <a:off x="7799832" y="1801368"/>
+            <a:ext cx="3145536" cy="758952"/>
+          </a:xfrm>
+          <a:prstGeom prst="rect">
+            <a:avLst/>
+          </a:prstGeom>
+          <a:noFill/>
+          <a:ln/>
+        </p:spPr>
+        <p:txBody>
+          <a:bodyPr wrap="square" lIns="254" tIns="254" rIns="254" bIns="254" rtlCol="0" anchor="t">
             <a:normAutofit/>
           </a:bodyPr>
           <a:lstStyle/>
@@ -3394,7 +3403,7 @@
               <a:buNone/>
             </a:pPr>
             <a:r>
-              <a:rPr lang="en-US" sz="1550" dirty="0">
+              <a:rPr lang="en-US" sz="1320" dirty="0">
                 <a:solidFill>
                   <a:srgbClr val="17364A"/>
                 </a:solidFill>
@@ -3404,7 +3413,7 @@
               </a:rPr>
               <a:t>A useful portfolio strategy begins with categories.</a:t>
             </a:r>
-            <a:endParaRPr lang="en-US" sz="1550" dirty="0"/>
+            <a:endParaRPr lang="en-US" sz="1320" dirty="0"/>
           </a:p>
         </p:txBody>
       </p:sp>
@@ -3492,13 +3501,16 @@
           <a:ln/>
         </p:spPr>
         <p:txBody>
-          <a:bodyPr wrap="square" lIns="254" tIns="254" rIns="254" bIns="254" rtlCol="0" anchor="t">
+          <a:bodyPr wrap="square" lIns="508" tIns="508" rIns="508" bIns="508" rtlCol="0" anchor="t">
             <a:normAutofit/>
           </a:bodyPr>
           <a:lstStyle/>
           <a:p>
-            <a:r>
-              <a:rPr lang="en-US" sz="1380" dirty="0">
+            <a:pPr indent="0" marL="0">
+              <a:buNone/>
+            </a:pPr>
+            <a:r>
+              <a:rPr lang="en-US" sz="1220" dirty="0">
                 <a:solidFill>
                   <a:srgbClr val="17364A"/>
                 </a:solidFill>
@@ -3506,13 +3518,16 @@
                 <a:ea typeface="Aptos" pitchFamily="34" charset="-122"/>
                 <a:cs typeface="Aptos" pitchFamily="34" charset="-120"/>
               </a:rPr>
-              <a:t>Agencies can classify AI opportunities by function, such as internal productivity,.</a:t>
-            </a:r>
-            <a:endParaRPr lang="en-US" sz="1380" dirty="0"/>
-          </a:p>
-          <a:p>
-            <a:r>
-              <a:rPr lang="en-US" sz="1380" dirty="0">
+              <a:t>Agencies can classify AI opportunities by function, such as.</a:t>
+            </a:r>
+            <a:endParaRPr lang="en-US" sz="1220" dirty="0"/>
+          </a:p>
+          <a:p>
+            <a:pPr indent="0" marL="0">
+              <a:buNone/>
+            </a:pPr>
+            <a:r>
+              <a:rPr lang="en-US" sz="1220" dirty="0">
                 <a:solidFill>
                   <a:srgbClr val="17364A"/>
                 </a:solidFill>
@@ -3520,13 +3535,16 @@
                 <a:ea typeface="Aptos" pitchFamily="34" charset="-122"/>
                 <a:cs typeface="Aptos" pitchFamily="34" charset="-120"/>
               </a:rPr>
-              <a:t>These categories help leadership understand where AI activity is concentrated and whether.</a:t>
-            </a:r>
-            <a:endParaRPr lang="en-US" sz="1380" dirty="0"/>
-          </a:p>
-          <a:p>
-            <a:r>
-              <a:rPr lang="en-US" sz="1380" dirty="0">
+              <a:t>These categories help leadership understand where AI activity is.</a:t>
+            </a:r>
+            <a:endParaRPr lang="en-US" sz="1220" dirty="0"/>
+          </a:p>
+          <a:p>
+            <a:pPr indent="0" marL="0">
+              <a:buNone/>
+            </a:pPr>
+            <a:r>
+              <a:rPr lang="en-US" sz="1220" dirty="0">
                 <a:solidFill>
                   <a:srgbClr val="17364A"/>
                 </a:solidFill>
@@ -3534,9 +3552,9 @@
                 <a:ea typeface="Aptos" pitchFamily="34" charset="-122"/>
                 <a:cs typeface="Aptos" pitchFamily="34" charset="-120"/>
               </a:rPr>
-              <a:t>Prioritization criteria should include mission alignment, expected public health benefit,.</a:t>
-            </a:r>
-            <a:endParaRPr lang="en-US" sz="1380" dirty="0"/>
+              <a:t>Prioritization criteria should include mission alignment, expected.</a:t>
+            </a:r>
+            <a:endParaRPr lang="en-US" sz="1220" dirty="0"/>
           </a:p>
         </p:txBody>
       </p:sp>
@@ -3614,17 +3632,17 @@
         </p:nvSpPr>
         <p:spPr>
           <a:xfrm>
-            <a:off x="7799832" y="5001768"/>
-            <a:ext cx="3145536" cy="502920"/>
-          </a:xfrm>
-          <a:prstGeom prst="rect">
-            <a:avLst/>
-          </a:prstGeom>
-          <a:noFill/>
-          <a:ln/>
-        </p:spPr>
-        <p:txBody>
-          <a:bodyPr wrap="square" lIns="0" tIns="0" rIns="0" bIns="0" rtlCol="0" anchor="t">
+            <a:off x="7799832" y="4974336"/>
+            <a:ext cx="3145536" cy="576072"/>
+          </a:xfrm>
+          <a:prstGeom prst="rect">
+            <a:avLst/>
+          </a:prstGeom>
+          <a:noFill/>
+          <a:ln/>
+        </p:spPr>
+        <p:txBody>
+          <a:bodyPr wrap="square" lIns="254" tIns="254" rIns="254" bIns="254" rtlCol="0" anchor="t">
             <a:normAutofit/>
           </a:bodyPr>
           <a:lstStyle/>
@@ -3633,7 +3651,7 @@
               <a:buNone/>
             </a:pPr>
             <a:r>
-              <a:rPr lang="en-US" sz="1550" dirty="0">
+              <a:rPr lang="en-US" sz="1320" dirty="0">
                 <a:solidFill>
                   <a:srgbClr val="17364A"/>
                 </a:solidFill>
@@ -3641,9 +3659,9 @@
                 <a:ea typeface="Aptos" pitchFamily="34" charset="-122"/>
                 <a:cs typeface="Aptos" pitchFamily="34" charset="-120"/>
               </a:rPr>
-              <a:t>Translate this concept into clear decision rights, review steps, documentation expectations, and escalation paths before an AI-supported workflow is approved.</a:t>
-            </a:r>
-            <a:endParaRPr lang="en-US" sz="1550" dirty="0"/>
+              <a:t>Translate this concept into clear decision rights, review steps, documentation expectations, and escalation paths before.</a:t>
+            </a:r>
+            <a:endParaRPr lang="en-US" sz="1320" dirty="0"/>
           </a:p>
         </p:txBody>
       </p:sp>
@@ -3944,49 +3962,58 @@
           <a:ln/>
         </p:spPr>
         <p:txBody>
-          <a:bodyPr wrap="square" lIns="635" tIns="635" rIns="635" bIns="635" rtlCol="0" anchor="t">
+          <a:bodyPr wrap="square" lIns="1016" tIns="1016" rIns="1016" bIns="1016" rtlCol="0" anchor="t">
             <a:normAutofit/>
           </a:bodyPr>
           <a:lstStyle/>
           <a:p>
+            <a:pPr indent="0" marL="0">
+              <a:buNone/>
+            </a:pPr>
             <a:r>
               <a:rPr lang="en-US" sz="2100" dirty="0">
                 <a:solidFill>
-                  <a:srgbClr val="17364A"/>
-                </a:solidFill>
-                <a:latin typeface="Aptos" pitchFamily="34" charset="0"/>
-                <a:ea typeface="Aptos" pitchFamily="34" charset="-122"/>
-                <a:cs typeface="Aptos" pitchFamily="34" charset="-120"/>
-              </a:rPr>
-              <a:t>A major risk is pilot proliferation.</a:t>
+                  <a:srgbClr val="003A63"/>
+                </a:solidFill>
+                <a:latin typeface="Aptos" pitchFamily="34" charset="0"/>
+                <a:ea typeface="Aptos" pitchFamily="34" charset="-122"/>
+                <a:cs typeface="Aptos" pitchFamily="34" charset="-120"/>
+              </a:rPr>
+              <a:t>• A major risk is pilot proliferation.</a:t>
             </a:r>
             <a:endParaRPr lang="en-US" sz="2100" dirty="0"/>
           </a:p>
           <a:p>
+            <a:pPr indent="0" marL="0">
+              <a:buNone/>
+            </a:pPr>
             <a:r>
               <a:rPr lang="en-US" sz="2100" dirty="0">
                 <a:solidFill>
-                  <a:srgbClr val="17364A"/>
-                </a:solidFill>
-                <a:latin typeface="Aptos" pitchFamily="34" charset="0"/>
-                <a:ea typeface="Aptos" pitchFamily="34" charset="-122"/>
-                <a:cs typeface="Aptos" pitchFamily="34" charset="-120"/>
-              </a:rPr>
-              <a:t>Agencies may launch many small AI pilots without a pathway to scale, evaluate, sustain, or retire them.</a:t>
+                  <a:srgbClr val="003A63"/>
+                </a:solidFill>
+                <a:latin typeface="Aptos" pitchFamily="34" charset="0"/>
+                <a:ea typeface="Aptos" pitchFamily="34" charset="-122"/>
+                <a:cs typeface="Aptos" pitchFamily="34" charset="-120"/>
+              </a:rPr>
+              <a:t>• Agencies may launch many small AI pilots without a pathway to scale, evaluate, sustain, or.</a:t>
             </a:r>
             <a:endParaRPr lang="en-US" sz="2100" dirty="0"/>
           </a:p>
           <a:p>
+            <a:pPr indent="0" marL="0">
+              <a:buNone/>
+            </a:pPr>
             <a:r>
               <a:rPr lang="en-US" sz="2100" dirty="0">
                 <a:solidFill>
-                  <a:srgbClr val="17364A"/>
-                </a:solidFill>
-                <a:latin typeface="Aptos" pitchFamily="34" charset="0"/>
-                <a:ea typeface="Aptos" pitchFamily="34" charset="-122"/>
-                <a:cs typeface="Aptos" pitchFamily="34" charset="-120"/>
-              </a:rPr>
-              <a:t>A guardrail is to require every pilot to define success criteria, evaluation evidence, funding.</a:t>
+                  <a:srgbClr val="003A63"/>
+                </a:solidFill>
+                <a:latin typeface="Aptos" pitchFamily="34" charset="0"/>
+                <a:ea typeface="Aptos" pitchFamily="34" charset="-122"/>
+                <a:cs typeface="Aptos" pitchFamily="34" charset="-120"/>
+              </a:rPr>
+              <a:t>• A guardrail is to require every pilot to define success criteria, evaluation evidence, funding.</a:t>
             </a:r>
             <a:endParaRPr lang="en-US" sz="2100" dirty="0"/>
           </a:p>
@@ -4066,17 +4093,17 @@
         </p:nvSpPr>
         <p:spPr>
           <a:xfrm>
-            <a:off x="7799832" y="1828800"/>
-            <a:ext cx="3145536" cy="685800"/>
-          </a:xfrm>
-          <a:prstGeom prst="rect">
-            <a:avLst/>
-          </a:prstGeom>
-          <a:noFill/>
-          <a:ln/>
-        </p:spPr>
-        <p:txBody>
-          <a:bodyPr wrap="square" lIns="0" tIns="0" rIns="0" bIns="0" rtlCol="0" anchor="t">
+            <a:off x="7799832" y="1801368"/>
+            <a:ext cx="3145536" cy="758952"/>
+          </a:xfrm>
+          <a:prstGeom prst="rect">
+            <a:avLst/>
+          </a:prstGeom>
+          <a:noFill/>
+          <a:ln/>
+        </p:spPr>
+        <p:txBody>
+          <a:bodyPr wrap="square" lIns="254" tIns="254" rIns="254" bIns="254" rtlCol="0" anchor="t">
             <a:normAutofit/>
           </a:bodyPr>
           <a:lstStyle/>
@@ -4085,7 +4112,7 @@
               <a:buNone/>
             </a:pPr>
             <a:r>
-              <a:rPr lang="en-US" sz="1550" dirty="0">
+              <a:rPr lang="en-US" sz="1320" dirty="0">
                 <a:solidFill>
                   <a:srgbClr val="17364A"/>
                 </a:solidFill>
@@ -4095,7 +4122,7 @@
               </a:rPr>
               <a:t>A major risk is pilot proliferation.</a:t>
             </a:r>
-            <a:endParaRPr lang="en-US" sz="1550" dirty="0"/>
+            <a:endParaRPr lang="en-US" sz="1320" dirty="0"/>
           </a:p>
         </p:txBody>
       </p:sp>
@@ -4183,13 +4210,16 @@
           <a:ln/>
         </p:spPr>
         <p:txBody>
-          <a:bodyPr wrap="square" lIns="254" tIns="254" rIns="254" bIns="254" rtlCol="0" anchor="t">
+          <a:bodyPr wrap="square" lIns="508" tIns="508" rIns="508" bIns="508" rtlCol="0" anchor="t">
             <a:normAutofit/>
           </a:bodyPr>
           <a:lstStyle/>
           <a:p>
-            <a:r>
-              <a:rPr lang="en-US" sz="1380" dirty="0">
+            <a:pPr indent="0" marL="0">
+              <a:buNone/>
+            </a:pPr>
+            <a:r>
+              <a:rPr lang="en-US" sz="1220" dirty="0">
                 <a:solidFill>
                   <a:srgbClr val="17364A"/>
                 </a:solidFill>
@@ -4197,13 +4227,16 @@
                 <a:ea typeface="Aptos" pitchFamily="34" charset="-122"/>
                 <a:cs typeface="Aptos" pitchFamily="34" charset="-120"/>
               </a:rPr>
-              <a:t>A guardrail is to require every pilot to define success criteria, evaluation evidence,.</a:t>
-            </a:r>
-            <a:endParaRPr lang="en-US" sz="1380" dirty="0"/>
-          </a:p>
-          <a:p>
-            <a:r>
-              <a:rPr lang="en-US" sz="1380" dirty="0">
+              <a:t>A guardrail is to require every pilot to define success criteria,.</a:t>
+            </a:r>
+            <a:endParaRPr lang="en-US" sz="1220" dirty="0"/>
+          </a:p>
+          <a:p>
+            <a:pPr indent="0" marL="0">
+              <a:buNone/>
+            </a:pPr>
+            <a:r>
+              <a:rPr lang="en-US" sz="1220" dirty="0">
                 <a:solidFill>
                   <a:srgbClr val="17364A"/>
                 </a:solidFill>
@@ -4213,11 +4246,14 @@
               </a:rPr>
               <a:t>Another risk is inequitable prioritization.</a:t>
             </a:r>
-            <a:endParaRPr lang="en-US" sz="1380" dirty="0"/>
-          </a:p>
-          <a:p>
-            <a:r>
-              <a:rPr lang="en-US" sz="1380" dirty="0">
+            <a:endParaRPr lang="en-US" sz="1220" dirty="0"/>
+          </a:p>
+          <a:p>
+            <a:pPr indent="0" marL="0">
+              <a:buNone/>
+            </a:pPr>
+            <a:r>
+              <a:rPr lang="en-US" sz="1220" dirty="0">
                 <a:solidFill>
                   <a:srgbClr val="17364A"/>
                 </a:solidFill>
@@ -4225,9 +4261,9 @@
                 <a:ea typeface="Aptos" pitchFamily="34" charset="-122"/>
                 <a:cs typeface="Aptos" pitchFamily="34" charset="-120"/>
               </a:rPr>
-              <a:t>Projects serving better-resourced programs may advance faster than projects addressing.</a:t>
-            </a:r>
-            <a:endParaRPr lang="en-US" sz="1380" dirty="0"/>
+              <a:t>Projects serving better-resourced programs may advance faster than.</a:t>
+            </a:r>
+            <a:endParaRPr lang="en-US" sz="1220" dirty="0"/>
           </a:p>
         </p:txBody>
       </p:sp>
@@ -4305,17 +4341,17 @@
         </p:nvSpPr>
         <p:spPr>
           <a:xfrm>
-            <a:off x="7799832" y="5001768"/>
-            <a:ext cx="3145536" cy="502920"/>
-          </a:xfrm>
-          <a:prstGeom prst="rect">
-            <a:avLst/>
-          </a:prstGeom>
-          <a:noFill/>
-          <a:ln/>
-        </p:spPr>
-        <p:txBody>
-          <a:bodyPr wrap="square" lIns="0" tIns="0" rIns="0" bIns="0" rtlCol="0" anchor="t">
+            <a:off x="7799832" y="4974336"/>
+            <a:ext cx="3145536" cy="576072"/>
+          </a:xfrm>
+          <a:prstGeom prst="rect">
+            <a:avLst/>
+          </a:prstGeom>
+          <a:noFill/>
+          <a:ln/>
+        </p:spPr>
+        <p:txBody>
+          <a:bodyPr wrap="square" lIns="254" tIns="254" rIns="254" bIns="254" rtlCol="0" anchor="t">
             <a:normAutofit/>
           </a:bodyPr>
           <a:lstStyle/>
@@ -4324,7 +4360,7 @@
               <a:buNone/>
             </a:pPr>
             <a:r>
-              <a:rPr lang="en-US" sz="1550" dirty="0">
+              <a:rPr lang="en-US" sz="1320" dirty="0">
                 <a:solidFill>
                   <a:srgbClr val="17364A"/>
                 </a:solidFill>
@@ -4332,9 +4368,9 @@
                 <a:ea typeface="Aptos" pitchFamily="34" charset="-122"/>
                 <a:cs typeface="Aptos" pitchFamily="34" charset="-120"/>
               </a:rPr>
-              <a:t>Identify what could go wrong, who could be affected, what safeguards are needed, and what evidence should be reviewed before use expands.</a:t>
-            </a:r>
-            <a:endParaRPr lang="en-US" sz="1550" dirty="0"/>
+              <a:t>Identify what could go wrong, who could be affected, what safeguards are needed, and what evidence should be reviewed.</a:t>
+            </a:r>
+            <a:endParaRPr lang="en-US" sz="1320" dirty="0"/>
           </a:p>
         </p:txBody>
       </p:sp>
@@ -4635,49 +4671,58 @@
           <a:ln/>
         </p:spPr>
         <p:txBody>
-          <a:bodyPr wrap="square" lIns="635" tIns="635" rIns="635" bIns="635" rtlCol="0" anchor="t">
+          <a:bodyPr wrap="square" lIns="1016" tIns="1016" rIns="1016" bIns="1016" rtlCol="0" anchor="t">
             <a:normAutofit/>
           </a:bodyPr>
           <a:lstStyle/>
           <a:p>
+            <a:pPr indent="0" marL="0">
+              <a:buNone/>
+            </a:pPr>
             <a:r>
               <a:rPr lang="en-US" sz="2100" dirty="0">
                 <a:solidFill>
-                  <a:srgbClr val="17364A"/>
-                </a:solidFill>
-                <a:latin typeface="Aptos" pitchFamily="34" charset="0"/>
-                <a:ea typeface="Aptos" pitchFamily="34" charset="-122"/>
-                <a:cs typeface="Aptos" pitchFamily="34" charset="-120"/>
-              </a:rPr>
-              <a:t>Generative AI projects may be prioritized for internal knowledge management before public-facing use.</a:t>
+                  <a:srgbClr val="003A63"/>
+                </a:solidFill>
+                <a:latin typeface="Aptos" pitchFamily="34" charset="0"/>
+                <a:ea typeface="Aptos" pitchFamily="34" charset="-122"/>
+                <a:cs typeface="Aptos" pitchFamily="34" charset="-120"/>
+              </a:rPr>
+              <a:t>• Generative AI projects may be prioritized for internal knowledge management before.</a:t>
             </a:r>
             <a:endParaRPr lang="en-US" sz="2100" dirty="0"/>
           </a:p>
           <a:p>
+            <a:pPr indent="0" marL="0">
+              <a:buNone/>
+            </a:pPr>
             <a:r>
               <a:rPr lang="en-US" sz="2100" dirty="0">
                 <a:solidFill>
-                  <a:srgbClr val="17364A"/>
-                </a:solidFill>
-                <a:latin typeface="Aptos" pitchFamily="34" charset="0"/>
-                <a:ea typeface="Aptos" pitchFamily="34" charset="-122"/>
-                <a:cs typeface="Aptos" pitchFamily="34" charset="-120"/>
-              </a:rPr>
-              <a:t>Predictive analytics projects may be prioritized only when data and validation plans are mature.</a:t>
+                  <a:srgbClr val="003A63"/>
+                </a:solidFill>
+                <a:latin typeface="Aptos" pitchFamily="34" charset="0"/>
+                <a:ea typeface="Aptos" pitchFamily="34" charset="-122"/>
+                <a:cs typeface="Aptos" pitchFamily="34" charset="-120"/>
+              </a:rPr>
+              <a:t>• Predictive analytics projects may be prioritized only when data and validation plans are mature.</a:t>
             </a:r>
             <a:endParaRPr lang="en-US" sz="2100" dirty="0"/>
           </a:p>
           <a:p>
+            <a:pPr indent="0" marL="0">
+              <a:buNone/>
+            </a:pPr>
             <a:r>
               <a:rPr lang="en-US" sz="2100" dirty="0">
                 <a:solidFill>
-                  <a:srgbClr val="17364A"/>
-                </a:solidFill>
-                <a:latin typeface="Aptos" pitchFamily="34" charset="0"/>
-                <a:ea typeface="Aptos" pitchFamily="34" charset="-122"/>
-                <a:cs typeface="Aptos" pitchFamily="34" charset="-120"/>
-              </a:rPr>
-              <a:t>Agentic workflows may be deferred until governance has defined decision rights, access controls, and.</a:t>
+                  <a:srgbClr val="003A63"/>
+                </a:solidFill>
+                <a:latin typeface="Aptos" pitchFamily="34" charset="0"/>
+                <a:ea typeface="Aptos" pitchFamily="34" charset="-122"/>
+                <a:cs typeface="Aptos" pitchFamily="34" charset="-120"/>
+              </a:rPr>
+              <a:t>• Agentic workflows may be deferred until governance has defined decision rights, access.</a:t>
             </a:r>
             <a:endParaRPr lang="en-US" sz="2100" dirty="0"/>
           </a:p>
@@ -4757,17 +4802,17 @@
         </p:nvSpPr>
         <p:spPr>
           <a:xfrm>
-            <a:off x="7799832" y="1828800"/>
-            <a:ext cx="3145536" cy="685800"/>
-          </a:xfrm>
-          <a:prstGeom prst="rect">
-            <a:avLst/>
-          </a:prstGeom>
-          <a:noFill/>
-          <a:ln/>
-        </p:spPr>
-        <p:txBody>
-          <a:bodyPr wrap="square" lIns="0" tIns="0" rIns="0" bIns="0" rtlCol="0" anchor="t">
+            <a:off x="7799832" y="1801368"/>
+            <a:ext cx="3145536" cy="758952"/>
+          </a:xfrm>
+          <a:prstGeom prst="rect">
+            <a:avLst/>
+          </a:prstGeom>
+          <a:noFill/>
+          <a:ln/>
+        </p:spPr>
+        <p:txBody>
+          <a:bodyPr wrap="square" lIns="254" tIns="254" rIns="254" bIns="254" rtlCol="0" anchor="t">
             <a:normAutofit/>
           </a:bodyPr>
           <a:lstStyle/>
@@ -4776,7 +4821,7 @@
               <a:buNone/>
             </a:pPr>
             <a:r>
-              <a:rPr lang="en-US" sz="1550" dirty="0">
+              <a:rPr lang="en-US" sz="1320" dirty="0">
                 <a:solidFill>
                   <a:srgbClr val="17364A"/>
                 </a:solidFill>
@@ -4786,7 +4831,7 @@
               </a:rPr>
               <a:t>Generative AI projects may be prioritized for internal knowledge management before public-facing use.</a:t>
             </a:r>
-            <a:endParaRPr lang="en-US" sz="1550" dirty="0"/>
+            <a:endParaRPr lang="en-US" sz="1320" dirty="0"/>
           </a:p>
         </p:txBody>
       </p:sp>
@@ -4874,13 +4919,16 @@
           <a:ln/>
         </p:spPr>
         <p:txBody>
-          <a:bodyPr wrap="square" lIns="254" tIns="254" rIns="254" bIns="254" rtlCol="0" anchor="t">
+          <a:bodyPr wrap="square" lIns="508" tIns="508" rIns="508" bIns="508" rtlCol="0" anchor="t">
             <a:normAutofit/>
           </a:bodyPr>
           <a:lstStyle/>
           <a:p>
-            <a:r>
-              <a:rPr lang="en-US" sz="1380" dirty="0">
+            <a:pPr indent="0" marL="0">
+              <a:buNone/>
+            </a:pPr>
+            <a:r>
+              <a:rPr lang="en-US" sz="1220" dirty="0">
                 <a:solidFill>
                   <a:srgbClr val="17364A"/>
                 </a:solidFill>
@@ -4888,13 +4936,16 @@
                 <a:ea typeface="Aptos" pitchFamily="34" charset="-122"/>
                 <a:cs typeface="Aptos" pitchFamily="34" charset="-120"/>
               </a:rPr>
-              <a:t>Agentic workflows may be deferred until governance has defined decision rights, access.</a:t>
-            </a:r>
-            <a:endParaRPr lang="en-US" sz="1380" dirty="0"/>
-          </a:p>
-          <a:p>
-            <a:r>
-              <a:rPr lang="en-US" sz="1380" dirty="0">
+              <a:t>Agentic workflows may be deferred until governance has defined.</a:t>
+            </a:r>
+            <a:endParaRPr lang="en-US" sz="1220" dirty="0"/>
+          </a:p>
+          <a:p>
+            <a:pPr indent="0" marL="0">
+              <a:buNone/>
+            </a:pPr>
+            <a:r>
+              <a:rPr lang="en-US" sz="1220" dirty="0">
                 <a:solidFill>
                   <a:srgbClr val="17364A"/>
                 </a:solidFill>
@@ -4904,7 +4955,7 @@
               </a:rPr>
               <a:t>Portfolio strategy helps leaders sequence AI adoption responsibly.</a:t>
             </a:r>
-            <a:endParaRPr lang="en-US" sz="1380" dirty="0"/>
+            <a:endParaRPr lang="en-US" sz="1220" dirty="0"/>
           </a:p>
         </p:txBody>
       </p:sp>
@@ -4982,17 +5033,17 @@
         </p:nvSpPr>
         <p:spPr>
           <a:xfrm>
-            <a:off x="7799832" y="5001768"/>
-            <a:ext cx="3145536" cy="502920"/>
-          </a:xfrm>
-          <a:prstGeom prst="rect">
-            <a:avLst/>
-          </a:prstGeom>
-          <a:noFill/>
-          <a:ln/>
-        </p:spPr>
-        <p:txBody>
-          <a:bodyPr wrap="square" lIns="0" tIns="0" rIns="0" bIns="0" rtlCol="0" anchor="t">
+            <a:off x="7799832" y="4974336"/>
+            <a:ext cx="3145536" cy="576072"/>
+          </a:xfrm>
+          <a:prstGeom prst="rect">
+            <a:avLst/>
+          </a:prstGeom>
+          <a:noFill/>
+          <a:ln/>
+        </p:spPr>
+        <p:txBody>
+          <a:bodyPr wrap="square" lIns="254" tIns="254" rIns="254" bIns="254" rtlCol="0" anchor="t">
             <a:normAutofit/>
           </a:bodyPr>
           <a:lstStyle/>
@@ -5001,7 +5052,7 @@
               <a:buNone/>
             </a:pPr>
             <a:r>
-              <a:rPr lang="en-US" sz="1550" dirty="0">
+              <a:rPr lang="en-US" sz="1320" dirty="0">
                 <a:solidFill>
                   <a:srgbClr val="17364A"/>
                 </a:solidFill>
@@ -5009,9 +5060,9 @@
                 <a:ea typeface="Aptos" pitchFamily="34" charset="-122"/>
                 <a:cs typeface="Aptos" pitchFamily="34" charset="-120"/>
               </a:rPr>
-              <a:t>Use the concept to clarify workflow changes, dependencies, staffing, procurement requirements, training needs, and implementation checkpoints.</a:t>
-            </a:r>
-            <a:endParaRPr lang="en-US" sz="1550" dirty="0"/>
+              <a:t>Use the concept to clarify workflow changes, dependencies, staffing, procurement requirements, training needs, and.</a:t>
+            </a:r>
+            <a:endParaRPr lang="en-US" sz="1320" dirty="0"/>
           </a:p>
         </p:txBody>
       </p:sp>
@@ -5312,49 +5363,58 @@
           <a:ln/>
         </p:spPr>
         <p:txBody>
-          <a:bodyPr wrap="square" lIns="635" tIns="635" rIns="635" bIns="635" rtlCol="0" anchor="t">
+          <a:bodyPr wrap="square" lIns="1016" tIns="1016" rIns="1016" bIns="1016" rtlCol="0" anchor="t">
             <a:normAutofit/>
           </a:bodyPr>
           <a:lstStyle/>
           <a:p>
+            <a:pPr indent="0" marL="0">
+              <a:buNone/>
+            </a:pPr>
             <a:r>
               <a:rPr lang="en-US" sz="2100" dirty="0">
                 <a:solidFill>
-                  <a:srgbClr val="17364A"/>
-                </a:solidFill>
-                <a:latin typeface="Aptos" pitchFamily="34" charset="0"/>
-                <a:ea typeface="Aptos" pitchFamily="34" charset="-122"/>
-                <a:cs typeface="Aptos" pitchFamily="34" charset="-120"/>
-              </a:rPr>
-              <a:t>Which current or proposed AI use case in your agency raises this leadership or governance issue most.</a:t>
+                  <a:srgbClr val="003A63"/>
+                </a:solidFill>
+                <a:latin typeface="Aptos" pitchFamily="34" charset="0"/>
+                <a:ea typeface="Aptos" pitchFamily="34" charset="-122"/>
+                <a:cs typeface="Aptos" pitchFamily="34" charset="-120"/>
+              </a:rPr>
+              <a:t>• Which current or proposed AI use case in your agency raises this leadership or governance.</a:t>
             </a:r>
             <a:endParaRPr lang="en-US" sz="2100" dirty="0"/>
           </a:p>
           <a:p>
+            <a:pPr indent="0" marL="0">
+              <a:buNone/>
+            </a:pPr>
             <a:r>
               <a:rPr lang="en-US" sz="2100" dirty="0">
                 <a:solidFill>
-                  <a:srgbClr val="17364A"/>
-                </a:solidFill>
-                <a:latin typeface="Aptos" pitchFamily="34" charset="0"/>
-                <a:ea typeface="Aptos" pitchFamily="34" charset="-122"/>
-                <a:cs typeface="Aptos" pitchFamily="34" charset="-120"/>
-              </a:rPr>
-              <a:t>Who currently has authority to make decisions about this issue, and is that authority documented?</a:t>
+                  <a:srgbClr val="003A63"/>
+                </a:solidFill>
+                <a:latin typeface="Aptos" pitchFamily="34" charset="0"/>
+                <a:ea typeface="Aptos" pitchFamily="34" charset="-122"/>
+                <a:cs typeface="Aptos" pitchFamily="34" charset="-120"/>
+              </a:rPr>
+              <a:t>• Who currently has authority to make decisions about this issue, and is that authority.</a:t>
             </a:r>
             <a:endParaRPr lang="en-US" sz="2100" dirty="0"/>
           </a:p>
           <a:p>
+            <a:pPr indent="0" marL="0">
+              <a:buNone/>
+            </a:pPr>
             <a:r>
               <a:rPr lang="en-US" sz="2100" dirty="0">
                 <a:solidFill>
-                  <a:srgbClr val="17364A"/>
-                </a:solidFill>
-                <a:latin typeface="Aptos" pitchFamily="34" charset="0"/>
-                <a:ea typeface="Aptos" pitchFamily="34" charset="-122"/>
-                <a:cs typeface="Aptos" pitchFamily="34" charset="-120"/>
-              </a:rPr>
-              <a:t>What evidence would governance or leadership need before approving the use case?</a:t>
+                  <a:srgbClr val="003A63"/>
+                </a:solidFill>
+                <a:latin typeface="Aptos" pitchFamily="34" charset="0"/>
+                <a:ea typeface="Aptos" pitchFamily="34" charset="-122"/>
+                <a:cs typeface="Aptos" pitchFamily="34" charset="-120"/>
+              </a:rPr>
+              <a:t>• What evidence would governance or leadership need before approving the use case?</a:t>
             </a:r>
             <a:endParaRPr lang="en-US" sz="2100" dirty="0"/>
           </a:p>
@@ -5434,17 +5494,17 @@
         </p:nvSpPr>
         <p:spPr>
           <a:xfrm>
-            <a:off x="7799832" y="1828800"/>
-            <a:ext cx="3145536" cy="685800"/>
-          </a:xfrm>
-          <a:prstGeom prst="rect">
-            <a:avLst/>
-          </a:prstGeom>
-          <a:noFill/>
-          <a:ln/>
-        </p:spPr>
-        <p:txBody>
-          <a:bodyPr wrap="square" lIns="0" tIns="0" rIns="0" bIns="0" rtlCol="0" anchor="t">
+            <a:off x="7799832" y="1801368"/>
+            <a:ext cx="3145536" cy="758952"/>
+          </a:xfrm>
+          <a:prstGeom prst="rect">
+            <a:avLst/>
+          </a:prstGeom>
+          <a:noFill/>
+          <a:ln/>
+        </p:spPr>
+        <p:txBody>
+          <a:bodyPr wrap="square" lIns="254" tIns="254" rIns="254" bIns="254" rtlCol="0" anchor="t">
             <a:normAutofit/>
           </a:bodyPr>
           <a:lstStyle/>
@@ -5453,7 +5513,7 @@
               <a:buNone/>
             </a:pPr>
             <a:r>
-              <a:rPr lang="en-US" sz="1550" dirty="0">
+              <a:rPr lang="en-US" sz="1320" dirty="0">
                 <a:solidFill>
                   <a:srgbClr val="17364A"/>
                 </a:solidFill>
@@ -5463,7 +5523,7 @@
               </a:rPr>
               <a:t>Which current or proposed AI use case in your agency raises this leadership or governance issue most.</a:t>
             </a:r>
-            <a:endParaRPr lang="en-US" sz="1550" dirty="0"/>
+            <a:endParaRPr lang="en-US" sz="1320" dirty="0"/>
           </a:p>
         </p:txBody>
       </p:sp>
@@ -5551,13 +5611,16 @@
           <a:ln/>
         </p:spPr>
         <p:txBody>
-          <a:bodyPr wrap="square" lIns="254" tIns="254" rIns="254" bIns="254" rtlCol="0" anchor="t">
+          <a:bodyPr wrap="square" lIns="508" tIns="508" rIns="508" bIns="508" rtlCol="0" anchor="t">
             <a:normAutofit/>
           </a:bodyPr>
           <a:lstStyle/>
           <a:p>
-            <a:r>
-              <a:rPr lang="en-US" sz="1380" dirty="0">
+            <a:pPr indent="0" marL="0">
+              <a:buNone/>
+            </a:pPr>
+            <a:r>
+              <a:rPr lang="en-US" sz="1220" dirty="0">
                 <a:solidFill>
                   <a:srgbClr val="17364A"/>
                 </a:solidFill>
@@ -5565,13 +5628,16 @@
                 <a:ea typeface="Aptos" pitchFamily="34" charset="-122"/>
                 <a:cs typeface="Aptos" pitchFamily="34" charset="-120"/>
               </a:rPr>
-              <a:t>Which current or proposed AI use case in your agency raises this leadership or governance.</a:t>
-            </a:r>
-            <a:endParaRPr lang="en-US" sz="1380" dirty="0"/>
-          </a:p>
-          <a:p>
-            <a:r>
-              <a:rPr lang="en-US" sz="1380" dirty="0">
+              <a:t>Which current or proposed AI use case in your agency raises this.</a:t>
+            </a:r>
+            <a:endParaRPr lang="en-US" sz="1220" dirty="0"/>
+          </a:p>
+          <a:p>
+            <a:pPr indent="0" marL="0">
+              <a:buNone/>
+            </a:pPr>
+            <a:r>
+              <a:rPr lang="en-US" sz="1220" dirty="0">
                 <a:solidFill>
                   <a:srgbClr val="17364A"/>
                 </a:solidFill>
@@ -5579,13 +5645,16 @@
                 <a:ea typeface="Aptos" pitchFamily="34" charset="-122"/>
                 <a:cs typeface="Aptos" pitchFamily="34" charset="-120"/>
               </a:rPr>
-              <a:t>Who currently has authority to make decisions about this issue, and is that authority.</a:t>
-            </a:r>
-            <a:endParaRPr lang="en-US" sz="1380" dirty="0"/>
-          </a:p>
-          <a:p>
-            <a:r>
-              <a:rPr lang="en-US" sz="1380" dirty="0">
+              <a:t>Who currently has authority to make decisions about this issue,.</a:t>
+            </a:r>
+            <a:endParaRPr lang="en-US" sz="1220" dirty="0"/>
+          </a:p>
+          <a:p>
+            <a:pPr indent="0" marL="0">
+              <a:buNone/>
+            </a:pPr>
+            <a:r>
+              <a:rPr lang="en-US" sz="1220" dirty="0">
                 <a:solidFill>
                   <a:srgbClr val="17364A"/>
                 </a:solidFill>
@@ -5593,9 +5662,9 @@
                 <a:ea typeface="Aptos" pitchFamily="34" charset="-122"/>
                 <a:cs typeface="Aptos" pitchFamily="34" charset="-120"/>
               </a:rPr>
-              <a:t>What evidence would governance or leadership need before approving the use case?</a:t>
-            </a:r>
-            <a:endParaRPr lang="en-US" sz="1380" dirty="0"/>
+              <a:t>What evidence would governance or leadership need before approving.</a:t>
+            </a:r>
+            <a:endParaRPr lang="en-US" sz="1220" dirty="0"/>
           </a:p>
         </p:txBody>
       </p:sp>
@@ -5673,17 +5742,17 @@
         </p:nvSpPr>
         <p:spPr>
           <a:xfrm>
-            <a:off x="7799832" y="5001768"/>
-            <a:ext cx="3145536" cy="502920"/>
-          </a:xfrm>
-          <a:prstGeom prst="rect">
-            <a:avLst/>
-          </a:prstGeom>
-          <a:noFill/>
-          <a:ln/>
-        </p:spPr>
-        <p:txBody>
-          <a:bodyPr wrap="square" lIns="0" tIns="0" rIns="0" bIns="0" rtlCol="0" anchor="t">
+            <a:off x="7799832" y="4974336"/>
+            <a:ext cx="3145536" cy="576072"/>
+          </a:xfrm>
+          <a:prstGeom prst="rect">
+            <a:avLst/>
+          </a:prstGeom>
+          <a:noFill/>
+          <a:ln/>
+        </p:spPr>
+        <p:txBody>
+          <a:bodyPr wrap="square" lIns="254" tIns="254" rIns="254" bIns="254" rtlCol="0" anchor="t">
             <a:normAutofit/>
           </a:bodyPr>
           <a:lstStyle/>
@@ -5692,7 +5761,7 @@
               <a:buNone/>
             </a:pPr>
             <a:r>
-              <a:rPr lang="en-US" sz="1550" dirty="0">
+              <a:rPr lang="en-US" sz="1320" dirty="0">
                 <a:solidFill>
                   <a:srgbClr val="17364A"/>
                 </a:solidFill>
@@ -5700,9 +5769,9 @@
                 <a:ea typeface="Aptos" pitchFamily="34" charset="-122"/>
                 <a:cs typeface="Aptos" pitchFamily="34" charset="-120"/>
               </a:rPr>
-              <a:t>Connect the concept to public health purpose, responsible use, required safeguards, documentation, and the next action a department should take.</a:t>
-            </a:r>
-            <a:endParaRPr lang="en-US" sz="1550" dirty="0"/>
+              <a:t>Connect the concept to public health purpose, responsible use, required safeguards, documentation, and the next action a.</a:t>
+            </a:r>
+            <a:endParaRPr lang="en-US" sz="1320" dirty="0"/>
           </a:p>
         </p:txBody>
       </p:sp>
@@ -6003,35 +6072,41 @@
           <a:ln/>
         </p:spPr>
         <p:txBody>
-          <a:bodyPr wrap="square" lIns="635" tIns="635" rIns="635" bIns="635" rtlCol="0" anchor="t">
+          <a:bodyPr wrap="square" lIns="1016" tIns="1016" rIns="1016" bIns="1016" rtlCol="0" anchor="t">
             <a:normAutofit/>
           </a:bodyPr>
           <a:lstStyle/>
           <a:p>
+            <a:pPr indent="0" marL="0">
+              <a:buNone/>
+            </a:pPr>
             <a:r>
               <a:rPr lang="en-US" sz="2100" dirty="0">
                 <a:solidFill>
-                  <a:srgbClr val="17364A"/>
-                </a:solidFill>
-                <a:latin typeface="Aptos" pitchFamily="34" charset="0"/>
-                <a:ea typeface="Aptos" pitchFamily="34" charset="-122"/>
-                <a:cs typeface="Aptos" pitchFamily="34" charset="-120"/>
-              </a:rPr>
-              <a:t>Which staff, partners, or communities would be affected if this issue were handled poorly?</a:t>
+                  <a:srgbClr val="003A63"/>
+                </a:solidFill>
+                <a:latin typeface="Aptos" pitchFamily="34" charset="0"/>
+                <a:ea typeface="Aptos" pitchFamily="34" charset="-122"/>
+                <a:cs typeface="Aptos" pitchFamily="34" charset="-120"/>
+              </a:rPr>
+              <a:t>• Which staff, partners, or communities would be affected if this issue were handled poorly?</a:t>
             </a:r>
             <a:endParaRPr lang="en-US" sz="2100" dirty="0"/>
           </a:p>
           <a:p>
+            <a:pPr indent="0" marL="0">
+              <a:buNone/>
+            </a:pPr>
             <a:r>
               <a:rPr lang="en-US" sz="2100" dirty="0">
                 <a:solidFill>
-                  <a:srgbClr val="17364A"/>
-                </a:solidFill>
-                <a:latin typeface="Aptos" pitchFamily="34" charset="0"/>
-                <a:ea typeface="Aptos" pitchFamily="34" charset="-122"/>
-                <a:cs typeface="Aptos" pitchFamily="34" charset="-120"/>
-              </a:rPr>
-              <a:t>What policy, process, or artifact should be created or updated after this module?</a:t>
+                  <a:srgbClr val="003A63"/>
+                </a:solidFill>
+                <a:latin typeface="Aptos" pitchFamily="34" charset="0"/>
+                <a:ea typeface="Aptos" pitchFamily="34" charset="-122"/>
+                <a:cs typeface="Aptos" pitchFamily="34" charset="-120"/>
+              </a:rPr>
+              <a:t>• What policy, process, or artifact should be created or updated after this module?</a:t>
             </a:r>
             <a:endParaRPr lang="en-US" sz="2100" dirty="0"/>
           </a:p>
@@ -6111,17 +6186,17 @@
         </p:nvSpPr>
         <p:spPr>
           <a:xfrm>
-            <a:off x="7799832" y="1828800"/>
-            <a:ext cx="3145536" cy="685800"/>
-          </a:xfrm>
-          <a:prstGeom prst="rect">
-            <a:avLst/>
-          </a:prstGeom>
-          <a:noFill/>
-          <a:ln/>
-        </p:spPr>
-        <p:txBody>
-          <a:bodyPr wrap="square" lIns="0" tIns="0" rIns="0" bIns="0" rtlCol="0" anchor="t">
+            <a:off x="7799832" y="1801368"/>
+            <a:ext cx="3145536" cy="758952"/>
+          </a:xfrm>
+          <a:prstGeom prst="rect">
+            <a:avLst/>
+          </a:prstGeom>
+          <a:noFill/>
+          <a:ln/>
+        </p:spPr>
+        <p:txBody>
+          <a:bodyPr wrap="square" lIns="254" tIns="254" rIns="254" bIns="254" rtlCol="0" anchor="t">
             <a:normAutofit/>
           </a:bodyPr>
           <a:lstStyle/>
@@ -6130,7 +6205,7 @@
               <a:buNone/>
             </a:pPr>
             <a:r>
-              <a:rPr lang="en-US" sz="1550" dirty="0">
+              <a:rPr lang="en-US" sz="1320" dirty="0">
                 <a:solidFill>
                   <a:srgbClr val="17364A"/>
                 </a:solidFill>
@@ -6140,7 +6215,7 @@
               </a:rPr>
               <a:t>Which staff, partners, or communities would be affected if this issue were handled poorly?</a:t>
             </a:r>
-            <a:endParaRPr lang="en-US" sz="1550" dirty="0"/>
+            <a:endParaRPr lang="en-US" sz="1320" dirty="0"/>
           </a:p>
         </p:txBody>
       </p:sp>
@@ -6228,13 +6303,16 @@
           <a:ln/>
         </p:spPr>
         <p:txBody>
-          <a:bodyPr wrap="square" lIns="254" tIns="254" rIns="254" bIns="254" rtlCol="0" anchor="t">
+          <a:bodyPr wrap="square" lIns="508" tIns="508" rIns="508" bIns="508" rtlCol="0" anchor="t">
             <a:normAutofit/>
           </a:bodyPr>
           <a:lstStyle/>
           <a:p>
-            <a:r>
-              <a:rPr lang="en-US" sz="1380" dirty="0">
+            <a:pPr indent="0" marL="0">
+              <a:buNone/>
+            </a:pPr>
+            <a:r>
+              <a:rPr lang="en-US" sz="1220" dirty="0">
                 <a:solidFill>
                   <a:srgbClr val="17364A"/>
                 </a:solidFill>
@@ -6242,13 +6320,16 @@
                 <a:ea typeface="Aptos" pitchFamily="34" charset="-122"/>
                 <a:cs typeface="Aptos" pitchFamily="34" charset="-120"/>
               </a:rPr>
-              <a:t>Which staff, partners, or communities would be affected if this issue were handled poorly?</a:t>
-            </a:r>
-            <a:endParaRPr lang="en-US" sz="1380" dirty="0"/>
-          </a:p>
-          <a:p>
-            <a:r>
-              <a:rPr lang="en-US" sz="1380" dirty="0">
+              <a:t>Which staff, partners, or communities would be affected if this.</a:t>
+            </a:r>
+            <a:endParaRPr lang="en-US" sz="1220" dirty="0"/>
+          </a:p>
+          <a:p>
+            <a:pPr indent="0" marL="0">
+              <a:buNone/>
+            </a:pPr>
+            <a:r>
+              <a:rPr lang="en-US" sz="1220" dirty="0">
                 <a:solidFill>
                   <a:srgbClr val="17364A"/>
                 </a:solidFill>
@@ -6256,9 +6337,9 @@
                 <a:ea typeface="Aptos" pitchFamily="34" charset="-122"/>
                 <a:cs typeface="Aptos" pitchFamily="34" charset="-120"/>
               </a:rPr>
-              <a:t>What policy, process, or artifact should be created or updated after this module?</a:t>
-            </a:r>
-            <a:endParaRPr lang="en-US" sz="1380" dirty="0"/>
+              <a:t>What policy, process, or artifact should be created or updated.</a:t>
+            </a:r>
+            <a:endParaRPr lang="en-US" sz="1220" dirty="0"/>
           </a:p>
         </p:txBody>
       </p:sp>
@@ -6336,17 +6417,17 @@
         </p:nvSpPr>
         <p:spPr>
           <a:xfrm>
-            <a:off x="7799832" y="5001768"/>
-            <a:ext cx="3145536" cy="502920"/>
-          </a:xfrm>
-          <a:prstGeom prst="rect">
-            <a:avLst/>
-          </a:prstGeom>
-          <a:noFill/>
-          <a:ln/>
-        </p:spPr>
-        <p:txBody>
-          <a:bodyPr wrap="square" lIns="0" tIns="0" rIns="0" bIns="0" rtlCol="0" anchor="t">
+            <a:off x="7799832" y="4974336"/>
+            <a:ext cx="3145536" cy="576072"/>
+          </a:xfrm>
+          <a:prstGeom prst="rect">
+            <a:avLst/>
+          </a:prstGeom>
+          <a:noFill/>
+          <a:ln/>
+        </p:spPr>
+        <p:txBody>
+          <a:bodyPr wrap="square" lIns="254" tIns="254" rIns="254" bIns="254" rtlCol="0" anchor="t">
             <a:normAutofit/>
           </a:bodyPr>
           <a:lstStyle/>
@@ -6355,7 +6436,7 @@
               <a:buNone/>
             </a:pPr>
             <a:r>
-              <a:rPr lang="en-US" sz="1550" dirty="0">
+              <a:rPr lang="en-US" sz="1320" dirty="0">
                 <a:solidFill>
                   <a:srgbClr val="17364A"/>
                 </a:solidFill>
@@ -6363,9 +6444,9 @@
                 <a:ea typeface="Aptos" pitchFamily="34" charset="-122"/>
                 <a:cs typeface="Aptos" pitchFamily="34" charset="-120"/>
               </a:rPr>
-              <a:t>Connect the concept to public health purpose, responsible use, required safeguards, documentation, and the next action a department should take.</a:t>
-            </a:r>
-            <a:endParaRPr lang="en-US" sz="1550" dirty="0"/>
+              <a:t>Connect the concept to public health purpose, responsible use, required safeguards, documentation, and the next action a.</a:t>
+            </a:r>
+            <a:endParaRPr lang="en-US" sz="1320" dirty="0"/>
           </a:p>
         </p:txBody>
       </p:sp>
@@ -6666,21 +6747,24 @@
           <a:ln/>
         </p:spPr>
         <p:txBody>
-          <a:bodyPr wrap="square" lIns="635" tIns="635" rIns="635" bIns="635" rtlCol="0" anchor="t">
+          <a:bodyPr wrap="square" lIns="1016" tIns="1016" rIns="1016" bIns="1016" rtlCol="0" anchor="t">
             <a:normAutofit/>
           </a:bodyPr>
           <a:lstStyle/>
           <a:p>
+            <a:pPr indent="0" marL="0">
+              <a:buNone/>
+            </a:pPr>
             <a:r>
               <a:rPr lang="en-US" sz="2100" dirty="0">
                 <a:solidFill>
-                  <a:srgbClr val="17364A"/>
-                </a:solidFill>
-                <a:latin typeface="Aptos" pitchFamily="34" charset="0"/>
-                <a:ea typeface="Aptos" pitchFamily="34" charset="-122"/>
-                <a:cs typeface="Aptos" pitchFamily="34" charset="-120"/>
-              </a:rPr>
-              <a:t>Develop an AI use case prioritization rubric with criteria, scoring levels, required evidence, and.</a:t>
+                  <a:srgbClr val="003A63"/>
+                </a:solidFill>
+                <a:latin typeface="Aptos" pitchFamily="34" charset="0"/>
+                <a:ea typeface="Aptos" pitchFamily="34" charset="-122"/>
+                <a:cs typeface="Aptos" pitchFamily="34" charset="-120"/>
+              </a:rPr>
+              <a:t>• Develop an AI use case prioritization rubric with criteria, scoring levels, required evidence,.</a:t>
             </a:r>
             <a:endParaRPr lang="en-US" sz="2100" dirty="0"/>
           </a:p>
@@ -6760,17 +6844,17 @@
         </p:nvSpPr>
         <p:spPr>
           <a:xfrm>
-            <a:off x="7799832" y="1828800"/>
-            <a:ext cx="3145536" cy="685800"/>
-          </a:xfrm>
-          <a:prstGeom prst="rect">
-            <a:avLst/>
-          </a:prstGeom>
-          <a:noFill/>
-          <a:ln/>
-        </p:spPr>
-        <p:txBody>
-          <a:bodyPr wrap="square" lIns="0" tIns="0" rIns="0" bIns="0" rtlCol="0" anchor="t">
+            <a:off x="7799832" y="1801368"/>
+            <a:ext cx="3145536" cy="758952"/>
+          </a:xfrm>
+          <a:prstGeom prst="rect">
+            <a:avLst/>
+          </a:prstGeom>
+          <a:noFill/>
+          <a:ln/>
+        </p:spPr>
+        <p:txBody>
+          <a:bodyPr wrap="square" lIns="254" tIns="254" rIns="254" bIns="254" rtlCol="0" anchor="t">
             <a:normAutofit/>
           </a:bodyPr>
           <a:lstStyle/>
@@ -6779,7 +6863,7 @@
               <a:buNone/>
             </a:pPr>
             <a:r>
-              <a:rPr lang="en-US" sz="1550" dirty="0">
+              <a:rPr lang="en-US" sz="1320" dirty="0">
                 <a:solidFill>
                   <a:srgbClr val="17364A"/>
                 </a:solidFill>
@@ -6789,7 +6873,7 @@
               </a:rPr>
               <a:t>Develop an AI use case prioritization rubric with criteria, scoring levels, required evidence, and.</a:t>
             </a:r>
-            <a:endParaRPr lang="en-US" sz="1550" dirty="0"/>
+            <a:endParaRPr lang="en-US" sz="1320" dirty="0"/>
           </a:p>
         </p:txBody>
       </p:sp>
@@ -6877,13 +6961,16 @@
           <a:ln/>
         </p:spPr>
         <p:txBody>
-          <a:bodyPr wrap="square" lIns="254" tIns="254" rIns="254" bIns="254" rtlCol="0" anchor="t">
+          <a:bodyPr wrap="square" lIns="508" tIns="508" rIns="508" bIns="508" rtlCol="0" anchor="t">
             <a:normAutofit/>
           </a:bodyPr>
           <a:lstStyle/>
           <a:p>
-            <a:r>
-              <a:rPr lang="en-US" sz="1380" dirty="0">
+            <a:pPr indent="0" marL="0">
+              <a:buNone/>
+            </a:pPr>
+            <a:r>
+              <a:rPr lang="en-US" sz="1220" dirty="0">
                 <a:solidFill>
                   <a:srgbClr val="17364A"/>
                 </a:solidFill>
@@ -6891,9 +6978,9 @@
                 <a:ea typeface="Aptos" pitchFamily="34" charset="-122"/>
                 <a:cs typeface="Aptos" pitchFamily="34" charset="-120"/>
               </a:rPr>
-              <a:t>Develop an AI use case prioritization rubric with criteria, scoring levels, required.</a:t>
-            </a:r>
-            <a:endParaRPr lang="en-US" sz="1380" dirty="0"/>
+              <a:t>Develop an AI use case prioritization rubric with criteria,.</a:t>
+            </a:r>
+            <a:endParaRPr lang="en-US" sz="1220" dirty="0"/>
           </a:p>
         </p:txBody>
       </p:sp>
@@ -6971,17 +7058,17 @@
         </p:nvSpPr>
         <p:spPr>
           <a:xfrm>
-            <a:off x="7799832" y="5001768"/>
-            <a:ext cx="3145536" cy="502920"/>
-          </a:xfrm>
-          <a:prstGeom prst="rect">
-            <a:avLst/>
-          </a:prstGeom>
-          <a:noFill/>
-          <a:ln/>
-        </p:spPr>
-        <p:txBody>
-          <a:bodyPr wrap="square" lIns="0" tIns="0" rIns="0" bIns="0" rtlCol="0" anchor="t">
+            <a:off x="7799832" y="4974336"/>
+            <a:ext cx="3145536" cy="576072"/>
+          </a:xfrm>
+          <a:prstGeom prst="rect">
+            <a:avLst/>
+          </a:prstGeom>
+          <a:noFill/>
+          <a:ln/>
+        </p:spPr>
+        <p:txBody>
+          <a:bodyPr wrap="square" lIns="254" tIns="254" rIns="254" bIns="254" rtlCol="0" anchor="t">
             <a:normAutofit/>
           </a:bodyPr>
           <a:lstStyle/>
@@ -6990,7 +7077,7 @@
               <a:buNone/>
             </a:pPr>
             <a:r>
-              <a:rPr lang="en-US" sz="1550" dirty="0">
+              <a:rPr lang="en-US" sz="1320" dirty="0">
                 <a:solidFill>
                   <a:srgbClr val="17364A"/>
                 </a:solidFill>
@@ -6998,9 +7085,9 @@
                 <a:ea typeface="Aptos" pitchFamily="34" charset="-122"/>
                 <a:cs typeface="Aptos" pitchFamily="34" charset="-120"/>
               </a:rPr>
-              <a:t>Use the assignment to test whether you can explain the concept, apply it to a realistic public health situation, and identify what would need review before the work moves forward.</a:t>
-            </a:r>
-            <a:endParaRPr lang="en-US" sz="1550" dirty="0"/>
+              <a:t>Use the assignment to test whether you can explain the concept, apply it to a realistic public health situation, and.</a:t>
+            </a:r>
+            <a:endParaRPr lang="en-US" sz="1320" dirty="0"/>
           </a:p>
         </p:txBody>
       </p:sp>
@@ -7301,49 +7388,58 @@
           <a:ln/>
         </p:spPr>
         <p:txBody>
-          <a:bodyPr wrap="square" lIns="635" tIns="635" rIns="635" bIns="635" rtlCol="0" anchor="t">
+          <a:bodyPr wrap="square" lIns="1016" tIns="1016" rIns="1016" bIns="1016" rtlCol="0" anchor="t">
             <a:normAutofit/>
           </a:bodyPr>
           <a:lstStyle/>
           <a:p>
+            <a:pPr indent="0" marL="0">
+              <a:buNone/>
+            </a:pPr>
             <a:r>
               <a:rPr lang="en-US" sz="2100" dirty="0">
                 <a:solidFill>
-                  <a:srgbClr val="17364A"/>
-                </a:solidFill>
-                <a:latin typeface="Aptos" pitchFamily="34" charset="0"/>
-                <a:ea typeface="Aptos" pitchFamily="34" charset="-122"/>
-                <a:cs typeface="Aptos" pitchFamily="34" charset="-120"/>
-              </a:rPr>
-              <a:t>Choose a real or realistic public health AI use case.</a:t>
+                  <a:srgbClr val="003A63"/>
+                </a:solidFill>
+                <a:latin typeface="Aptos" pitchFamily="34" charset="0"/>
+                <a:ea typeface="Aptos" pitchFamily="34" charset="-122"/>
+                <a:cs typeface="Aptos" pitchFamily="34" charset="-120"/>
+              </a:rPr>
+              <a:t>• Choose a real or realistic public health AI use case.</a:t>
             </a:r>
             <a:endParaRPr lang="en-US" sz="2100" dirty="0"/>
           </a:p>
           <a:p>
+            <a:pPr indent="0" marL="0">
+              <a:buNone/>
+            </a:pPr>
             <a:r>
               <a:rPr lang="en-US" sz="2100" dirty="0">
                 <a:solidFill>
-                  <a:srgbClr val="17364A"/>
-                </a:solidFill>
-                <a:latin typeface="Aptos" pitchFamily="34" charset="0"/>
-                <a:ea typeface="Aptos" pitchFamily="34" charset="-122"/>
-                <a:cs typeface="Aptos" pitchFamily="34" charset="-120"/>
-              </a:rPr>
-              <a:t>Document assumptions, unresolved questions, and which agency roles would need to review the artifact.</a:t>
+                  <a:srgbClr val="003A63"/>
+                </a:solidFill>
+                <a:latin typeface="Aptos" pitchFamily="34" charset="0"/>
+                <a:ea typeface="Aptos" pitchFamily="34" charset="-122"/>
+                <a:cs typeface="Aptos" pitchFamily="34" charset="-120"/>
+              </a:rPr>
+              <a:t>• Document assumptions, unresolved questions, and which agency roles would need to review the.</a:t>
             </a:r>
             <a:endParaRPr lang="en-US" sz="2100" dirty="0"/>
           </a:p>
           <a:p>
+            <a:pPr indent="0" marL="0">
+              <a:buNone/>
+            </a:pPr>
             <a:r>
               <a:rPr lang="en-US" sz="2100" dirty="0">
                 <a:solidFill>
-                  <a:srgbClr val="17364A"/>
-                </a:solidFill>
-                <a:latin typeface="Aptos" pitchFamily="34" charset="0"/>
-                <a:ea typeface="Aptos" pitchFamily="34" charset="-122"/>
-                <a:cs typeface="Aptos" pitchFamily="34" charset="-120"/>
-              </a:rPr>
-              <a:t>The exercise should produce a work product that could support governance review, leadership discussion,.</a:t>
+                  <a:srgbClr val="003A63"/>
+                </a:solidFill>
+                <a:latin typeface="Aptos" pitchFamily="34" charset="0"/>
+                <a:ea typeface="Aptos" pitchFamily="34" charset="-122"/>
+                <a:cs typeface="Aptos" pitchFamily="34" charset="-120"/>
+              </a:rPr>
+              <a:t>• The exercise should produce a work product that could support governance review, leadership.</a:t>
             </a:r>
             <a:endParaRPr lang="en-US" sz="2100" dirty="0"/>
           </a:p>
@@ -7423,17 +7519,17 @@
         </p:nvSpPr>
         <p:spPr>
           <a:xfrm>
-            <a:off x="7799832" y="1828800"/>
-            <a:ext cx="3145536" cy="685800"/>
-          </a:xfrm>
-          <a:prstGeom prst="rect">
-            <a:avLst/>
-          </a:prstGeom>
-          <a:noFill/>
-          <a:ln/>
-        </p:spPr>
-        <p:txBody>
-          <a:bodyPr wrap="square" lIns="0" tIns="0" rIns="0" bIns="0" rtlCol="0" anchor="t">
+            <a:off x="7799832" y="1801368"/>
+            <a:ext cx="3145536" cy="758952"/>
+          </a:xfrm>
+          <a:prstGeom prst="rect">
+            <a:avLst/>
+          </a:prstGeom>
+          <a:noFill/>
+          <a:ln/>
+        </p:spPr>
+        <p:txBody>
+          <a:bodyPr wrap="square" lIns="254" tIns="254" rIns="254" bIns="254" rtlCol="0" anchor="t">
             <a:normAutofit/>
           </a:bodyPr>
           <a:lstStyle/>
@@ -7442,7 +7538,7 @@
               <a:buNone/>
             </a:pPr>
             <a:r>
-              <a:rPr lang="en-US" sz="1550" dirty="0">
+              <a:rPr lang="en-US" sz="1320" dirty="0">
                 <a:solidFill>
                   <a:srgbClr val="17364A"/>
                 </a:solidFill>
@@ -7452,7 +7548,7 @@
               </a:rPr>
               <a:t>Choose a real or realistic public health AI use case.</a:t>
             </a:r>
-            <a:endParaRPr lang="en-US" sz="1550" dirty="0"/>
+            <a:endParaRPr lang="en-US" sz="1320" dirty="0"/>
           </a:p>
         </p:txBody>
       </p:sp>
@@ -7540,13 +7636,16 @@
           <a:ln/>
         </p:spPr>
         <p:txBody>
-          <a:bodyPr wrap="square" lIns="254" tIns="254" rIns="254" bIns="254" rtlCol="0" anchor="t">
+          <a:bodyPr wrap="square" lIns="508" tIns="508" rIns="508" bIns="508" rtlCol="0" anchor="t">
             <a:normAutofit/>
           </a:bodyPr>
           <a:lstStyle/>
           <a:p>
-            <a:r>
-              <a:rPr lang="en-US" sz="1380" dirty="0">
+            <a:pPr indent="0" marL="0">
+              <a:buNone/>
+            </a:pPr>
+            <a:r>
+              <a:rPr lang="en-US" sz="1220" dirty="0">
                 <a:solidFill>
                   <a:srgbClr val="17364A"/>
                 </a:solidFill>
@@ -7554,13 +7653,16 @@
                 <a:ea typeface="Aptos" pitchFamily="34" charset="-122"/>
                 <a:cs typeface="Aptos" pitchFamily="34" charset="-120"/>
               </a:rPr>
-              <a:t>Document assumptions, unresolved questions, and which agency roles would need to review.</a:t>
-            </a:r>
-            <a:endParaRPr lang="en-US" sz="1380" dirty="0"/>
-          </a:p>
-          <a:p>
-            <a:r>
-              <a:rPr lang="en-US" sz="1380" dirty="0">
+              <a:t>Document assumptions, unresolved questions, and which agency roles.</a:t>
+            </a:r>
+            <a:endParaRPr lang="en-US" sz="1220" dirty="0"/>
+          </a:p>
+          <a:p>
+            <a:pPr indent="0" marL="0">
+              <a:buNone/>
+            </a:pPr>
+            <a:r>
+              <a:rPr lang="en-US" sz="1220" dirty="0">
                 <a:solidFill>
                   <a:srgbClr val="17364A"/>
                 </a:solidFill>
@@ -7568,9 +7670,9 @@
                 <a:ea typeface="Aptos" pitchFamily="34" charset="-122"/>
                 <a:cs typeface="Aptos" pitchFamily="34" charset="-120"/>
               </a:rPr>
-              <a:t>The exercise should produce a work product that could support governance review,.</a:t>
-            </a:r>
-            <a:endParaRPr lang="en-US" sz="1380" dirty="0"/>
+              <a:t>The exercise should produce a work product that could support.</a:t>
+            </a:r>
+            <a:endParaRPr lang="en-US" sz="1220" dirty="0"/>
           </a:p>
         </p:txBody>
       </p:sp>
@@ -7648,17 +7750,17 @@
         </p:nvSpPr>
         <p:spPr>
           <a:xfrm>
-            <a:off x="7799832" y="5001768"/>
-            <a:ext cx="3145536" cy="502920"/>
-          </a:xfrm>
-          <a:prstGeom prst="rect">
-            <a:avLst/>
-          </a:prstGeom>
-          <a:noFill/>
-          <a:ln/>
-        </p:spPr>
-        <p:txBody>
-          <a:bodyPr wrap="square" lIns="0" tIns="0" rIns="0" bIns="0" rtlCol="0" anchor="t">
+            <a:off x="7799832" y="4974336"/>
+            <a:ext cx="3145536" cy="576072"/>
+          </a:xfrm>
+          <a:prstGeom prst="rect">
+            <a:avLst/>
+          </a:prstGeom>
+          <a:noFill/>
+          <a:ln/>
+        </p:spPr>
+        <p:txBody>
+          <a:bodyPr wrap="square" lIns="254" tIns="254" rIns="254" bIns="254" rtlCol="0" anchor="t">
             <a:normAutofit/>
           </a:bodyPr>
           <a:lstStyle/>
@@ -7667,7 +7769,7 @@
               <a:buNone/>
             </a:pPr>
             <a:r>
-              <a:rPr lang="en-US" sz="1550" dirty="0">
+              <a:rPr lang="en-US" sz="1320" dirty="0">
                 <a:solidFill>
                   <a:srgbClr val="17364A"/>
                 </a:solidFill>
@@ -7675,9 +7777,9 @@
                 <a:ea typeface="Aptos" pitchFamily="34" charset="-122"/>
                 <a:cs typeface="Aptos" pitchFamily="34" charset="-120"/>
               </a:rPr>
-              <a:t>Connect the concept to public health purpose, responsible use, required safeguards, documentation, and the next action a department should take.</a:t>
-            </a:r>
-            <a:endParaRPr lang="en-US" sz="1550" dirty="0"/>
+              <a:t>Connect the concept to public health purpose, responsible use, required safeguards, documentation, and the next action a.</a:t>
+            </a:r>
+            <a:endParaRPr lang="en-US" sz="1320" dirty="0"/>
           </a:p>
         </p:txBody>
       </p:sp>
@@ -7978,21 +8080,24 @@
           <a:ln/>
         </p:spPr>
         <p:txBody>
-          <a:bodyPr wrap="square" lIns="635" tIns="635" rIns="635" bIns="635" rtlCol="0" anchor="t">
+          <a:bodyPr wrap="square" lIns="1016" tIns="1016" rIns="1016" bIns="1016" rtlCol="0" anchor="t">
             <a:normAutofit/>
           </a:bodyPr>
           <a:lstStyle/>
           <a:p>
+            <a:pPr indent="0" marL="0">
+              <a:buNone/>
+            </a:pPr>
             <a:r>
               <a:rPr lang="en-US" sz="2100" dirty="0">
                 <a:solidFill>
-                  <a:srgbClr val="17364A"/>
-                </a:solidFill>
-                <a:latin typeface="Aptos" pitchFamily="34" charset="0"/>
-                <a:ea typeface="Aptos" pitchFamily="34" charset="-122"/>
-                <a:cs typeface="Aptos" pitchFamily="34" charset="-120"/>
-              </a:rPr>
-              <a:t>Use case intake form; prioritization rubric; sample portfolio view; decision category definitions.</a:t>
+                  <a:srgbClr val="003A63"/>
+                </a:solidFill>
+                <a:latin typeface="Aptos" pitchFamily="34" charset="0"/>
+                <a:ea typeface="Aptos" pitchFamily="34" charset="-122"/>
+                <a:cs typeface="Aptos" pitchFamily="34" charset="-120"/>
+              </a:rPr>
+              <a:t>• Use case intake form; prioritization rubric; sample portfolio view; decision category.</a:t>
             </a:r>
             <a:endParaRPr lang="en-US" sz="2100" dirty="0"/>
           </a:p>
@@ -8072,17 +8177,17 @@
         </p:nvSpPr>
         <p:spPr>
           <a:xfrm>
-            <a:off x="7799832" y="1828800"/>
-            <a:ext cx="3145536" cy="685800"/>
-          </a:xfrm>
-          <a:prstGeom prst="rect">
-            <a:avLst/>
-          </a:prstGeom>
-          <a:noFill/>
-          <a:ln/>
-        </p:spPr>
-        <p:txBody>
-          <a:bodyPr wrap="square" lIns="0" tIns="0" rIns="0" bIns="0" rtlCol="0" anchor="t">
+            <a:off x="7799832" y="1801368"/>
+            <a:ext cx="3145536" cy="758952"/>
+          </a:xfrm>
+          <a:prstGeom prst="rect">
+            <a:avLst/>
+          </a:prstGeom>
+          <a:noFill/>
+          <a:ln/>
+        </p:spPr>
+        <p:txBody>
+          <a:bodyPr wrap="square" lIns="254" tIns="254" rIns="254" bIns="254" rtlCol="0" anchor="t">
             <a:normAutofit/>
           </a:bodyPr>
           <a:lstStyle/>
@@ -8091,7 +8196,7 @@
               <a:buNone/>
             </a:pPr>
             <a:r>
-              <a:rPr lang="en-US" sz="1550" dirty="0">
+              <a:rPr lang="en-US" sz="1320" dirty="0">
                 <a:solidFill>
                   <a:srgbClr val="17364A"/>
                 </a:solidFill>
@@ -8101,7 +8206,7 @@
               </a:rPr>
               <a:t>Use case intake form; prioritization rubric; sample portfolio view; decision category definitions.</a:t>
             </a:r>
-            <a:endParaRPr lang="en-US" sz="1550" dirty="0"/>
+            <a:endParaRPr lang="en-US" sz="1320" dirty="0"/>
           </a:p>
         </p:txBody>
       </p:sp>
@@ -8189,13 +8294,16 @@
           <a:ln/>
         </p:spPr>
         <p:txBody>
-          <a:bodyPr wrap="square" lIns="254" tIns="254" rIns="254" bIns="254" rtlCol="0" anchor="t">
+          <a:bodyPr wrap="square" lIns="508" tIns="508" rIns="508" bIns="508" rtlCol="0" anchor="t">
             <a:normAutofit/>
           </a:bodyPr>
           <a:lstStyle/>
           <a:p>
-            <a:r>
-              <a:rPr lang="en-US" sz="1380" dirty="0">
+            <a:pPr indent="0" marL="0">
+              <a:buNone/>
+            </a:pPr>
+            <a:r>
+              <a:rPr lang="en-US" sz="1220" dirty="0">
                 <a:solidFill>
                   <a:srgbClr val="17364A"/>
                 </a:solidFill>
@@ -8203,9 +8311,9 @@
                 <a:ea typeface="Aptos" pitchFamily="34" charset="-122"/>
                 <a:cs typeface="Aptos" pitchFamily="34" charset="-120"/>
               </a:rPr>
-              <a:t>Use case intake form; prioritization rubric; sample portfolio view; decision category.</a:t>
-            </a:r>
-            <a:endParaRPr lang="en-US" sz="1380" dirty="0"/>
+              <a:t>Use case intake form; prioritization rubric; sample portfolio.</a:t>
+            </a:r>
+            <a:endParaRPr lang="en-US" sz="1220" dirty="0"/>
           </a:p>
         </p:txBody>
       </p:sp>
@@ -8283,17 +8391,17 @@
         </p:nvSpPr>
         <p:spPr>
           <a:xfrm>
-            <a:off x="7799832" y="5001768"/>
-            <a:ext cx="3145536" cy="502920"/>
-          </a:xfrm>
-          <a:prstGeom prst="rect">
-            <a:avLst/>
-          </a:prstGeom>
-          <a:noFill/>
-          <a:ln/>
-        </p:spPr>
-        <p:txBody>
-          <a:bodyPr wrap="square" lIns="0" tIns="0" rIns="0" bIns="0" rtlCol="0" anchor="t">
+            <a:off x="7799832" y="4974336"/>
+            <a:ext cx="3145536" cy="576072"/>
+          </a:xfrm>
+          <a:prstGeom prst="rect">
+            <a:avLst/>
+          </a:prstGeom>
+          <a:noFill/>
+          <a:ln/>
+        </p:spPr>
+        <p:txBody>
+          <a:bodyPr wrap="square" lIns="254" tIns="254" rIns="254" bIns="254" rtlCol="0" anchor="t">
             <a:normAutofit/>
           </a:bodyPr>
           <a:lstStyle/>
@@ -8302,7 +8410,7 @@
               <a:buNone/>
             </a:pPr>
             <a:r>
-              <a:rPr lang="en-US" sz="1550" dirty="0">
+              <a:rPr lang="en-US" sz="1320" dirty="0">
                 <a:solidFill>
                   <a:srgbClr val="17364A"/>
                 </a:solidFill>
@@ -8310,9 +8418,9 @@
                 <a:ea typeface="Aptos" pitchFamily="34" charset="-122"/>
                 <a:cs typeface="Aptos" pitchFamily="34" charset="-120"/>
               </a:rPr>
-              <a:t>Connect the concept to public health purpose, responsible use, required safeguards, documentation, and the next action a department should take.</a:t>
-            </a:r>
-            <a:endParaRPr lang="en-US" sz="1550" dirty="0"/>
+              <a:t>Connect the concept to public health purpose, responsible use, required safeguards, documentation, and the next action a.</a:t>
+            </a:r>
+            <a:endParaRPr lang="en-US" sz="1320" dirty="0"/>
           </a:p>
         </p:txBody>
       </p:sp>
@@ -8613,21 +8721,24 @@
           <a:ln/>
         </p:spPr>
         <p:txBody>
-          <a:bodyPr wrap="square" lIns="635" tIns="635" rIns="635" bIns="635" rtlCol="0" anchor="t">
+          <a:bodyPr wrap="square" lIns="1016" tIns="1016" rIns="1016" bIns="1016" rtlCol="0" anchor="t">
             <a:normAutofit/>
           </a:bodyPr>
           <a:lstStyle/>
           <a:p>
+            <a:pPr indent="0" marL="0">
+              <a:buNone/>
+            </a:pPr>
             <a:r>
               <a:rPr lang="en-US" sz="2100" dirty="0">
                 <a:solidFill>
-                  <a:srgbClr val="17364A"/>
-                </a:solidFill>
-                <a:latin typeface="Aptos" pitchFamily="34" charset="0"/>
-                <a:ea typeface="Aptos" pitchFamily="34" charset="-122"/>
-                <a:cs typeface="Aptos" pitchFamily="34" charset="-120"/>
-              </a:rPr>
-              <a:t>Use case intake form; prioritization rubric; sample portfolio view; decision category definitions.</a:t>
+                  <a:srgbClr val="003A63"/>
+                </a:solidFill>
+                <a:latin typeface="Aptos" pitchFamily="34" charset="0"/>
+                <a:ea typeface="Aptos" pitchFamily="34" charset="-122"/>
+                <a:cs typeface="Aptos" pitchFamily="34" charset="-120"/>
+              </a:rPr>
+              <a:t>• Use case intake form; prioritization rubric; sample portfolio view; decision category.</a:t>
             </a:r>
             <a:endParaRPr lang="en-US" sz="2100" dirty="0"/>
           </a:p>
@@ -8707,17 +8818,17 @@
         </p:nvSpPr>
         <p:spPr>
           <a:xfrm>
-            <a:off x="7799832" y="1828800"/>
-            <a:ext cx="3145536" cy="685800"/>
-          </a:xfrm>
-          <a:prstGeom prst="rect">
-            <a:avLst/>
-          </a:prstGeom>
-          <a:noFill/>
-          <a:ln/>
-        </p:spPr>
-        <p:txBody>
-          <a:bodyPr wrap="square" lIns="0" tIns="0" rIns="0" bIns="0" rtlCol="0" anchor="t">
+            <a:off x="7799832" y="1801368"/>
+            <a:ext cx="3145536" cy="758952"/>
+          </a:xfrm>
+          <a:prstGeom prst="rect">
+            <a:avLst/>
+          </a:prstGeom>
+          <a:noFill/>
+          <a:ln/>
+        </p:spPr>
+        <p:txBody>
+          <a:bodyPr wrap="square" lIns="254" tIns="254" rIns="254" bIns="254" rtlCol="0" anchor="t">
             <a:normAutofit/>
           </a:bodyPr>
           <a:lstStyle/>
@@ -8726,7 +8837,7 @@
               <a:buNone/>
             </a:pPr>
             <a:r>
-              <a:rPr lang="en-US" sz="1550" dirty="0">
+              <a:rPr lang="en-US" sz="1320" dirty="0">
                 <a:solidFill>
                   <a:srgbClr val="17364A"/>
                 </a:solidFill>
@@ -8736,7 +8847,7 @@
               </a:rPr>
               <a:t>Use case intake form; prioritization rubric; sample portfolio view; decision category definitions.</a:t>
             </a:r>
-            <a:endParaRPr lang="en-US" sz="1550" dirty="0"/>
+            <a:endParaRPr lang="en-US" sz="1320" dirty="0"/>
           </a:p>
         </p:txBody>
       </p:sp>
@@ -8824,13 +8935,16 @@
           <a:ln/>
         </p:spPr>
         <p:txBody>
-          <a:bodyPr wrap="square" lIns="254" tIns="254" rIns="254" bIns="254" rtlCol="0" anchor="t">
+          <a:bodyPr wrap="square" lIns="508" tIns="508" rIns="508" bIns="508" rtlCol="0" anchor="t">
             <a:normAutofit/>
           </a:bodyPr>
           <a:lstStyle/>
           <a:p>
-            <a:r>
-              <a:rPr lang="en-US" sz="1380" dirty="0">
+            <a:pPr indent="0" marL="0">
+              <a:buNone/>
+            </a:pPr>
+            <a:r>
+              <a:rPr lang="en-US" sz="1220" dirty="0">
                 <a:solidFill>
                   <a:srgbClr val="17364A"/>
                 </a:solidFill>
@@ -8838,9 +8952,9 @@
                 <a:ea typeface="Aptos" pitchFamily="34" charset="-122"/>
                 <a:cs typeface="Aptos" pitchFamily="34" charset="-120"/>
               </a:rPr>
-              <a:t>Use case intake form; prioritization rubric; sample portfolio view; decision category.</a:t>
-            </a:r>
-            <a:endParaRPr lang="en-US" sz="1380" dirty="0"/>
+              <a:t>Use case intake form; prioritization rubric; sample portfolio.</a:t>
+            </a:r>
+            <a:endParaRPr lang="en-US" sz="1220" dirty="0"/>
           </a:p>
         </p:txBody>
       </p:sp>
@@ -8918,17 +9032,17 @@
         </p:nvSpPr>
         <p:spPr>
           <a:xfrm>
-            <a:off x="7799832" y="5001768"/>
-            <a:ext cx="3145536" cy="502920"/>
-          </a:xfrm>
-          <a:prstGeom prst="rect">
-            <a:avLst/>
-          </a:prstGeom>
-          <a:noFill/>
-          <a:ln/>
-        </p:spPr>
-        <p:txBody>
-          <a:bodyPr wrap="square" lIns="0" tIns="0" rIns="0" bIns="0" rtlCol="0" anchor="t">
+            <a:off x="7799832" y="4974336"/>
+            <a:ext cx="3145536" cy="576072"/>
+          </a:xfrm>
+          <a:prstGeom prst="rect">
+            <a:avLst/>
+          </a:prstGeom>
+          <a:noFill/>
+          <a:ln/>
+        </p:spPr>
+        <p:txBody>
+          <a:bodyPr wrap="square" lIns="254" tIns="254" rIns="254" bIns="254" rtlCol="0" anchor="t">
             <a:normAutofit/>
           </a:bodyPr>
           <a:lstStyle/>
@@ -8937,7 +9051,7 @@
               <a:buNone/>
             </a:pPr>
             <a:r>
-              <a:rPr lang="en-US" sz="1550" dirty="0">
+              <a:rPr lang="en-US" sz="1320" dirty="0">
                 <a:solidFill>
                   <a:srgbClr val="17364A"/>
                 </a:solidFill>
@@ -8945,9 +9059,9 @@
                 <a:ea typeface="Aptos" pitchFamily="34" charset="-122"/>
                 <a:cs typeface="Aptos" pitchFamily="34" charset="-120"/>
               </a:rPr>
-              <a:t>Use the assignment to test whether you can explain the concept, apply it to a realistic public health situation, and identify what would need review before the work moves forward.</a:t>
-            </a:r>
-            <a:endParaRPr lang="en-US" sz="1550" dirty="0"/>
+              <a:t>Use the assignment to test whether you can explain the concept, apply it to a realistic public health situation, and.</a:t>
+            </a:r>
+            <a:endParaRPr lang="en-US" sz="1320" dirty="0"/>
           </a:p>
         </p:txBody>
       </p:sp>
@@ -9248,49 +9362,58 @@
           <a:ln/>
         </p:spPr>
         <p:txBody>
-          <a:bodyPr wrap="square" lIns="635" tIns="635" rIns="635" bIns="635" rtlCol="0" anchor="t">
+          <a:bodyPr wrap="square" lIns="1016" tIns="1016" rIns="1016" bIns="1016" rtlCol="0" anchor="t">
             <a:normAutofit/>
           </a:bodyPr>
           <a:lstStyle/>
           <a:p>
+            <a:pPr indent="0" marL="0">
+              <a:buNone/>
+            </a:pPr>
             <a:r>
               <a:rPr lang="en-US" sz="2100" dirty="0">
                 <a:solidFill>
-                  <a:srgbClr val="17364A"/>
-                </a:solidFill>
-                <a:latin typeface="Aptos" pitchFamily="34" charset="0"/>
-                <a:ea typeface="Aptos" pitchFamily="34" charset="-122"/>
-                <a:cs typeface="Aptos" pitchFamily="34" charset="-120"/>
-              </a:rPr>
-              <a:t>1. What is the strongest reason this module topic belongs in AI leadership and governance training?</a:t>
+                  <a:srgbClr val="003A63"/>
+                </a:solidFill>
+                <a:latin typeface="Aptos" pitchFamily="34" charset="0"/>
+                <a:ea typeface="Aptos" pitchFamily="34" charset="-122"/>
+                <a:cs typeface="Aptos" pitchFamily="34" charset="-120"/>
+              </a:rPr>
+              <a:t>• 1. What is the strongest reason this module topic belongs in AI leadership and governance.</a:t>
             </a:r>
             <a:endParaRPr lang="en-US" sz="2100" dirty="0"/>
           </a:p>
           <a:p>
+            <a:pPr indent="0" marL="0">
+              <a:buNone/>
+            </a:pPr>
             <a:r>
               <a:rPr lang="en-US" sz="2100" dirty="0">
                 <a:solidFill>
-                  <a:srgbClr val="17364A"/>
-                </a:solidFill>
-                <a:latin typeface="Aptos" pitchFamily="34" charset="0"/>
-                <a:ea typeface="Aptos" pitchFamily="34" charset="-122"/>
-                <a:cs typeface="Aptos" pitchFamily="34" charset="-120"/>
-              </a:rPr>
-              <a:t>2. Which practice best supports accountable public health AI governance?</a:t>
+                  <a:srgbClr val="003A63"/>
+                </a:solidFill>
+                <a:latin typeface="Aptos" pitchFamily="34" charset="0"/>
+                <a:ea typeface="Aptos" pitchFamily="34" charset="-122"/>
+                <a:cs typeface="Aptos" pitchFamily="34" charset="-120"/>
+              </a:rPr>
+              <a:t>• 2. Which practice best supports accountable public health AI governance?</a:t>
             </a:r>
             <a:endParaRPr lang="en-US" sz="2100" dirty="0"/>
           </a:p>
           <a:p>
+            <a:pPr indent="0" marL="0">
+              <a:buNone/>
+            </a:pPr>
             <a:r>
               <a:rPr lang="en-US" sz="2100" dirty="0">
                 <a:solidFill>
-                  <a:srgbClr val="17364A"/>
-                </a:solidFill>
-                <a:latin typeface="Aptos" pitchFamily="34" charset="0"/>
-                <a:ea typeface="Aptos" pitchFamily="34" charset="-122"/>
-                <a:cs typeface="Aptos" pitchFamily="34" charset="-120"/>
-              </a:rPr>
-              <a:t>3. When should an AI use case be escalated for leadership or governance review?</a:t>
+                  <a:srgbClr val="003A63"/>
+                </a:solidFill>
+                <a:latin typeface="Aptos" pitchFamily="34" charset="0"/>
+                <a:ea typeface="Aptos" pitchFamily="34" charset="-122"/>
+                <a:cs typeface="Aptos" pitchFamily="34" charset="-120"/>
+              </a:rPr>
+              <a:t>• 3. When should an AI use case be escalated for leadership or governance review?</a:t>
             </a:r>
             <a:endParaRPr lang="en-US" sz="2100" dirty="0"/>
           </a:p>
@@ -9370,17 +9493,17 @@
         </p:nvSpPr>
         <p:spPr>
           <a:xfrm>
-            <a:off x="7799832" y="1828800"/>
-            <a:ext cx="3145536" cy="685800"/>
-          </a:xfrm>
-          <a:prstGeom prst="rect">
-            <a:avLst/>
-          </a:prstGeom>
-          <a:noFill/>
-          <a:ln/>
-        </p:spPr>
-        <p:txBody>
-          <a:bodyPr wrap="square" lIns="0" tIns="0" rIns="0" bIns="0" rtlCol="0" anchor="t">
+            <a:off x="7799832" y="1801368"/>
+            <a:ext cx="3145536" cy="758952"/>
+          </a:xfrm>
+          <a:prstGeom prst="rect">
+            <a:avLst/>
+          </a:prstGeom>
+          <a:noFill/>
+          <a:ln/>
+        </p:spPr>
+        <p:txBody>
+          <a:bodyPr wrap="square" lIns="254" tIns="254" rIns="254" bIns="254" rtlCol="0" anchor="t">
             <a:normAutofit/>
           </a:bodyPr>
           <a:lstStyle/>
@@ -9389,7 +9512,7 @@
               <a:buNone/>
             </a:pPr>
             <a:r>
-              <a:rPr lang="en-US" sz="1550" dirty="0">
+              <a:rPr lang="en-US" sz="1320" dirty="0">
                 <a:solidFill>
                   <a:srgbClr val="17364A"/>
                 </a:solidFill>
@@ -9399,7 +9522,7 @@
               </a:rPr>
               <a:t>1. What is the strongest reason this module topic belongs in AI leadership and governance training?</a:t>
             </a:r>
-            <a:endParaRPr lang="en-US" sz="1550" dirty="0"/>
+            <a:endParaRPr lang="en-US" sz="1320" dirty="0"/>
           </a:p>
         </p:txBody>
       </p:sp>
@@ -9487,13 +9610,16 @@
           <a:ln/>
         </p:spPr>
         <p:txBody>
-          <a:bodyPr wrap="square" lIns="254" tIns="254" rIns="254" bIns="254" rtlCol="0" anchor="t">
+          <a:bodyPr wrap="square" lIns="508" tIns="508" rIns="508" bIns="508" rtlCol="0" anchor="t">
             <a:normAutofit/>
           </a:bodyPr>
           <a:lstStyle/>
           <a:p>
-            <a:r>
-              <a:rPr lang="en-US" sz="1380" dirty="0">
+            <a:pPr indent="0" marL="0">
+              <a:buNone/>
+            </a:pPr>
+            <a:r>
+              <a:rPr lang="en-US" sz="1220" dirty="0">
                 <a:solidFill>
                   <a:srgbClr val="17364A"/>
                 </a:solidFill>
@@ -9503,11 +9629,14 @@
               </a:rPr>
               <a:t>1.</a:t>
             </a:r>
-            <a:endParaRPr lang="en-US" sz="1380" dirty="0"/>
-          </a:p>
-          <a:p>
-            <a:r>
-              <a:rPr lang="en-US" sz="1380" dirty="0">
+            <a:endParaRPr lang="en-US" sz="1220" dirty="0"/>
+          </a:p>
+          <a:p>
+            <a:pPr indent="0" marL="0">
+              <a:buNone/>
+            </a:pPr>
+            <a:r>
+              <a:rPr lang="en-US" sz="1220" dirty="0">
                 <a:solidFill>
                   <a:srgbClr val="17364A"/>
                 </a:solidFill>
@@ -9515,13 +9644,16 @@
                 <a:ea typeface="Aptos" pitchFamily="34" charset="-122"/>
                 <a:cs typeface="Aptos" pitchFamily="34" charset="-120"/>
               </a:rPr>
-              <a:t>What is the strongest reason this module topic belongs in AI leadership and governance.</a:t>
-            </a:r>
-            <a:endParaRPr lang="en-US" sz="1380" dirty="0"/>
-          </a:p>
-          <a:p>
-            <a:r>
-              <a:rPr lang="en-US" sz="1380" dirty="0">
+              <a:t>What is the strongest reason this module topic belongs in AI.</a:t>
+            </a:r>
+            <a:endParaRPr lang="en-US" sz="1220" dirty="0"/>
+          </a:p>
+          <a:p>
+            <a:pPr indent="0" marL="0">
+              <a:buNone/>
+            </a:pPr>
+            <a:r>
+              <a:rPr lang="en-US" sz="1220" dirty="0">
                 <a:solidFill>
                   <a:srgbClr val="17364A"/>
                 </a:solidFill>
@@ -9531,7 +9663,7 @@
               </a:rPr>
               <a:t>2.</a:t>
             </a:r>
-            <a:endParaRPr lang="en-US" sz="1380" dirty="0"/>
+            <a:endParaRPr lang="en-US" sz="1220" dirty="0"/>
           </a:p>
         </p:txBody>
       </p:sp>
@@ -9609,17 +9741,17 @@
         </p:nvSpPr>
         <p:spPr>
           <a:xfrm>
-            <a:off x="7799832" y="5001768"/>
-            <a:ext cx="3145536" cy="502920"/>
-          </a:xfrm>
-          <a:prstGeom prst="rect">
-            <a:avLst/>
-          </a:prstGeom>
-          <a:noFill/>
-          <a:ln/>
-        </p:spPr>
-        <p:txBody>
-          <a:bodyPr wrap="square" lIns="0" tIns="0" rIns="0" bIns="0" rtlCol="0" anchor="t">
+            <a:off x="7799832" y="4974336"/>
+            <a:ext cx="3145536" cy="576072"/>
+          </a:xfrm>
+          <a:prstGeom prst="rect">
+            <a:avLst/>
+          </a:prstGeom>
+          <a:noFill/>
+          <a:ln/>
+        </p:spPr>
+        <p:txBody>
+          <a:bodyPr wrap="square" lIns="254" tIns="254" rIns="254" bIns="254" rtlCol="0" anchor="t">
             <a:normAutofit/>
           </a:bodyPr>
           <a:lstStyle/>
@@ -9628,7 +9760,7 @@
               <a:buNone/>
             </a:pPr>
             <a:r>
-              <a:rPr lang="en-US" sz="1550" dirty="0">
+              <a:rPr lang="en-US" sz="1320" dirty="0">
                 <a:solidFill>
                   <a:srgbClr val="17364A"/>
                 </a:solidFill>
@@ -9636,9 +9768,9 @@
                 <a:ea typeface="Aptos" pitchFamily="34" charset="-122"/>
                 <a:cs typeface="Aptos" pitchFamily="34" charset="-120"/>
               </a:rPr>
-              <a:t>Use the assignment to test whether you can explain the concept, apply it to a realistic public health situation, and identify what would need review before the work moves forward.</a:t>
-            </a:r>
-            <a:endParaRPr lang="en-US" sz="1550" dirty="0"/>
+              <a:t>Use the assignment to test whether you can explain the concept, apply it to a realistic public health situation, and.</a:t>
+            </a:r>
+            <a:endParaRPr lang="en-US" sz="1320" dirty="0"/>
           </a:p>
         </p:txBody>
       </p:sp>
@@ -9939,49 +10071,58 @@
           <a:ln/>
         </p:spPr>
         <p:txBody>
-          <a:bodyPr wrap="square" lIns="635" tIns="635" rIns="635" bIns="635" rtlCol="0" anchor="t">
+          <a:bodyPr wrap="square" lIns="1016" tIns="1016" rIns="1016" bIns="1016" rtlCol="0" anchor="t">
             <a:normAutofit/>
           </a:bodyPr>
           <a:lstStyle/>
           <a:p>
+            <a:pPr indent="0" marL="0">
+              <a:buNone/>
+            </a:pPr>
             <a:r>
               <a:rPr lang="en-US" sz="2100" dirty="0">
                 <a:solidFill>
-                  <a:srgbClr val="17364A"/>
-                </a:solidFill>
-                <a:latin typeface="Aptos" pitchFamily="34" charset="0"/>
-                <a:ea typeface="Aptos" pitchFamily="34" charset="-122"/>
-                <a:cs typeface="Aptos" pitchFamily="34" charset="-120"/>
-              </a:rPr>
-              <a:t>AI opportunities can quickly exceed an agency's capacity to evaluate, implement, and sustain them.</a:t>
+                  <a:srgbClr val="003A63"/>
+                </a:solidFill>
+                <a:latin typeface="Aptos" pitchFamily="34" charset="0"/>
+                <a:ea typeface="Aptos" pitchFamily="34" charset="-122"/>
+                <a:cs typeface="Aptos" pitchFamily="34" charset="-120"/>
+              </a:rPr>
+              <a:t>• AI opportunities can quickly exceed an agency's capacity to evaluate, implement, and sustain.</a:t>
             </a:r>
             <a:endParaRPr lang="en-US" sz="2100" dirty="0"/>
           </a:p>
           <a:p>
+            <a:pPr indent="0" marL="0">
+              <a:buNone/>
+            </a:pPr>
             <a:r>
               <a:rPr lang="en-US" sz="2100" dirty="0">
                 <a:solidFill>
-                  <a:srgbClr val="17364A"/>
-                </a:solidFill>
-                <a:latin typeface="Aptos" pitchFamily="34" charset="0"/>
-                <a:ea typeface="Aptos" pitchFamily="34" charset="-122"/>
-                <a:cs typeface="Aptos" pitchFamily="34" charset="-120"/>
-              </a:rPr>
-              <a:t>Leaders need a portfolio strategy that helps distinguish high-value public health uses from attractive but.</a:t>
+                  <a:srgbClr val="003A63"/>
+                </a:solidFill>
+                <a:latin typeface="Aptos" pitchFamily="34" charset="0"/>
+                <a:ea typeface="Aptos" pitchFamily="34" charset="-122"/>
+                <a:cs typeface="Aptos" pitchFamily="34" charset="-120"/>
+              </a:rPr>
+              <a:t>• Leaders need a portfolio strategy that helps distinguish high-value public health uses from.</a:t>
             </a:r>
             <a:endParaRPr lang="en-US" sz="2100" dirty="0"/>
           </a:p>
           <a:p>
+            <a:pPr indent="0" marL="0">
+              <a:buNone/>
+            </a:pPr>
             <a:r>
               <a:rPr lang="en-US" sz="2100" dirty="0">
                 <a:solidFill>
-                  <a:srgbClr val="17364A"/>
-                </a:solidFill>
-                <a:latin typeface="Aptos" pitchFamily="34" charset="0"/>
-                <a:ea typeface="Aptos" pitchFamily="34" charset="-122"/>
-                <a:cs typeface="Aptos" pitchFamily="34" charset="-120"/>
-              </a:rPr>
-              <a:t>A portfolio approach organizes AI opportunities across programs, risk levels, readiness, equity impact, technical.</a:t>
+                  <a:srgbClr val="003A63"/>
+                </a:solidFill>
+                <a:latin typeface="Aptos" pitchFamily="34" charset="0"/>
+                <a:ea typeface="Aptos" pitchFamily="34" charset="-122"/>
+                <a:cs typeface="Aptos" pitchFamily="34" charset="-120"/>
+              </a:rPr>
+              <a:t>• A portfolio approach organizes AI opportunities across programs, risk levels, readiness,.</a:t>
             </a:r>
             <a:endParaRPr lang="en-US" sz="2100" dirty="0"/>
           </a:p>
@@ -10061,17 +10202,17 @@
         </p:nvSpPr>
         <p:spPr>
           <a:xfrm>
-            <a:off x="8074152" y="1920240"/>
-            <a:ext cx="2825496" cy="1280160"/>
-          </a:xfrm>
-          <a:prstGeom prst="rect">
-            <a:avLst/>
-          </a:prstGeom>
-          <a:noFill/>
-          <a:ln/>
-        </p:spPr>
-        <p:txBody>
-          <a:bodyPr wrap="square" lIns="0" tIns="0" rIns="0" bIns="0" rtlCol="0" anchor="t">
+            <a:off x="8074152" y="1892808"/>
+            <a:ext cx="2825496" cy="1353312"/>
+          </a:xfrm>
+          <a:prstGeom prst="rect">
+            <a:avLst/>
+          </a:prstGeom>
+          <a:noFill/>
+          <a:ln/>
+        </p:spPr>
+        <p:txBody>
+          <a:bodyPr wrap="square" lIns="254" tIns="254" rIns="254" bIns="254" rtlCol="0" anchor="t">
             <a:normAutofit/>
           </a:bodyPr>
           <a:lstStyle/>
@@ -10080,7 +10221,7 @@
               <a:buNone/>
             </a:pPr>
             <a:r>
-              <a:rPr lang="en-US" sz="1550" dirty="0">
+              <a:rPr lang="en-US" sz="1320" dirty="0">
                 <a:solidFill>
                   <a:srgbClr val="17364A"/>
                 </a:solidFill>
@@ -10088,43 +10229,9 @@
                 <a:ea typeface="Aptos" pitchFamily="34" charset="-122"/>
                 <a:cs typeface="Aptos" pitchFamily="34" charset="-120"/>
               </a:rPr>
-              <a:t>Level: advanced/leadership</a:t>
-            </a:r>
-            <a:endParaRPr lang="en-US" sz="1550" dirty="0"/>
-          </a:p>
-          <a:p>
-            <a:pPr indent="0" marL="0">
-              <a:buNone/>
-            </a:pPr>
-            <a:r>
-              <a:rPr lang="en-US" sz="1550" dirty="0">
-                <a:solidFill>
-                  <a:srgbClr val="17364A"/>
-                </a:solidFill>
-                <a:latin typeface="Aptos" pitchFamily="34" charset="0"/>
-                <a:ea typeface="Aptos" pitchFamily="34" charset="-122"/>
-                <a:cs typeface="Aptos" pitchFamily="34" charset="-120"/>
-              </a:rPr>
-              <a:t>Primary track: Public Health Executive Leadership Track</a:t>
-            </a:r>
-            <a:endParaRPr lang="en-US" sz="1550" dirty="0"/>
-          </a:p>
-          <a:p>
-            <a:pPr indent="0" marL="0">
-              <a:buNone/>
-            </a:pPr>
-            <a:r>
-              <a:rPr lang="en-US" sz="1550" dirty="0">
-                <a:solidFill>
-                  <a:srgbClr val="17364A"/>
-                </a:solidFill>
-                <a:latin typeface="Aptos" pitchFamily="34" charset="0"/>
-                <a:ea typeface="Aptos" pitchFamily="34" charset="-122"/>
-                <a:cs typeface="Aptos" pitchFamily="34" charset="-120"/>
-              </a:rPr>
-              <a:t>Appears in tracks: governance-security</a:t>
-            </a:r>
-            <a:endParaRPr lang="en-US" sz="1550" dirty="0"/>
+              <a:t>Level: advanced/leadership Primary track: Public Health Executive Leadership Track Appears in tracks: governance-security</a:t>
+            </a:r>
+            <a:endParaRPr lang="en-US" sz="1320" dirty="0"/>
           </a:p>
         </p:txBody>
       </p:sp>
@@ -10212,13 +10319,16 @@
           <a:ln/>
         </p:spPr>
         <p:txBody>
-          <a:bodyPr wrap="square" lIns="254" tIns="254" rIns="254" bIns="254" rtlCol="0" anchor="t">
+          <a:bodyPr wrap="square" lIns="508" tIns="508" rIns="508" bIns="508" rtlCol="0" anchor="t">
             <a:normAutofit/>
           </a:bodyPr>
           <a:lstStyle/>
           <a:p>
-            <a:r>
-              <a:rPr lang="en-US" sz="1380" dirty="0">
+            <a:pPr indent="0" marL="0">
+              <a:buNone/>
+            </a:pPr>
+            <a:r>
+              <a:rPr lang="en-US" sz="1220" dirty="0">
                 <a:solidFill>
                   <a:srgbClr val="17364A"/>
                 </a:solidFill>
@@ -10228,11 +10338,14 @@
               </a:rPr>
               <a:t>Read the module for shared vocabulary and context.</a:t>
             </a:r>
-            <a:endParaRPr lang="en-US" sz="1380" dirty="0"/>
-          </a:p>
-          <a:p>
-            <a:r>
-              <a:rPr lang="en-US" sz="1380" dirty="0">
+            <a:endParaRPr lang="en-US" sz="1220" dirty="0"/>
+          </a:p>
+          <a:p>
+            <a:pPr indent="0" marL="0">
+              <a:buNone/>
+            </a:pPr>
+            <a:r>
+              <a:rPr lang="en-US" sz="1220" dirty="0">
                 <a:solidFill>
                   <a:srgbClr val="17364A"/>
                 </a:solidFill>
@@ -10242,11 +10355,14 @@
               </a:rPr>
               <a:t>Complete the practical exercise to apply the concept.</a:t>
             </a:r>
-            <a:endParaRPr lang="en-US" sz="1380" dirty="0"/>
-          </a:p>
-          <a:p>
-            <a:r>
-              <a:rPr lang="en-US" sz="1380" dirty="0">
+            <a:endParaRPr lang="en-US" sz="1220" dirty="0"/>
+          </a:p>
+          <a:p>
+            <a:pPr indent="0" marL="0">
+              <a:buNone/>
+            </a:pPr>
+            <a:r>
+              <a:rPr lang="en-US" sz="1220" dirty="0">
                 <a:solidFill>
                   <a:srgbClr val="17364A"/>
                 </a:solidFill>
@@ -10256,7 +10372,7 @@
               </a:rPr>
               <a:t>Use the notes and references for deeper review.</a:t>
             </a:r>
-            <a:endParaRPr lang="en-US" sz="1380" dirty="0"/>
+            <a:endParaRPr lang="en-US" sz="1220" dirty="0"/>
           </a:p>
         </p:txBody>
       </p:sp>
@@ -10557,49 +10673,58 @@
           <a:ln/>
         </p:spPr>
         <p:txBody>
-          <a:bodyPr wrap="square" lIns="635" tIns="635" rIns="635" bIns="635" rtlCol="0" anchor="t">
+          <a:bodyPr wrap="square" lIns="1016" tIns="1016" rIns="1016" bIns="1016" rtlCol="0" anchor="t">
             <a:normAutofit/>
           </a:bodyPr>
           <a:lstStyle/>
           <a:p>
+            <a:pPr indent="0" marL="0">
+              <a:buNone/>
+            </a:pPr>
             <a:r>
               <a:rPr lang="en-US" sz="2100" dirty="0">
                 <a:solidFill>
-                  <a:srgbClr val="17364A"/>
-                </a:solidFill>
-                <a:latin typeface="Aptos" pitchFamily="34" charset="0"/>
-                <a:ea typeface="Aptos" pitchFamily="34" charset="-122"/>
-                <a:cs typeface="Aptos" pitchFamily="34" charset="-120"/>
-              </a:rPr>
-              <a:t>NIST Artificial Intelligence Risk Management Framework (AI RMF 1.0):.</a:t>
+                  <a:srgbClr val="003A63"/>
+                </a:solidFill>
+                <a:latin typeface="Aptos" pitchFamily="34" charset="0"/>
+                <a:ea typeface="Aptos" pitchFamily="34" charset="-122"/>
+                <a:cs typeface="Aptos" pitchFamily="34" charset="-120"/>
+              </a:rPr>
+              <a:t>• NIST Artificial Intelligence Risk Management Framework (AI RMF 1.0):.</a:t>
             </a:r>
             <a:endParaRPr lang="en-US" sz="2100" dirty="0"/>
           </a:p>
           <a:p>
+            <a:pPr indent="0" marL="0">
+              <a:buNone/>
+            </a:pPr>
             <a:r>
               <a:rPr lang="en-US" sz="2100" dirty="0">
                 <a:solidFill>
-                  <a:srgbClr val="17364A"/>
-                </a:solidFill>
-                <a:latin typeface="Aptos" pitchFamily="34" charset="0"/>
-                <a:ea typeface="Aptos" pitchFamily="34" charset="-122"/>
-                <a:cs typeface="Aptos" pitchFamily="34" charset="-120"/>
-              </a:rPr>
-              <a:t>NIST Generative AI Profile:.</a:t>
+                  <a:srgbClr val="003A63"/>
+                </a:solidFill>
+                <a:latin typeface="Aptos" pitchFamily="34" charset="0"/>
+                <a:ea typeface="Aptos" pitchFamily="34" charset="-122"/>
+                <a:cs typeface="Aptos" pitchFamily="34" charset="-120"/>
+              </a:rPr>
+              <a:t>• NIST Generative AI Profile:.</a:t>
             </a:r>
             <a:endParaRPr lang="en-US" sz="2100" dirty="0"/>
           </a:p>
           <a:p>
+            <a:pPr indent="0" marL="0">
+              <a:buNone/>
+            </a:pPr>
             <a:r>
               <a:rPr lang="en-US" sz="2100" dirty="0">
                 <a:solidFill>
-                  <a:srgbClr val="17364A"/>
-                </a:solidFill>
-                <a:latin typeface="Aptos" pitchFamily="34" charset="0"/>
-                <a:ea typeface="Aptos" pitchFamily="34" charset="-122"/>
-                <a:cs typeface="Aptos" pitchFamily="34" charset="-120"/>
-              </a:rPr>
-              <a:t>NIST Privacy Framework</a:t>
+                  <a:srgbClr val="003A63"/>
+                </a:solidFill>
+                <a:latin typeface="Aptos" pitchFamily="34" charset="0"/>
+                <a:ea typeface="Aptos" pitchFamily="34" charset="-122"/>
+                <a:cs typeface="Aptos" pitchFamily="34" charset="-120"/>
+              </a:rPr>
+              <a:t>• NIST Privacy Framework</a:t>
             </a:r>
             <a:endParaRPr lang="en-US" sz="2100" dirty="0"/>
           </a:p>
@@ -10679,17 +10804,17 @@
         </p:nvSpPr>
         <p:spPr>
           <a:xfrm>
-            <a:off x="7799832" y="1828800"/>
-            <a:ext cx="3145536" cy="685800"/>
-          </a:xfrm>
-          <a:prstGeom prst="rect">
-            <a:avLst/>
-          </a:prstGeom>
-          <a:noFill/>
-          <a:ln/>
-        </p:spPr>
-        <p:txBody>
-          <a:bodyPr wrap="square" lIns="0" tIns="0" rIns="0" bIns="0" rtlCol="0" anchor="t">
+            <a:off x="7799832" y="1801368"/>
+            <a:ext cx="3145536" cy="758952"/>
+          </a:xfrm>
+          <a:prstGeom prst="rect">
+            <a:avLst/>
+          </a:prstGeom>
+          <a:noFill/>
+          <a:ln/>
+        </p:spPr>
+        <p:txBody>
+          <a:bodyPr wrap="square" lIns="254" tIns="254" rIns="254" bIns="254" rtlCol="0" anchor="t">
             <a:normAutofit/>
           </a:bodyPr>
           <a:lstStyle/>
@@ -10698,7 +10823,7 @@
               <a:buNone/>
             </a:pPr>
             <a:r>
-              <a:rPr lang="en-US" sz="1550" dirty="0">
+              <a:rPr lang="en-US" sz="1320" dirty="0">
                 <a:solidFill>
                   <a:srgbClr val="17364A"/>
                 </a:solidFill>
@@ -10708,7 +10833,7 @@
               </a:rPr>
               <a:t>NIST Artificial Intelligence Risk Management Framework (AI RMF 1.0):.</a:t>
             </a:r>
-            <a:endParaRPr lang="en-US" sz="1550" dirty="0"/>
+            <a:endParaRPr lang="en-US" sz="1320" dirty="0"/>
           </a:p>
         </p:txBody>
       </p:sp>
@@ -10796,13 +10921,16 @@
           <a:ln/>
         </p:spPr>
         <p:txBody>
-          <a:bodyPr wrap="square" lIns="254" tIns="254" rIns="254" bIns="254" rtlCol="0" anchor="t">
+          <a:bodyPr wrap="square" lIns="508" tIns="508" rIns="508" bIns="508" rtlCol="0" anchor="t">
             <a:normAutofit/>
           </a:bodyPr>
           <a:lstStyle/>
           <a:p>
-            <a:r>
-              <a:rPr lang="en-US" sz="1380" dirty="0">
+            <a:pPr indent="0" marL="0">
+              <a:buNone/>
+            </a:pPr>
+            <a:r>
+              <a:rPr lang="en-US" sz="1220" dirty="0">
                 <a:solidFill>
                   <a:srgbClr val="17364A"/>
                 </a:solidFill>
@@ -10810,13 +10938,16 @@
                 <a:ea typeface="Aptos" pitchFamily="34" charset="-122"/>
                 <a:cs typeface="Aptos" pitchFamily="34" charset="-120"/>
               </a:rPr>
-              <a:t>NIST Artificial Intelligence Risk Management Framework (AI RMF 1.0):.</a:t>
-            </a:r>
-            <a:endParaRPr lang="en-US" sz="1380" dirty="0"/>
-          </a:p>
-          <a:p>
-            <a:r>
-              <a:rPr lang="en-US" sz="1380" dirty="0">
+              <a:t>NIST Artificial Intelligence Risk Management Framework (AI RMF.</a:t>
+            </a:r>
+            <a:endParaRPr lang="en-US" sz="1220" dirty="0"/>
+          </a:p>
+          <a:p>
+            <a:pPr indent="0" marL="0">
+              <a:buNone/>
+            </a:pPr>
+            <a:r>
+              <a:rPr lang="en-US" sz="1220" dirty="0">
                 <a:solidFill>
                   <a:srgbClr val="17364A"/>
                 </a:solidFill>
@@ -10826,11 +10957,14 @@
               </a:rPr>
               <a:t>CDC Public Health Data Strategy and Data Modernization resources:.</a:t>
             </a:r>
-            <a:endParaRPr lang="en-US" sz="1380" dirty="0"/>
-          </a:p>
-          <a:p>
-            <a:r>
-              <a:rPr lang="en-US" sz="1380" dirty="0">
+            <a:endParaRPr lang="en-US" sz="1220" dirty="0"/>
+          </a:p>
+          <a:p>
+            <a:pPr indent="0" marL="0">
+              <a:buNone/>
+            </a:pPr>
+            <a:r>
+              <a:rPr lang="en-US" sz="1220" dirty="0">
                 <a:solidFill>
                   <a:srgbClr val="17364A"/>
                 </a:solidFill>
@@ -10840,7 +10974,7 @@
               </a:rPr>
               <a:t>WHO Ethics and Governance of Artificial Intelligence for Health:.</a:t>
             </a:r>
-            <a:endParaRPr lang="en-US" sz="1380" dirty="0"/>
+            <a:endParaRPr lang="en-US" sz="1220" dirty="0"/>
           </a:p>
         </p:txBody>
       </p:sp>
@@ -10918,17 +11052,17 @@
         </p:nvSpPr>
         <p:spPr>
           <a:xfrm>
-            <a:off x="7799832" y="5001768"/>
-            <a:ext cx="3145536" cy="502920"/>
-          </a:xfrm>
-          <a:prstGeom prst="rect">
-            <a:avLst/>
-          </a:prstGeom>
-          <a:noFill/>
-          <a:ln/>
-        </p:spPr>
-        <p:txBody>
-          <a:bodyPr wrap="square" lIns="0" tIns="0" rIns="0" bIns="0" rtlCol="0" anchor="t">
+            <a:off x="7799832" y="4974336"/>
+            <a:ext cx="3145536" cy="576072"/>
+          </a:xfrm>
+          <a:prstGeom prst="rect">
+            <a:avLst/>
+          </a:prstGeom>
+          <a:noFill/>
+          <a:ln/>
+        </p:spPr>
+        <p:txBody>
+          <a:bodyPr wrap="square" lIns="254" tIns="254" rIns="254" bIns="254" rtlCol="0" anchor="t">
             <a:normAutofit/>
           </a:bodyPr>
           <a:lstStyle/>
@@ -10937,7 +11071,7 @@
               <a:buNone/>
             </a:pPr>
             <a:r>
-              <a:rPr lang="en-US" sz="1550" dirty="0">
+              <a:rPr lang="en-US" sz="1320" dirty="0">
                 <a:solidFill>
                   <a:srgbClr val="17364A"/>
                 </a:solidFill>
@@ -10945,9 +11079,9 @@
                 <a:ea typeface="Aptos" pitchFamily="34" charset="-122"/>
                 <a:cs typeface="Aptos" pitchFamily="34" charset="-120"/>
               </a:rPr>
-              <a:t>Connect the concept to public health purpose, responsible use, required safeguards, documentation, and the next action a department should take.</a:t>
-            </a:r>
-            <a:endParaRPr lang="en-US" sz="1550" dirty="0"/>
+              <a:t>Connect the concept to public health purpose, responsible use, required safeguards, documentation, and the next action a.</a:t>
+            </a:r>
+            <a:endParaRPr lang="en-US" sz="1320" dirty="0"/>
           </a:p>
         </p:txBody>
       </p:sp>
@@ -11248,35 +11382,41 @@
           <a:ln/>
         </p:spPr>
         <p:txBody>
-          <a:bodyPr wrap="square" lIns="635" tIns="635" rIns="635" bIns="635" rtlCol="0" anchor="t">
+          <a:bodyPr wrap="square" lIns="1016" tIns="1016" rIns="1016" bIns="1016" rtlCol="0" anchor="t">
             <a:normAutofit/>
           </a:bodyPr>
           <a:lstStyle/>
           <a:p>
+            <a:pPr indent="0" marL="0">
+              <a:buNone/>
+            </a:pPr>
             <a:r>
               <a:rPr lang="en-US" sz="2100" dirty="0">
                 <a:solidFill>
-                  <a:srgbClr val="17364A"/>
-                </a:solidFill>
-                <a:latin typeface="Aptos" pitchFamily="34" charset="0"/>
-                <a:ea typeface="Aptos" pitchFamily="34" charset="-122"/>
-                <a:cs typeface="Aptos" pitchFamily="34" charset="-120"/>
-              </a:rPr>
-              <a:t>OMB Memorandum M-24-10 on federal AI governance, risk management, and innovation, where relevant to.</a:t>
+                  <a:srgbClr val="003A63"/>
+                </a:solidFill>
+                <a:latin typeface="Aptos" pitchFamily="34" charset="0"/>
+                <a:ea typeface="Aptos" pitchFamily="34" charset="-122"/>
+                <a:cs typeface="Aptos" pitchFamily="34" charset="-120"/>
+              </a:rPr>
+              <a:t>• OMB Memorandum M-24-10 on federal AI governance, risk management, and innovation, where.</a:t>
             </a:r>
             <a:endParaRPr lang="en-US" sz="2100" dirty="0"/>
           </a:p>
           <a:p>
+            <a:pPr indent="0" marL="0">
+              <a:buNone/>
+            </a:pPr>
             <a:r>
               <a:rPr lang="en-US" sz="2100" dirty="0">
                 <a:solidFill>
-                  <a:srgbClr val="17364A"/>
-                </a:solidFill>
-                <a:latin typeface="Aptos" pitchFamily="34" charset="0"/>
-                <a:ea typeface="Aptos" pitchFamily="34" charset="-122"/>
-                <a:cs typeface="Aptos" pitchFamily="34" charset="-120"/>
-              </a:rPr>
-              <a:t>Agency strategic plans, procurement policies, privacy policies, cybersecurity policies, records.</a:t>
+                  <a:srgbClr val="003A63"/>
+                </a:solidFill>
+                <a:latin typeface="Aptos" pitchFamily="34" charset="0"/>
+                <a:ea typeface="Aptos" pitchFamily="34" charset="-122"/>
+                <a:cs typeface="Aptos" pitchFamily="34" charset="-120"/>
+              </a:rPr>
+              <a:t>• Agency strategic plans, procurement policies, privacy policies, cybersecurity policies, records.</a:t>
             </a:r>
             <a:endParaRPr lang="en-US" sz="2100" dirty="0"/>
           </a:p>
@@ -11356,17 +11496,17 @@
         </p:nvSpPr>
         <p:spPr>
           <a:xfrm>
-            <a:off x="7799832" y="1828800"/>
-            <a:ext cx="3145536" cy="685800"/>
-          </a:xfrm>
-          <a:prstGeom prst="rect">
-            <a:avLst/>
-          </a:prstGeom>
-          <a:noFill/>
-          <a:ln/>
-        </p:spPr>
-        <p:txBody>
-          <a:bodyPr wrap="square" lIns="0" tIns="0" rIns="0" bIns="0" rtlCol="0" anchor="t">
+            <a:off x="7799832" y="1801368"/>
+            <a:ext cx="3145536" cy="758952"/>
+          </a:xfrm>
+          <a:prstGeom prst="rect">
+            <a:avLst/>
+          </a:prstGeom>
+          <a:noFill/>
+          <a:ln/>
+        </p:spPr>
+        <p:txBody>
+          <a:bodyPr wrap="square" lIns="254" tIns="254" rIns="254" bIns="254" rtlCol="0" anchor="t">
             <a:normAutofit/>
           </a:bodyPr>
           <a:lstStyle/>
@@ -11375,7 +11515,7 @@
               <a:buNone/>
             </a:pPr>
             <a:r>
-              <a:rPr lang="en-US" sz="1550" dirty="0">
+              <a:rPr lang="en-US" sz="1320" dirty="0">
                 <a:solidFill>
                   <a:srgbClr val="17364A"/>
                 </a:solidFill>
@@ -11385,7 +11525,7 @@
               </a:rPr>
               <a:t>OMB Memorandum M-24-10 on federal AI governance, risk management, and innovation, where relevant to.</a:t>
             </a:r>
-            <a:endParaRPr lang="en-US" sz="1550" dirty="0"/>
+            <a:endParaRPr lang="en-US" sz="1320" dirty="0"/>
           </a:p>
         </p:txBody>
       </p:sp>
@@ -11473,13 +11613,16 @@
           <a:ln/>
         </p:spPr>
         <p:txBody>
-          <a:bodyPr wrap="square" lIns="254" tIns="254" rIns="254" bIns="254" rtlCol="0" anchor="t">
+          <a:bodyPr wrap="square" lIns="508" tIns="508" rIns="508" bIns="508" rtlCol="0" anchor="t">
             <a:normAutofit/>
           </a:bodyPr>
           <a:lstStyle/>
           <a:p>
-            <a:r>
-              <a:rPr lang="en-US" sz="1380" dirty="0">
+            <a:pPr indent="0" marL="0">
+              <a:buNone/>
+            </a:pPr>
+            <a:r>
+              <a:rPr lang="en-US" sz="1220" dirty="0">
                 <a:solidFill>
                   <a:srgbClr val="17364A"/>
                 </a:solidFill>
@@ -11487,13 +11630,16 @@
                 <a:ea typeface="Aptos" pitchFamily="34" charset="-122"/>
                 <a:cs typeface="Aptos" pitchFamily="34" charset="-120"/>
               </a:rPr>
-              <a:t>OMB Memorandum M-24-10 on federal AI governance, risk management, and innovation, where.</a:t>
-            </a:r>
-            <a:endParaRPr lang="en-US" sz="1380" dirty="0"/>
-          </a:p>
-          <a:p>
-            <a:r>
-              <a:rPr lang="en-US" sz="1380" dirty="0">
+              <a:t>OMB Memorandum M-24-10 on federal AI governance, risk management,.</a:t>
+            </a:r>
+            <a:endParaRPr lang="en-US" sz="1220" dirty="0"/>
+          </a:p>
+          <a:p>
+            <a:pPr indent="0" marL="0">
+              <a:buNone/>
+            </a:pPr>
+            <a:r>
+              <a:rPr lang="en-US" sz="1220" dirty="0">
                 <a:solidFill>
                   <a:srgbClr val="17364A"/>
                 </a:solidFill>
@@ -11501,9 +11647,9 @@
                 <a:ea typeface="Aptos" pitchFamily="34" charset="-122"/>
                 <a:cs typeface="Aptos" pitchFamily="34" charset="-120"/>
               </a:rPr>
-              <a:t>Agency strategic plans, procurement policies, privacy policies, cybersecurity policies,.</a:t>
-            </a:r>
-            <a:endParaRPr lang="en-US" sz="1380" dirty="0"/>
+              <a:t>Agency strategic plans, procurement policies, privacy policies,.</a:t>
+            </a:r>
+            <a:endParaRPr lang="en-US" sz="1220" dirty="0"/>
           </a:p>
         </p:txBody>
       </p:sp>
@@ -11581,17 +11727,17 @@
         </p:nvSpPr>
         <p:spPr>
           <a:xfrm>
-            <a:off x="7799832" y="5001768"/>
-            <a:ext cx="3145536" cy="502920"/>
-          </a:xfrm>
-          <a:prstGeom prst="rect">
-            <a:avLst/>
-          </a:prstGeom>
-          <a:noFill/>
-          <a:ln/>
-        </p:spPr>
-        <p:txBody>
-          <a:bodyPr wrap="square" lIns="0" tIns="0" rIns="0" bIns="0" rtlCol="0" anchor="t">
+            <a:off x="7799832" y="4974336"/>
+            <a:ext cx="3145536" cy="576072"/>
+          </a:xfrm>
+          <a:prstGeom prst="rect">
+            <a:avLst/>
+          </a:prstGeom>
+          <a:noFill/>
+          <a:ln/>
+        </p:spPr>
+        <p:txBody>
+          <a:bodyPr wrap="square" lIns="254" tIns="254" rIns="254" bIns="254" rtlCol="0" anchor="t">
             <a:normAutofit/>
           </a:bodyPr>
           <a:lstStyle/>
@@ -11600,7 +11746,7 @@
               <a:buNone/>
             </a:pPr>
             <a:r>
-              <a:rPr lang="en-US" sz="1550" dirty="0">
+              <a:rPr lang="en-US" sz="1320" dirty="0">
                 <a:solidFill>
                   <a:srgbClr val="17364A"/>
                 </a:solidFill>
@@ -11608,9 +11754,9 @@
                 <a:ea typeface="Aptos" pitchFamily="34" charset="-122"/>
                 <a:cs typeface="Aptos" pitchFamily="34" charset="-120"/>
               </a:rPr>
-              <a:t>Connect the concept to public health purpose, responsible use, required safeguards, documentation, and the next action a department should take.</a:t>
-            </a:r>
-            <a:endParaRPr lang="en-US" sz="1550" dirty="0"/>
+              <a:t>Connect the concept to public health purpose, responsible use, required safeguards, documentation, and the next action a.</a:t>
+            </a:r>
+            <a:endParaRPr lang="en-US" sz="1320" dirty="0"/>
           </a:p>
         </p:txBody>
       </p:sp>
@@ -11911,63 +12057,75 @@
           <a:ln/>
         </p:spPr>
         <p:txBody>
-          <a:bodyPr wrap="square" lIns="635" tIns="635" rIns="635" bIns="635" rtlCol="0" anchor="t">
+          <a:bodyPr wrap="square" lIns="1016" tIns="1016" rIns="1016" bIns="1016" rtlCol="0" anchor="t">
             <a:normAutofit/>
           </a:bodyPr>
           <a:lstStyle/>
           <a:p>
+            <a:pPr indent="0" marL="0">
+              <a:buNone/>
+            </a:pPr>
             <a:r>
               <a:rPr lang="en-US" sz="1900" dirty="0">
                 <a:solidFill>
-                  <a:srgbClr val="17364A"/>
-                </a:solidFill>
-                <a:latin typeface="Aptos" pitchFamily="34" charset="0"/>
-                <a:ea typeface="Aptos" pitchFamily="34" charset="-122"/>
-                <a:cs typeface="Aptos" pitchFamily="34" charset="-120"/>
-              </a:rPr>
-              <a:t>Play 11: Build and Deploy AI Solutions - This lesson informs Play 11 by helping learners connect the lesson.</a:t>
+                  <a:srgbClr val="003A63"/>
+                </a:solidFill>
+                <a:latin typeface="Aptos" pitchFamily="34" charset="0"/>
+                <a:ea typeface="Aptos" pitchFamily="34" charset="-122"/>
+                <a:cs typeface="Aptos" pitchFamily="34" charset="-120"/>
+              </a:rPr>
+              <a:t>• Play 11: Build and Deploy AI Solutions - This lesson informs Play 11 by helping learners.</a:t>
             </a:r>
             <a:endParaRPr lang="en-US" sz="1900" dirty="0"/>
           </a:p>
           <a:p>
+            <a:pPr indent="0" marL="0">
+              <a:buNone/>
+            </a:pPr>
             <a:r>
               <a:rPr lang="en-US" sz="1900" dirty="0">
                 <a:solidFill>
-                  <a:srgbClr val="17364A"/>
-                </a:solidFill>
-                <a:latin typeface="Aptos" pitchFamily="34" charset="0"/>
-                <a:ea typeface="Aptos" pitchFamily="34" charset="-122"/>
-                <a:cs typeface="Aptos" pitchFamily="34" charset="-120"/>
-              </a:rPr>
-              <a:t>Play 7: Prioritize Use Cases - This lesson informs Play 7 by helping learners connect the lesson topic to.</a:t>
+                  <a:srgbClr val="003A63"/>
+                </a:solidFill>
+                <a:latin typeface="Aptos" pitchFamily="34" charset="0"/>
+                <a:ea typeface="Aptos" pitchFamily="34" charset="-122"/>
+                <a:cs typeface="Aptos" pitchFamily="34" charset="-120"/>
+              </a:rPr>
+              <a:t>• Play 7: Prioritize Use Cases - This lesson informs Play 7 by helping learners connect the.</a:t>
             </a:r>
             <a:endParaRPr lang="en-US" sz="1900" dirty="0"/>
           </a:p>
           <a:p>
+            <a:pPr indent="0" marL="0">
+              <a:buNone/>
+            </a:pPr>
             <a:r>
               <a:rPr lang="en-US" sz="1900" dirty="0">
                 <a:solidFill>
-                  <a:srgbClr val="17364A"/>
-                </a:solidFill>
-                <a:latin typeface="Aptos" pitchFamily="34" charset="0"/>
-                <a:ea typeface="Aptos" pitchFamily="34" charset="-122"/>
-                <a:cs typeface="Aptos" pitchFamily="34" charset="-120"/>
-              </a:rPr>
-              <a:t>Play 8: Develop a Funding Strategy - This lesson informs Play 8 by helping learners connect the lesson topic.</a:t>
+                  <a:srgbClr val="003A63"/>
+                </a:solidFill>
+                <a:latin typeface="Aptos" pitchFamily="34" charset="0"/>
+                <a:ea typeface="Aptos" pitchFamily="34" charset="-122"/>
+                <a:cs typeface="Aptos" pitchFamily="34" charset="-120"/>
+              </a:rPr>
+              <a:t>• Play 8: Develop a Funding Strategy - This lesson informs Play 8 by helping learners connect.</a:t>
             </a:r>
             <a:endParaRPr lang="en-US" sz="1900" dirty="0"/>
           </a:p>
           <a:p>
+            <a:pPr indent="0" marL="0">
+              <a:buNone/>
+            </a:pPr>
             <a:r>
               <a:rPr lang="en-US" sz="1900" dirty="0">
                 <a:solidFill>
-                  <a:srgbClr val="17364A"/>
-                </a:solidFill>
-                <a:latin typeface="Aptos" pitchFamily="34" charset="0"/>
-                <a:ea typeface="Aptos" pitchFamily="34" charset="-122"/>
-                <a:cs typeface="Aptos" pitchFamily="34" charset="-120"/>
-              </a:rPr>
-              <a:t>Play 1: Vision &amp; Guardrails - This lesson informs Play 1 by helping learners connect the lesson topic to.</a:t>
+                  <a:srgbClr val="003A63"/>
+                </a:solidFill>
+                <a:latin typeface="Aptos" pitchFamily="34" charset="0"/>
+                <a:ea typeface="Aptos" pitchFamily="34" charset="-122"/>
+                <a:cs typeface="Aptos" pitchFamily="34" charset="-120"/>
+              </a:rPr>
+              <a:t>• Play 1: Vision &amp; Guardrails - This lesson informs Play 1 by helping learners connect the.</a:t>
             </a:r>
             <a:endParaRPr lang="en-US" sz="1900" dirty="0"/>
           </a:p>
@@ -12047,17 +12205,17 @@
         </p:nvSpPr>
         <p:spPr>
           <a:xfrm>
-            <a:off x="8211312" y="1920240"/>
-            <a:ext cx="2734056" cy="1463040"/>
-          </a:xfrm>
-          <a:prstGeom prst="rect">
-            <a:avLst/>
-          </a:prstGeom>
-          <a:noFill/>
-          <a:ln/>
-        </p:spPr>
-        <p:txBody>
-          <a:bodyPr wrap="square" lIns="0" tIns="0" rIns="0" bIns="0" rtlCol="0" anchor="t">
+            <a:off x="8211312" y="1892808"/>
+            <a:ext cx="2734056" cy="1536192"/>
+          </a:xfrm>
+          <a:prstGeom prst="rect">
+            <a:avLst/>
+          </a:prstGeom>
+          <a:noFill/>
+          <a:ln/>
+        </p:spPr>
+        <p:txBody>
+          <a:bodyPr wrap="square" lIns="254" tIns="254" rIns="254" bIns="254" rtlCol="0" anchor="t">
             <a:normAutofit/>
           </a:bodyPr>
           <a:lstStyle/>
@@ -12066,7 +12224,7 @@
               <a:buNone/>
             </a:pPr>
             <a:r>
-              <a:rPr lang="en-US" sz="1550" dirty="0">
+              <a:rPr lang="en-US" sz="1320" dirty="0">
                 <a:solidFill>
                   <a:srgbClr val="17364A"/>
                 </a:solidFill>
@@ -12074,9 +12232,9 @@
                 <a:ea typeface="Aptos" pitchFamily="34" charset="-122"/>
                 <a:cs typeface="Aptos" pitchFamily="34" charset="-120"/>
               </a:rPr>
-              <a:t>Use the related plays to identify decisions, participants, timing, approvals, and documentation needed for responsible implementation.</a:t>
-            </a:r>
-            <a:endParaRPr lang="en-US" sz="1550" dirty="0"/>
+              <a:t>Use the related plays to identify decisions, participants, timing, approvals, and documentation needed for responsible.</a:t>
+            </a:r>
+            <a:endParaRPr lang="en-US" sz="1320" dirty="0"/>
           </a:p>
         </p:txBody>
       </p:sp>
@@ -12164,13 +12322,16 @@
           <a:ln/>
         </p:spPr>
         <p:txBody>
-          <a:bodyPr wrap="square" lIns="254" tIns="254" rIns="254" bIns="254" rtlCol="0" anchor="t">
+          <a:bodyPr wrap="square" lIns="508" tIns="508" rIns="508" bIns="508" rtlCol="0" anchor="t">
             <a:normAutofit/>
           </a:bodyPr>
           <a:lstStyle/>
           <a:p>
-            <a:r>
-              <a:rPr lang="en-US" sz="1380" dirty="0">
+            <a:pPr indent="0" marL="0">
+              <a:buNone/>
+            </a:pPr>
+            <a:r>
+              <a:rPr lang="en-US" sz="1220" dirty="0">
                 <a:solidFill>
                   <a:srgbClr val="17364A"/>
                 </a:solidFill>
@@ -12180,11 +12341,14 @@
               </a:rPr>
               <a:t>Locate the decision point in the playbook sequence.</a:t>
             </a:r>
-            <a:endParaRPr lang="en-US" sz="1380" dirty="0"/>
-          </a:p>
-          <a:p>
-            <a:r>
-              <a:rPr lang="en-US" sz="1380" dirty="0">
+            <a:endParaRPr lang="en-US" sz="1220" dirty="0"/>
+          </a:p>
+          <a:p>
+            <a:pPr indent="0" marL="0">
+              <a:buNone/>
+            </a:pPr>
+            <a:r>
+              <a:rPr lang="en-US" sz="1220" dirty="0">
                 <a:solidFill>
                   <a:srgbClr val="17364A"/>
                 </a:solidFill>
@@ -12194,11 +12358,14 @@
               </a:rPr>
               <a:t>Identify who should participate in the work.</a:t>
             </a:r>
-            <a:endParaRPr lang="en-US" sz="1380" dirty="0"/>
-          </a:p>
-          <a:p>
-            <a:r>
-              <a:rPr lang="en-US" sz="1380" dirty="0">
+            <a:endParaRPr lang="en-US" sz="1220" dirty="0"/>
+          </a:p>
+          <a:p>
+            <a:pPr indent="0" marL="0">
+              <a:buNone/>
+            </a:pPr>
+            <a:r>
+              <a:rPr lang="en-US" sz="1220" dirty="0">
                 <a:solidFill>
                   <a:srgbClr val="17364A"/>
                 </a:solidFill>
@@ -12208,7 +12375,7 @@
               </a:rPr>
               <a:t>Document the review, approval, or implementation step.</a:t>
             </a:r>
-            <a:endParaRPr lang="en-US" sz="1380" dirty="0"/>
+            <a:endParaRPr lang="en-US" sz="1220" dirty="0"/>
           </a:p>
         </p:txBody>
       </p:sp>
@@ -12509,63 +12676,75 @@
           <a:ln/>
         </p:spPr>
         <p:txBody>
-          <a:bodyPr wrap="square" lIns="635" tIns="635" rIns="635" bIns="635" rtlCol="0" anchor="t">
+          <a:bodyPr wrap="square" lIns="1016" tIns="1016" rIns="1016" bIns="1016" rtlCol="0" anchor="t">
             <a:normAutofit/>
           </a:bodyPr>
           <a:lstStyle/>
           <a:p>
+            <a:pPr indent="0" marL="0">
+              <a:buNone/>
+            </a:pPr>
             <a:r>
               <a:rPr lang="en-US" sz="1850" dirty="0">
                 <a:solidFill>
-                  <a:srgbClr val="17364A"/>
-                </a:solidFill>
-                <a:latin typeface="Aptos" pitchFamily="34" charset="0"/>
-                <a:ea typeface="Aptos" pitchFamily="34" charset="-122"/>
-                <a:cs typeface="Aptos" pitchFamily="34" charset="-120"/>
-              </a:rPr>
-              <a:t>Tool 33: Funding Strategy Checklists (Checklist) - Use this tool to complete or strengthen the practical.</a:t>
+                  <a:srgbClr val="003A63"/>
+                </a:solidFill>
+                <a:latin typeface="Aptos" pitchFamily="34" charset="0"/>
+                <a:ea typeface="Aptos" pitchFamily="34" charset="-122"/>
+                <a:cs typeface="Aptos" pitchFamily="34" charset="-120"/>
+              </a:rPr>
+              <a:t>• Tool 33: Funding Strategy Checklists (Checklist) - Use this tool to complete or strengthen the.</a:t>
             </a:r>
             <a:endParaRPr lang="en-US" sz="1850" dirty="0"/>
           </a:p>
           <a:p>
+            <a:pPr indent="0" marL="0">
+              <a:buNone/>
+            </a:pPr>
             <a:r>
               <a:rPr lang="en-US" sz="1850" dirty="0">
                 <a:solidFill>
-                  <a:srgbClr val="17364A"/>
-                </a:solidFill>
-                <a:latin typeface="Aptos" pitchFamily="34" charset="0"/>
-                <a:ea typeface="Aptos" pitchFamily="34" charset="-122"/>
-                <a:cs typeface="Aptos" pitchFamily="34" charset="-120"/>
-              </a:rPr>
-              <a:t>Tool 35: AI Total Cost of Ownership and Sustainability Worksheet (Worksheet) - Use this tool to complete or.</a:t>
+                  <a:srgbClr val="003A63"/>
+                </a:solidFill>
+                <a:latin typeface="Aptos" pitchFamily="34" charset="0"/>
+                <a:ea typeface="Aptos" pitchFamily="34" charset="-122"/>
+                <a:cs typeface="Aptos" pitchFamily="34" charset="-120"/>
+              </a:rPr>
+              <a:t>• Tool 35: AI Total Cost of Ownership and Sustainability Worksheet (Worksheet) - Use this tool.</a:t>
             </a:r>
             <a:endParaRPr lang="en-US" sz="1850" dirty="0"/>
           </a:p>
           <a:p>
+            <a:pPr indent="0" marL="0">
+              <a:buNone/>
+            </a:pPr>
             <a:r>
               <a:rPr lang="en-US" sz="1850" dirty="0">
                 <a:solidFill>
-                  <a:srgbClr val="17364A"/>
-                </a:solidFill>
-                <a:latin typeface="Aptos" pitchFamily="34" charset="0"/>
-                <a:ea typeface="Aptos" pitchFamily="34" charset="-122"/>
-                <a:cs typeface="Aptos" pitchFamily="34" charset="-120"/>
-              </a:rPr>
-              <a:t>Tool 4: AI Policy Landscape Scan (Worksheet) - Use AI Policy Landscape Scan to translate this lesson into a.</a:t>
+                  <a:srgbClr val="003A63"/>
+                </a:solidFill>
+                <a:latin typeface="Aptos" pitchFamily="34" charset="0"/>
+                <a:ea typeface="Aptos" pitchFamily="34" charset="-122"/>
+                <a:cs typeface="Aptos" pitchFamily="34" charset="-120"/>
+              </a:rPr>
+              <a:t>• Tool 4: AI Policy Landscape Scan (Worksheet) - Use AI Policy Landscape Scan to translate this.</a:t>
             </a:r>
             <a:endParaRPr lang="en-US" sz="1850" dirty="0"/>
           </a:p>
           <a:p>
+            <a:pPr indent="0" marL="0">
+              <a:buNone/>
+            </a:pPr>
             <a:r>
               <a:rPr lang="en-US" sz="1850" dirty="0">
                 <a:solidFill>
-                  <a:srgbClr val="17364A"/>
-                </a:solidFill>
-                <a:latin typeface="Aptos" pitchFamily="34" charset="0"/>
-                <a:ea typeface="Aptos" pitchFamily="34" charset="-122"/>
-                <a:cs typeface="Aptos" pitchFamily="34" charset="-120"/>
-              </a:rPr>
-              <a:t>Tool 5: AI Environmental and Resource Impact Review (Checklist) - Use this tool to complete or strengthen.</a:t>
+                  <a:srgbClr val="003A63"/>
+                </a:solidFill>
+                <a:latin typeface="Aptos" pitchFamily="34" charset="0"/>
+                <a:ea typeface="Aptos" pitchFamily="34" charset="-122"/>
+                <a:cs typeface="Aptos" pitchFamily="34" charset="-120"/>
+              </a:rPr>
+              <a:t>• Tool 5: AI Environmental and Resource Impact Review (Checklist) - Use this tool to complete or.</a:t>
             </a:r>
             <a:endParaRPr lang="en-US" sz="1850" dirty="0"/>
           </a:p>
@@ -12645,17 +12824,17 @@
         </p:nvSpPr>
         <p:spPr>
           <a:xfrm>
-            <a:off x="8211312" y="1920240"/>
-            <a:ext cx="2734056" cy="1463040"/>
-          </a:xfrm>
-          <a:prstGeom prst="rect">
-            <a:avLst/>
-          </a:prstGeom>
-          <a:noFill/>
-          <a:ln/>
-        </p:spPr>
-        <p:txBody>
-          <a:bodyPr wrap="square" lIns="0" tIns="0" rIns="0" bIns="0" rtlCol="0" anchor="t">
+            <a:off x="8211312" y="1892808"/>
+            <a:ext cx="2734056" cy="1536192"/>
+          </a:xfrm>
+          <a:prstGeom prst="rect">
+            <a:avLst/>
+          </a:prstGeom>
+          <a:noFill/>
+          <a:ln/>
+        </p:spPr>
+        <p:txBody>
+          <a:bodyPr wrap="square" lIns="254" tIns="254" rIns="254" bIns="254" rtlCol="0" anchor="t">
             <a:normAutofit/>
           </a:bodyPr>
           <a:lstStyle/>
@@ -12664,7 +12843,7 @@
               <a:buNone/>
             </a:pPr>
             <a:r>
-              <a:rPr lang="en-US" sz="1550" dirty="0">
+              <a:rPr lang="en-US" sz="1320" dirty="0">
                 <a:solidFill>
                   <a:srgbClr val="17364A"/>
                 </a:solidFill>
@@ -12672,9 +12851,9 @@
                 <a:ea typeface="Aptos" pitchFamily="34" charset="-122"/>
                 <a:cs typeface="Aptos" pitchFamily="34" charset="-120"/>
               </a:rPr>
-              <a:t>Use linked tools when your department needs a structured worksheet, template, checklist, review process, or documentation artifact.</a:t>
-            </a:r>
-            <a:endParaRPr lang="en-US" sz="1550" dirty="0"/>
+              <a:t>Use linked tools when your department needs a structured worksheet, template, checklist, review process, or.</a:t>
+            </a:r>
+            <a:endParaRPr lang="en-US" sz="1320" dirty="0"/>
           </a:p>
         </p:txBody>
       </p:sp>
@@ -12762,13 +12941,16 @@
           <a:ln/>
         </p:spPr>
         <p:txBody>
-          <a:bodyPr wrap="square" lIns="254" tIns="254" rIns="254" bIns="254" rtlCol="0" anchor="t">
+          <a:bodyPr wrap="square" lIns="508" tIns="508" rIns="508" bIns="508" rtlCol="0" anchor="t">
             <a:normAutofit/>
           </a:bodyPr>
           <a:lstStyle/>
           <a:p>
-            <a:r>
-              <a:rPr lang="en-US" sz="1380" dirty="0">
+            <a:pPr indent="0" marL="0">
+              <a:buNone/>
+            </a:pPr>
+            <a:r>
+              <a:rPr lang="en-US" sz="1220" dirty="0">
                 <a:solidFill>
                   <a:srgbClr val="17364A"/>
                 </a:solidFill>
@@ -12778,11 +12960,14 @@
               </a:rPr>
               <a:t>Use a tool when no comparable local process exists.</a:t>
             </a:r>
-            <a:endParaRPr lang="en-US" sz="1380" dirty="0"/>
-          </a:p>
-          <a:p>
-            <a:r>
-              <a:rPr lang="en-US" sz="1380" dirty="0">
+            <a:endParaRPr lang="en-US" sz="1220" dirty="0"/>
+          </a:p>
+          <a:p>
+            <a:pPr indent="0" marL="0">
+              <a:buNone/>
+            </a:pPr>
+            <a:r>
+              <a:rPr lang="en-US" sz="1220" dirty="0">
                 <a:solidFill>
                   <a:srgbClr val="17364A"/>
                 </a:solidFill>
@@ -12790,13 +12975,16 @@
                 <a:ea typeface="Aptos" pitchFamily="34" charset="-122"/>
                 <a:cs typeface="Aptos" pitchFamily="34" charset="-120"/>
               </a:rPr>
-              <a:t>Adapt existing department templates when they already fit the purpose.</a:t>
-            </a:r>
-            <a:endParaRPr lang="en-US" sz="1380" dirty="0"/>
-          </a:p>
-          <a:p>
-            <a:r>
-              <a:rPr lang="en-US" sz="1380" dirty="0">
+              <a:t>Adapt existing department templates when they already fit the.</a:t>
+            </a:r>
+            <a:endParaRPr lang="en-US" sz="1220" dirty="0"/>
+          </a:p>
+          <a:p>
+            <a:pPr indent="0" marL="0">
+              <a:buNone/>
+            </a:pPr>
+            <a:r>
+              <a:rPr lang="en-US" sz="1220" dirty="0">
                 <a:solidFill>
                   <a:srgbClr val="17364A"/>
                 </a:solidFill>
@@ -12806,7 +12994,7 @@
               </a:rPr>
               <a:t>Save the completed artifact as evidence of the decision.</a:t>
             </a:r>
-            <a:endParaRPr lang="en-US" sz="1380" dirty="0"/>
+            <a:endParaRPr lang="en-US" sz="1220" dirty="0"/>
           </a:p>
         </p:txBody>
       </p:sp>
@@ -13107,49 +13295,58 @@
           <a:ln/>
         </p:spPr>
         <p:txBody>
-          <a:bodyPr wrap="square" lIns="635" tIns="635" rIns="635" bIns="635" rtlCol="0" anchor="t">
+          <a:bodyPr wrap="square" lIns="1016" tIns="1016" rIns="1016" bIns="1016" rtlCol="0" anchor="t">
             <a:normAutofit/>
           </a:bodyPr>
           <a:lstStyle/>
           <a:p>
+            <a:pPr indent="0" marL="0">
+              <a:buNone/>
+            </a:pPr>
             <a:r>
               <a:rPr lang="en-US" sz="2100" dirty="0">
                 <a:solidFill>
-                  <a:srgbClr val="17364A"/>
-                </a:solidFill>
-                <a:latin typeface="Aptos" pitchFamily="34" charset="0"/>
-                <a:ea typeface="Aptos" pitchFamily="34" charset="-122"/>
-                <a:cs typeface="Aptos" pitchFamily="34" charset="-120"/>
-              </a:rPr>
-              <a:t>Define the purpose of an AI portfolio strategy for public health agencies.</a:t>
+                  <a:srgbClr val="003A63"/>
+                </a:solidFill>
+                <a:latin typeface="Aptos" pitchFamily="34" charset="0"/>
+                <a:ea typeface="Aptos" pitchFamily="34" charset="-122"/>
+                <a:cs typeface="Aptos" pitchFamily="34" charset="-120"/>
+              </a:rPr>
+              <a:t>• Define the purpose of an AI portfolio strategy for public health agencies.</a:t>
             </a:r>
             <a:endParaRPr lang="en-US" sz="2100" dirty="0"/>
           </a:p>
           <a:p>
+            <a:pPr indent="0" marL="0">
+              <a:buNone/>
+            </a:pPr>
             <a:r>
               <a:rPr lang="en-US" sz="2100" dirty="0">
                 <a:solidFill>
-                  <a:srgbClr val="17364A"/>
-                </a:solidFill>
-                <a:latin typeface="Aptos" pitchFamily="34" charset="0"/>
-                <a:ea typeface="Aptos" pitchFamily="34" charset="-122"/>
-                <a:cs typeface="Aptos" pitchFamily="34" charset="-120"/>
-              </a:rPr>
-              <a:t>Develop criteria for prioritizing AI use cases based on public health value, readiness, risk, and.</a:t>
+                  <a:srgbClr val="003A63"/>
+                </a:solidFill>
+                <a:latin typeface="Aptos" pitchFamily="34" charset="0"/>
+                <a:ea typeface="Aptos" pitchFamily="34" charset="-122"/>
+                <a:cs typeface="Aptos" pitchFamily="34" charset="-120"/>
+              </a:rPr>
+              <a:t>• Develop criteria for prioritizing AI use cases based on public health value, readiness, risk,.</a:t>
             </a:r>
             <a:endParaRPr lang="en-US" sz="2100" dirty="0"/>
           </a:p>
           <a:p>
+            <a:pPr indent="0" marL="0">
+              <a:buNone/>
+            </a:pPr>
             <a:r>
               <a:rPr lang="en-US" sz="2100" dirty="0">
                 <a:solidFill>
-                  <a:srgbClr val="17364A"/>
-                </a:solidFill>
-                <a:latin typeface="Aptos" pitchFamily="34" charset="0"/>
-                <a:ea typeface="Aptos" pitchFamily="34" charset="-122"/>
-                <a:cs typeface="Aptos" pitchFamily="34" charset="-120"/>
-              </a:rPr>
-              <a:t>Identify use cases that should be pursued, piloted, deferred, redesigned, or rejected.</a:t>
+                  <a:srgbClr val="003A63"/>
+                </a:solidFill>
+                <a:latin typeface="Aptos" pitchFamily="34" charset="0"/>
+                <a:ea typeface="Aptos" pitchFamily="34" charset="-122"/>
+                <a:cs typeface="Aptos" pitchFamily="34" charset="-120"/>
+              </a:rPr>
+              <a:t>• Identify use cases that should be pursued, piloted, deferred, redesigned, or rejected.</a:t>
             </a:r>
             <a:endParaRPr lang="en-US" sz="2100" dirty="0"/>
           </a:p>
@@ -13229,17 +13426,17 @@
         </p:nvSpPr>
         <p:spPr>
           <a:xfrm>
-            <a:off x="7799832" y="1828800"/>
-            <a:ext cx="3145536" cy="685800"/>
-          </a:xfrm>
-          <a:prstGeom prst="rect">
-            <a:avLst/>
-          </a:prstGeom>
-          <a:noFill/>
-          <a:ln/>
-        </p:spPr>
-        <p:txBody>
-          <a:bodyPr wrap="square" lIns="0" tIns="0" rIns="0" bIns="0" rtlCol="0" anchor="t">
+            <a:off x="7799832" y="1801368"/>
+            <a:ext cx="3145536" cy="758952"/>
+          </a:xfrm>
+          <a:prstGeom prst="rect">
+            <a:avLst/>
+          </a:prstGeom>
+          <a:noFill/>
+          <a:ln/>
+        </p:spPr>
+        <p:txBody>
+          <a:bodyPr wrap="square" lIns="254" tIns="254" rIns="254" bIns="254" rtlCol="0" anchor="t">
             <a:normAutofit/>
           </a:bodyPr>
           <a:lstStyle/>
@@ -13248,7 +13445,7 @@
               <a:buNone/>
             </a:pPr>
             <a:r>
-              <a:rPr lang="en-US" sz="1550" dirty="0">
+              <a:rPr lang="en-US" sz="1320" dirty="0">
                 <a:solidFill>
                   <a:srgbClr val="17364A"/>
                 </a:solidFill>
@@ -13258,7 +13455,7 @@
               </a:rPr>
               <a:t>Define the purpose of an AI portfolio strategy for public health agencies.</a:t>
             </a:r>
-            <a:endParaRPr lang="en-US" sz="1550" dirty="0"/>
+            <a:endParaRPr lang="en-US" sz="1320" dirty="0"/>
           </a:p>
         </p:txBody>
       </p:sp>
@@ -13346,13 +13543,16 @@
           <a:ln/>
         </p:spPr>
         <p:txBody>
-          <a:bodyPr wrap="square" lIns="254" tIns="254" rIns="254" bIns="254" rtlCol="0" anchor="t">
+          <a:bodyPr wrap="square" lIns="508" tIns="508" rIns="508" bIns="508" rtlCol="0" anchor="t">
             <a:normAutofit/>
           </a:bodyPr>
           <a:lstStyle/>
           <a:p>
-            <a:r>
-              <a:rPr lang="en-US" sz="1380" dirty="0">
+            <a:pPr indent="0" marL="0">
+              <a:buNone/>
+            </a:pPr>
+            <a:r>
+              <a:rPr lang="en-US" sz="1220" dirty="0">
                 <a:solidFill>
                   <a:srgbClr val="17364A"/>
                 </a:solidFill>
@@ -13360,13 +13560,16 @@
                 <a:ea typeface="Aptos" pitchFamily="34" charset="-122"/>
                 <a:cs typeface="Aptos" pitchFamily="34" charset="-120"/>
               </a:rPr>
-              <a:t>Develop criteria for prioritizing AI use cases based on public health value, readiness,.</a:t>
-            </a:r>
-            <a:endParaRPr lang="en-US" sz="1380" dirty="0"/>
-          </a:p>
-          <a:p>
-            <a:r>
-              <a:rPr lang="en-US" sz="1380" dirty="0">
+              <a:t>Develop criteria for prioritizing AI use cases based on public.</a:t>
+            </a:r>
+            <a:endParaRPr lang="en-US" sz="1220" dirty="0"/>
+          </a:p>
+          <a:p>
+            <a:pPr indent="0" marL="0">
+              <a:buNone/>
+            </a:pPr>
+            <a:r>
+              <a:rPr lang="en-US" sz="1220" dirty="0">
                 <a:solidFill>
                   <a:srgbClr val="17364A"/>
                 </a:solidFill>
@@ -13374,13 +13577,16 @@
                 <a:ea typeface="Aptos" pitchFamily="34" charset="-122"/>
                 <a:cs typeface="Aptos" pitchFamily="34" charset="-120"/>
               </a:rPr>
-              <a:t>Create a portfolio view that balances innovation, risk, equity, and operational capacity.</a:t>
-            </a:r>
-            <a:endParaRPr lang="en-US" sz="1380" dirty="0"/>
-          </a:p>
-          <a:p>
-            <a:r>
-              <a:rPr lang="en-US" sz="1380" dirty="0">
+              <a:t>Create a portfolio view that balances innovation, risk, equity,.</a:t>
+            </a:r>
+            <a:endParaRPr lang="en-US" sz="1220" dirty="0"/>
+          </a:p>
+          <a:p>
+            <a:pPr indent="0" marL="0">
+              <a:buNone/>
+            </a:pPr>
+            <a:r>
+              <a:rPr lang="en-US" sz="1220" dirty="0">
                 <a:solidFill>
                   <a:srgbClr val="17364A"/>
                 </a:solidFill>
@@ -13388,9 +13594,9 @@
                 <a:ea typeface="Aptos" pitchFamily="34" charset="-122"/>
                 <a:cs typeface="Aptos" pitchFamily="34" charset="-120"/>
               </a:rPr>
-              <a:t>Produce a use case prioritization rubric for governance or leadership review.</a:t>
-            </a:r>
-            <a:endParaRPr lang="en-US" sz="1380" dirty="0"/>
+              <a:t>Produce a use case prioritization rubric for governance or.</a:t>
+            </a:r>
+            <a:endParaRPr lang="en-US" sz="1220" dirty="0"/>
           </a:p>
         </p:txBody>
       </p:sp>
@@ -13468,17 +13674,17 @@
         </p:nvSpPr>
         <p:spPr>
           <a:xfrm>
-            <a:off x="7799832" y="5001768"/>
-            <a:ext cx="3145536" cy="502920"/>
-          </a:xfrm>
-          <a:prstGeom prst="rect">
-            <a:avLst/>
-          </a:prstGeom>
-          <a:noFill/>
-          <a:ln/>
-        </p:spPr>
-        <p:txBody>
-          <a:bodyPr wrap="square" lIns="0" tIns="0" rIns="0" bIns="0" rtlCol="0" anchor="t">
+            <a:off x="7799832" y="4974336"/>
+            <a:ext cx="3145536" cy="576072"/>
+          </a:xfrm>
+          <a:prstGeom prst="rect">
+            <a:avLst/>
+          </a:prstGeom>
+          <a:noFill/>
+          <a:ln/>
+        </p:spPr>
+        <p:txBody>
+          <a:bodyPr wrap="square" lIns="254" tIns="254" rIns="254" bIns="254" rtlCol="0" anchor="t">
             <a:normAutofit/>
           </a:bodyPr>
           <a:lstStyle/>
@@ -13487,7 +13693,7 @@
               <a:buNone/>
             </a:pPr>
             <a:r>
-              <a:rPr lang="en-US" sz="1550" dirty="0">
+              <a:rPr lang="en-US" sz="1320" dirty="0">
                 <a:solidFill>
                   <a:srgbClr val="17364A"/>
                 </a:solidFill>
@@ -13495,9 +13701,9 @@
                 <a:ea typeface="Aptos" pitchFamily="34" charset="-122"/>
                 <a:cs typeface="Aptos" pitchFamily="34" charset="-120"/>
               </a:rPr>
-              <a:t>Use the assignment to test whether you can explain the concept, apply it to a realistic public health situation, and identify what would need review before the work moves forward.</a:t>
-            </a:r>
-            <a:endParaRPr lang="en-US" sz="1550" dirty="0"/>
+              <a:t>Use the assignment to test whether you can explain the concept, apply it to a realistic public health situation, and.</a:t>
+            </a:r>
+            <a:endParaRPr lang="en-US" sz="1320" dirty="0"/>
           </a:p>
         </p:txBody>
       </p:sp>
@@ -13798,49 +14004,58 @@
           <a:ln/>
         </p:spPr>
         <p:txBody>
-          <a:bodyPr wrap="square" lIns="635" tIns="635" rIns="635" bIns="635" rtlCol="0" anchor="t">
+          <a:bodyPr wrap="square" lIns="1016" tIns="1016" rIns="1016" bIns="1016" rtlCol="0" anchor="t">
             <a:normAutofit/>
           </a:bodyPr>
           <a:lstStyle/>
           <a:p>
+            <a:pPr indent="0" marL="0">
+              <a:buNone/>
+            </a:pPr>
             <a:r>
               <a:rPr lang="en-US" sz="2100" dirty="0">
                 <a:solidFill>
-                  <a:srgbClr val="17364A"/>
-                </a:solidFill>
-                <a:latin typeface="Aptos" pitchFamily="34" charset="0"/>
-                <a:ea typeface="Aptos" pitchFamily="34" charset="-122"/>
-                <a:cs typeface="Aptos" pitchFamily="34" charset="-120"/>
-              </a:rPr>
-              <a:t>AI opportunities can quickly exceed an agency's capacity to evaluate, implement, and sustain them.</a:t>
+                  <a:srgbClr val="003A63"/>
+                </a:solidFill>
+                <a:latin typeface="Aptos" pitchFamily="34" charset="0"/>
+                <a:ea typeface="Aptos" pitchFamily="34" charset="-122"/>
+                <a:cs typeface="Aptos" pitchFamily="34" charset="-120"/>
+              </a:rPr>
+              <a:t>• AI opportunities can quickly exceed an agency's capacity to evaluate, implement, and sustain.</a:t>
             </a:r>
             <a:endParaRPr lang="en-US" sz="2100" dirty="0"/>
           </a:p>
           <a:p>
+            <a:pPr indent="0" marL="0">
+              <a:buNone/>
+            </a:pPr>
             <a:r>
               <a:rPr lang="en-US" sz="2100" dirty="0">
                 <a:solidFill>
-                  <a:srgbClr val="17364A"/>
-                </a:solidFill>
-                <a:latin typeface="Aptos" pitchFamily="34" charset="0"/>
-                <a:ea typeface="Aptos" pitchFamily="34" charset="-122"/>
-                <a:cs typeface="Aptos" pitchFamily="34" charset="-120"/>
-              </a:rPr>
-              <a:t>Leaders need a portfolio strategy that helps distinguish high-value public health uses from attractive.</a:t>
+                  <a:srgbClr val="003A63"/>
+                </a:solidFill>
+                <a:latin typeface="Aptos" pitchFamily="34" charset="0"/>
+                <a:ea typeface="Aptos" pitchFamily="34" charset="-122"/>
+                <a:cs typeface="Aptos" pitchFamily="34" charset="-120"/>
+              </a:rPr>
+              <a:t>• Leaders need a portfolio strategy that helps distinguish high-value public health uses from.</a:t>
             </a:r>
             <a:endParaRPr lang="en-US" sz="2100" dirty="0"/>
           </a:p>
           <a:p>
+            <a:pPr indent="0" marL="0">
+              <a:buNone/>
+            </a:pPr>
             <a:r>
               <a:rPr lang="en-US" sz="2100" dirty="0">
                 <a:solidFill>
-                  <a:srgbClr val="17364A"/>
-                </a:solidFill>
-                <a:latin typeface="Aptos" pitchFamily="34" charset="0"/>
-                <a:ea typeface="Aptos" pitchFamily="34" charset="-122"/>
-                <a:cs typeface="Aptos" pitchFamily="34" charset="-120"/>
-              </a:rPr>
-              <a:t>A portfolio approach organizes AI opportunities across programs, risk levels, readiness, equity impact,.</a:t>
+                  <a:srgbClr val="003A63"/>
+                </a:solidFill>
+                <a:latin typeface="Aptos" pitchFamily="34" charset="0"/>
+                <a:ea typeface="Aptos" pitchFamily="34" charset="-122"/>
+                <a:cs typeface="Aptos" pitchFamily="34" charset="-120"/>
+              </a:rPr>
+              <a:t>• A portfolio approach organizes AI opportunities across programs, risk levels, readiness,.</a:t>
             </a:r>
             <a:endParaRPr lang="en-US" sz="2100" dirty="0"/>
           </a:p>
@@ -13920,17 +14135,17 @@
         </p:nvSpPr>
         <p:spPr>
           <a:xfrm>
-            <a:off x="7799832" y="1828800"/>
-            <a:ext cx="3145536" cy="685800"/>
-          </a:xfrm>
-          <a:prstGeom prst="rect">
-            <a:avLst/>
-          </a:prstGeom>
-          <a:noFill/>
-          <a:ln/>
-        </p:spPr>
-        <p:txBody>
-          <a:bodyPr wrap="square" lIns="0" tIns="0" rIns="0" bIns="0" rtlCol="0" anchor="t">
+            <a:off x="7799832" y="1801368"/>
+            <a:ext cx="3145536" cy="758952"/>
+          </a:xfrm>
+          <a:prstGeom prst="rect">
+            <a:avLst/>
+          </a:prstGeom>
+          <a:noFill/>
+          <a:ln/>
+        </p:spPr>
+        <p:txBody>
+          <a:bodyPr wrap="square" lIns="254" tIns="254" rIns="254" bIns="254" rtlCol="0" anchor="t">
             <a:normAutofit/>
           </a:bodyPr>
           <a:lstStyle/>
@@ -13939,7 +14154,7 @@
               <a:buNone/>
             </a:pPr>
             <a:r>
-              <a:rPr lang="en-US" sz="1550" dirty="0">
+              <a:rPr lang="en-US" sz="1320" dirty="0">
                 <a:solidFill>
                   <a:srgbClr val="17364A"/>
                 </a:solidFill>
@@ -13949,7 +14164,7 @@
               </a:rPr>
               <a:t>AI opportunities can quickly exceed an agency's capacity to evaluate, implement, and sustain them.</a:t>
             </a:r>
-            <a:endParaRPr lang="en-US" sz="1550" dirty="0"/>
+            <a:endParaRPr lang="en-US" sz="1320" dirty="0"/>
           </a:p>
         </p:txBody>
       </p:sp>
@@ -14037,13 +14252,16 @@
           <a:ln/>
         </p:spPr>
         <p:txBody>
-          <a:bodyPr wrap="square" lIns="254" tIns="254" rIns="254" bIns="254" rtlCol="0" anchor="t">
+          <a:bodyPr wrap="square" lIns="508" tIns="508" rIns="508" bIns="508" rtlCol="0" anchor="t">
             <a:normAutofit/>
           </a:bodyPr>
           <a:lstStyle/>
           <a:p>
-            <a:r>
-              <a:rPr lang="en-US" sz="1380" dirty="0">
+            <a:pPr indent="0" marL="0">
+              <a:buNone/>
+            </a:pPr>
+            <a:r>
+              <a:rPr lang="en-US" sz="1220" dirty="0">
                 <a:solidFill>
                   <a:srgbClr val="17364A"/>
                 </a:solidFill>
@@ -14051,13 +14269,16 @@
                 <a:ea typeface="Aptos" pitchFamily="34" charset="-122"/>
                 <a:cs typeface="Aptos" pitchFamily="34" charset="-120"/>
               </a:rPr>
-              <a:t>Leaders need a portfolio strategy that helps distinguish high-value public health uses.</a:t>
-            </a:r>
-            <a:endParaRPr lang="en-US" sz="1380" dirty="0"/>
-          </a:p>
-          <a:p>
-            <a:r>
-              <a:rPr lang="en-US" sz="1380" dirty="0">
+              <a:t>Leaders need a portfolio strategy that helps distinguish.</a:t>
+            </a:r>
+            <a:endParaRPr lang="en-US" sz="1220" dirty="0"/>
+          </a:p>
+          <a:p>
+            <a:pPr indent="0" marL="0">
+              <a:buNone/>
+            </a:pPr>
+            <a:r>
+              <a:rPr lang="en-US" sz="1220" dirty="0">
                 <a:solidFill>
                   <a:srgbClr val="17364A"/>
                 </a:solidFill>
@@ -14065,13 +14286,16 @@
                 <a:ea typeface="Aptos" pitchFamily="34" charset="-122"/>
                 <a:cs typeface="Aptos" pitchFamily="34" charset="-120"/>
               </a:rPr>
-              <a:t>A portfolio approach organizes AI opportunities across programs, risk levels, readiness,.</a:t>
-            </a:r>
-            <a:endParaRPr lang="en-US" sz="1380" dirty="0"/>
-          </a:p>
-          <a:p>
-            <a:r>
-              <a:rPr lang="en-US" sz="1380" dirty="0">
+              <a:t>A portfolio approach organizes AI opportunities across programs,.</a:t>
+            </a:r>
+            <a:endParaRPr lang="en-US" sz="1220" dirty="0"/>
+          </a:p>
+          <a:p>
+            <a:pPr indent="0" marL="0">
+              <a:buNone/>
+            </a:pPr>
+            <a:r>
+              <a:rPr lang="en-US" sz="1220" dirty="0">
                 <a:solidFill>
                   <a:srgbClr val="17364A"/>
                 </a:solidFill>
@@ -14079,9 +14303,9 @@
                 <a:ea typeface="Aptos" pitchFamily="34" charset="-122"/>
                 <a:cs typeface="Aptos" pitchFamily="34" charset="-120"/>
               </a:rPr>
-              <a:t>This module teaches leaders how to create an AI use case intake and prioritization process.</a:t>
-            </a:r>
-            <a:endParaRPr lang="en-US" sz="1380" dirty="0"/>
+              <a:t>This module teaches leaders how to create an AI use case intake.</a:t>
+            </a:r>
+            <a:endParaRPr lang="en-US" sz="1220" dirty="0"/>
           </a:p>
         </p:txBody>
       </p:sp>
@@ -14159,17 +14383,17 @@
         </p:nvSpPr>
         <p:spPr>
           <a:xfrm>
-            <a:off x="7799832" y="5001768"/>
-            <a:ext cx="3145536" cy="502920"/>
-          </a:xfrm>
-          <a:prstGeom prst="rect">
-            <a:avLst/>
-          </a:prstGeom>
-          <a:noFill/>
-          <a:ln/>
-        </p:spPr>
-        <p:txBody>
-          <a:bodyPr wrap="square" lIns="0" tIns="0" rIns="0" bIns="0" rtlCol="0" anchor="t">
+            <a:off x="7799832" y="4974336"/>
+            <a:ext cx="3145536" cy="576072"/>
+          </a:xfrm>
+          <a:prstGeom prst="rect">
+            <a:avLst/>
+          </a:prstGeom>
+          <a:noFill/>
+          <a:ln/>
+        </p:spPr>
+        <p:txBody>
+          <a:bodyPr wrap="square" lIns="254" tIns="254" rIns="254" bIns="254" rtlCol="0" anchor="t">
             <a:normAutofit/>
           </a:bodyPr>
           <a:lstStyle/>
@@ -14178,7 +14402,7 @@
               <a:buNone/>
             </a:pPr>
             <a:r>
-              <a:rPr lang="en-US" sz="1550" dirty="0">
+              <a:rPr lang="en-US" sz="1320" dirty="0">
                 <a:solidFill>
                   <a:srgbClr val="17364A"/>
                 </a:solidFill>
@@ -14186,9 +14410,9 @@
                 <a:ea typeface="Aptos" pitchFamily="34" charset="-122"/>
                 <a:cs typeface="Aptos" pitchFamily="34" charset="-120"/>
               </a:rPr>
-              <a:t>Connect the concept to public health purpose, responsible use, required safeguards, documentation, and the next action a department should take.</a:t>
-            </a:r>
-            <a:endParaRPr lang="en-US" sz="1550" dirty="0"/>
+              <a:t>Connect the concept to public health purpose, responsible use, required safeguards, documentation, and the next action a.</a:t>
+            </a:r>
+            <a:endParaRPr lang="en-US" sz="1320" dirty="0"/>
           </a:p>
         </p:txBody>
       </p:sp>
@@ -14489,49 +14713,58 @@
           <a:ln/>
         </p:spPr>
         <p:txBody>
-          <a:bodyPr wrap="square" lIns="635" tIns="635" rIns="635" bIns="635" rtlCol="0" anchor="t">
+          <a:bodyPr wrap="square" lIns="1016" tIns="1016" rIns="1016" bIns="1016" rtlCol="0" anchor="t">
             <a:normAutofit/>
           </a:bodyPr>
           <a:lstStyle/>
           <a:p>
+            <a:pPr indent="0" marL="0">
+              <a:buNone/>
+            </a:pPr>
             <a:r>
               <a:rPr lang="en-US" sz="2100" dirty="0">
                 <a:solidFill>
-                  <a:srgbClr val="17364A"/>
-                </a:solidFill>
-                <a:latin typeface="Aptos" pitchFamily="34" charset="0"/>
-                <a:ea typeface="Aptos" pitchFamily="34" charset="-122"/>
-                <a:cs typeface="Aptos" pitchFamily="34" charset="-120"/>
-              </a:rPr>
-              <a:t>This national-level module is intended for training and planning purposes.</a:t>
+                  <a:srgbClr val="003A63"/>
+                </a:solidFill>
+                <a:latin typeface="Aptos" pitchFamily="34" charset="0"/>
+                <a:ea typeface="Aptos" pitchFamily="34" charset="-122"/>
+                <a:cs typeface="Aptos" pitchFamily="34" charset="-120"/>
+              </a:rPr>
+              <a:t>• This national-level module is intended for training and planning purposes.</a:t>
             </a:r>
             <a:endParaRPr lang="en-US" sz="2100" dirty="0"/>
           </a:p>
           <a:p>
+            <a:pPr indent="0" marL="0">
+              <a:buNone/>
+            </a:pPr>
             <a:r>
               <a:rPr lang="en-US" sz="2100" dirty="0">
                 <a:solidFill>
-                  <a:srgbClr val="17364A"/>
-                </a:solidFill>
-                <a:latin typeface="Aptos" pitchFamily="34" charset="0"/>
-                <a:ea typeface="Aptos" pitchFamily="34" charset="-122"/>
-                <a:cs typeface="Aptos" pitchFamily="34" charset="-120"/>
-              </a:rPr>
-              <a:t>It does not replace legal, privacy, procurement, civil rights, records, or agency policy review.</a:t>
+                  <a:srgbClr val="003A63"/>
+                </a:solidFill>
+                <a:latin typeface="Aptos" pitchFamily="34" charset="0"/>
+                <a:ea typeface="Aptos" pitchFamily="34" charset="-122"/>
+                <a:cs typeface="Aptos" pitchFamily="34" charset="-120"/>
+              </a:rPr>
+              <a:t>• It does not replace legal, privacy, procurement, civil rights, records, or agency policy review.</a:t>
             </a:r>
             <a:endParaRPr lang="en-US" sz="2100" dirty="0"/>
           </a:p>
           <a:p>
+            <a:pPr indent="0" marL="0">
+              <a:buNone/>
+            </a:pPr>
             <a:r>
               <a:rPr lang="en-US" sz="2100" dirty="0">
                 <a:solidFill>
-                  <a:srgbClr val="17364A"/>
-                </a:solidFill>
-                <a:latin typeface="Aptos" pitchFamily="34" charset="0"/>
-                <a:ea typeface="Aptos" pitchFamily="34" charset="-122"/>
-                <a:cs typeface="Aptos" pitchFamily="34" charset="-120"/>
-              </a:rPr>
-              <a:t>Learners should confirm applicable requirements in their own jurisdiction and organization before.</a:t>
+                  <a:srgbClr val="003A63"/>
+                </a:solidFill>
+                <a:latin typeface="Aptos" pitchFamily="34" charset="0"/>
+                <a:ea typeface="Aptos" pitchFamily="34" charset="-122"/>
+                <a:cs typeface="Aptos" pitchFamily="34" charset="-120"/>
+              </a:rPr>
+              <a:t>• Learners should confirm applicable requirements in their own jurisdiction and organization.</a:t>
             </a:r>
             <a:endParaRPr lang="en-US" sz="2100" dirty="0"/>
           </a:p>
@@ -14611,17 +14844,17 @@
         </p:nvSpPr>
         <p:spPr>
           <a:xfrm>
-            <a:off x="7799832" y="1828800"/>
-            <a:ext cx="3145536" cy="685800"/>
-          </a:xfrm>
-          <a:prstGeom prst="rect">
-            <a:avLst/>
-          </a:prstGeom>
-          <a:noFill/>
-          <a:ln/>
-        </p:spPr>
-        <p:txBody>
-          <a:bodyPr wrap="square" lIns="0" tIns="0" rIns="0" bIns="0" rtlCol="0" anchor="t">
+            <a:off x="7799832" y="1801368"/>
+            <a:ext cx="3145536" cy="758952"/>
+          </a:xfrm>
+          <a:prstGeom prst="rect">
+            <a:avLst/>
+          </a:prstGeom>
+          <a:noFill/>
+          <a:ln/>
+        </p:spPr>
+        <p:txBody>
+          <a:bodyPr wrap="square" lIns="254" tIns="254" rIns="254" bIns="254" rtlCol="0" anchor="t">
             <a:normAutofit/>
           </a:bodyPr>
           <a:lstStyle/>
@@ -14630,7 +14863,7 @@
               <a:buNone/>
             </a:pPr>
             <a:r>
-              <a:rPr lang="en-US" sz="1550" dirty="0">
+              <a:rPr lang="en-US" sz="1320" dirty="0">
                 <a:solidFill>
                   <a:srgbClr val="17364A"/>
                 </a:solidFill>
@@ -14640,7 +14873,7 @@
               </a:rPr>
               <a:t>This national-level module is intended for training and planning purposes.</a:t>
             </a:r>
-            <a:endParaRPr lang="en-US" sz="1550" dirty="0"/>
+            <a:endParaRPr lang="en-US" sz="1320" dirty="0"/>
           </a:p>
         </p:txBody>
       </p:sp>
@@ -14728,13 +14961,16 @@
           <a:ln/>
         </p:spPr>
         <p:txBody>
-          <a:bodyPr wrap="square" lIns="254" tIns="254" rIns="254" bIns="254" rtlCol="0" anchor="t">
+          <a:bodyPr wrap="square" lIns="508" tIns="508" rIns="508" bIns="508" rtlCol="0" anchor="t">
             <a:normAutofit/>
           </a:bodyPr>
           <a:lstStyle/>
           <a:p>
-            <a:r>
-              <a:rPr lang="en-US" sz="1380" dirty="0">
+            <a:pPr indent="0" marL="0">
+              <a:buNone/>
+            </a:pPr>
+            <a:r>
+              <a:rPr lang="en-US" sz="1220" dirty="0">
                 <a:solidFill>
                   <a:srgbClr val="17364A"/>
                 </a:solidFill>
@@ -14742,13 +14978,16 @@
                 <a:ea typeface="Aptos" pitchFamily="34" charset="-122"/>
                 <a:cs typeface="Aptos" pitchFamily="34" charset="-120"/>
               </a:rPr>
-              <a:t>This national-level module is intended for training and planning purposes.</a:t>
-            </a:r>
-            <a:endParaRPr lang="en-US" sz="1380" dirty="0"/>
-          </a:p>
-          <a:p>
-            <a:r>
-              <a:rPr lang="en-US" sz="1380" dirty="0">
+              <a:t>This national-level module is intended for training and planning.</a:t>
+            </a:r>
+            <a:endParaRPr lang="en-US" sz="1220" dirty="0"/>
+          </a:p>
+          <a:p>
+            <a:pPr indent="0" marL="0">
+              <a:buNone/>
+            </a:pPr>
+            <a:r>
+              <a:rPr lang="en-US" sz="1220" dirty="0">
                 <a:solidFill>
                   <a:srgbClr val="17364A"/>
                 </a:solidFill>
@@ -14756,13 +14995,16 @@
                 <a:ea typeface="Aptos" pitchFamily="34" charset="-122"/>
                 <a:cs typeface="Aptos" pitchFamily="34" charset="-120"/>
               </a:rPr>
-              <a:t>It does not replace legal, privacy, procurement, civil rights, records, or agency policy.</a:t>
-            </a:r>
-            <a:endParaRPr lang="en-US" sz="1380" dirty="0"/>
-          </a:p>
-          <a:p>
-            <a:r>
-              <a:rPr lang="en-US" sz="1380" dirty="0">
+              <a:t>It does not replace legal, privacy, procurement, civil rights,.</a:t>
+            </a:r>
+            <a:endParaRPr lang="en-US" sz="1220" dirty="0"/>
+          </a:p>
+          <a:p>
+            <a:pPr indent="0" marL="0">
+              <a:buNone/>
+            </a:pPr>
+            <a:r>
+              <a:rPr lang="en-US" sz="1220" dirty="0">
                 <a:solidFill>
                   <a:srgbClr val="17364A"/>
                 </a:solidFill>
@@ -14770,9 +15012,9 @@
                 <a:ea typeface="Aptos" pitchFamily="34" charset="-122"/>
                 <a:cs typeface="Aptos" pitchFamily="34" charset="-120"/>
               </a:rPr>
-              <a:t>Learners should confirm applicable requirements in their own jurisdiction and organization.</a:t>
-            </a:r>
-            <a:endParaRPr lang="en-US" sz="1380" dirty="0"/>
+              <a:t>Learners should confirm applicable requirements in their own.</a:t>
+            </a:r>
+            <a:endParaRPr lang="en-US" sz="1220" dirty="0"/>
           </a:p>
         </p:txBody>
       </p:sp>
@@ -14850,17 +15092,17 @@
         </p:nvSpPr>
         <p:spPr>
           <a:xfrm>
-            <a:off x="7799832" y="5001768"/>
-            <a:ext cx="3145536" cy="502920"/>
-          </a:xfrm>
-          <a:prstGeom prst="rect">
-            <a:avLst/>
-          </a:prstGeom>
-          <a:noFill/>
-          <a:ln/>
-        </p:spPr>
-        <p:txBody>
-          <a:bodyPr wrap="square" lIns="0" tIns="0" rIns="0" bIns="0" rtlCol="0" anchor="t">
+            <a:off x="7799832" y="4974336"/>
+            <a:ext cx="3145536" cy="576072"/>
+          </a:xfrm>
+          <a:prstGeom prst="rect">
+            <a:avLst/>
+          </a:prstGeom>
+          <a:noFill/>
+          <a:ln/>
+        </p:spPr>
+        <p:txBody>
+          <a:bodyPr wrap="square" lIns="254" tIns="254" rIns="254" bIns="254" rtlCol="0" anchor="t">
             <a:normAutofit/>
           </a:bodyPr>
           <a:lstStyle/>
@@ -14869,7 +15111,7 @@
               <a:buNone/>
             </a:pPr>
             <a:r>
-              <a:rPr lang="en-US" sz="1550" dirty="0">
+              <a:rPr lang="en-US" sz="1320" dirty="0">
                 <a:solidFill>
                   <a:srgbClr val="17364A"/>
                 </a:solidFill>
@@ -14877,9 +15119,9 @@
                 <a:ea typeface="Aptos" pitchFamily="34" charset="-122"/>
                 <a:cs typeface="Aptos" pitchFamily="34" charset="-120"/>
               </a:rPr>
-              <a:t>Translate this concept into clear decision rights, review steps, documentation expectations, and escalation paths before an AI-supported workflow is approved.</a:t>
-            </a:r>
-            <a:endParaRPr lang="en-US" sz="1550" dirty="0"/>
+              <a:t>Translate this concept into clear decision rights, review steps, documentation expectations, and escalation paths before.</a:t>
+            </a:r>
+            <a:endParaRPr lang="en-US" sz="1320" dirty="0"/>
           </a:p>
         </p:txBody>
       </p:sp>
@@ -15180,49 +15422,58 @@
           <a:ln/>
         </p:spPr>
         <p:txBody>
-          <a:bodyPr wrap="square" lIns="635" tIns="635" rIns="635" bIns="635" rtlCol="0" anchor="t">
+          <a:bodyPr wrap="square" lIns="1016" tIns="1016" rIns="1016" bIns="1016" rtlCol="0" anchor="t">
             <a:normAutofit/>
           </a:bodyPr>
           <a:lstStyle/>
           <a:p>
+            <a:pPr indent="0" marL="0">
+              <a:buNone/>
+            </a:pPr>
             <a:r>
               <a:rPr lang="en-US" sz="2100" dirty="0">
                 <a:solidFill>
-                  <a:srgbClr val="17364A"/>
-                </a:solidFill>
-                <a:latin typeface="Aptos" pitchFamily="34" charset="0"/>
-                <a:ea typeface="Aptos" pitchFamily="34" charset="-122"/>
-                <a:cs typeface="Aptos" pitchFamily="34" charset="-120"/>
-              </a:rPr>
-              <a:t>Public health agencies have many possible AI use cases: summarizing case notes, analyzing call logs,.</a:t>
+                  <a:srgbClr val="003A63"/>
+                </a:solidFill>
+                <a:latin typeface="Aptos" pitchFamily="34" charset="0"/>
+                <a:ea typeface="Aptos" pitchFamily="34" charset="-122"/>
+                <a:cs typeface="Aptos" pitchFamily="34" charset="-120"/>
+              </a:rPr>
+              <a:t>• Public health agencies have many possible AI use cases: summarizing case notes, analyzing call.</a:t>
             </a:r>
             <a:endParaRPr lang="en-US" sz="2100" dirty="0"/>
           </a:p>
           <a:p>
+            <a:pPr indent="0" marL="0">
+              <a:buNone/>
+            </a:pPr>
             <a:r>
               <a:rPr lang="en-US" sz="2100" dirty="0">
                 <a:solidFill>
-                  <a:srgbClr val="17364A"/>
-                </a:solidFill>
-                <a:latin typeface="Aptos" pitchFamily="34" charset="0"/>
-                <a:ea typeface="Aptos" pitchFamily="34" charset="-122"/>
-                <a:cs typeface="Aptos" pitchFamily="34" charset="-120"/>
-              </a:rPr>
-              <a:t>Without a portfolio strategy, agencies may choose projects because they are visible, easy to.</a:t>
+                  <a:srgbClr val="003A63"/>
+                </a:solidFill>
+                <a:latin typeface="Aptos" pitchFamily="34" charset="0"/>
+                <a:ea typeface="Aptos" pitchFamily="34" charset="-122"/>
+                <a:cs typeface="Aptos" pitchFamily="34" charset="-120"/>
+              </a:rPr>
+              <a:t>• Without a portfolio strategy, agencies may choose projects because they are visible, easy to.</a:t>
             </a:r>
             <a:endParaRPr lang="en-US" sz="2100" dirty="0"/>
           </a:p>
           <a:p>
+            <a:pPr indent="0" marL="0">
+              <a:buNone/>
+            </a:pPr>
             <a:r>
               <a:rPr lang="en-US" sz="2100" dirty="0">
                 <a:solidFill>
-                  <a:srgbClr val="17364A"/>
-                </a:solidFill>
-                <a:latin typeface="Aptos" pitchFamily="34" charset="0"/>
-                <a:ea typeface="Aptos" pitchFamily="34" charset="-122"/>
-                <a:cs typeface="Aptos" pitchFamily="34" charset="-120"/>
-              </a:rPr>
-              <a:t>A portfolio strategy protects scarce capacity.</a:t>
+                  <a:srgbClr val="003A63"/>
+                </a:solidFill>
+                <a:latin typeface="Aptos" pitchFamily="34" charset="0"/>
+                <a:ea typeface="Aptos" pitchFamily="34" charset="-122"/>
+                <a:cs typeface="Aptos" pitchFamily="34" charset="-120"/>
+              </a:rPr>
+              <a:t>• A portfolio strategy protects scarce capacity.</a:t>
             </a:r>
             <a:endParaRPr lang="en-US" sz="2100" dirty="0"/>
           </a:p>
@@ -15302,17 +15553,17 @@
         </p:nvSpPr>
         <p:spPr>
           <a:xfrm>
-            <a:off x="7799832" y="1828800"/>
-            <a:ext cx="3145536" cy="685800"/>
-          </a:xfrm>
-          <a:prstGeom prst="rect">
-            <a:avLst/>
-          </a:prstGeom>
-          <a:noFill/>
-          <a:ln/>
-        </p:spPr>
-        <p:txBody>
-          <a:bodyPr wrap="square" lIns="0" tIns="0" rIns="0" bIns="0" rtlCol="0" anchor="t">
+            <a:off x="7799832" y="1801368"/>
+            <a:ext cx="3145536" cy="758952"/>
+          </a:xfrm>
+          <a:prstGeom prst="rect">
+            <a:avLst/>
+          </a:prstGeom>
+          <a:noFill/>
+          <a:ln/>
+        </p:spPr>
+        <p:txBody>
+          <a:bodyPr wrap="square" lIns="254" tIns="254" rIns="254" bIns="254" rtlCol="0" anchor="t">
             <a:normAutofit/>
           </a:bodyPr>
           <a:lstStyle/>
@@ -15321,7 +15572,7 @@
               <a:buNone/>
             </a:pPr>
             <a:r>
-              <a:rPr lang="en-US" sz="1550" dirty="0">
+              <a:rPr lang="en-US" sz="1320" dirty="0">
                 <a:solidFill>
                   <a:srgbClr val="17364A"/>
                 </a:solidFill>
@@ -15331,7 +15582,7 @@
               </a:rPr>
               <a:t>Public health agencies have many possible AI use cases: summarizing case notes, analyzing call logs,.</a:t>
             </a:r>
-            <a:endParaRPr lang="en-US" sz="1550" dirty="0"/>
+            <a:endParaRPr lang="en-US" sz="1320" dirty="0"/>
           </a:p>
         </p:txBody>
       </p:sp>
@@ -15419,13 +15670,16 @@
           <a:ln/>
         </p:spPr>
         <p:txBody>
-          <a:bodyPr wrap="square" lIns="254" tIns="254" rIns="254" bIns="254" rtlCol="0" anchor="t">
+          <a:bodyPr wrap="square" lIns="508" tIns="508" rIns="508" bIns="508" rtlCol="0" anchor="t">
             <a:normAutofit/>
           </a:bodyPr>
           <a:lstStyle/>
           <a:p>
-            <a:r>
-              <a:rPr lang="en-US" sz="1380" dirty="0">
+            <a:pPr indent="0" marL="0">
+              <a:buNone/>
+            </a:pPr>
+            <a:r>
+              <a:rPr lang="en-US" sz="1220" dirty="0">
                 <a:solidFill>
                   <a:srgbClr val="17364A"/>
                 </a:solidFill>
@@ -15433,13 +15687,16 @@
                 <a:ea typeface="Aptos" pitchFamily="34" charset="-122"/>
                 <a:cs typeface="Aptos" pitchFamily="34" charset="-120"/>
               </a:rPr>
-              <a:t>Public health agencies have many possible AI use cases: summarizing case notes, analyzing.</a:t>
-            </a:r>
-            <a:endParaRPr lang="en-US" sz="1380" dirty="0"/>
-          </a:p>
-          <a:p>
-            <a:r>
-              <a:rPr lang="en-US" sz="1380" dirty="0">
+              <a:t>Public health agencies have many possible AI use cases:.</a:t>
+            </a:r>
+            <a:endParaRPr lang="en-US" sz="1220" dirty="0"/>
+          </a:p>
+          <a:p>
+            <a:pPr indent="0" marL="0">
+              <a:buNone/>
+            </a:pPr>
+            <a:r>
+              <a:rPr lang="en-US" sz="1220" dirty="0">
                 <a:solidFill>
                   <a:srgbClr val="17364A"/>
                 </a:solidFill>
@@ -15447,13 +15704,16 @@
                 <a:ea typeface="Aptos" pitchFamily="34" charset="-122"/>
                 <a:cs typeface="Aptos" pitchFamily="34" charset="-120"/>
               </a:rPr>
-              <a:t>Without a portfolio strategy, agencies may choose projects because they are visible, easy.</a:t>
-            </a:r>
-            <a:endParaRPr lang="en-US" sz="1380" dirty="0"/>
-          </a:p>
-          <a:p>
-            <a:r>
-              <a:rPr lang="en-US" sz="1380" dirty="0">
+              <a:t>Without a portfolio strategy, agencies may choose projects because.</a:t>
+            </a:r>
+            <a:endParaRPr lang="en-US" sz="1220" dirty="0"/>
+          </a:p>
+          <a:p>
+            <a:pPr indent="0" marL="0">
+              <a:buNone/>
+            </a:pPr>
+            <a:r>
+              <a:rPr lang="en-US" sz="1220" dirty="0">
                 <a:solidFill>
                   <a:srgbClr val="17364A"/>
                 </a:solidFill>
@@ -15461,9 +15721,9 @@
                 <a:ea typeface="Aptos" pitchFamily="34" charset="-122"/>
                 <a:cs typeface="Aptos" pitchFamily="34" charset="-120"/>
               </a:rPr>
-              <a:t>Technical teams, privacy officers, legal counsel, procurement staff, program leaders, and.</a:t>
-            </a:r>
-            <a:endParaRPr lang="en-US" sz="1380" dirty="0"/>
+              <a:t>Technical teams, privacy officers, legal counsel, procurement.</a:t>
+            </a:r>
+            <a:endParaRPr lang="en-US" sz="1220" dirty="0"/>
           </a:p>
         </p:txBody>
       </p:sp>
@@ -15541,17 +15801,17 @@
         </p:nvSpPr>
         <p:spPr>
           <a:xfrm>
-            <a:off x="7799832" y="5001768"/>
-            <a:ext cx="3145536" cy="502920"/>
-          </a:xfrm>
-          <a:prstGeom prst="rect">
-            <a:avLst/>
-          </a:prstGeom>
-          <a:noFill/>
-          <a:ln/>
-        </p:spPr>
-        <p:txBody>
-          <a:bodyPr wrap="square" lIns="0" tIns="0" rIns="0" bIns="0" rtlCol="0" anchor="t">
+            <a:off x="7799832" y="4974336"/>
+            <a:ext cx="3145536" cy="576072"/>
+          </a:xfrm>
+          <a:prstGeom prst="rect">
+            <a:avLst/>
+          </a:prstGeom>
+          <a:noFill/>
+          <a:ln/>
+        </p:spPr>
+        <p:txBody>
+          <a:bodyPr wrap="square" lIns="254" tIns="254" rIns="254" bIns="254" rtlCol="0" anchor="t">
             <a:normAutofit/>
           </a:bodyPr>
           <a:lstStyle/>
@@ -15560,7 +15820,7 @@
               <a:buNone/>
             </a:pPr>
             <a:r>
-              <a:rPr lang="en-US" sz="1550" dirty="0">
+              <a:rPr lang="en-US" sz="1320" dirty="0">
                 <a:solidFill>
                   <a:srgbClr val="17364A"/>
                 </a:solidFill>
@@ -15568,9 +15828,9 @@
                 <a:ea typeface="Aptos" pitchFamily="34" charset="-122"/>
                 <a:cs typeface="Aptos" pitchFamily="34" charset="-120"/>
               </a:rPr>
-              <a:t>Connect the concept to public health purpose, responsible use, required safeguards, documentation, and the next action a department should take.</a:t>
-            </a:r>
-            <a:endParaRPr lang="en-US" sz="1550" dirty="0"/>
+              <a:t>Connect the concept to public health purpose, responsible use, required safeguards, documentation, and the next action a.</a:t>
+            </a:r>
+            <a:endParaRPr lang="en-US" sz="1320" dirty="0"/>
           </a:p>
         </p:txBody>
       </p:sp>
@@ -15871,49 +16131,58 @@
           <a:ln/>
         </p:spPr>
         <p:txBody>
-          <a:bodyPr wrap="square" lIns="635" tIns="635" rIns="635" bIns="635" rtlCol="0" anchor="t">
+          <a:bodyPr wrap="square" lIns="1016" tIns="1016" rIns="1016" bIns="1016" rtlCol="0" anchor="t">
             <a:normAutofit/>
           </a:bodyPr>
           <a:lstStyle/>
           <a:p>
+            <a:pPr indent="0" marL="0">
+              <a:buNone/>
+            </a:pPr>
             <a:r>
               <a:rPr lang="en-US" sz="2100" dirty="0">
                 <a:solidFill>
-                  <a:srgbClr val="17364A"/>
-                </a:solidFill>
-                <a:latin typeface="Aptos" pitchFamily="34" charset="0"/>
-                <a:ea typeface="Aptos" pitchFamily="34" charset="-122"/>
-                <a:cs typeface="Aptos" pitchFamily="34" charset="-120"/>
-              </a:rPr>
-              <a:t>A health department receives proposals for five AI uses: a public chatbot, a staff policy assistant, an.</a:t>
+                  <a:srgbClr val="003A63"/>
+                </a:solidFill>
+                <a:latin typeface="Aptos" pitchFamily="34" charset="0"/>
+                <a:ea typeface="Aptos" pitchFamily="34" charset="-122"/>
+                <a:cs typeface="Aptos" pitchFamily="34" charset="-120"/>
+              </a:rPr>
+              <a:t>• A health department receives proposals for five AI uses: a public chatbot, a staff policy.</a:t>
             </a:r>
             <a:endParaRPr lang="en-US" sz="2100" dirty="0"/>
           </a:p>
           <a:p>
+            <a:pPr indent="0" marL="0">
+              <a:buNone/>
+            </a:pPr>
             <a:r>
               <a:rPr lang="en-US" sz="2100" dirty="0">
                 <a:solidFill>
-                  <a:srgbClr val="17364A"/>
-                </a:solidFill>
-                <a:latin typeface="Aptos" pitchFamily="34" charset="0"/>
-                <a:ea typeface="Aptos" pitchFamily="34" charset="-122"/>
-                <a:cs typeface="Aptos" pitchFamily="34" charset="-120"/>
-              </a:rPr>
-              <a:t>Each proposal has different benefits and risks.</a:t>
+                  <a:srgbClr val="003A63"/>
+                </a:solidFill>
+                <a:latin typeface="Aptos" pitchFamily="34" charset="0"/>
+                <a:ea typeface="Aptos" pitchFamily="34" charset="-122"/>
+                <a:cs typeface="Aptos" pitchFamily="34" charset="-120"/>
+              </a:rPr>
+              <a:t>• Each proposal has different benefits and risks.</a:t>
             </a:r>
             <a:endParaRPr lang="en-US" sz="2100" dirty="0"/>
           </a:p>
           <a:p>
+            <a:pPr indent="0" marL="0">
+              <a:buNone/>
+            </a:pPr>
             <a:r>
               <a:rPr lang="en-US" sz="2100" dirty="0">
                 <a:solidFill>
-                  <a:srgbClr val="17364A"/>
-                </a:solidFill>
-                <a:latin typeface="Aptos" pitchFamily="34" charset="0"/>
-                <a:ea typeface="Aptos" pitchFamily="34" charset="-122"/>
-                <a:cs typeface="Aptos" pitchFamily="34" charset="-120"/>
-              </a:rPr>
-              <a:t>A public chatbot may be visible but high-risk if it gives health advice.</a:t>
+                  <a:srgbClr val="003A63"/>
+                </a:solidFill>
+                <a:latin typeface="Aptos" pitchFamily="34" charset="0"/>
+                <a:ea typeface="Aptos" pitchFamily="34" charset="-122"/>
+                <a:cs typeface="Aptos" pitchFamily="34" charset="-120"/>
+              </a:rPr>
+              <a:t>• A public chatbot may be visible but high-risk if it gives health advice.</a:t>
             </a:r>
             <a:endParaRPr lang="en-US" sz="2100" dirty="0"/>
           </a:p>
@@ -15993,17 +16262,17 @@
         </p:nvSpPr>
         <p:spPr>
           <a:xfrm>
-            <a:off x="7799832" y="1828800"/>
-            <a:ext cx="3145536" cy="685800"/>
-          </a:xfrm>
-          <a:prstGeom prst="rect">
-            <a:avLst/>
-          </a:prstGeom>
-          <a:noFill/>
-          <a:ln/>
-        </p:spPr>
-        <p:txBody>
-          <a:bodyPr wrap="square" lIns="0" tIns="0" rIns="0" bIns="0" rtlCol="0" anchor="t">
+            <a:off x="7799832" y="1801368"/>
+            <a:ext cx="3145536" cy="758952"/>
+          </a:xfrm>
+          <a:prstGeom prst="rect">
+            <a:avLst/>
+          </a:prstGeom>
+          <a:noFill/>
+          <a:ln/>
+        </p:spPr>
+        <p:txBody>
+          <a:bodyPr wrap="square" lIns="254" tIns="254" rIns="254" bIns="254" rtlCol="0" anchor="t">
             <a:normAutofit/>
           </a:bodyPr>
           <a:lstStyle/>
@@ -16012,7 +16281,7 @@
               <a:buNone/>
             </a:pPr>
             <a:r>
-              <a:rPr lang="en-US" sz="1550" dirty="0">
+              <a:rPr lang="en-US" sz="1320" dirty="0">
                 <a:solidFill>
                   <a:srgbClr val="17364A"/>
                 </a:solidFill>
@@ -16022,7 +16291,7 @@
               </a:rPr>
               <a:t>A health department receives proposals for five AI uses: a public chatbot, a staff policy assistant, an.</a:t>
             </a:r>
-            <a:endParaRPr lang="en-US" sz="1550" dirty="0"/>
+            <a:endParaRPr lang="en-US" sz="1320" dirty="0"/>
           </a:p>
         </p:txBody>
       </p:sp>
@@ -16110,13 +16379,16 @@
           <a:ln/>
         </p:spPr>
         <p:txBody>
-          <a:bodyPr wrap="square" lIns="254" tIns="254" rIns="254" bIns="254" rtlCol="0" anchor="t">
+          <a:bodyPr wrap="square" lIns="508" tIns="508" rIns="508" bIns="508" rtlCol="0" anchor="t">
             <a:normAutofit/>
           </a:bodyPr>
           <a:lstStyle/>
           <a:p>
-            <a:r>
-              <a:rPr lang="en-US" sz="1380" dirty="0">
+            <a:pPr indent="0" marL="0">
+              <a:buNone/>
+            </a:pPr>
+            <a:r>
+              <a:rPr lang="en-US" sz="1220" dirty="0">
                 <a:solidFill>
                   <a:srgbClr val="17364A"/>
                 </a:solidFill>
@@ -16124,13 +16396,16 @@
                 <a:ea typeface="Aptos" pitchFamily="34" charset="-122"/>
                 <a:cs typeface="Aptos" pitchFamily="34" charset="-120"/>
               </a:rPr>
-              <a:t>A health department receives proposals for five AI uses: a public chatbot, a staff policy.</a:t>
-            </a:r>
-            <a:endParaRPr lang="en-US" sz="1380" dirty="0"/>
-          </a:p>
-          <a:p>
-            <a:r>
-              <a:rPr lang="en-US" sz="1380" dirty="0">
+              <a:t>A health department receives proposals for five AI uses: a public.</a:t>
+            </a:r>
+            <a:endParaRPr lang="en-US" sz="1220" dirty="0"/>
+          </a:p>
+          <a:p>
+            <a:pPr indent="0" marL="0">
+              <a:buNone/>
+            </a:pPr>
+            <a:r>
+              <a:rPr lang="en-US" sz="1220" dirty="0">
                 <a:solidFill>
                   <a:srgbClr val="17364A"/>
                 </a:solidFill>
@@ -16138,13 +16413,16 @@
                 <a:ea typeface="Aptos" pitchFamily="34" charset="-122"/>
                 <a:cs typeface="Aptos" pitchFamily="34" charset="-120"/>
               </a:rPr>
-              <a:t>A staff policy assistant may be lower risk if it uses approved internal documents.</a:t>
-            </a:r>
-            <a:endParaRPr lang="en-US" sz="1380" dirty="0"/>
-          </a:p>
-          <a:p>
-            <a:r>
-              <a:rPr lang="en-US" sz="1380" dirty="0">
+              <a:t>A staff policy assistant may be lower risk if it uses approved.</a:t>
+            </a:r>
+            <a:endParaRPr lang="en-US" sz="1220" dirty="0"/>
+          </a:p>
+          <a:p>
+            <a:pPr indent="0" marL="0">
+              <a:buNone/>
+            </a:pPr>
+            <a:r>
+              <a:rPr lang="en-US" sz="1220" dirty="0">
                 <a:solidFill>
                   <a:srgbClr val="17364A"/>
                 </a:solidFill>
@@ -16152,9 +16430,9 @@
                 <a:ea typeface="Aptos" pitchFamily="34" charset="-122"/>
                 <a:cs typeface="Aptos" pitchFamily="34" charset="-120"/>
               </a:rPr>
-              <a:t>An outbreak model may be valuable but require strong data quality and validation.</a:t>
-            </a:r>
-            <a:endParaRPr lang="en-US" sz="1380" dirty="0"/>
+              <a:t>An outbreak model may be valuable but require strong data quality.</a:t>
+            </a:r>
+            <a:endParaRPr lang="en-US" sz="1220" dirty="0"/>
           </a:p>
         </p:txBody>
       </p:sp>
@@ -16232,17 +16510,17 @@
         </p:nvSpPr>
         <p:spPr>
           <a:xfrm>
-            <a:off x="7799832" y="5001768"/>
-            <a:ext cx="3145536" cy="502920"/>
-          </a:xfrm>
-          <a:prstGeom prst="rect">
-            <a:avLst/>
-          </a:prstGeom>
-          <a:noFill/>
-          <a:ln/>
-        </p:spPr>
-        <p:txBody>
-          <a:bodyPr wrap="square" lIns="0" tIns="0" rIns="0" bIns="0" rtlCol="0" anchor="t">
+            <a:off x="7799832" y="4974336"/>
+            <a:ext cx="3145536" cy="576072"/>
+          </a:xfrm>
+          <a:prstGeom prst="rect">
+            <a:avLst/>
+          </a:prstGeom>
+          <a:noFill/>
+          <a:ln/>
+        </p:spPr>
+        <p:txBody>
+          <a:bodyPr wrap="square" lIns="254" tIns="254" rIns="254" bIns="254" rtlCol="0" anchor="t">
             <a:normAutofit/>
           </a:bodyPr>
           <a:lstStyle/>
@@ -16251,7 +16529,7 @@
               <a:buNone/>
             </a:pPr>
             <a:r>
-              <a:rPr lang="en-US" sz="1550" dirty="0">
+              <a:rPr lang="en-US" sz="1320" dirty="0">
                 <a:solidFill>
                   <a:srgbClr val="17364A"/>
                 </a:solidFill>
@@ -16259,9 +16537,9 @@
                 <a:ea typeface="Aptos" pitchFamily="34" charset="-122"/>
                 <a:cs typeface="Aptos" pitchFamily="34" charset="-120"/>
               </a:rPr>
-              <a:t>Connect the concept to public health purpose, responsible use, required safeguards, documentation, and the next action a department should take.</a:t>
-            </a:r>
-            <a:endParaRPr lang="en-US" sz="1550" dirty="0"/>
+              <a:t>Connect the concept to public health purpose, responsible use, required safeguards, documentation, and the next action a.</a:t>
+            </a:r>
+            <a:endParaRPr lang="en-US" sz="1320" dirty="0"/>
           </a:p>
         </p:txBody>
       </p:sp>

--- a/downloads/presentations/modules/exe-410.pptx
+++ b/downloads/presentations/modules/exe-410.pptx
@@ -3319,11 +3319,11 @@
         <p:spPr>
           <a:xfrm>
             <a:off x="7635240" y="1325880"/>
-            <a:ext cx="3474720" cy="1325880"/>
+            <a:ext cx="3474720" cy="1207008"/>
           </a:xfrm>
           <a:prstGeom prst="roundRect">
             <a:avLst>
-              <a:gd name="adj" fmla="val 8276"/>
+              <a:gd name="adj" fmla="val 9091"/>
             </a:avLst>
           </a:prstGeom>
           <a:solidFill>
@@ -3385,7 +3385,7 @@
         <p:spPr>
           <a:xfrm>
             <a:off x="7799832" y="1801368"/>
-            <a:ext cx="3145536" cy="758952"/>
+            <a:ext cx="3145536" cy="640080"/>
           </a:xfrm>
           <a:prstGeom prst="rect">
             <a:avLst/>
@@ -3425,12 +3425,12 @@
         </p:nvSpPr>
         <p:spPr>
           <a:xfrm>
-            <a:off x="7635240" y="2788920"/>
-            <a:ext cx="3474720" cy="1536192"/>
+            <a:off x="7635240" y="2670048"/>
+            <a:ext cx="3474720" cy="1377086"/>
           </a:xfrm>
           <a:prstGeom prst="roundRect">
             <a:avLst>
-              <a:gd name="adj" fmla="val 7143"/>
+              <a:gd name="adj" fmla="val 7968"/>
             </a:avLst>
           </a:prstGeom>
           <a:solidFill>
@@ -3452,8 +3452,8 @@
         </p:nvSpPr>
         <p:spPr>
           <a:xfrm>
-            <a:off x="7799832" y="2935224"/>
-            <a:ext cx="3145536" cy="256032"/>
+            <a:off x="7799832" y="2798064"/>
+            <a:ext cx="3145536" cy="237744"/>
           </a:xfrm>
           <a:prstGeom prst="rect">
             <a:avLst/>
@@ -3469,7 +3469,7 @@
               <a:buNone/>
             </a:pPr>
             <a:r>
-              <a:rPr lang="en-US" sz="1300" b="1" dirty="0">
+              <a:rPr lang="en-US" sz="1250" b="1" dirty="0">
                 <a:solidFill>
                   <a:srgbClr val="0068B7"/>
                 </a:solidFill>
@@ -3477,101 +3477,317 @@
                 <a:ea typeface="Aptos" pitchFamily="34" charset="-122"/>
                 <a:cs typeface="Aptos" pitchFamily="34" charset="-120"/>
               </a:rPr>
-              <a:t>Concept checkpoints</a:t>
-            </a:r>
-            <a:endParaRPr lang="en-US" sz="1300" dirty="0"/>
-          </a:p>
-        </p:txBody>
-      </p:sp>
-      <p:sp>
-        <p:nvSpPr>
-          <p:cNvPr id="15" name="Text 13"/>
-          <p:cNvSpPr/>
-          <p:nvPr/>
-        </p:nvSpPr>
-        <p:spPr>
-          <a:xfrm>
-            <a:off x="7818120" y="3300984"/>
-            <a:ext cx="3090672" cy="877824"/>
-          </a:xfrm>
-          <a:prstGeom prst="rect">
-            <a:avLst/>
-          </a:prstGeom>
-          <a:noFill/>
-          <a:ln/>
-        </p:spPr>
-        <p:txBody>
-          <a:bodyPr wrap="square" lIns="508" tIns="508" rIns="508" bIns="508" rtlCol="0" anchor="t">
+              <a:t>Governance pathway</a:t>
+            </a:r>
+            <a:endParaRPr lang="en-US" sz="1250" dirty="0"/>
+          </a:p>
+        </p:txBody>
+      </p:sp>
+      <p:sp>
+        <p:nvSpPr>
+          <p:cNvPr id="15" name="Shape 13"/>
+          <p:cNvSpPr/>
+          <p:nvPr/>
+        </p:nvSpPr>
+        <p:spPr>
+          <a:xfrm>
+            <a:off x="8763000" y="3351276"/>
+            <a:ext cx="164592" cy="0"/>
+          </a:xfrm>
+          <a:prstGeom prst="line">
+            <a:avLst/>
+          </a:prstGeom>
+          <a:noFill/>
+          <a:ln w="15240">
+            <a:solidFill>
+              <a:srgbClr val="8ABBD8"/>
+            </a:solidFill>
+            <a:prstDash val="solid"/>
+          </a:ln>
+        </p:spPr>
+      </p:sp>
+      <p:sp>
+        <p:nvSpPr>
+          <p:cNvPr id="16" name="Shape 14"/>
+          <p:cNvSpPr/>
+          <p:nvPr/>
+        </p:nvSpPr>
+        <p:spPr>
+          <a:xfrm>
+            <a:off x="7872984" y="3200400"/>
+            <a:ext cx="890016" cy="301752"/>
+          </a:xfrm>
+          <a:prstGeom prst="roundRect">
+            <a:avLst>
+              <a:gd name="adj" fmla="val 24242"/>
+            </a:avLst>
+          </a:prstGeom>
+          <a:solidFill>
+            <a:srgbClr val="0068B7"/>
+          </a:solidFill>
+          <a:ln w="12700">
+            <a:solidFill>
+              <a:srgbClr val="0068B7"/>
+            </a:solidFill>
+            <a:prstDash val="solid"/>
+          </a:ln>
+        </p:spPr>
+      </p:sp>
+      <p:sp>
+        <p:nvSpPr>
+          <p:cNvPr id="17" name="Text 15"/>
+          <p:cNvSpPr/>
+          <p:nvPr/>
+        </p:nvSpPr>
+        <p:spPr>
+          <a:xfrm>
+            <a:off x="7909560" y="3273552"/>
+            <a:ext cx="816864" cy="146304"/>
+          </a:xfrm>
+          <a:prstGeom prst="rect">
+            <a:avLst/>
+          </a:prstGeom>
+          <a:noFill/>
+          <a:ln/>
+        </p:spPr>
+        <p:txBody>
+          <a:bodyPr wrap="square" lIns="0" tIns="0" rIns="0" bIns="0" rtlCol="0" anchor="ctr">
             <a:normAutofit/>
           </a:bodyPr>
           <a:lstStyle/>
           <a:p>
-            <a:pPr indent="0" marL="0">
-              <a:buNone/>
-            </a:pPr>
-            <a:r>
-              <a:rPr lang="en-US" sz="1220" dirty="0">
-                <a:solidFill>
-                  <a:srgbClr val="17364A"/>
-                </a:solidFill>
-                <a:latin typeface="Aptos" pitchFamily="34" charset="0"/>
-                <a:ea typeface="Aptos" pitchFamily="34" charset="-122"/>
-                <a:cs typeface="Aptos" pitchFamily="34" charset="-120"/>
-              </a:rPr>
-              <a:t>Agencies can classify AI opportunities by function, such as.</a:t>
-            </a:r>
-            <a:endParaRPr lang="en-US" sz="1220" dirty="0"/>
-          </a:p>
-          <a:p>
-            <a:pPr indent="0" marL="0">
-              <a:buNone/>
-            </a:pPr>
-            <a:r>
-              <a:rPr lang="en-US" sz="1220" dirty="0">
-                <a:solidFill>
-                  <a:srgbClr val="17364A"/>
-                </a:solidFill>
-                <a:latin typeface="Aptos" pitchFamily="34" charset="0"/>
-                <a:ea typeface="Aptos" pitchFamily="34" charset="-122"/>
-                <a:cs typeface="Aptos" pitchFamily="34" charset="-120"/>
-              </a:rPr>
-              <a:t>These categories help leadership understand where AI activity is.</a:t>
-            </a:r>
-            <a:endParaRPr lang="en-US" sz="1220" dirty="0"/>
-          </a:p>
-          <a:p>
-            <a:pPr indent="0" marL="0">
-              <a:buNone/>
-            </a:pPr>
-            <a:r>
-              <a:rPr lang="en-US" sz="1220" dirty="0">
-                <a:solidFill>
-                  <a:srgbClr val="17364A"/>
-                </a:solidFill>
-                <a:latin typeface="Aptos" pitchFamily="34" charset="0"/>
-                <a:ea typeface="Aptos" pitchFamily="34" charset="-122"/>
-                <a:cs typeface="Aptos" pitchFamily="34" charset="-120"/>
-              </a:rPr>
-              <a:t>Prioritization criteria should include mission alignment, expected.</a:t>
-            </a:r>
-            <a:endParaRPr lang="en-US" sz="1220" dirty="0"/>
-          </a:p>
-        </p:txBody>
-      </p:sp>
-      <p:sp>
-        <p:nvSpPr>
-          <p:cNvPr id="16" name="Shape 14"/>
-          <p:cNvSpPr/>
-          <p:nvPr/>
-        </p:nvSpPr>
-        <p:spPr>
-          <a:xfrm>
-            <a:off x="7635240" y="4498848"/>
-            <a:ext cx="3474720" cy="1143000"/>
+            <a:pPr algn="ctr" indent="0" marL="0">
+              <a:buNone/>
+            </a:pPr>
+            <a:r>
+              <a:rPr lang="en-US" sz="880" b="1" dirty="0">
+                <a:solidFill>
+                  <a:srgbClr val="FFFFFF"/>
+                </a:solidFill>
+                <a:latin typeface="Aptos" pitchFamily="34" charset="0"/>
+                <a:ea typeface="Aptos" pitchFamily="34" charset="-122"/>
+                <a:cs typeface="Aptos" pitchFamily="34" charset="-120"/>
+              </a:rPr>
+              <a:t>Submit</a:t>
+            </a:r>
+            <a:endParaRPr lang="en-US" sz="880" dirty="0"/>
+          </a:p>
+        </p:txBody>
+      </p:sp>
+      <p:sp>
+        <p:nvSpPr>
+          <p:cNvPr id="18" name="Shape 16"/>
+          <p:cNvSpPr/>
+          <p:nvPr/>
+        </p:nvSpPr>
+        <p:spPr>
+          <a:xfrm>
+            <a:off x="9817608" y="3351276"/>
+            <a:ext cx="164592" cy="0"/>
+          </a:xfrm>
+          <a:prstGeom prst="line">
+            <a:avLst/>
+          </a:prstGeom>
+          <a:noFill/>
+          <a:ln w="15240">
+            <a:solidFill>
+              <a:srgbClr val="8ABBD8"/>
+            </a:solidFill>
+            <a:prstDash val="solid"/>
+          </a:ln>
+        </p:spPr>
+      </p:sp>
+      <p:sp>
+        <p:nvSpPr>
+          <p:cNvPr id="19" name="Shape 17"/>
+          <p:cNvSpPr/>
+          <p:nvPr/>
+        </p:nvSpPr>
+        <p:spPr>
+          <a:xfrm>
+            <a:off x="8927592" y="3200400"/>
+            <a:ext cx="890016" cy="301752"/>
           </a:xfrm>
           <a:prstGeom prst="roundRect">
             <a:avLst>
-              <a:gd name="adj" fmla="val 9600"/>
+              <a:gd name="adj" fmla="val 24242"/>
+            </a:avLst>
+          </a:prstGeom>
+          <a:solidFill>
+            <a:srgbClr val="2F8A28"/>
+          </a:solidFill>
+          <a:ln w="12700">
+            <a:solidFill>
+              <a:srgbClr val="2F8A28"/>
+            </a:solidFill>
+            <a:prstDash val="solid"/>
+          </a:ln>
+        </p:spPr>
+      </p:sp>
+      <p:sp>
+        <p:nvSpPr>
+          <p:cNvPr id="20" name="Text 18"/>
+          <p:cNvSpPr/>
+          <p:nvPr/>
+        </p:nvSpPr>
+        <p:spPr>
+          <a:xfrm>
+            <a:off x="8964168" y="3273552"/>
+            <a:ext cx="816864" cy="146304"/>
+          </a:xfrm>
+          <a:prstGeom prst="rect">
+            <a:avLst/>
+          </a:prstGeom>
+          <a:noFill/>
+          <a:ln/>
+        </p:spPr>
+        <p:txBody>
+          <a:bodyPr wrap="square" lIns="0" tIns="0" rIns="0" bIns="0" rtlCol="0" anchor="ctr">
+            <a:normAutofit/>
+          </a:bodyPr>
+          <a:lstStyle/>
+          <a:p>
+            <a:pPr algn="ctr" indent="0" marL="0">
+              <a:buNone/>
+            </a:pPr>
+            <a:r>
+              <a:rPr lang="en-US" sz="880" b="1" dirty="0">
+                <a:solidFill>
+                  <a:srgbClr val="FFFFFF"/>
+                </a:solidFill>
+                <a:latin typeface="Aptos" pitchFamily="34" charset="0"/>
+                <a:ea typeface="Aptos" pitchFamily="34" charset="-122"/>
+                <a:cs typeface="Aptos" pitchFamily="34" charset="-120"/>
+              </a:rPr>
+              <a:t>Review</a:t>
+            </a:r>
+            <a:endParaRPr lang="en-US" sz="880" dirty="0"/>
+          </a:p>
+        </p:txBody>
+      </p:sp>
+      <p:sp>
+        <p:nvSpPr>
+          <p:cNvPr id="21" name="Shape 19"/>
+          <p:cNvSpPr/>
+          <p:nvPr/>
+        </p:nvSpPr>
+        <p:spPr>
+          <a:xfrm>
+            <a:off x="9982200" y="3200400"/>
+            <a:ext cx="890016" cy="301752"/>
+          </a:xfrm>
+          <a:prstGeom prst="roundRect">
+            <a:avLst>
+              <a:gd name="adj" fmla="val 24242"/>
+            </a:avLst>
+          </a:prstGeom>
+          <a:solidFill>
+            <a:srgbClr val="6A4CA3"/>
+          </a:solidFill>
+          <a:ln w="12700">
+            <a:solidFill>
+              <a:srgbClr val="6A4CA3"/>
+            </a:solidFill>
+            <a:prstDash val="solid"/>
+          </a:ln>
+        </p:spPr>
+      </p:sp>
+      <p:sp>
+        <p:nvSpPr>
+          <p:cNvPr id="22" name="Text 20"/>
+          <p:cNvSpPr/>
+          <p:nvPr/>
+        </p:nvSpPr>
+        <p:spPr>
+          <a:xfrm>
+            <a:off x="10018776" y="3273552"/>
+            <a:ext cx="816864" cy="146304"/>
+          </a:xfrm>
+          <a:prstGeom prst="rect">
+            <a:avLst/>
+          </a:prstGeom>
+          <a:noFill/>
+          <a:ln/>
+        </p:spPr>
+        <p:txBody>
+          <a:bodyPr wrap="square" lIns="0" tIns="0" rIns="0" bIns="0" rtlCol="0" anchor="ctr">
+            <a:normAutofit/>
+          </a:bodyPr>
+          <a:lstStyle/>
+          <a:p>
+            <a:pPr algn="ctr" indent="0" marL="0">
+              <a:buNone/>
+            </a:pPr>
+            <a:r>
+              <a:rPr lang="en-US" sz="880" b="1" dirty="0">
+                <a:solidFill>
+                  <a:srgbClr val="FFFFFF"/>
+                </a:solidFill>
+                <a:latin typeface="Aptos" pitchFamily="34" charset="0"/>
+                <a:ea typeface="Aptos" pitchFamily="34" charset="-122"/>
+                <a:cs typeface="Aptos" pitchFamily="34" charset="-120"/>
+              </a:rPr>
+              <a:t>Oversee</a:t>
+            </a:r>
+            <a:endParaRPr lang="en-US" sz="880" dirty="0"/>
+          </a:p>
+        </p:txBody>
+      </p:sp>
+      <p:sp>
+        <p:nvSpPr>
+          <p:cNvPr id="23" name="Text 21"/>
+          <p:cNvSpPr/>
+          <p:nvPr/>
+        </p:nvSpPr>
+        <p:spPr>
+          <a:xfrm>
+            <a:off x="7854696" y="3694176"/>
+            <a:ext cx="3035808" cy="206654"/>
+          </a:xfrm>
+          <a:prstGeom prst="rect">
+            <a:avLst/>
+          </a:prstGeom>
+          <a:noFill/>
+          <a:ln/>
+        </p:spPr>
+        <p:txBody>
+          <a:bodyPr wrap="square" lIns="254" tIns="254" rIns="254" bIns="254" rtlCol="0" anchor="t">
+            <a:normAutofit/>
+          </a:bodyPr>
+          <a:lstStyle/>
+          <a:p>
+            <a:pPr indent="0" marL="0">
+              <a:buNone/>
+            </a:pPr>
+            <a:r>
+              <a:rPr lang="en-US" sz="1120" dirty="0">
+                <a:solidFill>
+                  <a:srgbClr val="17364A"/>
+                </a:solidFill>
+                <a:latin typeface="Aptos" pitchFamily="34" charset="0"/>
+                <a:ea typeface="Aptos" pitchFamily="34" charset="-122"/>
+                <a:cs typeface="Aptos" pitchFamily="34" charset="-120"/>
+              </a:rPr>
+              <a:t>A proposed AI use should move through documented review before it becomes an operational workflow.</a:t>
+            </a:r>
+            <a:endParaRPr lang="en-US" sz="1120" dirty="0"/>
+          </a:p>
+        </p:txBody>
+      </p:sp>
+      <p:sp>
+        <p:nvSpPr>
+          <p:cNvPr id="24" name="Shape 22"/>
+          <p:cNvSpPr/>
+          <p:nvPr/>
+        </p:nvSpPr>
+        <p:spPr>
+          <a:xfrm>
+            <a:off x="7635240" y="4184294"/>
+            <a:ext cx="3474720" cy="1466698"/>
+          </a:xfrm>
+          <a:prstGeom prst="roundRect">
+            <a:avLst>
+              <a:gd name="adj" fmla="val 7481"/>
             </a:avLst>
           </a:prstGeom>
           <a:solidFill>
@@ -3587,13 +3803,13 @@
       </p:sp>
       <p:sp>
         <p:nvSpPr>
-          <p:cNvPr id="17" name="Text 15"/>
-          <p:cNvSpPr/>
-          <p:nvPr/>
-        </p:nvSpPr>
-        <p:spPr>
-          <a:xfrm>
-            <a:off x="7799832" y="4645152"/>
+          <p:cNvPr id="25" name="Text 23"/>
+          <p:cNvSpPr/>
+          <p:nvPr/>
+        </p:nvSpPr>
+        <p:spPr>
+          <a:xfrm>
+            <a:off x="7799832" y="4330598"/>
             <a:ext cx="3145536" cy="256032"/>
           </a:xfrm>
           <a:prstGeom prst="rect">
@@ -3626,14 +3842,14 @@
       </p:sp>
       <p:sp>
         <p:nvSpPr>
-          <p:cNvPr id="18" name="Text 16"/>
-          <p:cNvSpPr/>
-          <p:nvPr/>
-        </p:nvSpPr>
-        <p:spPr>
-          <a:xfrm>
-            <a:off x="7799832" y="4974336"/>
-            <a:ext cx="3145536" cy="576072"/>
+          <p:cNvPr id="26" name="Text 24"/>
+          <p:cNvSpPr/>
+          <p:nvPr/>
+        </p:nvSpPr>
+        <p:spPr>
+          <a:xfrm>
+            <a:off x="7799832" y="4659782"/>
+            <a:ext cx="3145536" cy="899770"/>
           </a:xfrm>
           <a:prstGeom prst="rect">
             <a:avLst/>
@@ -3659,7 +3875,7 @@
                 <a:ea typeface="Aptos" pitchFamily="34" charset="-122"/>
                 <a:cs typeface="Aptos" pitchFamily="34" charset="-120"/>
               </a:rPr>
-              <a:t>Translate this concept into clear decision rights, review steps, documentation expectations, and escalation paths before.</a:t>
+              <a:t>Translate this concept into clear decision rights, review steps, documentation expectations, and escalation paths before an AI-supported workflow is approved.</a:t>
             </a:r>
             <a:endParaRPr lang="en-US" sz="1320" dirty="0"/>
           </a:p>
@@ -4028,11 +4244,11 @@
         <p:spPr>
           <a:xfrm>
             <a:off x="7635240" y="1325880"/>
-            <a:ext cx="3474720" cy="1325880"/>
+            <a:ext cx="3474720" cy="1207008"/>
           </a:xfrm>
           <a:prstGeom prst="roundRect">
             <a:avLst>
-              <a:gd name="adj" fmla="val 8276"/>
+              <a:gd name="adj" fmla="val 9091"/>
             </a:avLst>
           </a:prstGeom>
           <a:solidFill>
@@ -4094,7 +4310,7 @@
         <p:spPr>
           <a:xfrm>
             <a:off x="7799832" y="1801368"/>
-            <a:ext cx="3145536" cy="758952"/>
+            <a:ext cx="3145536" cy="640080"/>
           </a:xfrm>
           <a:prstGeom prst="rect">
             <a:avLst/>
@@ -4134,7 +4350,7 @@
         </p:nvSpPr>
         <p:spPr>
           <a:xfrm>
-            <a:off x="7635240" y="2788920"/>
+            <a:off x="7635240" y="2670048"/>
             <a:ext cx="3474720" cy="1536192"/>
           </a:xfrm>
           <a:prstGeom prst="roundRect">
@@ -4161,8 +4377,8 @@
         </p:nvSpPr>
         <p:spPr>
           <a:xfrm>
-            <a:off x="7799832" y="2935224"/>
-            <a:ext cx="3145536" cy="256032"/>
+            <a:off x="7799832" y="2798064"/>
+            <a:ext cx="3145536" cy="237744"/>
           </a:xfrm>
           <a:prstGeom prst="rect">
             <a:avLst/>
@@ -4178,7 +4394,7 @@
               <a:buNone/>
             </a:pPr>
             <a:r>
-              <a:rPr lang="en-US" sz="1300" b="1" dirty="0">
+              <a:rPr lang="en-US" sz="1250" b="1" dirty="0">
                 <a:solidFill>
                   <a:srgbClr val="0068B7"/>
                 </a:solidFill>
@@ -4186,101 +4402,317 @@
                 <a:ea typeface="Aptos" pitchFamily="34" charset="-122"/>
                 <a:cs typeface="Aptos" pitchFamily="34" charset="-120"/>
               </a:rPr>
-              <a:t>Concept checkpoints</a:t>
-            </a:r>
-            <a:endParaRPr lang="en-US" sz="1300" dirty="0"/>
-          </a:p>
-        </p:txBody>
-      </p:sp>
-      <p:sp>
-        <p:nvSpPr>
-          <p:cNvPr id="15" name="Text 13"/>
-          <p:cNvSpPr/>
-          <p:nvPr/>
-        </p:nvSpPr>
-        <p:spPr>
-          <a:xfrm>
-            <a:off x="7818120" y="3300984"/>
-            <a:ext cx="3090672" cy="877824"/>
-          </a:xfrm>
-          <a:prstGeom prst="rect">
-            <a:avLst/>
-          </a:prstGeom>
-          <a:noFill/>
-          <a:ln/>
-        </p:spPr>
-        <p:txBody>
-          <a:bodyPr wrap="square" lIns="508" tIns="508" rIns="508" bIns="508" rtlCol="0" anchor="t">
+              <a:t>Risk control loop</a:t>
+            </a:r>
+            <a:endParaRPr lang="en-US" sz="1250" dirty="0"/>
+          </a:p>
+        </p:txBody>
+      </p:sp>
+      <p:sp>
+        <p:nvSpPr>
+          <p:cNvPr id="15" name="Shape 13"/>
+          <p:cNvSpPr/>
+          <p:nvPr/>
+        </p:nvSpPr>
+        <p:spPr>
+          <a:xfrm>
+            <a:off x="8763000" y="3351276"/>
+            <a:ext cx="164592" cy="0"/>
+          </a:xfrm>
+          <a:prstGeom prst="line">
+            <a:avLst/>
+          </a:prstGeom>
+          <a:noFill/>
+          <a:ln w="15240">
+            <a:solidFill>
+              <a:srgbClr val="8ABBD8"/>
+            </a:solidFill>
+            <a:prstDash val="solid"/>
+          </a:ln>
+        </p:spPr>
+      </p:sp>
+      <p:sp>
+        <p:nvSpPr>
+          <p:cNvPr id="16" name="Shape 14"/>
+          <p:cNvSpPr/>
+          <p:nvPr/>
+        </p:nvSpPr>
+        <p:spPr>
+          <a:xfrm>
+            <a:off x="7872984" y="3200400"/>
+            <a:ext cx="890016" cy="301752"/>
+          </a:xfrm>
+          <a:prstGeom prst="roundRect">
+            <a:avLst>
+              <a:gd name="adj" fmla="val 24242"/>
+            </a:avLst>
+          </a:prstGeom>
+          <a:solidFill>
+            <a:srgbClr val="0068B7"/>
+          </a:solidFill>
+          <a:ln w="12700">
+            <a:solidFill>
+              <a:srgbClr val="0068B7"/>
+            </a:solidFill>
+            <a:prstDash val="solid"/>
+          </a:ln>
+        </p:spPr>
+      </p:sp>
+      <p:sp>
+        <p:nvSpPr>
+          <p:cNvPr id="17" name="Text 15"/>
+          <p:cNvSpPr/>
+          <p:nvPr/>
+        </p:nvSpPr>
+        <p:spPr>
+          <a:xfrm>
+            <a:off x="7909560" y="3273552"/>
+            <a:ext cx="816864" cy="146304"/>
+          </a:xfrm>
+          <a:prstGeom prst="rect">
+            <a:avLst/>
+          </a:prstGeom>
+          <a:noFill/>
+          <a:ln/>
+        </p:spPr>
+        <p:txBody>
+          <a:bodyPr wrap="square" lIns="0" tIns="0" rIns="0" bIns="0" rtlCol="0" anchor="ctr">
             <a:normAutofit/>
           </a:bodyPr>
           <a:lstStyle/>
           <a:p>
-            <a:pPr indent="0" marL="0">
-              <a:buNone/>
-            </a:pPr>
-            <a:r>
-              <a:rPr lang="en-US" sz="1220" dirty="0">
-                <a:solidFill>
-                  <a:srgbClr val="17364A"/>
-                </a:solidFill>
-                <a:latin typeface="Aptos" pitchFamily="34" charset="0"/>
-                <a:ea typeface="Aptos" pitchFamily="34" charset="-122"/>
-                <a:cs typeface="Aptos" pitchFamily="34" charset="-120"/>
-              </a:rPr>
-              <a:t>A guardrail is to require every pilot to define success criteria,.</a:t>
-            </a:r>
-            <a:endParaRPr lang="en-US" sz="1220" dirty="0"/>
-          </a:p>
-          <a:p>
-            <a:pPr indent="0" marL="0">
-              <a:buNone/>
-            </a:pPr>
-            <a:r>
-              <a:rPr lang="en-US" sz="1220" dirty="0">
-                <a:solidFill>
-                  <a:srgbClr val="17364A"/>
-                </a:solidFill>
-                <a:latin typeface="Aptos" pitchFamily="34" charset="0"/>
-                <a:ea typeface="Aptos" pitchFamily="34" charset="-122"/>
-                <a:cs typeface="Aptos" pitchFamily="34" charset="-120"/>
-              </a:rPr>
-              <a:t>Another risk is inequitable prioritization.</a:t>
-            </a:r>
-            <a:endParaRPr lang="en-US" sz="1220" dirty="0"/>
-          </a:p>
-          <a:p>
-            <a:pPr indent="0" marL="0">
-              <a:buNone/>
-            </a:pPr>
-            <a:r>
-              <a:rPr lang="en-US" sz="1220" dirty="0">
-                <a:solidFill>
-                  <a:srgbClr val="17364A"/>
-                </a:solidFill>
-                <a:latin typeface="Aptos" pitchFamily="34" charset="0"/>
-                <a:ea typeface="Aptos" pitchFamily="34" charset="-122"/>
-                <a:cs typeface="Aptos" pitchFamily="34" charset="-120"/>
-              </a:rPr>
-              <a:t>Projects serving better-resourced programs may advance faster than.</a:t>
-            </a:r>
-            <a:endParaRPr lang="en-US" sz="1220" dirty="0"/>
-          </a:p>
-        </p:txBody>
-      </p:sp>
-      <p:sp>
-        <p:nvSpPr>
-          <p:cNvPr id="16" name="Shape 14"/>
-          <p:cNvSpPr/>
-          <p:nvPr/>
-        </p:nvSpPr>
-        <p:spPr>
-          <a:xfrm>
-            <a:off x="7635240" y="4498848"/>
-            <a:ext cx="3474720" cy="1143000"/>
+            <a:pPr algn="ctr" indent="0" marL="0">
+              <a:buNone/>
+            </a:pPr>
+            <a:r>
+              <a:rPr lang="en-US" sz="880" b="1" dirty="0">
+                <a:solidFill>
+                  <a:srgbClr val="FFFFFF"/>
+                </a:solidFill>
+                <a:latin typeface="Aptos" pitchFamily="34" charset="0"/>
+                <a:ea typeface="Aptos" pitchFamily="34" charset="-122"/>
+                <a:cs typeface="Aptos" pitchFamily="34" charset="-120"/>
+              </a:rPr>
+              <a:t>Identify</a:t>
+            </a:r>
+            <a:endParaRPr lang="en-US" sz="880" dirty="0"/>
+          </a:p>
+        </p:txBody>
+      </p:sp>
+      <p:sp>
+        <p:nvSpPr>
+          <p:cNvPr id="18" name="Shape 16"/>
+          <p:cNvSpPr/>
+          <p:nvPr/>
+        </p:nvSpPr>
+        <p:spPr>
+          <a:xfrm>
+            <a:off x="9817608" y="3351276"/>
+            <a:ext cx="164592" cy="0"/>
+          </a:xfrm>
+          <a:prstGeom prst="line">
+            <a:avLst/>
+          </a:prstGeom>
+          <a:noFill/>
+          <a:ln w="15240">
+            <a:solidFill>
+              <a:srgbClr val="8ABBD8"/>
+            </a:solidFill>
+            <a:prstDash val="solid"/>
+          </a:ln>
+        </p:spPr>
+      </p:sp>
+      <p:sp>
+        <p:nvSpPr>
+          <p:cNvPr id="19" name="Shape 17"/>
+          <p:cNvSpPr/>
+          <p:nvPr/>
+        </p:nvSpPr>
+        <p:spPr>
+          <a:xfrm>
+            <a:off x="8927592" y="3200400"/>
+            <a:ext cx="890016" cy="301752"/>
           </a:xfrm>
           <a:prstGeom prst="roundRect">
             <a:avLst>
-              <a:gd name="adj" fmla="val 9600"/>
+              <a:gd name="adj" fmla="val 24242"/>
+            </a:avLst>
+          </a:prstGeom>
+          <a:solidFill>
+            <a:srgbClr val="2F8A28"/>
+          </a:solidFill>
+          <a:ln w="12700">
+            <a:solidFill>
+              <a:srgbClr val="2F8A28"/>
+            </a:solidFill>
+            <a:prstDash val="solid"/>
+          </a:ln>
+        </p:spPr>
+      </p:sp>
+      <p:sp>
+        <p:nvSpPr>
+          <p:cNvPr id="20" name="Text 18"/>
+          <p:cNvSpPr/>
+          <p:nvPr/>
+        </p:nvSpPr>
+        <p:spPr>
+          <a:xfrm>
+            <a:off x="8964168" y="3273552"/>
+            <a:ext cx="816864" cy="146304"/>
+          </a:xfrm>
+          <a:prstGeom prst="rect">
+            <a:avLst/>
+          </a:prstGeom>
+          <a:noFill/>
+          <a:ln/>
+        </p:spPr>
+        <p:txBody>
+          <a:bodyPr wrap="square" lIns="0" tIns="0" rIns="0" bIns="0" rtlCol="0" anchor="ctr">
+            <a:normAutofit/>
+          </a:bodyPr>
+          <a:lstStyle/>
+          <a:p>
+            <a:pPr algn="ctr" indent="0" marL="0">
+              <a:buNone/>
+            </a:pPr>
+            <a:r>
+              <a:rPr lang="en-US" sz="880" b="1" dirty="0">
+                <a:solidFill>
+                  <a:srgbClr val="FFFFFF"/>
+                </a:solidFill>
+                <a:latin typeface="Aptos" pitchFamily="34" charset="0"/>
+                <a:ea typeface="Aptos" pitchFamily="34" charset="-122"/>
+                <a:cs typeface="Aptos" pitchFamily="34" charset="-120"/>
+              </a:rPr>
+              <a:t>Control</a:t>
+            </a:r>
+            <a:endParaRPr lang="en-US" sz="880" dirty="0"/>
+          </a:p>
+        </p:txBody>
+      </p:sp>
+      <p:sp>
+        <p:nvSpPr>
+          <p:cNvPr id="21" name="Shape 19"/>
+          <p:cNvSpPr/>
+          <p:nvPr/>
+        </p:nvSpPr>
+        <p:spPr>
+          <a:xfrm>
+            <a:off x="9982200" y="3200400"/>
+            <a:ext cx="890016" cy="301752"/>
+          </a:xfrm>
+          <a:prstGeom prst="roundRect">
+            <a:avLst>
+              <a:gd name="adj" fmla="val 24242"/>
+            </a:avLst>
+          </a:prstGeom>
+          <a:solidFill>
+            <a:srgbClr val="6A4CA3"/>
+          </a:solidFill>
+          <a:ln w="12700">
+            <a:solidFill>
+              <a:srgbClr val="6A4CA3"/>
+            </a:solidFill>
+            <a:prstDash val="solid"/>
+          </a:ln>
+        </p:spPr>
+      </p:sp>
+      <p:sp>
+        <p:nvSpPr>
+          <p:cNvPr id="22" name="Text 20"/>
+          <p:cNvSpPr/>
+          <p:nvPr/>
+        </p:nvSpPr>
+        <p:spPr>
+          <a:xfrm>
+            <a:off x="10018776" y="3273552"/>
+            <a:ext cx="816864" cy="146304"/>
+          </a:xfrm>
+          <a:prstGeom prst="rect">
+            <a:avLst/>
+          </a:prstGeom>
+          <a:noFill/>
+          <a:ln/>
+        </p:spPr>
+        <p:txBody>
+          <a:bodyPr wrap="square" lIns="0" tIns="0" rIns="0" bIns="0" rtlCol="0" anchor="ctr">
+            <a:normAutofit/>
+          </a:bodyPr>
+          <a:lstStyle/>
+          <a:p>
+            <a:pPr algn="ctr" indent="0" marL="0">
+              <a:buNone/>
+            </a:pPr>
+            <a:r>
+              <a:rPr lang="en-US" sz="880" b="1" dirty="0">
+                <a:solidFill>
+                  <a:srgbClr val="FFFFFF"/>
+                </a:solidFill>
+                <a:latin typeface="Aptos" pitchFamily="34" charset="0"/>
+                <a:ea typeface="Aptos" pitchFamily="34" charset="-122"/>
+                <a:cs typeface="Aptos" pitchFamily="34" charset="-120"/>
+              </a:rPr>
+              <a:t>Monitor</a:t>
+            </a:r>
+            <a:endParaRPr lang="en-US" sz="880" dirty="0"/>
+          </a:p>
+        </p:txBody>
+      </p:sp>
+      <p:sp>
+        <p:nvSpPr>
+          <p:cNvPr id="23" name="Text 21"/>
+          <p:cNvSpPr/>
+          <p:nvPr/>
+        </p:nvSpPr>
+        <p:spPr>
+          <a:xfrm>
+            <a:off x="7854696" y="3694176"/>
+            <a:ext cx="3035808" cy="365760"/>
+          </a:xfrm>
+          <a:prstGeom prst="rect">
+            <a:avLst/>
+          </a:prstGeom>
+          <a:noFill/>
+          <a:ln/>
+        </p:spPr>
+        <p:txBody>
+          <a:bodyPr wrap="square" lIns="254" tIns="254" rIns="254" bIns="254" rtlCol="0" anchor="t">
+            <a:normAutofit/>
+          </a:bodyPr>
+          <a:lstStyle/>
+          <a:p>
+            <a:pPr indent="0" marL="0">
+              <a:buNone/>
+            </a:pPr>
+            <a:r>
+              <a:rPr lang="en-US" sz="1120" dirty="0">
+                <a:solidFill>
+                  <a:srgbClr val="17364A"/>
+                </a:solidFill>
+                <a:latin typeface="Aptos" pitchFamily="34" charset="0"/>
+                <a:ea typeface="Aptos" pitchFamily="34" charset="-122"/>
+                <a:cs typeface="Aptos" pitchFamily="34" charset="-120"/>
+              </a:rPr>
+              <a:t>Responsible use depends on finding risks early, applying safeguards, and watching for drift or harm over time.</a:t>
+            </a:r>
+            <a:endParaRPr lang="en-US" sz="1120" dirty="0"/>
+          </a:p>
+        </p:txBody>
+      </p:sp>
+      <p:sp>
+        <p:nvSpPr>
+          <p:cNvPr id="24" name="Shape 22"/>
+          <p:cNvSpPr/>
+          <p:nvPr/>
+        </p:nvSpPr>
+        <p:spPr>
+          <a:xfrm>
+            <a:off x="7635240" y="4343400"/>
+            <a:ext cx="3474720" cy="1255471"/>
+          </a:xfrm>
+          <a:prstGeom prst="roundRect">
+            <a:avLst>
+              <a:gd name="adj" fmla="val 8740"/>
             </a:avLst>
           </a:prstGeom>
           <a:solidFill>
@@ -4296,13 +4728,13 @@
       </p:sp>
       <p:sp>
         <p:nvSpPr>
-          <p:cNvPr id="17" name="Text 15"/>
-          <p:cNvSpPr/>
-          <p:nvPr/>
-        </p:nvSpPr>
-        <p:spPr>
-          <a:xfrm>
-            <a:off x="7799832" y="4645152"/>
+          <p:cNvPr id="25" name="Text 23"/>
+          <p:cNvSpPr/>
+          <p:nvPr/>
+        </p:nvSpPr>
+        <p:spPr>
+          <a:xfrm>
+            <a:off x="7799832" y="4489704"/>
             <a:ext cx="3145536" cy="256032"/>
           </a:xfrm>
           <a:prstGeom prst="rect">
@@ -4335,14 +4767,14 @@
       </p:sp>
       <p:sp>
         <p:nvSpPr>
-          <p:cNvPr id="18" name="Text 16"/>
-          <p:cNvSpPr/>
-          <p:nvPr/>
-        </p:nvSpPr>
-        <p:spPr>
-          <a:xfrm>
-            <a:off x="7799832" y="4974336"/>
-            <a:ext cx="3145536" cy="576072"/>
+          <p:cNvPr id="26" name="Text 24"/>
+          <p:cNvSpPr/>
+          <p:nvPr/>
+        </p:nvSpPr>
+        <p:spPr>
+          <a:xfrm>
+            <a:off x="7799832" y="4818888"/>
+            <a:ext cx="3145536" cy="688543"/>
           </a:xfrm>
           <a:prstGeom prst="rect">
             <a:avLst/>
@@ -4368,7 +4800,7 @@
                 <a:ea typeface="Aptos" pitchFamily="34" charset="-122"/>
                 <a:cs typeface="Aptos" pitchFamily="34" charset="-120"/>
               </a:rPr>
-              <a:t>Identify what could go wrong, who could be affected, what safeguards are needed, and what evidence should be reviewed.</a:t>
+              <a:t>Identify what could go wrong, who could be affected, what safeguards are needed, and what evidence should be reviewed before use.</a:t>
             </a:r>
             <a:endParaRPr lang="en-US" sz="1320" dirty="0"/>
           </a:p>
@@ -4737,11 +5169,11 @@
         <p:spPr>
           <a:xfrm>
             <a:off x="7635240" y="1325880"/>
-            <a:ext cx="3474720" cy="1325880"/>
+            <a:ext cx="3474720" cy="1255471"/>
           </a:xfrm>
           <a:prstGeom prst="roundRect">
             <a:avLst>
-              <a:gd name="adj" fmla="val 8276"/>
+              <a:gd name="adj" fmla="val 8740"/>
             </a:avLst>
           </a:prstGeom>
           <a:solidFill>
@@ -4803,7 +5235,7 @@
         <p:spPr>
           <a:xfrm>
             <a:off x="7799832" y="1801368"/>
-            <a:ext cx="3145536" cy="758952"/>
+            <a:ext cx="3145536" cy="688543"/>
           </a:xfrm>
           <a:prstGeom prst="rect">
             <a:avLst/>
@@ -4843,12 +5275,12 @@
         </p:nvSpPr>
         <p:spPr>
           <a:xfrm>
-            <a:off x="7635240" y="2788920"/>
-            <a:ext cx="3474720" cy="1536192"/>
+            <a:off x="7635240" y="2718511"/>
+            <a:ext cx="3474720" cy="1328623"/>
           </a:xfrm>
           <a:prstGeom prst="roundRect">
             <a:avLst>
-              <a:gd name="adj" fmla="val 7143"/>
+              <a:gd name="adj" fmla="val 8259"/>
             </a:avLst>
           </a:prstGeom>
           <a:solidFill>
@@ -4870,7 +5302,7 @@
         </p:nvSpPr>
         <p:spPr>
           <a:xfrm>
-            <a:off x="7799832" y="2935224"/>
+            <a:off x="7799832" y="2864815"/>
             <a:ext cx="3145536" cy="256032"/>
           </a:xfrm>
           <a:prstGeom prst="rect">
@@ -4909,8 +5341,8 @@
         </p:nvSpPr>
         <p:spPr>
           <a:xfrm>
-            <a:off x="7818120" y="3300984"/>
-            <a:ext cx="3090672" cy="877824"/>
+            <a:off x="7818120" y="3230575"/>
+            <a:ext cx="3090672" cy="670255"/>
           </a:xfrm>
           <a:prstGeom prst="rect">
             <a:avLst/>
@@ -4967,12 +5399,12 @@
         </p:nvSpPr>
         <p:spPr>
           <a:xfrm>
-            <a:off x="7635240" y="4498848"/>
-            <a:ext cx="3474720" cy="1143000"/>
+            <a:off x="7635240" y="4184294"/>
+            <a:ext cx="3474720" cy="1466698"/>
           </a:xfrm>
           <a:prstGeom prst="roundRect">
             <a:avLst>
-              <a:gd name="adj" fmla="val 9600"/>
+              <a:gd name="adj" fmla="val 7481"/>
             </a:avLst>
           </a:prstGeom>
           <a:solidFill>
@@ -4994,7 +5426,7 @@
         </p:nvSpPr>
         <p:spPr>
           <a:xfrm>
-            <a:off x="7799832" y="4645152"/>
+            <a:off x="7799832" y="4330598"/>
             <a:ext cx="3145536" cy="256032"/>
           </a:xfrm>
           <a:prstGeom prst="rect">
@@ -5033,8 +5465,8 @@
         </p:nvSpPr>
         <p:spPr>
           <a:xfrm>
-            <a:off x="7799832" y="4974336"/>
-            <a:ext cx="3145536" cy="576072"/>
+            <a:off x="7799832" y="4659782"/>
+            <a:ext cx="3145536" cy="899770"/>
           </a:xfrm>
           <a:prstGeom prst="rect">
             <a:avLst/>
@@ -5060,7 +5492,7 @@
                 <a:ea typeface="Aptos" pitchFamily="34" charset="-122"/>
                 <a:cs typeface="Aptos" pitchFamily="34" charset="-120"/>
               </a:rPr>
-              <a:t>Use the concept to clarify workflow changes, dependencies, staffing, procurement requirements, training needs, and.</a:t>
+              <a:t>Use the concept to clarify workflow changes, dependencies, staffing, procurement requirements, training needs, and implementation checkpoints.</a:t>
             </a:r>
             <a:endParaRPr lang="en-US" sz="1320" dirty="0"/>
           </a:p>
@@ -5429,11 +5861,11 @@
         <p:spPr>
           <a:xfrm>
             <a:off x="7635240" y="1325880"/>
-            <a:ext cx="3474720" cy="1325880"/>
+            <a:ext cx="3474720" cy="1255471"/>
           </a:xfrm>
           <a:prstGeom prst="roundRect">
             <a:avLst>
-              <a:gd name="adj" fmla="val 8276"/>
+              <a:gd name="adj" fmla="val 8740"/>
             </a:avLst>
           </a:prstGeom>
           <a:solidFill>
@@ -5495,7 +5927,7 @@
         <p:spPr>
           <a:xfrm>
             <a:off x="7799832" y="1801368"/>
-            <a:ext cx="3145536" cy="758952"/>
+            <a:ext cx="3145536" cy="688543"/>
           </a:xfrm>
           <a:prstGeom prst="rect">
             <a:avLst/>
@@ -5535,12 +5967,12 @@
         </p:nvSpPr>
         <p:spPr>
           <a:xfrm>
-            <a:off x="7635240" y="2788920"/>
-            <a:ext cx="3474720" cy="1536192"/>
+            <a:off x="7635240" y="2718511"/>
+            <a:ext cx="3474720" cy="1328623"/>
           </a:xfrm>
           <a:prstGeom prst="roundRect">
             <a:avLst>
-              <a:gd name="adj" fmla="val 7143"/>
+              <a:gd name="adj" fmla="val 8259"/>
             </a:avLst>
           </a:prstGeom>
           <a:solidFill>
@@ -5562,7 +5994,7 @@
         </p:nvSpPr>
         <p:spPr>
           <a:xfrm>
-            <a:off x="7799832" y="2935224"/>
+            <a:off x="7799832" y="2864815"/>
             <a:ext cx="3145536" cy="256032"/>
           </a:xfrm>
           <a:prstGeom prst="rect">
@@ -5601,8 +6033,8 @@
         </p:nvSpPr>
         <p:spPr>
           <a:xfrm>
-            <a:off x="7818120" y="3300984"/>
-            <a:ext cx="3090672" cy="877824"/>
+            <a:off x="7818120" y="3230575"/>
+            <a:ext cx="3090672" cy="670255"/>
           </a:xfrm>
           <a:prstGeom prst="rect">
             <a:avLst/>
@@ -5676,12 +6108,12 @@
         </p:nvSpPr>
         <p:spPr>
           <a:xfrm>
-            <a:off x="7635240" y="4498848"/>
-            <a:ext cx="3474720" cy="1143000"/>
+            <a:off x="7635240" y="4184294"/>
+            <a:ext cx="3474720" cy="1466698"/>
           </a:xfrm>
           <a:prstGeom prst="roundRect">
             <a:avLst>
-              <a:gd name="adj" fmla="val 9600"/>
+              <a:gd name="adj" fmla="val 7481"/>
             </a:avLst>
           </a:prstGeom>
           <a:solidFill>
@@ -5703,7 +6135,7 @@
         </p:nvSpPr>
         <p:spPr>
           <a:xfrm>
-            <a:off x="7799832" y="4645152"/>
+            <a:off x="7799832" y="4330598"/>
             <a:ext cx="3145536" cy="256032"/>
           </a:xfrm>
           <a:prstGeom prst="rect">
@@ -5742,8 +6174,8 @@
         </p:nvSpPr>
         <p:spPr>
           <a:xfrm>
-            <a:off x="7799832" y="4974336"/>
-            <a:ext cx="3145536" cy="576072"/>
+            <a:off x="7799832" y="4659782"/>
+            <a:ext cx="3145536" cy="899770"/>
           </a:xfrm>
           <a:prstGeom prst="rect">
             <a:avLst/>
@@ -5769,7 +6201,7 @@
                 <a:ea typeface="Aptos" pitchFamily="34" charset="-122"/>
                 <a:cs typeface="Aptos" pitchFamily="34" charset="-120"/>
               </a:rPr>
-              <a:t>Connect the concept to public health purpose, responsible use, required safeguards, documentation, and the next action a.</a:t>
+              <a:t>Connect the concept to public health purpose, responsible use, required safeguards, documentation, and the next action a department should take.</a:t>
             </a:r>
             <a:endParaRPr lang="en-US" sz="1320" dirty="0"/>
           </a:p>
@@ -6121,11 +6553,11 @@
         <p:spPr>
           <a:xfrm>
             <a:off x="7635240" y="1325880"/>
-            <a:ext cx="3474720" cy="1325880"/>
+            <a:ext cx="3474720" cy="1207008"/>
           </a:xfrm>
           <a:prstGeom prst="roundRect">
             <a:avLst>
-              <a:gd name="adj" fmla="val 8276"/>
+              <a:gd name="adj" fmla="val 9091"/>
             </a:avLst>
           </a:prstGeom>
           <a:solidFill>
@@ -6187,7 +6619,7 @@
         <p:spPr>
           <a:xfrm>
             <a:off x="7799832" y="1801368"/>
-            <a:ext cx="3145536" cy="758952"/>
+            <a:ext cx="3145536" cy="640080"/>
           </a:xfrm>
           <a:prstGeom prst="rect">
             <a:avLst/>
@@ -6213,7 +6645,7 @@
                 <a:ea typeface="Aptos" pitchFamily="34" charset="-122"/>
                 <a:cs typeface="Aptos" pitchFamily="34" charset="-120"/>
               </a:rPr>
-              <a:t>Which staff, partners, or communities would be affected if this issue were handled poorly?</a:t>
+              <a:t>Which staff, partners, or communities would be affected if this issue were handled.</a:t>
             </a:r>
             <a:endParaRPr lang="en-US" sz="1320" dirty="0"/>
           </a:p>
@@ -6227,12 +6659,12 @@
         </p:nvSpPr>
         <p:spPr>
           <a:xfrm>
-            <a:off x="7635240" y="2788920"/>
-            <a:ext cx="3474720" cy="1536192"/>
+            <a:off x="7635240" y="2670048"/>
+            <a:ext cx="3474720" cy="1377086"/>
           </a:xfrm>
           <a:prstGeom prst="roundRect">
             <a:avLst>
-              <a:gd name="adj" fmla="val 7143"/>
+              <a:gd name="adj" fmla="val 7968"/>
             </a:avLst>
           </a:prstGeom>
           <a:solidFill>
@@ -6254,7 +6686,7 @@
         </p:nvSpPr>
         <p:spPr>
           <a:xfrm>
-            <a:off x="7799832" y="2935224"/>
+            <a:off x="7799832" y="2816352"/>
             <a:ext cx="3145536" cy="256032"/>
           </a:xfrm>
           <a:prstGeom prst="rect">
@@ -6293,8 +6725,8 @@
         </p:nvSpPr>
         <p:spPr>
           <a:xfrm>
-            <a:off x="7818120" y="3300984"/>
-            <a:ext cx="3090672" cy="877824"/>
+            <a:off x="7818120" y="3182112"/>
+            <a:ext cx="3090672" cy="718718"/>
           </a:xfrm>
           <a:prstGeom prst="rect">
             <a:avLst/>
@@ -6351,12 +6783,12 @@
         </p:nvSpPr>
         <p:spPr>
           <a:xfrm>
-            <a:off x="7635240" y="4498848"/>
-            <a:ext cx="3474720" cy="1143000"/>
+            <a:off x="7635240" y="4184294"/>
+            <a:ext cx="3474720" cy="1466698"/>
           </a:xfrm>
           <a:prstGeom prst="roundRect">
             <a:avLst>
-              <a:gd name="adj" fmla="val 9600"/>
+              <a:gd name="adj" fmla="val 7481"/>
             </a:avLst>
           </a:prstGeom>
           <a:solidFill>
@@ -6378,7 +6810,7 @@
         </p:nvSpPr>
         <p:spPr>
           <a:xfrm>
-            <a:off x="7799832" y="4645152"/>
+            <a:off x="7799832" y="4330598"/>
             <a:ext cx="3145536" cy="256032"/>
           </a:xfrm>
           <a:prstGeom prst="rect">
@@ -6417,8 +6849,8 @@
         </p:nvSpPr>
         <p:spPr>
           <a:xfrm>
-            <a:off x="7799832" y="4974336"/>
-            <a:ext cx="3145536" cy="576072"/>
+            <a:off x="7799832" y="4659782"/>
+            <a:ext cx="3145536" cy="899770"/>
           </a:xfrm>
           <a:prstGeom prst="rect">
             <a:avLst/>
@@ -6444,7 +6876,7 @@
                 <a:ea typeface="Aptos" pitchFamily="34" charset="-122"/>
                 <a:cs typeface="Aptos" pitchFamily="34" charset="-120"/>
               </a:rPr>
-              <a:t>Connect the concept to public health purpose, responsible use, required safeguards, documentation, and the next action a.</a:t>
+              <a:t>Connect the concept to public health purpose, responsible use, required safeguards, documentation, and the next action a department should take.</a:t>
             </a:r>
             <a:endParaRPr lang="en-US" sz="1320" dirty="0"/>
           </a:p>
@@ -6779,11 +7211,11 @@
         <p:spPr>
           <a:xfrm>
             <a:off x="7635240" y="1325880"/>
-            <a:ext cx="3474720" cy="1325880"/>
+            <a:ext cx="3474720" cy="1255471"/>
           </a:xfrm>
           <a:prstGeom prst="roundRect">
             <a:avLst>
-              <a:gd name="adj" fmla="val 8276"/>
+              <a:gd name="adj" fmla="val 8740"/>
             </a:avLst>
           </a:prstGeom>
           <a:solidFill>
@@ -6845,7 +7277,7 @@
         <p:spPr>
           <a:xfrm>
             <a:off x="7799832" y="1801368"/>
-            <a:ext cx="3145536" cy="758952"/>
+            <a:ext cx="3145536" cy="688543"/>
           </a:xfrm>
           <a:prstGeom prst="rect">
             <a:avLst/>
@@ -6885,12 +7317,12 @@
         </p:nvSpPr>
         <p:spPr>
           <a:xfrm>
-            <a:off x="7635240" y="2788920"/>
-            <a:ext cx="3474720" cy="1536192"/>
+            <a:off x="7635240" y="2718511"/>
+            <a:ext cx="3474720" cy="1328623"/>
           </a:xfrm>
           <a:prstGeom prst="roundRect">
             <a:avLst>
-              <a:gd name="adj" fmla="val 7143"/>
+              <a:gd name="adj" fmla="val 8259"/>
             </a:avLst>
           </a:prstGeom>
           <a:solidFill>
@@ -6912,7 +7344,7 @@
         </p:nvSpPr>
         <p:spPr>
           <a:xfrm>
-            <a:off x="7799832" y="2935224"/>
+            <a:off x="7799832" y="2864815"/>
             <a:ext cx="3145536" cy="256032"/>
           </a:xfrm>
           <a:prstGeom prst="rect">
@@ -6951,8 +7383,8 @@
         </p:nvSpPr>
         <p:spPr>
           <a:xfrm>
-            <a:off x="7818120" y="3300984"/>
-            <a:ext cx="3090672" cy="877824"/>
+            <a:off x="7818120" y="3230575"/>
+            <a:ext cx="3090672" cy="670255"/>
           </a:xfrm>
           <a:prstGeom prst="rect">
             <a:avLst/>
@@ -6992,12 +7424,12 @@
         </p:nvSpPr>
         <p:spPr>
           <a:xfrm>
-            <a:off x="7635240" y="4498848"/>
-            <a:ext cx="3474720" cy="1143000"/>
+            <a:off x="7635240" y="4184294"/>
+            <a:ext cx="3474720" cy="1466698"/>
           </a:xfrm>
           <a:prstGeom prst="roundRect">
             <a:avLst>
-              <a:gd name="adj" fmla="val 9600"/>
+              <a:gd name="adj" fmla="val 7481"/>
             </a:avLst>
           </a:prstGeom>
           <a:solidFill>
@@ -7019,7 +7451,7 @@
         </p:nvSpPr>
         <p:spPr>
           <a:xfrm>
-            <a:off x="7799832" y="4645152"/>
+            <a:off x="7799832" y="4330598"/>
             <a:ext cx="3145536" cy="256032"/>
           </a:xfrm>
           <a:prstGeom prst="rect">
@@ -7058,8 +7490,8 @@
         </p:nvSpPr>
         <p:spPr>
           <a:xfrm>
-            <a:off x="7799832" y="4974336"/>
-            <a:ext cx="3145536" cy="576072"/>
+            <a:off x="7799832" y="4659782"/>
+            <a:ext cx="3145536" cy="899770"/>
           </a:xfrm>
           <a:prstGeom prst="rect">
             <a:avLst/>
@@ -7085,7 +7517,7 @@
                 <a:ea typeface="Aptos" pitchFamily="34" charset="-122"/>
                 <a:cs typeface="Aptos" pitchFamily="34" charset="-120"/>
               </a:rPr>
-              <a:t>Use the assignment to test whether you can explain the concept, apply it to a realistic public health situation, and.</a:t>
+              <a:t>Use the assignment to test whether you can explain the concept, apply it to a realistic public health situation, and identify what would need review before the work moves forward.</a:t>
             </a:r>
             <a:endParaRPr lang="en-US" sz="1320" dirty="0"/>
           </a:p>
@@ -7454,11 +7886,11 @@
         <p:spPr>
           <a:xfrm>
             <a:off x="7635240" y="1325880"/>
-            <a:ext cx="3474720" cy="1325880"/>
+            <a:ext cx="3474720" cy="1207008"/>
           </a:xfrm>
           <a:prstGeom prst="roundRect">
             <a:avLst>
-              <a:gd name="adj" fmla="val 8276"/>
+              <a:gd name="adj" fmla="val 9091"/>
             </a:avLst>
           </a:prstGeom>
           <a:solidFill>
@@ -7520,7 +7952,7 @@
         <p:spPr>
           <a:xfrm>
             <a:off x="7799832" y="1801368"/>
-            <a:ext cx="3145536" cy="758952"/>
+            <a:ext cx="3145536" cy="640080"/>
           </a:xfrm>
           <a:prstGeom prst="rect">
             <a:avLst/>
@@ -7560,12 +7992,12 @@
         </p:nvSpPr>
         <p:spPr>
           <a:xfrm>
-            <a:off x="7635240" y="2788920"/>
-            <a:ext cx="3474720" cy="1536192"/>
+            <a:off x="7635240" y="2670048"/>
+            <a:ext cx="3474720" cy="1377086"/>
           </a:xfrm>
           <a:prstGeom prst="roundRect">
             <a:avLst>
-              <a:gd name="adj" fmla="val 7143"/>
+              <a:gd name="adj" fmla="val 7968"/>
             </a:avLst>
           </a:prstGeom>
           <a:solidFill>
@@ -7587,7 +8019,7 @@
         </p:nvSpPr>
         <p:spPr>
           <a:xfrm>
-            <a:off x="7799832" y="2935224"/>
+            <a:off x="7799832" y="2816352"/>
             <a:ext cx="3145536" cy="256032"/>
           </a:xfrm>
           <a:prstGeom prst="rect">
@@ -7626,8 +8058,8 @@
         </p:nvSpPr>
         <p:spPr>
           <a:xfrm>
-            <a:off x="7818120" y="3300984"/>
-            <a:ext cx="3090672" cy="877824"/>
+            <a:off x="7818120" y="3182112"/>
+            <a:ext cx="3090672" cy="718718"/>
           </a:xfrm>
           <a:prstGeom prst="rect">
             <a:avLst/>
@@ -7684,12 +8116,12 @@
         </p:nvSpPr>
         <p:spPr>
           <a:xfrm>
-            <a:off x="7635240" y="4498848"/>
-            <a:ext cx="3474720" cy="1143000"/>
+            <a:off x="7635240" y="4184294"/>
+            <a:ext cx="3474720" cy="1466698"/>
           </a:xfrm>
           <a:prstGeom prst="roundRect">
             <a:avLst>
-              <a:gd name="adj" fmla="val 9600"/>
+              <a:gd name="adj" fmla="val 7481"/>
             </a:avLst>
           </a:prstGeom>
           <a:solidFill>
@@ -7711,7 +8143,7 @@
         </p:nvSpPr>
         <p:spPr>
           <a:xfrm>
-            <a:off x="7799832" y="4645152"/>
+            <a:off x="7799832" y="4330598"/>
             <a:ext cx="3145536" cy="256032"/>
           </a:xfrm>
           <a:prstGeom prst="rect">
@@ -7750,8 +8182,8 @@
         </p:nvSpPr>
         <p:spPr>
           <a:xfrm>
-            <a:off x="7799832" y="4974336"/>
-            <a:ext cx="3145536" cy="576072"/>
+            <a:off x="7799832" y="4659782"/>
+            <a:ext cx="3145536" cy="899770"/>
           </a:xfrm>
           <a:prstGeom prst="rect">
             <a:avLst/>
@@ -7777,7 +8209,7 @@
                 <a:ea typeface="Aptos" pitchFamily="34" charset="-122"/>
                 <a:cs typeface="Aptos" pitchFamily="34" charset="-120"/>
               </a:rPr>
-              <a:t>Connect the concept to public health purpose, responsible use, required safeguards, documentation, and the next action a.</a:t>
+              <a:t>Connect the concept to public health purpose, responsible use, required safeguards, documentation, and the next action a department should take.</a:t>
             </a:r>
             <a:endParaRPr lang="en-US" sz="1320" dirty="0"/>
           </a:p>
@@ -8112,11 +8544,11 @@
         <p:spPr>
           <a:xfrm>
             <a:off x="7635240" y="1325880"/>
-            <a:ext cx="3474720" cy="1325880"/>
+            <a:ext cx="3474720" cy="1255471"/>
           </a:xfrm>
           <a:prstGeom prst="roundRect">
             <a:avLst>
-              <a:gd name="adj" fmla="val 8276"/>
+              <a:gd name="adj" fmla="val 8740"/>
             </a:avLst>
           </a:prstGeom>
           <a:solidFill>
@@ -8178,7 +8610,7 @@
         <p:spPr>
           <a:xfrm>
             <a:off x="7799832" y="1801368"/>
-            <a:ext cx="3145536" cy="758952"/>
+            <a:ext cx="3145536" cy="688543"/>
           </a:xfrm>
           <a:prstGeom prst="rect">
             <a:avLst/>
@@ -8218,12 +8650,12 @@
         </p:nvSpPr>
         <p:spPr>
           <a:xfrm>
-            <a:off x="7635240" y="2788920"/>
-            <a:ext cx="3474720" cy="1536192"/>
+            <a:off x="7635240" y="2718511"/>
+            <a:ext cx="3474720" cy="1328623"/>
           </a:xfrm>
           <a:prstGeom prst="roundRect">
             <a:avLst>
-              <a:gd name="adj" fmla="val 7143"/>
+              <a:gd name="adj" fmla="val 8259"/>
             </a:avLst>
           </a:prstGeom>
           <a:solidFill>
@@ -8245,7 +8677,7 @@
         </p:nvSpPr>
         <p:spPr>
           <a:xfrm>
-            <a:off x="7799832" y="2935224"/>
+            <a:off x="7799832" y="2864815"/>
             <a:ext cx="3145536" cy="256032"/>
           </a:xfrm>
           <a:prstGeom prst="rect">
@@ -8284,8 +8716,8 @@
         </p:nvSpPr>
         <p:spPr>
           <a:xfrm>
-            <a:off x="7818120" y="3300984"/>
-            <a:ext cx="3090672" cy="877824"/>
+            <a:off x="7818120" y="3230575"/>
+            <a:ext cx="3090672" cy="670255"/>
           </a:xfrm>
           <a:prstGeom prst="rect">
             <a:avLst/>
@@ -8325,12 +8757,12 @@
         </p:nvSpPr>
         <p:spPr>
           <a:xfrm>
-            <a:off x="7635240" y="4498848"/>
-            <a:ext cx="3474720" cy="1143000"/>
+            <a:off x="7635240" y="4184294"/>
+            <a:ext cx="3474720" cy="1466698"/>
           </a:xfrm>
           <a:prstGeom prst="roundRect">
             <a:avLst>
-              <a:gd name="adj" fmla="val 9600"/>
+              <a:gd name="adj" fmla="val 7481"/>
             </a:avLst>
           </a:prstGeom>
           <a:solidFill>
@@ -8352,7 +8784,7 @@
         </p:nvSpPr>
         <p:spPr>
           <a:xfrm>
-            <a:off x="7799832" y="4645152"/>
+            <a:off x="7799832" y="4330598"/>
             <a:ext cx="3145536" cy="256032"/>
           </a:xfrm>
           <a:prstGeom prst="rect">
@@ -8391,8 +8823,8 @@
         </p:nvSpPr>
         <p:spPr>
           <a:xfrm>
-            <a:off x="7799832" y="4974336"/>
-            <a:ext cx="3145536" cy="576072"/>
+            <a:off x="7799832" y="4659782"/>
+            <a:ext cx="3145536" cy="899770"/>
           </a:xfrm>
           <a:prstGeom prst="rect">
             <a:avLst/>
@@ -8418,7 +8850,7 @@
                 <a:ea typeface="Aptos" pitchFamily="34" charset="-122"/>
                 <a:cs typeface="Aptos" pitchFamily="34" charset="-120"/>
               </a:rPr>
-              <a:t>Connect the concept to public health purpose, responsible use, required safeguards, documentation, and the next action a.</a:t>
+              <a:t>Connect the concept to public health purpose, responsible use, required safeguards, documentation, and the next action a department should take.</a:t>
             </a:r>
             <a:endParaRPr lang="en-US" sz="1320" dirty="0"/>
           </a:p>
@@ -8753,11 +9185,11 @@
         <p:spPr>
           <a:xfrm>
             <a:off x="7635240" y="1325880"/>
-            <a:ext cx="3474720" cy="1325880"/>
+            <a:ext cx="3474720" cy="1255471"/>
           </a:xfrm>
           <a:prstGeom prst="roundRect">
             <a:avLst>
-              <a:gd name="adj" fmla="val 8276"/>
+              <a:gd name="adj" fmla="val 8740"/>
             </a:avLst>
           </a:prstGeom>
           <a:solidFill>
@@ -8819,7 +9251,7 @@
         <p:spPr>
           <a:xfrm>
             <a:off x="7799832" y="1801368"/>
-            <a:ext cx="3145536" cy="758952"/>
+            <a:ext cx="3145536" cy="688543"/>
           </a:xfrm>
           <a:prstGeom prst="rect">
             <a:avLst/>
@@ -8859,12 +9291,12 @@
         </p:nvSpPr>
         <p:spPr>
           <a:xfrm>
-            <a:off x="7635240" y="2788920"/>
-            <a:ext cx="3474720" cy="1536192"/>
+            <a:off x="7635240" y="2718511"/>
+            <a:ext cx="3474720" cy="1328623"/>
           </a:xfrm>
           <a:prstGeom prst="roundRect">
             <a:avLst>
-              <a:gd name="adj" fmla="val 7143"/>
+              <a:gd name="adj" fmla="val 8259"/>
             </a:avLst>
           </a:prstGeom>
           <a:solidFill>
@@ -8886,7 +9318,7 @@
         </p:nvSpPr>
         <p:spPr>
           <a:xfrm>
-            <a:off x="7799832" y="2935224"/>
+            <a:off x="7799832" y="2864815"/>
             <a:ext cx="3145536" cy="256032"/>
           </a:xfrm>
           <a:prstGeom prst="rect">
@@ -8925,8 +9357,8 @@
         </p:nvSpPr>
         <p:spPr>
           <a:xfrm>
-            <a:off x="7818120" y="3300984"/>
-            <a:ext cx="3090672" cy="877824"/>
+            <a:off x="7818120" y="3230575"/>
+            <a:ext cx="3090672" cy="670255"/>
           </a:xfrm>
           <a:prstGeom prst="rect">
             <a:avLst/>
@@ -8966,12 +9398,12 @@
         </p:nvSpPr>
         <p:spPr>
           <a:xfrm>
-            <a:off x="7635240" y="4498848"/>
-            <a:ext cx="3474720" cy="1143000"/>
+            <a:off x="7635240" y="4184294"/>
+            <a:ext cx="3474720" cy="1466698"/>
           </a:xfrm>
           <a:prstGeom prst="roundRect">
             <a:avLst>
-              <a:gd name="adj" fmla="val 9600"/>
+              <a:gd name="adj" fmla="val 7481"/>
             </a:avLst>
           </a:prstGeom>
           <a:solidFill>
@@ -8993,7 +9425,7 @@
         </p:nvSpPr>
         <p:spPr>
           <a:xfrm>
-            <a:off x="7799832" y="4645152"/>
+            <a:off x="7799832" y="4330598"/>
             <a:ext cx="3145536" cy="256032"/>
           </a:xfrm>
           <a:prstGeom prst="rect">
@@ -9032,8 +9464,8 @@
         </p:nvSpPr>
         <p:spPr>
           <a:xfrm>
-            <a:off x="7799832" y="4974336"/>
-            <a:ext cx="3145536" cy="576072"/>
+            <a:off x="7799832" y="4659782"/>
+            <a:ext cx="3145536" cy="899770"/>
           </a:xfrm>
           <a:prstGeom prst="rect">
             <a:avLst/>
@@ -9059,7 +9491,7 @@
                 <a:ea typeface="Aptos" pitchFamily="34" charset="-122"/>
                 <a:cs typeface="Aptos" pitchFamily="34" charset="-120"/>
               </a:rPr>
-              <a:t>Use the assignment to test whether you can explain the concept, apply it to a realistic public health situation, and.</a:t>
+              <a:t>Use the assignment to test whether you can explain the concept, apply it to a realistic public health situation, and identify what would need review before the work moves forward.</a:t>
             </a:r>
             <a:endParaRPr lang="en-US" sz="1320" dirty="0"/>
           </a:p>
@@ -9428,11 +9860,11 @@
         <p:spPr>
           <a:xfrm>
             <a:off x="7635240" y="1325880"/>
-            <a:ext cx="3474720" cy="1325880"/>
+            <a:ext cx="3474720" cy="1255471"/>
           </a:xfrm>
           <a:prstGeom prst="roundRect">
             <a:avLst>
-              <a:gd name="adj" fmla="val 8276"/>
+              <a:gd name="adj" fmla="val 8740"/>
             </a:avLst>
           </a:prstGeom>
           <a:solidFill>
@@ -9494,7 +9926,7 @@
         <p:spPr>
           <a:xfrm>
             <a:off x="7799832" y="1801368"/>
-            <a:ext cx="3145536" cy="758952"/>
+            <a:ext cx="3145536" cy="688543"/>
           </a:xfrm>
           <a:prstGeom prst="rect">
             <a:avLst/>
@@ -9534,12 +9966,12 @@
         </p:nvSpPr>
         <p:spPr>
           <a:xfrm>
-            <a:off x="7635240" y="2788920"/>
-            <a:ext cx="3474720" cy="1536192"/>
+            <a:off x="7635240" y="2718511"/>
+            <a:ext cx="3474720" cy="1328623"/>
           </a:xfrm>
           <a:prstGeom prst="roundRect">
             <a:avLst>
-              <a:gd name="adj" fmla="val 7143"/>
+              <a:gd name="adj" fmla="val 8259"/>
             </a:avLst>
           </a:prstGeom>
           <a:solidFill>
@@ -9561,7 +9993,7 @@
         </p:nvSpPr>
         <p:spPr>
           <a:xfrm>
-            <a:off x="7799832" y="2935224"/>
+            <a:off x="7799832" y="2864815"/>
             <a:ext cx="3145536" cy="256032"/>
           </a:xfrm>
           <a:prstGeom prst="rect">
@@ -9600,8 +10032,8 @@
         </p:nvSpPr>
         <p:spPr>
           <a:xfrm>
-            <a:off x="7818120" y="3300984"/>
-            <a:ext cx="3090672" cy="877824"/>
+            <a:off x="7818120" y="3230575"/>
+            <a:ext cx="3090672" cy="670255"/>
           </a:xfrm>
           <a:prstGeom prst="rect">
             <a:avLst/>
@@ -9675,12 +10107,12 @@
         </p:nvSpPr>
         <p:spPr>
           <a:xfrm>
-            <a:off x="7635240" y="4498848"/>
-            <a:ext cx="3474720" cy="1143000"/>
+            <a:off x="7635240" y="4184294"/>
+            <a:ext cx="3474720" cy="1466698"/>
           </a:xfrm>
           <a:prstGeom prst="roundRect">
             <a:avLst>
-              <a:gd name="adj" fmla="val 9600"/>
+              <a:gd name="adj" fmla="val 7481"/>
             </a:avLst>
           </a:prstGeom>
           <a:solidFill>
@@ -9702,7 +10134,7 @@
         </p:nvSpPr>
         <p:spPr>
           <a:xfrm>
-            <a:off x="7799832" y="4645152"/>
+            <a:off x="7799832" y="4330598"/>
             <a:ext cx="3145536" cy="256032"/>
           </a:xfrm>
           <a:prstGeom prst="rect">
@@ -9741,8 +10173,8 @@
         </p:nvSpPr>
         <p:spPr>
           <a:xfrm>
-            <a:off x="7799832" y="4974336"/>
-            <a:ext cx="3145536" cy="576072"/>
+            <a:off x="7799832" y="4659782"/>
+            <a:ext cx="3145536" cy="899770"/>
           </a:xfrm>
           <a:prstGeom prst="rect">
             <a:avLst/>
@@ -9768,7 +10200,7 @@
                 <a:ea typeface="Aptos" pitchFamily="34" charset="-122"/>
                 <a:cs typeface="Aptos" pitchFamily="34" charset="-120"/>
               </a:rPr>
-              <a:t>Use the assignment to test whether you can explain the concept, apply it to a realistic public health situation, and.</a:t>
+              <a:t>Use the assignment to test whether you can explain the concept, apply it to a realistic public health situation, and identify what would need review before the work moves forward.</a:t>
             </a:r>
             <a:endParaRPr lang="en-US" sz="1320" dirty="0"/>
           </a:p>
@@ -10739,11 +11171,11 @@
         <p:spPr>
           <a:xfrm>
             <a:off x="7635240" y="1325880"/>
-            <a:ext cx="3474720" cy="1325880"/>
+            <a:ext cx="3474720" cy="1207008"/>
           </a:xfrm>
           <a:prstGeom prst="roundRect">
             <a:avLst>
-              <a:gd name="adj" fmla="val 8276"/>
+              <a:gd name="adj" fmla="val 9091"/>
             </a:avLst>
           </a:prstGeom>
           <a:solidFill>
@@ -10805,7 +11237,7 @@
         <p:spPr>
           <a:xfrm>
             <a:off x="7799832" y="1801368"/>
-            <a:ext cx="3145536" cy="758952"/>
+            <a:ext cx="3145536" cy="640080"/>
           </a:xfrm>
           <a:prstGeom prst="rect">
             <a:avLst/>
@@ -10845,12 +11277,12 @@
         </p:nvSpPr>
         <p:spPr>
           <a:xfrm>
-            <a:off x="7635240" y="2788920"/>
-            <a:ext cx="3474720" cy="1536192"/>
+            <a:off x="7635240" y="2670048"/>
+            <a:ext cx="3474720" cy="1377086"/>
           </a:xfrm>
           <a:prstGeom prst="roundRect">
             <a:avLst>
-              <a:gd name="adj" fmla="val 7143"/>
+              <a:gd name="adj" fmla="val 7968"/>
             </a:avLst>
           </a:prstGeom>
           <a:solidFill>
@@ -10872,7 +11304,7 @@
         </p:nvSpPr>
         <p:spPr>
           <a:xfrm>
-            <a:off x="7799832" y="2935224"/>
+            <a:off x="7799832" y="2816352"/>
             <a:ext cx="3145536" cy="256032"/>
           </a:xfrm>
           <a:prstGeom prst="rect">
@@ -10911,8 +11343,8 @@
         </p:nvSpPr>
         <p:spPr>
           <a:xfrm>
-            <a:off x="7818120" y="3300984"/>
-            <a:ext cx="3090672" cy="877824"/>
+            <a:off x="7818120" y="3182112"/>
+            <a:ext cx="3090672" cy="718718"/>
           </a:xfrm>
           <a:prstGeom prst="rect">
             <a:avLst/>
@@ -10986,12 +11418,12 @@
         </p:nvSpPr>
         <p:spPr>
           <a:xfrm>
-            <a:off x="7635240" y="4498848"/>
-            <a:ext cx="3474720" cy="1143000"/>
+            <a:off x="7635240" y="4184294"/>
+            <a:ext cx="3474720" cy="1466698"/>
           </a:xfrm>
           <a:prstGeom prst="roundRect">
             <a:avLst>
-              <a:gd name="adj" fmla="val 9600"/>
+              <a:gd name="adj" fmla="val 7481"/>
             </a:avLst>
           </a:prstGeom>
           <a:solidFill>
@@ -11013,7 +11445,7 @@
         </p:nvSpPr>
         <p:spPr>
           <a:xfrm>
-            <a:off x="7799832" y="4645152"/>
+            <a:off x="7799832" y="4330598"/>
             <a:ext cx="3145536" cy="256032"/>
           </a:xfrm>
           <a:prstGeom prst="rect">
@@ -11052,8 +11484,8 @@
         </p:nvSpPr>
         <p:spPr>
           <a:xfrm>
-            <a:off x="7799832" y="4974336"/>
-            <a:ext cx="3145536" cy="576072"/>
+            <a:off x="7799832" y="4659782"/>
+            <a:ext cx="3145536" cy="899770"/>
           </a:xfrm>
           <a:prstGeom prst="rect">
             <a:avLst/>
@@ -11079,7 +11511,7 @@
                 <a:ea typeface="Aptos" pitchFamily="34" charset="-122"/>
                 <a:cs typeface="Aptos" pitchFamily="34" charset="-120"/>
               </a:rPr>
-              <a:t>Connect the concept to public health purpose, responsible use, required safeguards, documentation, and the next action a.</a:t>
+              <a:t>Connect the concept to public health purpose, responsible use, required safeguards, documentation, and the next action a department should take.</a:t>
             </a:r>
             <a:endParaRPr lang="en-US" sz="1320" dirty="0"/>
           </a:p>
@@ -11431,11 +11863,11 @@
         <p:spPr>
           <a:xfrm>
             <a:off x="7635240" y="1325880"/>
-            <a:ext cx="3474720" cy="1325880"/>
+            <a:ext cx="3474720" cy="1255471"/>
           </a:xfrm>
           <a:prstGeom prst="roundRect">
             <a:avLst>
-              <a:gd name="adj" fmla="val 8276"/>
+              <a:gd name="adj" fmla="val 8740"/>
             </a:avLst>
           </a:prstGeom>
           <a:solidFill>
@@ -11497,7 +11929,7 @@
         <p:spPr>
           <a:xfrm>
             <a:off x="7799832" y="1801368"/>
-            <a:ext cx="3145536" cy="758952"/>
+            <a:ext cx="3145536" cy="688543"/>
           </a:xfrm>
           <a:prstGeom prst="rect">
             <a:avLst/>
@@ -11537,12 +11969,12 @@
         </p:nvSpPr>
         <p:spPr>
           <a:xfrm>
-            <a:off x="7635240" y="2788920"/>
-            <a:ext cx="3474720" cy="1536192"/>
+            <a:off x="7635240" y="2718511"/>
+            <a:ext cx="3474720" cy="1328623"/>
           </a:xfrm>
           <a:prstGeom prst="roundRect">
             <a:avLst>
-              <a:gd name="adj" fmla="val 7143"/>
+              <a:gd name="adj" fmla="val 8259"/>
             </a:avLst>
           </a:prstGeom>
           <a:solidFill>
@@ -11564,7 +11996,7 @@
         </p:nvSpPr>
         <p:spPr>
           <a:xfrm>
-            <a:off x="7799832" y="2935224"/>
+            <a:off x="7799832" y="2864815"/>
             <a:ext cx="3145536" cy="256032"/>
           </a:xfrm>
           <a:prstGeom prst="rect">
@@ -11603,8 +12035,8 @@
         </p:nvSpPr>
         <p:spPr>
           <a:xfrm>
-            <a:off x="7818120" y="3300984"/>
-            <a:ext cx="3090672" cy="877824"/>
+            <a:off x="7818120" y="3230575"/>
+            <a:ext cx="3090672" cy="670255"/>
           </a:xfrm>
           <a:prstGeom prst="rect">
             <a:avLst/>
@@ -11661,12 +12093,12 @@
         </p:nvSpPr>
         <p:spPr>
           <a:xfrm>
-            <a:off x="7635240" y="4498848"/>
-            <a:ext cx="3474720" cy="1143000"/>
+            <a:off x="7635240" y="4184294"/>
+            <a:ext cx="3474720" cy="1466698"/>
           </a:xfrm>
           <a:prstGeom prst="roundRect">
             <a:avLst>
-              <a:gd name="adj" fmla="val 9600"/>
+              <a:gd name="adj" fmla="val 7481"/>
             </a:avLst>
           </a:prstGeom>
           <a:solidFill>
@@ -11688,7 +12120,7 @@
         </p:nvSpPr>
         <p:spPr>
           <a:xfrm>
-            <a:off x="7799832" y="4645152"/>
+            <a:off x="7799832" y="4330598"/>
             <a:ext cx="3145536" cy="256032"/>
           </a:xfrm>
           <a:prstGeom prst="rect">
@@ -11727,8 +12159,8 @@
         </p:nvSpPr>
         <p:spPr>
           <a:xfrm>
-            <a:off x="7799832" y="4974336"/>
-            <a:ext cx="3145536" cy="576072"/>
+            <a:off x="7799832" y="4659782"/>
+            <a:ext cx="3145536" cy="899770"/>
           </a:xfrm>
           <a:prstGeom prst="rect">
             <a:avLst/>
@@ -11754,7 +12186,7 @@
                 <a:ea typeface="Aptos" pitchFamily="34" charset="-122"/>
                 <a:cs typeface="Aptos" pitchFamily="34" charset="-120"/>
               </a:rPr>
-              <a:t>Connect the concept to public health purpose, responsible use, required safeguards, documentation, and the next action a.</a:t>
+              <a:t>Connect the concept to public health purpose, responsible use, required safeguards, documentation, and the next action a department should take.</a:t>
             </a:r>
             <a:endParaRPr lang="en-US" sz="1320" dirty="0"/>
           </a:p>
@@ -12232,7 +12664,7 @@
                 <a:ea typeface="Aptos" pitchFamily="34" charset="-122"/>
                 <a:cs typeface="Aptos" pitchFamily="34" charset="-120"/>
               </a:rPr>
-              <a:t>Use the related plays to identify decisions, participants, timing, approvals, and documentation needed for responsible.</a:t>
+              <a:t>Use the related plays to identify decisions, participants, timing, approvals, and documentation needed for responsible implementation.</a:t>
             </a:r>
             <a:endParaRPr lang="en-US" sz="1320" dirty="0"/>
           </a:p>
@@ -12851,7 +13283,7 @@
                 <a:ea typeface="Aptos" pitchFamily="34" charset="-122"/>
                 <a:cs typeface="Aptos" pitchFamily="34" charset="-120"/>
               </a:rPr>
-              <a:t>Use linked tools when your department needs a structured worksheet, template, checklist, review process, or.</a:t>
+              <a:t>Use linked tools when your department needs a structured worksheet, template, checklist, review process, or documentation artifact.</a:t>
             </a:r>
             <a:endParaRPr lang="en-US" sz="1320" dirty="0"/>
           </a:p>
@@ -13361,11 +13793,11 @@
         <p:spPr>
           <a:xfrm>
             <a:off x="7635240" y="1325880"/>
-            <a:ext cx="3474720" cy="1325880"/>
+            <a:ext cx="3474720" cy="1207008"/>
           </a:xfrm>
           <a:prstGeom prst="roundRect">
             <a:avLst>
-              <a:gd name="adj" fmla="val 8276"/>
+              <a:gd name="adj" fmla="val 9091"/>
             </a:avLst>
           </a:prstGeom>
           <a:solidFill>
@@ -13427,7 +13859,7 @@
         <p:spPr>
           <a:xfrm>
             <a:off x="7799832" y="1801368"/>
-            <a:ext cx="3145536" cy="758952"/>
+            <a:ext cx="3145536" cy="640080"/>
           </a:xfrm>
           <a:prstGeom prst="rect">
             <a:avLst/>
@@ -13467,12 +13899,12 @@
         </p:nvSpPr>
         <p:spPr>
           <a:xfrm>
-            <a:off x="7635240" y="2788920"/>
-            <a:ext cx="3474720" cy="1536192"/>
+            <a:off x="7635240" y="2670048"/>
+            <a:ext cx="3474720" cy="1377086"/>
           </a:xfrm>
           <a:prstGeom prst="roundRect">
             <a:avLst>
-              <a:gd name="adj" fmla="val 7143"/>
+              <a:gd name="adj" fmla="val 7968"/>
             </a:avLst>
           </a:prstGeom>
           <a:solidFill>
@@ -13494,7 +13926,7 @@
         </p:nvSpPr>
         <p:spPr>
           <a:xfrm>
-            <a:off x="7799832" y="2935224"/>
+            <a:off x="7799832" y="2816352"/>
             <a:ext cx="3145536" cy="256032"/>
           </a:xfrm>
           <a:prstGeom prst="rect">
@@ -13533,8 +13965,8 @@
         </p:nvSpPr>
         <p:spPr>
           <a:xfrm>
-            <a:off x="7818120" y="3300984"/>
-            <a:ext cx="3090672" cy="877824"/>
+            <a:off x="7818120" y="3182112"/>
+            <a:ext cx="3090672" cy="718718"/>
           </a:xfrm>
           <a:prstGeom prst="rect">
             <a:avLst/>
@@ -13608,12 +14040,12 @@
         </p:nvSpPr>
         <p:spPr>
           <a:xfrm>
-            <a:off x="7635240" y="4498848"/>
-            <a:ext cx="3474720" cy="1143000"/>
+            <a:off x="7635240" y="4184294"/>
+            <a:ext cx="3474720" cy="1466698"/>
           </a:xfrm>
           <a:prstGeom prst="roundRect">
             <a:avLst>
-              <a:gd name="adj" fmla="val 9600"/>
+              <a:gd name="adj" fmla="val 7481"/>
             </a:avLst>
           </a:prstGeom>
           <a:solidFill>
@@ -13635,7 +14067,7 @@
         </p:nvSpPr>
         <p:spPr>
           <a:xfrm>
-            <a:off x="7799832" y="4645152"/>
+            <a:off x="7799832" y="4330598"/>
             <a:ext cx="3145536" cy="256032"/>
           </a:xfrm>
           <a:prstGeom prst="rect">
@@ -13674,8 +14106,8 @@
         </p:nvSpPr>
         <p:spPr>
           <a:xfrm>
-            <a:off x="7799832" y="4974336"/>
-            <a:ext cx="3145536" cy="576072"/>
+            <a:off x="7799832" y="4659782"/>
+            <a:ext cx="3145536" cy="899770"/>
           </a:xfrm>
           <a:prstGeom prst="rect">
             <a:avLst/>
@@ -13701,7 +14133,7 @@
                 <a:ea typeface="Aptos" pitchFamily="34" charset="-122"/>
                 <a:cs typeface="Aptos" pitchFamily="34" charset="-120"/>
               </a:rPr>
-              <a:t>Use the assignment to test whether you can explain the concept, apply it to a realistic public health situation, and.</a:t>
+              <a:t>Use the assignment to test whether you can explain the concept, apply it to a realistic public health situation, and identify what would need review before the work moves forward.</a:t>
             </a:r>
             <a:endParaRPr lang="en-US" sz="1320" dirty="0"/>
           </a:p>
@@ -14070,11 +14502,11 @@
         <p:spPr>
           <a:xfrm>
             <a:off x="7635240" y="1325880"/>
-            <a:ext cx="3474720" cy="1325880"/>
+            <a:ext cx="3474720" cy="1255471"/>
           </a:xfrm>
           <a:prstGeom prst="roundRect">
             <a:avLst>
-              <a:gd name="adj" fmla="val 8276"/>
+              <a:gd name="adj" fmla="val 8740"/>
             </a:avLst>
           </a:prstGeom>
           <a:solidFill>
@@ -14136,7 +14568,7 @@
         <p:spPr>
           <a:xfrm>
             <a:off x="7799832" y="1801368"/>
-            <a:ext cx="3145536" cy="758952"/>
+            <a:ext cx="3145536" cy="688543"/>
           </a:xfrm>
           <a:prstGeom prst="rect">
             <a:avLst/>
@@ -14176,12 +14608,12 @@
         </p:nvSpPr>
         <p:spPr>
           <a:xfrm>
-            <a:off x="7635240" y="2788920"/>
-            <a:ext cx="3474720" cy="1536192"/>
+            <a:off x="7635240" y="2718511"/>
+            <a:ext cx="3474720" cy="1328623"/>
           </a:xfrm>
           <a:prstGeom prst="roundRect">
             <a:avLst>
-              <a:gd name="adj" fmla="val 7143"/>
+              <a:gd name="adj" fmla="val 8259"/>
             </a:avLst>
           </a:prstGeom>
           <a:solidFill>
@@ -14203,7 +14635,7 @@
         </p:nvSpPr>
         <p:spPr>
           <a:xfrm>
-            <a:off x="7799832" y="2935224"/>
+            <a:off x="7799832" y="2864815"/>
             <a:ext cx="3145536" cy="256032"/>
           </a:xfrm>
           <a:prstGeom prst="rect">
@@ -14242,8 +14674,8 @@
         </p:nvSpPr>
         <p:spPr>
           <a:xfrm>
-            <a:off x="7818120" y="3300984"/>
-            <a:ext cx="3090672" cy="877824"/>
+            <a:off x="7818120" y="3230575"/>
+            <a:ext cx="3090672" cy="670255"/>
           </a:xfrm>
           <a:prstGeom prst="rect">
             <a:avLst/>
@@ -14317,12 +14749,12 @@
         </p:nvSpPr>
         <p:spPr>
           <a:xfrm>
-            <a:off x="7635240" y="4498848"/>
-            <a:ext cx="3474720" cy="1143000"/>
+            <a:off x="7635240" y="4184294"/>
+            <a:ext cx="3474720" cy="1466698"/>
           </a:xfrm>
           <a:prstGeom prst="roundRect">
             <a:avLst>
-              <a:gd name="adj" fmla="val 9600"/>
+              <a:gd name="adj" fmla="val 7481"/>
             </a:avLst>
           </a:prstGeom>
           <a:solidFill>
@@ -14344,7 +14776,7 @@
         </p:nvSpPr>
         <p:spPr>
           <a:xfrm>
-            <a:off x="7799832" y="4645152"/>
+            <a:off x="7799832" y="4330598"/>
             <a:ext cx="3145536" cy="256032"/>
           </a:xfrm>
           <a:prstGeom prst="rect">
@@ -14383,8 +14815,8 @@
         </p:nvSpPr>
         <p:spPr>
           <a:xfrm>
-            <a:off x="7799832" y="4974336"/>
-            <a:ext cx="3145536" cy="576072"/>
+            <a:off x="7799832" y="4659782"/>
+            <a:ext cx="3145536" cy="899770"/>
           </a:xfrm>
           <a:prstGeom prst="rect">
             <a:avLst/>
@@ -14410,7 +14842,7 @@
                 <a:ea typeface="Aptos" pitchFamily="34" charset="-122"/>
                 <a:cs typeface="Aptos" pitchFamily="34" charset="-120"/>
               </a:rPr>
-              <a:t>Connect the concept to public health purpose, responsible use, required safeguards, documentation, and the next action a.</a:t>
+              <a:t>Connect the concept to public health purpose, responsible use, required safeguards, documentation, and the next action a department should take.</a:t>
             </a:r>
             <a:endParaRPr lang="en-US" sz="1320" dirty="0"/>
           </a:p>
@@ -14779,11 +15211,11 @@
         <p:spPr>
           <a:xfrm>
             <a:off x="7635240" y="1325880"/>
-            <a:ext cx="3474720" cy="1325880"/>
+            <a:ext cx="3474720" cy="1207008"/>
           </a:xfrm>
           <a:prstGeom prst="roundRect">
             <a:avLst>
-              <a:gd name="adj" fmla="val 8276"/>
+              <a:gd name="adj" fmla="val 9091"/>
             </a:avLst>
           </a:prstGeom>
           <a:solidFill>
@@ -14845,7 +15277,7 @@
         <p:spPr>
           <a:xfrm>
             <a:off x="7799832" y="1801368"/>
-            <a:ext cx="3145536" cy="758952"/>
+            <a:ext cx="3145536" cy="640080"/>
           </a:xfrm>
           <a:prstGeom prst="rect">
             <a:avLst/>
@@ -14885,12 +15317,12 @@
         </p:nvSpPr>
         <p:spPr>
           <a:xfrm>
-            <a:off x="7635240" y="2788920"/>
-            <a:ext cx="3474720" cy="1536192"/>
+            <a:off x="7635240" y="2670048"/>
+            <a:ext cx="3474720" cy="1377086"/>
           </a:xfrm>
           <a:prstGeom prst="roundRect">
             <a:avLst>
-              <a:gd name="adj" fmla="val 7143"/>
+              <a:gd name="adj" fmla="val 7968"/>
             </a:avLst>
           </a:prstGeom>
           <a:solidFill>
@@ -14912,8 +15344,8 @@
         </p:nvSpPr>
         <p:spPr>
           <a:xfrm>
-            <a:off x="7799832" y="2935224"/>
-            <a:ext cx="3145536" cy="256032"/>
+            <a:off x="7799832" y="2798064"/>
+            <a:ext cx="3145536" cy="237744"/>
           </a:xfrm>
           <a:prstGeom prst="rect">
             <a:avLst/>
@@ -14929,7 +15361,7 @@
               <a:buNone/>
             </a:pPr>
             <a:r>
-              <a:rPr lang="en-US" sz="1300" b="1" dirty="0">
+              <a:rPr lang="en-US" sz="1250" b="1" dirty="0">
                 <a:solidFill>
                   <a:srgbClr val="0068B7"/>
                 </a:solidFill>
@@ -14937,101 +15369,317 @@
                 <a:ea typeface="Aptos" pitchFamily="34" charset="-122"/>
                 <a:cs typeface="Aptos" pitchFamily="34" charset="-120"/>
               </a:rPr>
-              <a:t>Concept checkpoints</a:t>
-            </a:r>
-            <a:endParaRPr lang="en-US" sz="1300" dirty="0"/>
-          </a:p>
-        </p:txBody>
-      </p:sp>
-      <p:sp>
-        <p:nvSpPr>
-          <p:cNvPr id="15" name="Text 13"/>
-          <p:cNvSpPr/>
-          <p:nvPr/>
-        </p:nvSpPr>
-        <p:spPr>
-          <a:xfrm>
-            <a:off x="7818120" y="3300984"/>
-            <a:ext cx="3090672" cy="877824"/>
-          </a:xfrm>
-          <a:prstGeom prst="rect">
-            <a:avLst/>
-          </a:prstGeom>
-          <a:noFill/>
-          <a:ln/>
-        </p:spPr>
-        <p:txBody>
-          <a:bodyPr wrap="square" lIns="508" tIns="508" rIns="508" bIns="508" rtlCol="0" anchor="t">
+              <a:t>Governance pathway</a:t>
+            </a:r>
+            <a:endParaRPr lang="en-US" sz="1250" dirty="0"/>
+          </a:p>
+        </p:txBody>
+      </p:sp>
+      <p:sp>
+        <p:nvSpPr>
+          <p:cNvPr id="15" name="Shape 13"/>
+          <p:cNvSpPr/>
+          <p:nvPr/>
+        </p:nvSpPr>
+        <p:spPr>
+          <a:xfrm>
+            <a:off x="8763000" y="3351276"/>
+            <a:ext cx="164592" cy="0"/>
+          </a:xfrm>
+          <a:prstGeom prst="line">
+            <a:avLst/>
+          </a:prstGeom>
+          <a:noFill/>
+          <a:ln w="15240">
+            <a:solidFill>
+              <a:srgbClr val="8ABBD8"/>
+            </a:solidFill>
+            <a:prstDash val="solid"/>
+          </a:ln>
+        </p:spPr>
+      </p:sp>
+      <p:sp>
+        <p:nvSpPr>
+          <p:cNvPr id="16" name="Shape 14"/>
+          <p:cNvSpPr/>
+          <p:nvPr/>
+        </p:nvSpPr>
+        <p:spPr>
+          <a:xfrm>
+            <a:off x="7872984" y="3200400"/>
+            <a:ext cx="890016" cy="301752"/>
+          </a:xfrm>
+          <a:prstGeom prst="roundRect">
+            <a:avLst>
+              <a:gd name="adj" fmla="val 24242"/>
+            </a:avLst>
+          </a:prstGeom>
+          <a:solidFill>
+            <a:srgbClr val="0068B7"/>
+          </a:solidFill>
+          <a:ln w="12700">
+            <a:solidFill>
+              <a:srgbClr val="0068B7"/>
+            </a:solidFill>
+            <a:prstDash val="solid"/>
+          </a:ln>
+        </p:spPr>
+      </p:sp>
+      <p:sp>
+        <p:nvSpPr>
+          <p:cNvPr id="17" name="Text 15"/>
+          <p:cNvSpPr/>
+          <p:nvPr/>
+        </p:nvSpPr>
+        <p:spPr>
+          <a:xfrm>
+            <a:off x="7909560" y="3273552"/>
+            <a:ext cx="816864" cy="146304"/>
+          </a:xfrm>
+          <a:prstGeom prst="rect">
+            <a:avLst/>
+          </a:prstGeom>
+          <a:noFill/>
+          <a:ln/>
+        </p:spPr>
+        <p:txBody>
+          <a:bodyPr wrap="square" lIns="0" tIns="0" rIns="0" bIns="0" rtlCol="0" anchor="ctr">
             <a:normAutofit/>
           </a:bodyPr>
           <a:lstStyle/>
           <a:p>
-            <a:pPr indent="0" marL="0">
-              <a:buNone/>
-            </a:pPr>
-            <a:r>
-              <a:rPr lang="en-US" sz="1220" dirty="0">
-                <a:solidFill>
-                  <a:srgbClr val="17364A"/>
-                </a:solidFill>
-                <a:latin typeface="Aptos" pitchFamily="34" charset="0"/>
-                <a:ea typeface="Aptos" pitchFamily="34" charset="-122"/>
-                <a:cs typeface="Aptos" pitchFamily="34" charset="-120"/>
-              </a:rPr>
-              <a:t>This national-level module is intended for training and planning.</a:t>
-            </a:r>
-            <a:endParaRPr lang="en-US" sz="1220" dirty="0"/>
-          </a:p>
-          <a:p>
-            <a:pPr indent="0" marL="0">
-              <a:buNone/>
-            </a:pPr>
-            <a:r>
-              <a:rPr lang="en-US" sz="1220" dirty="0">
-                <a:solidFill>
-                  <a:srgbClr val="17364A"/>
-                </a:solidFill>
-                <a:latin typeface="Aptos" pitchFamily="34" charset="0"/>
-                <a:ea typeface="Aptos" pitchFamily="34" charset="-122"/>
-                <a:cs typeface="Aptos" pitchFamily="34" charset="-120"/>
-              </a:rPr>
-              <a:t>It does not replace legal, privacy, procurement, civil rights,.</a:t>
-            </a:r>
-            <a:endParaRPr lang="en-US" sz="1220" dirty="0"/>
-          </a:p>
-          <a:p>
-            <a:pPr indent="0" marL="0">
-              <a:buNone/>
-            </a:pPr>
-            <a:r>
-              <a:rPr lang="en-US" sz="1220" dirty="0">
-                <a:solidFill>
-                  <a:srgbClr val="17364A"/>
-                </a:solidFill>
-                <a:latin typeface="Aptos" pitchFamily="34" charset="0"/>
-                <a:ea typeface="Aptos" pitchFamily="34" charset="-122"/>
-                <a:cs typeface="Aptos" pitchFamily="34" charset="-120"/>
-              </a:rPr>
-              <a:t>Learners should confirm applicable requirements in their own.</a:t>
-            </a:r>
-            <a:endParaRPr lang="en-US" sz="1220" dirty="0"/>
-          </a:p>
-        </p:txBody>
-      </p:sp>
-      <p:sp>
-        <p:nvSpPr>
-          <p:cNvPr id="16" name="Shape 14"/>
-          <p:cNvSpPr/>
-          <p:nvPr/>
-        </p:nvSpPr>
-        <p:spPr>
-          <a:xfrm>
-            <a:off x="7635240" y="4498848"/>
-            <a:ext cx="3474720" cy="1143000"/>
+            <a:pPr algn="ctr" indent="0" marL="0">
+              <a:buNone/>
+            </a:pPr>
+            <a:r>
+              <a:rPr lang="en-US" sz="880" b="1" dirty="0">
+                <a:solidFill>
+                  <a:srgbClr val="FFFFFF"/>
+                </a:solidFill>
+                <a:latin typeface="Aptos" pitchFamily="34" charset="0"/>
+                <a:ea typeface="Aptos" pitchFamily="34" charset="-122"/>
+                <a:cs typeface="Aptos" pitchFamily="34" charset="-120"/>
+              </a:rPr>
+              <a:t>Submit</a:t>
+            </a:r>
+            <a:endParaRPr lang="en-US" sz="880" dirty="0"/>
+          </a:p>
+        </p:txBody>
+      </p:sp>
+      <p:sp>
+        <p:nvSpPr>
+          <p:cNvPr id="18" name="Shape 16"/>
+          <p:cNvSpPr/>
+          <p:nvPr/>
+        </p:nvSpPr>
+        <p:spPr>
+          <a:xfrm>
+            <a:off x="9817608" y="3351276"/>
+            <a:ext cx="164592" cy="0"/>
+          </a:xfrm>
+          <a:prstGeom prst="line">
+            <a:avLst/>
+          </a:prstGeom>
+          <a:noFill/>
+          <a:ln w="15240">
+            <a:solidFill>
+              <a:srgbClr val="8ABBD8"/>
+            </a:solidFill>
+            <a:prstDash val="solid"/>
+          </a:ln>
+        </p:spPr>
+      </p:sp>
+      <p:sp>
+        <p:nvSpPr>
+          <p:cNvPr id="19" name="Shape 17"/>
+          <p:cNvSpPr/>
+          <p:nvPr/>
+        </p:nvSpPr>
+        <p:spPr>
+          <a:xfrm>
+            <a:off x="8927592" y="3200400"/>
+            <a:ext cx="890016" cy="301752"/>
           </a:xfrm>
           <a:prstGeom prst="roundRect">
             <a:avLst>
-              <a:gd name="adj" fmla="val 9600"/>
+              <a:gd name="adj" fmla="val 24242"/>
+            </a:avLst>
+          </a:prstGeom>
+          <a:solidFill>
+            <a:srgbClr val="2F8A28"/>
+          </a:solidFill>
+          <a:ln w="12700">
+            <a:solidFill>
+              <a:srgbClr val="2F8A28"/>
+            </a:solidFill>
+            <a:prstDash val="solid"/>
+          </a:ln>
+        </p:spPr>
+      </p:sp>
+      <p:sp>
+        <p:nvSpPr>
+          <p:cNvPr id="20" name="Text 18"/>
+          <p:cNvSpPr/>
+          <p:nvPr/>
+        </p:nvSpPr>
+        <p:spPr>
+          <a:xfrm>
+            <a:off x="8964168" y="3273552"/>
+            <a:ext cx="816864" cy="146304"/>
+          </a:xfrm>
+          <a:prstGeom prst="rect">
+            <a:avLst/>
+          </a:prstGeom>
+          <a:noFill/>
+          <a:ln/>
+        </p:spPr>
+        <p:txBody>
+          <a:bodyPr wrap="square" lIns="0" tIns="0" rIns="0" bIns="0" rtlCol="0" anchor="ctr">
+            <a:normAutofit/>
+          </a:bodyPr>
+          <a:lstStyle/>
+          <a:p>
+            <a:pPr algn="ctr" indent="0" marL="0">
+              <a:buNone/>
+            </a:pPr>
+            <a:r>
+              <a:rPr lang="en-US" sz="880" b="1" dirty="0">
+                <a:solidFill>
+                  <a:srgbClr val="FFFFFF"/>
+                </a:solidFill>
+                <a:latin typeface="Aptos" pitchFamily="34" charset="0"/>
+                <a:ea typeface="Aptos" pitchFamily="34" charset="-122"/>
+                <a:cs typeface="Aptos" pitchFamily="34" charset="-120"/>
+              </a:rPr>
+              <a:t>Review</a:t>
+            </a:r>
+            <a:endParaRPr lang="en-US" sz="880" dirty="0"/>
+          </a:p>
+        </p:txBody>
+      </p:sp>
+      <p:sp>
+        <p:nvSpPr>
+          <p:cNvPr id="21" name="Shape 19"/>
+          <p:cNvSpPr/>
+          <p:nvPr/>
+        </p:nvSpPr>
+        <p:spPr>
+          <a:xfrm>
+            <a:off x="9982200" y="3200400"/>
+            <a:ext cx="890016" cy="301752"/>
+          </a:xfrm>
+          <a:prstGeom prst="roundRect">
+            <a:avLst>
+              <a:gd name="adj" fmla="val 24242"/>
+            </a:avLst>
+          </a:prstGeom>
+          <a:solidFill>
+            <a:srgbClr val="6A4CA3"/>
+          </a:solidFill>
+          <a:ln w="12700">
+            <a:solidFill>
+              <a:srgbClr val="6A4CA3"/>
+            </a:solidFill>
+            <a:prstDash val="solid"/>
+          </a:ln>
+        </p:spPr>
+      </p:sp>
+      <p:sp>
+        <p:nvSpPr>
+          <p:cNvPr id="22" name="Text 20"/>
+          <p:cNvSpPr/>
+          <p:nvPr/>
+        </p:nvSpPr>
+        <p:spPr>
+          <a:xfrm>
+            <a:off x="10018776" y="3273552"/>
+            <a:ext cx="816864" cy="146304"/>
+          </a:xfrm>
+          <a:prstGeom prst="rect">
+            <a:avLst/>
+          </a:prstGeom>
+          <a:noFill/>
+          <a:ln/>
+        </p:spPr>
+        <p:txBody>
+          <a:bodyPr wrap="square" lIns="0" tIns="0" rIns="0" bIns="0" rtlCol="0" anchor="ctr">
+            <a:normAutofit/>
+          </a:bodyPr>
+          <a:lstStyle/>
+          <a:p>
+            <a:pPr algn="ctr" indent="0" marL="0">
+              <a:buNone/>
+            </a:pPr>
+            <a:r>
+              <a:rPr lang="en-US" sz="880" b="1" dirty="0">
+                <a:solidFill>
+                  <a:srgbClr val="FFFFFF"/>
+                </a:solidFill>
+                <a:latin typeface="Aptos" pitchFamily="34" charset="0"/>
+                <a:ea typeface="Aptos" pitchFamily="34" charset="-122"/>
+                <a:cs typeface="Aptos" pitchFamily="34" charset="-120"/>
+              </a:rPr>
+              <a:t>Oversee</a:t>
+            </a:r>
+            <a:endParaRPr lang="en-US" sz="880" dirty="0"/>
+          </a:p>
+        </p:txBody>
+      </p:sp>
+      <p:sp>
+        <p:nvSpPr>
+          <p:cNvPr id="23" name="Text 21"/>
+          <p:cNvSpPr/>
+          <p:nvPr/>
+        </p:nvSpPr>
+        <p:spPr>
+          <a:xfrm>
+            <a:off x="7854696" y="3694176"/>
+            <a:ext cx="3035808" cy="206654"/>
+          </a:xfrm>
+          <a:prstGeom prst="rect">
+            <a:avLst/>
+          </a:prstGeom>
+          <a:noFill/>
+          <a:ln/>
+        </p:spPr>
+        <p:txBody>
+          <a:bodyPr wrap="square" lIns="254" tIns="254" rIns="254" bIns="254" rtlCol="0" anchor="t">
+            <a:normAutofit/>
+          </a:bodyPr>
+          <a:lstStyle/>
+          <a:p>
+            <a:pPr indent="0" marL="0">
+              <a:buNone/>
+            </a:pPr>
+            <a:r>
+              <a:rPr lang="en-US" sz="1120" dirty="0">
+                <a:solidFill>
+                  <a:srgbClr val="17364A"/>
+                </a:solidFill>
+                <a:latin typeface="Aptos" pitchFamily="34" charset="0"/>
+                <a:ea typeface="Aptos" pitchFamily="34" charset="-122"/>
+                <a:cs typeface="Aptos" pitchFamily="34" charset="-120"/>
+              </a:rPr>
+              <a:t>A proposed AI use should move through documented review before it becomes an operational workflow.</a:t>
+            </a:r>
+            <a:endParaRPr lang="en-US" sz="1120" dirty="0"/>
+          </a:p>
+        </p:txBody>
+      </p:sp>
+      <p:sp>
+        <p:nvSpPr>
+          <p:cNvPr id="24" name="Shape 22"/>
+          <p:cNvSpPr/>
+          <p:nvPr/>
+        </p:nvSpPr>
+        <p:spPr>
+          <a:xfrm>
+            <a:off x="7635240" y="4184294"/>
+            <a:ext cx="3474720" cy="1466698"/>
+          </a:xfrm>
+          <a:prstGeom prst="roundRect">
+            <a:avLst>
+              <a:gd name="adj" fmla="val 7481"/>
             </a:avLst>
           </a:prstGeom>
           <a:solidFill>
@@ -15047,13 +15695,13 @@
       </p:sp>
       <p:sp>
         <p:nvSpPr>
-          <p:cNvPr id="17" name="Text 15"/>
-          <p:cNvSpPr/>
-          <p:nvPr/>
-        </p:nvSpPr>
-        <p:spPr>
-          <a:xfrm>
-            <a:off x="7799832" y="4645152"/>
+          <p:cNvPr id="25" name="Text 23"/>
+          <p:cNvSpPr/>
+          <p:nvPr/>
+        </p:nvSpPr>
+        <p:spPr>
+          <a:xfrm>
+            <a:off x="7799832" y="4330598"/>
             <a:ext cx="3145536" cy="256032"/>
           </a:xfrm>
           <a:prstGeom prst="rect">
@@ -15086,14 +15734,14 @@
       </p:sp>
       <p:sp>
         <p:nvSpPr>
-          <p:cNvPr id="18" name="Text 16"/>
-          <p:cNvSpPr/>
-          <p:nvPr/>
-        </p:nvSpPr>
-        <p:spPr>
-          <a:xfrm>
-            <a:off x="7799832" y="4974336"/>
-            <a:ext cx="3145536" cy="576072"/>
+          <p:cNvPr id="26" name="Text 24"/>
+          <p:cNvSpPr/>
+          <p:nvPr/>
+        </p:nvSpPr>
+        <p:spPr>
+          <a:xfrm>
+            <a:off x="7799832" y="4659782"/>
+            <a:ext cx="3145536" cy="899770"/>
           </a:xfrm>
           <a:prstGeom prst="rect">
             <a:avLst/>
@@ -15119,7 +15767,7 @@
                 <a:ea typeface="Aptos" pitchFamily="34" charset="-122"/>
                 <a:cs typeface="Aptos" pitchFamily="34" charset="-120"/>
               </a:rPr>
-              <a:t>Translate this concept into clear decision rights, review steps, documentation expectations, and escalation paths before.</a:t>
+              <a:t>Translate this concept into clear decision rights, review steps, documentation expectations, and escalation paths before an AI-supported workflow is approved.</a:t>
             </a:r>
             <a:endParaRPr lang="en-US" sz="1320" dirty="0"/>
           </a:p>
@@ -15488,11 +16136,11 @@
         <p:spPr>
           <a:xfrm>
             <a:off x="7635240" y="1325880"/>
-            <a:ext cx="3474720" cy="1325880"/>
+            <a:ext cx="3474720" cy="1255471"/>
           </a:xfrm>
           <a:prstGeom prst="roundRect">
             <a:avLst>
-              <a:gd name="adj" fmla="val 8276"/>
+              <a:gd name="adj" fmla="val 8740"/>
             </a:avLst>
           </a:prstGeom>
           <a:solidFill>
@@ -15554,7 +16202,7 @@
         <p:spPr>
           <a:xfrm>
             <a:off x="7799832" y="1801368"/>
-            <a:ext cx="3145536" cy="758952"/>
+            <a:ext cx="3145536" cy="688543"/>
           </a:xfrm>
           <a:prstGeom prst="rect">
             <a:avLst/>
@@ -15594,12 +16242,12 @@
         </p:nvSpPr>
         <p:spPr>
           <a:xfrm>
-            <a:off x="7635240" y="2788920"/>
-            <a:ext cx="3474720" cy="1536192"/>
+            <a:off x="7635240" y="2718511"/>
+            <a:ext cx="3474720" cy="1328623"/>
           </a:xfrm>
           <a:prstGeom prst="roundRect">
             <a:avLst>
-              <a:gd name="adj" fmla="val 7143"/>
+              <a:gd name="adj" fmla="val 8259"/>
             </a:avLst>
           </a:prstGeom>
           <a:solidFill>
@@ -15621,7 +16269,7 @@
         </p:nvSpPr>
         <p:spPr>
           <a:xfrm>
-            <a:off x="7799832" y="2935224"/>
+            <a:off x="7799832" y="2864815"/>
             <a:ext cx="3145536" cy="256032"/>
           </a:xfrm>
           <a:prstGeom prst="rect">
@@ -15660,8 +16308,8 @@
         </p:nvSpPr>
         <p:spPr>
           <a:xfrm>
-            <a:off x="7818120" y="3300984"/>
-            <a:ext cx="3090672" cy="877824"/>
+            <a:off x="7818120" y="3230575"/>
+            <a:ext cx="3090672" cy="670255"/>
           </a:xfrm>
           <a:prstGeom prst="rect">
             <a:avLst/>
@@ -15735,12 +16383,12 @@
         </p:nvSpPr>
         <p:spPr>
           <a:xfrm>
-            <a:off x="7635240" y="4498848"/>
-            <a:ext cx="3474720" cy="1143000"/>
+            <a:off x="7635240" y="4184294"/>
+            <a:ext cx="3474720" cy="1466698"/>
           </a:xfrm>
           <a:prstGeom prst="roundRect">
             <a:avLst>
-              <a:gd name="adj" fmla="val 9600"/>
+              <a:gd name="adj" fmla="val 7481"/>
             </a:avLst>
           </a:prstGeom>
           <a:solidFill>
@@ -15762,7 +16410,7 @@
         </p:nvSpPr>
         <p:spPr>
           <a:xfrm>
-            <a:off x="7799832" y="4645152"/>
+            <a:off x="7799832" y="4330598"/>
             <a:ext cx="3145536" cy="256032"/>
           </a:xfrm>
           <a:prstGeom prst="rect">
@@ -15801,8 +16449,8 @@
         </p:nvSpPr>
         <p:spPr>
           <a:xfrm>
-            <a:off x="7799832" y="4974336"/>
-            <a:ext cx="3145536" cy="576072"/>
+            <a:off x="7799832" y="4659782"/>
+            <a:ext cx="3145536" cy="899770"/>
           </a:xfrm>
           <a:prstGeom prst="rect">
             <a:avLst/>
@@ -15828,7 +16476,7 @@
                 <a:ea typeface="Aptos" pitchFamily="34" charset="-122"/>
                 <a:cs typeface="Aptos" pitchFamily="34" charset="-120"/>
               </a:rPr>
-              <a:t>Connect the concept to public health purpose, responsible use, required safeguards, documentation, and the next action a.</a:t>
+              <a:t>Connect the concept to public health purpose, responsible use, required safeguards, documentation, and the next action a department should take.</a:t>
             </a:r>
             <a:endParaRPr lang="en-US" sz="1320" dirty="0"/>
           </a:p>
@@ -16197,11 +16845,11 @@
         <p:spPr>
           <a:xfrm>
             <a:off x="7635240" y="1325880"/>
-            <a:ext cx="3474720" cy="1325880"/>
+            <a:ext cx="3474720" cy="1255471"/>
           </a:xfrm>
           <a:prstGeom prst="roundRect">
             <a:avLst>
-              <a:gd name="adj" fmla="val 8276"/>
+              <a:gd name="adj" fmla="val 8740"/>
             </a:avLst>
           </a:prstGeom>
           <a:solidFill>
@@ -16263,7 +16911,7 @@
         <p:spPr>
           <a:xfrm>
             <a:off x="7799832" y="1801368"/>
-            <a:ext cx="3145536" cy="758952"/>
+            <a:ext cx="3145536" cy="688543"/>
           </a:xfrm>
           <a:prstGeom prst="rect">
             <a:avLst/>
@@ -16303,12 +16951,12 @@
         </p:nvSpPr>
         <p:spPr>
           <a:xfrm>
-            <a:off x="7635240" y="2788920"/>
-            <a:ext cx="3474720" cy="1536192"/>
+            <a:off x="7635240" y="2718511"/>
+            <a:ext cx="3474720" cy="1328623"/>
           </a:xfrm>
           <a:prstGeom prst="roundRect">
             <a:avLst>
-              <a:gd name="adj" fmla="val 7143"/>
+              <a:gd name="adj" fmla="val 8259"/>
             </a:avLst>
           </a:prstGeom>
           <a:solidFill>
@@ -16330,7 +16978,7 @@
         </p:nvSpPr>
         <p:spPr>
           <a:xfrm>
-            <a:off x="7799832" y="2935224"/>
+            <a:off x="7799832" y="2864815"/>
             <a:ext cx="3145536" cy="256032"/>
           </a:xfrm>
           <a:prstGeom prst="rect">
@@ -16369,8 +17017,8 @@
         </p:nvSpPr>
         <p:spPr>
           <a:xfrm>
-            <a:off x="7818120" y="3300984"/>
-            <a:ext cx="3090672" cy="877824"/>
+            <a:off x="7818120" y="3230575"/>
+            <a:ext cx="3090672" cy="670255"/>
           </a:xfrm>
           <a:prstGeom prst="rect">
             <a:avLst/>
@@ -16444,12 +17092,12 @@
         </p:nvSpPr>
         <p:spPr>
           <a:xfrm>
-            <a:off x="7635240" y="4498848"/>
-            <a:ext cx="3474720" cy="1143000"/>
+            <a:off x="7635240" y="4184294"/>
+            <a:ext cx="3474720" cy="1466698"/>
           </a:xfrm>
           <a:prstGeom prst="roundRect">
             <a:avLst>
-              <a:gd name="adj" fmla="val 9600"/>
+              <a:gd name="adj" fmla="val 7481"/>
             </a:avLst>
           </a:prstGeom>
           <a:solidFill>
@@ -16471,7 +17119,7 @@
         </p:nvSpPr>
         <p:spPr>
           <a:xfrm>
-            <a:off x="7799832" y="4645152"/>
+            <a:off x="7799832" y="4330598"/>
             <a:ext cx="3145536" cy="256032"/>
           </a:xfrm>
           <a:prstGeom prst="rect">
@@ -16510,8 +17158,8 @@
         </p:nvSpPr>
         <p:spPr>
           <a:xfrm>
-            <a:off x="7799832" y="4974336"/>
-            <a:ext cx="3145536" cy="576072"/>
+            <a:off x="7799832" y="4659782"/>
+            <a:ext cx="3145536" cy="899770"/>
           </a:xfrm>
           <a:prstGeom prst="rect">
             <a:avLst/>
@@ -16537,7 +17185,7 @@
                 <a:ea typeface="Aptos" pitchFamily="34" charset="-122"/>
                 <a:cs typeface="Aptos" pitchFamily="34" charset="-120"/>
               </a:rPr>
-              <a:t>Connect the concept to public health purpose, responsible use, required safeguards, documentation, and the next action a.</a:t>
+              <a:t>Connect the concept to public health purpose, responsible use, required safeguards, documentation, and the next action a department should take.</a:t>
             </a:r>
             <a:endParaRPr lang="en-US" sz="1320" dirty="0"/>
           </a:p>

--- a/downloads/presentations/modules/exe-410.pptx
+++ b/downloads/presentations/modules/exe-410.pptx
@@ -3243,8 +3243,8 @@
         </p:nvSpPr>
         <p:spPr>
           <a:xfrm>
-            <a:off x="868680" y="1508760"/>
-            <a:ext cx="6309360" cy="4160520"/>
+            <a:off x="822960" y="1463040"/>
+            <a:ext cx="6565392" cy="4343400"/>
           </a:xfrm>
           <a:prstGeom prst="rect">
             <a:avLst/>
@@ -3262,7 +3262,7 @@
               <a:buNone/>
             </a:pPr>
             <a:r>
-              <a:rPr lang="en-US" sz="2100" dirty="0">
+              <a:rPr lang="en-US" sz="1920" dirty="0">
                 <a:solidFill>
                   <a:srgbClr val="003A63"/>
                 </a:solidFill>
@@ -3272,14 +3272,14 @@
               </a:rPr>
               <a:t>• A useful portfolio strategy begins with categories.</a:t>
             </a:r>
-            <a:endParaRPr lang="en-US" sz="2100" dirty="0"/>
-          </a:p>
-          <a:p>
-            <a:pPr indent="0" marL="0">
-              <a:buNone/>
-            </a:pPr>
-            <a:r>
-              <a:rPr lang="en-US" sz="2100" dirty="0">
+            <a:endParaRPr lang="en-US" sz="1920" dirty="0"/>
+          </a:p>
+          <a:p>
+            <a:pPr indent="0" marL="0">
+              <a:buNone/>
+            </a:pPr>
+            <a:r>
+              <a:rPr lang="en-US" sz="1920" dirty="0">
                 <a:solidFill>
                   <a:srgbClr val="003A63"/>
                 </a:solidFill>
@@ -3287,16 +3287,16 @@
                 <a:ea typeface="Aptos" pitchFamily="34" charset="-122"/>
                 <a:cs typeface="Aptos" pitchFamily="34" charset="-120"/>
               </a:rPr>
-              <a:t>• Agencies can classify AI opportunities by function, such as internal productivity, knowledge.</a:t>
-            </a:r>
-            <a:endParaRPr lang="en-US" sz="2100" dirty="0"/>
-          </a:p>
-          <a:p>
-            <a:pPr indent="0" marL="0">
-              <a:buNone/>
-            </a:pPr>
-            <a:r>
-              <a:rPr lang="en-US" sz="2100" dirty="0">
+              <a:t>• Agencies can classify AI opportunities by function, such as internal.</a:t>
+            </a:r>
+            <a:endParaRPr lang="en-US" sz="1920" dirty="0"/>
+          </a:p>
+          <a:p>
+            <a:pPr indent="0" marL="0">
+              <a:buNone/>
+            </a:pPr>
+            <a:r>
+              <a:rPr lang="en-US" sz="1920" dirty="0">
                 <a:solidFill>
                   <a:srgbClr val="003A63"/>
                 </a:solidFill>
@@ -3306,7 +3306,7 @@
               </a:rPr>
               <a:t>• They can also classify by risk, such as low, moderate, high, or prohibited.</a:t>
             </a:r>
-            <a:endParaRPr lang="en-US" sz="2100" dirty="0"/>
+            <a:endParaRPr lang="en-US" sz="1920" dirty="0"/>
           </a:p>
         </p:txBody>
       </p:sp>
@@ -3318,12 +3318,12 @@
         </p:nvSpPr>
         <p:spPr>
           <a:xfrm>
-            <a:off x="7635240" y="1325880"/>
-            <a:ext cx="3474720" cy="1207008"/>
+            <a:off x="7543800" y="1325880"/>
+            <a:ext cx="3611880" cy="1261872"/>
           </a:xfrm>
           <a:prstGeom prst="roundRect">
             <a:avLst>
-              <a:gd name="adj" fmla="val 9091"/>
+              <a:gd name="adj" fmla="val 8696"/>
             </a:avLst>
           </a:prstGeom>
           <a:solidFill>
@@ -3345,8 +3345,8 @@
         </p:nvSpPr>
         <p:spPr>
           <a:xfrm>
-            <a:off x="7799832" y="1472184"/>
-            <a:ext cx="3145536" cy="256032"/>
+            <a:off x="7708392" y="1453896"/>
+            <a:ext cx="3282696" cy="228600"/>
           </a:xfrm>
           <a:prstGeom prst="rect">
             <a:avLst/>
@@ -3362,7 +3362,7 @@
               <a:buNone/>
             </a:pPr>
             <a:r>
-              <a:rPr lang="en-US" sz="1300" b="1" dirty="0">
+              <a:rPr lang="en-US" sz="1220" b="1" dirty="0">
                 <a:solidFill>
                   <a:srgbClr val="0068B7"/>
                 </a:solidFill>
@@ -3372,7 +3372,7 @@
               </a:rPr>
               <a:t>Governance lens</a:t>
             </a:r>
-            <a:endParaRPr lang="en-US" sz="1300" dirty="0"/>
+            <a:endParaRPr lang="en-US" sz="1220" dirty="0"/>
           </a:p>
         </p:txBody>
       </p:sp>
@@ -3384,8 +3384,8 @@
         </p:nvSpPr>
         <p:spPr>
           <a:xfrm>
-            <a:off x="7799832" y="1801368"/>
-            <a:ext cx="3145536" cy="640080"/>
+            <a:off x="7708392" y="1764792"/>
+            <a:ext cx="3282696" cy="749808"/>
           </a:xfrm>
           <a:prstGeom prst="rect">
             <a:avLst/>
@@ -3403,7 +3403,7 @@
               <a:buNone/>
             </a:pPr>
             <a:r>
-              <a:rPr lang="en-US" sz="1320" dirty="0">
+              <a:rPr lang="en-US" sz="1220" dirty="0">
                 <a:solidFill>
                   <a:srgbClr val="17364A"/>
                 </a:solidFill>
@@ -3413,7 +3413,7 @@
               </a:rPr>
               <a:t>A useful portfolio strategy begins with categories.</a:t>
             </a:r>
-            <a:endParaRPr lang="en-US" sz="1320" dirty="0"/>
+            <a:endParaRPr lang="en-US" sz="1220" dirty="0"/>
           </a:p>
         </p:txBody>
       </p:sp>
@@ -3425,12 +3425,12 @@
         </p:nvSpPr>
         <p:spPr>
           <a:xfrm>
-            <a:off x="7635240" y="2670048"/>
-            <a:ext cx="3474720" cy="1377086"/>
+            <a:off x="7543800" y="2724912"/>
+            <a:ext cx="3611880" cy="1527048"/>
           </a:xfrm>
           <a:prstGeom prst="roundRect">
             <a:avLst>
-              <a:gd name="adj" fmla="val 7968"/>
+              <a:gd name="adj" fmla="val 7186"/>
             </a:avLst>
           </a:prstGeom>
           <a:solidFill>
@@ -3452,24 +3452,26 @@
         </p:nvSpPr>
         <p:spPr>
           <a:xfrm>
-            <a:off x="7799832" y="2798064"/>
-            <a:ext cx="3145536" cy="237744"/>
-          </a:xfrm>
-          <a:prstGeom prst="rect">
-            <a:avLst/>
-          </a:prstGeom>
-          <a:noFill/>
-          <a:ln/>
-        </p:spPr>
-        <p:txBody>
-          <a:bodyPr wrap="square" lIns="0" tIns="0" rIns="0" bIns="0" rtlCol="0" anchor="ctr"/>
-          <a:lstStyle/>
-          <a:p>
-            <a:pPr indent="0" marL="0">
-              <a:buNone/>
-            </a:pPr>
-            <a:r>
-              <a:rPr lang="en-US" sz="1250" b="1" dirty="0">
+            <a:off x="7708392" y="2852928"/>
+            <a:ext cx="3282696" cy="219456"/>
+          </a:xfrm>
+          <a:prstGeom prst="rect">
+            <a:avLst/>
+          </a:prstGeom>
+          <a:noFill/>
+          <a:ln/>
+        </p:spPr>
+        <p:txBody>
+          <a:bodyPr wrap="square" lIns="0" tIns="0" rIns="0" bIns="0" rtlCol="0" anchor="ctr">
+            <a:normAutofit/>
+          </a:bodyPr>
+          <a:lstStyle/>
+          <a:p>
+            <a:pPr indent="0" marL="0">
+              <a:buNone/>
+            </a:pPr>
+            <a:r>
+              <a:rPr lang="en-US" sz="1160" b="1" dirty="0">
                 <a:solidFill>
                   <a:srgbClr val="0068B7"/>
                 </a:solidFill>
@@ -3479,7 +3481,7 @@
               </a:rPr>
               <a:t>Governance pathway</a:t>
             </a:r>
-            <a:endParaRPr lang="en-US" sz="1250" dirty="0"/>
+            <a:endParaRPr lang="en-US" sz="1160" dirty="0"/>
           </a:p>
         </p:txBody>
       </p:sp>
@@ -3491,7 +3493,7 @@
         </p:nvSpPr>
         <p:spPr>
           <a:xfrm>
-            <a:off x="8763000" y="3351276"/>
+            <a:off x="8717280" y="3406140"/>
             <a:ext cx="164592" cy="0"/>
           </a:xfrm>
           <a:prstGeom prst="line">
@@ -3514,8 +3516,8 @@
         </p:nvSpPr>
         <p:spPr>
           <a:xfrm>
-            <a:off x="7872984" y="3200400"/>
-            <a:ext cx="890016" cy="301752"/>
+            <a:off x="7781544" y="3255264"/>
+            <a:ext cx="935736" cy="301752"/>
           </a:xfrm>
           <a:prstGeom prst="roundRect">
             <a:avLst>
@@ -3541,8 +3543,8 @@
         </p:nvSpPr>
         <p:spPr>
           <a:xfrm>
-            <a:off x="7909560" y="3273552"/>
-            <a:ext cx="816864" cy="146304"/>
+            <a:off x="7818120" y="3328416"/>
+            <a:ext cx="862584" cy="146304"/>
           </a:xfrm>
           <a:prstGeom prst="rect">
             <a:avLst/>
@@ -3582,7 +3584,7 @@
         </p:nvSpPr>
         <p:spPr>
           <a:xfrm>
-            <a:off x="9817608" y="3351276"/>
+            <a:off x="9817608" y="3406140"/>
             <a:ext cx="164592" cy="0"/>
           </a:xfrm>
           <a:prstGeom prst="line">
@@ -3605,8 +3607,8 @@
         </p:nvSpPr>
         <p:spPr>
           <a:xfrm>
-            <a:off x="8927592" y="3200400"/>
-            <a:ext cx="890016" cy="301752"/>
+            <a:off x="8881872" y="3255264"/>
+            <a:ext cx="935736" cy="301752"/>
           </a:xfrm>
           <a:prstGeom prst="roundRect">
             <a:avLst>
@@ -3632,8 +3634,8 @@
         </p:nvSpPr>
         <p:spPr>
           <a:xfrm>
-            <a:off x="8964168" y="3273552"/>
-            <a:ext cx="816864" cy="146304"/>
+            <a:off x="8918448" y="3328416"/>
+            <a:ext cx="862584" cy="146304"/>
           </a:xfrm>
           <a:prstGeom prst="rect">
             <a:avLst/>
@@ -3673,8 +3675,8 @@
         </p:nvSpPr>
         <p:spPr>
           <a:xfrm>
-            <a:off x="9982200" y="3200400"/>
-            <a:ext cx="890016" cy="301752"/>
+            <a:off x="9982200" y="3255264"/>
+            <a:ext cx="935736" cy="301752"/>
           </a:xfrm>
           <a:prstGeom prst="roundRect">
             <a:avLst>
@@ -3700,8 +3702,8 @@
         </p:nvSpPr>
         <p:spPr>
           <a:xfrm>
-            <a:off x="10018776" y="3273552"/>
-            <a:ext cx="816864" cy="146304"/>
+            <a:off x="10018776" y="3328416"/>
+            <a:ext cx="862584" cy="146304"/>
           </a:xfrm>
           <a:prstGeom prst="rect">
             <a:avLst/>
@@ -3741,8 +3743,8 @@
         </p:nvSpPr>
         <p:spPr>
           <a:xfrm>
-            <a:off x="7854696" y="3694176"/>
-            <a:ext cx="3035808" cy="206654"/>
+            <a:off x="7763256" y="3749040"/>
+            <a:ext cx="3172968" cy="356616"/>
           </a:xfrm>
           <a:prstGeom prst="rect">
             <a:avLst/>
@@ -3760,7 +3762,7 @@
               <a:buNone/>
             </a:pPr>
             <a:r>
-              <a:rPr lang="en-US" sz="1120" dirty="0">
+              <a:rPr lang="en-US" sz="1040" dirty="0">
                 <a:solidFill>
                   <a:srgbClr val="17364A"/>
                 </a:solidFill>
@@ -3768,9 +3770,9 @@
                 <a:ea typeface="Aptos" pitchFamily="34" charset="-122"/>
                 <a:cs typeface="Aptos" pitchFamily="34" charset="-120"/>
               </a:rPr>
-              <a:t>A proposed AI use should move through documented review before it becomes an operational workflow.</a:t>
-            </a:r>
-            <a:endParaRPr lang="en-US" sz="1120" dirty="0"/>
+              <a:t>A proposed AI use should move through documented review before it.</a:t>
+            </a:r>
+            <a:endParaRPr lang="en-US" sz="1040" dirty="0"/>
           </a:p>
         </p:txBody>
       </p:sp>
@@ -3782,12 +3784,12 @@
         </p:nvSpPr>
         <p:spPr>
           <a:xfrm>
-            <a:off x="7635240" y="4184294"/>
-            <a:ext cx="3474720" cy="1466698"/>
+            <a:off x="7543800" y="4389120"/>
+            <a:ext cx="3611880" cy="1261872"/>
           </a:xfrm>
           <a:prstGeom prst="roundRect">
             <a:avLst>
-              <a:gd name="adj" fmla="val 7481"/>
+              <a:gd name="adj" fmla="val 8696"/>
             </a:avLst>
           </a:prstGeom>
           <a:solidFill>
@@ -3809,8 +3811,8 @@
         </p:nvSpPr>
         <p:spPr>
           <a:xfrm>
-            <a:off x="7799832" y="4330598"/>
-            <a:ext cx="3145536" cy="256032"/>
+            <a:off x="7708392" y="4517136"/>
+            <a:ext cx="3282696" cy="228600"/>
           </a:xfrm>
           <a:prstGeom prst="rect">
             <a:avLst/>
@@ -3826,7 +3828,7 @@
               <a:buNone/>
             </a:pPr>
             <a:r>
-              <a:rPr lang="en-US" sz="1300" b="1" dirty="0">
+              <a:rPr lang="en-US" sz="1220" b="1" dirty="0">
                 <a:solidFill>
                   <a:srgbClr val="0068B7"/>
                 </a:solidFill>
@@ -3836,7 +3838,7 @@
               </a:rPr>
               <a:t>What to document</a:t>
             </a:r>
-            <a:endParaRPr lang="en-US" sz="1300" dirty="0"/>
+            <a:endParaRPr lang="en-US" sz="1220" dirty="0"/>
           </a:p>
         </p:txBody>
       </p:sp>
@@ -3848,8 +3850,8 @@
         </p:nvSpPr>
         <p:spPr>
           <a:xfrm>
-            <a:off x="7799832" y="4659782"/>
-            <a:ext cx="3145536" cy="899770"/>
+            <a:off x="7708392" y="4828032"/>
+            <a:ext cx="3282696" cy="749808"/>
           </a:xfrm>
           <a:prstGeom prst="rect">
             <a:avLst/>
@@ -3867,7 +3869,7 @@
               <a:buNone/>
             </a:pPr>
             <a:r>
-              <a:rPr lang="en-US" sz="1320" dirty="0">
+              <a:rPr lang="en-US" sz="1220" dirty="0">
                 <a:solidFill>
                   <a:srgbClr val="17364A"/>
                 </a:solidFill>
@@ -3875,9 +3877,9 @@
                 <a:ea typeface="Aptos" pitchFamily="34" charset="-122"/>
                 <a:cs typeface="Aptos" pitchFamily="34" charset="-120"/>
               </a:rPr>
-              <a:t>Translate this concept into clear decision rights, review steps, documentation expectations, and escalation paths before an AI-supported workflow is approved.</a:t>
-            </a:r>
-            <a:endParaRPr lang="en-US" sz="1320" dirty="0"/>
+              <a:t>Translate this concept into clear decision rights, review steps, documentation.</a:t>
+            </a:r>
+            <a:endParaRPr lang="en-US" sz="1220" dirty="0"/>
           </a:p>
         </p:txBody>
       </p:sp>
@@ -4168,8 +4170,8 @@
         </p:nvSpPr>
         <p:spPr>
           <a:xfrm>
-            <a:off x="868680" y="1508760"/>
-            <a:ext cx="6309360" cy="4160520"/>
+            <a:off x="822960" y="1463040"/>
+            <a:ext cx="6565392" cy="4343400"/>
           </a:xfrm>
           <a:prstGeom prst="rect">
             <a:avLst/>
@@ -4187,7 +4189,7 @@
               <a:buNone/>
             </a:pPr>
             <a:r>
-              <a:rPr lang="en-US" sz="2100" dirty="0">
+              <a:rPr lang="en-US" sz="1920" dirty="0">
                 <a:solidFill>
                   <a:srgbClr val="003A63"/>
                 </a:solidFill>
@@ -4197,14 +4199,14 @@
               </a:rPr>
               <a:t>• A major risk is pilot proliferation.</a:t>
             </a:r>
-            <a:endParaRPr lang="en-US" sz="2100" dirty="0"/>
-          </a:p>
-          <a:p>
-            <a:pPr indent="0" marL="0">
-              <a:buNone/>
-            </a:pPr>
-            <a:r>
-              <a:rPr lang="en-US" sz="2100" dirty="0">
+            <a:endParaRPr lang="en-US" sz="1920" dirty="0"/>
+          </a:p>
+          <a:p>
+            <a:pPr indent="0" marL="0">
+              <a:buNone/>
+            </a:pPr>
+            <a:r>
+              <a:rPr lang="en-US" sz="1920" dirty="0">
                 <a:solidFill>
                   <a:srgbClr val="003A63"/>
                 </a:solidFill>
@@ -4212,16 +4214,16 @@
                 <a:ea typeface="Aptos" pitchFamily="34" charset="-122"/>
                 <a:cs typeface="Aptos" pitchFamily="34" charset="-120"/>
               </a:rPr>
-              <a:t>• Agencies may launch many small AI pilots without a pathway to scale, evaluate, sustain, or.</a:t>
-            </a:r>
-            <a:endParaRPr lang="en-US" sz="2100" dirty="0"/>
-          </a:p>
-          <a:p>
-            <a:pPr indent="0" marL="0">
-              <a:buNone/>
-            </a:pPr>
-            <a:r>
-              <a:rPr lang="en-US" sz="2100" dirty="0">
+              <a:t>• Agencies may launch many small AI pilots without a pathway to scale,.</a:t>
+            </a:r>
+            <a:endParaRPr lang="en-US" sz="1920" dirty="0"/>
+          </a:p>
+          <a:p>
+            <a:pPr indent="0" marL="0">
+              <a:buNone/>
+            </a:pPr>
+            <a:r>
+              <a:rPr lang="en-US" sz="1920" dirty="0">
                 <a:solidFill>
                   <a:srgbClr val="003A63"/>
                 </a:solidFill>
@@ -4229,9 +4231,9 @@
                 <a:ea typeface="Aptos" pitchFamily="34" charset="-122"/>
                 <a:cs typeface="Aptos" pitchFamily="34" charset="-120"/>
               </a:rPr>
-              <a:t>• A guardrail is to require every pilot to define success criteria, evaluation evidence, funding.</a:t>
-            </a:r>
-            <a:endParaRPr lang="en-US" sz="2100" dirty="0"/>
+              <a:t>• A guardrail is to require every pilot to define success criteria, evaluation.</a:t>
+            </a:r>
+            <a:endParaRPr lang="en-US" sz="1920" dirty="0"/>
           </a:p>
         </p:txBody>
       </p:sp>
@@ -4243,12 +4245,12 @@
         </p:nvSpPr>
         <p:spPr>
           <a:xfrm>
-            <a:off x="7635240" y="1325880"/>
-            <a:ext cx="3474720" cy="1207008"/>
+            <a:off x="7543800" y="1325880"/>
+            <a:ext cx="3611880" cy="1261872"/>
           </a:xfrm>
           <a:prstGeom prst="roundRect">
             <a:avLst>
-              <a:gd name="adj" fmla="val 9091"/>
+              <a:gd name="adj" fmla="val 8696"/>
             </a:avLst>
           </a:prstGeom>
           <a:solidFill>
@@ -4270,8 +4272,8 @@
         </p:nvSpPr>
         <p:spPr>
           <a:xfrm>
-            <a:off x="7799832" y="1472184"/>
-            <a:ext cx="3145536" cy="256032"/>
+            <a:off x="7708392" y="1453896"/>
+            <a:ext cx="3282696" cy="228600"/>
           </a:xfrm>
           <a:prstGeom prst="rect">
             <a:avLst/>
@@ -4287,7 +4289,7 @@
               <a:buNone/>
             </a:pPr>
             <a:r>
-              <a:rPr lang="en-US" sz="1300" b="1" dirty="0">
+              <a:rPr lang="en-US" sz="1220" b="1" dirty="0">
                 <a:solidFill>
                   <a:srgbClr val="0068B7"/>
                 </a:solidFill>
@@ -4297,7 +4299,7 @@
               </a:rPr>
               <a:t>Risk check</a:t>
             </a:r>
-            <a:endParaRPr lang="en-US" sz="1300" dirty="0"/>
+            <a:endParaRPr lang="en-US" sz="1220" dirty="0"/>
           </a:p>
         </p:txBody>
       </p:sp>
@@ -4309,8 +4311,8 @@
         </p:nvSpPr>
         <p:spPr>
           <a:xfrm>
-            <a:off x="7799832" y="1801368"/>
-            <a:ext cx="3145536" cy="640080"/>
+            <a:off x="7708392" y="1764792"/>
+            <a:ext cx="3282696" cy="749808"/>
           </a:xfrm>
           <a:prstGeom prst="rect">
             <a:avLst/>
@@ -4328,7 +4330,7 @@
               <a:buNone/>
             </a:pPr>
             <a:r>
-              <a:rPr lang="en-US" sz="1320" dirty="0">
+              <a:rPr lang="en-US" sz="1220" dirty="0">
                 <a:solidFill>
                   <a:srgbClr val="17364A"/>
                 </a:solidFill>
@@ -4338,7 +4340,7 @@
               </a:rPr>
               <a:t>A major risk is pilot proliferation.</a:t>
             </a:r>
-            <a:endParaRPr lang="en-US" sz="1320" dirty="0"/>
+            <a:endParaRPr lang="en-US" sz="1220" dirty="0"/>
           </a:p>
         </p:txBody>
       </p:sp>
@@ -4350,12 +4352,12 @@
         </p:nvSpPr>
         <p:spPr>
           <a:xfrm>
-            <a:off x="7635240" y="2670048"/>
-            <a:ext cx="3474720" cy="1536192"/>
+            <a:off x="7543800" y="2724912"/>
+            <a:ext cx="3611880" cy="1527048"/>
           </a:xfrm>
           <a:prstGeom prst="roundRect">
             <a:avLst>
-              <a:gd name="adj" fmla="val 7143"/>
+              <a:gd name="adj" fmla="val 7186"/>
             </a:avLst>
           </a:prstGeom>
           <a:solidFill>
@@ -4377,24 +4379,26 @@
         </p:nvSpPr>
         <p:spPr>
           <a:xfrm>
-            <a:off x="7799832" y="2798064"/>
-            <a:ext cx="3145536" cy="237744"/>
-          </a:xfrm>
-          <a:prstGeom prst="rect">
-            <a:avLst/>
-          </a:prstGeom>
-          <a:noFill/>
-          <a:ln/>
-        </p:spPr>
-        <p:txBody>
-          <a:bodyPr wrap="square" lIns="0" tIns="0" rIns="0" bIns="0" rtlCol="0" anchor="ctr"/>
-          <a:lstStyle/>
-          <a:p>
-            <a:pPr indent="0" marL="0">
-              <a:buNone/>
-            </a:pPr>
-            <a:r>
-              <a:rPr lang="en-US" sz="1250" b="1" dirty="0">
+            <a:off x="7708392" y="2852928"/>
+            <a:ext cx="3282696" cy="219456"/>
+          </a:xfrm>
+          <a:prstGeom prst="rect">
+            <a:avLst/>
+          </a:prstGeom>
+          <a:noFill/>
+          <a:ln/>
+        </p:spPr>
+        <p:txBody>
+          <a:bodyPr wrap="square" lIns="0" tIns="0" rIns="0" bIns="0" rtlCol="0" anchor="ctr">
+            <a:normAutofit/>
+          </a:bodyPr>
+          <a:lstStyle/>
+          <a:p>
+            <a:pPr indent="0" marL="0">
+              <a:buNone/>
+            </a:pPr>
+            <a:r>
+              <a:rPr lang="en-US" sz="1160" b="1" dirty="0">
                 <a:solidFill>
                   <a:srgbClr val="0068B7"/>
                 </a:solidFill>
@@ -4404,7 +4408,7 @@
               </a:rPr>
               <a:t>Risk control loop</a:t>
             </a:r>
-            <a:endParaRPr lang="en-US" sz="1250" dirty="0"/>
+            <a:endParaRPr lang="en-US" sz="1160" dirty="0"/>
           </a:p>
         </p:txBody>
       </p:sp>
@@ -4416,7 +4420,7 @@
         </p:nvSpPr>
         <p:spPr>
           <a:xfrm>
-            <a:off x="8763000" y="3351276"/>
+            <a:off x="8717280" y="3406140"/>
             <a:ext cx="164592" cy="0"/>
           </a:xfrm>
           <a:prstGeom prst="line">
@@ -4439,8 +4443,8 @@
         </p:nvSpPr>
         <p:spPr>
           <a:xfrm>
-            <a:off x="7872984" y="3200400"/>
-            <a:ext cx="890016" cy="301752"/>
+            <a:off x="7781544" y="3255264"/>
+            <a:ext cx="935736" cy="301752"/>
           </a:xfrm>
           <a:prstGeom prst="roundRect">
             <a:avLst>
@@ -4466,8 +4470,8 @@
         </p:nvSpPr>
         <p:spPr>
           <a:xfrm>
-            <a:off x="7909560" y="3273552"/>
-            <a:ext cx="816864" cy="146304"/>
+            <a:off x="7818120" y="3328416"/>
+            <a:ext cx="862584" cy="146304"/>
           </a:xfrm>
           <a:prstGeom prst="rect">
             <a:avLst/>
@@ -4507,7 +4511,7 @@
         </p:nvSpPr>
         <p:spPr>
           <a:xfrm>
-            <a:off x="9817608" y="3351276"/>
+            <a:off x="9817608" y="3406140"/>
             <a:ext cx="164592" cy="0"/>
           </a:xfrm>
           <a:prstGeom prst="line">
@@ -4530,8 +4534,8 @@
         </p:nvSpPr>
         <p:spPr>
           <a:xfrm>
-            <a:off x="8927592" y="3200400"/>
-            <a:ext cx="890016" cy="301752"/>
+            <a:off x="8881872" y="3255264"/>
+            <a:ext cx="935736" cy="301752"/>
           </a:xfrm>
           <a:prstGeom prst="roundRect">
             <a:avLst>
@@ -4557,8 +4561,8 @@
         </p:nvSpPr>
         <p:spPr>
           <a:xfrm>
-            <a:off x="8964168" y="3273552"/>
-            <a:ext cx="816864" cy="146304"/>
+            <a:off x="8918448" y="3328416"/>
+            <a:ext cx="862584" cy="146304"/>
           </a:xfrm>
           <a:prstGeom prst="rect">
             <a:avLst/>
@@ -4598,8 +4602,8 @@
         </p:nvSpPr>
         <p:spPr>
           <a:xfrm>
-            <a:off x="9982200" y="3200400"/>
-            <a:ext cx="890016" cy="301752"/>
+            <a:off x="9982200" y="3255264"/>
+            <a:ext cx="935736" cy="301752"/>
           </a:xfrm>
           <a:prstGeom prst="roundRect">
             <a:avLst>
@@ -4625,8 +4629,8 @@
         </p:nvSpPr>
         <p:spPr>
           <a:xfrm>
-            <a:off x="10018776" y="3273552"/>
-            <a:ext cx="816864" cy="146304"/>
+            <a:off x="10018776" y="3328416"/>
+            <a:ext cx="862584" cy="146304"/>
           </a:xfrm>
           <a:prstGeom prst="rect">
             <a:avLst/>
@@ -4666,8 +4670,8 @@
         </p:nvSpPr>
         <p:spPr>
           <a:xfrm>
-            <a:off x="7854696" y="3694176"/>
-            <a:ext cx="3035808" cy="365760"/>
+            <a:off x="7763256" y="3749040"/>
+            <a:ext cx="3172968" cy="356616"/>
           </a:xfrm>
           <a:prstGeom prst="rect">
             <a:avLst/>
@@ -4685,7 +4689,7 @@
               <a:buNone/>
             </a:pPr>
             <a:r>
-              <a:rPr lang="en-US" sz="1120" dirty="0">
+              <a:rPr lang="en-US" sz="1040" dirty="0">
                 <a:solidFill>
                   <a:srgbClr val="17364A"/>
                 </a:solidFill>
@@ -4693,9 +4697,9 @@
                 <a:ea typeface="Aptos" pitchFamily="34" charset="-122"/>
                 <a:cs typeface="Aptos" pitchFamily="34" charset="-120"/>
               </a:rPr>
-              <a:t>Responsible use depends on finding risks early, applying safeguards, and watching for drift or harm over time.</a:t>
-            </a:r>
-            <a:endParaRPr lang="en-US" sz="1120" dirty="0"/>
+              <a:t>Responsible use depends on finding risks early, applying safeguards,.</a:t>
+            </a:r>
+            <a:endParaRPr lang="en-US" sz="1040" dirty="0"/>
           </a:p>
         </p:txBody>
       </p:sp>
@@ -4707,12 +4711,12 @@
         </p:nvSpPr>
         <p:spPr>
           <a:xfrm>
-            <a:off x="7635240" y="4343400"/>
-            <a:ext cx="3474720" cy="1255471"/>
+            <a:off x="7543800" y="4389120"/>
+            <a:ext cx="3611880" cy="1261872"/>
           </a:xfrm>
           <a:prstGeom prst="roundRect">
             <a:avLst>
-              <a:gd name="adj" fmla="val 8740"/>
+              <a:gd name="adj" fmla="val 8696"/>
             </a:avLst>
           </a:prstGeom>
           <a:solidFill>
@@ -4734,8 +4738,8 @@
         </p:nvSpPr>
         <p:spPr>
           <a:xfrm>
-            <a:off x="7799832" y="4489704"/>
-            <a:ext cx="3145536" cy="256032"/>
+            <a:off x="7708392" y="4517136"/>
+            <a:ext cx="3282696" cy="228600"/>
           </a:xfrm>
           <a:prstGeom prst="rect">
             <a:avLst/>
@@ -4751,7 +4755,7 @@
               <a:buNone/>
             </a:pPr>
             <a:r>
-              <a:rPr lang="en-US" sz="1300" b="1" dirty="0">
+              <a:rPr lang="en-US" sz="1220" b="1" dirty="0">
                 <a:solidFill>
                   <a:srgbClr val="0068B7"/>
                 </a:solidFill>
@@ -4761,7 +4765,7 @@
               </a:rPr>
               <a:t>Safeguard to plan</a:t>
             </a:r>
-            <a:endParaRPr lang="en-US" sz="1300" dirty="0"/>
+            <a:endParaRPr lang="en-US" sz="1220" dirty="0"/>
           </a:p>
         </p:txBody>
       </p:sp>
@@ -4773,8 +4777,8 @@
         </p:nvSpPr>
         <p:spPr>
           <a:xfrm>
-            <a:off x="7799832" y="4818888"/>
-            <a:ext cx="3145536" cy="688543"/>
+            <a:off x="7708392" y="4828032"/>
+            <a:ext cx="3282696" cy="749808"/>
           </a:xfrm>
           <a:prstGeom prst="rect">
             <a:avLst/>
@@ -4792,7 +4796,7 @@
               <a:buNone/>
             </a:pPr>
             <a:r>
-              <a:rPr lang="en-US" sz="1320" dirty="0">
+              <a:rPr lang="en-US" sz="1220" dirty="0">
                 <a:solidFill>
                   <a:srgbClr val="17364A"/>
                 </a:solidFill>
@@ -4800,9 +4804,9 @@
                 <a:ea typeface="Aptos" pitchFamily="34" charset="-122"/>
                 <a:cs typeface="Aptos" pitchFamily="34" charset="-120"/>
               </a:rPr>
-              <a:t>Identify what could go wrong, who could be affected, what safeguards are needed, and what evidence should be reviewed before use.</a:t>
-            </a:r>
-            <a:endParaRPr lang="en-US" sz="1320" dirty="0"/>
+              <a:t>Identify what could go wrong, who could be affected, what safeguards are needed,.</a:t>
+            </a:r>
+            <a:endParaRPr lang="en-US" sz="1220" dirty="0"/>
           </a:p>
         </p:txBody>
       </p:sp>
@@ -5093,8 +5097,8 @@
         </p:nvSpPr>
         <p:spPr>
           <a:xfrm>
-            <a:off x="868680" y="1508760"/>
-            <a:ext cx="6309360" cy="4160520"/>
+            <a:off x="822960" y="1463040"/>
+            <a:ext cx="6565392" cy="4343400"/>
           </a:xfrm>
           <a:prstGeom prst="rect">
             <a:avLst/>
@@ -5112,7 +5116,7 @@
               <a:buNone/>
             </a:pPr>
             <a:r>
-              <a:rPr lang="en-US" sz="2100" dirty="0">
+              <a:rPr lang="en-US" sz="1920" dirty="0">
                 <a:solidFill>
                   <a:srgbClr val="003A63"/>
                 </a:solidFill>
@@ -5120,16 +5124,16 @@
                 <a:ea typeface="Aptos" pitchFamily="34" charset="-122"/>
                 <a:cs typeface="Aptos" pitchFamily="34" charset="-120"/>
               </a:rPr>
-              <a:t>• Generative AI projects may be prioritized for internal knowledge management before.</a:t>
-            </a:r>
-            <a:endParaRPr lang="en-US" sz="2100" dirty="0"/>
-          </a:p>
-          <a:p>
-            <a:pPr indent="0" marL="0">
-              <a:buNone/>
-            </a:pPr>
-            <a:r>
-              <a:rPr lang="en-US" sz="2100" dirty="0">
+              <a:t>• Generative AI projects may be prioritized for internal knowledge management.</a:t>
+            </a:r>
+            <a:endParaRPr lang="en-US" sz="1920" dirty="0"/>
+          </a:p>
+          <a:p>
+            <a:pPr indent="0" marL="0">
+              <a:buNone/>
+            </a:pPr>
+            <a:r>
+              <a:rPr lang="en-US" sz="1920" dirty="0">
                 <a:solidFill>
                   <a:srgbClr val="003A63"/>
                 </a:solidFill>
@@ -5137,16 +5141,16 @@
                 <a:ea typeface="Aptos" pitchFamily="34" charset="-122"/>
                 <a:cs typeface="Aptos" pitchFamily="34" charset="-120"/>
               </a:rPr>
-              <a:t>• Predictive analytics projects may be prioritized only when data and validation plans are mature.</a:t>
-            </a:r>
-            <a:endParaRPr lang="en-US" sz="2100" dirty="0"/>
-          </a:p>
-          <a:p>
-            <a:pPr indent="0" marL="0">
-              <a:buNone/>
-            </a:pPr>
-            <a:r>
-              <a:rPr lang="en-US" sz="2100" dirty="0">
+              <a:t>• Predictive analytics projects may be prioritized only when data and.</a:t>
+            </a:r>
+            <a:endParaRPr lang="en-US" sz="1920" dirty="0"/>
+          </a:p>
+          <a:p>
+            <a:pPr indent="0" marL="0">
+              <a:buNone/>
+            </a:pPr>
+            <a:r>
+              <a:rPr lang="en-US" sz="1920" dirty="0">
                 <a:solidFill>
                   <a:srgbClr val="003A63"/>
                 </a:solidFill>
@@ -5154,9 +5158,9 @@
                 <a:ea typeface="Aptos" pitchFamily="34" charset="-122"/>
                 <a:cs typeface="Aptos" pitchFamily="34" charset="-120"/>
               </a:rPr>
-              <a:t>• Agentic workflows may be deferred until governance has defined decision rights, access.</a:t>
-            </a:r>
-            <a:endParaRPr lang="en-US" sz="2100" dirty="0"/>
+              <a:t>• Agentic workflows may be deferred until governance has defined decision.</a:t>
+            </a:r>
+            <a:endParaRPr lang="en-US" sz="1920" dirty="0"/>
           </a:p>
         </p:txBody>
       </p:sp>
@@ -5168,12 +5172,12 @@
         </p:nvSpPr>
         <p:spPr>
           <a:xfrm>
-            <a:off x="7635240" y="1325880"/>
-            <a:ext cx="3474720" cy="1255471"/>
+            <a:off x="7543800" y="1325880"/>
+            <a:ext cx="3611880" cy="1261872"/>
           </a:xfrm>
           <a:prstGeom prst="roundRect">
             <a:avLst>
-              <a:gd name="adj" fmla="val 8740"/>
+              <a:gd name="adj" fmla="val 8696"/>
             </a:avLst>
           </a:prstGeom>
           <a:solidFill>
@@ -5195,8 +5199,8 @@
         </p:nvSpPr>
         <p:spPr>
           <a:xfrm>
-            <a:off x="7799832" y="1472184"/>
-            <a:ext cx="3145536" cy="256032"/>
+            <a:off x="7708392" y="1453896"/>
+            <a:ext cx="3282696" cy="228600"/>
           </a:xfrm>
           <a:prstGeom prst="rect">
             <a:avLst/>
@@ -5212,7 +5216,7 @@
               <a:buNone/>
             </a:pPr>
             <a:r>
-              <a:rPr lang="en-US" sz="1300" b="1" dirty="0">
+              <a:rPr lang="en-US" sz="1220" b="1" dirty="0">
                 <a:solidFill>
                   <a:srgbClr val="0068B7"/>
                 </a:solidFill>
@@ -5222,7 +5226,7 @@
               </a:rPr>
               <a:t>Implementation cue</a:t>
             </a:r>
-            <a:endParaRPr lang="en-US" sz="1300" dirty="0"/>
+            <a:endParaRPr lang="en-US" sz="1220" dirty="0"/>
           </a:p>
         </p:txBody>
       </p:sp>
@@ -5234,8 +5238,8 @@
         </p:nvSpPr>
         <p:spPr>
           <a:xfrm>
-            <a:off x="7799832" y="1801368"/>
-            <a:ext cx="3145536" cy="688543"/>
+            <a:off x="7708392" y="1764792"/>
+            <a:ext cx="3282696" cy="749808"/>
           </a:xfrm>
           <a:prstGeom prst="rect">
             <a:avLst/>
@@ -5253,7 +5257,7 @@
               <a:buNone/>
             </a:pPr>
             <a:r>
-              <a:rPr lang="en-US" sz="1320" dirty="0">
+              <a:rPr lang="en-US" sz="1220" dirty="0">
                 <a:solidFill>
                   <a:srgbClr val="17364A"/>
                 </a:solidFill>
@@ -5261,9 +5265,9 @@
                 <a:ea typeface="Aptos" pitchFamily="34" charset="-122"/>
                 <a:cs typeface="Aptos" pitchFamily="34" charset="-120"/>
               </a:rPr>
-              <a:t>Generative AI projects may be prioritized for internal knowledge management before public-facing use.</a:t>
-            </a:r>
-            <a:endParaRPr lang="en-US" sz="1320" dirty="0"/>
+              <a:t>Generative AI projects may be prioritized for internal knowledge management.</a:t>
+            </a:r>
+            <a:endParaRPr lang="en-US" sz="1220" dirty="0"/>
           </a:p>
         </p:txBody>
       </p:sp>
@@ -5275,12 +5279,12 @@
         </p:nvSpPr>
         <p:spPr>
           <a:xfrm>
-            <a:off x="7635240" y="2718511"/>
-            <a:ext cx="3474720" cy="1328623"/>
+            <a:off x="7543800" y="2724912"/>
+            <a:ext cx="3611880" cy="1527048"/>
           </a:xfrm>
           <a:prstGeom prst="roundRect">
             <a:avLst>
-              <a:gd name="adj" fmla="val 8259"/>
+              <a:gd name="adj" fmla="val 7186"/>
             </a:avLst>
           </a:prstGeom>
           <a:solidFill>
@@ -5302,8 +5306,8 @@
         </p:nvSpPr>
         <p:spPr>
           <a:xfrm>
-            <a:off x="7799832" y="2864815"/>
-            <a:ext cx="3145536" cy="256032"/>
+            <a:off x="7708392" y="2852928"/>
+            <a:ext cx="3282696" cy="228600"/>
           </a:xfrm>
           <a:prstGeom prst="rect">
             <a:avLst/>
@@ -5319,7 +5323,7 @@
               <a:buNone/>
             </a:pPr>
             <a:r>
-              <a:rPr lang="en-US" sz="1300" b="1" dirty="0">
+              <a:rPr lang="en-US" sz="1220" b="1" dirty="0">
                 <a:solidFill>
                   <a:srgbClr val="0068B7"/>
                 </a:solidFill>
@@ -5329,7 +5333,7 @@
               </a:rPr>
               <a:t>Concept checkpoints</a:t>
             </a:r>
-            <a:endParaRPr lang="en-US" sz="1300" dirty="0"/>
+            <a:endParaRPr lang="en-US" sz="1220" dirty="0"/>
           </a:p>
         </p:txBody>
       </p:sp>
@@ -5341,8 +5345,8 @@
         </p:nvSpPr>
         <p:spPr>
           <a:xfrm>
-            <a:off x="7818120" y="3230575"/>
-            <a:ext cx="3090672" cy="670255"/>
+            <a:off x="7726680" y="3182112"/>
+            <a:ext cx="3227832" cy="960120"/>
           </a:xfrm>
           <a:prstGeom prst="rect">
             <a:avLst/>
@@ -5360,7 +5364,7 @@
               <a:buNone/>
             </a:pPr>
             <a:r>
-              <a:rPr lang="en-US" sz="1220" dirty="0">
+              <a:rPr lang="en-US" sz="1140" dirty="0">
                 <a:solidFill>
                   <a:srgbClr val="17364A"/>
                 </a:solidFill>
@@ -5368,16 +5372,16 @@
                 <a:ea typeface="Aptos" pitchFamily="34" charset="-122"/>
                 <a:cs typeface="Aptos" pitchFamily="34" charset="-120"/>
               </a:rPr>
-              <a:t>Agentic workflows may be deferred until governance has defined.</a:t>
-            </a:r>
-            <a:endParaRPr lang="en-US" sz="1220" dirty="0"/>
-          </a:p>
-          <a:p>
-            <a:pPr indent="0" marL="0">
-              <a:buNone/>
-            </a:pPr>
-            <a:r>
-              <a:rPr lang="en-US" sz="1220" dirty="0">
+              <a:t>Agentic workflows may be deferred until governance.</a:t>
+            </a:r>
+            <a:endParaRPr lang="en-US" sz="1140" dirty="0"/>
+          </a:p>
+          <a:p>
+            <a:pPr indent="0" marL="0">
+              <a:buNone/>
+            </a:pPr>
+            <a:r>
+              <a:rPr lang="en-US" sz="1140" dirty="0">
                 <a:solidFill>
                   <a:srgbClr val="17364A"/>
                 </a:solidFill>
@@ -5385,9 +5389,9 @@
                 <a:ea typeface="Aptos" pitchFamily="34" charset="-122"/>
                 <a:cs typeface="Aptos" pitchFamily="34" charset="-120"/>
               </a:rPr>
-              <a:t>Portfolio strategy helps leaders sequence AI adoption responsibly.</a:t>
-            </a:r>
-            <a:endParaRPr lang="en-US" sz="1220" dirty="0"/>
+              <a:t>Portfolio strategy helps leaders sequence AI.</a:t>
+            </a:r>
+            <a:endParaRPr lang="en-US" sz="1140" dirty="0"/>
           </a:p>
         </p:txBody>
       </p:sp>
@@ -5399,12 +5403,12 @@
         </p:nvSpPr>
         <p:spPr>
           <a:xfrm>
-            <a:off x="7635240" y="4184294"/>
-            <a:ext cx="3474720" cy="1466698"/>
+            <a:off x="7543800" y="4389120"/>
+            <a:ext cx="3611880" cy="1261872"/>
           </a:xfrm>
           <a:prstGeom prst="roundRect">
             <a:avLst>
-              <a:gd name="adj" fmla="val 7481"/>
+              <a:gd name="adj" fmla="val 8696"/>
             </a:avLst>
           </a:prstGeom>
           <a:solidFill>
@@ -5426,8 +5430,8 @@
         </p:nvSpPr>
         <p:spPr>
           <a:xfrm>
-            <a:off x="7799832" y="4330598"/>
-            <a:ext cx="3145536" cy="256032"/>
+            <a:off x="7708392" y="4517136"/>
+            <a:ext cx="3282696" cy="228600"/>
           </a:xfrm>
           <a:prstGeom prst="rect">
             <a:avLst/>
@@ -5443,7 +5447,7 @@
               <a:buNone/>
             </a:pPr>
             <a:r>
-              <a:rPr lang="en-US" sz="1300" b="1" dirty="0">
+              <a:rPr lang="en-US" sz="1220" b="1" dirty="0">
                 <a:solidFill>
                   <a:srgbClr val="0068B7"/>
                 </a:solidFill>
@@ -5453,7 +5457,7 @@
               </a:rPr>
               <a:t>Next action</a:t>
             </a:r>
-            <a:endParaRPr lang="en-US" sz="1300" dirty="0"/>
+            <a:endParaRPr lang="en-US" sz="1220" dirty="0"/>
           </a:p>
         </p:txBody>
       </p:sp>
@@ -5465,8 +5469,8 @@
         </p:nvSpPr>
         <p:spPr>
           <a:xfrm>
-            <a:off x="7799832" y="4659782"/>
-            <a:ext cx="3145536" cy="899770"/>
+            <a:off x="7708392" y="4828032"/>
+            <a:ext cx="3282696" cy="749808"/>
           </a:xfrm>
           <a:prstGeom prst="rect">
             <a:avLst/>
@@ -5484,7 +5488,7 @@
               <a:buNone/>
             </a:pPr>
             <a:r>
-              <a:rPr lang="en-US" sz="1320" dirty="0">
+              <a:rPr lang="en-US" sz="1220" dirty="0">
                 <a:solidFill>
                   <a:srgbClr val="17364A"/>
                 </a:solidFill>
@@ -5492,9 +5496,9 @@
                 <a:ea typeface="Aptos" pitchFamily="34" charset="-122"/>
                 <a:cs typeface="Aptos" pitchFamily="34" charset="-120"/>
               </a:rPr>
-              <a:t>Use the concept to clarify workflow changes, dependencies, staffing, procurement requirements, training needs, and implementation checkpoints.</a:t>
-            </a:r>
-            <a:endParaRPr lang="en-US" sz="1320" dirty="0"/>
+              <a:t>Use the concept to clarify workflow changes, dependencies, staffing, procurement.</a:t>
+            </a:r>
+            <a:endParaRPr lang="en-US" sz="1220" dirty="0"/>
           </a:p>
         </p:txBody>
       </p:sp>
@@ -5785,8 +5789,8 @@
         </p:nvSpPr>
         <p:spPr>
           <a:xfrm>
-            <a:off x="868680" y="1508760"/>
-            <a:ext cx="6309360" cy="4160520"/>
+            <a:off x="822960" y="1463040"/>
+            <a:ext cx="6565392" cy="4343400"/>
           </a:xfrm>
           <a:prstGeom prst="rect">
             <a:avLst/>
@@ -5804,7 +5808,7 @@
               <a:buNone/>
             </a:pPr>
             <a:r>
-              <a:rPr lang="en-US" sz="2100" dirty="0">
+              <a:rPr lang="en-US" sz="1920" dirty="0">
                 <a:solidFill>
                   <a:srgbClr val="003A63"/>
                 </a:solidFill>
@@ -5812,16 +5816,16 @@
                 <a:ea typeface="Aptos" pitchFamily="34" charset="-122"/>
                 <a:cs typeface="Aptos" pitchFamily="34" charset="-120"/>
               </a:rPr>
-              <a:t>• Which current or proposed AI use case in your agency raises this leadership or governance.</a:t>
-            </a:r>
-            <a:endParaRPr lang="en-US" sz="2100" dirty="0"/>
-          </a:p>
-          <a:p>
-            <a:pPr indent="0" marL="0">
-              <a:buNone/>
-            </a:pPr>
-            <a:r>
-              <a:rPr lang="en-US" sz="2100" dirty="0">
+              <a:t>• Which current or proposed AI use case in your agency raises this leadership.</a:t>
+            </a:r>
+            <a:endParaRPr lang="en-US" sz="1920" dirty="0"/>
+          </a:p>
+          <a:p>
+            <a:pPr indent="0" marL="0">
+              <a:buNone/>
+            </a:pPr>
+            <a:r>
+              <a:rPr lang="en-US" sz="1920" dirty="0">
                 <a:solidFill>
                   <a:srgbClr val="003A63"/>
                 </a:solidFill>
@@ -5829,16 +5833,16 @@
                 <a:ea typeface="Aptos" pitchFamily="34" charset="-122"/>
                 <a:cs typeface="Aptos" pitchFamily="34" charset="-120"/>
               </a:rPr>
-              <a:t>• Who currently has authority to make decisions about this issue, and is that authority.</a:t>
-            </a:r>
-            <a:endParaRPr lang="en-US" sz="2100" dirty="0"/>
-          </a:p>
-          <a:p>
-            <a:pPr indent="0" marL="0">
-              <a:buNone/>
-            </a:pPr>
-            <a:r>
-              <a:rPr lang="en-US" sz="2100" dirty="0">
+              <a:t>• Who currently has authority to make decisions about this issue, and is that.</a:t>
+            </a:r>
+            <a:endParaRPr lang="en-US" sz="1920" dirty="0"/>
+          </a:p>
+          <a:p>
+            <a:pPr indent="0" marL="0">
+              <a:buNone/>
+            </a:pPr>
+            <a:r>
+              <a:rPr lang="en-US" sz="1920" dirty="0">
                 <a:solidFill>
                   <a:srgbClr val="003A63"/>
                 </a:solidFill>
@@ -5846,9 +5850,9 @@
                 <a:ea typeface="Aptos" pitchFamily="34" charset="-122"/>
                 <a:cs typeface="Aptos" pitchFamily="34" charset="-120"/>
               </a:rPr>
-              <a:t>• What evidence would governance or leadership need before approving the use case?</a:t>
-            </a:r>
-            <a:endParaRPr lang="en-US" sz="2100" dirty="0"/>
+              <a:t>• What evidence would governance or leadership need before approving the use.</a:t>
+            </a:r>
+            <a:endParaRPr lang="en-US" sz="1920" dirty="0"/>
           </a:p>
         </p:txBody>
       </p:sp>
@@ -5860,12 +5864,12 @@
         </p:nvSpPr>
         <p:spPr>
           <a:xfrm>
-            <a:off x="7635240" y="1325880"/>
-            <a:ext cx="3474720" cy="1255471"/>
+            <a:off x="7543800" y="1325880"/>
+            <a:ext cx="3611880" cy="1261872"/>
           </a:xfrm>
           <a:prstGeom prst="roundRect">
             <a:avLst>
-              <a:gd name="adj" fmla="val 8740"/>
+              <a:gd name="adj" fmla="val 8696"/>
             </a:avLst>
           </a:prstGeom>
           <a:solidFill>
@@ -5887,8 +5891,8 @@
         </p:nvSpPr>
         <p:spPr>
           <a:xfrm>
-            <a:off x="7799832" y="1472184"/>
-            <a:ext cx="3145536" cy="256032"/>
+            <a:off x="7708392" y="1453896"/>
+            <a:ext cx="3282696" cy="228600"/>
           </a:xfrm>
           <a:prstGeom prst="rect">
             <a:avLst/>
@@ -5904,7 +5908,7 @@
               <a:buNone/>
             </a:pPr>
             <a:r>
-              <a:rPr lang="en-US" sz="1300" b="1" dirty="0">
+              <a:rPr lang="en-US" sz="1220" b="1" dirty="0">
                 <a:solidFill>
                   <a:srgbClr val="0068B7"/>
                 </a:solidFill>
@@ -5914,7 +5918,7 @@
               </a:rPr>
               <a:t>Core concept</a:t>
             </a:r>
-            <a:endParaRPr lang="en-US" sz="1300" dirty="0"/>
+            <a:endParaRPr lang="en-US" sz="1220" dirty="0"/>
           </a:p>
         </p:txBody>
       </p:sp>
@@ -5926,8 +5930,8 @@
         </p:nvSpPr>
         <p:spPr>
           <a:xfrm>
-            <a:off x="7799832" y="1801368"/>
-            <a:ext cx="3145536" cy="688543"/>
+            <a:off x="7708392" y="1764792"/>
+            <a:ext cx="3282696" cy="749808"/>
           </a:xfrm>
           <a:prstGeom prst="rect">
             <a:avLst/>
@@ -5945,7 +5949,7 @@
               <a:buNone/>
             </a:pPr>
             <a:r>
-              <a:rPr lang="en-US" sz="1320" dirty="0">
+              <a:rPr lang="en-US" sz="1220" dirty="0">
                 <a:solidFill>
                   <a:srgbClr val="17364A"/>
                 </a:solidFill>
@@ -5953,9 +5957,9 @@
                 <a:ea typeface="Aptos" pitchFamily="34" charset="-122"/>
                 <a:cs typeface="Aptos" pitchFamily="34" charset="-120"/>
               </a:rPr>
-              <a:t>Which current or proposed AI use case in your agency raises this leadership or governance issue most.</a:t>
-            </a:r>
-            <a:endParaRPr lang="en-US" sz="1320" dirty="0"/>
+              <a:t>Which current or proposed AI use case in your agency raises this leadership or.</a:t>
+            </a:r>
+            <a:endParaRPr lang="en-US" sz="1220" dirty="0"/>
           </a:p>
         </p:txBody>
       </p:sp>
@@ -5967,12 +5971,12 @@
         </p:nvSpPr>
         <p:spPr>
           <a:xfrm>
-            <a:off x="7635240" y="2718511"/>
-            <a:ext cx="3474720" cy="1328623"/>
+            <a:off x="7543800" y="2724912"/>
+            <a:ext cx="3611880" cy="1527048"/>
           </a:xfrm>
           <a:prstGeom prst="roundRect">
             <a:avLst>
-              <a:gd name="adj" fmla="val 8259"/>
+              <a:gd name="adj" fmla="val 7186"/>
             </a:avLst>
           </a:prstGeom>
           <a:solidFill>
@@ -5994,8 +5998,8 @@
         </p:nvSpPr>
         <p:spPr>
           <a:xfrm>
-            <a:off x="7799832" y="2864815"/>
-            <a:ext cx="3145536" cy="256032"/>
+            <a:off x="7708392" y="2852928"/>
+            <a:ext cx="3282696" cy="228600"/>
           </a:xfrm>
           <a:prstGeom prst="rect">
             <a:avLst/>
@@ -6011,7 +6015,7 @@
               <a:buNone/>
             </a:pPr>
             <a:r>
-              <a:rPr lang="en-US" sz="1300" b="1" dirty="0">
+              <a:rPr lang="en-US" sz="1220" b="1" dirty="0">
                 <a:solidFill>
                   <a:srgbClr val="0068B7"/>
                 </a:solidFill>
@@ -6021,7 +6025,7 @@
               </a:rPr>
               <a:t>Concept checkpoints</a:t>
             </a:r>
-            <a:endParaRPr lang="en-US" sz="1300" dirty="0"/>
+            <a:endParaRPr lang="en-US" sz="1220" dirty="0"/>
           </a:p>
         </p:txBody>
       </p:sp>
@@ -6033,8 +6037,8 @@
         </p:nvSpPr>
         <p:spPr>
           <a:xfrm>
-            <a:off x="7818120" y="3230575"/>
-            <a:ext cx="3090672" cy="670255"/>
+            <a:off x="7726680" y="3182112"/>
+            <a:ext cx="3227832" cy="960120"/>
           </a:xfrm>
           <a:prstGeom prst="rect">
             <a:avLst/>
@@ -6052,7 +6056,7 @@
               <a:buNone/>
             </a:pPr>
             <a:r>
-              <a:rPr lang="en-US" sz="1220" dirty="0">
+              <a:rPr lang="en-US" sz="1140" dirty="0">
                 <a:solidFill>
                   <a:srgbClr val="17364A"/>
                 </a:solidFill>
@@ -6060,16 +6064,16 @@
                 <a:ea typeface="Aptos" pitchFamily="34" charset="-122"/>
                 <a:cs typeface="Aptos" pitchFamily="34" charset="-120"/>
               </a:rPr>
-              <a:t>Which current or proposed AI use case in your agency raises this.</a:t>
-            </a:r>
-            <a:endParaRPr lang="en-US" sz="1220" dirty="0"/>
-          </a:p>
-          <a:p>
-            <a:pPr indent="0" marL="0">
-              <a:buNone/>
-            </a:pPr>
-            <a:r>
-              <a:rPr lang="en-US" sz="1220" dirty="0">
+              <a:t>Which current or proposed AI use case in your.</a:t>
+            </a:r>
+            <a:endParaRPr lang="en-US" sz="1140" dirty="0"/>
+          </a:p>
+          <a:p>
+            <a:pPr indent="0" marL="0">
+              <a:buNone/>
+            </a:pPr>
+            <a:r>
+              <a:rPr lang="en-US" sz="1140" dirty="0">
                 <a:solidFill>
                   <a:srgbClr val="17364A"/>
                 </a:solidFill>
@@ -6077,16 +6081,16 @@
                 <a:ea typeface="Aptos" pitchFamily="34" charset="-122"/>
                 <a:cs typeface="Aptos" pitchFamily="34" charset="-120"/>
               </a:rPr>
-              <a:t>Who currently has authority to make decisions about this issue,.</a:t>
-            </a:r>
-            <a:endParaRPr lang="en-US" sz="1220" dirty="0"/>
-          </a:p>
-          <a:p>
-            <a:pPr indent="0" marL="0">
-              <a:buNone/>
-            </a:pPr>
-            <a:r>
-              <a:rPr lang="en-US" sz="1220" dirty="0">
+              <a:t>Who currently has authority to make decisions.</a:t>
+            </a:r>
+            <a:endParaRPr lang="en-US" sz="1140" dirty="0"/>
+          </a:p>
+          <a:p>
+            <a:pPr indent="0" marL="0">
+              <a:buNone/>
+            </a:pPr>
+            <a:r>
+              <a:rPr lang="en-US" sz="1140" dirty="0">
                 <a:solidFill>
                   <a:srgbClr val="17364A"/>
                 </a:solidFill>
@@ -6094,9 +6098,9 @@
                 <a:ea typeface="Aptos" pitchFamily="34" charset="-122"/>
                 <a:cs typeface="Aptos" pitchFamily="34" charset="-120"/>
               </a:rPr>
-              <a:t>What evidence would governance or leadership need before approving.</a:t>
-            </a:r>
-            <a:endParaRPr lang="en-US" sz="1220" dirty="0"/>
+              <a:t>What evidence would governance or leadership need.</a:t>
+            </a:r>
+            <a:endParaRPr lang="en-US" sz="1140" dirty="0"/>
           </a:p>
         </p:txBody>
       </p:sp>
@@ -6108,12 +6112,12 @@
         </p:nvSpPr>
         <p:spPr>
           <a:xfrm>
-            <a:off x="7635240" y="4184294"/>
-            <a:ext cx="3474720" cy="1466698"/>
+            <a:off x="7543800" y="4389120"/>
+            <a:ext cx="3611880" cy="1261872"/>
           </a:xfrm>
           <a:prstGeom prst="roundRect">
             <a:avLst>
-              <a:gd name="adj" fmla="val 7481"/>
+              <a:gd name="adj" fmla="val 8696"/>
             </a:avLst>
           </a:prstGeom>
           <a:solidFill>
@@ -6135,8 +6139,8 @@
         </p:nvSpPr>
         <p:spPr>
           <a:xfrm>
-            <a:off x="7799832" y="4330598"/>
-            <a:ext cx="3145536" cy="256032"/>
+            <a:off x="7708392" y="4517136"/>
+            <a:ext cx="3282696" cy="228600"/>
           </a:xfrm>
           <a:prstGeom prst="rect">
             <a:avLst/>
@@ -6152,7 +6156,7 @@
               <a:buNone/>
             </a:pPr>
             <a:r>
-              <a:rPr lang="en-US" sz="1300" b="1" dirty="0">
+              <a:rPr lang="en-US" sz="1220" b="1" dirty="0">
                 <a:solidFill>
                   <a:srgbClr val="0068B7"/>
                 </a:solidFill>
@@ -6162,7 +6166,7 @@
               </a:rPr>
               <a:t>Apply it</a:t>
             </a:r>
-            <a:endParaRPr lang="en-US" sz="1300" dirty="0"/>
+            <a:endParaRPr lang="en-US" sz="1220" dirty="0"/>
           </a:p>
         </p:txBody>
       </p:sp>
@@ -6174,8 +6178,8 @@
         </p:nvSpPr>
         <p:spPr>
           <a:xfrm>
-            <a:off x="7799832" y="4659782"/>
-            <a:ext cx="3145536" cy="899770"/>
+            <a:off x="7708392" y="4828032"/>
+            <a:ext cx="3282696" cy="749808"/>
           </a:xfrm>
           <a:prstGeom prst="rect">
             <a:avLst/>
@@ -6193,7 +6197,7 @@
               <a:buNone/>
             </a:pPr>
             <a:r>
-              <a:rPr lang="en-US" sz="1320" dirty="0">
+              <a:rPr lang="en-US" sz="1220" dirty="0">
                 <a:solidFill>
                   <a:srgbClr val="17364A"/>
                 </a:solidFill>
@@ -6201,9 +6205,9 @@
                 <a:ea typeface="Aptos" pitchFamily="34" charset="-122"/>
                 <a:cs typeface="Aptos" pitchFamily="34" charset="-120"/>
               </a:rPr>
-              <a:t>Connect the concept to public health purpose, responsible use, required safeguards, documentation, and the next action a department should take.</a:t>
-            </a:r>
-            <a:endParaRPr lang="en-US" sz="1320" dirty="0"/>
+              <a:t>Connect the concept to public health purpose, responsible use, required.</a:t>
+            </a:r>
+            <a:endParaRPr lang="en-US" sz="1220" dirty="0"/>
           </a:p>
         </p:txBody>
       </p:sp>
@@ -6494,8 +6498,8 @@
         </p:nvSpPr>
         <p:spPr>
           <a:xfrm>
-            <a:off x="868680" y="1508760"/>
-            <a:ext cx="6309360" cy="4160520"/>
+            <a:off x="822960" y="1463040"/>
+            <a:ext cx="6565392" cy="4343400"/>
           </a:xfrm>
           <a:prstGeom prst="rect">
             <a:avLst/>
@@ -6513,7 +6517,7 @@
               <a:buNone/>
             </a:pPr>
             <a:r>
-              <a:rPr lang="en-US" sz="2100" dirty="0">
+              <a:rPr lang="en-US" sz="1920" dirty="0">
                 <a:solidFill>
                   <a:srgbClr val="003A63"/>
                 </a:solidFill>
@@ -6521,16 +6525,16 @@
                 <a:ea typeface="Aptos" pitchFamily="34" charset="-122"/>
                 <a:cs typeface="Aptos" pitchFamily="34" charset="-120"/>
               </a:rPr>
-              <a:t>• Which staff, partners, or communities would be affected if this issue were handled poorly?</a:t>
-            </a:r>
-            <a:endParaRPr lang="en-US" sz="2100" dirty="0"/>
-          </a:p>
-          <a:p>
-            <a:pPr indent="0" marL="0">
-              <a:buNone/>
-            </a:pPr>
-            <a:r>
-              <a:rPr lang="en-US" sz="2100" dirty="0">
+              <a:t>• Which staff, partners, or communities would be affected if this issue were.</a:t>
+            </a:r>
+            <a:endParaRPr lang="en-US" sz="1920" dirty="0"/>
+          </a:p>
+          <a:p>
+            <a:pPr indent="0" marL="0">
+              <a:buNone/>
+            </a:pPr>
+            <a:r>
+              <a:rPr lang="en-US" sz="1920" dirty="0">
                 <a:solidFill>
                   <a:srgbClr val="003A63"/>
                 </a:solidFill>
@@ -6538,9 +6542,9 @@
                 <a:ea typeface="Aptos" pitchFamily="34" charset="-122"/>
                 <a:cs typeface="Aptos" pitchFamily="34" charset="-120"/>
               </a:rPr>
-              <a:t>• What policy, process, or artifact should be created or updated after this module?</a:t>
-            </a:r>
-            <a:endParaRPr lang="en-US" sz="2100" dirty="0"/>
+              <a:t>• What policy, process, or artifact should be created or updated after this.</a:t>
+            </a:r>
+            <a:endParaRPr lang="en-US" sz="1920" dirty="0"/>
           </a:p>
         </p:txBody>
       </p:sp>
@@ -6552,12 +6556,12 @@
         </p:nvSpPr>
         <p:spPr>
           <a:xfrm>
-            <a:off x="7635240" y="1325880"/>
-            <a:ext cx="3474720" cy="1207008"/>
+            <a:off x="7543800" y="1325880"/>
+            <a:ext cx="3611880" cy="1261872"/>
           </a:xfrm>
           <a:prstGeom prst="roundRect">
             <a:avLst>
-              <a:gd name="adj" fmla="val 9091"/>
+              <a:gd name="adj" fmla="val 8696"/>
             </a:avLst>
           </a:prstGeom>
           <a:solidFill>
@@ -6579,8 +6583,8 @@
         </p:nvSpPr>
         <p:spPr>
           <a:xfrm>
-            <a:off x="7799832" y="1472184"/>
-            <a:ext cx="3145536" cy="256032"/>
+            <a:off x="7708392" y="1453896"/>
+            <a:ext cx="3282696" cy="228600"/>
           </a:xfrm>
           <a:prstGeom prst="rect">
             <a:avLst/>
@@ -6596,7 +6600,7 @@
               <a:buNone/>
             </a:pPr>
             <a:r>
-              <a:rPr lang="en-US" sz="1300" b="1" dirty="0">
+              <a:rPr lang="en-US" sz="1220" b="1" dirty="0">
                 <a:solidFill>
                   <a:srgbClr val="0068B7"/>
                 </a:solidFill>
@@ -6606,7 +6610,7 @@
               </a:rPr>
               <a:t>Core concept</a:t>
             </a:r>
-            <a:endParaRPr lang="en-US" sz="1300" dirty="0"/>
+            <a:endParaRPr lang="en-US" sz="1220" dirty="0"/>
           </a:p>
         </p:txBody>
       </p:sp>
@@ -6618,8 +6622,8 @@
         </p:nvSpPr>
         <p:spPr>
           <a:xfrm>
-            <a:off x="7799832" y="1801368"/>
-            <a:ext cx="3145536" cy="640080"/>
+            <a:off x="7708392" y="1764792"/>
+            <a:ext cx="3282696" cy="749808"/>
           </a:xfrm>
           <a:prstGeom prst="rect">
             <a:avLst/>
@@ -6637,7 +6641,7 @@
               <a:buNone/>
             </a:pPr>
             <a:r>
-              <a:rPr lang="en-US" sz="1320" dirty="0">
+              <a:rPr lang="en-US" sz="1220" dirty="0">
                 <a:solidFill>
                   <a:srgbClr val="17364A"/>
                 </a:solidFill>
@@ -6645,9 +6649,9 @@
                 <a:ea typeface="Aptos" pitchFamily="34" charset="-122"/>
                 <a:cs typeface="Aptos" pitchFamily="34" charset="-120"/>
               </a:rPr>
-              <a:t>Which staff, partners, or communities would be affected if this issue were handled.</a:t>
-            </a:r>
-            <a:endParaRPr lang="en-US" sz="1320" dirty="0"/>
+              <a:t>Which staff, partners, or communities would be affected if this issue were.</a:t>
+            </a:r>
+            <a:endParaRPr lang="en-US" sz="1220" dirty="0"/>
           </a:p>
         </p:txBody>
       </p:sp>
@@ -6659,12 +6663,12 @@
         </p:nvSpPr>
         <p:spPr>
           <a:xfrm>
-            <a:off x="7635240" y="2670048"/>
-            <a:ext cx="3474720" cy="1377086"/>
+            <a:off x="7543800" y="2724912"/>
+            <a:ext cx="3611880" cy="1527048"/>
           </a:xfrm>
           <a:prstGeom prst="roundRect">
             <a:avLst>
-              <a:gd name="adj" fmla="val 7968"/>
+              <a:gd name="adj" fmla="val 7186"/>
             </a:avLst>
           </a:prstGeom>
           <a:solidFill>
@@ -6686,8 +6690,8 @@
         </p:nvSpPr>
         <p:spPr>
           <a:xfrm>
-            <a:off x="7799832" y="2816352"/>
-            <a:ext cx="3145536" cy="256032"/>
+            <a:off x="7708392" y="2852928"/>
+            <a:ext cx="3282696" cy="228600"/>
           </a:xfrm>
           <a:prstGeom prst="rect">
             <a:avLst/>
@@ -6703,7 +6707,7 @@
               <a:buNone/>
             </a:pPr>
             <a:r>
-              <a:rPr lang="en-US" sz="1300" b="1" dirty="0">
+              <a:rPr lang="en-US" sz="1220" b="1" dirty="0">
                 <a:solidFill>
                   <a:srgbClr val="0068B7"/>
                 </a:solidFill>
@@ -6713,7 +6717,7 @@
               </a:rPr>
               <a:t>Concept checkpoints</a:t>
             </a:r>
-            <a:endParaRPr lang="en-US" sz="1300" dirty="0"/>
+            <a:endParaRPr lang="en-US" sz="1220" dirty="0"/>
           </a:p>
         </p:txBody>
       </p:sp>
@@ -6725,8 +6729,8 @@
         </p:nvSpPr>
         <p:spPr>
           <a:xfrm>
-            <a:off x="7818120" y="3182112"/>
-            <a:ext cx="3090672" cy="718718"/>
+            <a:off x="7726680" y="3182112"/>
+            <a:ext cx="3227832" cy="960120"/>
           </a:xfrm>
           <a:prstGeom prst="rect">
             <a:avLst/>
@@ -6744,7 +6748,7 @@
               <a:buNone/>
             </a:pPr>
             <a:r>
-              <a:rPr lang="en-US" sz="1220" dirty="0">
+              <a:rPr lang="en-US" sz="1140" dirty="0">
                 <a:solidFill>
                   <a:srgbClr val="17364A"/>
                 </a:solidFill>
@@ -6752,16 +6756,16 @@
                 <a:ea typeface="Aptos" pitchFamily="34" charset="-122"/>
                 <a:cs typeface="Aptos" pitchFamily="34" charset="-120"/>
               </a:rPr>
-              <a:t>Which staff, partners, or communities would be affected if this.</a:t>
-            </a:r>
-            <a:endParaRPr lang="en-US" sz="1220" dirty="0"/>
-          </a:p>
-          <a:p>
-            <a:pPr indent="0" marL="0">
-              <a:buNone/>
-            </a:pPr>
-            <a:r>
-              <a:rPr lang="en-US" sz="1220" dirty="0">
+              <a:t>Which staff, partners, or communities would be.</a:t>
+            </a:r>
+            <a:endParaRPr lang="en-US" sz="1140" dirty="0"/>
+          </a:p>
+          <a:p>
+            <a:pPr indent="0" marL="0">
+              <a:buNone/>
+            </a:pPr>
+            <a:r>
+              <a:rPr lang="en-US" sz="1140" dirty="0">
                 <a:solidFill>
                   <a:srgbClr val="17364A"/>
                 </a:solidFill>
@@ -6769,9 +6773,9 @@
                 <a:ea typeface="Aptos" pitchFamily="34" charset="-122"/>
                 <a:cs typeface="Aptos" pitchFamily="34" charset="-120"/>
               </a:rPr>
-              <a:t>What policy, process, or artifact should be created or updated.</a:t>
-            </a:r>
-            <a:endParaRPr lang="en-US" sz="1220" dirty="0"/>
+              <a:t>What policy, process, or artifact should be.</a:t>
+            </a:r>
+            <a:endParaRPr lang="en-US" sz="1140" dirty="0"/>
           </a:p>
         </p:txBody>
       </p:sp>
@@ -6783,12 +6787,12 @@
         </p:nvSpPr>
         <p:spPr>
           <a:xfrm>
-            <a:off x="7635240" y="4184294"/>
-            <a:ext cx="3474720" cy="1466698"/>
+            <a:off x="7543800" y="4389120"/>
+            <a:ext cx="3611880" cy="1261872"/>
           </a:xfrm>
           <a:prstGeom prst="roundRect">
             <a:avLst>
-              <a:gd name="adj" fmla="val 7481"/>
+              <a:gd name="adj" fmla="val 8696"/>
             </a:avLst>
           </a:prstGeom>
           <a:solidFill>
@@ -6810,8 +6814,8 @@
         </p:nvSpPr>
         <p:spPr>
           <a:xfrm>
-            <a:off x="7799832" y="4330598"/>
-            <a:ext cx="3145536" cy="256032"/>
+            <a:off x="7708392" y="4517136"/>
+            <a:ext cx="3282696" cy="228600"/>
           </a:xfrm>
           <a:prstGeom prst="rect">
             <a:avLst/>
@@ -6827,7 +6831,7 @@
               <a:buNone/>
             </a:pPr>
             <a:r>
-              <a:rPr lang="en-US" sz="1300" b="1" dirty="0">
+              <a:rPr lang="en-US" sz="1220" b="1" dirty="0">
                 <a:solidFill>
                   <a:srgbClr val="0068B7"/>
                 </a:solidFill>
@@ -6837,7 +6841,7 @@
               </a:rPr>
               <a:t>Apply it</a:t>
             </a:r>
-            <a:endParaRPr lang="en-US" sz="1300" dirty="0"/>
+            <a:endParaRPr lang="en-US" sz="1220" dirty="0"/>
           </a:p>
         </p:txBody>
       </p:sp>
@@ -6849,8 +6853,8 @@
         </p:nvSpPr>
         <p:spPr>
           <a:xfrm>
-            <a:off x="7799832" y="4659782"/>
-            <a:ext cx="3145536" cy="899770"/>
+            <a:off x="7708392" y="4828032"/>
+            <a:ext cx="3282696" cy="749808"/>
           </a:xfrm>
           <a:prstGeom prst="rect">
             <a:avLst/>
@@ -6868,7 +6872,7 @@
               <a:buNone/>
             </a:pPr>
             <a:r>
-              <a:rPr lang="en-US" sz="1320" dirty="0">
+              <a:rPr lang="en-US" sz="1220" dirty="0">
                 <a:solidFill>
                   <a:srgbClr val="17364A"/>
                 </a:solidFill>
@@ -6876,9 +6880,9 @@
                 <a:ea typeface="Aptos" pitchFamily="34" charset="-122"/>
                 <a:cs typeface="Aptos" pitchFamily="34" charset="-120"/>
               </a:rPr>
-              <a:t>Connect the concept to public health purpose, responsible use, required safeguards, documentation, and the next action a department should take.</a:t>
-            </a:r>
-            <a:endParaRPr lang="en-US" sz="1320" dirty="0"/>
+              <a:t>Connect the concept to public health purpose, responsible use, required.</a:t>
+            </a:r>
+            <a:endParaRPr lang="en-US" sz="1220" dirty="0"/>
           </a:p>
         </p:txBody>
       </p:sp>
@@ -7169,8 +7173,8 @@
         </p:nvSpPr>
         <p:spPr>
           <a:xfrm>
-            <a:off x="868680" y="1508760"/>
-            <a:ext cx="6309360" cy="4160520"/>
+            <a:off x="822960" y="1463040"/>
+            <a:ext cx="6565392" cy="4343400"/>
           </a:xfrm>
           <a:prstGeom prst="rect">
             <a:avLst/>
@@ -7188,7 +7192,7 @@
               <a:buNone/>
             </a:pPr>
             <a:r>
-              <a:rPr lang="en-US" sz="2100" dirty="0">
+              <a:rPr lang="en-US" sz="1920" dirty="0">
                 <a:solidFill>
                   <a:srgbClr val="003A63"/>
                 </a:solidFill>
@@ -7196,9 +7200,9 @@
                 <a:ea typeface="Aptos" pitchFamily="34" charset="-122"/>
                 <a:cs typeface="Aptos" pitchFamily="34" charset="-120"/>
               </a:rPr>
-              <a:t>• Develop an AI use case prioritization rubric with criteria, scoring levels, required evidence,.</a:t>
-            </a:r>
-            <a:endParaRPr lang="en-US" sz="2100" dirty="0"/>
+              <a:t>• Develop an AI use case prioritization rubric with criteria, scoring levels,.</a:t>
+            </a:r>
+            <a:endParaRPr lang="en-US" sz="1920" dirty="0"/>
           </a:p>
         </p:txBody>
       </p:sp>
@@ -7210,12 +7214,12 @@
         </p:nvSpPr>
         <p:spPr>
           <a:xfrm>
-            <a:off x="7635240" y="1325880"/>
-            <a:ext cx="3474720" cy="1255471"/>
+            <a:off x="7543800" y="1325880"/>
+            <a:ext cx="3611880" cy="1261872"/>
           </a:xfrm>
           <a:prstGeom prst="roundRect">
             <a:avLst>
-              <a:gd name="adj" fmla="val 8740"/>
+              <a:gd name="adj" fmla="val 8696"/>
             </a:avLst>
           </a:prstGeom>
           <a:solidFill>
@@ -7237,8 +7241,8 @@
         </p:nvSpPr>
         <p:spPr>
           <a:xfrm>
-            <a:off x="7799832" y="1472184"/>
-            <a:ext cx="3145536" cy="256032"/>
+            <a:off x="7708392" y="1453896"/>
+            <a:ext cx="3282696" cy="228600"/>
           </a:xfrm>
           <a:prstGeom prst="rect">
             <a:avLst/>
@@ -7254,7 +7258,7 @@
               <a:buNone/>
             </a:pPr>
             <a:r>
-              <a:rPr lang="en-US" sz="1300" b="1" dirty="0">
+              <a:rPr lang="en-US" sz="1220" b="1" dirty="0">
                 <a:solidFill>
                   <a:srgbClr val="0068B7"/>
                 </a:solidFill>
@@ -7264,7 +7268,7 @@
               </a:rPr>
               <a:t>Practice focus</a:t>
             </a:r>
-            <a:endParaRPr lang="en-US" sz="1300" dirty="0"/>
+            <a:endParaRPr lang="en-US" sz="1220" dirty="0"/>
           </a:p>
         </p:txBody>
       </p:sp>
@@ -7276,8 +7280,8 @@
         </p:nvSpPr>
         <p:spPr>
           <a:xfrm>
-            <a:off x="7799832" y="1801368"/>
-            <a:ext cx="3145536" cy="688543"/>
+            <a:off x="7708392" y="1764792"/>
+            <a:ext cx="3282696" cy="749808"/>
           </a:xfrm>
           <a:prstGeom prst="rect">
             <a:avLst/>
@@ -7295,7 +7299,7 @@
               <a:buNone/>
             </a:pPr>
             <a:r>
-              <a:rPr lang="en-US" sz="1320" dirty="0">
+              <a:rPr lang="en-US" sz="1220" dirty="0">
                 <a:solidFill>
                   <a:srgbClr val="17364A"/>
                 </a:solidFill>
@@ -7303,9 +7307,9 @@
                 <a:ea typeface="Aptos" pitchFamily="34" charset="-122"/>
                 <a:cs typeface="Aptos" pitchFamily="34" charset="-120"/>
               </a:rPr>
-              <a:t>Develop an AI use case prioritization rubric with criteria, scoring levels, required evidence, and.</a:t>
-            </a:r>
-            <a:endParaRPr lang="en-US" sz="1320" dirty="0"/>
+              <a:t>Develop an AI use case prioritization rubric with criteria, scoring levels,.</a:t>
+            </a:r>
+            <a:endParaRPr lang="en-US" sz="1220" dirty="0"/>
           </a:p>
         </p:txBody>
       </p:sp>
@@ -7317,12 +7321,12 @@
         </p:nvSpPr>
         <p:spPr>
           <a:xfrm>
-            <a:off x="7635240" y="2718511"/>
-            <a:ext cx="3474720" cy="1328623"/>
+            <a:off x="7543800" y="2724912"/>
+            <a:ext cx="3611880" cy="1527048"/>
           </a:xfrm>
           <a:prstGeom prst="roundRect">
             <a:avLst>
-              <a:gd name="adj" fmla="val 8259"/>
+              <a:gd name="adj" fmla="val 7186"/>
             </a:avLst>
           </a:prstGeom>
           <a:solidFill>
@@ -7344,8 +7348,8 @@
         </p:nvSpPr>
         <p:spPr>
           <a:xfrm>
-            <a:off x="7799832" y="2864815"/>
-            <a:ext cx="3145536" cy="256032"/>
+            <a:off x="7708392" y="2852928"/>
+            <a:ext cx="3282696" cy="228600"/>
           </a:xfrm>
           <a:prstGeom prst="rect">
             <a:avLst/>
@@ -7361,7 +7365,7 @@
               <a:buNone/>
             </a:pPr>
             <a:r>
-              <a:rPr lang="en-US" sz="1300" b="1" dirty="0">
+              <a:rPr lang="en-US" sz="1220" b="1" dirty="0">
                 <a:solidFill>
                   <a:srgbClr val="0068B7"/>
                 </a:solidFill>
@@ -7371,7 +7375,7 @@
               </a:rPr>
               <a:t>Concept checkpoints</a:t>
             </a:r>
-            <a:endParaRPr lang="en-US" sz="1300" dirty="0"/>
+            <a:endParaRPr lang="en-US" sz="1220" dirty="0"/>
           </a:p>
         </p:txBody>
       </p:sp>
@@ -7383,8 +7387,8 @@
         </p:nvSpPr>
         <p:spPr>
           <a:xfrm>
-            <a:off x="7818120" y="3230575"/>
-            <a:ext cx="3090672" cy="670255"/>
+            <a:off x="7726680" y="3182112"/>
+            <a:ext cx="3227832" cy="960120"/>
           </a:xfrm>
           <a:prstGeom prst="rect">
             <a:avLst/>
@@ -7402,7 +7406,7 @@
               <a:buNone/>
             </a:pPr>
             <a:r>
-              <a:rPr lang="en-US" sz="1220" dirty="0">
+              <a:rPr lang="en-US" sz="1140" dirty="0">
                 <a:solidFill>
                   <a:srgbClr val="17364A"/>
                 </a:solidFill>
@@ -7410,9 +7414,9 @@
                 <a:ea typeface="Aptos" pitchFamily="34" charset="-122"/>
                 <a:cs typeface="Aptos" pitchFamily="34" charset="-120"/>
               </a:rPr>
-              <a:t>Develop an AI use case prioritization rubric with criteria,.</a:t>
-            </a:r>
-            <a:endParaRPr lang="en-US" sz="1220" dirty="0"/>
+              <a:t>Develop an AI use case prioritization rubric with.</a:t>
+            </a:r>
+            <a:endParaRPr lang="en-US" sz="1140" dirty="0"/>
           </a:p>
         </p:txBody>
       </p:sp>
@@ -7424,12 +7428,12 @@
         </p:nvSpPr>
         <p:spPr>
           <a:xfrm>
-            <a:off x="7635240" y="4184294"/>
-            <a:ext cx="3474720" cy="1466698"/>
+            <a:off x="7543800" y="4389120"/>
+            <a:ext cx="3611880" cy="1261872"/>
           </a:xfrm>
           <a:prstGeom prst="roundRect">
             <a:avLst>
-              <a:gd name="adj" fmla="val 7481"/>
+              <a:gd name="adj" fmla="val 8696"/>
             </a:avLst>
           </a:prstGeom>
           <a:solidFill>
@@ -7451,8 +7455,8 @@
         </p:nvSpPr>
         <p:spPr>
           <a:xfrm>
-            <a:off x="7799832" y="4330598"/>
-            <a:ext cx="3145536" cy="256032"/>
+            <a:off x="7708392" y="4517136"/>
+            <a:ext cx="3282696" cy="228600"/>
           </a:xfrm>
           <a:prstGeom prst="rect">
             <a:avLst/>
@@ -7468,7 +7472,7 @@
               <a:buNone/>
             </a:pPr>
             <a:r>
-              <a:rPr lang="en-US" sz="1300" b="1" dirty="0">
+              <a:rPr lang="en-US" sz="1220" b="1" dirty="0">
                 <a:solidFill>
                   <a:srgbClr val="0068B7"/>
                 </a:solidFill>
@@ -7478,7 +7482,7 @@
               </a:rPr>
               <a:t>What to produce</a:t>
             </a:r>
-            <a:endParaRPr lang="en-US" sz="1300" dirty="0"/>
+            <a:endParaRPr lang="en-US" sz="1220" dirty="0"/>
           </a:p>
         </p:txBody>
       </p:sp>
@@ -7490,8 +7494,8 @@
         </p:nvSpPr>
         <p:spPr>
           <a:xfrm>
-            <a:off x="7799832" y="4659782"/>
-            <a:ext cx="3145536" cy="899770"/>
+            <a:off x="7708392" y="4828032"/>
+            <a:ext cx="3282696" cy="749808"/>
           </a:xfrm>
           <a:prstGeom prst="rect">
             <a:avLst/>
@@ -7509,7 +7513,7 @@
               <a:buNone/>
             </a:pPr>
             <a:r>
-              <a:rPr lang="en-US" sz="1320" dirty="0">
+              <a:rPr lang="en-US" sz="1220" dirty="0">
                 <a:solidFill>
                   <a:srgbClr val="17364A"/>
                 </a:solidFill>
@@ -7517,9 +7521,9 @@
                 <a:ea typeface="Aptos" pitchFamily="34" charset="-122"/>
                 <a:cs typeface="Aptos" pitchFamily="34" charset="-120"/>
               </a:rPr>
-              <a:t>Use the assignment to test whether you can explain the concept, apply it to a realistic public health situation, and identify what would need review before the work moves forward.</a:t>
-            </a:r>
-            <a:endParaRPr lang="en-US" sz="1320" dirty="0"/>
+              <a:t>Use the assignment to test whether you can explain the concept, apply it to a.</a:t>
+            </a:r>
+            <a:endParaRPr lang="en-US" sz="1220" dirty="0"/>
           </a:p>
         </p:txBody>
       </p:sp>
@@ -7810,8 +7814,8 @@
         </p:nvSpPr>
         <p:spPr>
           <a:xfrm>
-            <a:off x="868680" y="1508760"/>
-            <a:ext cx="6309360" cy="4160520"/>
+            <a:off x="822960" y="1463040"/>
+            <a:ext cx="6565392" cy="4343400"/>
           </a:xfrm>
           <a:prstGeom prst="rect">
             <a:avLst/>
@@ -7829,7 +7833,7 @@
               <a:buNone/>
             </a:pPr>
             <a:r>
-              <a:rPr lang="en-US" sz="2100" dirty="0">
+              <a:rPr lang="en-US" sz="1920" dirty="0">
                 <a:solidFill>
                   <a:srgbClr val="003A63"/>
                 </a:solidFill>
@@ -7839,14 +7843,14 @@
               </a:rPr>
               <a:t>• Choose a real or realistic public health AI use case.</a:t>
             </a:r>
-            <a:endParaRPr lang="en-US" sz="2100" dirty="0"/>
-          </a:p>
-          <a:p>
-            <a:pPr indent="0" marL="0">
-              <a:buNone/>
-            </a:pPr>
-            <a:r>
-              <a:rPr lang="en-US" sz="2100" dirty="0">
+            <a:endParaRPr lang="en-US" sz="1920" dirty="0"/>
+          </a:p>
+          <a:p>
+            <a:pPr indent="0" marL="0">
+              <a:buNone/>
+            </a:pPr>
+            <a:r>
+              <a:rPr lang="en-US" sz="1920" dirty="0">
                 <a:solidFill>
                   <a:srgbClr val="003A63"/>
                 </a:solidFill>
@@ -7854,16 +7858,16 @@
                 <a:ea typeface="Aptos" pitchFamily="34" charset="-122"/>
                 <a:cs typeface="Aptos" pitchFamily="34" charset="-120"/>
               </a:rPr>
-              <a:t>• Document assumptions, unresolved questions, and which agency roles would need to review the.</a:t>
-            </a:r>
-            <a:endParaRPr lang="en-US" sz="2100" dirty="0"/>
-          </a:p>
-          <a:p>
-            <a:pPr indent="0" marL="0">
-              <a:buNone/>
-            </a:pPr>
-            <a:r>
-              <a:rPr lang="en-US" sz="2100" dirty="0">
+              <a:t>• Document assumptions, unresolved questions, and which agency roles would.</a:t>
+            </a:r>
+            <a:endParaRPr lang="en-US" sz="1920" dirty="0"/>
+          </a:p>
+          <a:p>
+            <a:pPr indent="0" marL="0">
+              <a:buNone/>
+            </a:pPr>
+            <a:r>
+              <a:rPr lang="en-US" sz="1920" dirty="0">
                 <a:solidFill>
                   <a:srgbClr val="003A63"/>
                 </a:solidFill>
@@ -7871,9 +7875,9 @@
                 <a:ea typeface="Aptos" pitchFamily="34" charset="-122"/>
                 <a:cs typeface="Aptos" pitchFamily="34" charset="-120"/>
               </a:rPr>
-              <a:t>• The exercise should produce a work product that could support governance review, leadership.</a:t>
-            </a:r>
-            <a:endParaRPr lang="en-US" sz="2100" dirty="0"/>
+              <a:t>• The exercise should produce a work product that could support governance.</a:t>
+            </a:r>
+            <a:endParaRPr lang="en-US" sz="1920" dirty="0"/>
           </a:p>
         </p:txBody>
       </p:sp>
@@ -7885,12 +7889,12 @@
         </p:nvSpPr>
         <p:spPr>
           <a:xfrm>
-            <a:off x="7635240" y="1325880"/>
-            <a:ext cx="3474720" cy="1207008"/>
+            <a:off x="7543800" y="1325880"/>
+            <a:ext cx="3611880" cy="1261872"/>
           </a:xfrm>
           <a:prstGeom prst="roundRect">
             <a:avLst>
-              <a:gd name="adj" fmla="val 9091"/>
+              <a:gd name="adj" fmla="val 8696"/>
             </a:avLst>
           </a:prstGeom>
           <a:solidFill>
@@ -7912,8 +7916,8 @@
         </p:nvSpPr>
         <p:spPr>
           <a:xfrm>
-            <a:off x="7799832" y="1472184"/>
-            <a:ext cx="3145536" cy="256032"/>
+            <a:off x="7708392" y="1453896"/>
+            <a:ext cx="3282696" cy="228600"/>
           </a:xfrm>
           <a:prstGeom prst="rect">
             <a:avLst/>
@@ -7929,7 +7933,7 @@
               <a:buNone/>
             </a:pPr>
             <a:r>
-              <a:rPr lang="en-US" sz="1300" b="1" dirty="0">
+              <a:rPr lang="en-US" sz="1220" b="1" dirty="0">
                 <a:solidFill>
                   <a:srgbClr val="0068B7"/>
                 </a:solidFill>
@@ -7939,7 +7943,7 @@
               </a:rPr>
               <a:t>Core concept</a:t>
             </a:r>
-            <a:endParaRPr lang="en-US" sz="1300" dirty="0"/>
+            <a:endParaRPr lang="en-US" sz="1220" dirty="0"/>
           </a:p>
         </p:txBody>
       </p:sp>
@@ -7951,8 +7955,8 @@
         </p:nvSpPr>
         <p:spPr>
           <a:xfrm>
-            <a:off x="7799832" y="1801368"/>
-            <a:ext cx="3145536" cy="640080"/>
+            <a:off x="7708392" y="1764792"/>
+            <a:ext cx="3282696" cy="749808"/>
           </a:xfrm>
           <a:prstGeom prst="rect">
             <a:avLst/>
@@ -7970,7 +7974,7 @@
               <a:buNone/>
             </a:pPr>
             <a:r>
-              <a:rPr lang="en-US" sz="1320" dirty="0">
+              <a:rPr lang="en-US" sz="1220" dirty="0">
                 <a:solidFill>
                   <a:srgbClr val="17364A"/>
                 </a:solidFill>
@@ -7980,7 +7984,7 @@
               </a:rPr>
               <a:t>Choose a real or realistic public health AI use case.</a:t>
             </a:r>
-            <a:endParaRPr lang="en-US" sz="1320" dirty="0"/>
+            <a:endParaRPr lang="en-US" sz="1220" dirty="0"/>
           </a:p>
         </p:txBody>
       </p:sp>
@@ -7992,12 +7996,12 @@
         </p:nvSpPr>
         <p:spPr>
           <a:xfrm>
-            <a:off x="7635240" y="2670048"/>
-            <a:ext cx="3474720" cy="1377086"/>
+            <a:off x="7543800" y="2724912"/>
+            <a:ext cx="3611880" cy="1527048"/>
           </a:xfrm>
           <a:prstGeom prst="roundRect">
             <a:avLst>
-              <a:gd name="adj" fmla="val 7968"/>
+              <a:gd name="adj" fmla="val 7186"/>
             </a:avLst>
           </a:prstGeom>
           <a:solidFill>
@@ -8019,8 +8023,8 @@
         </p:nvSpPr>
         <p:spPr>
           <a:xfrm>
-            <a:off x="7799832" y="2816352"/>
-            <a:ext cx="3145536" cy="256032"/>
+            <a:off x="7708392" y="2852928"/>
+            <a:ext cx="3282696" cy="228600"/>
           </a:xfrm>
           <a:prstGeom prst="rect">
             <a:avLst/>
@@ -8036,7 +8040,7 @@
               <a:buNone/>
             </a:pPr>
             <a:r>
-              <a:rPr lang="en-US" sz="1300" b="1" dirty="0">
+              <a:rPr lang="en-US" sz="1220" b="1" dirty="0">
                 <a:solidFill>
                   <a:srgbClr val="0068B7"/>
                 </a:solidFill>
@@ -8046,7 +8050,7 @@
               </a:rPr>
               <a:t>Concept checkpoints</a:t>
             </a:r>
-            <a:endParaRPr lang="en-US" sz="1300" dirty="0"/>
+            <a:endParaRPr lang="en-US" sz="1220" dirty="0"/>
           </a:p>
         </p:txBody>
       </p:sp>
@@ -8058,8 +8062,8 @@
         </p:nvSpPr>
         <p:spPr>
           <a:xfrm>
-            <a:off x="7818120" y="3182112"/>
-            <a:ext cx="3090672" cy="718718"/>
+            <a:off x="7726680" y="3182112"/>
+            <a:ext cx="3227832" cy="960120"/>
           </a:xfrm>
           <a:prstGeom prst="rect">
             <a:avLst/>
@@ -8077,7 +8081,7 @@
               <a:buNone/>
             </a:pPr>
             <a:r>
-              <a:rPr lang="en-US" sz="1220" dirty="0">
+              <a:rPr lang="en-US" sz="1140" dirty="0">
                 <a:solidFill>
                   <a:srgbClr val="17364A"/>
                 </a:solidFill>
@@ -8085,16 +8089,16 @@
                 <a:ea typeface="Aptos" pitchFamily="34" charset="-122"/>
                 <a:cs typeface="Aptos" pitchFamily="34" charset="-120"/>
               </a:rPr>
-              <a:t>Document assumptions, unresolved questions, and which agency roles.</a:t>
-            </a:r>
-            <a:endParaRPr lang="en-US" sz="1220" dirty="0"/>
-          </a:p>
-          <a:p>
-            <a:pPr indent="0" marL="0">
-              <a:buNone/>
-            </a:pPr>
-            <a:r>
-              <a:rPr lang="en-US" sz="1220" dirty="0">
+              <a:t>Document assumptions, unresolved questions, and.</a:t>
+            </a:r>
+            <a:endParaRPr lang="en-US" sz="1140" dirty="0"/>
+          </a:p>
+          <a:p>
+            <a:pPr indent="0" marL="0">
+              <a:buNone/>
+            </a:pPr>
+            <a:r>
+              <a:rPr lang="en-US" sz="1140" dirty="0">
                 <a:solidFill>
                   <a:srgbClr val="17364A"/>
                 </a:solidFill>
@@ -8102,9 +8106,9 @@
                 <a:ea typeface="Aptos" pitchFamily="34" charset="-122"/>
                 <a:cs typeface="Aptos" pitchFamily="34" charset="-120"/>
               </a:rPr>
-              <a:t>The exercise should produce a work product that could support.</a:t>
-            </a:r>
-            <a:endParaRPr lang="en-US" sz="1220" dirty="0"/>
+              <a:t>The exercise should produce a work product that.</a:t>
+            </a:r>
+            <a:endParaRPr lang="en-US" sz="1140" dirty="0"/>
           </a:p>
         </p:txBody>
       </p:sp>
@@ -8116,12 +8120,12 @@
         </p:nvSpPr>
         <p:spPr>
           <a:xfrm>
-            <a:off x="7635240" y="4184294"/>
-            <a:ext cx="3474720" cy="1466698"/>
+            <a:off x="7543800" y="4389120"/>
+            <a:ext cx="3611880" cy="1261872"/>
           </a:xfrm>
           <a:prstGeom prst="roundRect">
             <a:avLst>
-              <a:gd name="adj" fmla="val 7481"/>
+              <a:gd name="adj" fmla="val 8696"/>
             </a:avLst>
           </a:prstGeom>
           <a:solidFill>
@@ -8143,8 +8147,8 @@
         </p:nvSpPr>
         <p:spPr>
           <a:xfrm>
-            <a:off x="7799832" y="4330598"/>
-            <a:ext cx="3145536" cy="256032"/>
+            <a:off x="7708392" y="4517136"/>
+            <a:ext cx="3282696" cy="228600"/>
           </a:xfrm>
           <a:prstGeom prst="rect">
             <a:avLst/>
@@ -8160,7 +8164,7 @@
               <a:buNone/>
             </a:pPr>
             <a:r>
-              <a:rPr lang="en-US" sz="1300" b="1" dirty="0">
+              <a:rPr lang="en-US" sz="1220" b="1" dirty="0">
                 <a:solidFill>
                   <a:srgbClr val="0068B7"/>
                 </a:solidFill>
@@ -8170,7 +8174,7 @@
               </a:rPr>
               <a:t>Apply it</a:t>
             </a:r>
-            <a:endParaRPr lang="en-US" sz="1300" dirty="0"/>
+            <a:endParaRPr lang="en-US" sz="1220" dirty="0"/>
           </a:p>
         </p:txBody>
       </p:sp>
@@ -8182,8 +8186,8 @@
         </p:nvSpPr>
         <p:spPr>
           <a:xfrm>
-            <a:off x="7799832" y="4659782"/>
-            <a:ext cx="3145536" cy="899770"/>
+            <a:off x="7708392" y="4828032"/>
+            <a:ext cx="3282696" cy="749808"/>
           </a:xfrm>
           <a:prstGeom prst="rect">
             <a:avLst/>
@@ -8201,7 +8205,7 @@
               <a:buNone/>
             </a:pPr>
             <a:r>
-              <a:rPr lang="en-US" sz="1320" dirty="0">
+              <a:rPr lang="en-US" sz="1220" dirty="0">
                 <a:solidFill>
                   <a:srgbClr val="17364A"/>
                 </a:solidFill>
@@ -8209,9 +8213,9 @@
                 <a:ea typeface="Aptos" pitchFamily="34" charset="-122"/>
                 <a:cs typeface="Aptos" pitchFamily="34" charset="-120"/>
               </a:rPr>
-              <a:t>Connect the concept to public health purpose, responsible use, required safeguards, documentation, and the next action a department should take.</a:t>
-            </a:r>
-            <a:endParaRPr lang="en-US" sz="1320" dirty="0"/>
+              <a:t>Connect the concept to public health purpose, responsible use, required.</a:t>
+            </a:r>
+            <a:endParaRPr lang="en-US" sz="1220" dirty="0"/>
           </a:p>
         </p:txBody>
       </p:sp>
@@ -8502,8 +8506,8 @@
         </p:nvSpPr>
         <p:spPr>
           <a:xfrm>
-            <a:off x="868680" y="1508760"/>
-            <a:ext cx="6309360" cy="4160520"/>
+            <a:off x="822960" y="1463040"/>
+            <a:ext cx="6565392" cy="4343400"/>
           </a:xfrm>
           <a:prstGeom prst="rect">
             <a:avLst/>
@@ -8521,7 +8525,7 @@
               <a:buNone/>
             </a:pPr>
             <a:r>
-              <a:rPr lang="en-US" sz="2100" dirty="0">
+              <a:rPr lang="en-US" sz="1920" dirty="0">
                 <a:solidFill>
                   <a:srgbClr val="003A63"/>
                 </a:solidFill>
@@ -8529,9 +8533,9 @@
                 <a:ea typeface="Aptos" pitchFamily="34" charset="-122"/>
                 <a:cs typeface="Aptos" pitchFamily="34" charset="-120"/>
               </a:rPr>
-              <a:t>• Use case intake form; prioritization rubric; sample portfolio view; decision category.</a:t>
-            </a:r>
-            <a:endParaRPr lang="en-US" sz="2100" dirty="0"/>
+              <a:t>• Use case intake form; prioritization rubric; sample portfolio view; decision.</a:t>
+            </a:r>
+            <a:endParaRPr lang="en-US" sz="1920" dirty="0"/>
           </a:p>
         </p:txBody>
       </p:sp>
@@ -8543,12 +8547,12 @@
         </p:nvSpPr>
         <p:spPr>
           <a:xfrm>
-            <a:off x="7635240" y="1325880"/>
-            <a:ext cx="3474720" cy="1255471"/>
+            <a:off x="7543800" y="1325880"/>
+            <a:ext cx="3611880" cy="1261872"/>
           </a:xfrm>
           <a:prstGeom prst="roundRect">
             <a:avLst>
-              <a:gd name="adj" fmla="val 8740"/>
+              <a:gd name="adj" fmla="val 8696"/>
             </a:avLst>
           </a:prstGeom>
           <a:solidFill>
@@ -8570,8 +8574,8 @@
         </p:nvSpPr>
         <p:spPr>
           <a:xfrm>
-            <a:off x="7799832" y="1472184"/>
-            <a:ext cx="3145536" cy="256032"/>
+            <a:off x="7708392" y="1453896"/>
+            <a:ext cx="3282696" cy="228600"/>
           </a:xfrm>
           <a:prstGeom prst="rect">
             <a:avLst/>
@@ -8587,7 +8591,7 @@
               <a:buNone/>
             </a:pPr>
             <a:r>
-              <a:rPr lang="en-US" sz="1300" b="1" dirty="0">
+              <a:rPr lang="en-US" sz="1220" b="1" dirty="0">
                 <a:solidFill>
                   <a:srgbClr val="0068B7"/>
                 </a:solidFill>
@@ -8597,7 +8601,7 @@
               </a:rPr>
               <a:t>Core concept</a:t>
             </a:r>
-            <a:endParaRPr lang="en-US" sz="1300" dirty="0"/>
+            <a:endParaRPr lang="en-US" sz="1220" dirty="0"/>
           </a:p>
         </p:txBody>
       </p:sp>
@@ -8609,8 +8613,8 @@
         </p:nvSpPr>
         <p:spPr>
           <a:xfrm>
-            <a:off x="7799832" y="1801368"/>
-            <a:ext cx="3145536" cy="688543"/>
+            <a:off x="7708392" y="1764792"/>
+            <a:ext cx="3282696" cy="749808"/>
           </a:xfrm>
           <a:prstGeom prst="rect">
             <a:avLst/>
@@ -8628,7 +8632,7 @@
               <a:buNone/>
             </a:pPr>
             <a:r>
-              <a:rPr lang="en-US" sz="1320" dirty="0">
+              <a:rPr lang="en-US" sz="1220" dirty="0">
                 <a:solidFill>
                   <a:srgbClr val="17364A"/>
                 </a:solidFill>
@@ -8636,9 +8640,9 @@
                 <a:ea typeface="Aptos" pitchFamily="34" charset="-122"/>
                 <a:cs typeface="Aptos" pitchFamily="34" charset="-120"/>
               </a:rPr>
-              <a:t>Use case intake form; prioritization rubric; sample portfolio view; decision category definitions.</a:t>
-            </a:r>
-            <a:endParaRPr lang="en-US" sz="1320" dirty="0"/>
+              <a:t>Use case intake form; prioritization rubric; sample portfolio view; decision.</a:t>
+            </a:r>
+            <a:endParaRPr lang="en-US" sz="1220" dirty="0"/>
           </a:p>
         </p:txBody>
       </p:sp>
@@ -8650,12 +8654,12 @@
         </p:nvSpPr>
         <p:spPr>
           <a:xfrm>
-            <a:off x="7635240" y="2718511"/>
-            <a:ext cx="3474720" cy="1328623"/>
+            <a:off x="7543800" y="2724912"/>
+            <a:ext cx="3611880" cy="1527048"/>
           </a:xfrm>
           <a:prstGeom prst="roundRect">
             <a:avLst>
-              <a:gd name="adj" fmla="val 8259"/>
+              <a:gd name="adj" fmla="val 7186"/>
             </a:avLst>
           </a:prstGeom>
           <a:solidFill>
@@ -8677,8 +8681,8 @@
         </p:nvSpPr>
         <p:spPr>
           <a:xfrm>
-            <a:off x="7799832" y="2864815"/>
-            <a:ext cx="3145536" cy="256032"/>
+            <a:off x="7708392" y="2852928"/>
+            <a:ext cx="3282696" cy="228600"/>
           </a:xfrm>
           <a:prstGeom prst="rect">
             <a:avLst/>
@@ -8694,7 +8698,7 @@
               <a:buNone/>
             </a:pPr>
             <a:r>
-              <a:rPr lang="en-US" sz="1300" b="1" dirty="0">
+              <a:rPr lang="en-US" sz="1220" b="1" dirty="0">
                 <a:solidFill>
                   <a:srgbClr val="0068B7"/>
                 </a:solidFill>
@@ -8704,7 +8708,7 @@
               </a:rPr>
               <a:t>Concept checkpoints</a:t>
             </a:r>
-            <a:endParaRPr lang="en-US" sz="1300" dirty="0"/>
+            <a:endParaRPr lang="en-US" sz="1220" dirty="0"/>
           </a:p>
         </p:txBody>
       </p:sp>
@@ -8716,8 +8720,8 @@
         </p:nvSpPr>
         <p:spPr>
           <a:xfrm>
-            <a:off x="7818120" y="3230575"/>
-            <a:ext cx="3090672" cy="670255"/>
+            <a:off x="7726680" y="3182112"/>
+            <a:ext cx="3227832" cy="960120"/>
           </a:xfrm>
           <a:prstGeom prst="rect">
             <a:avLst/>
@@ -8735,7 +8739,7 @@
               <a:buNone/>
             </a:pPr>
             <a:r>
-              <a:rPr lang="en-US" sz="1220" dirty="0">
+              <a:rPr lang="en-US" sz="1140" dirty="0">
                 <a:solidFill>
                   <a:srgbClr val="17364A"/>
                 </a:solidFill>
@@ -8743,9 +8747,9 @@
                 <a:ea typeface="Aptos" pitchFamily="34" charset="-122"/>
                 <a:cs typeface="Aptos" pitchFamily="34" charset="-120"/>
               </a:rPr>
-              <a:t>Use case intake form; prioritization rubric; sample portfolio.</a:t>
-            </a:r>
-            <a:endParaRPr lang="en-US" sz="1220" dirty="0"/>
+              <a:t>Use case intake form; prioritization rubric;.</a:t>
+            </a:r>
+            <a:endParaRPr lang="en-US" sz="1140" dirty="0"/>
           </a:p>
         </p:txBody>
       </p:sp>
@@ -8757,12 +8761,12 @@
         </p:nvSpPr>
         <p:spPr>
           <a:xfrm>
-            <a:off x="7635240" y="4184294"/>
-            <a:ext cx="3474720" cy="1466698"/>
+            <a:off x="7543800" y="4389120"/>
+            <a:ext cx="3611880" cy="1261872"/>
           </a:xfrm>
           <a:prstGeom prst="roundRect">
             <a:avLst>
-              <a:gd name="adj" fmla="val 7481"/>
+              <a:gd name="adj" fmla="val 8696"/>
             </a:avLst>
           </a:prstGeom>
           <a:solidFill>
@@ -8784,8 +8788,8 @@
         </p:nvSpPr>
         <p:spPr>
           <a:xfrm>
-            <a:off x="7799832" y="4330598"/>
-            <a:ext cx="3145536" cy="256032"/>
+            <a:off x="7708392" y="4517136"/>
+            <a:ext cx="3282696" cy="228600"/>
           </a:xfrm>
           <a:prstGeom prst="rect">
             <a:avLst/>
@@ -8801,7 +8805,7 @@
               <a:buNone/>
             </a:pPr>
             <a:r>
-              <a:rPr lang="en-US" sz="1300" b="1" dirty="0">
+              <a:rPr lang="en-US" sz="1220" b="1" dirty="0">
                 <a:solidFill>
                   <a:srgbClr val="0068B7"/>
                 </a:solidFill>
@@ -8811,7 +8815,7 @@
               </a:rPr>
               <a:t>Apply it</a:t>
             </a:r>
-            <a:endParaRPr lang="en-US" sz="1300" dirty="0"/>
+            <a:endParaRPr lang="en-US" sz="1220" dirty="0"/>
           </a:p>
         </p:txBody>
       </p:sp>
@@ -8823,8 +8827,8 @@
         </p:nvSpPr>
         <p:spPr>
           <a:xfrm>
-            <a:off x="7799832" y="4659782"/>
-            <a:ext cx="3145536" cy="899770"/>
+            <a:off x="7708392" y="4828032"/>
+            <a:ext cx="3282696" cy="749808"/>
           </a:xfrm>
           <a:prstGeom prst="rect">
             <a:avLst/>
@@ -8842,7 +8846,7 @@
               <a:buNone/>
             </a:pPr>
             <a:r>
-              <a:rPr lang="en-US" sz="1320" dirty="0">
+              <a:rPr lang="en-US" sz="1220" dirty="0">
                 <a:solidFill>
                   <a:srgbClr val="17364A"/>
                 </a:solidFill>
@@ -8850,9 +8854,9 @@
                 <a:ea typeface="Aptos" pitchFamily="34" charset="-122"/>
                 <a:cs typeface="Aptos" pitchFamily="34" charset="-120"/>
               </a:rPr>
-              <a:t>Connect the concept to public health purpose, responsible use, required safeguards, documentation, and the next action a department should take.</a:t>
-            </a:r>
-            <a:endParaRPr lang="en-US" sz="1320" dirty="0"/>
+              <a:t>Connect the concept to public health purpose, responsible use, required.</a:t>
+            </a:r>
+            <a:endParaRPr lang="en-US" sz="1220" dirty="0"/>
           </a:p>
         </p:txBody>
       </p:sp>
@@ -9143,8 +9147,8 @@
         </p:nvSpPr>
         <p:spPr>
           <a:xfrm>
-            <a:off x="868680" y="1508760"/>
-            <a:ext cx="6309360" cy="4160520"/>
+            <a:off x="822960" y="1463040"/>
+            <a:ext cx="6565392" cy="4343400"/>
           </a:xfrm>
           <a:prstGeom prst="rect">
             <a:avLst/>
@@ -9162,7 +9166,7 @@
               <a:buNone/>
             </a:pPr>
             <a:r>
-              <a:rPr lang="en-US" sz="2100" dirty="0">
+              <a:rPr lang="en-US" sz="1920" dirty="0">
                 <a:solidFill>
                   <a:srgbClr val="003A63"/>
                 </a:solidFill>
@@ -9170,9 +9174,9 @@
                 <a:ea typeface="Aptos" pitchFamily="34" charset="-122"/>
                 <a:cs typeface="Aptos" pitchFamily="34" charset="-120"/>
               </a:rPr>
-              <a:t>• Use case intake form; prioritization rubric; sample portfolio view; decision category.</a:t>
-            </a:r>
-            <a:endParaRPr lang="en-US" sz="2100" dirty="0"/>
+              <a:t>• Use case intake form; prioritization rubric; sample portfolio view; decision.</a:t>
+            </a:r>
+            <a:endParaRPr lang="en-US" sz="1920" dirty="0"/>
           </a:p>
         </p:txBody>
       </p:sp>
@@ -9184,12 +9188,12 @@
         </p:nvSpPr>
         <p:spPr>
           <a:xfrm>
-            <a:off x="7635240" y="1325880"/>
-            <a:ext cx="3474720" cy="1255471"/>
+            <a:off x="7543800" y="1325880"/>
+            <a:ext cx="3611880" cy="1261872"/>
           </a:xfrm>
           <a:prstGeom prst="roundRect">
             <a:avLst>
-              <a:gd name="adj" fmla="val 8740"/>
+              <a:gd name="adj" fmla="val 8696"/>
             </a:avLst>
           </a:prstGeom>
           <a:solidFill>
@@ -9211,8 +9215,8 @@
         </p:nvSpPr>
         <p:spPr>
           <a:xfrm>
-            <a:off x="7799832" y="1472184"/>
-            <a:ext cx="3145536" cy="256032"/>
+            <a:off x="7708392" y="1453896"/>
+            <a:ext cx="3282696" cy="228600"/>
           </a:xfrm>
           <a:prstGeom prst="rect">
             <a:avLst/>
@@ -9228,7 +9232,7 @@
               <a:buNone/>
             </a:pPr>
             <a:r>
-              <a:rPr lang="en-US" sz="1300" b="1" dirty="0">
+              <a:rPr lang="en-US" sz="1220" b="1" dirty="0">
                 <a:solidFill>
                   <a:srgbClr val="0068B7"/>
                 </a:solidFill>
@@ -9238,7 +9242,7 @@
               </a:rPr>
               <a:t>Practice focus</a:t>
             </a:r>
-            <a:endParaRPr lang="en-US" sz="1300" dirty="0"/>
+            <a:endParaRPr lang="en-US" sz="1220" dirty="0"/>
           </a:p>
         </p:txBody>
       </p:sp>
@@ -9250,8 +9254,8 @@
         </p:nvSpPr>
         <p:spPr>
           <a:xfrm>
-            <a:off x="7799832" y="1801368"/>
-            <a:ext cx="3145536" cy="688543"/>
+            <a:off x="7708392" y="1764792"/>
+            <a:ext cx="3282696" cy="749808"/>
           </a:xfrm>
           <a:prstGeom prst="rect">
             <a:avLst/>
@@ -9269,7 +9273,7 @@
               <a:buNone/>
             </a:pPr>
             <a:r>
-              <a:rPr lang="en-US" sz="1320" dirty="0">
+              <a:rPr lang="en-US" sz="1220" dirty="0">
                 <a:solidFill>
                   <a:srgbClr val="17364A"/>
                 </a:solidFill>
@@ -9277,9 +9281,9 @@
                 <a:ea typeface="Aptos" pitchFamily="34" charset="-122"/>
                 <a:cs typeface="Aptos" pitchFamily="34" charset="-120"/>
               </a:rPr>
-              <a:t>Use case intake form; prioritization rubric; sample portfolio view; decision category definitions.</a:t>
-            </a:r>
-            <a:endParaRPr lang="en-US" sz="1320" dirty="0"/>
+              <a:t>Use case intake form; prioritization rubric; sample portfolio view; decision.</a:t>
+            </a:r>
+            <a:endParaRPr lang="en-US" sz="1220" dirty="0"/>
           </a:p>
         </p:txBody>
       </p:sp>
@@ -9291,12 +9295,12 @@
         </p:nvSpPr>
         <p:spPr>
           <a:xfrm>
-            <a:off x="7635240" y="2718511"/>
-            <a:ext cx="3474720" cy="1328623"/>
+            <a:off x="7543800" y="2724912"/>
+            <a:ext cx="3611880" cy="1527048"/>
           </a:xfrm>
           <a:prstGeom prst="roundRect">
             <a:avLst>
-              <a:gd name="adj" fmla="val 8259"/>
+              <a:gd name="adj" fmla="val 7186"/>
             </a:avLst>
           </a:prstGeom>
           <a:solidFill>
@@ -9318,8 +9322,8 @@
         </p:nvSpPr>
         <p:spPr>
           <a:xfrm>
-            <a:off x="7799832" y="2864815"/>
-            <a:ext cx="3145536" cy="256032"/>
+            <a:off x="7708392" y="2852928"/>
+            <a:ext cx="3282696" cy="228600"/>
           </a:xfrm>
           <a:prstGeom prst="rect">
             <a:avLst/>
@@ -9335,7 +9339,7 @@
               <a:buNone/>
             </a:pPr>
             <a:r>
-              <a:rPr lang="en-US" sz="1300" b="1" dirty="0">
+              <a:rPr lang="en-US" sz="1220" b="1" dirty="0">
                 <a:solidFill>
                   <a:srgbClr val="0068B7"/>
                 </a:solidFill>
@@ -9345,7 +9349,7 @@
               </a:rPr>
               <a:t>Concept checkpoints</a:t>
             </a:r>
-            <a:endParaRPr lang="en-US" sz="1300" dirty="0"/>
+            <a:endParaRPr lang="en-US" sz="1220" dirty="0"/>
           </a:p>
         </p:txBody>
       </p:sp>
@@ -9357,8 +9361,8 @@
         </p:nvSpPr>
         <p:spPr>
           <a:xfrm>
-            <a:off x="7818120" y="3230575"/>
-            <a:ext cx="3090672" cy="670255"/>
+            <a:off x="7726680" y="3182112"/>
+            <a:ext cx="3227832" cy="960120"/>
           </a:xfrm>
           <a:prstGeom prst="rect">
             <a:avLst/>
@@ -9376,7 +9380,7 @@
               <a:buNone/>
             </a:pPr>
             <a:r>
-              <a:rPr lang="en-US" sz="1220" dirty="0">
+              <a:rPr lang="en-US" sz="1140" dirty="0">
                 <a:solidFill>
                   <a:srgbClr val="17364A"/>
                 </a:solidFill>
@@ -9384,9 +9388,9 @@
                 <a:ea typeface="Aptos" pitchFamily="34" charset="-122"/>
                 <a:cs typeface="Aptos" pitchFamily="34" charset="-120"/>
               </a:rPr>
-              <a:t>Use case intake form; prioritization rubric; sample portfolio.</a:t>
-            </a:r>
-            <a:endParaRPr lang="en-US" sz="1220" dirty="0"/>
+              <a:t>Use case intake form; prioritization rubric;.</a:t>
+            </a:r>
+            <a:endParaRPr lang="en-US" sz="1140" dirty="0"/>
           </a:p>
         </p:txBody>
       </p:sp>
@@ -9398,12 +9402,12 @@
         </p:nvSpPr>
         <p:spPr>
           <a:xfrm>
-            <a:off x="7635240" y="4184294"/>
-            <a:ext cx="3474720" cy="1466698"/>
+            <a:off x="7543800" y="4389120"/>
+            <a:ext cx="3611880" cy="1261872"/>
           </a:xfrm>
           <a:prstGeom prst="roundRect">
             <a:avLst>
-              <a:gd name="adj" fmla="val 7481"/>
+              <a:gd name="adj" fmla="val 8696"/>
             </a:avLst>
           </a:prstGeom>
           <a:solidFill>
@@ -9425,8 +9429,8 @@
         </p:nvSpPr>
         <p:spPr>
           <a:xfrm>
-            <a:off x="7799832" y="4330598"/>
-            <a:ext cx="3145536" cy="256032"/>
+            <a:off x="7708392" y="4517136"/>
+            <a:ext cx="3282696" cy="228600"/>
           </a:xfrm>
           <a:prstGeom prst="rect">
             <a:avLst/>
@@ -9442,7 +9446,7 @@
               <a:buNone/>
             </a:pPr>
             <a:r>
-              <a:rPr lang="en-US" sz="1300" b="1" dirty="0">
+              <a:rPr lang="en-US" sz="1220" b="1" dirty="0">
                 <a:solidFill>
                   <a:srgbClr val="0068B7"/>
                 </a:solidFill>
@@ -9452,7 +9456,7 @@
               </a:rPr>
               <a:t>What to produce</a:t>
             </a:r>
-            <a:endParaRPr lang="en-US" sz="1300" dirty="0"/>
+            <a:endParaRPr lang="en-US" sz="1220" dirty="0"/>
           </a:p>
         </p:txBody>
       </p:sp>
@@ -9464,8 +9468,8 @@
         </p:nvSpPr>
         <p:spPr>
           <a:xfrm>
-            <a:off x="7799832" y="4659782"/>
-            <a:ext cx="3145536" cy="899770"/>
+            <a:off x="7708392" y="4828032"/>
+            <a:ext cx="3282696" cy="749808"/>
           </a:xfrm>
           <a:prstGeom prst="rect">
             <a:avLst/>
@@ -9483,7 +9487,7 @@
               <a:buNone/>
             </a:pPr>
             <a:r>
-              <a:rPr lang="en-US" sz="1320" dirty="0">
+              <a:rPr lang="en-US" sz="1220" dirty="0">
                 <a:solidFill>
                   <a:srgbClr val="17364A"/>
                 </a:solidFill>
@@ -9491,9 +9495,9 @@
                 <a:ea typeface="Aptos" pitchFamily="34" charset="-122"/>
                 <a:cs typeface="Aptos" pitchFamily="34" charset="-120"/>
               </a:rPr>
-              <a:t>Use the assignment to test whether you can explain the concept, apply it to a realistic public health situation, and identify what would need review before the work moves forward.</a:t>
-            </a:r>
-            <a:endParaRPr lang="en-US" sz="1320" dirty="0"/>
+              <a:t>Use the assignment to test whether you can explain the concept, apply it to a.</a:t>
+            </a:r>
+            <a:endParaRPr lang="en-US" sz="1220" dirty="0"/>
           </a:p>
         </p:txBody>
       </p:sp>
@@ -9784,8 +9788,8 @@
         </p:nvSpPr>
         <p:spPr>
           <a:xfrm>
-            <a:off x="868680" y="1508760"/>
-            <a:ext cx="6309360" cy="4160520"/>
+            <a:off x="822960" y="1463040"/>
+            <a:ext cx="6565392" cy="4343400"/>
           </a:xfrm>
           <a:prstGeom prst="rect">
             <a:avLst/>
@@ -9803,7 +9807,7 @@
               <a:buNone/>
             </a:pPr>
             <a:r>
-              <a:rPr lang="en-US" sz="2100" dirty="0">
+              <a:rPr lang="en-US" sz="1920" dirty="0">
                 <a:solidFill>
                   <a:srgbClr val="003A63"/>
                 </a:solidFill>
@@ -9811,16 +9815,16 @@
                 <a:ea typeface="Aptos" pitchFamily="34" charset="-122"/>
                 <a:cs typeface="Aptos" pitchFamily="34" charset="-120"/>
               </a:rPr>
-              <a:t>• 1. What is the strongest reason this module topic belongs in AI leadership and governance.</a:t>
-            </a:r>
-            <a:endParaRPr lang="en-US" sz="2100" dirty="0"/>
-          </a:p>
-          <a:p>
-            <a:pPr indent="0" marL="0">
-              <a:buNone/>
-            </a:pPr>
-            <a:r>
-              <a:rPr lang="en-US" sz="2100" dirty="0">
+              <a:t>• 1. What is the strongest reason this module topic belongs in AI leadership.</a:t>
+            </a:r>
+            <a:endParaRPr lang="en-US" sz="1920" dirty="0"/>
+          </a:p>
+          <a:p>
+            <a:pPr indent="0" marL="0">
+              <a:buNone/>
+            </a:pPr>
+            <a:r>
+              <a:rPr lang="en-US" sz="1920" dirty="0">
                 <a:solidFill>
                   <a:srgbClr val="003A63"/>
                 </a:solidFill>
@@ -9830,14 +9834,14 @@
               </a:rPr>
               <a:t>• 2. Which practice best supports accountable public health AI governance?</a:t>
             </a:r>
-            <a:endParaRPr lang="en-US" sz="2100" dirty="0"/>
-          </a:p>
-          <a:p>
-            <a:pPr indent="0" marL="0">
-              <a:buNone/>
-            </a:pPr>
-            <a:r>
-              <a:rPr lang="en-US" sz="2100" dirty="0">
+            <a:endParaRPr lang="en-US" sz="1920" dirty="0"/>
+          </a:p>
+          <a:p>
+            <a:pPr indent="0" marL="0">
+              <a:buNone/>
+            </a:pPr>
+            <a:r>
+              <a:rPr lang="en-US" sz="1920" dirty="0">
                 <a:solidFill>
                   <a:srgbClr val="003A63"/>
                 </a:solidFill>
@@ -9845,9 +9849,9 @@
                 <a:ea typeface="Aptos" pitchFamily="34" charset="-122"/>
                 <a:cs typeface="Aptos" pitchFamily="34" charset="-120"/>
               </a:rPr>
-              <a:t>• 3. When should an AI use case be escalated for leadership or governance review?</a:t>
-            </a:r>
-            <a:endParaRPr lang="en-US" sz="2100" dirty="0"/>
+              <a:t>• 3. When should an AI use case be escalated for leadership or governance.</a:t>
+            </a:r>
+            <a:endParaRPr lang="en-US" sz="1920" dirty="0"/>
           </a:p>
         </p:txBody>
       </p:sp>
@@ -9859,12 +9863,12 @@
         </p:nvSpPr>
         <p:spPr>
           <a:xfrm>
-            <a:off x="7635240" y="1325880"/>
-            <a:ext cx="3474720" cy="1255471"/>
+            <a:off x="7543800" y="1325880"/>
+            <a:ext cx="3611880" cy="1261872"/>
           </a:xfrm>
           <a:prstGeom prst="roundRect">
             <a:avLst>
-              <a:gd name="adj" fmla="val 8740"/>
+              <a:gd name="adj" fmla="val 8696"/>
             </a:avLst>
           </a:prstGeom>
           <a:solidFill>
@@ -9886,8 +9890,8 @@
         </p:nvSpPr>
         <p:spPr>
           <a:xfrm>
-            <a:off x="7799832" y="1472184"/>
-            <a:ext cx="3145536" cy="256032"/>
+            <a:off x="7708392" y="1453896"/>
+            <a:ext cx="3282696" cy="228600"/>
           </a:xfrm>
           <a:prstGeom prst="rect">
             <a:avLst/>
@@ -9903,7 +9907,7 @@
               <a:buNone/>
             </a:pPr>
             <a:r>
-              <a:rPr lang="en-US" sz="1300" b="1" dirty="0">
+              <a:rPr lang="en-US" sz="1220" b="1" dirty="0">
                 <a:solidFill>
                   <a:srgbClr val="0068B7"/>
                 </a:solidFill>
@@ -9913,7 +9917,7 @@
               </a:rPr>
               <a:t>Practice focus</a:t>
             </a:r>
-            <a:endParaRPr lang="en-US" sz="1300" dirty="0"/>
+            <a:endParaRPr lang="en-US" sz="1220" dirty="0"/>
           </a:p>
         </p:txBody>
       </p:sp>
@@ -9925,8 +9929,8 @@
         </p:nvSpPr>
         <p:spPr>
           <a:xfrm>
-            <a:off x="7799832" y="1801368"/>
-            <a:ext cx="3145536" cy="688543"/>
+            <a:off x="7708392" y="1764792"/>
+            <a:ext cx="3282696" cy="749808"/>
           </a:xfrm>
           <a:prstGeom prst="rect">
             <a:avLst/>
@@ -9944,7 +9948,7 @@
               <a:buNone/>
             </a:pPr>
             <a:r>
-              <a:rPr lang="en-US" sz="1320" dirty="0">
+              <a:rPr lang="en-US" sz="1220" dirty="0">
                 <a:solidFill>
                   <a:srgbClr val="17364A"/>
                 </a:solidFill>
@@ -9952,9 +9956,9 @@
                 <a:ea typeface="Aptos" pitchFamily="34" charset="-122"/>
                 <a:cs typeface="Aptos" pitchFamily="34" charset="-120"/>
               </a:rPr>
-              <a:t>1. What is the strongest reason this module topic belongs in AI leadership and governance training?</a:t>
-            </a:r>
-            <a:endParaRPr lang="en-US" sz="1320" dirty="0"/>
+              <a:t>1. What is the strongest reason this module topic belongs in AI leadership and.</a:t>
+            </a:r>
+            <a:endParaRPr lang="en-US" sz="1220" dirty="0"/>
           </a:p>
         </p:txBody>
       </p:sp>
@@ -9966,12 +9970,12 @@
         </p:nvSpPr>
         <p:spPr>
           <a:xfrm>
-            <a:off x="7635240" y="2718511"/>
-            <a:ext cx="3474720" cy="1328623"/>
+            <a:off x="7543800" y="2724912"/>
+            <a:ext cx="3611880" cy="1527048"/>
           </a:xfrm>
           <a:prstGeom prst="roundRect">
             <a:avLst>
-              <a:gd name="adj" fmla="val 8259"/>
+              <a:gd name="adj" fmla="val 7186"/>
             </a:avLst>
           </a:prstGeom>
           <a:solidFill>
@@ -9993,8 +9997,8 @@
         </p:nvSpPr>
         <p:spPr>
           <a:xfrm>
-            <a:off x="7799832" y="2864815"/>
-            <a:ext cx="3145536" cy="256032"/>
+            <a:off x="7708392" y="2852928"/>
+            <a:ext cx="3282696" cy="228600"/>
           </a:xfrm>
           <a:prstGeom prst="rect">
             <a:avLst/>
@@ -10010,7 +10014,7 @@
               <a:buNone/>
             </a:pPr>
             <a:r>
-              <a:rPr lang="en-US" sz="1300" b="1" dirty="0">
+              <a:rPr lang="en-US" sz="1220" b="1" dirty="0">
                 <a:solidFill>
                   <a:srgbClr val="0068B7"/>
                 </a:solidFill>
@@ -10020,7 +10024,7 @@
               </a:rPr>
               <a:t>Concept checkpoints</a:t>
             </a:r>
-            <a:endParaRPr lang="en-US" sz="1300" dirty="0"/>
+            <a:endParaRPr lang="en-US" sz="1220" dirty="0"/>
           </a:p>
         </p:txBody>
       </p:sp>
@@ -10032,8 +10036,8 @@
         </p:nvSpPr>
         <p:spPr>
           <a:xfrm>
-            <a:off x="7818120" y="3230575"/>
-            <a:ext cx="3090672" cy="670255"/>
+            <a:off x="7726680" y="3182112"/>
+            <a:ext cx="3227832" cy="960120"/>
           </a:xfrm>
           <a:prstGeom prst="rect">
             <a:avLst/>
@@ -10051,7 +10055,7 @@
               <a:buNone/>
             </a:pPr>
             <a:r>
-              <a:rPr lang="en-US" sz="1220" dirty="0">
+              <a:rPr lang="en-US" sz="1140" dirty="0">
                 <a:solidFill>
                   <a:srgbClr val="17364A"/>
                 </a:solidFill>
@@ -10061,14 +10065,14 @@
               </a:rPr>
               <a:t>1.</a:t>
             </a:r>
-            <a:endParaRPr lang="en-US" sz="1220" dirty="0"/>
-          </a:p>
-          <a:p>
-            <a:pPr indent="0" marL="0">
-              <a:buNone/>
-            </a:pPr>
-            <a:r>
-              <a:rPr lang="en-US" sz="1220" dirty="0">
+            <a:endParaRPr lang="en-US" sz="1140" dirty="0"/>
+          </a:p>
+          <a:p>
+            <a:pPr indent="0" marL="0">
+              <a:buNone/>
+            </a:pPr>
+            <a:r>
+              <a:rPr lang="en-US" sz="1140" dirty="0">
                 <a:solidFill>
                   <a:srgbClr val="17364A"/>
                 </a:solidFill>
@@ -10076,16 +10080,16 @@
                 <a:ea typeface="Aptos" pitchFamily="34" charset="-122"/>
                 <a:cs typeface="Aptos" pitchFamily="34" charset="-120"/>
               </a:rPr>
-              <a:t>What is the strongest reason this module topic belongs in AI.</a:t>
-            </a:r>
-            <a:endParaRPr lang="en-US" sz="1220" dirty="0"/>
-          </a:p>
-          <a:p>
-            <a:pPr indent="0" marL="0">
-              <a:buNone/>
-            </a:pPr>
-            <a:r>
-              <a:rPr lang="en-US" sz="1220" dirty="0">
+              <a:t>What is the strongest reason this module topic.</a:t>
+            </a:r>
+            <a:endParaRPr lang="en-US" sz="1140" dirty="0"/>
+          </a:p>
+          <a:p>
+            <a:pPr indent="0" marL="0">
+              <a:buNone/>
+            </a:pPr>
+            <a:r>
+              <a:rPr lang="en-US" sz="1140" dirty="0">
                 <a:solidFill>
                   <a:srgbClr val="17364A"/>
                 </a:solidFill>
@@ -10095,7 +10099,7 @@
               </a:rPr>
               <a:t>2.</a:t>
             </a:r>
-            <a:endParaRPr lang="en-US" sz="1220" dirty="0"/>
+            <a:endParaRPr lang="en-US" sz="1140" dirty="0"/>
           </a:p>
         </p:txBody>
       </p:sp>
@@ -10107,12 +10111,12 @@
         </p:nvSpPr>
         <p:spPr>
           <a:xfrm>
-            <a:off x="7635240" y="4184294"/>
-            <a:ext cx="3474720" cy="1466698"/>
+            <a:off x="7543800" y="4389120"/>
+            <a:ext cx="3611880" cy="1261872"/>
           </a:xfrm>
           <a:prstGeom prst="roundRect">
             <a:avLst>
-              <a:gd name="adj" fmla="val 7481"/>
+              <a:gd name="adj" fmla="val 8696"/>
             </a:avLst>
           </a:prstGeom>
           <a:solidFill>
@@ -10134,8 +10138,8 @@
         </p:nvSpPr>
         <p:spPr>
           <a:xfrm>
-            <a:off x="7799832" y="4330598"/>
-            <a:ext cx="3145536" cy="256032"/>
+            <a:off x="7708392" y="4517136"/>
+            <a:ext cx="3282696" cy="228600"/>
           </a:xfrm>
           <a:prstGeom prst="rect">
             <a:avLst/>
@@ -10151,7 +10155,7 @@
               <a:buNone/>
             </a:pPr>
             <a:r>
-              <a:rPr lang="en-US" sz="1300" b="1" dirty="0">
+              <a:rPr lang="en-US" sz="1220" b="1" dirty="0">
                 <a:solidFill>
                   <a:srgbClr val="0068B7"/>
                 </a:solidFill>
@@ -10161,7 +10165,7 @@
               </a:rPr>
               <a:t>What to produce</a:t>
             </a:r>
-            <a:endParaRPr lang="en-US" sz="1300" dirty="0"/>
+            <a:endParaRPr lang="en-US" sz="1220" dirty="0"/>
           </a:p>
         </p:txBody>
       </p:sp>
@@ -10173,8 +10177,8 @@
         </p:nvSpPr>
         <p:spPr>
           <a:xfrm>
-            <a:off x="7799832" y="4659782"/>
-            <a:ext cx="3145536" cy="899770"/>
+            <a:off x="7708392" y="4828032"/>
+            <a:ext cx="3282696" cy="749808"/>
           </a:xfrm>
           <a:prstGeom prst="rect">
             <a:avLst/>
@@ -10192,7 +10196,7 @@
               <a:buNone/>
             </a:pPr>
             <a:r>
-              <a:rPr lang="en-US" sz="1320" dirty="0">
+              <a:rPr lang="en-US" sz="1220" dirty="0">
                 <a:solidFill>
                   <a:srgbClr val="17364A"/>
                 </a:solidFill>
@@ -10200,9 +10204,9 @@
                 <a:ea typeface="Aptos" pitchFamily="34" charset="-122"/>
                 <a:cs typeface="Aptos" pitchFamily="34" charset="-120"/>
               </a:rPr>
-              <a:t>Use the assignment to test whether you can explain the concept, apply it to a realistic public health situation, and identify what would need review before the work moves forward.</a:t>
-            </a:r>
-            <a:endParaRPr lang="en-US" sz="1320" dirty="0"/>
+              <a:t>Use the assignment to test whether you can explain the concept, apply it to a.</a:t>
+            </a:r>
+            <a:endParaRPr lang="en-US" sz="1220" dirty="0"/>
           </a:p>
         </p:txBody>
       </p:sp>
@@ -10520,7 +10524,7 @@
                 <a:ea typeface="Aptos" pitchFamily="34" charset="-122"/>
                 <a:cs typeface="Aptos" pitchFamily="34" charset="-120"/>
               </a:rPr>
-              <a:t>• AI opportunities can quickly exceed an agency's capacity to evaluate, implement, and sustain.</a:t>
+              <a:t>• AI opportunities can quickly exceed an agency's capacity to evaluate,.</a:t>
             </a:r>
             <a:endParaRPr lang="en-US" sz="2100" dirty="0"/>
           </a:p>
@@ -10537,7 +10541,7 @@
                 <a:ea typeface="Aptos" pitchFamily="34" charset="-122"/>
                 <a:cs typeface="Aptos" pitchFamily="34" charset="-120"/>
               </a:rPr>
-              <a:t>• Leaders need a portfolio strategy that helps distinguish high-value public health uses from.</a:t>
+              <a:t>• Leaders need a portfolio strategy that helps distinguish high-value public.</a:t>
             </a:r>
             <a:endParaRPr lang="en-US" sz="2100" dirty="0"/>
           </a:p>
@@ -10554,7 +10558,7 @@
                 <a:ea typeface="Aptos" pitchFamily="34" charset="-122"/>
                 <a:cs typeface="Aptos" pitchFamily="34" charset="-120"/>
               </a:rPr>
-              <a:t>• A portfolio approach organizes AI opportunities across programs, risk levels, readiness,.</a:t>
+              <a:t>• A portfolio approach organizes AI opportunities across programs, risk.</a:t>
             </a:r>
             <a:endParaRPr lang="en-US" sz="2100" dirty="0"/>
           </a:p>
@@ -10595,8 +10599,8 @@
         </p:nvSpPr>
         <p:spPr>
           <a:xfrm>
-            <a:off x="8074152" y="1563624"/>
-            <a:ext cx="2825496" cy="256032"/>
+            <a:off x="8074152" y="1545336"/>
+            <a:ext cx="2825496" cy="228600"/>
           </a:xfrm>
           <a:prstGeom prst="rect">
             <a:avLst/>
@@ -10612,7 +10616,7 @@
               <a:buNone/>
             </a:pPr>
             <a:r>
-              <a:rPr lang="en-US" sz="1300" b="1" dirty="0">
+              <a:rPr lang="en-US" sz="1220" b="1" dirty="0">
                 <a:solidFill>
                   <a:srgbClr val="0068B7"/>
                 </a:solidFill>
@@ -10622,7 +10626,7 @@
               </a:rPr>
               <a:t>Module details</a:t>
             </a:r>
-            <a:endParaRPr lang="en-US" sz="1300" dirty="0"/>
+            <a:endParaRPr lang="en-US" sz="1220" dirty="0"/>
           </a:p>
         </p:txBody>
       </p:sp>
@@ -10634,8 +10638,8 @@
         </p:nvSpPr>
         <p:spPr>
           <a:xfrm>
-            <a:off x="8074152" y="1892808"/>
-            <a:ext cx="2825496" cy="1353312"/>
+            <a:off x="8074152" y="1856232"/>
+            <a:ext cx="2825496" cy="1408176"/>
           </a:xfrm>
           <a:prstGeom prst="rect">
             <a:avLst/>
@@ -10653,7 +10657,7 @@
               <a:buNone/>
             </a:pPr>
             <a:r>
-              <a:rPr lang="en-US" sz="1320" dirty="0">
+              <a:rPr lang="en-US" sz="1220" dirty="0">
                 <a:solidFill>
                   <a:srgbClr val="17364A"/>
                 </a:solidFill>
@@ -10661,9 +10665,9 @@
                 <a:ea typeface="Aptos" pitchFamily="34" charset="-122"/>
                 <a:cs typeface="Aptos" pitchFamily="34" charset="-120"/>
               </a:rPr>
-              <a:t>Level: advanced/leadership Primary track: Public Health Executive Leadership Track Appears in tracks: governance-security</a:t>
-            </a:r>
-            <a:endParaRPr lang="en-US" sz="1320" dirty="0"/>
+              <a:t>Level: advanced/leadership Primary track: Public Health Executive Leadership.</a:t>
+            </a:r>
+            <a:endParaRPr lang="en-US" sz="1220" dirty="0"/>
           </a:p>
         </p:txBody>
       </p:sp>
@@ -10702,8 +10706,8 @@
         </p:nvSpPr>
         <p:spPr>
           <a:xfrm>
-            <a:off x="8074152" y="3822192"/>
-            <a:ext cx="2825496" cy="256032"/>
+            <a:off x="8074152" y="3803904"/>
+            <a:ext cx="2825496" cy="228600"/>
           </a:xfrm>
           <a:prstGeom prst="rect">
             <a:avLst/>
@@ -10719,7 +10723,7 @@
               <a:buNone/>
             </a:pPr>
             <a:r>
-              <a:rPr lang="en-US" sz="1300" b="1" dirty="0">
+              <a:rPr lang="en-US" sz="1220" b="1" dirty="0">
                 <a:solidFill>
                   <a:srgbClr val="0068B7"/>
                 </a:solidFill>
@@ -10729,7 +10733,7 @@
               </a:rPr>
               <a:t>Learning sequence</a:t>
             </a:r>
-            <a:endParaRPr lang="en-US" sz="1300" dirty="0"/>
+            <a:endParaRPr lang="en-US" sz="1220" dirty="0"/>
           </a:p>
         </p:txBody>
       </p:sp>
@@ -10741,8 +10745,8 @@
         </p:nvSpPr>
         <p:spPr>
           <a:xfrm>
-            <a:off x="8092440" y="4187952"/>
-            <a:ext cx="2770632" cy="1033272"/>
+            <a:off x="8092440" y="4133088"/>
+            <a:ext cx="2770632" cy="1124712"/>
           </a:xfrm>
           <a:prstGeom prst="rect">
             <a:avLst/>
@@ -10760,7 +10764,7 @@
               <a:buNone/>
             </a:pPr>
             <a:r>
-              <a:rPr lang="en-US" sz="1220" dirty="0">
+              <a:rPr lang="en-US" sz="1140" dirty="0">
                 <a:solidFill>
                   <a:srgbClr val="17364A"/>
                 </a:solidFill>
@@ -10770,14 +10774,14 @@
               </a:rPr>
               <a:t>Read the module for shared vocabulary and context.</a:t>
             </a:r>
-            <a:endParaRPr lang="en-US" sz="1220" dirty="0"/>
-          </a:p>
-          <a:p>
-            <a:pPr indent="0" marL="0">
-              <a:buNone/>
-            </a:pPr>
-            <a:r>
-              <a:rPr lang="en-US" sz="1220" dirty="0">
+            <a:endParaRPr lang="en-US" sz="1140" dirty="0"/>
+          </a:p>
+          <a:p>
+            <a:pPr indent="0" marL="0">
+              <a:buNone/>
+            </a:pPr>
+            <a:r>
+              <a:rPr lang="en-US" sz="1140" dirty="0">
                 <a:solidFill>
                   <a:srgbClr val="17364A"/>
                 </a:solidFill>
@@ -10785,16 +10789,16 @@
                 <a:ea typeface="Aptos" pitchFamily="34" charset="-122"/>
                 <a:cs typeface="Aptos" pitchFamily="34" charset="-120"/>
               </a:rPr>
-              <a:t>Complete the practical exercise to apply the concept.</a:t>
-            </a:r>
-            <a:endParaRPr lang="en-US" sz="1220" dirty="0"/>
-          </a:p>
-          <a:p>
-            <a:pPr indent="0" marL="0">
-              <a:buNone/>
-            </a:pPr>
-            <a:r>
-              <a:rPr lang="en-US" sz="1220" dirty="0">
+              <a:t>Complete the practical exercise to apply the.</a:t>
+            </a:r>
+            <a:endParaRPr lang="en-US" sz="1140" dirty="0"/>
+          </a:p>
+          <a:p>
+            <a:pPr indent="0" marL="0">
+              <a:buNone/>
+            </a:pPr>
+            <a:r>
+              <a:rPr lang="en-US" sz="1140" dirty="0">
                 <a:solidFill>
                   <a:srgbClr val="17364A"/>
                 </a:solidFill>
@@ -10804,7 +10808,7 @@
               </a:rPr>
               <a:t>Use the notes and references for deeper review.</a:t>
             </a:r>
-            <a:endParaRPr lang="en-US" sz="1220" dirty="0"/>
+            <a:endParaRPr lang="en-US" sz="1140" dirty="0"/>
           </a:p>
         </p:txBody>
       </p:sp>
@@ -11095,8 +11099,8 @@
         </p:nvSpPr>
         <p:spPr>
           <a:xfrm>
-            <a:off x="868680" y="1508760"/>
-            <a:ext cx="6309360" cy="4160520"/>
+            <a:off x="822960" y="1463040"/>
+            <a:ext cx="6565392" cy="4343400"/>
           </a:xfrm>
           <a:prstGeom prst="rect">
             <a:avLst/>
@@ -11114,7 +11118,7 @@
               <a:buNone/>
             </a:pPr>
             <a:r>
-              <a:rPr lang="en-US" sz="2100" dirty="0">
+              <a:rPr lang="en-US" sz="1920" dirty="0">
                 <a:solidFill>
                   <a:srgbClr val="003A63"/>
                 </a:solidFill>
@@ -11124,14 +11128,14 @@
               </a:rPr>
               <a:t>• NIST Artificial Intelligence Risk Management Framework (AI RMF 1.0):.</a:t>
             </a:r>
-            <a:endParaRPr lang="en-US" sz="2100" dirty="0"/>
-          </a:p>
-          <a:p>
-            <a:pPr indent="0" marL="0">
-              <a:buNone/>
-            </a:pPr>
-            <a:r>
-              <a:rPr lang="en-US" sz="2100" dirty="0">
+            <a:endParaRPr lang="en-US" sz="1920" dirty="0"/>
+          </a:p>
+          <a:p>
+            <a:pPr indent="0" marL="0">
+              <a:buNone/>
+            </a:pPr>
+            <a:r>
+              <a:rPr lang="en-US" sz="1920" dirty="0">
                 <a:solidFill>
                   <a:srgbClr val="003A63"/>
                 </a:solidFill>
@@ -11141,14 +11145,14 @@
               </a:rPr>
               <a:t>• NIST Generative AI Profile:.</a:t>
             </a:r>
-            <a:endParaRPr lang="en-US" sz="2100" dirty="0"/>
-          </a:p>
-          <a:p>
-            <a:pPr indent="0" marL="0">
-              <a:buNone/>
-            </a:pPr>
-            <a:r>
-              <a:rPr lang="en-US" sz="2100" dirty="0">
+            <a:endParaRPr lang="en-US" sz="1920" dirty="0"/>
+          </a:p>
+          <a:p>
+            <a:pPr indent="0" marL="0">
+              <a:buNone/>
+            </a:pPr>
+            <a:r>
+              <a:rPr lang="en-US" sz="1920" dirty="0">
                 <a:solidFill>
                   <a:srgbClr val="003A63"/>
                 </a:solidFill>
@@ -11158,7 +11162,7 @@
               </a:rPr>
               <a:t>• NIST Privacy Framework</a:t>
             </a:r>
-            <a:endParaRPr lang="en-US" sz="2100" dirty="0"/>
+            <a:endParaRPr lang="en-US" sz="1920" dirty="0"/>
           </a:p>
         </p:txBody>
       </p:sp>
@@ -11170,12 +11174,12 @@
         </p:nvSpPr>
         <p:spPr>
           <a:xfrm>
-            <a:off x="7635240" y="1325880"/>
-            <a:ext cx="3474720" cy="1207008"/>
+            <a:off x="7543800" y="1325880"/>
+            <a:ext cx="3611880" cy="1261872"/>
           </a:xfrm>
           <a:prstGeom prst="roundRect">
             <a:avLst>
-              <a:gd name="adj" fmla="val 9091"/>
+              <a:gd name="adj" fmla="val 8696"/>
             </a:avLst>
           </a:prstGeom>
           <a:solidFill>
@@ -11197,8 +11201,8 @@
         </p:nvSpPr>
         <p:spPr>
           <a:xfrm>
-            <a:off x="7799832" y="1472184"/>
-            <a:ext cx="3145536" cy="256032"/>
+            <a:off x="7708392" y="1453896"/>
+            <a:ext cx="3282696" cy="228600"/>
           </a:xfrm>
           <a:prstGeom prst="rect">
             <a:avLst/>
@@ -11214,7 +11218,7 @@
               <a:buNone/>
             </a:pPr>
             <a:r>
-              <a:rPr lang="en-US" sz="1300" b="1" dirty="0">
+              <a:rPr lang="en-US" sz="1220" b="1" dirty="0">
                 <a:solidFill>
                   <a:srgbClr val="0068B7"/>
                 </a:solidFill>
@@ -11224,7 +11228,7 @@
               </a:rPr>
               <a:t>Core concept</a:t>
             </a:r>
-            <a:endParaRPr lang="en-US" sz="1300" dirty="0"/>
+            <a:endParaRPr lang="en-US" sz="1220" dirty="0"/>
           </a:p>
         </p:txBody>
       </p:sp>
@@ -11236,8 +11240,8 @@
         </p:nvSpPr>
         <p:spPr>
           <a:xfrm>
-            <a:off x="7799832" y="1801368"/>
-            <a:ext cx="3145536" cy="640080"/>
+            <a:off x="7708392" y="1764792"/>
+            <a:ext cx="3282696" cy="749808"/>
           </a:xfrm>
           <a:prstGeom prst="rect">
             <a:avLst/>
@@ -11255,7 +11259,7 @@
               <a:buNone/>
             </a:pPr>
             <a:r>
-              <a:rPr lang="en-US" sz="1320" dirty="0">
+              <a:rPr lang="en-US" sz="1220" dirty="0">
                 <a:solidFill>
                   <a:srgbClr val="17364A"/>
                 </a:solidFill>
@@ -11265,7 +11269,7 @@
               </a:rPr>
               <a:t>NIST Artificial Intelligence Risk Management Framework (AI RMF 1.0):.</a:t>
             </a:r>
-            <a:endParaRPr lang="en-US" sz="1320" dirty="0"/>
+            <a:endParaRPr lang="en-US" sz="1220" dirty="0"/>
           </a:p>
         </p:txBody>
       </p:sp>
@@ -11277,12 +11281,12 @@
         </p:nvSpPr>
         <p:spPr>
           <a:xfrm>
-            <a:off x="7635240" y="2670048"/>
-            <a:ext cx="3474720" cy="1377086"/>
+            <a:off x="7543800" y="2724912"/>
+            <a:ext cx="3611880" cy="1527048"/>
           </a:xfrm>
           <a:prstGeom prst="roundRect">
             <a:avLst>
-              <a:gd name="adj" fmla="val 7968"/>
+              <a:gd name="adj" fmla="val 7186"/>
             </a:avLst>
           </a:prstGeom>
           <a:solidFill>
@@ -11304,8 +11308,8 @@
         </p:nvSpPr>
         <p:spPr>
           <a:xfrm>
-            <a:off x="7799832" y="2816352"/>
-            <a:ext cx="3145536" cy="256032"/>
+            <a:off x="7708392" y="2852928"/>
+            <a:ext cx="3282696" cy="228600"/>
           </a:xfrm>
           <a:prstGeom prst="rect">
             <a:avLst/>
@@ -11321,7 +11325,7 @@
               <a:buNone/>
             </a:pPr>
             <a:r>
-              <a:rPr lang="en-US" sz="1300" b="1" dirty="0">
+              <a:rPr lang="en-US" sz="1220" b="1" dirty="0">
                 <a:solidFill>
                   <a:srgbClr val="0068B7"/>
                 </a:solidFill>
@@ -11331,7 +11335,7 @@
               </a:rPr>
               <a:t>Concept checkpoints</a:t>
             </a:r>
-            <a:endParaRPr lang="en-US" sz="1300" dirty="0"/>
+            <a:endParaRPr lang="en-US" sz="1220" dirty="0"/>
           </a:p>
         </p:txBody>
       </p:sp>
@@ -11343,8 +11347,8 @@
         </p:nvSpPr>
         <p:spPr>
           <a:xfrm>
-            <a:off x="7818120" y="3182112"/>
-            <a:ext cx="3090672" cy="718718"/>
+            <a:off x="7726680" y="3182112"/>
+            <a:ext cx="3227832" cy="960120"/>
           </a:xfrm>
           <a:prstGeom prst="rect">
             <a:avLst/>
@@ -11362,7 +11366,7 @@
               <a:buNone/>
             </a:pPr>
             <a:r>
-              <a:rPr lang="en-US" sz="1220" dirty="0">
+              <a:rPr lang="en-US" sz="1140" dirty="0">
                 <a:solidFill>
                   <a:srgbClr val="17364A"/>
                 </a:solidFill>
@@ -11370,16 +11374,16 @@
                 <a:ea typeface="Aptos" pitchFamily="34" charset="-122"/>
                 <a:cs typeface="Aptos" pitchFamily="34" charset="-120"/>
               </a:rPr>
-              <a:t>NIST Artificial Intelligence Risk Management Framework (AI RMF.</a:t>
-            </a:r>
-            <a:endParaRPr lang="en-US" sz="1220" dirty="0"/>
-          </a:p>
-          <a:p>
-            <a:pPr indent="0" marL="0">
-              <a:buNone/>
-            </a:pPr>
-            <a:r>
-              <a:rPr lang="en-US" sz="1220" dirty="0">
+              <a:t>NIST Artificial Intelligence Risk Management.</a:t>
+            </a:r>
+            <a:endParaRPr lang="en-US" sz="1140" dirty="0"/>
+          </a:p>
+          <a:p>
+            <a:pPr indent="0" marL="0">
+              <a:buNone/>
+            </a:pPr>
+            <a:r>
+              <a:rPr lang="en-US" sz="1140" dirty="0">
                 <a:solidFill>
                   <a:srgbClr val="17364A"/>
                 </a:solidFill>
@@ -11387,16 +11391,16 @@
                 <a:ea typeface="Aptos" pitchFamily="34" charset="-122"/>
                 <a:cs typeface="Aptos" pitchFamily="34" charset="-120"/>
               </a:rPr>
-              <a:t>CDC Public Health Data Strategy and Data Modernization resources:.</a:t>
-            </a:r>
-            <a:endParaRPr lang="en-US" sz="1220" dirty="0"/>
-          </a:p>
-          <a:p>
-            <a:pPr indent="0" marL="0">
-              <a:buNone/>
-            </a:pPr>
-            <a:r>
-              <a:rPr lang="en-US" sz="1220" dirty="0">
+              <a:t>CDC Public Health Data Strategy and Data.</a:t>
+            </a:r>
+            <a:endParaRPr lang="en-US" sz="1140" dirty="0"/>
+          </a:p>
+          <a:p>
+            <a:pPr indent="0" marL="0">
+              <a:buNone/>
+            </a:pPr>
+            <a:r>
+              <a:rPr lang="en-US" sz="1140" dirty="0">
                 <a:solidFill>
                   <a:srgbClr val="17364A"/>
                 </a:solidFill>
@@ -11404,9 +11408,9 @@
                 <a:ea typeface="Aptos" pitchFamily="34" charset="-122"/>
                 <a:cs typeface="Aptos" pitchFamily="34" charset="-120"/>
               </a:rPr>
-              <a:t>WHO Ethics and Governance of Artificial Intelligence for Health:.</a:t>
-            </a:r>
-            <a:endParaRPr lang="en-US" sz="1220" dirty="0"/>
+              <a:t>WHO Ethics and Governance of Artificial.</a:t>
+            </a:r>
+            <a:endParaRPr lang="en-US" sz="1140" dirty="0"/>
           </a:p>
         </p:txBody>
       </p:sp>
@@ -11418,12 +11422,12 @@
         </p:nvSpPr>
         <p:spPr>
           <a:xfrm>
-            <a:off x="7635240" y="4184294"/>
-            <a:ext cx="3474720" cy="1466698"/>
+            <a:off x="7543800" y="4389120"/>
+            <a:ext cx="3611880" cy="1261872"/>
           </a:xfrm>
           <a:prstGeom prst="roundRect">
             <a:avLst>
-              <a:gd name="adj" fmla="val 7481"/>
+              <a:gd name="adj" fmla="val 8696"/>
             </a:avLst>
           </a:prstGeom>
           <a:solidFill>
@@ -11445,8 +11449,8 @@
         </p:nvSpPr>
         <p:spPr>
           <a:xfrm>
-            <a:off x="7799832" y="4330598"/>
-            <a:ext cx="3145536" cy="256032"/>
+            <a:off x="7708392" y="4517136"/>
+            <a:ext cx="3282696" cy="228600"/>
           </a:xfrm>
           <a:prstGeom prst="rect">
             <a:avLst/>
@@ -11462,7 +11466,7 @@
               <a:buNone/>
             </a:pPr>
             <a:r>
-              <a:rPr lang="en-US" sz="1300" b="1" dirty="0">
+              <a:rPr lang="en-US" sz="1220" b="1" dirty="0">
                 <a:solidFill>
                   <a:srgbClr val="0068B7"/>
                 </a:solidFill>
@@ -11472,7 +11476,7 @@
               </a:rPr>
               <a:t>Apply it</a:t>
             </a:r>
-            <a:endParaRPr lang="en-US" sz="1300" dirty="0"/>
+            <a:endParaRPr lang="en-US" sz="1220" dirty="0"/>
           </a:p>
         </p:txBody>
       </p:sp>
@@ -11484,8 +11488,8 @@
         </p:nvSpPr>
         <p:spPr>
           <a:xfrm>
-            <a:off x="7799832" y="4659782"/>
-            <a:ext cx="3145536" cy="899770"/>
+            <a:off x="7708392" y="4828032"/>
+            <a:ext cx="3282696" cy="749808"/>
           </a:xfrm>
           <a:prstGeom prst="rect">
             <a:avLst/>
@@ -11503,7 +11507,7 @@
               <a:buNone/>
             </a:pPr>
             <a:r>
-              <a:rPr lang="en-US" sz="1320" dirty="0">
+              <a:rPr lang="en-US" sz="1220" dirty="0">
                 <a:solidFill>
                   <a:srgbClr val="17364A"/>
                 </a:solidFill>
@@ -11511,9 +11515,9 @@
                 <a:ea typeface="Aptos" pitchFamily="34" charset="-122"/>
                 <a:cs typeface="Aptos" pitchFamily="34" charset="-120"/>
               </a:rPr>
-              <a:t>Connect the concept to public health purpose, responsible use, required safeguards, documentation, and the next action a department should take.</a:t>
-            </a:r>
-            <a:endParaRPr lang="en-US" sz="1320" dirty="0"/>
+              <a:t>Connect the concept to public health purpose, responsible use, required.</a:t>
+            </a:r>
+            <a:endParaRPr lang="en-US" sz="1220" dirty="0"/>
           </a:p>
         </p:txBody>
       </p:sp>
@@ -11804,8 +11808,8 @@
         </p:nvSpPr>
         <p:spPr>
           <a:xfrm>
-            <a:off x="868680" y="1508760"/>
-            <a:ext cx="6309360" cy="4160520"/>
+            <a:off x="822960" y="1463040"/>
+            <a:ext cx="6565392" cy="4343400"/>
           </a:xfrm>
           <a:prstGeom prst="rect">
             <a:avLst/>
@@ -11823,7 +11827,7 @@
               <a:buNone/>
             </a:pPr>
             <a:r>
-              <a:rPr lang="en-US" sz="2100" dirty="0">
+              <a:rPr lang="en-US" sz="1920" dirty="0">
                 <a:solidFill>
                   <a:srgbClr val="003A63"/>
                 </a:solidFill>
@@ -11831,16 +11835,16 @@
                 <a:ea typeface="Aptos" pitchFamily="34" charset="-122"/>
                 <a:cs typeface="Aptos" pitchFamily="34" charset="-120"/>
               </a:rPr>
-              <a:t>• OMB Memorandum M-24-10 on federal AI governance, risk management, and innovation, where.</a:t>
-            </a:r>
-            <a:endParaRPr lang="en-US" sz="2100" dirty="0"/>
-          </a:p>
-          <a:p>
-            <a:pPr indent="0" marL="0">
-              <a:buNone/>
-            </a:pPr>
-            <a:r>
-              <a:rPr lang="en-US" sz="2100" dirty="0">
+              <a:t>• OMB Memorandum M-24-10 on federal AI governance, risk management, and.</a:t>
+            </a:r>
+            <a:endParaRPr lang="en-US" sz="1920" dirty="0"/>
+          </a:p>
+          <a:p>
+            <a:pPr indent="0" marL="0">
+              <a:buNone/>
+            </a:pPr>
+            <a:r>
+              <a:rPr lang="en-US" sz="1920" dirty="0">
                 <a:solidFill>
                   <a:srgbClr val="003A63"/>
                 </a:solidFill>
@@ -11848,9 +11852,9 @@
                 <a:ea typeface="Aptos" pitchFamily="34" charset="-122"/>
                 <a:cs typeface="Aptos" pitchFamily="34" charset="-120"/>
               </a:rPr>
-              <a:t>• Agency strategic plans, procurement policies, privacy policies, cybersecurity policies, records.</a:t>
-            </a:r>
-            <a:endParaRPr lang="en-US" sz="2100" dirty="0"/>
+              <a:t>• Agency strategic plans, procurement policies, privacy policies,.</a:t>
+            </a:r>
+            <a:endParaRPr lang="en-US" sz="1920" dirty="0"/>
           </a:p>
         </p:txBody>
       </p:sp>
@@ -11862,12 +11866,12 @@
         </p:nvSpPr>
         <p:spPr>
           <a:xfrm>
-            <a:off x="7635240" y="1325880"/>
-            <a:ext cx="3474720" cy="1255471"/>
+            <a:off x="7543800" y="1325880"/>
+            <a:ext cx="3611880" cy="1261872"/>
           </a:xfrm>
           <a:prstGeom prst="roundRect">
             <a:avLst>
-              <a:gd name="adj" fmla="val 8740"/>
+              <a:gd name="adj" fmla="val 8696"/>
             </a:avLst>
           </a:prstGeom>
           <a:solidFill>
@@ -11889,8 +11893,8 @@
         </p:nvSpPr>
         <p:spPr>
           <a:xfrm>
-            <a:off x="7799832" y="1472184"/>
-            <a:ext cx="3145536" cy="256032"/>
+            <a:off x="7708392" y="1453896"/>
+            <a:ext cx="3282696" cy="228600"/>
           </a:xfrm>
           <a:prstGeom prst="rect">
             <a:avLst/>
@@ -11906,7 +11910,7 @@
               <a:buNone/>
             </a:pPr>
             <a:r>
-              <a:rPr lang="en-US" sz="1300" b="1" dirty="0">
+              <a:rPr lang="en-US" sz="1220" b="1" dirty="0">
                 <a:solidFill>
                   <a:srgbClr val="0068B7"/>
                 </a:solidFill>
@@ -11916,7 +11920,7 @@
               </a:rPr>
               <a:t>Core concept</a:t>
             </a:r>
-            <a:endParaRPr lang="en-US" sz="1300" dirty="0"/>
+            <a:endParaRPr lang="en-US" sz="1220" dirty="0"/>
           </a:p>
         </p:txBody>
       </p:sp>
@@ -11928,8 +11932,8 @@
         </p:nvSpPr>
         <p:spPr>
           <a:xfrm>
-            <a:off x="7799832" y="1801368"/>
-            <a:ext cx="3145536" cy="688543"/>
+            <a:off x="7708392" y="1764792"/>
+            <a:ext cx="3282696" cy="749808"/>
           </a:xfrm>
           <a:prstGeom prst="rect">
             <a:avLst/>
@@ -11947,7 +11951,7 @@
               <a:buNone/>
             </a:pPr>
             <a:r>
-              <a:rPr lang="en-US" sz="1320" dirty="0">
+              <a:rPr lang="en-US" sz="1220" dirty="0">
                 <a:solidFill>
                   <a:srgbClr val="17364A"/>
                 </a:solidFill>
@@ -11955,9 +11959,9 @@
                 <a:ea typeface="Aptos" pitchFamily="34" charset="-122"/>
                 <a:cs typeface="Aptos" pitchFamily="34" charset="-120"/>
               </a:rPr>
-              <a:t>OMB Memorandum M-24-10 on federal AI governance, risk management, and innovation, where relevant to.</a:t>
-            </a:r>
-            <a:endParaRPr lang="en-US" sz="1320" dirty="0"/>
+              <a:t>OMB Memorandum M-24-10 on federal AI governance, risk management, and.</a:t>
+            </a:r>
+            <a:endParaRPr lang="en-US" sz="1220" dirty="0"/>
           </a:p>
         </p:txBody>
       </p:sp>
@@ -11969,12 +11973,12 @@
         </p:nvSpPr>
         <p:spPr>
           <a:xfrm>
-            <a:off x="7635240" y="2718511"/>
-            <a:ext cx="3474720" cy="1328623"/>
+            <a:off x="7543800" y="2724912"/>
+            <a:ext cx="3611880" cy="1527048"/>
           </a:xfrm>
           <a:prstGeom prst="roundRect">
             <a:avLst>
-              <a:gd name="adj" fmla="val 8259"/>
+              <a:gd name="adj" fmla="val 7186"/>
             </a:avLst>
           </a:prstGeom>
           <a:solidFill>
@@ -11996,8 +12000,8 @@
         </p:nvSpPr>
         <p:spPr>
           <a:xfrm>
-            <a:off x="7799832" y="2864815"/>
-            <a:ext cx="3145536" cy="256032"/>
+            <a:off x="7708392" y="2852928"/>
+            <a:ext cx="3282696" cy="228600"/>
           </a:xfrm>
           <a:prstGeom prst="rect">
             <a:avLst/>
@@ -12013,7 +12017,7 @@
               <a:buNone/>
             </a:pPr>
             <a:r>
-              <a:rPr lang="en-US" sz="1300" b="1" dirty="0">
+              <a:rPr lang="en-US" sz="1220" b="1" dirty="0">
                 <a:solidFill>
                   <a:srgbClr val="0068B7"/>
                 </a:solidFill>
@@ -12023,7 +12027,7 @@
               </a:rPr>
               <a:t>Concept checkpoints</a:t>
             </a:r>
-            <a:endParaRPr lang="en-US" sz="1300" dirty="0"/>
+            <a:endParaRPr lang="en-US" sz="1220" dirty="0"/>
           </a:p>
         </p:txBody>
       </p:sp>
@@ -12035,8 +12039,8 @@
         </p:nvSpPr>
         <p:spPr>
           <a:xfrm>
-            <a:off x="7818120" y="3230575"/>
-            <a:ext cx="3090672" cy="670255"/>
+            <a:off x="7726680" y="3182112"/>
+            <a:ext cx="3227832" cy="960120"/>
           </a:xfrm>
           <a:prstGeom prst="rect">
             <a:avLst/>
@@ -12054,7 +12058,7 @@
               <a:buNone/>
             </a:pPr>
             <a:r>
-              <a:rPr lang="en-US" sz="1220" dirty="0">
+              <a:rPr lang="en-US" sz="1140" dirty="0">
                 <a:solidFill>
                   <a:srgbClr val="17364A"/>
                 </a:solidFill>
@@ -12062,16 +12066,16 @@
                 <a:ea typeface="Aptos" pitchFamily="34" charset="-122"/>
                 <a:cs typeface="Aptos" pitchFamily="34" charset="-120"/>
               </a:rPr>
-              <a:t>OMB Memorandum M-24-10 on federal AI governance, risk management,.</a:t>
-            </a:r>
-            <a:endParaRPr lang="en-US" sz="1220" dirty="0"/>
-          </a:p>
-          <a:p>
-            <a:pPr indent="0" marL="0">
-              <a:buNone/>
-            </a:pPr>
-            <a:r>
-              <a:rPr lang="en-US" sz="1220" dirty="0">
+              <a:t>OMB Memorandum M-24-10 on federal AI governance,.</a:t>
+            </a:r>
+            <a:endParaRPr lang="en-US" sz="1140" dirty="0"/>
+          </a:p>
+          <a:p>
+            <a:pPr indent="0" marL="0">
+              <a:buNone/>
+            </a:pPr>
+            <a:r>
+              <a:rPr lang="en-US" sz="1140" dirty="0">
                 <a:solidFill>
                   <a:srgbClr val="17364A"/>
                 </a:solidFill>
@@ -12079,9 +12083,9 @@
                 <a:ea typeface="Aptos" pitchFamily="34" charset="-122"/>
                 <a:cs typeface="Aptos" pitchFamily="34" charset="-120"/>
               </a:rPr>
-              <a:t>Agency strategic plans, procurement policies, privacy policies,.</a:t>
-            </a:r>
-            <a:endParaRPr lang="en-US" sz="1220" dirty="0"/>
+              <a:t>Agency strategic plans, procurement policies,.</a:t>
+            </a:r>
+            <a:endParaRPr lang="en-US" sz="1140" dirty="0"/>
           </a:p>
         </p:txBody>
       </p:sp>
@@ -12093,12 +12097,12 @@
         </p:nvSpPr>
         <p:spPr>
           <a:xfrm>
-            <a:off x="7635240" y="4184294"/>
-            <a:ext cx="3474720" cy="1466698"/>
+            <a:off x="7543800" y="4389120"/>
+            <a:ext cx="3611880" cy="1261872"/>
           </a:xfrm>
           <a:prstGeom prst="roundRect">
             <a:avLst>
-              <a:gd name="adj" fmla="val 7481"/>
+              <a:gd name="adj" fmla="val 8696"/>
             </a:avLst>
           </a:prstGeom>
           <a:solidFill>
@@ -12120,8 +12124,8 @@
         </p:nvSpPr>
         <p:spPr>
           <a:xfrm>
-            <a:off x="7799832" y="4330598"/>
-            <a:ext cx="3145536" cy="256032"/>
+            <a:off x="7708392" y="4517136"/>
+            <a:ext cx="3282696" cy="228600"/>
           </a:xfrm>
           <a:prstGeom prst="rect">
             <a:avLst/>
@@ -12137,7 +12141,7 @@
               <a:buNone/>
             </a:pPr>
             <a:r>
-              <a:rPr lang="en-US" sz="1300" b="1" dirty="0">
+              <a:rPr lang="en-US" sz="1220" b="1" dirty="0">
                 <a:solidFill>
                   <a:srgbClr val="0068B7"/>
                 </a:solidFill>
@@ -12147,7 +12151,7 @@
               </a:rPr>
               <a:t>Apply it</a:t>
             </a:r>
-            <a:endParaRPr lang="en-US" sz="1300" dirty="0"/>
+            <a:endParaRPr lang="en-US" sz="1220" dirty="0"/>
           </a:p>
         </p:txBody>
       </p:sp>
@@ -12159,8 +12163,8 @@
         </p:nvSpPr>
         <p:spPr>
           <a:xfrm>
-            <a:off x="7799832" y="4659782"/>
-            <a:ext cx="3145536" cy="899770"/>
+            <a:off x="7708392" y="4828032"/>
+            <a:ext cx="3282696" cy="749808"/>
           </a:xfrm>
           <a:prstGeom prst="rect">
             <a:avLst/>
@@ -12178,7 +12182,7 @@
               <a:buNone/>
             </a:pPr>
             <a:r>
-              <a:rPr lang="en-US" sz="1320" dirty="0">
+              <a:rPr lang="en-US" sz="1220" dirty="0">
                 <a:solidFill>
                   <a:srgbClr val="17364A"/>
                 </a:solidFill>
@@ -12186,9 +12190,9 @@
                 <a:ea typeface="Aptos" pitchFamily="34" charset="-122"/>
                 <a:cs typeface="Aptos" pitchFamily="34" charset="-120"/>
               </a:rPr>
-              <a:t>Connect the concept to public health purpose, responsible use, required safeguards, documentation, and the next action a department should take.</a:t>
-            </a:r>
-            <a:endParaRPr lang="en-US" sz="1320" dirty="0"/>
+              <a:t>Connect the concept to public health purpose, responsible use, required.</a:t>
+            </a:r>
+            <a:endParaRPr lang="en-US" sz="1220" dirty="0"/>
           </a:p>
         </p:txBody>
       </p:sp>
@@ -12506,7 +12510,7 @@
                 <a:ea typeface="Aptos" pitchFamily="34" charset="-122"/>
                 <a:cs typeface="Aptos" pitchFamily="34" charset="-120"/>
               </a:rPr>
-              <a:t>• Play 11: Build and Deploy AI Solutions - This lesson informs Play 11 by helping learners.</a:t>
+              <a:t>• Play 11: Build and Deploy AI Solutions - This lesson informs Play 11 by.</a:t>
             </a:r>
             <a:endParaRPr lang="en-US" sz="1900" dirty="0"/>
           </a:p>
@@ -12523,7 +12527,7 @@
                 <a:ea typeface="Aptos" pitchFamily="34" charset="-122"/>
                 <a:cs typeface="Aptos" pitchFamily="34" charset="-120"/>
               </a:rPr>
-              <a:t>• Play 7: Prioritize Use Cases - This lesson informs Play 7 by helping learners connect the.</a:t>
+              <a:t>• Play 7: Prioritize Use Cases - This lesson informs Play 7 by helping.</a:t>
             </a:r>
             <a:endParaRPr lang="en-US" sz="1900" dirty="0"/>
           </a:p>
@@ -12540,7 +12544,7 @@
                 <a:ea typeface="Aptos" pitchFamily="34" charset="-122"/>
                 <a:cs typeface="Aptos" pitchFamily="34" charset="-120"/>
               </a:rPr>
-              <a:t>• Play 8: Develop a Funding Strategy - This lesson informs Play 8 by helping learners connect.</a:t>
+              <a:t>• Play 8: Develop a Funding Strategy - This lesson informs Play 8 by helping.</a:t>
             </a:r>
             <a:endParaRPr lang="en-US" sz="1900" dirty="0"/>
           </a:p>
@@ -12557,7 +12561,7 @@
                 <a:ea typeface="Aptos" pitchFamily="34" charset="-122"/>
                 <a:cs typeface="Aptos" pitchFamily="34" charset="-120"/>
               </a:rPr>
-              <a:t>• Play 1: Vision &amp; Guardrails - This lesson informs Play 1 by helping learners connect the.</a:t>
+              <a:t>• Play 1: Vision &amp; Guardrails - This lesson informs Play 1 by helping learners.</a:t>
             </a:r>
             <a:endParaRPr lang="en-US" sz="1900" dirty="0"/>
           </a:p>
@@ -12598,8 +12602,8 @@
         </p:nvSpPr>
         <p:spPr>
           <a:xfrm>
-            <a:off x="8211312" y="1563624"/>
-            <a:ext cx="2734056" cy="256032"/>
+            <a:off x="8211312" y="1545336"/>
+            <a:ext cx="2734056" cy="228600"/>
           </a:xfrm>
           <a:prstGeom prst="rect">
             <a:avLst/>
@@ -12615,7 +12619,7 @@
               <a:buNone/>
             </a:pPr>
             <a:r>
-              <a:rPr lang="en-US" sz="1300" b="1" dirty="0">
+              <a:rPr lang="en-US" sz="1220" b="1" dirty="0">
                 <a:solidFill>
                   <a:srgbClr val="0068B7"/>
                 </a:solidFill>
@@ -12625,7 +12629,7 @@
               </a:rPr>
               <a:t>Apply the lesson</a:t>
             </a:r>
-            <a:endParaRPr lang="en-US" sz="1300" dirty="0"/>
+            <a:endParaRPr lang="en-US" sz="1220" dirty="0"/>
           </a:p>
         </p:txBody>
       </p:sp>
@@ -12637,8 +12641,8 @@
         </p:nvSpPr>
         <p:spPr>
           <a:xfrm>
-            <a:off x="8211312" y="1892808"/>
-            <a:ext cx="2734056" cy="1536192"/>
+            <a:off x="8211312" y="1856232"/>
+            <a:ext cx="2734056" cy="1591056"/>
           </a:xfrm>
           <a:prstGeom prst="rect">
             <a:avLst/>
@@ -12656,7 +12660,7 @@
               <a:buNone/>
             </a:pPr>
             <a:r>
-              <a:rPr lang="en-US" sz="1320" dirty="0">
+              <a:rPr lang="en-US" sz="1220" dirty="0">
                 <a:solidFill>
                   <a:srgbClr val="17364A"/>
                 </a:solidFill>
@@ -12664,9 +12668,9 @@
                 <a:ea typeface="Aptos" pitchFamily="34" charset="-122"/>
                 <a:cs typeface="Aptos" pitchFamily="34" charset="-120"/>
               </a:rPr>
-              <a:t>Use the related plays to identify decisions, participants, timing, approvals, and documentation needed for responsible implementation.</a:t>
-            </a:r>
-            <a:endParaRPr lang="en-US" sz="1320" dirty="0"/>
+              <a:t>Use the related plays to identify decisions, participants, timing, approvals,.</a:t>
+            </a:r>
+            <a:endParaRPr lang="en-US" sz="1220" dirty="0"/>
           </a:p>
         </p:txBody>
       </p:sp>
@@ -12705,8 +12709,8 @@
         </p:nvSpPr>
         <p:spPr>
           <a:xfrm>
-            <a:off x="8211312" y="3941064"/>
-            <a:ext cx="2734056" cy="256032"/>
+            <a:off x="8211312" y="3922776"/>
+            <a:ext cx="2734056" cy="228600"/>
           </a:xfrm>
           <a:prstGeom prst="rect">
             <a:avLst/>
@@ -12722,7 +12726,7 @@
               <a:buNone/>
             </a:pPr>
             <a:r>
-              <a:rPr lang="en-US" sz="1300" b="1" dirty="0">
+              <a:rPr lang="en-US" sz="1220" b="1" dirty="0">
                 <a:solidFill>
                   <a:srgbClr val="0068B7"/>
                 </a:solidFill>
@@ -12732,7 +12736,7 @@
               </a:rPr>
               <a:t>Use the play links to</a:t>
             </a:r>
-            <a:endParaRPr lang="en-US" sz="1300" dirty="0"/>
+            <a:endParaRPr lang="en-US" sz="1220" dirty="0"/>
           </a:p>
         </p:txBody>
       </p:sp>
@@ -12744,8 +12748,8 @@
         </p:nvSpPr>
         <p:spPr>
           <a:xfrm>
-            <a:off x="8229600" y="4306824"/>
-            <a:ext cx="2679192" cy="941832"/>
+            <a:off x="8229600" y="4251960"/>
+            <a:ext cx="2679192" cy="1033272"/>
           </a:xfrm>
           <a:prstGeom prst="rect">
             <a:avLst/>
@@ -12763,7 +12767,7 @@
               <a:buNone/>
             </a:pPr>
             <a:r>
-              <a:rPr lang="en-US" sz="1220" dirty="0">
+              <a:rPr lang="en-US" sz="1140" dirty="0">
                 <a:solidFill>
                   <a:srgbClr val="17364A"/>
                 </a:solidFill>
@@ -12773,14 +12777,14 @@
               </a:rPr>
               <a:t>Locate the decision point in the playbook sequence.</a:t>
             </a:r>
-            <a:endParaRPr lang="en-US" sz="1220" dirty="0"/>
-          </a:p>
-          <a:p>
-            <a:pPr indent="0" marL="0">
-              <a:buNone/>
-            </a:pPr>
-            <a:r>
-              <a:rPr lang="en-US" sz="1220" dirty="0">
+            <a:endParaRPr lang="en-US" sz="1140" dirty="0"/>
+          </a:p>
+          <a:p>
+            <a:pPr indent="0" marL="0">
+              <a:buNone/>
+            </a:pPr>
+            <a:r>
+              <a:rPr lang="en-US" sz="1140" dirty="0">
                 <a:solidFill>
                   <a:srgbClr val="17364A"/>
                 </a:solidFill>
@@ -12790,14 +12794,14 @@
               </a:rPr>
               <a:t>Identify who should participate in the work.</a:t>
             </a:r>
-            <a:endParaRPr lang="en-US" sz="1220" dirty="0"/>
-          </a:p>
-          <a:p>
-            <a:pPr indent="0" marL="0">
-              <a:buNone/>
-            </a:pPr>
-            <a:r>
-              <a:rPr lang="en-US" sz="1220" dirty="0">
+            <a:endParaRPr lang="en-US" sz="1140" dirty="0"/>
+          </a:p>
+          <a:p>
+            <a:pPr indent="0" marL="0">
+              <a:buNone/>
+            </a:pPr>
+            <a:r>
+              <a:rPr lang="en-US" sz="1140" dirty="0">
                 <a:solidFill>
                   <a:srgbClr val="17364A"/>
                 </a:solidFill>
@@ -12805,9 +12809,9 @@
                 <a:ea typeface="Aptos" pitchFamily="34" charset="-122"/>
                 <a:cs typeface="Aptos" pitchFamily="34" charset="-120"/>
               </a:rPr>
-              <a:t>Document the review, approval, or implementation step.</a:t>
-            </a:r>
-            <a:endParaRPr lang="en-US" sz="1220" dirty="0"/>
+              <a:t>Document the review, approval, or implementation.</a:t>
+            </a:r>
+            <a:endParaRPr lang="en-US" sz="1140" dirty="0"/>
           </a:p>
         </p:txBody>
       </p:sp>
@@ -13125,7 +13129,7 @@
                 <a:ea typeface="Aptos" pitchFamily="34" charset="-122"/>
                 <a:cs typeface="Aptos" pitchFamily="34" charset="-120"/>
               </a:rPr>
-              <a:t>• Tool 33: Funding Strategy Checklists (Checklist) - Use this tool to complete or strengthen the.</a:t>
+              <a:t>• Tool 33: Funding Strategy Checklists (Checklist) - Use this tool to complete.</a:t>
             </a:r>
             <a:endParaRPr lang="en-US" sz="1850" dirty="0"/>
           </a:p>
@@ -13142,7 +13146,7 @@
                 <a:ea typeface="Aptos" pitchFamily="34" charset="-122"/>
                 <a:cs typeface="Aptos" pitchFamily="34" charset="-120"/>
               </a:rPr>
-              <a:t>• Tool 35: AI Total Cost of Ownership and Sustainability Worksheet (Worksheet) - Use this tool.</a:t>
+              <a:t>• Tool 35: AI Total Cost of Ownership and Sustainability Worksheet (Worksheet).</a:t>
             </a:r>
             <a:endParaRPr lang="en-US" sz="1850" dirty="0"/>
           </a:p>
@@ -13159,7 +13163,7 @@
                 <a:ea typeface="Aptos" pitchFamily="34" charset="-122"/>
                 <a:cs typeface="Aptos" pitchFamily="34" charset="-120"/>
               </a:rPr>
-              <a:t>• Tool 4: AI Policy Landscape Scan (Worksheet) - Use AI Policy Landscape Scan to translate this.</a:t>
+              <a:t>• Tool 4: AI Policy Landscape Scan (Worksheet) - Use AI Policy Landscape Scan.</a:t>
             </a:r>
             <a:endParaRPr lang="en-US" sz="1850" dirty="0"/>
           </a:p>
@@ -13176,7 +13180,7 @@
                 <a:ea typeface="Aptos" pitchFamily="34" charset="-122"/>
                 <a:cs typeface="Aptos" pitchFamily="34" charset="-120"/>
               </a:rPr>
-              <a:t>• Tool 5: AI Environmental and Resource Impact Review (Checklist) - Use this tool to complete or.</a:t>
+              <a:t>• Tool 5: AI Environmental and Resource Impact Review (Checklist) - Use this.</a:t>
             </a:r>
             <a:endParaRPr lang="en-US" sz="1850" dirty="0"/>
           </a:p>
@@ -13217,8 +13221,8 @@
         </p:nvSpPr>
         <p:spPr>
           <a:xfrm>
-            <a:off x="8211312" y="1563624"/>
-            <a:ext cx="2734056" cy="256032"/>
+            <a:off x="8211312" y="1545336"/>
+            <a:ext cx="2734056" cy="228600"/>
           </a:xfrm>
           <a:prstGeom prst="rect">
             <a:avLst/>
@@ -13234,7 +13238,7 @@
               <a:buNone/>
             </a:pPr>
             <a:r>
-              <a:rPr lang="en-US" sz="1300" b="1" dirty="0">
+              <a:rPr lang="en-US" sz="1220" b="1" dirty="0">
                 <a:solidFill>
                   <a:srgbClr val="0068B7"/>
                 </a:solidFill>
@@ -13244,7 +13248,7 @@
               </a:rPr>
               <a:t>Use the tools</a:t>
             </a:r>
-            <a:endParaRPr lang="en-US" sz="1300" dirty="0"/>
+            <a:endParaRPr lang="en-US" sz="1220" dirty="0"/>
           </a:p>
         </p:txBody>
       </p:sp>
@@ -13256,8 +13260,8 @@
         </p:nvSpPr>
         <p:spPr>
           <a:xfrm>
-            <a:off x="8211312" y="1892808"/>
-            <a:ext cx="2734056" cy="1536192"/>
+            <a:off x="8211312" y="1856232"/>
+            <a:ext cx="2734056" cy="1591056"/>
           </a:xfrm>
           <a:prstGeom prst="rect">
             <a:avLst/>
@@ -13275,7 +13279,7 @@
               <a:buNone/>
             </a:pPr>
             <a:r>
-              <a:rPr lang="en-US" sz="1320" dirty="0">
+              <a:rPr lang="en-US" sz="1220" dirty="0">
                 <a:solidFill>
                   <a:srgbClr val="17364A"/>
                 </a:solidFill>
@@ -13283,9 +13287,9 @@
                 <a:ea typeface="Aptos" pitchFamily="34" charset="-122"/>
                 <a:cs typeface="Aptos" pitchFamily="34" charset="-120"/>
               </a:rPr>
-              <a:t>Use linked tools when your department needs a structured worksheet, template, checklist, review process, or documentation artifact.</a:t>
-            </a:r>
-            <a:endParaRPr lang="en-US" sz="1320" dirty="0"/>
+              <a:t>Use linked tools when your department needs a structured worksheet, template,.</a:t>
+            </a:r>
+            <a:endParaRPr lang="en-US" sz="1220" dirty="0"/>
           </a:p>
         </p:txBody>
       </p:sp>
@@ -13324,8 +13328,8 @@
         </p:nvSpPr>
         <p:spPr>
           <a:xfrm>
-            <a:off x="8211312" y="3941064"/>
-            <a:ext cx="2734056" cy="256032"/>
+            <a:off x="8211312" y="3922776"/>
+            <a:ext cx="2734056" cy="228600"/>
           </a:xfrm>
           <a:prstGeom prst="rect">
             <a:avLst/>
@@ -13341,7 +13345,7 @@
               <a:buNone/>
             </a:pPr>
             <a:r>
-              <a:rPr lang="en-US" sz="1300" b="1" dirty="0">
+              <a:rPr lang="en-US" sz="1220" b="1" dirty="0">
                 <a:solidFill>
                   <a:srgbClr val="0068B7"/>
                 </a:solidFill>
@@ -13351,7 +13355,7 @@
               </a:rPr>
               <a:t>Tool selection cues</a:t>
             </a:r>
-            <a:endParaRPr lang="en-US" sz="1300" dirty="0"/>
+            <a:endParaRPr lang="en-US" sz="1220" dirty="0"/>
           </a:p>
         </p:txBody>
       </p:sp>
@@ -13363,8 +13367,8 @@
         </p:nvSpPr>
         <p:spPr>
           <a:xfrm>
-            <a:off x="8229600" y="4306824"/>
-            <a:ext cx="2679192" cy="941832"/>
+            <a:off x="8229600" y="4251960"/>
+            <a:ext cx="2679192" cy="1033272"/>
           </a:xfrm>
           <a:prstGeom prst="rect">
             <a:avLst/>
@@ -13382,7 +13386,7 @@
               <a:buNone/>
             </a:pPr>
             <a:r>
-              <a:rPr lang="en-US" sz="1220" dirty="0">
+              <a:rPr lang="en-US" sz="1140" dirty="0">
                 <a:solidFill>
                   <a:srgbClr val="17364A"/>
                 </a:solidFill>
@@ -13392,14 +13396,14 @@
               </a:rPr>
               <a:t>Use a tool when no comparable local process exists.</a:t>
             </a:r>
-            <a:endParaRPr lang="en-US" sz="1220" dirty="0"/>
-          </a:p>
-          <a:p>
-            <a:pPr indent="0" marL="0">
-              <a:buNone/>
-            </a:pPr>
-            <a:r>
-              <a:rPr lang="en-US" sz="1220" dirty="0">
+            <a:endParaRPr lang="en-US" sz="1140" dirty="0"/>
+          </a:p>
+          <a:p>
+            <a:pPr indent="0" marL="0">
+              <a:buNone/>
+            </a:pPr>
+            <a:r>
+              <a:rPr lang="en-US" sz="1140" dirty="0">
                 <a:solidFill>
                   <a:srgbClr val="17364A"/>
                 </a:solidFill>
@@ -13407,16 +13411,16 @@
                 <a:ea typeface="Aptos" pitchFamily="34" charset="-122"/>
                 <a:cs typeface="Aptos" pitchFamily="34" charset="-120"/>
               </a:rPr>
-              <a:t>Adapt existing department templates when they already fit the.</a:t>
-            </a:r>
-            <a:endParaRPr lang="en-US" sz="1220" dirty="0"/>
-          </a:p>
-          <a:p>
-            <a:pPr indent="0" marL="0">
-              <a:buNone/>
-            </a:pPr>
-            <a:r>
-              <a:rPr lang="en-US" sz="1220" dirty="0">
+              <a:t>Adapt existing department templates when they.</a:t>
+            </a:r>
+            <a:endParaRPr lang="en-US" sz="1140" dirty="0"/>
+          </a:p>
+          <a:p>
+            <a:pPr indent="0" marL="0">
+              <a:buNone/>
+            </a:pPr>
+            <a:r>
+              <a:rPr lang="en-US" sz="1140" dirty="0">
                 <a:solidFill>
                   <a:srgbClr val="17364A"/>
                 </a:solidFill>
@@ -13424,9 +13428,9 @@
                 <a:ea typeface="Aptos" pitchFamily="34" charset="-122"/>
                 <a:cs typeface="Aptos" pitchFamily="34" charset="-120"/>
               </a:rPr>
-              <a:t>Save the completed artifact as evidence of the decision.</a:t>
-            </a:r>
-            <a:endParaRPr lang="en-US" sz="1220" dirty="0"/>
+              <a:t>Save the completed artifact as evidence of the.</a:t>
+            </a:r>
+            <a:endParaRPr lang="en-US" sz="1140" dirty="0"/>
           </a:p>
         </p:txBody>
       </p:sp>
@@ -13717,8 +13721,8 @@
         </p:nvSpPr>
         <p:spPr>
           <a:xfrm>
-            <a:off x="868680" y="1508760"/>
-            <a:ext cx="6309360" cy="4160520"/>
+            <a:off x="822960" y="1463040"/>
+            <a:ext cx="6565392" cy="4343400"/>
           </a:xfrm>
           <a:prstGeom prst="rect">
             <a:avLst/>
@@ -13736,7 +13740,7 @@
               <a:buNone/>
             </a:pPr>
             <a:r>
-              <a:rPr lang="en-US" sz="2100" dirty="0">
+              <a:rPr lang="en-US" sz="1920" dirty="0">
                 <a:solidFill>
                   <a:srgbClr val="003A63"/>
                 </a:solidFill>
@@ -13746,14 +13750,14 @@
               </a:rPr>
               <a:t>• Define the purpose of an AI portfolio strategy for public health agencies.</a:t>
             </a:r>
-            <a:endParaRPr lang="en-US" sz="2100" dirty="0"/>
-          </a:p>
-          <a:p>
-            <a:pPr indent="0" marL="0">
-              <a:buNone/>
-            </a:pPr>
-            <a:r>
-              <a:rPr lang="en-US" sz="2100" dirty="0">
+            <a:endParaRPr lang="en-US" sz="1920" dirty="0"/>
+          </a:p>
+          <a:p>
+            <a:pPr indent="0" marL="0">
+              <a:buNone/>
+            </a:pPr>
+            <a:r>
+              <a:rPr lang="en-US" sz="1920" dirty="0">
                 <a:solidFill>
                   <a:srgbClr val="003A63"/>
                 </a:solidFill>
@@ -13761,16 +13765,16 @@
                 <a:ea typeface="Aptos" pitchFamily="34" charset="-122"/>
                 <a:cs typeface="Aptos" pitchFamily="34" charset="-120"/>
               </a:rPr>
-              <a:t>• Develop criteria for prioritizing AI use cases based on public health value, readiness, risk,.</a:t>
-            </a:r>
-            <a:endParaRPr lang="en-US" sz="2100" dirty="0"/>
-          </a:p>
-          <a:p>
-            <a:pPr indent="0" marL="0">
-              <a:buNone/>
-            </a:pPr>
-            <a:r>
-              <a:rPr lang="en-US" sz="2100" dirty="0">
+              <a:t>• Develop criteria for prioritizing AI use cases based on public health value,.</a:t>
+            </a:r>
+            <a:endParaRPr lang="en-US" sz="1920" dirty="0"/>
+          </a:p>
+          <a:p>
+            <a:pPr indent="0" marL="0">
+              <a:buNone/>
+            </a:pPr>
+            <a:r>
+              <a:rPr lang="en-US" sz="1920" dirty="0">
                 <a:solidFill>
                   <a:srgbClr val="003A63"/>
                 </a:solidFill>
@@ -13778,9 +13782,9 @@
                 <a:ea typeface="Aptos" pitchFamily="34" charset="-122"/>
                 <a:cs typeface="Aptos" pitchFamily="34" charset="-120"/>
               </a:rPr>
-              <a:t>• Identify use cases that should be pursued, piloted, deferred, redesigned, or rejected.</a:t>
-            </a:r>
-            <a:endParaRPr lang="en-US" sz="2100" dirty="0"/>
+              <a:t>• Identify use cases that should be pursued, piloted, deferred, redesigned, or.</a:t>
+            </a:r>
+            <a:endParaRPr lang="en-US" sz="1920" dirty="0"/>
           </a:p>
         </p:txBody>
       </p:sp>
@@ -13792,12 +13796,12 @@
         </p:nvSpPr>
         <p:spPr>
           <a:xfrm>
-            <a:off x="7635240" y="1325880"/>
-            <a:ext cx="3474720" cy="1207008"/>
+            <a:off x="7543800" y="1325880"/>
+            <a:ext cx="3611880" cy="1261872"/>
           </a:xfrm>
           <a:prstGeom prst="roundRect">
             <a:avLst>
-              <a:gd name="adj" fmla="val 9091"/>
+              <a:gd name="adj" fmla="val 8696"/>
             </a:avLst>
           </a:prstGeom>
           <a:solidFill>
@@ -13819,8 +13823,8 @@
         </p:nvSpPr>
         <p:spPr>
           <a:xfrm>
-            <a:off x="7799832" y="1472184"/>
-            <a:ext cx="3145536" cy="256032"/>
+            <a:off x="7708392" y="1453896"/>
+            <a:ext cx="3282696" cy="228600"/>
           </a:xfrm>
           <a:prstGeom prst="rect">
             <a:avLst/>
@@ -13836,7 +13840,7 @@
               <a:buNone/>
             </a:pPr>
             <a:r>
-              <a:rPr lang="en-US" sz="1300" b="1" dirty="0">
+              <a:rPr lang="en-US" sz="1220" b="1" dirty="0">
                 <a:solidFill>
                   <a:srgbClr val="0068B7"/>
                 </a:solidFill>
@@ -13846,7 +13850,7 @@
               </a:rPr>
               <a:t>Practice focus</a:t>
             </a:r>
-            <a:endParaRPr lang="en-US" sz="1300" dirty="0"/>
+            <a:endParaRPr lang="en-US" sz="1220" dirty="0"/>
           </a:p>
         </p:txBody>
       </p:sp>
@@ -13858,8 +13862,8 @@
         </p:nvSpPr>
         <p:spPr>
           <a:xfrm>
-            <a:off x="7799832" y="1801368"/>
-            <a:ext cx="3145536" cy="640080"/>
+            <a:off x="7708392" y="1764792"/>
+            <a:ext cx="3282696" cy="749808"/>
           </a:xfrm>
           <a:prstGeom prst="rect">
             <a:avLst/>
@@ -13877,7 +13881,7 @@
               <a:buNone/>
             </a:pPr>
             <a:r>
-              <a:rPr lang="en-US" sz="1320" dirty="0">
+              <a:rPr lang="en-US" sz="1220" dirty="0">
                 <a:solidFill>
                   <a:srgbClr val="17364A"/>
                 </a:solidFill>
@@ -13887,7 +13891,7 @@
               </a:rPr>
               <a:t>Define the purpose of an AI portfolio strategy for public health agencies.</a:t>
             </a:r>
-            <a:endParaRPr lang="en-US" sz="1320" dirty="0"/>
+            <a:endParaRPr lang="en-US" sz="1220" dirty="0"/>
           </a:p>
         </p:txBody>
       </p:sp>
@@ -13899,12 +13903,12 @@
         </p:nvSpPr>
         <p:spPr>
           <a:xfrm>
-            <a:off x="7635240" y="2670048"/>
-            <a:ext cx="3474720" cy="1377086"/>
+            <a:off x="7543800" y="2724912"/>
+            <a:ext cx="3611880" cy="1527048"/>
           </a:xfrm>
           <a:prstGeom prst="roundRect">
             <a:avLst>
-              <a:gd name="adj" fmla="val 7968"/>
+              <a:gd name="adj" fmla="val 7186"/>
             </a:avLst>
           </a:prstGeom>
           <a:solidFill>
@@ -13926,8 +13930,8 @@
         </p:nvSpPr>
         <p:spPr>
           <a:xfrm>
-            <a:off x="7799832" y="2816352"/>
-            <a:ext cx="3145536" cy="256032"/>
+            <a:off x="7708392" y="2852928"/>
+            <a:ext cx="3282696" cy="228600"/>
           </a:xfrm>
           <a:prstGeom prst="rect">
             <a:avLst/>
@@ -13943,7 +13947,7 @@
               <a:buNone/>
             </a:pPr>
             <a:r>
-              <a:rPr lang="en-US" sz="1300" b="1" dirty="0">
+              <a:rPr lang="en-US" sz="1220" b="1" dirty="0">
                 <a:solidFill>
                   <a:srgbClr val="0068B7"/>
                 </a:solidFill>
@@ -13953,7 +13957,7 @@
               </a:rPr>
               <a:t>Concept checkpoints</a:t>
             </a:r>
-            <a:endParaRPr lang="en-US" sz="1300" dirty="0"/>
+            <a:endParaRPr lang="en-US" sz="1220" dirty="0"/>
           </a:p>
         </p:txBody>
       </p:sp>
@@ -13965,8 +13969,8 @@
         </p:nvSpPr>
         <p:spPr>
           <a:xfrm>
-            <a:off x="7818120" y="3182112"/>
-            <a:ext cx="3090672" cy="718718"/>
+            <a:off x="7726680" y="3182112"/>
+            <a:ext cx="3227832" cy="960120"/>
           </a:xfrm>
           <a:prstGeom prst="rect">
             <a:avLst/>
@@ -13984,7 +13988,7 @@
               <a:buNone/>
             </a:pPr>
             <a:r>
-              <a:rPr lang="en-US" sz="1220" dirty="0">
+              <a:rPr lang="en-US" sz="1140" dirty="0">
                 <a:solidFill>
                   <a:srgbClr val="17364A"/>
                 </a:solidFill>
@@ -13992,16 +13996,16 @@
                 <a:ea typeface="Aptos" pitchFamily="34" charset="-122"/>
                 <a:cs typeface="Aptos" pitchFamily="34" charset="-120"/>
               </a:rPr>
-              <a:t>Develop criteria for prioritizing AI use cases based on public.</a:t>
-            </a:r>
-            <a:endParaRPr lang="en-US" sz="1220" dirty="0"/>
-          </a:p>
-          <a:p>
-            <a:pPr indent="0" marL="0">
-              <a:buNone/>
-            </a:pPr>
-            <a:r>
-              <a:rPr lang="en-US" sz="1220" dirty="0">
+              <a:t>Develop criteria for prioritizing AI use cases.</a:t>
+            </a:r>
+            <a:endParaRPr lang="en-US" sz="1140" dirty="0"/>
+          </a:p>
+          <a:p>
+            <a:pPr indent="0" marL="0">
+              <a:buNone/>
+            </a:pPr>
+            <a:r>
+              <a:rPr lang="en-US" sz="1140" dirty="0">
                 <a:solidFill>
                   <a:srgbClr val="17364A"/>
                 </a:solidFill>
@@ -14009,16 +14013,16 @@
                 <a:ea typeface="Aptos" pitchFamily="34" charset="-122"/>
                 <a:cs typeface="Aptos" pitchFamily="34" charset="-120"/>
               </a:rPr>
-              <a:t>Create a portfolio view that balances innovation, risk, equity,.</a:t>
-            </a:r>
-            <a:endParaRPr lang="en-US" sz="1220" dirty="0"/>
-          </a:p>
-          <a:p>
-            <a:pPr indent="0" marL="0">
-              <a:buNone/>
-            </a:pPr>
-            <a:r>
-              <a:rPr lang="en-US" sz="1220" dirty="0">
+              <a:t>Create a portfolio view that balances innovation,.</a:t>
+            </a:r>
+            <a:endParaRPr lang="en-US" sz="1140" dirty="0"/>
+          </a:p>
+          <a:p>
+            <a:pPr indent="0" marL="0">
+              <a:buNone/>
+            </a:pPr>
+            <a:r>
+              <a:rPr lang="en-US" sz="1140" dirty="0">
                 <a:solidFill>
                   <a:srgbClr val="17364A"/>
                 </a:solidFill>
@@ -14026,9 +14030,9 @@
                 <a:ea typeface="Aptos" pitchFamily="34" charset="-122"/>
                 <a:cs typeface="Aptos" pitchFamily="34" charset="-120"/>
               </a:rPr>
-              <a:t>Produce a use case prioritization rubric for governance or.</a:t>
-            </a:r>
-            <a:endParaRPr lang="en-US" sz="1220" dirty="0"/>
+              <a:t>Produce a use case prioritization rubric for.</a:t>
+            </a:r>
+            <a:endParaRPr lang="en-US" sz="1140" dirty="0"/>
           </a:p>
         </p:txBody>
       </p:sp>
@@ -14040,12 +14044,12 @@
         </p:nvSpPr>
         <p:spPr>
           <a:xfrm>
-            <a:off x="7635240" y="4184294"/>
-            <a:ext cx="3474720" cy="1466698"/>
+            <a:off x="7543800" y="4389120"/>
+            <a:ext cx="3611880" cy="1261872"/>
           </a:xfrm>
           <a:prstGeom prst="roundRect">
             <a:avLst>
-              <a:gd name="adj" fmla="val 7481"/>
+              <a:gd name="adj" fmla="val 8696"/>
             </a:avLst>
           </a:prstGeom>
           <a:solidFill>
@@ -14067,8 +14071,8 @@
         </p:nvSpPr>
         <p:spPr>
           <a:xfrm>
-            <a:off x="7799832" y="4330598"/>
-            <a:ext cx="3145536" cy="256032"/>
+            <a:off x="7708392" y="4517136"/>
+            <a:ext cx="3282696" cy="228600"/>
           </a:xfrm>
           <a:prstGeom prst="rect">
             <a:avLst/>
@@ -14084,7 +14088,7 @@
               <a:buNone/>
             </a:pPr>
             <a:r>
-              <a:rPr lang="en-US" sz="1300" b="1" dirty="0">
+              <a:rPr lang="en-US" sz="1220" b="1" dirty="0">
                 <a:solidFill>
                   <a:srgbClr val="0068B7"/>
                 </a:solidFill>
@@ -14094,7 +14098,7 @@
               </a:rPr>
               <a:t>What to produce</a:t>
             </a:r>
-            <a:endParaRPr lang="en-US" sz="1300" dirty="0"/>
+            <a:endParaRPr lang="en-US" sz="1220" dirty="0"/>
           </a:p>
         </p:txBody>
       </p:sp>
@@ -14106,8 +14110,8 @@
         </p:nvSpPr>
         <p:spPr>
           <a:xfrm>
-            <a:off x="7799832" y="4659782"/>
-            <a:ext cx="3145536" cy="899770"/>
+            <a:off x="7708392" y="4828032"/>
+            <a:ext cx="3282696" cy="749808"/>
           </a:xfrm>
           <a:prstGeom prst="rect">
             <a:avLst/>
@@ -14125,7 +14129,7 @@
               <a:buNone/>
             </a:pPr>
             <a:r>
-              <a:rPr lang="en-US" sz="1320" dirty="0">
+              <a:rPr lang="en-US" sz="1220" dirty="0">
                 <a:solidFill>
                   <a:srgbClr val="17364A"/>
                 </a:solidFill>
@@ -14133,9 +14137,9 @@
                 <a:ea typeface="Aptos" pitchFamily="34" charset="-122"/>
                 <a:cs typeface="Aptos" pitchFamily="34" charset="-120"/>
               </a:rPr>
-              <a:t>Use the assignment to test whether you can explain the concept, apply it to a realistic public health situation, and identify what would need review before the work moves forward.</a:t>
-            </a:r>
-            <a:endParaRPr lang="en-US" sz="1320" dirty="0"/>
+              <a:t>Use the assignment to test whether you can explain the concept, apply it to a.</a:t>
+            </a:r>
+            <a:endParaRPr lang="en-US" sz="1220" dirty="0"/>
           </a:p>
         </p:txBody>
       </p:sp>
@@ -14426,8 +14430,8 @@
         </p:nvSpPr>
         <p:spPr>
           <a:xfrm>
-            <a:off x="868680" y="1508760"/>
-            <a:ext cx="6309360" cy="4160520"/>
+            <a:off x="822960" y="1463040"/>
+            <a:ext cx="6565392" cy="4343400"/>
           </a:xfrm>
           <a:prstGeom prst="rect">
             <a:avLst/>
@@ -14445,7 +14449,7 @@
               <a:buNone/>
             </a:pPr>
             <a:r>
-              <a:rPr lang="en-US" sz="2100" dirty="0">
+              <a:rPr lang="en-US" sz="1920" dirty="0">
                 <a:solidFill>
                   <a:srgbClr val="003A63"/>
                 </a:solidFill>
@@ -14453,16 +14457,16 @@
                 <a:ea typeface="Aptos" pitchFamily="34" charset="-122"/>
                 <a:cs typeface="Aptos" pitchFamily="34" charset="-120"/>
               </a:rPr>
-              <a:t>• AI opportunities can quickly exceed an agency's capacity to evaluate, implement, and sustain.</a:t>
-            </a:r>
-            <a:endParaRPr lang="en-US" sz="2100" dirty="0"/>
-          </a:p>
-          <a:p>
-            <a:pPr indent="0" marL="0">
-              <a:buNone/>
-            </a:pPr>
-            <a:r>
-              <a:rPr lang="en-US" sz="2100" dirty="0">
+              <a:t>• AI opportunities can quickly exceed an agency's capacity to evaluate,.</a:t>
+            </a:r>
+            <a:endParaRPr lang="en-US" sz="1920" dirty="0"/>
+          </a:p>
+          <a:p>
+            <a:pPr indent="0" marL="0">
+              <a:buNone/>
+            </a:pPr>
+            <a:r>
+              <a:rPr lang="en-US" sz="1920" dirty="0">
                 <a:solidFill>
                   <a:srgbClr val="003A63"/>
                 </a:solidFill>
@@ -14470,16 +14474,16 @@
                 <a:ea typeface="Aptos" pitchFamily="34" charset="-122"/>
                 <a:cs typeface="Aptos" pitchFamily="34" charset="-120"/>
               </a:rPr>
-              <a:t>• Leaders need a portfolio strategy that helps distinguish high-value public health uses from.</a:t>
-            </a:r>
-            <a:endParaRPr lang="en-US" sz="2100" dirty="0"/>
-          </a:p>
-          <a:p>
-            <a:pPr indent="0" marL="0">
-              <a:buNone/>
-            </a:pPr>
-            <a:r>
-              <a:rPr lang="en-US" sz="2100" dirty="0">
+              <a:t>• Leaders need a portfolio strategy that helps distinguish high-value public.</a:t>
+            </a:r>
+            <a:endParaRPr lang="en-US" sz="1920" dirty="0"/>
+          </a:p>
+          <a:p>
+            <a:pPr indent="0" marL="0">
+              <a:buNone/>
+            </a:pPr>
+            <a:r>
+              <a:rPr lang="en-US" sz="1920" dirty="0">
                 <a:solidFill>
                   <a:srgbClr val="003A63"/>
                 </a:solidFill>
@@ -14487,9 +14491,9 @@
                 <a:ea typeface="Aptos" pitchFamily="34" charset="-122"/>
                 <a:cs typeface="Aptos" pitchFamily="34" charset="-120"/>
               </a:rPr>
-              <a:t>• A portfolio approach organizes AI opportunities across programs, risk levels, readiness,.</a:t>
-            </a:r>
-            <a:endParaRPr lang="en-US" sz="2100" dirty="0"/>
+              <a:t>• A portfolio approach organizes AI opportunities across programs, risk.</a:t>
+            </a:r>
+            <a:endParaRPr lang="en-US" sz="1920" dirty="0"/>
           </a:p>
         </p:txBody>
       </p:sp>
@@ -14501,12 +14505,12 @@
         </p:nvSpPr>
         <p:spPr>
           <a:xfrm>
-            <a:off x="7635240" y="1325880"/>
-            <a:ext cx="3474720" cy="1255471"/>
+            <a:off x="7543800" y="1325880"/>
+            <a:ext cx="3611880" cy="1261872"/>
           </a:xfrm>
           <a:prstGeom prst="roundRect">
             <a:avLst>
-              <a:gd name="adj" fmla="val 8740"/>
+              <a:gd name="adj" fmla="val 8696"/>
             </a:avLst>
           </a:prstGeom>
           <a:solidFill>
@@ -14528,8 +14532,8 @@
         </p:nvSpPr>
         <p:spPr>
           <a:xfrm>
-            <a:off x="7799832" y="1472184"/>
-            <a:ext cx="3145536" cy="256032"/>
+            <a:off x="7708392" y="1453896"/>
+            <a:ext cx="3282696" cy="228600"/>
           </a:xfrm>
           <a:prstGeom prst="rect">
             <a:avLst/>
@@ -14545,7 +14549,7 @@
               <a:buNone/>
             </a:pPr>
             <a:r>
-              <a:rPr lang="en-US" sz="1300" b="1" dirty="0">
+              <a:rPr lang="en-US" sz="1220" b="1" dirty="0">
                 <a:solidFill>
                   <a:srgbClr val="0068B7"/>
                 </a:solidFill>
@@ -14555,7 +14559,7 @@
               </a:rPr>
               <a:t>Core concept</a:t>
             </a:r>
-            <a:endParaRPr lang="en-US" sz="1300" dirty="0"/>
+            <a:endParaRPr lang="en-US" sz="1220" dirty="0"/>
           </a:p>
         </p:txBody>
       </p:sp>
@@ -14567,8 +14571,8 @@
         </p:nvSpPr>
         <p:spPr>
           <a:xfrm>
-            <a:off x="7799832" y="1801368"/>
-            <a:ext cx="3145536" cy="688543"/>
+            <a:off x="7708392" y="1764792"/>
+            <a:ext cx="3282696" cy="749808"/>
           </a:xfrm>
           <a:prstGeom prst="rect">
             <a:avLst/>
@@ -14586,7 +14590,7 @@
               <a:buNone/>
             </a:pPr>
             <a:r>
-              <a:rPr lang="en-US" sz="1320" dirty="0">
+              <a:rPr lang="en-US" sz="1220" dirty="0">
                 <a:solidFill>
                   <a:srgbClr val="17364A"/>
                 </a:solidFill>
@@ -14594,9 +14598,9 @@
                 <a:ea typeface="Aptos" pitchFamily="34" charset="-122"/>
                 <a:cs typeface="Aptos" pitchFamily="34" charset="-120"/>
               </a:rPr>
-              <a:t>AI opportunities can quickly exceed an agency's capacity to evaluate, implement, and sustain them.</a:t>
-            </a:r>
-            <a:endParaRPr lang="en-US" sz="1320" dirty="0"/>
+              <a:t>AI opportunities can quickly exceed an agency's capacity to evaluate, implement,.</a:t>
+            </a:r>
+            <a:endParaRPr lang="en-US" sz="1220" dirty="0"/>
           </a:p>
         </p:txBody>
       </p:sp>
@@ -14608,12 +14612,12 @@
         </p:nvSpPr>
         <p:spPr>
           <a:xfrm>
-            <a:off x="7635240" y="2718511"/>
-            <a:ext cx="3474720" cy="1328623"/>
+            <a:off x="7543800" y="2724912"/>
+            <a:ext cx="3611880" cy="1527048"/>
           </a:xfrm>
           <a:prstGeom prst="roundRect">
             <a:avLst>
-              <a:gd name="adj" fmla="val 8259"/>
+              <a:gd name="adj" fmla="val 7186"/>
             </a:avLst>
           </a:prstGeom>
           <a:solidFill>
@@ -14635,8 +14639,8 @@
         </p:nvSpPr>
         <p:spPr>
           <a:xfrm>
-            <a:off x="7799832" y="2864815"/>
-            <a:ext cx="3145536" cy="256032"/>
+            <a:off x="7708392" y="2852928"/>
+            <a:ext cx="3282696" cy="228600"/>
           </a:xfrm>
           <a:prstGeom prst="rect">
             <a:avLst/>
@@ -14652,7 +14656,7 @@
               <a:buNone/>
             </a:pPr>
             <a:r>
-              <a:rPr lang="en-US" sz="1300" b="1" dirty="0">
+              <a:rPr lang="en-US" sz="1220" b="1" dirty="0">
                 <a:solidFill>
                   <a:srgbClr val="0068B7"/>
                 </a:solidFill>
@@ -14662,7 +14666,7 @@
               </a:rPr>
               <a:t>Concept checkpoints</a:t>
             </a:r>
-            <a:endParaRPr lang="en-US" sz="1300" dirty="0"/>
+            <a:endParaRPr lang="en-US" sz="1220" dirty="0"/>
           </a:p>
         </p:txBody>
       </p:sp>
@@ -14674,8 +14678,8 @@
         </p:nvSpPr>
         <p:spPr>
           <a:xfrm>
-            <a:off x="7818120" y="3230575"/>
-            <a:ext cx="3090672" cy="670255"/>
+            <a:off x="7726680" y="3182112"/>
+            <a:ext cx="3227832" cy="960120"/>
           </a:xfrm>
           <a:prstGeom prst="rect">
             <a:avLst/>
@@ -14693,7 +14697,7 @@
               <a:buNone/>
             </a:pPr>
             <a:r>
-              <a:rPr lang="en-US" sz="1220" dirty="0">
+              <a:rPr lang="en-US" sz="1140" dirty="0">
                 <a:solidFill>
                   <a:srgbClr val="17364A"/>
                 </a:solidFill>
@@ -14701,16 +14705,16 @@
                 <a:ea typeface="Aptos" pitchFamily="34" charset="-122"/>
                 <a:cs typeface="Aptos" pitchFamily="34" charset="-120"/>
               </a:rPr>
-              <a:t>Leaders need a portfolio strategy that helps distinguish.</a:t>
-            </a:r>
-            <a:endParaRPr lang="en-US" sz="1220" dirty="0"/>
-          </a:p>
-          <a:p>
-            <a:pPr indent="0" marL="0">
-              <a:buNone/>
-            </a:pPr>
-            <a:r>
-              <a:rPr lang="en-US" sz="1220" dirty="0">
+              <a:t>Leaders need a portfolio strategy that helps.</a:t>
+            </a:r>
+            <a:endParaRPr lang="en-US" sz="1140" dirty="0"/>
+          </a:p>
+          <a:p>
+            <a:pPr indent="0" marL="0">
+              <a:buNone/>
+            </a:pPr>
+            <a:r>
+              <a:rPr lang="en-US" sz="1140" dirty="0">
                 <a:solidFill>
                   <a:srgbClr val="17364A"/>
                 </a:solidFill>
@@ -14718,16 +14722,16 @@
                 <a:ea typeface="Aptos" pitchFamily="34" charset="-122"/>
                 <a:cs typeface="Aptos" pitchFamily="34" charset="-120"/>
               </a:rPr>
-              <a:t>A portfolio approach organizes AI opportunities across programs,.</a:t>
-            </a:r>
-            <a:endParaRPr lang="en-US" sz="1220" dirty="0"/>
-          </a:p>
-          <a:p>
-            <a:pPr indent="0" marL="0">
-              <a:buNone/>
-            </a:pPr>
-            <a:r>
-              <a:rPr lang="en-US" sz="1220" dirty="0">
+              <a:t>A portfolio approach organizes AI opportunities.</a:t>
+            </a:r>
+            <a:endParaRPr lang="en-US" sz="1140" dirty="0"/>
+          </a:p>
+          <a:p>
+            <a:pPr indent="0" marL="0">
+              <a:buNone/>
+            </a:pPr>
+            <a:r>
+              <a:rPr lang="en-US" sz="1140" dirty="0">
                 <a:solidFill>
                   <a:srgbClr val="17364A"/>
                 </a:solidFill>
@@ -14735,9 +14739,9 @@
                 <a:ea typeface="Aptos" pitchFamily="34" charset="-122"/>
                 <a:cs typeface="Aptos" pitchFamily="34" charset="-120"/>
               </a:rPr>
-              <a:t>This module teaches leaders how to create an AI use case intake.</a:t>
-            </a:r>
-            <a:endParaRPr lang="en-US" sz="1220" dirty="0"/>
+              <a:t>This module teaches leaders how to create an AI.</a:t>
+            </a:r>
+            <a:endParaRPr lang="en-US" sz="1140" dirty="0"/>
           </a:p>
         </p:txBody>
       </p:sp>
@@ -14749,12 +14753,12 @@
         </p:nvSpPr>
         <p:spPr>
           <a:xfrm>
-            <a:off x="7635240" y="4184294"/>
-            <a:ext cx="3474720" cy="1466698"/>
+            <a:off x="7543800" y="4389120"/>
+            <a:ext cx="3611880" cy="1261872"/>
           </a:xfrm>
           <a:prstGeom prst="roundRect">
             <a:avLst>
-              <a:gd name="adj" fmla="val 7481"/>
+              <a:gd name="adj" fmla="val 8696"/>
             </a:avLst>
           </a:prstGeom>
           <a:solidFill>
@@ -14776,8 +14780,8 @@
         </p:nvSpPr>
         <p:spPr>
           <a:xfrm>
-            <a:off x="7799832" y="4330598"/>
-            <a:ext cx="3145536" cy="256032"/>
+            <a:off x="7708392" y="4517136"/>
+            <a:ext cx="3282696" cy="228600"/>
           </a:xfrm>
           <a:prstGeom prst="rect">
             <a:avLst/>
@@ -14793,7 +14797,7 @@
               <a:buNone/>
             </a:pPr>
             <a:r>
-              <a:rPr lang="en-US" sz="1300" b="1" dirty="0">
+              <a:rPr lang="en-US" sz="1220" b="1" dirty="0">
                 <a:solidFill>
                   <a:srgbClr val="0068B7"/>
                 </a:solidFill>
@@ -14803,7 +14807,7 @@
               </a:rPr>
               <a:t>Apply it</a:t>
             </a:r>
-            <a:endParaRPr lang="en-US" sz="1300" dirty="0"/>
+            <a:endParaRPr lang="en-US" sz="1220" dirty="0"/>
           </a:p>
         </p:txBody>
       </p:sp>
@@ -14815,8 +14819,8 @@
         </p:nvSpPr>
         <p:spPr>
           <a:xfrm>
-            <a:off x="7799832" y="4659782"/>
-            <a:ext cx="3145536" cy="899770"/>
+            <a:off x="7708392" y="4828032"/>
+            <a:ext cx="3282696" cy="749808"/>
           </a:xfrm>
           <a:prstGeom prst="rect">
             <a:avLst/>
@@ -14834,7 +14838,7 @@
               <a:buNone/>
             </a:pPr>
             <a:r>
-              <a:rPr lang="en-US" sz="1320" dirty="0">
+              <a:rPr lang="en-US" sz="1220" dirty="0">
                 <a:solidFill>
                   <a:srgbClr val="17364A"/>
                 </a:solidFill>
@@ -14842,9 +14846,9 @@
                 <a:ea typeface="Aptos" pitchFamily="34" charset="-122"/>
                 <a:cs typeface="Aptos" pitchFamily="34" charset="-120"/>
               </a:rPr>
-              <a:t>Connect the concept to public health purpose, responsible use, required safeguards, documentation, and the next action a department should take.</a:t>
-            </a:r>
-            <a:endParaRPr lang="en-US" sz="1320" dirty="0"/>
+              <a:t>Connect the concept to public health purpose, responsible use, required.</a:t>
+            </a:r>
+            <a:endParaRPr lang="en-US" sz="1220" dirty="0"/>
           </a:p>
         </p:txBody>
       </p:sp>
@@ -15135,8 +15139,8 @@
         </p:nvSpPr>
         <p:spPr>
           <a:xfrm>
-            <a:off x="868680" y="1508760"/>
-            <a:ext cx="6309360" cy="4160520"/>
+            <a:off x="822960" y="1463040"/>
+            <a:ext cx="6565392" cy="4343400"/>
           </a:xfrm>
           <a:prstGeom prst="rect">
             <a:avLst/>
@@ -15154,7 +15158,7 @@
               <a:buNone/>
             </a:pPr>
             <a:r>
-              <a:rPr lang="en-US" sz="2100" dirty="0">
+              <a:rPr lang="en-US" sz="1920" dirty="0">
                 <a:solidFill>
                   <a:srgbClr val="003A63"/>
                 </a:solidFill>
@@ -15164,14 +15168,14 @@
               </a:rPr>
               <a:t>• This national-level module is intended for training and planning purposes.</a:t>
             </a:r>
-            <a:endParaRPr lang="en-US" sz="2100" dirty="0"/>
-          </a:p>
-          <a:p>
-            <a:pPr indent="0" marL="0">
-              <a:buNone/>
-            </a:pPr>
-            <a:r>
-              <a:rPr lang="en-US" sz="2100" dirty="0">
+            <a:endParaRPr lang="en-US" sz="1920" dirty="0"/>
+          </a:p>
+          <a:p>
+            <a:pPr indent="0" marL="0">
+              <a:buNone/>
+            </a:pPr>
+            <a:r>
+              <a:rPr lang="en-US" sz="1920" dirty="0">
                 <a:solidFill>
                   <a:srgbClr val="003A63"/>
                 </a:solidFill>
@@ -15179,16 +15183,16 @@
                 <a:ea typeface="Aptos" pitchFamily="34" charset="-122"/>
                 <a:cs typeface="Aptos" pitchFamily="34" charset="-120"/>
               </a:rPr>
-              <a:t>• It does not replace legal, privacy, procurement, civil rights, records, or agency policy review.</a:t>
-            </a:r>
-            <a:endParaRPr lang="en-US" sz="2100" dirty="0"/>
-          </a:p>
-          <a:p>
-            <a:pPr indent="0" marL="0">
-              <a:buNone/>
-            </a:pPr>
-            <a:r>
-              <a:rPr lang="en-US" sz="2100" dirty="0">
+              <a:t>• It does not replace legal, privacy, procurement, civil rights, records, or.</a:t>
+            </a:r>
+            <a:endParaRPr lang="en-US" sz="1920" dirty="0"/>
+          </a:p>
+          <a:p>
+            <a:pPr indent="0" marL="0">
+              <a:buNone/>
+            </a:pPr>
+            <a:r>
+              <a:rPr lang="en-US" sz="1920" dirty="0">
                 <a:solidFill>
                   <a:srgbClr val="003A63"/>
                 </a:solidFill>
@@ -15196,9 +15200,9 @@
                 <a:ea typeface="Aptos" pitchFamily="34" charset="-122"/>
                 <a:cs typeface="Aptos" pitchFamily="34" charset="-120"/>
               </a:rPr>
-              <a:t>• Learners should confirm applicable requirements in their own jurisdiction and organization.</a:t>
-            </a:r>
-            <a:endParaRPr lang="en-US" sz="2100" dirty="0"/>
+              <a:t>• Learners should confirm applicable requirements in their own jurisdiction.</a:t>
+            </a:r>
+            <a:endParaRPr lang="en-US" sz="1920" dirty="0"/>
           </a:p>
         </p:txBody>
       </p:sp>
@@ -15210,12 +15214,12 @@
         </p:nvSpPr>
         <p:spPr>
           <a:xfrm>
-            <a:off x="7635240" y="1325880"/>
-            <a:ext cx="3474720" cy="1207008"/>
+            <a:off x="7543800" y="1325880"/>
+            <a:ext cx="3611880" cy="1261872"/>
           </a:xfrm>
           <a:prstGeom prst="roundRect">
             <a:avLst>
-              <a:gd name="adj" fmla="val 9091"/>
+              <a:gd name="adj" fmla="val 8696"/>
             </a:avLst>
           </a:prstGeom>
           <a:solidFill>
@@ -15237,8 +15241,8 @@
         </p:nvSpPr>
         <p:spPr>
           <a:xfrm>
-            <a:off x="7799832" y="1472184"/>
-            <a:ext cx="3145536" cy="256032"/>
+            <a:off x="7708392" y="1453896"/>
+            <a:ext cx="3282696" cy="228600"/>
           </a:xfrm>
           <a:prstGeom prst="rect">
             <a:avLst/>
@@ -15254,7 +15258,7 @@
               <a:buNone/>
             </a:pPr>
             <a:r>
-              <a:rPr lang="en-US" sz="1300" b="1" dirty="0">
+              <a:rPr lang="en-US" sz="1220" b="1" dirty="0">
                 <a:solidFill>
                   <a:srgbClr val="0068B7"/>
                 </a:solidFill>
@@ -15264,7 +15268,7 @@
               </a:rPr>
               <a:t>Governance lens</a:t>
             </a:r>
-            <a:endParaRPr lang="en-US" sz="1300" dirty="0"/>
+            <a:endParaRPr lang="en-US" sz="1220" dirty="0"/>
           </a:p>
         </p:txBody>
       </p:sp>
@@ -15276,8 +15280,8 @@
         </p:nvSpPr>
         <p:spPr>
           <a:xfrm>
-            <a:off x="7799832" y="1801368"/>
-            <a:ext cx="3145536" cy="640080"/>
+            <a:off x="7708392" y="1764792"/>
+            <a:ext cx="3282696" cy="749808"/>
           </a:xfrm>
           <a:prstGeom prst="rect">
             <a:avLst/>
@@ -15295,7 +15299,7 @@
               <a:buNone/>
             </a:pPr>
             <a:r>
-              <a:rPr lang="en-US" sz="1320" dirty="0">
+              <a:rPr lang="en-US" sz="1220" dirty="0">
                 <a:solidFill>
                   <a:srgbClr val="17364A"/>
                 </a:solidFill>
@@ -15305,7 +15309,7 @@
               </a:rPr>
               <a:t>This national-level module is intended for training and planning purposes.</a:t>
             </a:r>
-            <a:endParaRPr lang="en-US" sz="1320" dirty="0"/>
+            <a:endParaRPr lang="en-US" sz="1220" dirty="0"/>
           </a:p>
         </p:txBody>
       </p:sp>
@@ -15317,12 +15321,12 @@
         </p:nvSpPr>
         <p:spPr>
           <a:xfrm>
-            <a:off x="7635240" y="2670048"/>
-            <a:ext cx="3474720" cy="1377086"/>
+            <a:off x="7543800" y="2724912"/>
+            <a:ext cx="3611880" cy="1527048"/>
           </a:xfrm>
           <a:prstGeom prst="roundRect">
             <a:avLst>
-              <a:gd name="adj" fmla="val 7968"/>
+              <a:gd name="adj" fmla="val 7186"/>
             </a:avLst>
           </a:prstGeom>
           <a:solidFill>
@@ -15344,24 +15348,26 @@
         </p:nvSpPr>
         <p:spPr>
           <a:xfrm>
-            <a:off x="7799832" y="2798064"/>
-            <a:ext cx="3145536" cy="237744"/>
-          </a:xfrm>
-          <a:prstGeom prst="rect">
-            <a:avLst/>
-          </a:prstGeom>
-          <a:noFill/>
-          <a:ln/>
-        </p:spPr>
-        <p:txBody>
-          <a:bodyPr wrap="square" lIns="0" tIns="0" rIns="0" bIns="0" rtlCol="0" anchor="ctr"/>
-          <a:lstStyle/>
-          <a:p>
-            <a:pPr indent="0" marL="0">
-              <a:buNone/>
-            </a:pPr>
-            <a:r>
-              <a:rPr lang="en-US" sz="1250" b="1" dirty="0">
+            <a:off x="7708392" y="2852928"/>
+            <a:ext cx="3282696" cy="219456"/>
+          </a:xfrm>
+          <a:prstGeom prst="rect">
+            <a:avLst/>
+          </a:prstGeom>
+          <a:noFill/>
+          <a:ln/>
+        </p:spPr>
+        <p:txBody>
+          <a:bodyPr wrap="square" lIns="0" tIns="0" rIns="0" bIns="0" rtlCol="0" anchor="ctr">
+            <a:normAutofit/>
+          </a:bodyPr>
+          <a:lstStyle/>
+          <a:p>
+            <a:pPr indent="0" marL="0">
+              <a:buNone/>
+            </a:pPr>
+            <a:r>
+              <a:rPr lang="en-US" sz="1160" b="1" dirty="0">
                 <a:solidFill>
                   <a:srgbClr val="0068B7"/>
                 </a:solidFill>
@@ -15371,7 +15377,7 @@
               </a:rPr>
               <a:t>Governance pathway</a:t>
             </a:r>
-            <a:endParaRPr lang="en-US" sz="1250" dirty="0"/>
+            <a:endParaRPr lang="en-US" sz="1160" dirty="0"/>
           </a:p>
         </p:txBody>
       </p:sp>
@@ -15383,7 +15389,7 @@
         </p:nvSpPr>
         <p:spPr>
           <a:xfrm>
-            <a:off x="8763000" y="3351276"/>
+            <a:off x="8717280" y="3406140"/>
             <a:ext cx="164592" cy="0"/>
           </a:xfrm>
           <a:prstGeom prst="line">
@@ -15406,8 +15412,8 @@
         </p:nvSpPr>
         <p:spPr>
           <a:xfrm>
-            <a:off x="7872984" y="3200400"/>
-            <a:ext cx="890016" cy="301752"/>
+            <a:off x="7781544" y="3255264"/>
+            <a:ext cx="935736" cy="301752"/>
           </a:xfrm>
           <a:prstGeom prst="roundRect">
             <a:avLst>
@@ -15433,8 +15439,8 @@
         </p:nvSpPr>
         <p:spPr>
           <a:xfrm>
-            <a:off x="7909560" y="3273552"/>
-            <a:ext cx="816864" cy="146304"/>
+            <a:off x="7818120" y="3328416"/>
+            <a:ext cx="862584" cy="146304"/>
           </a:xfrm>
           <a:prstGeom prst="rect">
             <a:avLst/>
@@ -15474,7 +15480,7 @@
         </p:nvSpPr>
         <p:spPr>
           <a:xfrm>
-            <a:off x="9817608" y="3351276"/>
+            <a:off x="9817608" y="3406140"/>
             <a:ext cx="164592" cy="0"/>
           </a:xfrm>
           <a:prstGeom prst="line">
@@ -15497,8 +15503,8 @@
         </p:nvSpPr>
         <p:spPr>
           <a:xfrm>
-            <a:off x="8927592" y="3200400"/>
-            <a:ext cx="890016" cy="301752"/>
+            <a:off x="8881872" y="3255264"/>
+            <a:ext cx="935736" cy="301752"/>
           </a:xfrm>
           <a:prstGeom prst="roundRect">
             <a:avLst>
@@ -15524,8 +15530,8 @@
         </p:nvSpPr>
         <p:spPr>
           <a:xfrm>
-            <a:off x="8964168" y="3273552"/>
-            <a:ext cx="816864" cy="146304"/>
+            <a:off x="8918448" y="3328416"/>
+            <a:ext cx="862584" cy="146304"/>
           </a:xfrm>
           <a:prstGeom prst="rect">
             <a:avLst/>
@@ -15565,8 +15571,8 @@
         </p:nvSpPr>
         <p:spPr>
           <a:xfrm>
-            <a:off x="9982200" y="3200400"/>
-            <a:ext cx="890016" cy="301752"/>
+            <a:off x="9982200" y="3255264"/>
+            <a:ext cx="935736" cy="301752"/>
           </a:xfrm>
           <a:prstGeom prst="roundRect">
             <a:avLst>
@@ -15592,8 +15598,8 @@
         </p:nvSpPr>
         <p:spPr>
           <a:xfrm>
-            <a:off x="10018776" y="3273552"/>
-            <a:ext cx="816864" cy="146304"/>
+            <a:off x="10018776" y="3328416"/>
+            <a:ext cx="862584" cy="146304"/>
           </a:xfrm>
           <a:prstGeom prst="rect">
             <a:avLst/>
@@ -15633,8 +15639,8 @@
         </p:nvSpPr>
         <p:spPr>
           <a:xfrm>
-            <a:off x="7854696" y="3694176"/>
-            <a:ext cx="3035808" cy="206654"/>
+            <a:off x="7763256" y="3749040"/>
+            <a:ext cx="3172968" cy="356616"/>
           </a:xfrm>
           <a:prstGeom prst="rect">
             <a:avLst/>
@@ -15652,7 +15658,7 @@
               <a:buNone/>
             </a:pPr>
             <a:r>
-              <a:rPr lang="en-US" sz="1120" dirty="0">
+              <a:rPr lang="en-US" sz="1040" dirty="0">
                 <a:solidFill>
                   <a:srgbClr val="17364A"/>
                 </a:solidFill>
@@ -15660,9 +15666,9 @@
                 <a:ea typeface="Aptos" pitchFamily="34" charset="-122"/>
                 <a:cs typeface="Aptos" pitchFamily="34" charset="-120"/>
               </a:rPr>
-              <a:t>A proposed AI use should move through documented review before it becomes an operational workflow.</a:t>
-            </a:r>
-            <a:endParaRPr lang="en-US" sz="1120" dirty="0"/>
+              <a:t>A proposed AI use should move through documented review before it.</a:t>
+            </a:r>
+            <a:endParaRPr lang="en-US" sz="1040" dirty="0"/>
           </a:p>
         </p:txBody>
       </p:sp>
@@ -15674,12 +15680,12 @@
         </p:nvSpPr>
         <p:spPr>
           <a:xfrm>
-            <a:off x="7635240" y="4184294"/>
-            <a:ext cx="3474720" cy="1466698"/>
+            <a:off x="7543800" y="4389120"/>
+            <a:ext cx="3611880" cy="1261872"/>
           </a:xfrm>
           <a:prstGeom prst="roundRect">
             <a:avLst>
-              <a:gd name="adj" fmla="val 7481"/>
+              <a:gd name="adj" fmla="val 8696"/>
             </a:avLst>
           </a:prstGeom>
           <a:solidFill>
@@ -15701,8 +15707,8 @@
         </p:nvSpPr>
         <p:spPr>
           <a:xfrm>
-            <a:off x="7799832" y="4330598"/>
-            <a:ext cx="3145536" cy="256032"/>
+            <a:off x="7708392" y="4517136"/>
+            <a:ext cx="3282696" cy="228600"/>
           </a:xfrm>
           <a:prstGeom prst="rect">
             <a:avLst/>
@@ -15718,7 +15724,7 @@
               <a:buNone/>
             </a:pPr>
             <a:r>
-              <a:rPr lang="en-US" sz="1300" b="1" dirty="0">
+              <a:rPr lang="en-US" sz="1220" b="1" dirty="0">
                 <a:solidFill>
                   <a:srgbClr val="0068B7"/>
                 </a:solidFill>
@@ -15728,7 +15734,7 @@
               </a:rPr>
               <a:t>What to document</a:t>
             </a:r>
-            <a:endParaRPr lang="en-US" sz="1300" dirty="0"/>
+            <a:endParaRPr lang="en-US" sz="1220" dirty="0"/>
           </a:p>
         </p:txBody>
       </p:sp>
@@ -15740,8 +15746,8 @@
         </p:nvSpPr>
         <p:spPr>
           <a:xfrm>
-            <a:off x="7799832" y="4659782"/>
-            <a:ext cx="3145536" cy="899770"/>
+            <a:off x="7708392" y="4828032"/>
+            <a:ext cx="3282696" cy="749808"/>
           </a:xfrm>
           <a:prstGeom prst="rect">
             <a:avLst/>
@@ -15759,7 +15765,7 @@
               <a:buNone/>
             </a:pPr>
             <a:r>
-              <a:rPr lang="en-US" sz="1320" dirty="0">
+              <a:rPr lang="en-US" sz="1220" dirty="0">
                 <a:solidFill>
                   <a:srgbClr val="17364A"/>
                 </a:solidFill>
@@ -15767,9 +15773,9 @@
                 <a:ea typeface="Aptos" pitchFamily="34" charset="-122"/>
                 <a:cs typeface="Aptos" pitchFamily="34" charset="-120"/>
               </a:rPr>
-              <a:t>Translate this concept into clear decision rights, review steps, documentation expectations, and escalation paths before an AI-supported workflow is approved.</a:t>
-            </a:r>
-            <a:endParaRPr lang="en-US" sz="1320" dirty="0"/>
+              <a:t>Translate this concept into clear decision rights, review steps, documentation.</a:t>
+            </a:r>
+            <a:endParaRPr lang="en-US" sz="1220" dirty="0"/>
           </a:p>
         </p:txBody>
       </p:sp>
@@ -16060,8 +16066,8 @@
         </p:nvSpPr>
         <p:spPr>
           <a:xfrm>
-            <a:off x="868680" y="1508760"/>
-            <a:ext cx="6309360" cy="4160520"/>
+            <a:off x="822960" y="1463040"/>
+            <a:ext cx="6565392" cy="4343400"/>
           </a:xfrm>
           <a:prstGeom prst="rect">
             <a:avLst/>
@@ -16079,7 +16085,7 @@
               <a:buNone/>
             </a:pPr>
             <a:r>
-              <a:rPr lang="en-US" sz="2100" dirty="0">
+              <a:rPr lang="en-US" sz="1920" dirty="0">
                 <a:solidFill>
                   <a:srgbClr val="003A63"/>
                 </a:solidFill>
@@ -16087,16 +16093,16 @@
                 <a:ea typeface="Aptos" pitchFamily="34" charset="-122"/>
                 <a:cs typeface="Aptos" pitchFamily="34" charset="-120"/>
               </a:rPr>
-              <a:t>• Public health agencies have many possible AI use cases: summarizing case notes, analyzing call.</a:t>
-            </a:r>
-            <a:endParaRPr lang="en-US" sz="2100" dirty="0"/>
-          </a:p>
-          <a:p>
-            <a:pPr indent="0" marL="0">
-              <a:buNone/>
-            </a:pPr>
-            <a:r>
-              <a:rPr lang="en-US" sz="2100" dirty="0">
+              <a:t>• Public health agencies have many possible AI use cases: summarizing case.</a:t>
+            </a:r>
+            <a:endParaRPr lang="en-US" sz="1920" dirty="0"/>
+          </a:p>
+          <a:p>
+            <a:pPr indent="0" marL="0">
+              <a:buNone/>
+            </a:pPr>
+            <a:r>
+              <a:rPr lang="en-US" sz="1920" dirty="0">
                 <a:solidFill>
                   <a:srgbClr val="003A63"/>
                 </a:solidFill>
@@ -16104,16 +16110,16 @@
                 <a:ea typeface="Aptos" pitchFamily="34" charset="-122"/>
                 <a:cs typeface="Aptos" pitchFamily="34" charset="-120"/>
               </a:rPr>
-              <a:t>• Without a portfolio strategy, agencies may choose projects because they are visible, easy to.</a:t>
-            </a:r>
-            <a:endParaRPr lang="en-US" sz="2100" dirty="0"/>
-          </a:p>
-          <a:p>
-            <a:pPr indent="0" marL="0">
-              <a:buNone/>
-            </a:pPr>
-            <a:r>
-              <a:rPr lang="en-US" sz="2100" dirty="0">
+              <a:t>• Without a portfolio strategy, agencies may choose projects because they are.</a:t>
+            </a:r>
+            <a:endParaRPr lang="en-US" sz="1920" dirty="0"/>
+          </a:p>
+          <a:p>
+            <a:pPr indent="0" marL="0">
+              <a:buNone/>
+            </a:pPr>
+            <a:r>
+              <a:rPr lang="en-US" sz="1920" dirty="0">
                 <a:solidFill>
                   <a:srgbClr val="003A63"/>
                 </a:solidFill>
@@ -16123,7 +16129,7 @@
               </a:rPr>
               <a:t>• A portfolio strategy protects scarce capacity.</a:t>
             </a:r>
-            <a:endParaRPr lang="en-US" sz="2100" dirty="0"/>
+            <a:endParaRPr lang="en-US" sz="1920" dirty="0"/>
           </a:p>
         </p:txBody>
       </p:sp>
@@ -16135,12 +16141,12 @@
         </p:nvSpPr>
         <p:spPr>
           <a:xfrm>
-            <a:off x="7635240" y="1325880"/>
-            <a:ext cx="3474720" cy="1255471"/>
+            <a:off x="7543800" y="1325880"/>
+            <a:ext cx="3611880" cy="1261872"/>
           </a:xfrm>
           <a:prstGeom prst="roundRect">
             <a:avLst>
-              <a:gd name="adj" fmla="val 8740"/>
+              <a:gd name="adj" fmla="val 8696"/>
             </a:avLst>
           </a:prstGeom>
           <a:solidFill>
@@ -16162,8 +16168,8 @@
         </p:nvSpPr>
         <p:spPr>
           <a:xfrm>
-            <a:off x="7799832" y="1472184"/>
-            <a:ext cx="3145536" cy="256032"/>
+            <a:off x="7708392" y="1453896"/>
+            <a:ext cx="3282696" cy="228600"/>
           </a:xfrm>
           <a:prstGeom prst="rect">
             <a:avLst/>
@@ -16179,7 +16185,7 @@
               <a:buNone/>
             </a:pPr>
             <a:r>
-              <a:rPr lang="en-US" sz="1300" b="1" dirty="0">
+              <a:rPr lang="en-US" sz="1220" b="1" dirty="0">
                 <a:solidFill>
                   <a:srgbClr val="0068B7"/>
                 </a:solidFill>
@@ -16189,7 +16195,7 @@
               </a:rPr>
               <a:t>Core concept</a:t>
             </a:r>
-            <a:endParaRPr lang="en-US" sz="1300" dirty="0"/>
+            <a:endParaRPr lang="en-US" sz="1220" dirty="0"/>
           </a:p>
         </p:txBody>
       </p:sp>
@@ -16201,8 +16207,8 @@
         </p:nvSpPr>
         <p:spPr>
           <a:xfrm>
-            <a:off x="7799832" y="1801368"/>
-            <a:ext cx="3145536" cy="688543"/>
+            <a:off x="7708392" y="1764792"/>
+            <a:ext cx="3282696" cy="749808"/>
           </a:xfrm>
           <a:prstGeom prst="rect">
             <a:avLst/>
@@ -16220,7 +16226,7 @@
               <a:buNone/>
             </a:pPr>
             <a:r>
-              <a:rPr lang="en-US" sz="1320" dirty="0">
+              <a:rPr lang="en-US" sz="1220" dirty="0">
                 <a:solidFill>
                   <a:srgbClr val="17364A"/>
                 </a:solidFill>
@@ -16228,9 +16234,9 @@
                 <a:ea typeface="Aptos" pitchFamily="34" charset="-122"/>
                 <a:cs typeface="Aptos" pitchFamily="34" charset="-120"/>
               </a:rPr>
-              <a:t>Public health agencies have many possible AI use cases: summarizing case notes, analyzing call logs,.</a:t>
-            </a:r>
-            <a:endParaRPr lang="en-US" sz="1320" dirty="0"/>
+              <a:t>Public health agencies have many possible AI use cases: summarizing case notes,.</a:t>
+            </a:r>
+            <a:endParaRPr lang="en-US" sz="1220" dirty="0"/>
           </a:p>
         </p:txBody>
       </p:sp>
@@ -16242,12 +16248,12 @@
         </p:nvSpPr>
         <p:spPr>
           <a:xfrm>
-            <a:off x="7635240" y="2718511"/>
-            <a:ext cx="3474720" cy="1328623"/>
+            <a:off x="7543800" y="2724912"/>
+            <a:ext cx="3611880" cy="1527048"/>
           </a:xfrm>
           <a:prstGeom prst="roundRect">
             <a:avLst>
-              <a:gd name="adj" fmla="val 8259"/>
+              <a:gd name="adj" fmla="val 7186"/>
             </a:avLst>
           </a:prstGeom>
           <a:solidFill>
@@ -16269,8 +16275,8 @@
         </p:nvSpPr>
         <p:spPr>
           <a:xfrm>
-            <a:off x="7799832" y="2864815"/>
-            <a:ext cx="3145536" cy="256032"/>
+            <a:off x="7708392" y="2852928"/>
+            <a:ext cx="3282696" cy="228600"/>
           </a:xfrm>
           <a:prstGeom prst="rect">
             <a:avLst/>
@@ -16286,7 +16292,7 @@
               <a:buNone/>
             </a:pPr>
             <a:r>
-              <a:rPr lang="en-US" sz="1300" b="1" dirty="0">
+              <a:rPr lang="en-US" sz="1220" b="1" dirty="0">
                 <a:solidFill>
                   <a:srgbClr val="0068B7"/>
                 </a:solidFill>
@@ -16296,7 +16302,7 @@
               </a:rPr>
               <a:t>Concept checkpoints</a:t>
             </a:r>
-            <a:endParaRPr lang="en-US" sz="1300" dirty="0"/>
+            <a:endParaRPr lang="en-US" sz="1220" dirty="0"/>
           </a:p>
         </p:txBody>
       </p:sp>
@@ -16308,8 +16314,8 @@
         </p:nvSpPr>
         <p:spPr>
           <a:xfrm>
-            <a:off x="7818120" y="3230575"/>
-            <a:ext cx="3090672" cy="670255"/>
+            <a:off x="7726680" y="3182112"/>
+            <a:ext cx="3227832" cy="960120"/>
           </a:xfrm>
           <a:prstGeom prst="rect">
             <a:avLst/>
@@ -16327,7 +16333,7 @@
               <a:buNone/>
             </a:pPr>
             <a:r>
-              <a:rPr lang="en-US" sz="1220" dirty="0">
+              <a:rPr lang="en-US" sz="1140" dirty="0">
                 <a:solidFill>
                   <a:srgbClr val="17364A"/>
                 </a:solidFill>
@@ -16335,16 +16341,16 @@
                 <a:ea typeface="Aptos" pitchFamily="34" charset="-122"/>
                 <a:cs typeface="Aptos" pitchFamily="34" charset="-120"/>
               </a:rPr>
-              <a:t>Public health agencies have many possible AI use cases:.</a:t>
-            </a:r>
-            <a:endParaRPr lang="en-US" sz="1220" dirty="0"/>
-          </a:p>
-          <a:p>
-            <a:pPr indent="0" marL="0">
-              <a:buNone/>
-            </a:pPr>
-            <a:r>
-              <a:rPr lang="en-US" sz="1220" dirty="0">
+              <a:t>Public health agencies have many possible AI use.</a:t>
+            </a:r>
+            <a:endParaRPr lang="en-US" sz="1140" dirty="0"/>
+          </a:p>
+          <a:p>
+            <a:pPr indent="0" marL="0">
+              <a:buNone/>
+            </a:pPr>
+            <a:r>
+              <a:rPr lang="en-US" sz="1140" dirty="0">
                 <a:solidFill>
                   <a:srgbClr val="17364A"/>
                 </a:solidFill>
@@ -16352,16 +16358,16 @@
                 <a:ea typeface="Aptos" pitchFamily="34" charset="-122"/>
                 <a:cs typeface="Aptos" pitchFamily="34" charset="-120"/>
               </a:rPr>
-              <a:t>Without a portfolio strategy, agencies may choose projects because.</a:t>
-            </a:r>
-            <a:endParaRPr lang="en-US" sz="1220" dirty="0"/>
-          </a:p>
-          <a:p>
-            <a:pPr indent="0" marL="0">
-              <a:buNone/>
-            </a:pPr>
-            <a:r>
-              <a:rPr lang="en-US" sz="1220" dirty="0">
+              <a:t>Without a portfolio strategy, agencies may choose.</a:t>
+            </a:r>
+            <a:endParaRPr lang="en-US" sz="1140" dirty="0"/>
+          </a:p>
+          <a:p>
+            <a:pPr indent="0" marL="0">
+              <a:buNone/>
+            </a:pPr>
+            <a:r>
+              <a:rPr lang="en-US" sz="1140" dirty="0">
                 <a:solidFill>
                   <a:srgbClr val="17364A"/>
                 </a:solidFill>
@@ -16369,9 +16375,9 @@
                 <a:ea typeface="Aptos" pitchFamily="34" charset="-122"/>
                 <a:cs typeface="Aptos" pitchFamily="34" charset="-120"/>
               </a:rPr>
-              <a:t>Technical teams, privacy officers, legal counsel, procurement.</a:t>
-            </a:r>
-            <a:endParaRPr lang="en-US" sz="1220" dirty="0"/>
+              <a:t>Technical teams, privacy officers, legal counsel,.</a:t>
+            </a:r>
+            <a:endParaRPr lang="en-US" sz="1140" dirty="0"/>
           </a:p>
         </p:txBody>
       </p:sp>
@@ -16383,12 +16389,12 @@
         </p:nvSpPr>
         <p:spPr>
           <a:xfrm>
-            <a:off x="7635240" y="4184294"/>
-            <a:ext cx="3474720" cy="1466698"/>
+            <a:off x="7543800" y="4389120"/>
+            <a:ext cx="3611880" cy="1261872"/>
           </a:xfrm>
           <a:prstGeom prst="roundRect">
             <a:avLst>
-              <a:gd name="adj" fmla="val 7481"/>
+              <a:gd name="adj" fmla="val 8696"/>
             </a:avLst>
           </a:prstGeom>
           <a:solidFill>
@@ -16410,8 +16416,8 @@
         </p:nvSpPr>
         <p:spPr>
           <a:xfrm>
-            <a:off x="7799832" y="4330598"/>
-            <a:ext cx="3145536" cy="256032"/>
+            <a:off x="7708392" y="4517136"/>
+            <a:ext cx="3282696" cy="228600"/>
           </a:xfrm>
           <a:prstGeom prst="rect">
             <a:avLst/>
@@ -16427,7 +16433,7 @@
               <a:buNone/>
             </a:pPr>
             <a:r>
-              <a:rPr lang="en-US" sz="1300" b="1" dirty="0">
+              <a:rPr lang="en-US" sz="1220" b="1" dirty="0">
                 <a:solidFill>
                   <a:srgbClr val="0068B7"/>
                 </a:solidFill>
@@ -16437,7 +16443,7 @@
               </a:rPr>
               <a:t>Apply it</a:t>
             </a:r>
-            <a:endParaRPr lang="en-US" sz="1300" dirty="0"/>
+            <a:endParaRPr lang="en-US" sz="1220" dirty="0"/>
           </a:p>
         </p:txBody>
       </p:sp>
@@ -16449,8 +16455,8 @@
         </p:nvSpPr>
         <p:spPr>
           <a:xfrm>
-            <a:off x="7799832" y="4659782"/>
-            <a:ext cx="3145536" cy="899770"/>
+            <a:off x="7708392" y="4828032"/>
+            <a:ext cx="3282696" cy="749808"/>
           </a:xfrm>
           <a:prstGeom prst="rect">
             <a:avLst/>
@@ -16468,7 +16474,7 @@
               <a:buNone/>
             </a:pPr>
             <a:r>
-              <a:rPr lang="en-US" sz="1320" dirty="0">
+              <a:rPr lang="en-US" sz="1220" dirty="0">
                 <a:solidFill>
                   <a:srgbClr val="17364A"/>
                 </a:solidFill>
@@ -16476,9 +16482,9 @@
                 <a:ea typeface="Aptos" pitchFamily="34" charset="-122"/>
                 <a:cs typeface="Aptos" pitchFamily="34" charset="-120"/>
               </a:rPr>
-              <a:t>Connect the concept to public health purpose, responsible use, required safeguards, documentation, and the next action a department should take.</a:t>
-            </a:r>
-            <a:endParaRPr lang="en-US" sz="1320" dirty="0"/>
+              <a:t>Connect the concept to public health purpose, responsible use, required.</a:t>
+            </a:r>
+            <a:endParaRPr lang="en-US" sz="1220" dirty="0"/>
           </a:p>
         </p:txBody>
       </p:sp>
@@ -16769,8 +16775,8 @@
         </p:nvSpPr>
         <p:spPr>
           <a:xfrm>
-            <a:off x="868680" y="1508760"/>
-            <a:ext cx="6309360" cy="4160520"/>
+            <a:off x="822960" y="1463040"/>
+            <a:ext cx="6565392" cy="4343400"/>
           </a:xfrm>
           <a:prstGeom prst="rect">
             <a:avLst/>
@@ -16788,7 +16794,7 @@
               <a:buNone/>
             </a:pPr>
             <a:r>
-              <a:rPr lang="en-US" sz="2100" dirty="0">
+              <a:rPr lang="en-US" sz="1920" dirty="0">
                 <a:solidFill>
                   <a:srgbClr val="003A63"/>
                 </a:solidFill>
@@ -16796,16 +16802,16 @@
                 <a:ea typeface="Aptos" pitchFamily="34" charset="-122"/>
                 <a:cs typeface="Aptos" pitchFamily="34" charset="-120"/>
               </a:rPr>
-              <a:t>• A health department receives proposals for five AI uses: a public chatbot, a staff policy.</a:t>
-            </a:r>
-            <a:endParaRPr lang="en-US" sz="2100" dirty="0"/>
-          </a:p>
-          <a:p>
-            <a:pPr indent="0" marL="0">
-              <a:buNone/>
-            </a:pPr>
-            <a:r>
-              <a:rPr lang="en-US" sz="2100" dirty="0">
+              <a:t>• A health department receives proposals for five AI uses: a public chatbot, a.</a:t>
+            </a:r>
+            <a:endParaRPr lang="en-US" sz="1920" dirty="0"/>
+          </a:p>
+          <a:p>
+            <a:pPr indent="0" marL="0">
+              <a:buNone/>
+            </a:pPr>
+            <a:r>
+              <a:rPr lang="en-US" sz="1920" dirty="0">
                 <a:solidFill>
                   <a:srgbClr val="003A63"/>
                 </a:solidFill>
@@ -16815,14 +16821,14 @@
               </a:rPr>
               <a:t>• Each proposal has different benefits and risks.</a:t>
             </a:r>
-            <a:endParaRPr lang="en-US" sz="2100" dirty="0"/>
-          </a:p>
-          <a:p>
-            <a:pPr indent="0" marL="0">
-              <a:buNone/>
-            </a:pPr>
-            <a:r>
-              <a:rPr lang="en-US" sz="2100" dirty="0">
+            <a:endParaRPr lang="en-US" sz="1920" dirty="0"/>
+          </a:p>
+          <a:p>
+            <a:pPr indent="0" marL="0">
+              <a:buNone/>
+            </a:pPr>
+            <a:r>
+              <a:rPr lang="en-US" sz="1920" dirty="0">
                 <a:solidFill>
                   <a:srgbClr val="003A63"/>
                 </a:solidFill>
@@ -16832,7 +16838,7 @@
               </a:rPr>
               <a:t>• A public chatbot may be visible but high-risk if it gives health advice.</a:t>
             </a:r>
-            <a:endParaRPr lang="en-US" sz="2100" dirty="0"/>
+            <a:endParaRPr lang="en-US" sz="1920" dirty="0"/>
           </a:p>
         </p:txBody>
       </p:sp>
@@ -16844,12 +16850,12 @@
         </p:nvSpPr>
         <p:spPr>
           <a:xfrm>
-            <a:off x="7635240" y="1325880"/>
-            <a:ext cx="3474720" cy="1255471"/>
+            <a:off x="7543800" y="1325880"/>
+            <a:ext cx="3611880" cy="1261872"/>
           </a:xfrm>
           <a:prstGeom prst="roundRect">
             <a:avLst>
-              <a:gd name="adj" fmla="val 8740"/>
+              <a:gd name="adj" fmla="val 8696"/>
             </a:avLst>
           </a:prstGeom>
           <a:solidFill>
@@ -16871,8 +16877,8 @@
         </p:nvSpPr>
         <p:spPr>
           <a:xfrm>
-            <a:off x="7799832" y="1472184"/>
-            <a:ext cx="3145536" cy="256032"/>
+            <a:off x="7708392" y="1453896"/>
+            <a:ext cx="3282696" cy="228600"/>
           </a:xfrm>
           <a:prstGeom prst="rect">
             <a:avLst/>
@@ -16888,7 +16894,7 @@
               <a:buNone/>
             </a:pPr>
             <a:r>
-              <a:rPr lang="en-US" sz="1300" b="1" dirty="0">
+              <a:rPr lang="en-US" sz="1220" b="1" dirty="0">
                 <a:solidFill>
                   <a:srgbClr val="0068B7"/>
                 </a:solidFill>
@@ -16898,7 +16904,7 @@
               </a:rPr>
               <a:t>Core concept</a:t>
             </a:r>
-            <a:endParaRPr lang="en-US" sz="1300" dirty="0"/>
+            <a:endParaRPr lang="en-US" sz="1220" dirty="0"/>
           </a:p>
         </p:txBody>
       </p:sp>
@@ -16910,8 +16916,8 @@
         </p:nvSpPr>
         <p:spPr>
           <a:xfrm>
-            <a:off x="7799832" y="1801368"/>
-            <a:ext cx="3145536" cy="688543"/>
+            <a:off x="7708392" y="1764792"/>
+            <a:ext cx="3282696" cy="749808"/>
           </a:xfrm>
           <a:prstGeom prst="rect">
             <a:avLst/>
@@ -16929,7 +16935,7 @@
               <a:buNone/>
             </a:pPr>
             <a:r>
-              <a:rPr lang="en-US" sz="1320" dirty="0">
+              <a:rPr lang="en-US" sz="1220" dirty="0">
                 <a:solidFill>
                   <a:srgbClr val="17364A"/>
                 </a:solidFill>
@@ -16937,9 +16943,9 @@
                 <a:ea typeface="Aptos" pitchFamily="34" charset="-122"/>
                 <a:cs typeface="Aptos" pitchFamily="34" charset="-120"/>
               </a:rPr>
-              <a:t>A health department receives proposals for five AI uses: a public chatbot, a staff policy assistant, an.</a:t>
-            </a:r>
-            <a:endParaRPr lang="en-US" sz="1320" dirty="0"/>
+              <a:t>A health department receives proposals for five AI uses: a public chatbot, a.</a:t>
+            </a:r>
+            <a:endParaRPr lang="en-US" sz="1220" dirty="0"/>
           </a:p>
         </p:txBody>
       </p:sp>
@@ -16951,12 +16957,12 @@
         </p:nvSpPr>
         <p:spPr>
           <a:xfrm>
-            <a:off x="7635240" y="2718511"/>
-            <a:ext cx="3474720" cy="1328623"/>
+            <a:off x="7543800" y="2724912"/>
+            <a:ext cx="3611880" cy="1527048"/>
           </a:xfrm>
           <a:prstGeom prst="roundRect">
             <a:avLst>
-              <a:gd name="adj" fmla="val 8259"/>
+              <a:gd name="adj" fmla="val 7186"/>
             </a:avLst>
           </a:prstGeom>
           <a:solidFill>
@@ -16978,8 +16984,8 @@
         </p:nvSpPr>
         <p:spPr>
           <a:xfrm>
-            <a:off x="7799832" y="2864815"/>
-            <a:ext cx="3145536" cy="256032"/>
+            <a:off x="7708392" y="2852928"/>
+            <a:ext cx="3282696" cy="228600"/>
           </a:xfrm>
           <a:prstGeom prst="rect">
             <a:avLst/>
@@ -16995,7 +17001,7 @@
               <a:buNone/>
             </a:pPr>
             <a:r>
-              <a:rPr lang="en-US" sz="1300" b="1" dirty="0">
+              <a:rPr lang="en-US" sz="1220" b="1" dirty="0">
                 <a:solidFill>
                   <a:srgbClr val="0068B7"/>
                 </a:solidFill>
@@ -17005,7 +17011,7 @@
               </a:rPr>
               <a:t>Concept checkpoints</a:t>
             </a:r>
-            <a:endParaRPr lang="en-US" sz="1300" dirty="0"/>
+            <a:endParaRPr lang="en-US" sz="1220" dirty="0"/>
           </a:p>
         </p:txBody>
       </p:sp>
@@ -17017,8 +17023,8 @@
         </p:nvSpPr>
         <p:spPr>
           <a:xfrm>
-            <a:off x="7818120" y="3230575"/>
-            <a:ext cx="3090672" cy="670255"/>
+            <a:off x="7726680" y="3182112"/>
+            <a:ext cx="3227832" cy="960120"/>
           </a:xfrm>
           <a:prstGeom prst="rect">
             <a:avLst/>
@@ -17036,7 +17042,7 @@
               <a:buNone/>
             </a:pPr>
             <a:r>
-              <a:rPr lang="en-US" sz="1220" dirty="0">
+              <a:rPr lang="en-US" sz="1140" dirty="0">
                 <a:solidFill>
                   <a:srgbClr val="17364A"/>
                 </a:solidFill>
@@ -17044,16 +17050,16 @@
                 <a:ea typeface="Aptos" pitchFamily="34" charset="-122"/>
                 <a:cs typeface="Aptos" pitchFamily="34" charset="-120"/>
               </a:rPr>
-              <a:t>A health department receives proposals for five AI uses: a public.</a:t>
-            </a:r>
-            <a:endParaRPr lang="en-US" sz="1220" dirty="0"/>
-          </a:p>
-          <a:p>
-            <a:pPr indent="0" marL="0">
-              <a:buNone/>
-            </a:pPr>
-            <a:r>
-              <a:rPr lang="en-US" sz="1220" dirty="0">
+              <a:t>A health department receives proposals for five AI.</a:t>
+            </a:r>
+            <a:endParaRPr lang="en-US" sz="1140" dirty="0"/>
+          </a:p>
+          <a:p>
+            <a:pPr indent="0" marL="0">
+              <a:buNone/>
+            </a:pPr>
+            <a:r>
+              <a:rPr lang="en-US" sz="1140" dirty="0">
                 <a:solidFill>
                   <a:srgbClr val="17364A"/>
                 </a:solidFill>
@@ -17061,16 +17067,16 @@
                 <a:ea typeface="Aptos" pitchFamily="34" charset="-122"/>
                 <a:cs typeface="Aptos" pitchFamily="34" charset="-120"/>
               </a:rPr>
-              <a:t>A staff policy assistant may be lower risk if it uses approved.</a:t>
-            </a:r>
-            <a:endParaRPr lang="en-US" sz="1220" dirty="0"/>
-          </a:p>
-          <a:p>
-            <a:pPr indent="0" marL="0">
-              <a:buNone/>
-            </a:pPr>
-            <a:r>
-              <a:rPr lang="en-US" sz="1220" dirty="0">
+              <a:t>A staff policy assistant may be lower risk if it.</a:t>
+            </a:r>
+            <a:endParaRPr lang="en-US" sz="1140" dirty="0"/>
+          </a:p>
+          <a:p>
+            <a:pPr indent="0" marL="0">
+              <a:buNone/>
+            </a:pPr>
+            <a:r>
+              <a:rPr lang="en-US" sz="1140" dirty="0">
                 <a:solidFill>
                   <a:srgbClr val="17364A"/>
                 </a:solidFill>
@@ -17078,9 +17084,9 @@
                 <a:ea typeface="Aptos" pitchFamily="34" charset="-122"/>
                 <a:cs typeface="Aptos" pitchFamily="34" charset="-120"/>
               </a:rPr>
-              <a:t>An outbreak model may be valuable but require strong data quality.</a:t>
-            </a:r>
-            <a:endParaRPr lang="en-US" sz="1220" dirty="0"/>
+              <a:t>An outbreak model may be valuable but require.</a:t>
+            </a:r>
+            <a:endParaRPr lang="en-US" sz="1140" dirty="0"/>
           </a:p>
         </p:txBody>
       </p:sp>
@@ -17092,12 +17098,12 @@
         </p:nvSpPr>
         <p:spPr>
           <a:xfrm>
-            <a:off x="7635240" y="4184294"/>
-            <a:ext cx="3474720" cy="1466698"/>
+            <a:off x="7543800" y="4389120"/>
+            <a:ext cx="3611880" cy="1261872"/>
           </a:xfrm>
           <a:prstGeom prst="roundRect">
             <a:avLst>
-              <a:gd name="adj" fmla="val 7481"/>
+              <a:gd name="adj" fmla="val 8696"/>
             </a:avLst>
           </a:prstGeom>
           <a:solidFill>
@@ -17119,8 +17125,8 @@
         </p:nvSpPr>
         <p:spPr>
           <a:xfrm>
-            <a:off x="7799832" y="4330598"/>
-            <a:ext cx="3145536" cy="256032"/>
+            <a:off x="7708392" y="4517136"/>
+            <a:ext cx="3282696" cy="228600"/>
           </a:xfrm>
           <a:prstGeom prst="rect">
             <a:avLst/>
@@ -17136,7 +17142,7 @@
               <a:buNone/>
             </a:pPr>
             <a:r>
-              <a:rPr lang="en-US" sz="1300" b="1" dirty="0">
+              <a:rPr lang="en-US" sz="1220" b="1" dirty="0">
                 <a:solidFill>
                   <a:srgbClr val="0068B7"/>
                 </a:solidFill>
@@ -17146,7 +17152,7 @@
               </a:rPr>
               <a:t>Apply it</a:t>
             </a:r>
-            <a:endParaRPr lang="en-US" sz="1300" dirty="0"/>
+            <a:endParaRPr lang="en-US" sz="1220" dirty="0"/>
           </a:p>
         </p:txBody>
       </p:sp>
@@ -17158,8 +17164,8 @@
         </p:nvSpPr>
         <p:spPr>
           <a:xfrm>
-            <a:off x="7799832" y="4659782"/>
-            <a:ext cx="3145536" cy="899770"/>
+            <a:off x="7708392" y="4828032"/>
+            <a:ext cx="3282696" cy="749808"/>
           </a:xfrm>
           <a:prstGeom prst="rect">
             <a:avLst/>
@@ -17177,7 +17183,7 @@
               <a:buNone/>
             </a:pPr>
             <a:r>
-              <a:rPr lang="en-US" sz="1320" dirty="0">
+              <a:rPr lang="en-US" sz="1220" dirty="0">
                 <a:solidFill>
                   <a:srgbClr val="17364A"/>
                 </a:solidFill>
@@ -17185,9 +17191,9 @@
                 <a:ea typeface="Aptos" pitchFamily="34" charset="-122"/>
                 <a:cs typeface="Aptos" pitchFamily="34" charset="-120"/>
               </a:rPr>
-              <a:t>Connect the concept to public health purpose, responsible use, required safeguards, documentation, and the next action a department should take.</a:t>
-            </a:r>
-            <a:endParaRPr lang="en-US" sz="1320" dirty="0"/>
+              <a:t>Connect the concept to public health purpose, responsible use, required.</a:t>
+            </a:r>
+            <a:endParaRPr lang="en-US" sz="1220" dirty="0"/>
           </a:p>
         </p:txBody>
       </p:sp>

--- a/downloads/presentations/modules/exe-410.pptx
+++ b/downloads/presentations/modules/exe-410.pptx
@@ -9815,7 +9815,7 @@
                 <a:ea typeface="Aptos" pitchFamily="34" charset="-122"/>
                 <a:cs typeface="Aptos" pitchFamily="34" charset="-120"/>
               </a:rPr>
-              <a:t>• 1. What is the strongest reason this module topic belongs in AI leadership.</a:t>
+              <a:t>1. What is the strongest reason this module topic belongs in AI leadership.</a:t>
             </a:r>
             <a:endParaRPr lang="en-US" sz="1920" dirty="0"/>
           </a:p>
@@ -9832,7 +9832,7 @@
                 <a:ea typeface="Aptos" pitchFamily="34" charset="-122"/>
                 <a:cs typeface="Aptos" pitchFamily="34" charset="-120"/>
               </a:rPr>
-              <a:t>• 2. Which practice best supports accountable public health AI governance?</a:t>
+              <a:t>2. Which practice best supports accountable public health AI governance?</a:t>
             </a:r>
             <a:endParaRPr lang="en-US" sz="1920" dirty="0"/>
           </a:p>
@@ -9849,7 +9849,7 @@
                 <a:ea typeface="Aptos" pitchFamily="34" charset="-122"/>
                 <a:cs typeface="Aptos" pitchFamily="34" charset="-120"/>
               </a:rPr>
-              <a:t>• 3. When should an AI use case be escalated for leadership or governance.</a:t>
+              <a:t>3. When should an AI use case be escalated for leadership or governance.</a:t>
             </a:r>
             <a:endParaRPr lang="en-US" sz="1920" dirty="0"/>
           </a:p>
@@ -9956,7 +9956,7 @@
                 <a:ea typeface="Aptos" pitchFamily="34" charset="-122"/>
                 <a:cs typeface="Aptos" pitchFamily="34" charset="-120"/>
               </a:rPr>
-              <a:t>1. What is the strongest reason this module topic belongs in AI leadership and.</a:t>
+              <a:t>What is the strongest reason this module topic belongs in AI leadership and.</a:t>
             </a:r>
             <a:endParaRPr lang="en-US" sz="1220" dirty="0"/>
           </a:p>
@@ -10063,41 +10063,7 @@
                 <a:ea typeface="Aptos" pitchFamily="34" charset="-122"/>
                 <a:cs typeface="Aptos" pitchFamily="34" charset="-120"/>
               </a:rPr>
-              <a:t>1.</a:t>
-            </a:r>
-            <a:endParaRPr lang="en-US" sz="1140" dirty="0"/>
-          </a:p>
-          <a:p>
-            <a:pPr indent="0" marL="0">
-              <a:buNone/>
-            </a:pPr>
-            <a:r>
-              <a:rPr lang="en-US" sz="1140" dirty="0">
-                <a:solidFill>
-                  <a:srgbClr val="17364A"/>
-                </a:solidFill>
-                <a:latin typeface="Aptos" pitchFamily="34" charset="0"/>
-                <a:ea typeface="Aptos" pitchFamily="34" charset="-122"/>
-                <a:cs typeface="Aptos" pitchFamily="34" charset="-120"/>
-              </a:rPr>
               <a:t>What is the strongest reason this module topic.</a:t>
-            </a:r>
-            <a:endParaRPr lang="en-US" sz="1140" dirty="0"/>
-          </a:p>
-          <a:p>
-            <a:pPr indent="0" marL="0">
-              <a:buNone/>
-            </a:pPr>
-            <a:r>
-              <a:rPr lang="en-US" sz="1140" dirty="0">
-                <a:solidFill>
-                  <a:srgbClr val="17364A"/>
-                </a:solidFill>
-                <a:latin typeface="Aptos" pitchFamily="34" charset="0"/>
-                <a:ea typeface="Aptos" pitchFamily="34" charset="-122"/>
-                <a:cs typeface="Aptos" pitchFamily="34" charset="-120"/>
-              </a:rPr>
-              <a:t>2.</a:t>
             </a:r>
             <a:endParaRPr lang="en-US" sz="1140" dirty="0"/>
           </a:p>
